--- a/GFF_SEOUL_2027_전시산업론_중간과제.pptx
+++ b/GFF_SEOUL_2027_전시산업론_중간과제.pptx
@@ -509,11 +509,11 @@
           <a:p>
             <a:r>
               <a:rPr lang="en-US" dirty="0"/>
-              <a:t>[전시회명] 고프코어 패션 페어 서울 2027(GORPCORE FASHION FAIR SEOUL). 산에서 입던 기능성 아웃도어가 도시의 패션이 된 '고프코어'를 단일 카테고리로 다루는 B2B+B2C 하이브리드 전시회입니다. 2027년 9월 30일(목)~10월 3일(일) 코엑스, 앞 2일은 트레이드 데이, 뒤 2일은 퍼블릭 랩 데이입니다.
+              <a:t>[전시회명] 고프코어 패션 페어 서울 2027(GORPCORE FASHION FAIR SEOUL). 산에서 입던 기능성 아웃도어가 도시의 패션이 된 '고프코어'를 단일 카테고리로 다루는 B2B+B2C 하이브리드 전시회입니다. 2027년 9월 30일(목)~10월 3일(일) 코엑스(가안, 예산·장소 검토는 중간고사 이후 단계), 앞 2일은 트레이드 데이, 뒤 2일은 퍼블릭 랩 데이입니다.
 [기획 배경] 첫째, 시장이 양극화됐습니다. 국내 아웃도어 시장은 2014년 약 7조 원에서 2024년 약 4조 원으로 줄었는데, 2024년 상위 12개 브랜드 중 성장한 곳은 노스페이스(+4.3%), 스노우피크어패럴(+32%), 아크테릭스(+41%) 세 곳뿐이었습니다. 등산복형 브랜드(K2 -8.8%, 블랙야크 -11.7%)는 줄고 패션성이 강한 브랜드만 컸습니다. 즉 수요가 '등산복'에서 '고프코어 패션'으로 이동했습니다.
 둘째, 소비자가 바뀌었습니다. 2026년 최근 1년 등산 경험률은 66.9%이고 20대 64.5%, 30대 62%로 젊은 층의 상승이 두드러집니다. 지그재그에서는 2026년 2~3월 '등산' 검색이 57%, '등산화' 검색이 170% 늘었습니다.
-셋째, 해외 수요가 한국으로 오고 있습니다. 아크테릭스는 2026년 한국에 직진출했고, 무신사가 도쿄에서 연 한국 브랜드 수주 쇼룸에는 빔즈·유나이티드애로우즈 등 일본 편집숍 바이어 200명 이상이 왔으며 주문이 3배 늘었습니다. 문제는 이 거래가 특정 플랫폼의 해외 쇼룸과 팝업으로 흩어져 있고, 국내에는 고프코어 패션 브랜드·바이어·관심 고객을 한 번에 연결하는 중립적인 거래의 장이 없다는 점입니다.
-[기존 전시회와의 차이] SPOEX는 스포츠·레저 용품 전반, 캠핑앤피크닉페어와 고카프는 캠핑 장비 현장판매, 서울패션위크 트레이드쇼는 디자이너 의류 중심이라 '기능+패션'이 빠져 있습니다. 해외 ISPO는 기능 중심이며 출품사가 3,307개(2018)에서 1,937개(2024)로 줄어 2026년 암스테르담으로 이전합니다. 실제로 인터뷰한 마무트 유통 담당자도 코엑스·킨텍스 아웃도어 행사는 '고객 니즈가 달라' 참가하지 않는다고 했습니다. 우리 전시회는 고프코어 패션 단일 카테고리, 사전 매칭 수주상담, 기능을 검증하는 Test Lab과 고객 반응 리포트로 차별화합니다.</a:t>
+셋째, 해외 수요가 한국으로 오고 있습니다. 아크테릭스는 2026년 한국에 직진출했고, 무신사가 도쿄에서 연 한국 브랜드 수주 쇼룸에는 빔즈·유나이티드애로우즈 등 일본 편집숍 바이어 200명 이상이 왔으며 주문이 3배 늘었습니다. 이것은 몇몇 브랜드의 불편이 아니라 산업 구조의 문제입니다. 고프코어 패션 산업이 더 커지려면 브랜드·바이어·관심 고객이 만나는 거래 인프라가 필요한데, 지금은 거래가 특정 플랫폼의 해외 쇼룸과 팝업으로 흩어져 있고 국내에는 중립적인 거래의 장이 없습니다.
+[기존 전시회와의 차이] SPOEX는 스포츠·레저 용품 전반, 캠핑앤피크닉페어와 고카프는 캠핑 장비 현장판매, 서울패션위크 트레이드쇼는 디자이너 의류 중심이라 '기능+패션'이 빠져 있습니다. 해외 ISPO는 기능 중심이며 출품사가 3,307개(2018)에서 1,937개(2024)로 줄어 2026년 암스테르담으로 이전합니다. 실제로 인터뷰한 마무트 유통 담당자도 코엑스·킨텍스 아웃도어 행사는 "고객의 니즈가 다르기 때문에" 참여하지 않는다고 했습니다. 우리 전시회는 고프코어 패션 단일 카테고리, 사전 매칭 수주상담, 기능을 검증하는 Test Lab과 고객 반응 리포트로 차별화합니다.</a:t>
             </a:r>
             <a:endParaRPr lang="en-US" dirty="0"/>
           </a:p>
@@ -601,9 +601,9 @@
           <a:p>
             <a:r>
               <a:rPr lang="en-US" dirty="0"/>
-              <a:t>[미션] 판로가 흩어진 고프코어 패션 브랜드가 맞는 바이어와 깊이 관심 있는 고객을 한 곳에서 만나, 기능의 가치를 제값에 팔 수 있게 연결하는 것이 존재 이유입니다. 대상은 신진 K-고프코어 브랜드와 국내에 들어온 해외 아웃도어 브랜드이고, 해결할 문제는 '바이어 접점의 분산'과 '기능을 설명할 기회의 부족'입니다.
-[비전] 2030년, 아시아 바이어가 다음 시즌 고프코어 트렌드를 사러 서울에 오는 아시아 대표 고프코어 패션 거래 플랫폼이 되는 것입니다. 이달 14일 정부가 발표한 「전시산업 발전 로드맵 2030」은 산업·문화 융합형 대형 전시회 비중을 5%에서 20%로 늘리고 대표 전시회를 5개 이상 키우겠다고 했는데, 섬유·패션 산업과 아웃도어 문화를 묶는 우리 전시회가 바로 그 모델입니다.
-[연결] 앞 장의 세 가지 근거가 그대로 이어집니다. 수요 이동 → 관심 고객 연결(퍼블릭 랩 데이), 바이어 분산 → 맞는 바이어 연결(트레이드 데이), 정책 방향 → 아시아 대표 플랫폼이라는 비전입니다.</a:t>
+              <a:t>[미션] 이 산업에서 문제를 가진 이해관계자는 둘입니다. 신진 K-고프코어 브랜드는 바이어를 만날 창구가 특정 플랫폼의 쇼룸이나 팝업으로 흩어져 있고, 국내에 들어온 해외 아웃도어 브랜드는 비싼 제품의 기능을 깊이 들어줄 고객을 만날 곳이 없습니다. 그래서 미션은 '신진 브랜드에게는 맞는 바이어를, 아웃도어 브랜드에게는 기능을 깊이 들어줄 고객을 한 곳에서 연결해, 고프코어 패션이 제값에 거래되는 장을 만든다'입니다.
+[비전] 2030년, 아시아 바이어가 다음 시즌 고프코어 트렌드를 사러 서울에 오는 아시아 대표 고프코어 패션 거래 플랫폼이 되는 것입니다. 이 전시회가 계속되면 산업이 이렇게 바뀝니다. K-고프코어 브랜드가 국내 플랫폼 입점 경쟁에만 기대지 않고 해외 편집숍과 총판으로 진출하고, 등산복 중심으로 7조에서 4조로 줄어든 아웃도어 산업이 '기능+패션' 수출 산업으로 다시 성장합니다.
+[연결] 이 문제는 몇몇 브랜드의 작은 불편이 아니라 산업 구조의 문제입니다. 고프코어 패션 산업이 더 커지려면 브랜드와 국내외 바이어가 만나는 거래 인프라, 그리고 기능의 가치를 소비자에게 전달할 접점이 필요한데 지금은 둘 다 없습니다. 미션은 이 두 가지를 해결하고, 비전은 그 결과 산업이 수출형으로 커지는 모습입니다. 정부가 이달 14일 발표한 「전시산업 발전 로드맵 2030」도 산업·문화 융합형 대형 전시회를 5%에서 20%로 늘리겠다고 해서 방향이 같습니다.</a:t>
             </a:r>
             <a:endParaRPr lang="en-US" dirty="0"/>
           </a:p>
@@ -692,8 +692,8 @@
             <a:r>
               <a:rPr lang="en-US" dirty="0"/>
               <a:t>목표는 모두 '제1회 폐막일인 2027년 10월 3일'까지로 기한을 정했고, 숫자는 실제 비교 전시회 실적에서 가져왔습니다.
-[목표 1 참가업체] 고프코어 패션 브랜드 120개사, 200부스. 그중 신진 K-브랜드를 60개사 이상으로 해서 '발굴' 기능을 지킵니다. 서울패션위크 트레이드쇼가 130개 브랜드, 캠핑앤피크닉페어가 116개사이므로 단일 카테고리 첫 회로 달성 가능한 규모입니다. SPOEX 수준인 300개사는 3회차 목표로 둡니다.
-[목표 2 거래] 사전 인증 바이어 300명(해외 100명), 1:1 매칭 상담 1,200건(브랜드당 10건), 수주상담액 700만 달러. 서울패션위크 트레이드쇼가 바이어 300명으로 671만 달러를 기록했고, 무신사 도쿄 쇼룸에는 해외 바이어만 200명 이상이 왔습니다. KOTRA 초청을 연계하면 해외 100명은 현실적입니다. 폐막 3개월 뒤 실제 계약 전환율까지 추적합니다.
+[목표 1 참가업체] 고프코어 패션 브랜드 120개사, 200부스. 그중 신진 K-브랜드를 60개사 이상으로 해서 '발굴' 기능을 지키고, 2029년 3회차에는 300개사로 2.5배 키웁니다. 서울패션위크 트레이드쇼가 130개 브랜드, 캠핑앤피크닉페어가 116개사이므로 단일 카테고리 첫 회로 달성 가능한 규모입니다. SPOEX 수준인 300개사는 3회차 목표로 둡니다.
+[목표 2 거래] 사전 인증 바이어 300명(해외 100명), 1:1 매칭 상담 1,200건(브랜드당 10건), 수주상담액 700만 달러. 서울패션위크 트레이드쇼가 바이어 300명으로 671만 달러를 기록했고, 무신사 도쿄 쇼룸에는 해외 바이어만 200명 이상이 왔습니다. KOTRA 초청을 연계하면 해외 100명은 현실적입니다. 폐막 3개월 뒤 실제 계약 전환율까지 추적합니다. 거래 성과가 나오지 않으면 참가업체가 다음 해에 돌아오지 않아 전시회가 존속할 수 없기 때문에 이 목표가 가장 중요합니다.
 [목표 3 관심 고객 경험] 퍼블릭 랩 데이 사전등록 관람객 2만 명, 그중 50% 이상이 Test Lab을 체험하고, 참가업체의 '고객 반응' 만족도 4.0/5 이상. 인터뷰에서 브랜드가 말한 성공 기준이 '고객의 반응'이었기 때문에 관람객 수보다 체험률과 반응 만족도를 핵심 지표로 삼았습니다. 일본 FIELDSTYLE이 2일간 4.8만 명, SPOEX가 4일간 4.7만 명이므로 2일 2만 명은 보수적인 목표입니다.</a:t>
             </a:r>
             <a:endParaRPr lang="en-US" dirty="0"/>
@@ -782,9 +782,10 @@
           <a:p>
             <a:r>
               <a:rPr lang="en-US" dirty="0"/>
-              <a:t>고프코어 패션 산업은 다섯 단계로 흐릅니다. 위쪽 회색 화살표는 제품의 흐름이고 아래쪽 주황 화살표는 돈의 흐름입니다.
-① 소재·부자재: 고어텍스, 폴라텍 같은 기능성 원단과 효성티앤씨·코오롱인더스트리 같은 국내 소재사, YKK 지퍼와 비브람 밑창이 여기에 있습니다. ② 생산: 영원무역처럼 해외 브랜드 제품을 만드는 OEM 기업입니다. 흥미로운 점은 영원무역이 OEM과 동시에 노스페이스의 국내 유통까지 맡아 ②와 ③을 겸한다는 것입니다. ③ 브랜드·기획: 아크테릭스·살로몬·마무트 같은 해외 브랜드와 노스페이스, 스노우피크어패럴, 그리고 케일·산산기어·제로그램 같은 K-고프코어 브랜드입니다. ④ 유통: 무신사·29CM 같은 플랫폼, 백화점, 국내외 편집숍입니다. ⑤ 소비자: 2030 도시 소비자와 하이킹·러닝 크루, 그리고 크림 같은 리세일 시장까지입니다.
-[범위] 우리 전시회는 ③ 브랜드와 ④ 바이어 사이의 거래(트레이드 데이), ③과 ⑤ 소비자 사이의 경험(퍼블릭 랩 데이)을 핵심 범위로 하고, ① 소재는 스폰서형 소재 랩으로만 부분 포함합니다. ② 생산은 제외합니다. 이유는 세 가지입니다. 첫째, 고프코어의 가격 프리미엄은 브랜드 스토리, 기능 검증, 유통 입점에서 결정됩니다. 둘째, 소재와 OEM 거래는 섬유산업연합회의 '프리뷰 인 서울'(코엑스, 약 500개사)이 이미 다루고 있어 겹치지 않게 했습니다. 셋째, 인터뷰에서 브랜드가 원한 성과가 '관심 고객의 반응'이었습니다.</a:t>
+              <a:t>고프코어 패션 산업은 다섯 단계로 흐르고, 그 사이를 물류와 마케팅 서비스가 잇습니다. 위쪽 회색 화살표는 제품의 흐름, 아래쪽 주황 화살표는 돈의 흐름입니다.
+① 소재·부자재: 고어텍스, 폴라텍 같은 기능성 원단과 효성티앤씨·코오롱인더스트리 같은 국내 소재사, YKK 지퍼와 비브람 밑창입니다. ② 생산: 영원무역 같은 OEM 기업입니다. 영원무역은 OEM과 동시에 노스페이스의 국내 유통까지 맡아 ②와 ③을 겸합니다. ③ 브랜드·기획: 아크테릭스·살로몬·마무트 같은 해외 브랜드, 노스페이스·스노우피크어패럴, 그리고 케일·산산기어·제로그램 같은 K-고프코어 브랜드입니다. ④ 유통: 무신사·29CM 같은 플랫폼, 백화점, 국내외 편집숍입니다. ⑤ 소비자: 2030 도시 소비자, 하이킹·러닝 크루, 크림 같은 리세일 시장입니다.
+단계 사이에는 무신사 로지스틱스나 CJ대한통운 '더 풀필' 같은 패션 풀필먼트, 인플루언서·모델과 PR 에이전시 같은 마케팅 서비스가 있고, 그 바깥을 시험기관·미디어·협회·정부가 받치고 있습니다.
+[범위] 핵심 범위는 ③ 브랜드와 ④ 바이어 사이의 거래(트레이드 데이), ③과 ⑤ 소비자 사이의 경험(퍼블릭 랩 데이)입니다. ① 소재는 스폰서형 소재 랩, 물류·마케팅은 서비스관으로 부분 포함하고, ② 생산은 제외합니다. 고프코어의 가격 프리미엄이 브랜드 스토리·기능 검증·유통 입점에서 결정되고, 소재·OEM 거래는 섬유산업연합회의 '프리뷰 인 서울'이 이미 다루고 있으며, 물류·마케팅사는 신진 브랜드의 해외 진출을 돕는 조력자이기 때문입니다.</a:t>
             </a:r>
             <a:endParaRPr lang="en-US" dirty="0"/>
           </a:p>
@@ -872,9 +873,9 @@
           <a:p>
             <a:r>
               <a:rPr lang="en-US" dirty="0"/>
-              <a:t>[참가업체] 네 그룹입니다. A는 아크테릭스·살로몬·마무트·살레와 같은 해외 프리미엄 브랜드의 국내 법인이나 수입사, B는 케일·산산기어·제로그램 같은 K-고프코어 브랜드, C는 노스페이스·코오롱스포츠·스노우피크어패럴 같은 국내 대형사의 고프코어 라인, D는 고어텍스·폴라텍·효성티앤씨 같은 기능성 소재사입니다.
+              <a:t>[참가업체] 다섯 그룹입니다. A는 아크테릭스·살로몬·마무트·살레와 같은 해외 프리미엄 브랜드의 국내 법인이나 수입사, B는 케일·산산기어·제로그램 같은 K-고프코어 브랜드, C는 노스페이스·코오롱스포츠·스노우피크어패럴 같은 국내 대형사의 고프코어 라인, D는 고어텍스·폴라텍·효성티앤씨 같은 기능성 소재사, E는 CJ대한통운 '더 풀필'·무신사 로지스틱스 같은 물류·풀필먼트와 마케팅 대행사입니다. D와 E는 브랜드를 고객으로 하는 참가업체입니다.
 [바이어] 무신사·29CM·크림 같은 온라인 플랫폼 MD, 백화점 아웃도어 바이어, 웍스아웃이나 일본 1LDK·빔즈, 영국 END. 같은 국내외 편집숍, 이토추·센트럴 같은 해외 총판, 그리고 퍼블릭 랩 데이의 관심 소비자입니다.
-[연결] 중요한 발견은 참가업체마다 원하는 상대가 다르다는 것입니다. 인터뷰한 마무트 유통 담당자는 바이어 미팅이나 현장판매는 의미가 적고, 고가 제품의 장점을 깊게 들어줄 고객이 필요하다고 했습니다. 그래서 A그룹은 퍼블릭 랩 데이의 관심 고객과 연결하고, 판로가 필요한 B그룹은 플랫폼·편집숍 바이어와 수주로, C그룹은 해외 총판과, D그룹은 참가 브랜드의 기획·소싱팀과 연결합니다. 이렇게 그룹별로 다른 가치를 주는 것이 하이브리드 구성을 택한 이유입니다.</a:t>
+[연결] 참가업체마다 원하는 상대가 다릅니다. 인터뷰한 마무트 유통 담당자는 바이어 미팅이나 현장판매는 의미가 적고, 장비의 장점을 관심 깊게 들어줄 고객이 필요하다고 했습니다. 그래서 A그룹은 관심 고객과, 판로가 필요한 B그룹은 플랫폼·편집숍 바이어와, C그룹은 해외 총판과, D·E그룹은 참가 브랜드와 연결합니다. 교수님이 예로 드신 '유통 물류를 바꿔 마진을 늘리는' 거래가 E그룹입니다.</a:t>
             </a:r>
             <a:endParaRPr lang="en-US" dirty="0"/>
           </a:p>
@@ -1052,7 +1053,7 @@
           <a:p>
             <a:r>
               <a:rPr lang="en-US" dirty="0"/>
-              <a:t>참가업체 측 검증은 아웃도어 브랜드 유통·판매를 맡고 있는 손호영 님(마이기어 운영, 제로그램·아울렛·마무트 종로점 운영)과 진행했습니다. 처음 세운 가정 네 가지 중 세 가지가 틀렸고, 그 결과로 Test Lab, 관심도 KPI, 참가업체 목적별 분리, 콘텐츠 파트너 지원을 기획에 넣었습니다.</a:t>
+              <a:t>참가업체 측 검증은 아웃도어 브랜드 유통·판매를 맡고 있는 손호영 님(마이기어 운영, 제로그램·아울렛·마무트 종로점 운영)과 진행했습니다. 처음 세운 가정 네 가지 중 세 가지가 틀렸고, 그 결과로 Test Lab, 관심도 KPI, 참가업체 목적별 분리, 콘텐츠 파트너 지원을 기획에 넣었습니다. 가장 중요한 발언은 성공 기준을 묻자 '고객의 반응이겠죠'라고 답한 것과, 현장 판매보다 장비의 장점을 관심 깊게 들어줄 고객이 필요하다고 한 부분입니다.</a:t>
             </a:r>
             <a:endParaRPr lang="en-US" dirty="0"/>
           </a:p>
@@ -1947,7 +1948,7 @@
                 <a:ea typeface="Noto Sans KR" pitchFamily="34" charset="-122"/>
                 <a:cs typeface="Noto Sans KR" pitchFamily="34" charset="-120"/>
               </a:rPr>
-              <a:t>2027. 9. 30(목)~10. 3(일) · 코엑스 · 트레이드 데이(B2B) 2일 + 퍼블릭 랩 데이(B2C) 2일</a:t>
+              <a:t>2027. 9. 30(목)~10. 3(일) · 코엑스(가안) · 트레이드 데이(B2B) 2일 + 퍼블릭 랩 데이(B2C) 2일</a:t>
             </a:r>
             <a:endParaRPr lang="en-US" sz="1050" dirty="0"/>
           </a:p>
@@ -2503,7 +2504,7 @@
                 <a:ea typeface="Noto Sans KR" pitchFamily="34" charset="-122"/>
                 <a:cs typeface="Noto Sans KR" pitchFamily="34" charset="-120"/>
               </a:rPr>
-              <a:t>문제  </a:t>
+              <a:t>산업 구조의 문제  </a:t>
             </a:r>
             <a:pPr indent="0" marL="0">
               <a:buNone/>
@@ -2517,7 +2518,7 @@
                 <a:ea typeface="Noto Sans KR" pitchFamily="34" charset="-122"/>
                 <a:cs typeface="Noto Sans KR" pitchFamily="34" charset="-120"/>
               </a:rPr>
-              <a:t>커지는 고프코어 '패션' 수요를 브랜드·바이어·관심 고객이 한 번에 만나는 국내 거래 플랫폼이 없다 → 수주는 특정 플랫폼의 해외 쇼룸·팝업으로 흩어진다</a:t>
+              <a:t>고프코어 패션 산업이 더 커지려면 브랜드·바이어·관심 고객이 만나는 거래 인프라가 필요한데 국내엔 없다 → 수주는 특정 플랫폼의 해외 쇼룸·팝업으로 흩어지고, 브랜드는 기능을 설명할 곳이 없다</a:t>
             </a:r>
             <a:endParaRPr lang="en-US" sz="1100" dirty="0"/>
           </a:p>
@@ -2934,7 +2935,7 @@
                           <a:ea typeface="Noto Sans KR" pitchFamily="34" charset="-122"/>
                           <a:cs typeface="Noto Sans KR" pitchFamily="34" charset="-120"/>
                         </a:rPr>
-                        <a:t>캠핑 장비 현장판매 중심 (인터뷰: "고객 니즈가 달라 불참")</a:t>
+                        <a:t>캠핑 장비 현장판매 중심 (인터뷰: 고객 니즈가 달라 불참)</a:t>
                       </a:r>
                       <a:endParaRPr lang="en-US" sz="850" dirty="0">
                         <a:latin typeface="Noto Sans KR" charset="0"/>
@@ -3704,7 +3705,7 @@
                 <a:ea typeface="Noto Sans KR" pitchFamily="34" charset="-122"/>
                 <a:cs typeface="Noto Sans KR" pitchFamily="34" charset="-120"/>
               </a:rPr>
-              <a:t>출처: 산업통상부 「전시산업 발전 로드맵 2030」(2026.10.14 경제관계장관회의, 산업·문화 융합형 대형 전시회 비중 5%→20%, 국가·지역 대표 전시회 5개 이상) · 무신사 뉴스룸(2024.7.17) · TENANT news(2025) · 참가업체 측 인터뷰(2026.10.17)</a:t>
+              <a:t>출처: 산업통상부 「전시산업 발전 로드맵 2030」(2026.10.14 경제관계장관회의, 산업·문화 융합형 대형 전시회 비중 5%→20%, 국가·지역 대표 전시회 5개 이상) · 무신사 뉴스룸(2024.7.17, 도쿄 쇼룸) · Houyhnhnm·END.(케일 해외 판매) · TENANT news(2025) · 뉴데일리(2025.4.11) · 참가업체 측 인터뷰(2026.10.17)</a:t>
             </a:r>
             <a:endParaRPr lang="en-US" sz="850" dirty="0"/>
           </a:p>
@@ -3718,7 +3719,7 @@
         </p:nvSpPr>
         <p:spPr>
           <a:xfrm>
-            <a:off x="612648" y="1965960"/>
+            <a:off x="612648" y="1938528"/>
             <a:ext cx="2606040" cy="365760"/>
           </a:xfrm>
           <a:prstGeom prst="rect">
@@ -3757,7 +3758,7 @@
         </p:nvSpPr>
         <p:spPr>
           <a:xfrm>
-            <a:off x="612648" y="2286000"/>
+            <a:off x="612648" y="2258568"/>
             <a:ext cx="2606040" cy="274320"/>
           </a:xfrm>
           <a:prstGeom prst="rect">
@@ -3796,12 +3797,12 @@
         </p:nvSpPr>
         <p:spPr>
           <a:xfrm>
-            <a:off x="3383280" y="1901952"/>
-            <a:ext cx="8183880" cy="1143000"/>
+            <a:off x="3383280" y="1874520"/>
+            <a:ext cx="8183880" cy="1024128"/>
           </a:xfrm>
           <a:prstGeom prst="roundRect">
             <a:avLst>
-              <a:gd name="adj" fmla="val 4800"/>
+              <a:gd name="adj" fmla="val 5357"/>
             </a:avLst>
           </a:prstGeom>
           <a:solidFill>
@@ -3818,8 +3819,8 @@
         </p:nvSpPr>
         <p:spPr>
           <a:xfrm>
-            <a:off x="3566160" y="1956816"/>
-            <a:ext cx="7818120" cy="1051560"/>
+            <a:off x="3566160" y="1911096"/>
+            <a:ext cx="7818120" cy="950976"/>
           </a:xfrm>
           <a:prstGeom prst="rect">
             <a:avLst/>
@@ -3833,12 +3834,12 @@
           <a:p>
             <a:pPr indent="0" marL="0">
               <a:spcAft>
-                <a:spcPts val="600"/>
+                <a:spcPts val="500"/>
               </a:spcAft>
               <a:buNone/>
             </a:pPr>
             <a:r>
-              <a:rPr lang="en-US" sz="1550" b="1" dirty="0">
+              <a:rPr lang="en-US" sz="1400" b="1" dirty="0">
                 <a:solidFill>
                   <a:srgbClr val="182F48"/>
                 </a:solidFill>
@@ -3846,19 +3847,19 @@
                 <a:ea typeface="Noto Sans KR" pitchFamily="34" charset="-122"/>
                 <a:cs typeface="Noto Sans KR" pitchFamily="34" charset="-120"/>
               </a:rPr>
-              <a:t>판로가 흩어진 고프코어 패션 브랜드가 '맞는 바이어'와 '깊이 관심 있는 고객'을 한 곳에서 만나, 기능의 가치를 제값에 팔 수 있게 연결한다.</a:t>
-            </a:r>
-            <a:endParaRPr lang="en-US" sz="1550" dirty="0"/>
+              <a:t>신진 K-고프코어 브랜드에게는 '맞는 바이어'를, 아웃도어 브랜드에게는 '기능을 깊이 들어줄 고객'을 한 곳에서 연결해 고프코어 패션이 제값에 거래되는 장을 만든다.</a:t>
+            </a:r>
+            <a:endParaRPr lang="en-US" sz="1400" dirty="0"/>
           </a:p>
           <a:p>
             <a:pPr indent="0" marL="0">
               <a:spcAft>
-                <a:spcPts val="600"/>
+                <a:spcPts val="500"/>
               </a:spcAft>
               <a:buNone/>
             </a:pPr>
             <a:r>
-              <a:rPr lang="en-US" sz="1050" b="1" dirty="0">
+              <a:rPr lang="en-US" sz="1000" b="1" dirty="0">
                 <a:solidFill>
                   <a:srgbClr val="267D86"/>
                 </a:solidFill>
@@ -3870,12 +3871,12 @@
             </a:r>
             <a:pPr indent="0" marL="0">
               <a:spcAft>
-                <a:spcPts val="600"/>
+                <a:spcPts val="500"/>
               </a:spcAft>
               <a:buNone/>
             </a:pPr>
             <a:r>
-              <a:rPr lang="en-US" sz="1050" dirty="0">
+              <a:rPr lang="en-US" sz="1000" dirty="0">
                 <a:solidFill>
                   <a:srgbClr val="334155"/>
                 </a:solidFill>
@@ -3883,16 +3884,16 @@
                 <a:ea typeface="Noto Sans KR" pitchFamily="34" charset="-122"/>
                 <a:cs typeface="Noto Sans KR" pitchFamily="34" charset="-120"/>
               </a:rPr>
-              <a:t>신진 K-고프코어 브랜드 · 국내 진출 해외 아웃도어 브랜드      </a:t>
+              <a:t>신진 K-고프코어 브랜드 · 국내 진출 해외 아웃도어 브랜드     </a:t>
             </a:r>
             <a:pPr indent="0" marL="0">
               <a:spcAft>
-                <a:spcPts val="600"/>
+                <a:spcPts val="500"/>
               </a:spcAft>
               <a:buNone/>
             </a:pPr>
             <a:r>
-              <a:rPr lang="en-US" sz="1050" b="1" dirty="0">
+              <a:rPr lang="en-US" sz="1000" b="1" dirty="0">
                 <a:solidFill>
                   <a:srgbClr val="267D86"/>
                 </a:solidFill>
@@ -3904,12 +3905,12 @@
             </a:r>
             <a:pPr indent="0" marL="0">
               <a:spcAft>
-                <a:spcPts val="600"/>
+                <a:spcPts val="500"/>
               </a:spcAft>
               <a:buNone/>
             </a:pPr>
             <a:r>
-              <a:rPr lang="en-US" sz="1050" dirty="0">
+              <a:rPr lang="en-US" sz="1000" dirty="0">
                 <a:solidFill>
                   <a:srgbClr val="334155"/>
                 </a:solidFill>
@@ -3917,9 +3918,9 @@
                 <a:ea typeface="Noto Sans KR" pitchFamily="34" charset="-122"/>
                 <a:cs typeface="Noto Sans KR" pitchFamily="34" charset="-120"/>
               </a:rPr>
-              <a:t>바이어 접점 분산 · 기능을 설명할 기회 부족</a:t>
-            </a:r>
-            <a:endParaRPr lang="en-US" sz="1550" dirty="0"/>
+              <a:t>바이어 창구가 플랫폼별로 흩어짐 · 기능을 들어줄 관심 고객 접점 부족</a:t>
+            </a:r>
+            <a:endParaRPr lang="en-US" sz="1400" dirty="0"/>
           </a:p>
         </p:txBody>
       </p:sp>
@@ -3931,7 +3932,7 @@
         </p:nvSpPr>
         <p:spPr>
           <a:xfrm>
-            <a:off x="612648" y="3246120"/>
+            <a:off x="612648" y="3081528"/>
             <a:ext cx="2606040" cy="365760"/>
           </a:xfrm>
           <a:prstGeom prst="rect">
@@ -3970,7 +3971,7 @@
         </p:nvSpPr>
         <p:spPr>
           <a:xfrm>
-            <a:off x="612648" y="3566160"/>
+            <a:off x="612648" y="3401568"/>
             <a:ext cx="2606040" cy="274320"/>
           </a:xfrm>
           <a:prstGeom prst="rect">
@@ -4009,12 +4010,12 @@
         </p:nvSpPr>
         <p:spPr>
           <a:xfrm>
-            <a:off x="3383280" y="3182112"/>
-            <a:ext cx="8183880" cy="1143000"/>
+            <a:off x="3383280" y="3017520"/>
+            <a:ext cx="8183880" cy="1261872"/>
           </a:xfrm>
           <a:prstGeom prst="roundRect">
             <a:avLst>
-              <a:gd name="adj" fmla="val 4800"/>
+              <a:gd name="adj" fmla="val 4348"/>
             </a:avLst>
           </a:prstGeom>
           <a:solidFill>
@@ -4031,8 +4032,8 @@
         </p:nvSpPr>
         <p:spPr>
           <a:xfrm>
-            <a:off x="3566160" y="3236976"/>
-            <a:ext cx="7818120" cy="1051560"/>
+            <a:off x="3566160" y="3054096"/>
+            <a:ext cx="7818120" cy="1188720"/>
           </a:xfrm>
           <a:prstGeom prst="rect">
             <a:avLst/>
@@ -4046,12 +4047,12 @@
           <a:p>
             <a:pPr indent="0" marL="0">
               <a:spcAft>
-                <a:spcPts val="600"/>
+                <a:spcPts val="500"/>
               </a:spcAft>
               <a:buNone/>
             </a:pPr>
             <a:r>
-              <a:rPr lang="en-US" sz="1550" b="1" dirty="0">
+              <a:rPr lang="en-US" sz="1400" b="1" dirty="0">
                 <a:solidFill>
                   <a:srgbClr val="FFFFFF"/>
                 </a:solidFill>
@@ -4061,17 +4062,17 @@
               </a:rPr>
               <a:t>2030년, 아시아 바이어가 다음 시즌 고프코어 트렌드를 사러 서울에 오는 '아시아 대표 고프코어 패션 거래 플랫폼'이 된다.</a:t>
             </a:r>
-            <a:endParaRPr lang="en-US" sz="1550" dirty="0"/>
+            <a:endParaRPr lang="en-US" sz="1400" dirty="0"/>
           </a:p>
           <a:p>
             <a:pPr indent="0" marL="0">
               <a:spcAft>
-                <a:spcPts val="600"/>
+                <a:spcPts val="500"/>
               </a:spcAft>
               <a:buNone/>
             </a:pPr>
             <a:r>
-              <a:rPr lang="en-US" sz="1050" dirty="0">
+              <a:rPr lang="en-US" sz="1000" b="1" dirty="0">
                 <a:solidFill>
                   <a:srgbClr val="9FE0E6"/>
                 </a:solidFill>
@@ -4079,9 +4080,26 @@
                 <a:ea typeface="Noto Sans KR" pitchFamily="34" charset="-122"/>
                 <a:cs typeface="Noto Sans KR" pitchFamily="34" charset="-120"/>
               </a:rPr>
-              <a:t>정부 「전시산업 발전 로드맵 2030」의 산업(섬유·패션) × 문화(아웃도어 라이프스타일) 융합형 대표 전시회 모델</a:t>
-            </a:r>
-            <a:endParaRPr lang="en-US" sz="1550" dirty="0"/>
+              <a:t>산업 변화  </a:t>
+            </a:r>
+            <a:pPr indent="0" marL="0">
+              <a:spcAft>
+                <a:spcPts val="500"/>
+              </a:spcAft>
+              <a:buNone/>
+            </a:pPr>
+            <a:r>
+              <a:rPr lang="en-US" sz="1000" dirty="0">
+                <a:solidFill>
+                  <a:srgbClr val="FFFFFF"/>
+                </a:solidFill>
+                <a:latin typeface="Noto Sans KR" pitchFamily="34" charset="0"/>
+                <a:ea typeface="Noto Sans KR" pitchFamily="34" charset="-122"/>
+                <a:cs typeface="Noto Sans KR" pitchFamily="34" charset="-120"/>
+              </a:rPr>
+              <a:t>K-고프코어 브랜드가 국내 플랫폼 입점 경쟁에만 기대지 않고 해외 편집숍·총판으로 진출하고, 등산복 중심으로 줄어든 아웃도어 산업이 '기능 + 패션' 수출 산업으로 다시 성장한다</a:t>
+            </a:r>
+            <a:endParaRPr lang="en-US" sz="1400" dirty="0"/>
           </a:p>
         </p:txBody>
       </p:sp>
@@ -4093,7 +4111,7 @@
         </p:nvSpPr>
         <p:spPr>
           <a:xfrm>
-            <a:off x="612648" y="4526280"/>
+            <a:off x="612648" y="4434840"/>
             <a:ext cx="2606040" cy="365760"/>
           </a:xfrm>
           <a:prstGeom prst="rect">
@@ -4132,7 +4150,7 @@
         </p:nvSpPr>
         <p:spPr>
           <a:xfrm>
-            <a:off x="612648" y="4846320"/>
+            <a:off x="612648" y="4754880"/>
             <a:ext cx="2606040" cy="457200"/>
           </a:xfrm>
           <a:prstGeom prst="rect">
@@ -4165,18 +4183,113 @@
       </p:sp>
       <p:sp>
         <p:nvSpPr>
-          <p:cNvPr id="17" name="연결 배경 1"/>
+          <p:cNvPr id="17" name="연결 서술"/>
+          <p:cNvSpPr txBox="1"/>
+          <p:nvPr/>
+        </p:nvSpPr>
+        <p:spPr>
+          <a:xfrm>
+            <a:off x="3383280" y="4389120"/>
+            <a:ext cx="8183880" cy="438912"/>
+          </a:xfrm>
+          <a:prstGeom prst="rect">
+            <a:avLst/>
+          </a:prstGeom>
+          <a:noFill/>
+          <a:ln/>
+        </p:spPr>
+        <p:txBody>
+          <a:bodyPr wrap="square" lIns="0" tIns="0" rIns="0" bIns="0" rtlCol="0" anchor="ctr"/>
+          <a:lstStyle/>
+          <a:p>
+            <a:pPr indent="0" marL="0">
+              <a:buNone/>
+            </a:pPr>
+            <a:r>
+              <a:rPr lang="en-US" sz="1000" dirty="0">
+                <a:solidFill>
+                  <a:srgbClr val="334155"/>
+                </a:solidFill>
+                <a:latin typeface="Noto Sans KR" pitchFamily="34" charset="0"/>
+                <a:ea typeface="Noto Sans KR" pitchFamily="34" charset="-122"/>
+                <a:cs typeface="Noto Sans KR" pitchFamily="34" charset="-120"/>
+              </a:rPr>
+              <a:t>고프코어 패션 산업이 더 커지려면 </a:t>
+            </a:r>
+            <a:pPr indent="0" marL="0">
+              <a:buNone/>
+            </a:pPr>
+            <a:r>
+              <a:rPr lang="en-US" sz="1000" b="1" dirty="0">
+                <a:solidFill>
+                  <a:srgbClr val="182F48"/>
+                </a:solidFill>
+                <a:latin typeface="Noto Sans KR" pitchFamily="34" charset="0"/>
+                <a:ea typeface="Noto Sans KR" pitchFamily="34" charset="-122"/>
+                <a:cs typeface="Noto Sans KR" pitchFamily="34" charset="-120"/>
+              </a:rPr>
+              <a:t>① 브랜드와 국내외 바이어가 만나는 거래 인프라</a:t>
+            </a:r>
+            <a:pPr indent="0" marL="0">
+              <a:buNone/>
+            </a:pPr>
+            <a:r>
+              <a:rPr lang="en-US" sz="1000" dirty="0">
+                <a:solidFill>
+                  <a:srgbClr val="334155"/>
+                </a:solidFill>
+                <a:latin typeface="Noto Sans KR" pitchFamily="34" charset="0"/>
+                <a:ea typeface="Noto Sans KR" pitchFamily="34" charset="-122"/>
+                <a:cs typeface="Noto Sans KR" pitchFamily="34" charset="-120"/>
+              </a:rPr>
+              <a:t>와 </a:t>
+            </a:r>
+            <a:pPr indent="0" marL="0">
+              <a:buNone/>
+            </a:pPr>
+            <a:r>
+              <a:rPr lang="en-US" sz="1000" b="1" dirty="0">
+                <a:solidFill>
+                  <a:srgbClr val="182F48"/>
+                </a:solidFill>
+                <a:latin typeface="Noto Sans KR" pitchFamily="34" charset="0"/>
+                <a:ea typeface="Noto Sans KR" pitchFamily="34" charset="-122"/>
+                <a:cs typeface="Noto Sans KR" pitchFamily="34" charset="-120"/>
+              </a:rPr>
+              <a:t>② 기능의 가치를 소비자에게 전달할 접점</a:t>
+            </a:r>
+            <a:pPr indent="0" marL="0">
+              <a:buNone/>
+            </a:pPr>
+            <a:r>
+              <a:rPr lang="en-US" sz="1000" dirty="0">
+                <a:solidFill>
+                  <a:srgbClr val="334155"/>
+                </a:solidFill>
+                <a:latin typeface="Noto Sans KR" pitchFamily="34" charset="0"/>
+                <a:ea typeface="Noto Sans KR" pitchFamily="34" charset="-122"/>
+                <a:cs typeface="Noto Sans KR" pitchFamily="34" charset="-120"/>
+              </a:rPr>
+              <a:t>이 필요한데 지금은 둘 다 없다(산업 구조의 문제). 미션이 이 둘을 해결하고, 비전은 그 결과 산업이 수출형으로 커지는 모습이다.</a:t>
+            </a:r>
+            <a:endParaRPr lang="en-US" sz="1000" dirty="0"/>
+          </a:p>
+        </p:txBody>
+      </p:sp>
+      <p:sp>
+        <p:nvSpPr>
+          <p:cNvPr id="18" name="연결 배경 1"/>
           <p:cNvSpPr/>
           <p:nvPr/>
         </p:nvSpPr>
         <p:spPr>
           <a:xfrm>
-            <a:off x="3383280" y="4480560"/>
-            <a:ext cx="3246120" cy="493776"/>
+            <a:off x="3383280" y="4873752"/>
+            <a:ext cx="3246120" cy="420624"/>
           </a:xfrm>
           <a:prstGeom prst="roundRect">
             <a:avLst>
-              <a:gd name="adj" fmla="val 11111"/>
+              <a:gd name="adj" fmla="val 13043"/>
             </a:avLst>
           </a:prstGeom>
           <a:solidFill>
@@ -4187,14 +4300,14 @@
       </p:sp>
       <p:sp>
         <p:nvSpPr>
-          <p:cNvPr id="18" name="연결 배경 문구 1"/>
+          <p:cNvPr id="19" name="연결 배경 문구 1"/>
           <p:cNvSpPr txBox="1"/>
           <p:nvPr/>
         </p:nvSpPr>
         <p:spPr>
           <a:xfrm>
-            <a:off x="3474720" y="4480560"/>
-            <a:ext cx="3063240" cy="493776"/>
+            <a:off x="3474720" y="4873752"/>
+            <a:ext cx="3063240" cy="420624"/>
           </a:xfrm>
           <a:prstGeom prst="rect">
             <a:avLst/>
@@ -4210,7 +4323,7 @@
               <a:buNone/>
             </a:pPr>
             <a:r>
-              <a:rPr lang="en-US" sz="950" dirty="0">
+              <a:rPr lang="en-US" sz="900" dirty="0">
                 <a:solidFill>
                   <a:srgbClr val="334155"/>
                 </a:solidFill>
@@ -4220,19 +4333,19 @@
               </a:rPr>
               <a:t>배경 ① 수요가 등산복→고프코어 패션으로 이동, 기존 전시는 캠핑·용품 중심</a:t>
             </a:r>
-            <a:endParaRPr lang="en-US" sz="950" dirty="0"/>
+            <a:endParaRPr lang="en-US" sz="900" dirty="0"/>
           </a:p>
         </p:txBody>
       </p:sp>
       <p:sp>
         <p:nvSpPr>
-          <p:cNvPr id="19" name="연결 화살표 A1"/>
+          <p:cNvPr id="20" name="연결 화살표 A1"/>
           <p:cNvSpPr/>
           <p:nvPr/>
         </p:nvSpPr>
         <p:spPr>
           <a:xfrm>
-            <a:off x="6656832" y="4727448"/>
+            <a:off x="6656832" y="5084064"/>
             <a:ext cx="219456" cy="0"/>
           </a:xfrm>
           <a:prstGeom prst="line">
@@ -4250,18 +4363,18 @@
       </p:sp>
       <p:sp>
         <p:nvSpPr>
-          <p:cNvPr id="20" name="연결 미션 1"/>
+          <p:cNvPr id="21" name="연결 미션 1"/>
           <p:cNvSpPr/>
           <p:nvPr/>
         </p:nvSpPr>
         <p:spPr>
           <a:xfrm>
-            <a:off x="6903720" y="4480560"/>
-            <a:ext cx="1920240" cy="493776"/>
+            <a:off x="6903720" y="4873752"/>
+            <a:ext cx="1920240" cy="420624"/>
           </a:xfrm>
           <a:prstGeom prst="roundRect">
             <a:avLst>
-              <a:gd name="adj" fmla="val 11111"/>
+              <a:gd name="adj" fmla="val 13043"/>
             </a:avLst>
           </a:prstGeom>
           <a:solidFill>
@@ -4272,14 +4385,14 @@
       </p:sp>
       <p:sp>
         <p:nvSpPr>
-          <p:cNvPr id="21" name="연결 미션 문구 1"/>
+          <p:cNvPr id="22" name="연결 미션 문구 1"/>
           <p:cNvSpPr txBox="1"/>
           <p:nvPr/>
         </p:nvSpPr>
         <p:spPr>
           <a:xfrm>
-            <a:off x="6995160" y="4480560"/>
-            <a:ext cx="1737360" cy="493776"/>
+            <a:off x="6995160" y="4873752"/>
+            <a:ext cx="1737360" cy="420624"/>
           </a:xfrm>
           <a:prstGeom prst="rect">
             <a:avLst/>
@@ -4295,7 +4408,7 @@
               <a:buNone/>
             </a:pPr>
             <a:r>
-              <a:rPr lang="en-US" sz="1000" b="1" dirty="0">
+              <a:rPr lang="en-US" sz="950" b="1" dirty="0">
                 <a:solidFill>
                   <a:srgbClr val="267D86"/>
                 </a:solidFill>
@@ -4303,21 +4416,21 @@
                 <a:ea typeface="Noto Sans KR" pitchFamily="34" charset="-122"/>
                 <a:cs typeface="Noto Sans KR" pitchFamily="34" charset="-120"/>
               </a:rPr>
-              <a:t>미션 '깊이 관심 있는 고객'</a:t>
-            </a:r>
-            <a:endParaRPr lang="en-US" sz="1000" dirty="0"/>
+              <a:t>미션 '기능을 깊이 들어줄 고객'</a:t>
+            </a:r>
+            <a:endParaRPr lang="en-US" sz="950" dirty="0"/>
           </a:p>
         </p:txBody>
       </p:sp>
       <p:sp>
         <p:nvSpPr>
-          <p:cNvPr id="22" name="연결 화살표 B1"/>
+          <p:cNvPr id="23" name="연결 화살표 B1"/>
           <p:cNvSpPr/>
           <p:nvPr/>
         </p:nvSpPr>
         <p:spPr>
           <a:xfrm>
-            <a:off x="8851392" y="4727448"/>
+            <a:off x="8851392" y="5084064"/>
             <a:ext cx="82296" cy="0"/>
           </a:xfrm>
           <a:prstGeom prst="line">
@@ -4335,18 +4448,18 @@
       </p:sp>
       <p:sp>
         <p:nvSpPr>
-          <p:cNvPr id="23" name="연결 실행 1"/>
+          <p:cNvPr id="24" name="연결 실행 1"/>
           <p:cNvSpPr/>
           <p:nvPr/>
         </p:nvSpPr>
         <p:spPr>
           <a:xfrm>
-            <a:off x="9098280" y="4480560"/>
-            <a:ext cx="2468880" cy="493776"/>
+            <a:off x="9098280" y="4873752"/>
+            <a:ext cx="2468880" cy="420624"/>
           </a:xfrm>
           <a:prstGeom prst="roundRect">
             <a:avLst>
-              <a:gd name="adj" fmla="val 11111"/>
+              <a:gd name="adj" fmla="val 13043"/>
             </a:avLst>
           </a:prstGeom>
           <a:solidFill>
@@ -4362,14 +4475,14 @@
       </p:sp>
       <p:sp>
         <p:nvSpPr>
-          <p:cNvPr id="24" name="연결 실행 문구 1"/>
+          <p:cNvPr id="25" name="연결 실행 문구 1"/>
           <p:cNvSpPr txBox="1"/>
           <p:nvPr/>
         </p:nvSpPr>
         <p:spPr>
           <a:xfrm>
-            <a:off x="9189720" y="4480560"/>
-            <a:ext cx="2286000" cy="493776"/>
+            <a:off x="9189720" y="4873752"/>
+            <a:ext cx="2286000" cy="420624"/>
           </a:xfrm>
           <a:prstGeom prst="rect">
             <a:avLst/>
@@ -4385,7 +4498,7 @@
               <a:buNone/>
             </a:pPr>
             <a:r>
-              <a:rPr lang="en-US" sz="950" b="1" dirty="0">
+              <a:rPr lang="en-US" sz="900" b="1" dirty="0">
                 <a:solidFill>
                   <a:srgbClr val="182F48"/>
                 </a:solidFill>
@@ -4395,24 +4508,24 @@
               </a:rPr>
               <a:t>퍼블릭 랩 데이: Test Lab·브랜드 스토리 무대</a:t>
             </a:r>
-            <a:endParaRPr lang="en-US" sz="950" dirty="0"/>
+            <a:endParaRPr lang="en-US" sz="900" dirty="0"/>
           </a:p>
         </p:txBody>
       </p:sp>
       <p:sp>
         <p:nvSpPr>
-          <p:cNvPr id="25" name="연결 배경 2"/>
+          <p:cNvPr id="26" name="연결 배경 2"/>
           <p:cNvSpPr/>
           <p:nvPr/>
         </p:nvSpPr>
         <p:spPr>
           <a:xfrm>
-            <a:off x="3383280" y="5065776"/>
-            <a:ext cx="3246120" cy="493776"/>
+            <a:off x="3383280" y="5349240"/>
+            <a:ext cx="3246120" cy="420624"/>
           </a:xfrm>
           <a:prstGeom prst="roundRect">
             <a:avLst>
-              <a:gd name="adj" fmla="val 11111"/>
+              <a:gd name="adj" fmla="val 13043"/>
             </a:avLst>
           </a:prstGeom>
           <a:solidFill>
@@ -4423,14 +4536,14 @@
       </p:sp>
       <p:sp>
         <p:nvSpPr>
-          <p:cNvPr id="26" name="연결 배경 문구 2"/>
+          <p:cNvPr id="27" name="연결 배경 문구 2"/>
           <p:cNvSpPr txBox="1"/>
           <p:nvPr/>
         </p:nvSpPr>
         <p:spPr>
           <a:xfrm>
-            <a:off x="3474720" y="5065776"/>
-            <a:ext cx="3063240" cy="493776"/>
+            <a:off x="3474720" y="5349240"/>
+            <a:ext cx="3063240" cy="420624"/>
           </a:xfrm>
           <a:prstGeom prst="rect">
             <a:avLst/>
@@ -4446,7 +4559,7 @@
               <a:buNone/>
             </a:pPr>
             <a:r>
-              <a:rPr lang="en-US" sz="950" dirty="0">
+              <a:rPr lang="en-US" sz="900" dirty="0">
                 <a:solidFill>
                   <a:srgbClr val="334155"/>
                 </a:solidFill>
@@ -4456,19 +4569,19 @@
               </a:rPr>
               <a:t>배경 ② 해외 바이어 수요가 플랫폼별 쇼룸·팝업으로 분산</a:t>
             </a:r>
-            <a:endParaRPr lang="en-US" sz="950" dirty="0"/>
+            <a:endParaRPr lang="en-US" sz="900" dirty="0"/>
           </a:p>
         </p:txBody>
       </p:sp>
       <p:sp>
         <p:nvSpPr>
-          <p:cNvPr id="27" name="연결 화살표 A2"/>
+          <p:cNvPr id="28" name="연결 화살표 A2"/>
           <p:cNvSpPr/>
           <p:nvPr/>
         </p:nvSpPr>
         <p:spPr>
           <a:xfrm>
-            <a:off x="6656832" y="5312664"/>
+            <a:off x="6656832" y="5559552"/>
             <a:ext cx="219456" cy="0"/>
           </a:xfrm>
           <a:prstGeom prst="line">
@@ -4486,18 +4599,18 @@
       </p:sp>
       <p:sp>
         <p:nvSpPr>
-          <p:cNvPr id="28" name="연결 미션 2"/>
+          <p:cNvPr id="29" name="연결 미션 2"/>
           <p:cNvSpPr/>
           <p:nvPr/>
         </p:nvSpPr>
         <p:spPr>
           <a:xfrm>
-            <a:off x="6903720" y="5065776"/>
-            <a:ext cx="1920240" cy="493776"/>
+            <a:off x="6903720" y="5349240"/>
+            <a:ext cx="1920240" cy="420624"/>
           </a:xfrm>
           <a:prstGeom prst="roundRect">
             <a:avLst>
-              <a:gd name="adj" fmla="val 11111"/>
+              <a:gd name="adj" fmla="val 13043"/>
             </a:avLst>
           </a:prstGeom>
           <a:solidFill>
@@ -4508,14 +4621,14 @@
       </p:sp>
       <p:sp>
         <p:nvSpPr>
-          <p:cNvPr id="29" name="연결 미션 문구 2"/>
+          <p:cNvPr id="30" name="연결 미션 문구 2"/>
           <p:cNvSpPr txBox="1"/>
           <p:nvPr/>
         </p:nvSpPr>
         <p:spPr>
           <a:xfrm>
-            <a:off x="6995160" y="5065776"/>
-            <a:ext cx="1737360" cy="493776"/>
+            <a:off x="6995160" y="5349240"/>
+            <a:ext cx="1737360" cy="420624"/>
           </a:xfrm>
           <a:prstGeom prst="rect">
             <a:avLst/>
@@ -4531,7 +4644,7 @@
               <a:buNone/>
             </a:pPr>
             <a:r>
-              <a:rPr lang="en-US" sz="1000" b="1" dirty="0">
+              <a:rPr lang="en-US" sz="950" b="1" dirty="0">
                 <a:solidFill>
                   <a:srgbClr val="267D86"/>
                 </a:solidFill>
@@ -4541,19 +4654,19 @@
               </a:rPr>
               <a:t>미션 '맞는 바이어'</a:t>
             </a:r>
-            <a:endParaRPr lang="en-US" sz="1000" dirty="0"/>
+            <a:endParaRPr lang="en-US" sz="950" dirty="0"/>
           </a:p>
         </p:txBody>
       </p:sp>
       <p:sp>
         <p:nvSpPr>
-          <p:cNvPr id="30" name="연결 화살표 B2"/>
+          <p:cNvPr id="31" name="연결 화살표 B2"/>
           <p:cNvSpPr/>
           <p:nvPr/>
         </p:nvSpPr>
         <p:spPr>
           <a:xfrm>
-            <a:off x="8851392" y="5312664"/>
+            <a:off x="8851392" y="5559552"/>
             <a:ext cx="82296" cy="0"/>
           </a:xfrm>
           <a:prstGeom prst="line">
@@ -4571,18 +4684,18 @@
       </p:sp>
       <p:sp>
         <p:nvSpPr>
-          <p:cNvPr id="31" name="연결 실행 2"/>
+          <p:cNvPr id="32" name="연결 실행 2"/>
           <p:cNvSpPr/>
           <p:nvPr/>
         </p:nvSpPr>
         <p:spPr>
           <a:xfrm>
-            <a:off x="9098280" y="5065776"/>
-            <a:ext cx="2468880" cy="493776"/>
+            <a:off x="9098280" y="5349240"/>
+            <a:ext cx="2468880" cy="420624"/>
           </a:xfrm>
           <a:prstGeom prst="roundRect">
             <a:avLst>
-              <a:gd name="adj" fmla="val 11111"/>
+              <a:gd name="adj" fmla="val 13043"/>
             </a:avLst>
           </a:prstGeom>
           <a:solidFill>
@@ -4598,14 +4711,14 @@
       </p:sp>
       <p:sp>
         <p:nvSpPr>
-          <p:cNvPr id="32" name="연결 실행 문구 2"/>
+          <p:cNvPr id="33" name="연결 실행 문구 2"/>
           <p:cNvSpPr txBox="1"/>
           <p:nvPr/>
         </p:nvSpPr>
         <p:spPr>
           <a:xfrm>
-            <a:off x="9189720" y="5065776"/>
-            <a:ext cx="2286000" cy="493776"/>
+            <a:off x="9189720" y="5349240"/>
+            <a:ext cx="2286000" cy="420624"/>
           </a:xfrm>
           <a:prstGeom prst="rect">
             <a:avLst/>
@@ -4621,7 +4734,7 @@
               <a:buNone/>
             </a:pPr>
             <a:r>
-              <a:rPr lang="en-US" sz="950" b="1" dirty="0">
+              <a:rPr lang="en-US" sz="900" b="1" dirty="0">
                 <a:solidFill>
                   <a:srgbClr val="182F48"/>
                 </a:solidFill>
@@ -4631,24 +4744,24 @@
               </a:rPr>
               <a:t>트레이드 데이: 인증 바이어 1:1 매칭</a:t>
             </a:r>
-            <a:endParaRPr lang="en-US" sz="950" dirty="0"/>
+            <a:endParaRPr lang="en-US" sz="900" dirty="0"/>
           </a:p>
         </p:txBody>
       </p:sp>
       <p:sp>
         <p:nvSpPr>
-          <p:cNvPr id="33" name="연결 배경 3"/>
+          <p:cNvPr id="34" name="연결 배경 3"/>
           <p:cNvSpPr/>
           <p:nvPr/>
         </p:nvSpPr>
         <p:spPr>
           <a:xfrm>
-            <a:off x="3383280" y="5650992"/>
-            <a:ext cx="3246120" cy="493776"/>
+            <a:off x="3383280" y="5824728"/>
+            <a:ext cx="3246120" cy="420624"/>
           </a:xfrm>
           <a:prstGeom prst="roundRect">
             <a:avLst>
-              <a:gd name="adj" fmla="val 11111"/>
+              <a:gd name="adj" fmla="val 13043"/>
             </a:avLst>
           </a:prstGeom>
           <a:solidFill>
@@ -4659,14 +4772,14 @@
       </p:sp>
       <p:sp>
         <p:nvSpPr>
-          <p:cNvPr id="34" name="연결 배경 문구 3"/>
+          <p:cNvPr id="35" name="연결 배경 문구 3"/>
           <p:cNvSpPr txBox="1"/>
           <p:nvPr/>
         </p:nvSpPr>
         <p:spPr>
           <a:xfrm>
-            <a:off x="3474720" y="5650992"/>
-            <a:ext cx="3063240" cy="493776"/>
+            <a:off x="3474720" y="5824728"/>
+            <a:ext cx="3063240" cy="420624"/>
           </a:xfrm>
           <a:prstGeom prst="rect">
             <a:avLst/>
@@ -4682,7 +4795,7 @@
               <a:buNone/>
             </a:pPr>
             <a:r>
-              <a:rPr lang="en-US" sz="950" dirty="0">
+              <a:rPr lang="en-US" sz="900" dirty="0">
                 <a:solidFill>
                   <a:srgbClr val="334155"/>
                 </a:solidFill>
@@ -4690,21 +4803,21 @@
                 <a:ea typeface="Noto Sans KR" pitchFamily="34" charset="-122"/>
                 <a:cs typeface="Noto Sans KR" pitchFamily="34" charset="-120"/>
               </a:rPr>
-              <a:t>배경 ③ 로드맵 2030: 융합형 대형 전시 5%→20%</a:t>
-            </a:r>
-            <a:endParaRPr lang="en-US" sz="950" dirty="0"/>
+              <a:t>배경 ③ 해외가 K-고프코어를 찾음(무신사 도쿄 주문 3배) + 로드맵 2030 융합형 전시 확대</a:t>
+            </a:r>
+            <a:endParaRPr lang="en-US" sz="900" dirty="0"/>
           </a:p>
         </p:txBody>
       </p:sp>
       <p:sp>
         <p:nvSpPr>
-          <p:cNvPr id="35" name="연결 화살표 A3"/>
+          <p:cNvPr id="36" name="연결 화살표 A3"/>
           <p:cNvSpPr/>
           <p:nvPr/>
         </p:nvSpPr>
         <p:spPr>
           <a:xfrm>
-            <a:off x="6656832" y="5897880"/>
+            <a:off x="6656832" y="6035040"/>
             <a:ext cx="219456" cy="0"/>
           </a:xfrm>
           <a:prstGeom prst="line">
@@ -4722,18 +4835,18 @@
       </p:sp>
       <p:sp>
         <p:nvSpPr>
-          <p:cNvPr id="36" name="연결 미션 3"/>
+          <p:cNvPr id="37" name="연결 미션 3"/>
           <p:cNvSpPr/>
           <p:nvPr/>
         </p:nvSpPr>
         <p:spPr>
           <a:xfrm>
-            <a:off x="6903720" y="5650992"/>
-            <a:ext cx="1920240" cy="493776"/>
+            <a:off x="6903720" y="5824728"/>
+            <a:ext cx="1920240" cy="420624"/>
           </a:xfrm>
           <a:prstGeom prst="roundRect">
             <a:avLst>
-              <a:gd name="adj" fmla="val 11111"/>
+              <a:gd name="adj" fmla="val 13043"/>
             </a:avLst>
           </a:prstGeom>
           <a:solidFill>
@@ -4744,14 +4857,14 @@
       </p:sp>
       <p:sp>
         <p:nvSpPr>
-          <p:cNvPr id="37" name="연결 미션 문구 3"/>
+          <p:cNvPr id="38" name="연결 미션 문구 3"/>
           <p:cNvSpPr txBox="1"/>
           <p:nvPr/>
         </p:nvSpPr>
         <p:spPr>
           <a:xfrm>
-            <a:off x="6995160" y="5650992"/>
-            <a:ext cx="1737360" cy="493776"/>
+            <a:off x="6995160" y="5824728"/>
+            <a:ext cx="1737360" cy="420624"/>
           </a:xfrm>
           <a:prstGeom prst="rect">
             <a:avLst/>
@@ -4767,7 +4880,7 @@
               <a:buNone/>
             </a:pPr>
             <a:r>
-              <a:rPr lang="en-US" sz="1000" b="1" dirty="0">
+              <a:rPr lang="en-US" sz="950" b="1" dirty="0">
                 <a:solidFill>
                   <a:srgbClr val="267D86"/>
                 </a:solidFill>
@@ -4777,19 +4890,19 @@
               </a:rPr>
               <a:t>비전 '아시아 대표 플랫폼'</a:t>
             </a:r>
-            <a:endParaRPr lang="en-US" sz="1000" dirty="0"/>
+            <a:endParaRPr lang="en-US" sz="950" dirty="0"/>
           </a:p>
         </p:txBody>
       </p:sp>
       <p:sp>
         <p:nvSpPr>
-          <p:cNvPr id="38" name="연결 화살표 B3"/>
+          <p:cNvPr id="39" name="연결 화살표 B3"/>
           <p:cNvSpPr/>
           <p:nvPr/>
         </p:nvSpPr>
         <p:spPr>
           <a:xfrm>
-            <a:off x="8851392" y="5897880"/>
+            <a:off x="8851392" y="6035040"/>
             <a:ext cx="82296" cy="0"/>
           </a:xfrm>
           <a:prstGeom prst="line">
@@ -4807,18 +4920,18 @@
       </p:sp>
       <p:sp>
         <p:nvSpPr>
-          <p:cNvPr id="39" name="연결 실행 3"/>
+          <p:cNvPr id="40" name="연결 실행 3"/>
           <p:cNvSpPr/>
           <p:nvPr/>
         </p:nvSpPr>
         <p:spPr>
           <a:xfrm>
-            <a:off x="9098280" y="5650992"/>
-            <a:ext cx="2468880" cy="493776"/>
+            <a:off x="9098280" y="5824728"/>
+            <a:ext cx="2468880" cy="420624"/>
           </a:xfrm>
           <a:prstGeom prst="roundRect">
             <a:avLst>
-              <a:gd name="adj" fmla="val 11111"/>
+              <a:gd name="adj" fmla="val 13043"/>
             </a:avLst>
           </a:prstGeom>
           <a:solidFill>
@@ -4834,14 +4947,14 @@
       </p:sp>
       <p:sp>
         <p:nvSpPr>
-          <p:cNvPr id="40" name="연결 실행 문구 3"/>
+          <p:cNvPr id="41" name="연결 실행 문구 3"/>
           <p:cNvSpPr txBox="1"/>
           <p:nvPr/>
         </p:nvSpPr>
         <p:spPr>
           <a:xfrm>
-            <a:off x="9189720" y="5650992"/>
-            <a:ext cx="2286000" cy="493776"/>
+            <a:off x="9189720" y="5824728"/>
+            <a:ext cx="2286000" cy="420624"/>
           </a:xfrm>
           <a:prstGeom prst="rect">
             <a:avLst/>
@@ -4857,7 +4970,7 @@
               <a:buNone/>
             </a:pPr>
             <a:r>
-              <a:rPr lang="en-US" sz="950" b="1" dirty="0">
+              <a:rPr lang="en-US" sz="900" b="1" dirty="0">
                 <a:solidFill>
                   <a:srgbClr val="182F48"/>
                 </a:solidFill>
@@ -4865,9 +4978,9 @@
                 <a:ea typeface="Noto Sans KR" pitchFamily="34" charset="-122"/>
                 <a:cs typeface="Noto Sans KR" pitchFamily="34" charset="-120"/>
               </a:rPr>
-              <a:t>연례 개최, 해외 바이어 비중 단계적 확대</a:t>
-            </a:r>
-            <a:endParaRPr lang="en-US" sz="950" dirty="0"/>
+              <a:t>해외 바이어 비중 확대, 연례 개최</a:t>
+            </a:r>
+            <a:endParaRPr lang="en-US" sz="900" dirty="0"/>
           </a:p>
         </p:txBody>
       </p:sp>
@@ -5352,7 +5465,7 @@
                 <a:ea typeface="Noto Sans KR" pitchFamily="34" charset="-122"/>
                 <a:cs typeface="Noto Sans KR" pitchFamily="34" charset="-120"/>
               </a:rPr>
-              <a:t>고프코어 패션 브랜드 유치</a:t>
+              <a:t>고프코어 패션 브랜드 유치 (신진 K-브랜드 60개사 이상)</a:t>
             </a:r>
             <a:endParaRPr lang="en-US" sz="1500" dirty="0"/>
           </a:p>
@@ -5372,7 +5485,7 @@
                 <a:ea typeface="Noto Sans KR" pitchFamily="34" charset="-122"/>
                 <a:cs typeface="Noto Sans KR" pitchFamily="34" charset="-120"/>
               </a:rPr>
-              <a:t>(신진 K-브랜드 60개사 이상, 해외 브랜드 국내 법인·수입사 포함)</a:t>
+              <a:t>→ 2029년 3회차 300개사(2.5배)로 성장</a:t>
             </a:r>
             <a:endParaRPr lang="en-US" sz="1500" dirty="0"/>
           </a:p>
@@ -5450,7 +5563,7 @@
                 <a:ea typeface="Noto Sans KR" pitchFamily="34" charset="-122"/>
                 <a:cs typeface="Noto Sans KR" pitchFamily="34" charset="-120"/>
               </a:rPr>
-              <a:t>→ 2027.8월 모집 마감 시점 확인</a:t>
+              <a:t>→ 2027.8월 모집 마감 시점 확인, 회차별 비교</a:t>
             </a:r>
             <a:endParaRPr lang="en-US" sz="950" dirty="0"/>
           </a:p>
@@ -5516,7 +5629,7 @@
                 <a:ea typeface="Noto Sans KR" pitchFamily="34" charset="-122"/>
                 <a:cs typeface="Noto Sans KR" pitchFamily="34" charset="-120"/>
               </a:rPr>
-              <a:t>서울패션위크 트레이드쇼 130개 브랜드, 캠핑앤피크닉페어 116개사 → 단일 카테고리 첫 회에 달성 가능한 규모 (SPOEX 300개사는 3회차 목표)</a:t>
+              <a:t>서울패션위크 트레이드쇼 130개 브랜드, 캠핑앤피크닉페어 116개사 → 단일 카테고리 첫 회에 달성 가능한 규모. 3회차 목표는 SPOEX(300개사) 수준</a:t>
             </a:r>
             <a:endParaRPr lang="en-US" sz="950" dirty="0"/>
           </a:p>
@@ -5842,7 +5955,7 @@
                 <a:ea typeface="Noto Sans KR" pitchFamily="34" charset="-122"/>
                 <a:cs typeface="Noto Sans KR" pitchFamily="34" charset="-120"/>
               </a:rPr>
-              <a:t>서울패션위크 트레이드쇼 바이어 300명·수주상담 671만 달러(2025 F/W), 무신사 도쿄 쇼룸 해외 바이어 200명+ · 주문 3배</a:t>
+              <a:t>서울패션위크 트레이드쇼 바이어 300명·수주상담 671만 달러(2025 F/W), 무신사 도쿄 쇼룸 해외 바이어 200명+. 거래 성과가 없으면 참가업체가 재참가하지 않아 전시회가 존속할 수 없음</a:t>
             </a:r>
             <a:endParaRPr lang="en-US" sz="950" dirty="0"/>
           </a:p>
@@ -6168,7 +6281,7 @@
                 <a:ea typeface="Noto Sans KR" pitchFamily="34" charset="-122"/>
                 <a:cs typeface="Noto Sans KR" pitchFamily="34" charset="-120"/>
               </a:rPr>
-              <a:t>인터뷰: "성공 기준은 고객의 반응", "관심 깊게 들어주는 고객이 필요". FIELDSTYLE(일본) 2일 4.8만 명, SPOEX 4일 4.7만 명 → 2일 2만 명은 보수적</a:t>
+              <a:t>인터뷰: "고객의 반응이겠죠", "관심 깊게 들어주는 고객들이 필요". FIELDSTYLE(일본) 2일 4.8만 명, SPOEX 4일 4.7만 명 → 2일 2만 명은 보수적</a:t>
             </a:r>
             <a:endParaRPr lang="en-US" sz="950" dirty="0"/>
           </a:p>
@@ -6353,7 +6466,7 @@
                 <a:ea typeface="Noto Sans KR" pitchFamily="34" charset="-122"/>
                 <a:cs typeface="Noto Sans KR" pitchFamily="34" charset="-120"/>
               </a:rPr>
-              <a:t>출처: 더구루(2026, 영원무역 룰루레몬 OEM 비중) · 머니투데이(2018, 영원무역 OEM·노스페이스 유통) · 유안타증권(2024, 감성코퍼레이션) · 뉴데일리(2025.9.11, 아크테릭스·살레와) · Houyhnhnm·END.(케일 해외 판매) · 무신사 뉴스룸(2024.7.17) · 스마트투데이(2025, 프리뷰 인 서울 2025 약 500개사) · 데일리안(FITI 인공강우·써멀마네킨) · 산에이(2025, GO OUT KOREA 매체자료)</a:t>
+              <a:t>출처: 더구루(2026)·머니투데이(2018, 영원무역 OEM·노스페이스 유통) · 유안타증권(2024, 감성코퍼레이션) · 뉴데일리(2025.9.11) · Houyhnhnm·END.(케일) · 바이라인네트워크(2023, 무신사 로지스틱스) · 이투데이(2025, CJ대한통운 더 풀필) · 스마트투데이(2025, 프리뷰 인 서울) · 데일리안(FITI) · 산에이(2025, GO OUT KOREA)</a:t>
             </a:r>
             <a:endParaRPr lang="en-US" sz="850" dirty="0"/>
           </a:p>
@@ -6502,7 +6615,7 @@
         <p:spPr>
           <a:xfrm>
             <a:off x="5010912" y="2487168"/>
-            <a:ext cx="6629400" cy="1828800"/>
+            <a:ext cx="6629400" cy="1691640"/>
           </a:xfrm>
           <a:prstGeom prst="rect">
             <a:avLst/>
@@ -6527,7 +6640,7 @@
         <p:spPr>
           <a:xfrm>
             <a:off x="557784" y="2523744"/>
-            <a:ext cx="2121408" cy="1755648"/>
+            <a:ext cx="2121408" cy="1618488"/>
           </a:xfrm>
           <a:prstGeom prst="rect">
             <a:avLst/>
@@ -6730,7 +6843,7 @@
         <p:spPr>
           <a:xfrm>
             <a:off x="612648" y="2999232"/>
-            <a:ext cx="2011680" cy="1188720"/>
+            <a:ext cx="2011680" cy="1051560"/>
           </a:xfrm>
           <a:prstGeom prst="rect">
             <a:avLst/>
@@ -6754,8 +6867,8 @@
         </p:nvSpPr>
         <p:spPr>
           <a:xfrm>
-            <a:off x="667512" y="3054096"/>
-            <a:ext cx="1901952" cy="1097280"/>
+            <a:off x="667512" y="3044952"/>
+            <a:ext cx="1901952" cy="978408"/>
           </a:xfrm>
           <a:prstGeom prst="rect">
             <a:avLst/>
@@ -6944,7 +7057,7 @@
         <p:spPr>
           <a:xfrm>
             <a:off x="2848356" y="2999232"/>
-            <a:ext cx="2011680" cy="1188720"/>
+            <a:ext cx="2011680" cy="1051560"/>
           </a:xfrm>
           <a:prstGeom prst="rect">
             <a:avLst/>
@@ -6968,8 +7081,8 @@
         </p:nvSpPr>
         <p:spPr>
           <a:xfrm>
-            <a:off x="2903220" y="3054096"/>
-            <a:ext cx="1901952" cy="1097280"/>
+            <a:off x="2903220" y="3044952"/>
+            <a:ext cx="1901952" cy="978408"/>
           </a:xfrm>
           <a:prstGeom prst="rect">
             <a:avLst/>
@@ -7137,7 +7250,7 @@
         <p:spPr>
           <a:xfrm>
             <a:off x="5084064" y="2999232"/>
-            <a:ext cx="2011680" cy="1188720"/>
+            <a:ext cx="2011680" cy="1051560"/>
           </a:xfrm>
           <a:prstGeom prst="rect">
             <a:avLst/>
@@ -7161,8 +7274,8 @@
         </p:nvSpPr>
         <p:spPr>
           <a:xfrm>
-            <a:off x="5138928" y="3054096"/>
-            <a:ext cx="1901952" cy="1097280"/>
+            <a:off x="5138928" y="3044952"/>
+            <a:ext cx="1901952" cy="978408"/>
           </a:xfrm>
           <a:prstGeom prst="rect">
             <a:avLst/>
@@ -7330,7 +7443,7 @@
         <p:spPr>
           <a:xfrm>
             <a:off x="7319772" y="2999232"/>
-            <a:ext cx="2011680" cy="1188720"/>
+            <a:ext cx="2011680" cy="1051560"/>
           </a:xfrm>
           <a:prstGeom prst="rect">
             <a:avLst/>
@@ -7354,8 +7467,8 @@
         </p:nvSpPr>
         <p:spPr>
           <a:xfrm>
-            <a:off x="7374636" y="3054096"/>
-            <a:ext cx="1901952" cy="1097280"/>
+            <a:off x="7374636" y="3044952"/>
+            <a:ext cx="1901952" cy="978408"/>
           </a:xfrm>
           <a:prstGeom prst="rect">
             <a:avLst/>
@@ -7523,7 +7636,7 @@
         <p:spPr>
           <a:xfrm>
             <a:off x="9555480" y="2999232"/>
-            <a:ext cx="2011680" cy="1188720"/>
+            <a:ext cx="2011680" cy="1051560"/>
           </a:xfrm>
           <a:prstGeom prst="rect">
             <a:avLst/>
@@ -7547,8 +7660,8 @@
         </p:nvSpPr>
         <p:spPr>
           <a:xfrm>
-            <a:off x="9610344" y="3054096"/>
-            <a:ext cx="1901952" cy="1097280"/>
+            <a:off x="9610344" y="3044952"/>
+            <a:ext cx="1901952" cy="978408"/>
           </a:xfrm>
           <a:prstGeom prst="rect">
             <a:avLst/>
@@ -7632,7 +7745,7 @@
         </p:nvSpPr>
         <p:spPr>
           <a:xfrm>
-            <a:off x="2096262" y="4343400"/>
+            <a:off x="2096262" y="4187952"/>
             <a:ext cx="1280160" cy="182880"/>
           </a:xfrm>
           <a:prstGeom prst="rect">
@@ -7671,7 +7784,7 @@
         </p:nvSpPr>
         <p:spPr>
           <a:xfrm>
-            <a:off x="4331970" y="4343400"/>
+            <a:off x="4331970" y="4187952"/>
             <a:ext cx="1280160" cy="182880"/>
           </a:xfrm>
           <a:prstGeom prst="rect">
@@ -7710,7 +7823,7 @@
         </p:nvSpPr>
         <p:spPr>
           <a:xfrm>
-            <a:off x="6567678" y="4343400"/>
+            <a:off x="6567678" y="4187952"/>
             <a:ext cx="1280160" cy="182880"/>
           </a:xfrm>
           <a:prstGeom prst="rect">
@@ -7749,7 +7862,7 @@
         </p:nvSpPr>
         <p:spPr>
           <a:xfrm>
-            <a:off x="8803386" y="4343400"/>
+            <a:off x="8803386" y="4187952"/>
             <a:ext cx="1280160" cy="182880"/>
           </a:xfrm>
           <a:prstGeom prst="rect">
@@ -7788,7 +7901,7 @@
         </p:nvSpPr>
         <p:spPr>
           <a:xfrm>
-            <a:off x="704088" y="4645152"/>
+            <a:off x="704088" y="4462272"/>
             <a:ext cx="10771632" cy="0"/>
           </a:xfrm>
           <a:prstGeom prst="line">
@@ -7812,7 +7925,7 @@
         </p:nvSpPr>
         <p:spPr>
           <a:xfrm>
-            <a:off x="2441448" y="4690872"/>
+            <a:off x="2441448" y="4498848"/>
             <a:ext cx="7315200" cy="219456"/>
           </a:xfrm>
           <a:prstGeom prst="rect">
@@ -7845,18 +7958,262 @@
       </p:sp>
       <p:sp>
         <p:nvSpPr>
-          <p:cNvPr id="44" name="지원 생태계 1"/>
+          <p:cNvPr id="44" name="서비스 그룹 라벨"/>
+          <p:cNvSpPr txBox="1"/>
+          <p:nvPr/>
+        </p:nvSpPr>
+        <p:spPr>
+          <a:xfrm>
+            <a:off x="612648" y="4764024"/>
+            <a:ext cx="3590544" cy="182880"/>
+          </a:xfrm>
+          <a:prstGeom prst="rect">
+            <a:avLst/>
+          </a:prstGeom>
+          <a:noFill/>
+          <a:ln/>
+        </p:spPr>
+        <p:txBody>
+          <a:bodyPr wrap="square" lIns="0" tIns="0" rIns="0" bIns="0" rtlCol="0" anchor="ctr"/>
+          <a:lstStyle/>
+          <a:p>
+            <a:pPr indent="0" marL="0">
+              <a:buNone/>
+            </a:pPr>
+            <a:r>
+              <a:rPr lang="en-US" sz="850" b="1" dirty="0">
+                <a:solidFill>
+                  <a:srgbClr val="267D86"/>
+                </a:solidFill>
+                <a:latin typeface="Noto Sans KR" pitchFamily="34" charset="0"/>
+                <a:ea typeface="Noto Sans KR" pitchFamily="34" charset="-122"/>
+                <a:cs typeface="Noto Sans KR" pitchFamily="34" charset="-120"/>
+              </a:rPr>
+              <a:t>유통 지원 서비스 · 부분 포함(서비스관)</a:t>
+            </a:r>
+            <a:endParaRPr lang="en-US" sz="850" dirty="0"/>
+          </a:p>
+        </p:txBody>
+      </p:sp>
+      <p:sp>
+        <p:nvSpPr>
+          <p:cNvPr id="45" name="생태계 그룹 라벨"/>
+          <p:cNvSpPr txBox="1"/>
+          <p:nvPr/>
+        </p:nvSpPr>
+        <p:spPr>
+          <a:xfrm>
+            <a:off x="4294632" y="4764024"/>
+            <a:ext cx="7272528" cy="182880"/>
+          </a:xfrm>
+          <a:prstGeom prst="rect">
+            <a:avLst/>
+          </a:prstGeom>
+          <a:noFill/>
+          <a:ln/>
+        </p:spPr>
+        <p:txBody>
+          <a:bodyPr wrap="square" lIns="0" tIns="0" rIns="0" bIns="0" rtlCol="0" anchor="ctr"/>
+          <a:lstStyle/>
+          <a:p>
+            <a:pPr indent="0" marL="0">
+              <a:buNone/>
+            </a:pPr>
+            <a:r>
+              <a:rPr lang="en-US" sz="850" b="1" dirty="0">
+                <a:solidFill>
+                  <a:srgbClr val="64748B"/>
+                </a:solidFill>
+                <a:latin typeface="Noto Sans KR" pitchFamily="34" charset="0"/>
+                <a:ea typeface="Noto Sans KR" pitchFamily="34" charset="-122"/>
+                <a:cs typeface="Noto Sans KR" pitchFamily="34" charset="-120"/>
+              </a:rPr>
+              <a:t>지원 생태계 (6장 이해관계자)</a:t>
+            </a:r>
+            <a:endParaRPr lang="en-US" sz="850" dirty="0"/>
+          </a:p>
+        </p:txBody>
+      </p:sp>
+      <p:sp>
+        <p:nvSpPr>
+          <p:cNvPr id="46" name="지원 칩 1"/>
           <p:cNvSpPr/>
           <p:nvPr/>
         </p:nvSpPr>
         <p:spPr>
           <a:xfrm>
-            <a:off x="612648" y="4974336"/>
-            <a:ext cx="2656332" cy="365760"/>
+            <a:off x="612648" y="4965192"/>
+            <a:ext cx="1749552" cy="457200"/>
           </a:xfrm>
           <a:prstGeom prst="roundRect">
             <a:avLst>
-              <a:gd name="adj" fmla="val 15000"/>
+              <a:gd name="adj" fmla="val 12000"/>
+            </a:avLst>
+          </a:prstGeom>
+          <a:solidFill>
+            <a:srgbClr val="EAF4F5"/>
+          </a:solidFill>
+          <a:ln w="9525">
+            <a:solidFill>
+              <a:srgbClr val="267D86"/>
+            </a:solidFill>
+            <a:prstDash val="solid"/>
+          </a:ln>
+        </p:spPr>
+      </p:sp>
+      <p:sp>
+        <p:nvSpPr>
+          <p:cNvPr id="47" name="지원 칩 문구 1"/>
+          <p:cNvSpPr txBox="1"/>
+          <p:nvPr/>
+        </p:nvSpPr>
+        <p:spPr>
+          <a:xfrm>
+            <a:off x="685800" y="4965192"/>
+            <a:ext cx="1603248" cy="457200"/>
+          </a:xfrm>
+          <a:prstGeom prst="rect">
+            <a:avLst/>
+          </a:prstGeom>
+          <a:noFill/>
+          <a:ln/>
+        </p:spPr>
+        <p:txBody>
+          <a:bodyPr wrap="square" lIns="0" tIns="0" rIns="0" bIns="0" rtlCol="0" anchor="ctr"/>
+          <a:lstStyle/>
+          <a:p>
+            <a:pPr indent="0" marL="0">
+              <a:buNone/>
+            </a:pPr>
+            <a:r>
+              <a:rPr lang="en-US" sz="800" b="1" dirty="0">
+                <a:solidFill>
+                  <a:srgbClr val="267D86"/>
+                </a:solidFill>
+                <a:latin typeface="Noto Sans KR" pitchFamily="34" charset="0"/>
+                <a:ea typeface="Noto Sans KR" pitchFamily="34" charset="-122"/>
+                <a:cs typeface="Noto Sans KR" pitchFamily="34" charset="-120"/>
+              </a:rPr>
+              <a:t>물류 · 풀필먼트</a:t>
+            </a:r>
+            <a:endParaRPr lang="en-US" sz="800" dirty="0"/>
+          </a:p>
+          <a:p>
+            <a:pPr indent="0" marL="0">
+              <a:buNone/>
+            </a:pPr>
+            <a:r>
+              <a:rPr lang="en-US" sz="800" dirty="0">
+                <a:solidFill>
+                  <a:srgbClr val="334155"/>
+                </a:solidFill>
+                <a:latin typeface="Noto Sans KR" pitchFamily="34" charset="0"/>
+                <a:ea typeface="Noto Sans KR" pitchFamily="34" charset="-122"/>
+                <a:cs typeface="Noto Sans KR" pitchFamily="34" charset="-120"/>
+              </a:rPr>
+              <a:t>CJ대한통운(더 풀필) · 무신사 로지스틱스</a:t>
+            </a:r>
+            <a:endParaRPr lang="en-US" sz="800" dirty="0"/>
+          </a:p>
+        </p:txBody>
+      </p:sp>
+      <p:sp>
+        <p:nvSpPr>
+          <p:cNvPr id="48" name="지원 칩 2"/>
+          <p:cNvSpPr/>
+          <p:nvPr/>
+        </p:nvSpPr>
+        <p:spPr>
+          <a:xfrm>
+            <a:off x="2453640" y="4965192"/>
+            <a:ext cx="1749552" cy="457200"/>
+          </a:xfrm>
+          <a:prstGeom prst="roundRect">
+            <a:avLst>
+              <a:gd name="adj" fmla="val 12000"/>
+            </a:avLst>
+          </a:prstGeom>
+          <a:solidFill>
+            <a:srgbClr val="EAF4F5"/>
+          </a:solidFill>
+          <a:ln w="9525">
+            <a:solidFill>
+              <a:srgbClr val="267D86"/>
+            </a:solidFill>
+            <a:prstDash val="solid"/>
+          </a:ln>
+        </p:spPr>
+      </p:sp>
+      <p:sp>
+        <p:nvSpPr>
+          <p:cNvPr id="49" name="지원 칩 문구 2"/>
+          <p:cNvSpPr txBox="1"/>
+          <p:nvPr/>
+        </p:nvSpPr>
+        <p:spPr>
+          <a:xfrm>
+            <a:off x="2526792" y="4965192"/>
+            <a:ext cx="1603248" cy="457200"/>
+          </a:xfrm>
+          <a:prstGeom prst="rect">
+            <a:avLst/>
+          </a:prstGeom>
+          <a:noFill/>
+          <a:ln/>
+        </p:spPr>
+        <p:txBody>
+          <a:bodyPr wrap="square" lIns="0" tIns="0" rIns="0" bIns="0" rtlCol="0" anchor="ctr"/>
+          <a:lstStyle/>
+          <a:p>
+            <a:pPr indent="0" marL="0">
+              <a:buNone/>
+            </a:pPr>
+            <a:r>
+              <a:rPr lang="en-US" sz="800" b="1" dirty="0">
+                <a:solidFill>
+                  <a:srgbClr val="267D86"/>
+                </a:solidFill>
+                <a:latin typeface="Noto Sans KR" pitchFamily="34" charset="0"/>
+                <a:ea typeface="Noto Sans KR" pitchFamily="34" charset="-122"/>
+                <a:cs typeface="Noto Sans KR" pitchFamily="34" charset="-120"/>
+              </a:rPr>
+              <a:t>마케팅 · 홍보</a:t>
+            </a:r>
+            <a:endParaRPr lang="en-US" sz="800" dirty="0"/>
+          </a:p>
+          <a:p>
+            <a:pPr indent="0" marL="0">
+              <a:buNone/>
+            </a:pPr>
+            <a:r>
+              <a:rPr lang="en-US" sz="800" dirty="0">
+                <a:solidFill>
+                  <a:srgbClr val="334155"/>
+                </a:solidFill>
+                <a:latin typeface="Noto Sans KR" pitchFamily="34" charset="0"/>
+                <a:ea typeface="Noto Sans KR" pitchFamily="34" charset="-122"/>
+                <a:cs typeface="Noto Sans KR" pitchFamily="34" charset="-120"/>
+              </a:rPr>
+              <a:t>인플루언서 · 모델, 패션 PR 에이전시 외</a:t>
+            </a:r>
+            <a:endParaRPr lang="en-US" sz="800" dirty="0"/>
+          </a:p>
+        </p:txBody>
+      </p:sp>
+      <p:sp>
+        <p:nvSpPr>
+          <p:cNvPr id="50" name="지원 칩 3"/>
+          <p:cNvSpPr/>
+          <p:nvPr/>
+        </p:nvSpPr>
+        <p:spPr>
+          <a:xfrm>
+            <a:off x="4294632" y="4965192"/>
+            <a:ext cx="1749552" cy="457200"/>
+          </a:xfrm>
+          <a:prstGeom prst="roundRect">
+            <a:avLst>
+              <a:gd name="adj" fmla="val 12000"/>
             </a:avLst>
           </a:prstGeom>
           <a:solidFill>
@@ -7867,14 +8224,14 @@
       </p:sp>
       <p:sp>
         <p:nvSpPr>
-          <p:cNvPr id="45" name="지원 생태계 문구 1"/>
+          <p:cNvPr id="51" name="지원 칩 문구 3"/>
           <p:cNvSpPr txBox="1"/>
           <p:nvPr/>
         </p:nvSpPr>
         <p:spPr>
           <a:xfrm>
-            <a:off x="704088" y="4974336"/>
-            <a:ext cx="2473452" cy="365760"/>
+            <a:off x="4367784" y="4965192"/>
+            <a:ext cx="1603248" cy="457200"/>
           </a:xfrm>
           <a:prstGeom prst="rect">
             <a:avLst/>
@@ -7890,7 +8247,7 @@
               <a:buNone/>
             </a:pPr>
             <a:r>
-              <a:rPr lang="en-US" sz="850" b="1" dirty="0">
+              <a:rPr lang="en-US" sz="800" b="1" dirty="0">
                 <a:solidFill>
                   <a:srgbClr val="182F48"/>
                 </a:solidFill>
@@ -7898,13 +8255,16 @@
                 <a:ea typeface="Noto Sans KR" pitchFamily="34" charset="-122"/>
                 <a:cs typeface="Noto Sans KR" pitchFamily="34" charset="-120"/>
               </a:rPr>
-              <a:t>시험 · 인증  </a:t>
-            </a:r>
+              <a:t>시험 · 인증</a:t>
+            </a:r>
+            <a:endParaRPr lang="en-US" sz="800" dirty="0"/>
+          </a:p>
+          <a:p>
             <a:pPr indent="0" marL="0">
               <a:buNone/>
             </a:pPr>
             <a:r>
-              <a:rPr lang="en-US" sz="850" dirty="0">
+              <a:rPr lang="en-US" sz="800" dirty="0">
                 <a:solidFill>
                   <a:srgbClr val="334155"/>
                 </a:solidFill>
@@ -7914,24 +8274,24 @@
               </a:rPr>
               <a:t>FITI시험연구원 (인공강우·써멀마네킨)</a:t>
             </a:r>
-            <a:endParaRPr lang="en-US" sz="850" dirty="0"/>
+            <a:endParaRPr lang="en-US" sz="800" dirty="0"/>
           </a:p>
         </p:txBody>
       </p:sp>
       <p:sp>
         <p:nvSpPr>
-          <p:cNvPr id="46" name="지원 생태계 2"/>
+          <p:cNvPr id="52" name="지원 칩 4"/>
           <p:cNvSpPr/>
           <p:nvPr/>
         </p:nvSpPr>
         <p:spPr>
           <a:xfrm>
-            <a:off x="3378708" y="4974336"/>
-            <a:ext cx="2656332" cy="365760"/>
+            <a:off x="6135624" y="4965192"/>
+            <a:ext cx="1749552" cy="457200"/>
           </a:xfrm>
           <a:prstGeom prst="roundRect">
             <a:avLst>
-              <a:gd name="adj" fmla="val 15000"/>
+              <a:gd name="adj" fmla="val 12000"/>
             </a:avLst>
           </a:prstGeom>
           <a:solidFill>
@@ -7942,14 +8302,14 @@
       </p:sp>
       <p:sp>
         <p:nvSpPr>
-          <p:cNvPr id="47" name="지원 생태계 문구 2"/>
+          <p:cNvPr id="53" name="지원 칩 문구 4"/>
           <p:cNvSpPr txBox="1"/>
           <p:nvPr/>
         </p:nvSpPr>
         <p:spPr>
           <a:xfrm>
-            <a:off x="3470148" y="4974336"/>
-            <a:ext cx="2473452" cy="365760"/>
+            <a:off x="6208776" y="4965192"/>
+            <a:ext cx="1603248" cy="457200"/>
           </a:xfrm>
           <a:prstGeom prst="rect">
             <a:avLst/>
@@ -7965,7 +8325,7 @@
               <a:buNone/>
             </a:pPr>
             <a:r>
-              <a:rPr lang="en-US" sz="850" b="1" dirty="0">
+              <a:rPr lang="en-US" sz="800" b="1" dirty="0">
                 <a:solidFill>
                   <a:srgbClr val="182F48"/>
                 </a:solidFill>
@@ -7973,13 +8333,16 @@
                 <a:ea typeface="Noto Sans KR" pitchFamily="34" charset="-122"/>
                 <a:cs typeface="Noto Sans KR" pitchFamily="34" charset="-120"/>
               </a:rPr>
-              <a:t>미디어  </a:t>
-            </a:r>
+              <a:t>미디어</a:t>
+            </a:r>
+            <a:endParaRPr lang="en-US" sz="800" dirty="0"/>
+          </a:p>
+          <a:p>
             <a:pPr indent="0" marL="0">
               <a:buNone/>
             </a:pPr>
             <a:r>
-              <a:rPr lang="en-US" sz="850" dirty="0">
+              <a:rPr lang="en-US" sz="800" dirty="0">
                 <a:solidFill>
                   <a:srgbClr val="334155"/>
                 </a:solidFill>
@@ -7989,24 +8352,24 @@
               </a:rPr>
               <a:t>GO OUT KOREA · 패션비즈 · 어패럴뉴스</a:t>
             </a:r>
-            <a:endParaRPr lang="en-US" sz="850" dirty="0"/>
+            <a:endParaRPr lang="en-US" sz="800" dirty="0"/>
           </a:p>
         </p:txBody>
       </p:sp>
       <p:sp>
         <p:nvSpPr>
-          <p:cNvPr id="48" name="지원 생태계 3"/>
+          <p:cNvPr id="54" name="지원 칩 5"/>
           <p:cNvSpPr/>
           <p:nvPr/>
         </p:nvSpPr>
         <p:spPr>
           <a:xfrm>
-            <a:off x="6144768" y="4974336"/>
-            <a:ext cx="2656332" cy="365760"/>
+            <a:off x="7976616" y="4965192"/>
+            <a:ext cx="1749552" cy="457200"/>
           </a:xfrm>
           <a:prstGeom prst="roundRect">
             <a:avLst>
-              <a:gd name="adj" fmla="val 15000"/>
+              <a:gd name="adj" fmla="val 12000"/>
             </a:avLst>
           </a:prstGeom>
           <a:solidFill>
@@ -8017,14 +8380,14 @@
       </p:sp>
       <p:sp>
         <p:nvSpPr>
-          <p:cNvPr id="49" name="지원 생태계 문구 3"/>
+          <p:cNvPr id="55" name="지원 칩 문구 5"/>
           <p:cNvSpPr txBox="1"/>
           <p:nvPr/>
         </p:nvSpPr>
         <p:spPr>
           <a:xfrm>
-            <a:off x="6236208" y="4974336"/>
-            <a:ext cx="2473452" cy="365760"/>
+            <a:off x="8049768" y="4965192"/>
+            <a:ext cx="1603248" cy="457200"/>
           </a:xfrm>
           <a:prstGeom prst="rect">
             <a:avLst/>
@@ -8040,7 +8403,7 @@
               <a:buNone/>
             </a:pPr>
             <a:r>
-              <a:rPr lang="en-US" sz="850" b="1" dirty="0">
+              <a:rPr lang="en-US" sz="800" b="1" dirty="0">
                 <a:solidFill>
                   <a:srgbClr val="182F48"/>
                 </a:solidFill>
@@ -8048,13 +8411,16 @@
                 <a:ea typeface="Noto Sans KR" pitchFamily="34" charset="-122"/>
                 <a:cs typeface="Noto Sans KR" pitchFamily="34" charset="-120"/>
               </a:rPr>
-              <a:t>협회  </a:t>
-            </a:r>
+              <a:t>협회</a:t>
+            </a:r>
+            <a:endParaRPr lang="en-US" sz="800" dirty="0"/>
+          </a:p>
+          <a:p>
             <a:pPr indent="0" marL="0">
               <a:buNone/>
             </a:pPr>
             <a:r>
-              <a:rPr lang="en-US" sz="850" dirty="0">
+              <a:rPr lang="en-US" sz="800" dirty="0">
                 <a:solidFill>
                   <a:srgbClr val="334155"/>
                 </a:solidFill>
@@ -8064,24 +8430,24 @@
               </a:rPr>
               <a:t>한국아웃도어스포츠산업협회 · 섬유산업연합회</a:t>
             </a:r>
-            <a:endParaRPr lang="en-US" sz="850" dirty="0"/>
+            <a:endParaRPr lang="en-US" sz="800" dirty="0"/>
           </a:p>
         </p:txBody>
       </p:sp>
       <p:sp>
         <p:nvSpPr>
-          <p:cNvPr id="50" name="지원 생태계 4"/>
+          <p:cNvPr id="56" name="지원 칩 6"/>
           <p:cNvSpPr/>
           <p:nvPr/>
         </p:nvSpPr>
         <p:spPr>
           <a:xfrm>
-            <a:off x="8910828" y="4974336"/>
-            <a:ext cx="2656332" cy="365760"/>
+            <a:off x="9817608" y="4965192"/>
+            <a:ext cx="1749552" cy="457200"/>
           </a:xfrm>
           <a:prstGeom prst="roundRect">
             <a:avLst>
-              <a:gd name="adj" fmla="val 15000"/>
+              <a:gd name="adj" fmla="val 12000"/>
             </a:avLst>
           </a:prstGeom>
           <a:solidFill>
@@ -8092,14 +8458,14 @@
       </p:sp>
       <p:sp>
         <p:nvSpPr>
-          <p:cNvPr id="51" name="지원 생태계 문구 4"/>
+          <p:cNvPr id="57" name="지원 칩 문구 6"/>
           <p:cNvSpPr txBox="1"/>
           <p:nvPr/>
         </p:nvSpPr>
         <p:spPr>
           <a:xfrm>
-            <a:off x="9002268" y="4974336"/>
-            <a:ext cx="2473452" cy="365760"/>
+            <a:off x="9890760" y="4965192"/>
+            <a:ext cx="1603248" cy="457200"/>
           </a:xfrm>
           <a:prstGeom prst="rect">
             <a:avLst/>
@@ -8115,7 +8481,7 @@
               <a:buNone/>
             </a:pPr>
             <a:r>
-              <a:rPr lang="en-US" sz="850" b="1" dirty="0">
+              <a:rPr lang="en-US" sz="800" b="1" dirty="0">
                 <a:solidFill>
                   <a:srgbClr val="182F48"/>
                 </a:solidFill>
@@ -8123,13 +8489,16 @@
                 <a:ea typeface="Noto Sans KR" pitchFamily="34" charset="-122"/>
                 <a:cs typeface="Noto Sans KR" pitchFamily="34" charset="-120"/>
               </a:rPr>
-              <a:t>정책 · 공공  </a:t>
-            </a:r>
+              <a:t>정책 · 공공</a:t>
+            </a:r>
+            <a:endParaRPr lang="en-US" sz="800" dirty="0"/>
+          </a:p>
+          <a:p>
             <a:pPr indent="0" marL="0">
               <a:buNone/>
             </a:pPr>
             <a:r>
-              <a:rPr lang="en-US" sz="850" dirty="0">
+              <a:rPr lang="en-US" sz="800" dirty="0">
                 <a:solidFill>
                   <a:srgbClr val="334155"/>
                 </a:solidFill>
@@ -8139,19 +8508,19 @@
               </a:rPr>
               <a:t>산업통상부 · KOTRA · 산림청</a:t>
             </a:r>
-            <a:endParaRPr lang="en-US" sz="850" dirty="0"/>
+            <a:endParaRPr lang="en-US" sz="800" dirty="0"/>
           </a:p>
         </p:txBody>
       </p:sp>
       <p:sp>
         <p:nvSpPr>
-          <p:cNvPr id="52" name="라벨 전시회가 다룰 범위"/>
+          <p:cNvPr id="58" name="라벨 전시회가 다룰 범위"/>
           <p:cNvSpPr txBox="1"/>
           <p:nvPr/>
         </p:nvSpPr>
         <p:spPr>
           <a:xfrm>
-            <a:off x="612648" y="5504688"/>
+            <a:off x="612648" y="5559552"/>
             <a:ext cx="2606040" cy="365760"/>
           </a:xfrm>
           <a:prstGeom prst="rect">
@@ -8184,14 +8553,14 @@
       </p:sp>
       <p:sp>
         <p:nvSpPr>
-          <p:cNvPr id="53" name="범위 설명"/>
+          <p:cNvPr id="59" name="범위 설명"/>
           <p:cNvSpPr txBox="1"/>
           <p:nvPr/>
         </p:nvSpPr>
         <p:spPr>
           <a:xfrm>
-            <a:off x="3383280" y="5504688"/>
-            <a:ext cx="8183880" cy="786384"/>
+            <a:off x="3383280" y="5541264"/>
+            <a:ext cx="8183880" cy="731520"/>
           </a:xfrm>
           <a:prstGeom prst="rect">
             <a:avLst/>
@@ -8205,12 +8574,12 @@
           <a:p>
             <a:pPr indent="0" marL="0">
               <a:spcAft>
-                <a:spcPts val="300"/>
+                <a:spcPts val="200"/>
               </a:spcAft>
               <a:buNone/>
             </a:pPr>
             <a:r>
-              <a:rPr lang="en-US" sz="950" b="1" dirty="0">
+              <a:rPr lang="en-US" sz="900" b="1" dirty="0">
                 <a:solidFill>
                   <a:srgbClr val="267D86"/>
                 </a:solidFill>
@@ -8222,12 +8591,12 @@
             </a:r>
             <a:pPr indent="0" marL="0">
               <a:spcAft>
-                <a:spcPts val="300"/>
+                <a:spcPts val="200"/>
               </a:spcAft>
               <a:buNone/>
             </a:pPr>
             <a:r>
-              <a:rPr lang="en-US" sz="950" b="1" dirty="0">
+              <a:rPr lang="en-US" sz="900" b="1" dirty="0">
                 <a:solidFill>
                   <a:srgbClr val="182F48"/>
                 </a:solidFill>
@@ -8235,33 +8604,33 @@
                 <a:ea typeface="Noto Sans KR" pitchFamily="34" charset="-122"/>
                 <a:cs typeface="Noto Sans KR" pitchFamily="34" charset="-120"/>
               </a:rPr>
-              <a:t>③ 브랜드 ↔ ④ 바이어(수주) + ③ 브랜드 ↔ ⑤ 관심 고객(체험), ① 소재는 스폰서형 소재 랩으로 부분 포함   </a:t>
+              <a:t>③ 브랜드 ↔ ④ 바이어(수주) + ③ 브랜드 ↔ ⑤ 관심 고객(체험)   </a:t>
             </a:r>
             <a:pPr indent="0" marL="0">
               <a:spcAft>
-                <a:spcPts val="300"/>
+                <a:spcPts val="200"/>
               </a:spcAft>
               <a:buNone/>
             </a:pPr>
             <a:r>
-              <a:rPr lang="en-US" sz="950" b="1" dirty="0">
-                <a:solidFill>
-                  <a:srgbClr val="64748B"/>
-                </a:solidFill>
-                <a:latin typeface="Noto Sans KR" pitchFamily="34" charset="0"/>
-                <a:ea typeface="Noto Sans KR" pitchFamily="34" charset="-122"/>
-                <a:cs typeface="Noto Sans KR" pitchFamily="34" charset="-120"/>
-              </a:rPr>
-              <a:t>제외 </a:t>
+              <a:rPr lang="en-US" sz="900" b="1" dirty="0">
+                <a:solidFill>
+                  <a:srgbClr val="267D86"/>
+                </a:solidFill>
+                <a:latin typeface="Noto Sans KR" pitchFamily="34" charset="0"/>
+                <a:ea typeface="Noto Sans KR" pitchFamily="34" charset="-122"/>
+                <a:cs typeface="Noto Sans KR" pitchFamily="34" charset="-120"/>
+              </a:rPr>
+              <a:t>부분 포함 </a:t>
             </a:r>
             <a:pPr indent="0" marL="0">
               <a:spcAft>
-                <a:spcPts val="300"/>
+                <a:spcPts val="200"/>
               </a:spcAft>
               <a:buNone/>
             </a:pPr>
             <a:r>
-              <a:rPr lang="en-US" sz="950" b="1" dirty="0">
+              <a:rPr lang="en-US" sz="900" b="1" dirty="0">
                 <a:solidFill>
                   <a:srgbClr val="182F48"/>
                 </a:solidFill>
@@ -8269,19 +8638,53 @@
                 <a:ea typeface="Noto Sans KR" pitchFamily="34" charset="-122"/>
                 <a:cs typeface="Noto Sans KR" pitchFamily="34" charset="-120"/>
               </a:rPr>
-              <a:t>② 생산(OEM)</a:t>
-            </a:r>
-            <a:endParaRPr lang="en-US" sz="950" dirty="0"/>
-          </a:p>
-          <a:p>
+              <a:t>① 소재 랩 · 물류/마케팅 서비스관   </a:t>
+            </a:r>
             <a:pPr indent="0" marL="0">
               <a:spcAft>
-                <a:spcPts val="300"/>
+                <a:spcPts val="200"/>
               </a:spcAft>
               <a:buNone/>
             </a:pPr>
             <a:r>
-              <a:rPr lang="en-US" sz="950" dirty="0">
+              <a:rPr lang="en-US" sz="900" b="1" dirty="0">
+                <a:solidFill>
+                  <a:srgbClr val="64748B"/>
+                </a:solidFill>
+                <a:latin typeface="Noto Sans KR" pitchFamily="34" charset="0"/>
+                <a:ea typeface="Noto Sans KR" pitchFamily="34" charset="-122"/>
+                <a:cs typeface="Noto Sans KR" pitchFamily="34" charset="-120"/>
+              </a:rPr>
+              <a:t>제외 </a:t>
+            </a:r>
+            <a:pPr indent="0" marL="0">
+              <a:spcAft>
+                <a:spcPts val="200"/>
+              </a:spcAft>
+              <a:buNone/>
+            </a:pPr>
+            <a:r>
+              <a:rPr lang="en-US" sz="900" b="1" dirty="0">
+                <a:solidFill>
+                  <a:srgbClr val="182F48"/>
+                </a:solidFill>
+                <a:latin typeface="Noto Sans KR" pitchFamily="34" charset="0"/>
+                <a:ea typeface="Noto Sans KR" pitchFamily="34" charset="-122"/>
+                <a:cs typeface="Noto Sans KR" pitchFamily="34" charset="-120"/>
+              </a:rPr>
+              <a:t>② 생산(OEM)</a:t>
+            </a:r>
+            <a:endParaRPr lang="en-US" sz="900" dirty="0"/>
+          </a:p>
+          <a:p>
+            <a:pPr indent="0" marL="0">
+              <a:spcAft>
+                <a:spcPts val="200"/>
+              </a:spcAft>
+              <a:buNone/>
+            </a:pPr>
+            <a:r>
+              <a:rPr lang="en-US" sz="900" dirty="0">
                 <a:solidFill>
                   <a:srgbClr val="334155"/>
                 </a:solidFill>
@@ -8289,9 +8692,9 @@
                 <a:ea typeface="Noto Sans KR" pitchFamily="34" charset="-122"/>
                 <a:cs typeface="Noto Sans KR" pitchFamily="34" charset="-120"/>
               </a:rPr>
-              <a:t>이유  (1) 고프코어의 가격 프리미엄은 브랜드 스토리·기능 검증·유통 입점(③~⑤)에서 결정  (2) 소재·OEM 거래는 섬유산업연합회 '프리뷰 인 서울'(코엑스, 약 500개사)이 이미 담당 → 중복 회피  (3) 인터뷰: 브랜드가 원하는 성과는 '관심 고객의 반응'</a:t>
-            </a:r>
-            <a:endParaRPr lang="en-US" sz="950" dirty="0"/>
+              <a:t>이유  (1) 고프코어의 가격 프리미엄은 브랜드 스토리·기능 검증·유통 입점(③~⑤)에서 결정  (2) 소재·OEM 거래는 섬유산업연합회 '프리뷰 인 서울'(코엑스, 약 500개사)이 이미 담당 → 중복 회피  (3) 물류·마케팅사는 신진 브랜드의 해외 진출을 돕는 조력자라 서비스관으로만 참여  (4) 인터뷰: 브랜드가 원하는 성과는 관심 고객의 반응</a:t>
+            </a:r>
+            <a:endParaRPr lang="en-US" sz="900" dirty="0"/>
           </a:p>
         </p:txBody>
       </p:sp>
@@ -8474,7 +8877,7 @@
                 <a:ea typeface="Noto Sans KR" pitchFamily="34" charset="-122"/>
                 <a:cs typeface="Noto Sans KR" pitchFamily="34" charset="-120"/>
               </a:rPr>
-              <a:t>출처: 뉴데일리(2025.9.11) · 한국경제(2025.11.21) · Houyhnhnm·END.(케일) · 무신사 뉴스룸(2024.7.17, 도쿄 쇼룸 / 2025.12, 회원 1,600만) · 스마트투데이(2024, 코오롱스포츠 이토추·센트럴 유통 계약) · 증권사 리포트(2026.4, 스노우피크어패럴 대만 수출) · 참가업체 측 인터뷰(2026.10.17)</a:t>
+              <a:t>출처: 뉴데일리(2025.9.11) · 한국경제(2025.11.21) · Houyhnhnm·END.(케일) · 무신사 뉴스룸(2024.7.17, 도쿄 쇼룸) · 헤럴드경제(2025.12.30, 무신사 회원 1,600만) · 스마트투데이(2024, 코오롱스포츠 이토추·센트럴 유통 계약) · 파이낸셜뉴스(2025.6.10, 무신사 해외 주문 풀필먼트) · 이투데이(2025, CJ대한통운 '더 풀필') · 참가업체 측 인터뷰(2026.10.17)</a:t>
             </a:r>
             <a:endParaRPr lang="en-US" sz="850" dirty="0"/>
           </a:p>
@@ -8528,7 +8931,7 @@
         <p:spPr>
           <a:xfrm>
             <a:off x="3383280" y="1874520"/>
-            <a:ext cx="1963674" cy="1051560"/>
+            <a:ext cx="1563624" cy="1051560"/>
           </a:xfrm>
           <a:prstGeom prst="roundRect">
             <a:avLst>
@@ -8549,8 +8952,8 @@
         </p:nvSpPr>
         <p:spPr>
           <a:xfrm>
-            <a:off x="3474720" y="1920240"/>
-            <a:ext cx="1780794" cy="960120"/>
+            <a:off x="3456432" y="1911096"/>
+            <a:ext cx="1417320" cy="978408"/>
           </a:xfrm>
           <a:prstGeom prst="rect">
             <a:avLst/>
@@ -8569,7 +8972,7 @@
               <a:buNone/>
             </a:pPr>
             <a:r>
-              <a:rPr lang="en-US" sz="1050" b="1" dirty="0">
+              <a:rPr lang="en-US" sz="950" b="1" dirty="0">
                 <a:solidFill>
                   <a:srgbClr val="182F48"/>
                 </a:solidFill>
@@ -8579,7 +8982,7 @@
               </a:rPr>
               <a:t>A  해외 프리미엄 아웃도어</a:t>
             </a:r>
-            <a:endParaRPr lang="en-US" sz="1050" dirty="0"/>
+            <a:endParaRPr lang="en-US" sz="950" dirty="0"/>
           </a:p>
           <a:p>
             <a:pPr indent="0" marL="0">
@@ -8589,7 +8992,7 @@
               <a:buNone/>
             </a:pPr>
             <a:r>
-              <a:rPr lang="en-US" sz="900" b="1" dirty="0">
+              <a:rPr lang="en-US" sz="850" b="1" dirty="0">
                 <a:solidFill>
                   <a:srgbClr val="267D86"/>
                 </a:solidFill>
@@ -8599,7 +9002,7 @@
               </a:rPr>
               <a:t>국내 법인·수입유통</a:t>
             </a:r>
-            <a:endParaRPr lang="en-US" sz="1050" dirty="0"/>
+            <a:endParaRPr lang="en-US" sz="950" dirty="0"/>
           </a:p>
           <a:p>
             <a:pPr indent="0" marL="0">
@@ -8609,7 +9012,7 @@
               <a:buNone/>
             </a:pPr>
             <a:r>
-              <a:rPr lang="en-US" sz="900" dirty="0">
+              <a:rPr lang="en-US" sz="850" dirty="0">
                 <a:solidFill>
                   <a:srgbClr val="334155"/>
                 </a:solidFill>
@@ -8619,7 +9022,7 @@
               </a:rPr>
               <a:t>아크테릭스 · 살로몬 · 마무트 · 살레와(에스엠케이컴퍼니)</a:t>
             </a:r>
-            <a:endParaRPr lang="en-US" sz="1050" dirty="0"/>
+            <a:endParaRPr lang="en-US" sz="950" dirty="0"/>
           </a:p>
         </p:txBody>
       </p:sp>
@@ -8631,8 +9034,8 @@
         </p:nvSpPr>
         <p:spPr>
           <a:xfrm>
-            <a:off x="5456682" y="1874520"/>
-            <a:ext cx="1963674" cy="1051560"/>
+            <a:off x="5038344" y="1874520"/>
+            <a:ext cx="1563624" cy="1051560"/>
           </a:xfrm>
           <a:prstGeom prst="roundRect">
             <a:avLst>
@@ -8653,8 +9056,8 @@
         </p:nvSpPr>
         <p:spPr>
           <a:xfrm>
-            <a:off x="5548122" y="1920240"/>
-            <a:ext cx="1780794" cy="960120"/>
+            <a:off x="5111496" y="1911096"/>
+            <a:ext cx="1417320" cy="978408"/>
           </a:xfrm>
           <a:prstGeom prst="rect">
             <a:avLst/>
@@ -8673,7 +9076,7 @@
               <a:buNone/>
             </a:pPr>
             <a:r>
-              <a:rPr lang="en-US" sz="1050" b="1" dirty="0">
+              <a:rPr lang="en-US" sz="950" b="1" dirty="0">
                 <a:solidFill>
                   <a:srgbClr val="182F48"/>
                 </a:solidFill>
@@ -8681,9 +9084,9 @@
                 <a:ea typeface="Noto Sans KR" pitchFamily="34" charset="-122"/>
                 <a:cs typeface="Noto Sans KR" pitchFamily="34" charset="-120"/>
               </a:rPr>
-              <a:t>B  K-고프코어 디자이너 브랜드</a:t>
-            </a:r>
-            <a:endParaRPr lang="en-US" sz="1050" dirty="0"/>
+              <a:t>B  K-고프코어 브랜드</a:t>
+            </a:r>
+            <a:endParaRPr lang="en-US" sz="950" dirty="0"/>
           </a:p>
           <a:p>
             <a:pPr indent="0" marL="0">
@@ -8693,7 +9096,7 @@
               <a:buNone/>
             </a:pPr>
             <a:r>
-              <a:rPr lang="en-US" sz="900" b="1" dirty="0">
+              <a:rPr lang="en-US" sz="850" b="1" dirty="0">
                 <a:solidFill>
                   <a:srgbClr val="267D86"/>
                 </a:solidFill>
@@ -8703,7 +9106,7 @@
               </a:rPr>
               <a:t>신진·독립 브랜드</a:t>
             </a:r>
-            <a:endParaRPr lang="en-US" sz="1050" dirty="0"/>
+            <a:endParaRPr lang="en-US" sz="950" dirty="0"/>
           </a:p>
           <a:p>
             <a:pPr indent="0" marL="0">
@@ -8713,7 +9116,7 @@
               <a:buNone/>
             </a:pPr>
             <a:r>
-              <a:rPr lang="en-US" sz="900" dirty="0">
+              <a:rPr lang="en-US" sz="850" dirty="0">
                 <a:solidFill>
                   <a:srgbClr val="334155"/>
                 </a:solidFill>
@@ -8723,7 +9126,7 @@
               </a:rPr>
               <a:t>케일(CAYL) · 산산기어 · 제로그램</a:t>
             </a:r>
-            <a:endParaRPr lang="en-US" sz="1050" dirty="0"/>
+            <a:endParaRPr lang="en-US" sz="950" dirty="0"/>
           </a:p>
         </p:txBody>
       </p:sp>
@@ -8735,8 +9138,8 @@
         </p:nvSpPr>
         <p:spPr>
           <a:xfrm>
-            <a:off x="7530084" y="1874520"/>
-            <a:ext cx="1963674" cy="1051560"/>
+            <a:off x="6693408" y="1874520"/>
+            <a:ext cx="1563624" cy="1051560"/>
           </a:xfrm>
           <a:prstGeom prst="roundRect">
             <a:avLst>
@@ -8757,8 +9160,8 @@
         </p:nvSpPr>
         <p:spPr>
           <a:xfrm>
-            <a:off x="7621524" y="1920240"/>
-            <a:ext cx="1780794" cy="960120"/>
+            <a:off x="6766560" y="1911096"/>
+            <a:ext cx="1417320" cy="978408"/>
           </a:xfrm>
           <a:prstGeom prst="rect">
             <a:avLst/>
@@ -8777,7 +9180,7 @@
               <a:buNone/>
             </a:pPr>
             <a:r>
-              <a:rPr lang="en-US" sz="1050" b="1" dirty="0">
+              <a:rPr lang="en-US" sz="950" b="1" dirty="0">
                 <a:solidFill>
                   <a:srgbClr val="182F48"/>
                 </a:solidFill>
@@ -8787,7 +9190,7 @@
               </a:rPr>
               <a:t>C  국내 대형사 고프코어 라인</a:t>
             </a:r>
-            <a:endParaRPr lang="en-US" sz="1050" dirty="0"/>
+            <a:endParaRPr lang="en-US" sz="950" dirty="0"/>
           </a:p>
           <a:p>
             <a:pPr indent="0" marL="0">
@@ -8797,7 +9200,7 @@
               <a:buNone/>
             </a:pPr>
             <a:r>
-              <a:rPr lang="en-US" sz="900" b="1" dirty="0">
+              <a:rPr lang="en-US" sz="850" b="1" dirty="0">
                 <a:solidFill>
                   <a:srgbClr val="267D86"/>
                 </a:solidFill>
@@ -8807,7 +9210,7 @@
               </a:rPr>
               <a:t>아웃도어 대기업</a:t>
             </a:r>
-            <a:endParaRPr lang="en-US" sz="1050" dirty="0"/>
+            <a:endParaRPr lang="en-US" sz="950" dirty="0"/>
           </a:p>
           <a:p>
             <a:pPr indent="0" marL="0">
@@ -8817,7 +9220,7 @@
               <a:buNone/>
             </a:pPr>
             <a:r>
-              <a:rPr lang="en-US" sz="900" dirty="0">
+              <a:rPr lang="en-US" sz="850" dirty="0">
                 <a:solidFill>
                   <a:srgbClr val="334155"/>
                 </a:solidFill>
@@ -8827,7 +9230,7 @@
               </a:rPr>
               <a:t>노스페이스(영원아웃도어) · 코오롱스포츠 · 스노우피크어패럴</a:t>
             </a:r>
-            <a:endParaRPr lang="en-US" sz="1050" dirty="0"/>
+            <a:endParaRPr lang="en-US" sz="950" dirty="0"/>
           </a:p>
         </p:txBody>
       </p:sp>
@@ -8839,8 +9242,8 @@
         </p:nvSpPr>
         <p:spPr>
           <a:xfrm>
-            <a:off x="9603486" y="1874520"/>
-            <a:ext cx="1963674" cy="1051560"/>
+            <a:off x="8348472" y="1874520"/>
+            <a:ext cx="1563624" cy="1051560"/>
           </a:xfrm>
           <a:prstGeom prst="roundRect">
             <a:avLst>
@@ -8861,8 +9264,8 @@
         </p:nvSpPr>
         <p:spPr>
           <a:xfrm>
-            <a:off x="9694926" y="1920240"/>
-            <a:ext cx="1780794" cy="960120"/>
+            <a:off x="8421624" y="1911096"/>
+            <a:ext cx="1417320" cy="978408"/>
           </a:xfrm>
           <a:prstGeom prst="rect">
             <a:avLst/>
@@ -8881,7 +9284,7 @@
               <a:buNone/>
             </a:pPr>
             <a:r>
-              <a:rPr lang="en-US" sz="1050" b="1" dirty="0">
+              <a:rPr lang="en-US" sz="950" b="1" dirty="0">
                 <a:solidFill>
                   <a:srgbClr val="182F48"/>
                 </a:solidFill>
@@ -8891,7 +9294,7 @@
               </a:rPr>
               <a:t>D  기능성 소재 (소재 랩)</a:t>
             </a:r>
-            <a:endParaRPr lang="en-US" sz="1050" dirty="0"/>
+            <a:endParaRPr lang="en-US" sz="950" dirty="0"/>
           </a:p>
           <a:p>
             <a:pPr indent="0" marL="0">
@@ -8901,7 +9304,7 @@
               <a:buNone/>
             </a:pPr>
             <a:r>
-              <a:rPr lang="en-US" sz="900" b="1" dirty="0">
+              <a:rPr lang="en-US" sz="850" b="1" dirty="0">
                 <a:solidFill>
                   <a:srgbClr val="267D86"/>
                 </a:solidFill>
@@ -8911,7 +9314,7 @@
               </a:rPr>
               <a:t>스폰서형 참가</a:t>
             </a:r>
-            <a:endParaRPr lang="en-US" sz="1050" dirty="0"/>
+            <a:endParaRPr lang="en-US" sz="950" dirty="0"/>
           </a:p>
           <a:p>
             <a:pPr indent="0" marL="0">
@@ -8921,7 +9324,7 @@
               <a:buNone/>
             </a:pPr>
             <a:r>
-              <a:rPr lang="en-US" sz="900" dirty="0">
+              <a:rPr lang="en-US" sz="850" dirty="0">
                 <a:solidFill>
                   <a:srgbClr val="334155"/>
                 </a:solidFill>
@@ -8931,63 +9334,24 @@
               </a:rPr>
               <a:t>고어텍스 · 폴라텍 · 효성티앤씨</a:t>
             </a:r>
-            <a:endParaRPr lang="en-US" sz="1050" dirty="0"/>
+            <a:endParaRPr lang="en-US" sz="950" dirty="0"/>
           </a:p>
         </p:txBody>
       </p:sp>
       <p:sp>
         <p:nvSpPr>
-          <p:cNvPr id="16" name="라벨 바이어 카테고리"/>
-          <p:cNvSpPr txBox="1"/>
-          <p:nvPr/>
-        </p:nvSpPr>
-        <p:spPr>
-          <a:xfrm>
-            <a:off x="612648" y="3090672"/>
-            <a:ext cx="2606040" cy="365760"/>
-          </a:xfrm>
-          <a:prstGeom prst="rect">
-            <a:avLst/>
-          </a:prstGeom>
-          <a:noFill/>
-          <a:ln/>
-        </p:spPr>
-        <p:txBody>
-          <a:bodyPr wrap="square" lIns="0" tIns="0" rIns="0" bIns="0" rtlCol="0" anchor="t"/>
-          <a:lstStyle/>
-          <a:p>
-            <a:pPr indent="0" marL="0">
-              <a:buNone/>
-            </a:pPr>
-            <a:r>
-              <a:rPr lang="en-US" sz="1500" b="1" dirty="0">
-                <a:solidFill>
-                  <a:srgbClr val="182F48"/>
-                </a:solidFill>
-                <a:latin typeface="Noto Sans KR" pitchFamily="34" charset="0"/>
-                <a:ea typeface="Noto Sans KR" pitchFamily="34" charset="-122"/>
-                <a:cs typeface="Noto Sans KR" pitchFamily="34" charset="-120"/>
-              </a:rPr>
-              <a:t>바이어 카테고리</a:t>
-            </a:r>
-            <a:endParaRPr lang="en-US" sz="1500" dirty="0"/>
-          </a:p>
-        </p:txBody>
-      </p:sp>
-      <p:sp>
-        <p:nvSpPr>
-          <p:cNvPr id="17" name="바이어 ① 배경"/>
+          <p:cNvPr id="16" name="참가업체 E 배경"/>
           <p:cNvSpPr/>
           <p:nvPr/>
         </p:nvSpPr>
         <p:spPr>
           <a:xfrm>
-            <a:off x="3383280" y="3044952"/>
-            <a:ext cx="1563624" cy="914400"/>
+            <a:off x="10003536" y="1874520"/>
+            <a:ext cx="1563624" cy="1051560"/>
           </a:xfrm>
           <a:prstGeom prst="roundRect">
             <a:avLst>
-              <a:gd name="adj" fmla="val 6000"/>
+              <a:gd name="adj" fmla="val 5217"/>
             </a:avLst>
           </a:prstGeom>
           <a:solidFill>
@@ -8998,14 +9362,14 @@
       </p:sp>
       <p:sp>
         <p:nvSpPr>
-          <p:cNvPr id="18" name="바이어 ①"/>
+          <p:cNvPr id="17" name="참가업체 E"/>
           <p:cNvSpPr txBox="1"/>
           <p:nvPr/>
         </p:nvSpPr>
         <p:spPr>
           <a:xfrm>
-            <a:off x="3456432" y="3090672"/>
-            <a:ext cx="1417320" cy="822960"/>
+            <a:off x="10076688" y="1911096"/>
+            <a:ext cx="1417320" cy="978408"/>
           </a:xfrm>
           <a:prstGeom prst="rect">
             <a:avLst/>
@@ -9032,7 +9396,7 @@
                 <a:ea typeface="Noto Sans KR" pitchFamily="34" charset="-122"/>
                 <a:cs typeface="Noto Sans KR" pitchFamily="34" charset="-120"/>
               </a:rPr>
-              <a:t>① 온라인 패션 플랫폼 MD</a:t>
+              <a:t>E  성장 서비스 (서비스관)</a:t>
             </a:r>
             <a:endParaRPr lang="en-US" sz="950" dirty="0"/>
           </a:p>
@@ -9044,62 +9408,18 @@
               <a:buNone/>
             </a:pPr>
             <a:r>
-              <a:rPr lang="en-US" sz="850" dirty="0">
-                <a:solidFill>
-                  <a:srgbClr val="334155"/>
-                </a:solidFill>
-                <a:latin typeface="Noto Sans KR" pitchFamily="34" charset="0"/>
-                <a:ea typeface="Noto Sans KR" pitchFamily="34" charset="-122"/>
-                <a:cs typeface="Noto Sans KR" pitchFamily="34" charset="-120"/>
-              </a:rPr>
-              <a:t>무신사(회원 1,600만) · 29CM · KREAM</a:t>
+              <a:rPr lang="en-US" sz="850" b="1" dirty="0">
+                <a:solidFill>
+                  <a:srgbClr val="267D86"/>
+                </a:solidFill>
+                <a:latin typeface="Noto Sans KR" pitchFamily="34" charset="0"/>
+                <a:ea typeface="Noto Sans KR" pitchFamily="34" charset="-122"/>
+                <a:cs typeface="Noto Sans KR" pitchFamily="34" charset="-120"/>
+              </a:rPr>
+              <a:t>물류 · 마케팅</a:t>
             </a:r>
             <a:endParaRPr lang="en-US" sz="950" dirty="0"/>
           </a:p>
-        </p:txBody>
-      </p:sp>
-      <p:sp>
-        <p:nvSpPr>
-          <p:cNvPr id="19" name="바이어 ② 배경"/>
-          <p:cNvSpPr/>
-          <p:nvPr/>
-        </p:nvSpPr>
-        <p:spPr>
-          <a:xfrm>
-            <a:off x="5038344" y="3044952"/>
-            <a:ext cx="1563624" cy="914400"/>
-          </a:xfrm>
-          <a:prstGeom prst="roundRect">
-            <a:avLst>
-              <a:gd name="adj" fmla="val 6000"/>
-            </a:avLst>
-          </a:prstGeom>
-          <a:solidFill>
-            <a:srgbClr val="F1F5F9"/>
-          </a:solidFill>
-          <a:ln/>
-        </p:spPr>
-      </p:sp>
-      <p:sp>
-        <p:nvSpPr>
-          <p:cNvPr id="20" name="바이어 ②"/>
-          <p:cNvSpPr txBox="1"/>
-          <p:nvPr/>
-        </p:nvSpPr>
-        <p:spPr>
-          <a:xfrm>
-            <a:off x="5111496" y="3090672"/>
-            <a:ext cx="1417320" cy="822960"/>
-          </a:xfrm>
-          <a:prstGeom prst="rect">
-            <a:avLst/>
-          </a:prstGeom>
-          <a:noFill/>
-          <a:ln/>
-        </p:spPr>
-        <p:txBody>
-          <a:bodyPr wrap="square" lIns="0" tIns="0" rIns="0" bIns="0" rtlCol="0" anchor="t"/>
-          <a:lstStyle/>
           <a:p>
             <a:pPr indent="0" marL="0">
               <a:spcAft>
@@ -9108,7 +9428,46 @@
               <a:buNone/>
             </a:pPr>
             <a:r>
-              <a:rPr lang="en-US" sz="950" b="1" dirty="0">
+              <a:rPr lang="en-US" sz="850" dirty="0">
+                <a:solidFill>
+                  <a:srgbClr val="334155"/>
+                </a:solidFill>
+                <a:latin typeface="Noto Sans KR" pitchFamily="34" charset="0"/>
+                <a:ea typeface="Noto Sans KR" pitchFamily="34" charset="-122"/>
+                <a:cs typeface="Noto Sans KR" pitchFamily="34" charset="-120"/>
+              </a:rPr>
+              <a:t>CJ대한통운(더 풀필) · 무신사 로지스틱스 · 마케팅 대행사 외</a:t>
+            </a:r>
+            <a:endParaRPr lang="en-US" sz="950" dirty="0"/>
+          </a:p>
+        </p:txBody>
+      </p:sp>
+      <p:sp>
+        <p:nvSpPr>
+          <p:cNvPr id="18" name="라벨 바이어 카테고리"/>
+          <p:cNvSpPr txBox="1"/>
+          <p:nvPr/>
+        </p:nvSpPr>
+        <p:spPr>
+          <a:xfrm>
+            <a:off x="612648" y="3090672"/>
+            <a:ext cx="2606040" cy="365760"/>
+          </a:xfrm>
+          <a:prstGeom prst="rect">
+            <a:avLst/>
+          </a:prstGeom>
+          <a:noFill/>
+          <a:ln/>
+        </p:spPr>
+        <p:txBody>
+          <a:bodyPr wrap="square" lIns="0" tIns="0" rIns="0" bIns="0" rtlCol="0" anchor="t"/>
+          <a:lstStyle/>
+          <a:p>
+            <a:pPr indent="0" marL="0">
+              <a:buNone/>
+            </a:pPr>
+            <a:r>
+              <a:rPr lang="en-US" sz="1500" b="1" dirty="0">
                 <a:solidFill>
                   <a:srgbClr val="182F48"/>
                 </a:solidFill>
@@ -9116,10 +9475,54 @@
                 <a:ea typeface="Noto Sans KR" pitchFamily="34" charset="-122"/>
                 <a:cs typeface="Noto Sans KR" pitchFamily="34" charset="-120"/>
               </a:rPr>
-              <a:t>② 백화점 아웃도어 바이어</a:t>
-            </a:r>
-            <a:endParaRPr lang="en-US" sz="950" dirty="0"/>
-          </a:p>
+              <a:t>바이어 카테고리</a:t>
+            </a:r>
+            <a:endParaRPr lang="en-US" sz="1500" dirty="0"/>
+          </a:p>
+        </p:txBody>
+      </p:sp>
+      <p:sp>
+        <p:nvSpPr>
+          <p:cNvPr id="19" name="바이어 ① 배경"/>
+          <p:cNvSpPr/>
+          <p:nvPr/>
+        </p:nvSpPr>
+        <p:spPr>
+          <a:xfrm>
+            <a:off x="3383280" y="3017520"/>
+            <a:ext cx="1563624" cy="896112"/>
+          </a:xfrm>
+          <a:prstGeom prst="roundRect">
+            <a:avLst>
+              <a:gd name="adj" fmla="val 6122"/>
+            </a:avLst>
+          </a:prstGeom>
+          <a:solidFill>
+            <a:srgbClr val="F1F5F9"/>
+          </a:solidFill>
+          <a:ln/>
+        </p:spPr>
+      </p:sp>
+      <p:sp>
+        <p:nvSpPr>
+          <p:cNvPr id="20" name="바이어 ①"/>
+          <p:cNvSpPr txBox="1"/>
+          <p:nvPr/>
+        </p:nvSpPr>
+        <p:spPr>
+          <a:xfrm>
+            <a:off x="3456432" y="3054096"/>
+            <a:ext cx="1417320" cy="822960"/>
+          </a:xfrm>
+          <a:prstGeom prst="rect">
+            <a:avLst/>
+          </a:prstGeom>
+          <a:noFill/>
+          <a:ln/>
+        </p:spPr>
+        <p:txBody>
+          <a:bodyPr wrap="square" lIns="0" tIns="0" rIns="0" bIns="0" rtlCol="0" anchor="t"/>
+          <a:lstStyle/>
           <a:p>
             <a:pPr indent="0" marL="0">
               <a:spcAft>
@@ -9128,62 +9531,18 @@
               <a:buNone/>
             </a:pPr>
             <a:r>
-              <a:rPr lang="en-US" sz="850" dirty="0">
-                <a:solidFill>
-                  <a:srgbClr val="334155"/>
-                </a:solidFill>
-                <a:latin typeface="Noto Sans KR" pitchFamily="34" charset="0"/>
-                <a:ea typeface="Noto Sans KR" pitchFamily="34" charset="-122"/>
-                <a:cs typeface="Noto Sans KR" pitchFamily="34" charset="-120"/>
-              </a:rPr>
-              <a:t>현대 · 신세계 · 롯데백화점</a:t>
+              <a:rPr lang="en-US" sz="950" b="1" dirty="0">
+                <a:solidFill>
+                  <a:srgbClr val="182F48"/>
+                </a:solidFill>
+                <a:latin typeface="Noto Sans KR" pitchFamily="34" charset="0"/>
+                <a:ea typeface="Noto Sans KR" pitchFamily="34" charset="-122"/>
+                <a:cs typeface="Noto Sans KR" pitchFamily="34" charset="-120"/>
+              </a:rPr>
+              <a:t>① 온라인 패션 플랫폼 MD</a:t>
             </a:r>
             <a:endParaRPr lang="en-US" sz="950" dirty="0"/>
           </a:p>
-        </p:txBody>
-      </p:sp>
-      <p:sp>
-        <p:nvSpPr>
-          <p:cNvPr id="21" name="바이어 ③ 배경"/>
-          <p:cNvSpPr/>
-          <p:nvPr/>
-        </p:nvSpPr>
-        <p:spPr>
-          <a:xfrm>
-            <a:off x="6693408" y="3044952"/>
-            <a:ext cx="1563624" cy="914400"/>
-          </a:xfrm>
-          <a:prstGeom prst="roundRect">
-            <a:avLst>
-              <a:gd name="adj" fmla="val 6000"/>
-            </a:avLst>
-          </a:prstGeom>
-          <a:solidFill>
-            <a:srgbClr val="F1F5F9"/>
-          </a:solidFill>
-          <a:ln/>
-        </p:spPr>
-      </p:sp>
-      <p:sp>
-        <p:nvSpPr>
-          <p:cNvPr id="22" name="바이어 ③"/>
-          <p:cNvSpPr txBox="1"/>
-          <p:nvPr/>
-        </p:nvSpPr>
-        <p:spPr>
-          <a:xfrm>
-            <a:off x="6766560" y="3090672"/>
-            <a:ext cx="1417320" cy="822960"/>
-          </a:xfrm>
-          <a:prstGeom prst="rect">
-            <a:avLst/>
-          </a:prstGeom>
-          <a:noFill/>
-          <a:ln/>
-        </p:spPr>
-        <p:txBody>
-          <a:bodyPr wrap="square" lIns="0" tIns="0" rIns="0" bIns="0" rtlCol="0" anchor="t"/>
-          <a:lstStyle/>
           <a:p>
             <a:pPr indent="0" marL="0">
               <a:spcAft>
@@ -9192,18 +9551,62 @@
               <a:buNone/>
             </a:pPr>
             <a:r>
-              <a:rPr lang="en-US" sz="950" b="1" dirty="0">
-                <a:solidFill>
-                  <a:srgbClr val="182F48"/>
-                </a:solidFill>
-                <a:latin typeface="Noto Sans KR" pitchFamily="34" charset="0"/>
-                <a:ea typeface="Noto Sans KR" pitchFamily="34" charset="-122"/>
-                <a:cs typeface="Noto Sans KR" pitchFamily="34" charset="-120"/>
-              </a:rPr>
-              <a:t>③ 국내외 편집숍 바이어</a:t>
+              <a:rPr lang="en-US" sz="850" dirty="0">
+                <a:solidFill>
+                  <a:srgbClr val="334155"/>
+                </a:solidFill>
+                <a:latin typeface="Noto Sans KR" pitchFamily="34" charset="0"/>
+                <a:ea typeface="Noto Sans KR" pitchFamily="34" charset="-122"/>
+                <a:cs typeface="Noto Sans KR" pitchFamily="34" charset="-120"/>
+              </a:rPr>
+              <a:t>무신사(회원 1,600만) · 29CM · KREAM</a:t>
             </a:r>
             <a:endParaRPr lang="en-US" sz="950" dirty="0"/>
           </a:p>
+        </p:txBody>
+      </p:sp>
+      <p:sp>
+        <p:nvSpPr>
+          <p:cNvPr id="21" name="바이어 ② 배경"/>
+          <p:cNvSpPr/>
+          <p:nvPr/>
+        </p:nvSpPr>
+        <p:spPr>
+          <a:xfrm>
+            <a:off x="5038344" y="3017520"/>
+            <a:ext cx="1563624" cy="896112"/>
+          </a:xfrm>
+          <a:prstGeom prst="roundRect">
+            <a:avLst>
+              <a:gd name="adj" fmla="val 6122"/>
+            </a:avLst>
+          </a:prstGeom>
+          <a:solidFill>
+            <a:srgbClr val="F1F5F9"/>
+          </a:solidFill>
+          <a:ln/>
+        </p:spPr>
+      </p:sp>
+      <p:sp>
+        <p:nvSpPr>
+          <p:cNvPr id="22" name="바이어 ②"/>
+          <p:cNvSpPr txBox="1"/>
+          <p:nvPr/>
+        </p:nvSpPr>
+        <p:spPr>
+          <a:xfrm>
+            <a:off x="5111496" y="3054096"/>
+            <a:ext cx="1417320" cy="822960"/>
+          </a:xfrm>
+          <a:prstGeom prst="rect">
+            <a:avLst/>
+          </a:prstGeom>
+          <a:noFill/>
+          <a:ln/>
+        </p:spPr>
+        <p:txBody>
+          <a:bodyPr wrap="square" lIns="0" tIns="0" rIns="0" bIns="0" rtlCol="0" anchor="t"/>
+          <a:lstStyle/>
           <a:p>
             <a:pPr indent="0" marL="0">
               <a:spcAft>
@@ -9212,62 +9615,18 @@
               <a:buNone/>
             </a:pPr>
             <a:r>
-              <a:rPr lang="en-US" sz="850" dirty="0">
-                <a:solidFill>
-                  <a:srgbClr val="334155"/>
-                </a:solidFill>
-                <a:latin typeface="Noto Sans KR" pitchFamily="34" charset="0"/>
-                <a:ea typeface="Noto Sans KR" pitchFamily="34" charset="-122"/>
-                <a:cs typeface="Noto Sans KR" pitchFamily="34" charset="-120"/>
-              </a:rPr>
-              <a:t>웍스아웃 / 1LDK · 빔즈 · 유나이티드애로우즈 / END.</a:t>
+              <a:rPr lang="en-US" sz="950" b="1" dirty="0">
+                <a:solidFill>
+                  <a:srgbClr val="182F48"/>
+                </a:solidFill>
+                <a:latin typeface="Noto Sans KR" pitchFamily="34" charset="0"/>
+                <a:ea typeface="Noto Sans KR" pitchFamily="34" charset="-122"/>
+                <a:cs typeface="Noto Sans KR" pitchFamily="34" charset="-120"/>
+              </a:rPr>
+              <a:t>② 백화점 아웃도어 바이어</a:t>
             </a:r>
             <a:endParaRPr lang="en-US" sz="950" dirty="0"/>
           </a:p>
-        </p:txBody>
-      </p:sp>
-      <p:sp>
-        <p:nvSpPr>
-          <p:cNvPr id="23" name="바이어 ④ 배경"/>
-          <p:cNvSpPr/>
-          <p:nvPr/>
-        </p:nvSpPr>
-        <p:spPr>
-          <a:xfrm>
-            <a:off x="8348472" y="3044952"/>
-            <a:ext cx="1563624" cy="914400"/>
-          </a:xfrm>
-          <a:prstGeom prst="roundRect">
-            <a:avLst>
-              <a:gd name="adj" fmla="val 6000"/>
-            </a:avLst>
-          </a:prstGeom>
-          <a:solidFill>
-            <a:srgbClr val="F1F5F9"/>
-          </a:solidFill>
-          <a:ln/>
-        </p:spPr>
-      </p:sp>
-      <p:sp>
-        <p:nvSpPr>
-          <p:cNvPr id="24" name="바이어 ④"/>
-          <p:cNvSpPr txBox="1"/>
-          <p:nvPr/>
-        </p:nvSpPr>
-        <p:spPr>
-          <a:xfrm>
-            <a:off x="8421624" y="3090672"/>
-            <a:ext cx="1417320" cy="822960"/>
-          </a:xfrm>
-          <a:prstGeom prst="rect">
-            <a:avLst/>
-          </a:prstGeom>
-          <a:noFill/>
-          <a:ln/>
-        </p:spPr>
-        <p:txBody>
-          <a:bodyPr wrap="square" lIns="0" tIns="0" rIns="0" bIns="0" rtlCol="0" anchor="t"/>
-          <a:lstStyle/>
           <a:p>
             <a:pPr indent="0" marL="0">
               <a:spcAft>
@@ -9276,18 +9635,62 @@
               <a:buNone/>
             </a:pPr>
             <a:r>
-              <a:rPr lang="en-US" sz="950" b="1" dirty="0">
-                <a:solidFill>
-                  <a:srgbClr val="182F48"/>
-                </a:solidFill>
-                <a:latin typeface="Noto Sans KR" pitchFamily="34" charset="0"/>
-                <a:ea typeface="Noto Sans KR" pitchFamily="34" charset="-122"/>
-                <a:cs typeface="Noto Sans KR" pitchFamily="34" charset="-120"/>
-              </a:rPr>
-              <a:t>④ 해외 총판 · 종합상사</a:t>
+              <a:rPr lang="en-US" sz="850" dirty="0">
+                <a:solidFill>
+                  <a:srgbClr val="334155"/>
+                </a:solidFill>
+                <a:latin typeface="Noto Sans KR" pitchFamily="34" charset="0"/>
+                <a:ea typeface="Noto Sans KR" pitchFamily="34" charset="-122"/>
+                <a:cs typeface="Noto Sans KR" pitchFamily="34" charset="-120"/>
+              </a:rPr>
+              <a:t>현대 · 신세계 · 롯데백화점</a:t>
             </a:r>
             <a:endParaRPr lang="en-US" sz="950" dirty="0"/>
           </a:p>
+        </p:txBody>
+      </p:sp>
+      <p:sp>
+        <p:nvSpPr>
+          <p:cNvPr id="23" name="바이어 ③ 배경"/>
+          <p:cNvSpPr/>
+          <p:nvPr/>
+        </p:nvSpPr>
+        <p:spPr>
+          <a:xfrm>
+            <a:off x="6693408" y="3017520"/>
+            <a:ext cx="1563624" cy="896112"/>
+          </a:xfrm>
+          <a:prstGeom prst="roundRect">
+            <a:avLst>
+              <a:gd name="adj" fmla="val 6122"/>
+            </a:avLst>
+          </a:prstGeom>
+          <a:solidFill>
+            <a:srgbClr val="F1F5F9"/>
+          </a:solidFill>
+          <a:ln/>
+        </p:spPr>
+      </p:sp>
+      <p:sp>
+        <p:nvSpPr>
+          <p:cNvPr id="24" name="바이어 ③"/>
+          <p:cNvSpPr txBox="1"/>
+          <p:nvPr/>
+        </p:nvSpPr>
+        <p:spPr>
+          <a:xfrm>
+            <a:off x="6766560" y="3054096"/>
+            <a:ext cx="1417320" cy="822960"/>
+          </a:xfrm>
+          <a:prstGeom prst="rect">
+            <a:avLst/>
+          </a:prstGeom>
+          <a:noFill/>
+          <a:ln/>
+        </p:spPr>
+        <p:txBody>
+          <a:bodyPr wrap="square" lIns="0" tIns="0" rIns="0" bIns="0" rtlCol="0" anchor="t"/>
+          <a:lstStyle/>
           <a:p>
             <a:pPr indent="0" marL="0">
               <a:spcAft>
@@ -9296,62 +9699,18 @@
               <a:buNone/>
             </a:pPr>
             <a:r>
-              <a:rPr lang="en-US" sz="850" dirty="0">
-                <a:solidFill>
-                  <a:srgbClr val="334155"/>
-                </a:solidFill>
-                <a:latin typeface="Noto Sans KR" pitchFamily="34" charset="0"/>
-                <a:ea typeface="Noto Sans KR" pitchFamily="34" charset="-122"/>
-                <a:cs typeface="Noto Sans KR" pitchFamily="34" charset="-120"/>
-              </a:rPr>
-              <a:t>이토추상사(일본) · 센트럴그룹(태국)</a:t>
+              <a:rPr lang="en-US" sz="950" b="1" dirty="0">
+                <a:solidFill>
+                  <a:srgbClr val="182F48"/>
+                </a:solidFill>
+                <a:latin typeface="Noto Sans KR" pitchFamily="34" charset="0"/>
+                <a:ea typeface="Noto Sans KR" pitchFamily="34" charset="-122"/>
+                <a:cs typeface="Noto Sans KR" pitchFamily="34" charset="-120"/>
+              </a:rPr>
+              <a:t>③ 국내외 편집숍 바이어</a:t>
             </a:r>
             <a:endParaRPr lang="en-US" sz="950" dirty="0"/>
           </a:p>
-        </p:txBody>
-      </p:sp>
-      <p:sp>
-        <p:nvSpPr>
-          <p:cNvPr id="25" name="바이어 ⑤ 배경"/>
-          <p:cNvSpPr/>
-          <p:nvPr/>
-        </p:nvSpPr>
-        <p:spPr>
-          <a:xfrm>
-            <a:off x="10003536" y="3044952"/>
-            <a:ext cx="1563624" cy="914400"/>
-          </a:xfrm>
-          <a:prstGeom prst="roundRect">
-            <a:avLst>
-              <a:gd name="adj" fmla="val 6000"/>
-            </a:avLst>
-          </a:prstGeom>
-          <a:solidFill>
-            <a:srgbClr val="FFF1E8"/>
-          </a:solidFill>
-          <a:ln/>
-        </p:spPr>
-      </p:sp>
-      <p:sp>
-        <p:nvSpPr>
-          <p:cNvPr id="26" name="바이어 ⑤"/>
-          <p:cNvSpPr txBox="1"/>
-          <p:nvPr/>
-        </p:nvSpPr>
-        <p:spPr>
-          <a:xfrm>
-            <a:off x="10076688" y="3090672"/>
-            <a:ext cx="1417320" cy="822960"/>
-          </a:xfrm>
-          <a:prstGeom prst="rect">
-            <a:avLst/>
-          </a:prstGeom>
-          <a:noFill/>
-          <a:ln/>
-        </p:spPr>
-        <p:txBody>
-          <a:bodyPr wrap="square" lIns="0" tIns="0" rIns="0" bIns="0" rtlCol="0" anchor="t"/>
-          <a:lstStyle/>
           <a:p>
             <a:pPr indent="0" marL="0">
               <a:spcAft>
@@ -9360,18 +9719,62 @@
               <a:buNone/>
             </a:pPr>
             <a:r>
-              <a:rPr lang="en-US" sz="950" b="1" dirty="0">
-                <a:solidFill>
-                  <a:srgbClr val="C2410C"/>
-                </a:solidFill>
-                <a:latin typeface="Noto Sans KR" pitchFamily="34" charset="0"/>
-                <a:ea typeface="Noto Sans KR" pitchFamily="34" charset="-122"/>
-                <a:cs typeface="Noto Sans KR" pitchFamily="34" charset="-120"/>
-              </a:rPr>
-              <a:t>⑤ 관심 소비자 (퍼블릭)</a:t>
+              <a:rPr lang="en-US" sz="850" dirty="0">
+                <a:solidFill>
+                  <a:srgbClr val="334155"/>
+                </a:solidFill>
+                <a:latin typeface="Noto Sans KR" pitchFamily="34" charset="0"/>
+                <a:ea typeface="Noto Sans KR" pitchFamily="34" charset="-122"/>
+                <a:cs typeface="Noto Sans KR" pitchFamily="34" charset="-120"/>
+              </a:rPr>
+              <a:t>웍스아웃 / 1LDK · 빔즈 · 유나이티드애로우즈 / END.</a:t>
             </a:r>
             <a:endParaRPr lang="en-US" sz="950" dirty="0"/>
           </a:p>
+        </p:txBody>
+      </p:sp>
+      <p:sp>
+        <p:nvSpPr>
+          <p:cNvPr id="25" name="바이어 ④ 배경"/>
+          <p:cNvSpPr/>
+          <p:nvPr/>
+        </p:nvSpPr>
+        <p:spPr>
+          <a:xfrm>
+            <a:off x="8348472" y="3017520"/>
+            <a:ext cx="1563624" cy="896112"/>
+          </a:xfrm>
+          <a:prstGeom prst="roundRect">
+            <a:avLst>
+              <a:gd name="adj" fmla="val 6122"/>
+            </a:avLst>
+          </a:prstGeom>
+          <a:solidFill>
+            <a:srgbClr val="F1F5F9"/>
+          </a:solidFill>
+          <a:ln/>
+        </p:spPr>
+      </p:sp>
+      <p:sp>
+        <p:nvSpPr>
+          <p:cNvPr id="26" name="바이어 ④"/>
+          <p:cNvSpPr txBox="1"/>
+          <p:nvPr/>
+        </p:nvSpPr>
+        <p:spPr>
+          <a:xfrm>
+            <a:off x="8421624" y="3054096"/>
+            <a:ext cx="1417320" cy="822960"/>
+          </a:xfrm>
+          <a:prstGeom prst="rect">
+            <a:avLst/>
+          </a:prstGeom>
+          <a:noFill/>
+          <a:ln/>
+        </p:spPr>
+        <p:txBody>
+          <a:bodyPr wrap="square" lIns="0" tIns="0" rIns="0" bIns="0" rtlCol="0" anchor="t"/>
+          <a:lstStyle/>
           <a:p>
             <a:pPr indent="0" marL="0">
               <a:spcAft>
@@ -9380,6 +9783,26 @@
               <a:buNone/>
             </a:pPr>
             <a:r>
+              <a:rPr lang="en-US" sz="950" b="1" dirty="0">
+                <a:solidFill>
+                  <a:srgbClr val="182F48"/>
+                </a:solidFill>
+                <a:latin typeface="Noto Sans KR" pitchFamily="34" charset="0"/>
+                <a:ea typeface="Noto Sans KR" pitchFamily="34" charset="-122"/>
+                <a:cs typeface="Noto Sans KR" pitchFamily="34" charset="-120"/>
+              </a:rPr>
+              <a:t>④ 해외 총판 · 종합상사</a:t>
+            </a:r>
+            <a:endParaRPr lang="en-US" sz="950" dirty="0"/>
+          </a:p>
+          <a:p>
+            <a:pPr indent="0" marL="0">
+              <a:spcAft>
+                <a:spcPts val="200"/>
+              </a:spcAft>
+              <a:buNone/>
+            </a:pPr>
+            <a:r>
               <a:rPr lang="en-US" sz="850" dirty="0">
                 <a:solidFill>
                   <a:srgbClr val="334155"/>
@@ -9388,7 +9811,7 @@
                 <a:ea typeface="Noto Sans KR" pitchFamily="34" charset="-122"/>
                 <a:cs typeface="Noto Sans KR" pitchFamily="34" charset="-120"/>
               </a:rPr>
-              <a:t>2030 하이킹 · 러닝 크루, 고프코어 커뮤니티</a:t>
+              <a:t>이토추상사(일본) · 센트럴그룹(태국)</a:t>
             </a:r>
             <a:endParaRPr lang="en-US" sz="950" dirty="0"/>
           </a:p>
@@ -9396,14 +9819,36 @@
       </p:sp>
       <p:sp>
         <p:nvSpPr>
-          <p:cNvPr id="27" name="라벨 거래 연결 관계"/>
+          <p:cNvPr id="27" name="바이어 ⑤ 배경"/>
+          <p:cNvSpPr/>
+          <p:nvPr/>
+        </p:nvSpPr>
+        <p:spPr>
+          <a:xfrm>
+            <a:off x="10003536" y="3017520"/>
+            <a:ext cx="1563624" cy="896112"/>
+          </a:xfrm>
+          <a:prstGeom prst="roundRect">
+            <a:avLst>
+              <a:gd name="adj" fmla="val 6122"/>
+            </a:avLst>
+          </a:prstGeom>
+          <a:solidFill>
+            <a:srgbClr val="FFF1E8"/>
+          </a:solidFill>
+          <a:ln/>
+        </p:spPr>
+      </p:sp>
+      <p:sp>
+        <p:nvSpPr>
+          <p:cNvPr id="28" name="바이어 ⑤"/>
           <p:cNvSpPr txBox="1"/>
           <p:nvPr/>
         </p:nvSpPr>
         <p:spPr>
           <a:xfrm>
-            <a:off x="612648" y="4133088"/>
-            <a:ext cx="2606040" cy="365760"/>
+            <a:off x="10076688" y="3054096"/>
+            <a:ext cx="1417320" cy="822960"/>
           </a:xfrm>
           <a:prstGeom prst="rect">
             <a:avLst/>
@@ -9416,6 +9861,68 @@
           <a:lstStyle/>
           <a:p>
             <a:pPr indent="0" marL="0">
+              <a:spcAft>
+                <a:spcPts val="200"/>
+              </a:spcAft>
+              <a:buNone/>
+            </a:pPr>
+            <a:r>
+              <a:rPr lang="en-US" sz="950" b="1" dirty="0">
+                <a:solidFill>
+                  <a:srgbClr val="C2410C"/>
+                </a:solidFill>
+                <a:latin typeface="Noto Sans KR" pitchFamily="34" charset="0"/>
+                <a:ea typeface="Noto Sans KR" pitchFamily="34" charset="-122"/>
+                <a:cs typeface="Noto Sans KR" pitchFamily="34" charset="-120"/>
+              </a:rPr>
+              <a:t>⑤ 관심 소비자 (퍼블릭)</a:t>
+            </a:r>
+            <a:endParaRPr lang="en-US" sz="950" dirty="0"/>
+          </a:p>
+          <a:p>
+            <a:pPr indent="0" marL="0">
+              <a:spcAft>
+                <a:spcPts val="200"/>
+              </a:spcAft>
+              <a:buNone/>
+            </a:pPr>
+            <a:r>
+              <a:rPr lang="en-US" sz="850" dirty="0">
+                <a:solidFill>
+                  <a:srgbClr val="334155"/>
+                </a:solidFill>
+                <a:latin typeface="Noto Sans KR" pitchFamily="34" charset="0"/>
+                <a:ea typeface="Noto Sans KR" pitchFamily="34" charset="-122"/>
+                <a:cs typeface="Noto Sans KR" pitchFamily="34" charset="-120"/>
+              </a:rPr>
+              <a:t>2030 하이킹 · 러닝 크루, 고프코어 커뮤니티</a:t>
+            </a:r>
+            <a:endParaRPr lang="en-US" sz="950" dirty="0"/>
+          </a:p>
+        </p:txBody>
+      </p:sp>
+      <p:sp>
+        <p:nvSpPr>
+          <p:cNvPr id="29" name="라벨 거래 연결 관계"/>
+          <p:cNvSpPr txBox="1"/>
+          <p:nvPr/>
+        </p:nvSpPr>
+        <p:spPr>
+          <a:xfrm>
+            <a:off x="612648" y="4069080"/>
+            <a:ext cx="2606040" cy="365760"/>
+          </a:xfrm>
+          <a:prstGeom prst="rect">
+            <a:avLst/>
+          </a:prstGeom>
+          <a:noFill/>
+          <a:ln/>
+        </p:spPr>
+        <p:txBody>
+          <a:bodyPr wrap="square" lIns="0" tIns="0" rIns="0" bIns="0" rtlCol="0" anchor="t"/>
+          <a:lstStyle/>
+          <a:p>
+            <a:pPr indent="0" marL="0">
               <a:buNone/>
             </a:pPr>
             <a:r>
@@ -9435,13 +9942,13 @@
       </p:sp>
       <p:sp>
         <p:nvSpPr>
-          <p:cNvPr id="28" name="연결 안내"/>
+          <p:cNvPr id="30" name="연결 안내"/>
           <p:cNvSpPr txBox="1"/>
           <p:nvPr/>
         </p:nvSpPr>
         <p:spPr>
           <a:xfrm>
-            <a:off x="612648" y="4462272"/>
+            <a:off x="612648" y="4389120"/>
             <a:ext cx="2606040" cy="457200"/>
           </a:xfrm>
           <a:prstGeom prst="rect">
@@ -9487,7 +9994,7 @@
           </p:nvPr>
         </p:nvGraphicFramePr>
         <p:xfrm>
-          <a:off x="3383280" y="4096512"/>
+          <a:off x="3383280" y="4041648"/>
           <a:ext cx="8183880" cy="914400"/>
         </p:xfrm>
         <a:graphic>
@@ -9495,12 +10002,12 @@
             <a:tbl>
               <a:tblPr/>
               <a:tblGrid>
-                <a:gridCol w="1325880"/>
+                <a:gridCol w="1234440"/>
                 <a:gridCol w="1874520"/>
                 <a:gridCol w="1691640"/>
-                <a:gridCol w="3291840"/>
+                <a:gridCol w="3383280"/>
               </a:tblGrid>
-              <a:tr h="274320">
+              <a:tr h="256032">
                 <a:tc>
                   <a:txBody>
                     <a:bodyPr/>
@@ -9510,7 +10017,7 @@
                         <a:buNone/>
                       </a:pPr>
                       <a:r>
-                        <a:rPr lang="en-US" sz="900" b="1" dirty="0">
+                        <a:rPr lang="en-US" sz="850" b="1" dirty="0">
                           <a:solidFill>
                             <a:srgbClr val="FFFFFF"/>
                           </a:solidFill>
@@ -9520,7 +10027,7 @@
                         </a:rPr>
                         <a:t>참가업체</a:t>
                       </a:r>
-                      <a:endParaRPr lang="en-US" sz="900" dirty="0">
+                      <a:endParaRPr lang="en-US" sz="850" dirty="0">
                         <a:latin typeface="Noto Sans KR" charset="0"/>
                         <a:ea typeface="Noto Sans KR" charset="0"/>
                         <a:cs typeface="Noto Sans KR" charset="0"/>
@@ -9578,7 +10085,7 @@
                         <a:buNone/>
                       </a:pPr>
                       <a:r>
-                        <a:rPr lang="en-US" sz="900" b="1" dirty="0">
+                        <a:rPr lang="en-US" sz="850" b="1" dirty="0">
                           <a:solidFill>
                             <a:srgbClr val="FFFFFF"/>
                           </a:solidFill>
@@ -9588,7 +10095,7 @@
                         </a:rPr>
                         <a:t>제공 품목</a:t>
                       </a:r>
-                      <a:endParaRPr lang="en-US" sz="900" dirty="0">
+                      <a:endParaRPr lang="en-US" sz="850" dirty="0">
                         <a:latin typeface="Noto Sans KR" charset="0"/>
                         <a:ea typeface="Noto Sans KR" charset="0"/>
                         <a:cs typeface="Noto Sans KR" charset="0"/>
@@ -9646,7 +10153,7 @@
                         <a:buNone/>
                       </a:pPr>
                       <a:r>
-                        <a:rPr lang="en-US" sz="900" b="1" dirty="0">
+                        <a:rPr lang="en-US" sz="850" b="1" dirty="0">
                           <a:solidFill>
                             <a:srgbClr val="FFFFFF"/>
                           </a:solidFill>
@@ -9656,7 +10163,7 @@
                         </a:rPr>
                         <a:t>바이어</a:t>
                       </a:r>
-                      <a:endParaRPr lang="en-US" sz="900" dirty="0">
+                      <a:endParaRPr lang="en-US" sz="850" dirty="0">
                         <a:latin typeface="Noto Sans KR" charset="0"/>
                         <a:ea typeface="Noto Sans KR" charset="0"/>
                         <a:cs typeface="Noto Sans KR" charset="0"/>
@@ -9714,7 +10221,7 @@
                         <a:buNone/>
                       </a:pPr>
                       <a:r>
-                        <a:rPr lang="en-US" sz="900" b="1" dirty="0">
+                        <a:rPr lang="en-US" sz="850" b="1" dirty="0">
                           <a:solidFill>
                             <a:srgbClr val="FFFFFF"/>
                           </a:solidFill>
@@ -9724,7 +10231,7 @@
                         </a:rPr>
                         <a:t>구매(참여) 이유</a:t>
                       </a:r>
-                      <a:endParaRPr lang="en-US" sz="900" dirty="0">
+                      <a:endParaRPr lang="en-US" sz="850" dirty="0">
                         <a:latin typeface="Noto Sans KR" charset="0"/>
                         <a:ea typeface="Noto Sans KR" charset="0"/>
                         <a:cs typeface="Noto Sans KR" charset="0"/>
@@ -9774,7 +10281,7 @@
                   </a:tcPr>
                 </a:tc>
               </a:tr>
-              <a:tr h="457200">
+              <a:tr h="384048">
                 <a:tc>
                   <a:txBody>
                     <a:bodyPr/>
@@ -9784,7 +10291,7 @@
                         <a:buNone/>
                       </a:pPr>
                       <a:r>
-                        <a:rPr lang="en-US" sz="900" b="1" dirty="0">
+                        <a:rPr lang="en-US" sz="850" b="1" dirty="0">
                           <a:solidFill>
                             <a:srgbClr val="182F48"/>
                           </a:solidFill>
@@ -9794,7 +10301,7 @@
                         </a:rPr>
                         <a:t>A 해외 프리미엄</a:t>
                       </a:r>
-                      <a:endParaRPr lang="en-US" sz="900" dirty="0">
+                      <a:endParaRPr lang="en-US" sz="850" dirty="0">
                         <a:latin typeface="Noto Sans KR" charset="0"/>
                         <a:ea typeface="Noto Sans KR" charset="0"/>
                         <a:cs typeface="Noto Sans KR" charset="0"/>
@@ -9849,7 +10356,7 @@
                         <a:buNone/>
                       </a:pPr>
                       <a:r>
-                        <a:rPr lang="en-US" sz="900" dirty="0">
+                        <a:rPr lang="en-US" sz="850" dirty="0">
                           <a:solidFill>
                             <a:srgbClr val="334155"/>
                           </a:solidFill>
@@ -9859,7 +10366,7 @@
                         </a:rPr>
                         <a:t>신제품 기능 시연, 브랜드 스토리</a:t>
                       </a:r>
-                      <a:endParaRPr lang="en-US" sz="900" dirty="0">
+                      <a:endParaRPr lang="en-US" sz="850" dirty="0">
                         <a:latin typeface="Noto Sans KR" charset="0"/>
                         <a:ea typeface="Noto Sans KR" charset="0"/>
                         <a:cs typeface="Noto Sans KR" charset="0"/>
@@ -9914,7 +10421,7 @@
                         <a:buNone/>
                       </a:pPr>
                       <a:r>
-                        <a:rPr lang="en-US" sz="900" b="1" dirty="0">
+                        <a:rPr lang="en-US" sz="850" b="1" dirty="0">
                           <a:solidFill>
                             <a:srgbClr val="267D86"/>
                           </a:solidFill>
@@ -9924,7 +10431,7 @@
                         </a:rPr>
                         <a:t>⑤ 관심 소비자, ② 백화점</a:t>
                       </a:r>
-                      <a:endParaRPr lang="en-US" sz="900" dirty="0">
+                      <a:endParaRPr lang="en-US" sz="850" dirty="0">
                         <a:latin typeface="Noto Sans KR" charset="0"/>
                         <a:ea typeface="Noto Sans KR" charset="0"/>
                         <a:cs typeface="Noto Sans KR" charset="0"/>
@@ -9979,7 +10486,7 @@
                         <a:buNone/>
                       </a:pPr>
                       <a:r>
-                        <a:rPr lang="en-US" sz="900" dirty="0">
+                        <a:rPr lang="en-US" sz="850" dirty="0">
                           <a:solidFill>
                             <a:srgbClr val="334155"/>
                           </a:solidFill>
@@ -9987,9 +10494,9 @@
                           <a:ea typeface="Noto Sans KR" pitchFamily="34" charset="-122"/>
                           <a:cs typeface="Noto Sans KR" pitchFamily="34" charset="-120"/>
                         </a:rPr>
-                        <a:t>고가 제품의 가치를 '깊게 들어줄' 고객 접점 (인터뷰: 현장판매·투자 유치보다 브랜드 홍보)</a:t>
+                        <a:t>고가 제품의 가치를 깊게 들어줄 고객 접점 (인터뷰: 현장판매·투자 유치보다 브랜드 홍보)</a:t>
                       </a:r>
-                      <a:endParaRPr lang="en-US" sz="900" dirty="0">
+                      <a:endParaRPr lang="en-US" sz="850" dirty="0">
                         <a:latin typeface="Noto Sans KR" charset="0"/>
                         <a:ea typeface="Noto Sans KR" charset="0"/>
                         <a:cs typeface="Noto Sans KR" charset="0"/>
@@ -10036,7 +10543,7 @@
                   </a:tcPr>
                 </a:tc>
               </a:tr>
-              <a:tr h="457200">
+              <a:tr h="384048">
                 <a:tc>
                   <a:txBody>
                     <a:bodyPr/>
@@ -10046,7 +10553,7 @@
                         <a:buNone/>
                       </a:pPr>
                       <a:r>
-                        <a:rPr lang="en-US" sz="900" b="1" dirty="0">
+                        <a:rPr lang="en-US" sz="850" b="1" dirty="0">
                           <a:solidFill>
                             <a:srgbClr val="182F48"/>
                           </a:solidFill>
@@ -10056,7 +10563,7 @@
                         </a:rPr>
                         <a:t>B K-고프코어</a:t>
                       </a:r>
-                      <a:endParaRPr lang="en-US" sz="900" dirty="0">
+                      <a:endParaRPr lang="en-US" sz="850" dirty="0">
                         <a:latin typeface="Noto Sans KR" charset="0"/>
                         <a:ea typeface="Noto Sans KR" charset="0"/>
                         <a:cs typeface="Noto Sans KR" charset="0"/>
@@ -10111,7 +10618,7 @@
                         <a:buNone/>
                       </a:pPr>
                       <a:r>
-                        <a:rPr lang="en-US" sz="900" dirty="0">
+                        <a:rPr lang="en-US" sz="850" dirty="0">
                           <a:solidFill>
                             <a:srgbClr val="334155"/>
                           </a:solidFill>
@@ -10121,7 +10628,7 @@
                         </a:rPr>
                         <a:t>2028 S/S 시즌 컬렉션 수주</a:t>
                       </a:r>
-                      <a:endParaRPr lang="en-US" sz="900" dirty="0">
+                      <a:endParaRPr lang="en-US" sz="850" dirty="0">
                         <a:latin typeface="Noto Sans KR" charset="0"/>
                         <a:ea typeface="Noto Sans KR" charset="0"/>
                         <a:cs typeface="Noto Sans KR" charset="0"/>
@@ -10176,7 +10683,7 @@
                         <a:buNone/>
                       </a:pPr>
                       <a:r>
-                        <a:rPr lang="en-US" sz="900" b="1" dirty="0">
+                        <a:rPr lang="en-US" sz="850" b="1" dirty="0">
                           <a:solidFill>
                             <a:srgbClr val="267D86"/>
                           </a:solidFill>
@@ -10186,7 +10693,7 @@
                         </a:rPr>
                         <a:t>① 플랫폼, ③ 편집숍</a:t>
                       </a:r>
-                      <a:endParaRPr lang="en-US" sz="900" dirty="0">
+                      <a:endParaRPr lang="en-US" sz="850" dirty="0">
                         <a:latin typeface="Noto Sans KR" charset="0"/>
                         <a:ea typeface="Noto Sans KR" charset="0"/>
                         <a:cs typeface="Noto Sans KR" charset="0"/>
@@ -10241,7 +10748,7 @@
                         <a:buNone/>
                       </a:pPr>
                       <a:r>
-                        <a:rPr lang="en-US" sz="900" dirty="0">
+                        <a:rPr lang="en-US" sz="850" dirty="0">
                           <a:solidFill>
                             <a:srgbClr val="334155"/>
                           </a:solidFill>
@@ -10251,7 +10758,7 @@
                         </a:rPr>
                         <a:t>트렌드 감도와 가격 경쟁력을 갖춘 K-브랜드 소싱 (무신사 도쿄 쇼룸 주문 3배)</a:t>
                       </a:r>
-                      <a:endParaRPr lang="en-US" sz="900" dirty="0">
+                      <a:endParaRPr lang="en-US" sz="850" dirty="0">
                         <a:latin typeface="Noto Sans KR" charset="0"/>
                         <a:ea typeface="Noto Sans KR" charset="0"/>
                         <a:cs typeface="Noto Sans KR" charset="0"/>
@@ -10298,7 +10805,7 @@
                   </a:tcPr>
                 </a:tc>
               </a:tr>
-              <a:tr h="457200">
+              <a:tr h="384048">
                 <a:tc>
                   <a:txBody>
                     <a:bodyPr/>
@@ -10308,7 +10815,7 @@
                         <a:buNone/>
                       </a:pPr>
                       <a:r>
-                        <a:rPr lang="en-US" sz="900" b="1" dirty="0">
+                        <a:rPr lang="en-US" sz="850" b="1" dirty="0">
                           <a:solidFill>
                             <a:srgbClr val="182F48"/>
                           </a:solidFill>
@@ -10318,7 +10825,7 @@
                         </a:rPr>
                         <a:t>C 국내 대형사</a:t>
                       </a:r>
-                      <a:endParaRPr lang="en-US" sz="900" dirty="0">
+                      <a:endParaRPr lang="en-US" sz="850" dirty="0">
                         <a:latin typeface="Noto Sans KR" charset="0"/>
                         <a:ea typeface="Noto Sans KR" charset="0"/>
                         <a:cs typeface="Noto Sans KR" charset="0"/>
@@ -10373,7 +10880,7 @@
                         <a:buNone/>
                       </a:pPr>
                       <a:r>
-                        <a:rPr lang="en-US" sz="900" dirty="0">
+                        <a:rPr lang="en-US" sz="850" dirty="0">
                           <a:solidFill>
                             <a:srgbClr val="334155"/>
                           </a:solidFill>
@@ -10383,7 +10890,7 @@
                         </a:rPr>
                         <a:t>고프코어 라인, 해외 유통권</a:t>
                       </a:r>
-                      <a:endParaRPr lang="en-US" sz="900" dirty="0">
+                      <a:endParaRPr lang="en-US" sz="850" dirty="0">
                         <a:latin typeface="Noto Sans KR" charset="0"/>
                         <a:ea typeface="Noto Sans KR" charset="0"/>
                         <a:cs typeface="Noto Sans KR" charset="0"/>
@@ -10438,7 +10945,7 @@
                         <a:buNone/>
                       </a:pPr>
                       <a:r>
-                        <a:rPr lang="en-US" sz="900" b="1" dirty="0">
+                        <a:rPr lang="en-US" sz="850" b="1" dirty="0">
                           <a:solidFill>
                             <a:srgbClr val="267D86"/>
                           </a:solidFill>
@@ -10448,7 +10955,7 @@
                         </a:rPr>
                         <a:t>④ 해외 총판, ② 백화점</a:t>
                       </a:r>
-                      <a:endParaRPr lang="en-US" sz="900" dirty="0">
+                      <a:endParaRPr lang="en-US" sz="850" dirty="0">
                         <a:latin typeface="Noto Sans KR" charset="0"/>
                         <a:ea typeface="Noto Sans KR" charset="0"/>
                         <a:cs typeface="Noto Sans KR" charset="0"/>
@@ -10503,7 +11010,7 @@
                         <a:buNone/>
                       </a:pPr>
                       <a:r>
-                        <a:rPr lang="en-US" sz="900" dirty="0">
+                        <a:rPr lang="en-US" sz="850" dirty="0">
                           <a:solidFill>
                             <a:srgbClr val="334155"/>
                           </a:solidFill>
@@ -10513,7 +11020,7 @@
                         </a:rPr>
                         <a:t>검증된 한국 브랜드의 아시아 유통 확대 (코오롱스포츠-이토추·센트럴 계약)</a:t>
                       </a:r>
-                      <a:endParaRPr lang="en-US" sz="900" dirty="0">
+                      <a:endParaRPr lang="en-US" sz="850" dirty="0">
                         <a:latin typeface="Noto Sans KR" charset="0"/>
                         <a:ea typeface="Noto Sans KR" charset="0"/>
                         <a:cs typeface="Noto Sans KR" charset="0"/>
@@ -10560,7 +11067,7 @@
                   </a:tcPr>
                 </a:tc>
               </a:tr>
-              <a:tr h="457200">
+              <a:tr h="384048">
                 <a:tc>
                   <a:txBody>
                     <a:bodyPr/>
@@ -10570,7 +11077,7 @@
                         <a:buNone/>
                       </a:pPr>
                       <a:r>
-                        <a:rPr lang="en-US" sz="900" b="1" dirty="0">
+                        <a:rPr lang="en-US" sz="850" b="1" dirty="0">
                           <a:solidFill>
                             <a:srgbClr val="182F48"/>
                           </a:solidFill>
@@ -10580,7 +11087,7 @@
                         </a:rPr>
                         <a:t>D 기능성 소재</a:t>
                       </a:r>
-                      <a:endParaRPr lang="en-US" sz="900" dirty="0">
+                      <a:endParaRPr lang="en-US" sz="850" dirty="0">
                         <a:latin typeface="Noto Sans KR" charset="0"/>
                         <a:ea typeface="Noto Sans KR" charset="0"/>
                         <a:cs typeface="Noto Sans KR" charset="0"/>
@@ -10635,7 +11142,7 @@
                         <a:buNone/>
                       </a:pPr>
                       <a:r>
-                        <a:rPr lang="en-US" sz="900" dirty="0">
+                        <a:rPr lang="en-US" sz="850" dirty="0">
                           <a:solidFill>
                             <a:srgbClr val="334155"/>
                           </a:solidFill>
@@ -10645,7 +11152,7 @@
                         </a:rPr>
                         <a:t>기능성 원단, 성분 브랜딩</a:t>
                       </a:r>
-                      <a:endParaRPr lang="en-US" sz="900" dirty="0">
+                      <a:endParaRPr lang="en-US" sz="850" dirty="0">
                         <a:latin typeface="Noto Sans KR" charset="0"/>
                         <a:ea typeface="Noto Sans KR" charset="0"/>
                         <a:cs typeface="Noto Sans KR" charset="0"/>
@@ -10700,7 +11207,7 @@
                         <a:buNone/>
                       </a:pPr>
                       <a:r>
-                        <a:rPr lang="en-US" sz="900" b="1" dirty="0">
+                        <a:rPr lang="en-US" sz="850" b="1" dirty="0">
                           <a:solidFill>
                             <a:srgbClr val="267D86"/>
                           </a:solidFill>
@@ -10710,7 +11217,7 @@
                         </a:rPr>
                         <a:t>A·B·C 브랜드 기획·소싱팀</a:t>
                       </a:r>
-                      <a:endParaRPr lang="en-US" sz="900" dirty="0">
+                      <a:endParaRPr lang="en-US" sz="850" dirty="0">
                         <a:latin typeface="Noto Sans KR" charset="0"/>
                         <a:ea typeface="Noto Sans KR" charset="0"/>
                         <a:cs typeface="Noto Sans KR" charset="0"/>
@@ -10765,7 +11272,7 @@
                         <a:buNone/>
                       </a:pPr>
                       <a:r>
-                        <a:rPr lang="en-US" sz="900" dirty="0">
+                        <a:rPr lang="en-US" sz="850" dirty="0">
                           <a:solidFill>
                             <a:srgbClr val="334155"/>
                           </a:solidFill>
@@ -10775,7 +11282,269 @@
                         </a:rPr>
                         <a:t>차기 시즌 소재 선정, 소비자에게 보여줄 기능 근거 확보</a:t>
                       </a:r>
-                      <a:endParaRPr lang="en-US" sz="900" dirty="0">
+                      <a:endParaRPr lang="en-US" sz="850" dirty="0">
+                        <a:latin typeface="Noto Sans KR" charset="0"/>
+                        <a:ea typeface="Noto Sans KR" charset="0"/>
+                        <a:cs typeface="Noto Sans KR" charset="0"/>
+                      </a:endParaRPr>
+                    </a:p>
+                  </a:txBody>
+                  <a:tcPr marL="63500" marR="63500" marT="25400" marB="25400" anchor="ctr">
+                    <a:lnL w="6350" cap="flat" cmpd="sng" algn="ctr">
+                      <a:solidFill>
+                        <a:srgbClr val="CBD5E1"/>
+                      </a:solidFill>
+                      <a:prstDash val="solid"/>
+                      <a:round/>
+                      <a:headEnd type="none" w="med" len="med"/>
+                      <a:tailEnd type="none" w="med" len="med"/>
+                    </a:lnL>
+                    <a:lnR w="6350" cap="flat" cmpd="sng" algn="ctr">
+                      <a:solidFill>
+                        <a:srgbClr val="CBD5E1"/>
+                      </a:solidFill>
+                      <a:prstDash val="solid"/>
+                      <a:round/>
+                      <a:headEnd type="none" w="med" len="med"/>
+                      <a:tailEnd type="none" w="med" len="med"/>
+                    </a:lnR>
+                    <a:lnT w="6350" cap="flat" cmpd="sng" algn="ctr">
+                      <a:solidFill>
+                        <a:srgbClr val="CBD5E1"/>
+                      </a:solidFill>
+                      <a:prstDash val="solid"/>
+                      <a:round/>
+                      <a:headEnd type="none" w="med" len="med"/>
+                      <a:tailEnd type="none" w="med" len="med"/>
+                    </a:lnT>
+                    <a:lnB w="6350" cap="flat" cmpd="sng" algn="ctr">
+                      <a:solidFill>
+                        <a:srgbClr val="CBD5E1"/>
+                      </a:solidFill>
+                      <a:prstDash val="solid"/>
+                      <a:round/>
+                      <a:headEnd type="none" w="med" len="med"/>
+                      <a:tailEnd type="none" w="med" len="med"/>
+                    </a:lnB>
+                  </a:tcPr>
+                </a:tc>
+              </a:tr>
+              <a:tr h="384048">
+                <a:tc>
+                  <a:txBody>
+                    <a:bodyPr/>
+                    <a:lstStyle/>
+                    <a:p>
+                      <a:pPr indent="0" marL="0">
+                        <a:buNone/>
+                      </a:pPr>
+                      <a:r>
+                        <a:rPr lang="en-US" sz="850" b="1" dirty="0">
+                          <a:solidFill>
+                            <a:srgbClr val="182F48"/>
+                          </a:solidFill>
+                          <a:latin typeface="Noto Sans KR" pitchFamily="34" charset="0"/>
+                          <a:ea typeface="Noto Sans KR" pitchFamily="34" charset="-122"/>
+                          <a:cs typeface="Noto Sans KR" pitchFamily="34" charset="-120"/>
+                        </a:rPr>
+                        <a:t>E 성장 서비스</a:t>
+                      </a:r>
+                      <a:endParaRPr lang="en-US" sz="850" dirty="0">
+                        <a:latin typeface="Noto Sans KR" charset="0"/>
+                        <a:ea typeface="Noto Sans KR" charset="0"/>
+                        <a:cs typeface="Noto Sans KR" charset="0"/>
+                      </a:endParaRPr>
+                    </a:p>
+                  </a:txBody>
+                  <a:tcPr marL="63500" marR="63500" marT="25400" marB="25400" anchor="ctr">
+                    <a:lnL w="6350" cap="flat" cmpd="sng" algn="ctr">
+                      <a:solidFill>
+                        <a:srgbClr val="CBD5E1"/>
+                      </a:solidFill>
+                      <a:prstDash val="solid"/>
+                      <a:round/>
+                      <a:headEnd type="none" w="med" len="med"/>
+                      <a:tailEnd type="none" w="med" len="med"/>
+                    </a:lnL>
+                    <a:lnR w="6350" cap="flat" cmpd="sng" algn="ctr">
+                      <a:solidFill>
+                        <a:srgbClr val="CBD5E1"/>
+                      </a:solidFill>
+                      <a:prstDash val="solid"/>
+                      <a:round/>
+                      <a:headEnd type="none" w="med" len="med"/>
+                      <a:tailEnd type="none" w="med" len="med"/>
+                    </a:lnR>
+                    <a:lnT w="6350" cap="flat" cmpd="sng" algn="ctr">
+                      <a:solidFill>
+                        <a:srgbClr val="CBD5E1"/>
+                      </a:solidFill>
+                      <a:prstDash val="solid"/>
+                      <a:round/>
+                      <a:headEnd type="none" w="med" len="med"/>
+                      <a:tailEnd type="none" w="med" len="med"/>
+                    </a:lnT>
+                    <a:lnB w="6350" cap="flat" cmpd="sng" algn="ctr">
+                      <a:solidFill>
+                        <a:srgbClr val="CBD5E1"/>
+                      </a:solidFill>
+                      <a:prstDash val="solid"/>
+                      <a:round/>
+                      <a:headEnd type="none" w="med" len="med"/>
+                      <a:tailEnd type="none" w="med" len="med"/>
+                    </a:lnB>
+                  </a:tcPr>
+                </a:tc>
+                <a:tc>
+                  <a:txBody>
+                    <a:bodyPr/>
+                    <a:lstStyle/>
+                    <a:p>
+                      <a:pPr indent="0" marL="0">
+                        <a:buNone/>
+                      </a:pPr>
+                      <a:r>
+                        <a:rPr lang="en-US" sz="850" dirty="0">
+                          <a:solidFill>
+                            <a:srgbClr val="334155"/>
+                          </a:solidFill>
+                          <a:latin typeface="Noto Sans KR" pitchFamily="34" charset="0"/>
+                          <a:ea typeface="Noto Sans KR" pitchFamily="34" charset="-122"/>
+                          <a:cs typeface="Noto Sans KR" pitchFamily="34" charset="-120"/>
+                        </a:rPr>
+                        <a:t>풀필먼트·해외 배송, 홍보 대행</a:t>
+                      </a:r>
+                      <a:endParaRPr lang="en-US" sz="850" dirty="0">
+                        <a:latin typeface="Noto Sans KR" charset="0"/>
+                        <a:ea typeface="Noto Sans KR" charset="0"/>
+                        <a:cs typeface="Noto Sans KR" charset="0"/>
+                      </a:endParaRPr>
+                    </a:p>
+                  </a:txBody>
+                  <a:tcPr marL="63500" marR="63500" marT="25400" marB="25400" anchor="ctr">
+                    <a:lnL w="6350" cap="flat" cmpd="sng" algn="ctr">
+                      <a:solidFill>
+                        <a:srgbClr val="CBD5E1"/>
+                      </a:solidFill>
+                      <a:prstDash val="solid"/>
+                      <a:round/>
+                      <a:headEnd type="none" w="med" len="med"/>
+                      <a:tailEnd type="none" w="med" len="med"/>
+                    </a:lnL>
+                    <a:lnR w="6350" cap="flat" cmpd="sng" algn="ctr">
+                      <a:solidFill>
+                        <a:srgbClr val="CBD5E1"/>
+                      </a:solidFill>
+                      <a:prstDash val="solid"/>
+                      <a:round/>
+                      <a:headEnd type="none" w="med" len="med"/>
+                      <a:tailEnd type="none" w="med" len="med"/>
+                    </a:lnR>
+                    <a:lnT w="6350" cap="flat" cmpd="sng" algn="ctr">
+                      <a:solidFill>
+                        <a:srgbClr val="CBD5E1"/>
+                      </a:solidFill>
+                      <a:prstDash val="solid"/>
+                      <a:round/>
+                      <a:headEnd type="none" w="med" len="med"/>
+                      <a:tailEnd type="none" w="med" len="med"/>
+                    </a:lnT>
+                    <a:lnB w="6350" cap="flat" cmpd="sng" algn="ctr">
+                      <a:solidFill>
+                        <a:srgbClr val="CBD5E1"/>
+                      </a:solidFill>
+                      <a:prstDash val="solid"/>
+                      <a:round/>
+                      <a:headEnd type="none" w="med" len="med"/>
+                      <a:tailEnd type="none" w="med" len="med"/>
+                    </a:lnB>
+                  </a:tcPr>
+                </a:tc>
+                <a:tc>
+                  <a:txBody>
+                    <a:bodyPr/>
+                    <a:lstStyle/>
+                    <a:p>
+                      <a:pPr indent="0" marL="0">
+                        <a:buNone/>
+                      </a:pPr>
+                      <a:r>
+                        <a:rPr lang="en-US" sz="850" b="1" dirty="0">
+                          <a:solidFill>
+                            <a:srgbClr val="267D86"/>
+                          </a:solidFill>
+                          <a:latin typeface="Noto Sans KR" pitchFamily="34" charset="0"/>
+                          <a:ea typeface="Noto Sans KR" pitchFamily="34" charset="-122"/>
+                          <a:cs typeface="Noto Sans KR" pitchFamily="34" charset="-120"/>
+                        </a:rPr>
+                        <a:t>A·B 참가 브랜드 (특히 신진)</a:t>
+                      </a:r>
+                      <a:endParaRPr lang="en-US" sz="850" dirty="0">
+                        <a:latin typeface="Noto Sans KR" charset="0"/>
+                        <a:ea typeface="Noto Sans KR" charset="0"/>
+                        <a:cs typeface="Noto Sans KR" charset="0"/>
+                      </a:endParaRPr>
+                    </a:p>
+                  </a:txBody>
+                  <a:tcPr marL="63500" marR="63500" marT="25400" marB="25400" anchor="ctr">
+                    <a:lnL w="6350" cap="flat" cmpd="sng" algn="ctr">
+                      <a:solidFill>
+                        <a:srgbClr val="CBD5E1"/>
+                      </a:solidFill>
+                      <a:prstDash val="solid"/>
+                      <a:round/>
+                      <a:headEnd type="none" w="med" len="med"/>
+                      <a:tailEnd type="none" w="med" len="med"/>
+                    </a:lnL>
+                    <a:lnR w="6350" cap="flat" cmpd="sng" algn="ctr">
+                      <a:solidFill>
+                        <a:srgbClr val="CBD5E1"/>
+                      </a:solidFill>
+                      <a:prstDash val="solid"/>
+                      <a:round/>
+                      <a:headEnd type="none" w="med" len="med"/>
+                      <a:tailEnd type="none" w="med" len="med"/>
+                    </a:lnR>
+                    <a:lnT w="6350" cap="flat" cmpd="sng" algn="ctr">
+                      <a:solidFill>
+                        <a:srgbClr val="CBD5E1"/>
+                      </a:solidFill>
+                      <a:prstDash val="solid"/>
+                      <a:round/>
+                      <a:headEnd type="none" w="med" len="med"/>
+                      <a:tailEnd type="none" w="med" len="med"/>
+                    </a:lnT>
+                    <a:lnB w="6350" cap="flat" cmpd="sng" algn="ctr">
+                      <a:solidFill>
+                        <a:srgbClr val="CBD5E1"/>
+                      </a:solidFill>
+                      <a:prstDash val="solid"/>
+                      <a:round/>
+                      <a:headEnd type="none" w="med" len="med"/>
+                      <a:tailEnd type="none" w="med" len="med"/>
+                    </a:lnB>
+                  </a:tcPr>
+                </a:tc>
+                <a:tc>
+                  <a:txBody>
+                    <a:bodyPr/>
+                    <a:lstStyle/>
+                    <a:p>
+                      <a:pPr indent="0" marL="0">
+                        <a:buNone/>
+                      </a:pPr>
+                      <a:r>
+                        <a:rPr lang="en-US" sz="850" dirty="0">
+                          <a:solidFill>
+                            <a:srgbClr val="334155"/>
+                          </a:solidFill>
+                          <a:latin typeface="Noto Sans KR" pitchFamily="34" charset="0"/>
+                          <a:ea typeface="Noto Sans KR" pitchFamily="34" charset="-122"/>
+                          <a:cs typeface="Noto Sans KR" pitchFamily="34" charset="-120"/>
+                        </a:rPr>
+                        <a:t>해외 주문·재고·홍보를 직접 감당하기 어려워 외주로 비용 절감·마진 개선 (무신사도 해외 주문 풀필먼트 준비)</a:t>
+                      </a:r>
+                      <a:endParaRPr lang="en-US" sz="850" dirty="0">
                         <a:latin typeface="Noto Sans KR" charset="0"/>
                         <a:ea typeface="Noto Sans KR" charset="0"/>
                         <a:cs typeface="Noto Sans KR" charset="0"/>
@@ -13769,7 +14538,7 @@
                 <a:ea typeface="Noto Sans KR" pitchFamily="34" charset="-122"/>
                 <a:cs typeface="Noto Sans KR" pitchFamily="34" charset="-120"/>
               </a:rPr>
-              <a:t>통화 질문지·시도 기록표 별첨 (연결 실패는 시도 내역으로 구분 기록)</a:t>
+              <a:t>최소 1곳 이상 통화 필수 · 질문지·시도 기록표는 별첨 2 (연결 실패도 시도 내역으로 기록)</a:t>
             </a:r>
             <a:endParaRPr lang="en-US" sz="1000" dirty="0"/>
           </a:p>
@@ -13954,7 +14723,7 @@
                 <a:ea typeface="Noto Sans KR" pitchFamily="34" charset="-122"/>
                 <a:cs typeface="Noto Sans KR" pitchFamily="34" charset="-120"/>
               </a:rPr>
-              <a:t>※ 인터뷰 원문: 녹취록(2026.10.17, 약 5분 12초, 녹음 동의). 답변은 수업 발표용으로만 활용 후 폐기하기로 안내함. 전화번호는 개인정보이므로 제출본에만 직접 기입.</a:t>
+              <a:t>※ 인터뷰 원문: 녹취록(2026.10.17, 약 5분 12초, 녹음 동의). 큰따옴표 안은 녹취 원문 그대로, 나머지는 요약. 답변은 수업 발표용으로만 활용 후 폐기하기로 안내함. 전화번호는 제출본에만 직접 기입.</a:t>
             </a:r>
             <a:endParaRPr lang="en-US" sz="850" dirty="0"/>
           </a:p>
@@ -14406,7 +15175,7 @@
                 <a:ea typeface="Noto Sans KR" pitchFamily="34" charset="-122"/>
                 <a:cs typeface="Noto Sans KR" pitchFamily="34" charset="-120"/>
               </a:rPr>
-              <a:t>"현장판매·고객 확보·투자 유치는 의미 없다. 브랜드 홍보와 관심 고객이 중요"</a:t>
+              <a:t>현장판매·고객 확보·투자 유치는 의미가 적고, 브랜드 홍보와 관심 고객이 중요</a:t>
             </a:r>
             <a:endParaRPr lang="en-US" sz="900" dirty="0"/>
           </a:p>
@@ -14507,7 +15276,7 @@
                 <a:ea typeface="Noto Sans KR" pitchFamily="34" charset="-122"/>
                 <a:cs typeface="Noto Sans KR" pitchFamily="34" charset="-120"/>
               </a:rPr>
-              <a:t>부스비는 2만~5만 달러로 늘 책정해 옴. 장벽은 비용 '대비 효과'·공간·인플루언서 일정</a:t>
+              <a:t>부스비는 2만~5만 달러로 늘 책정해 옴. 장벽은 비용 대비 효과·공간·인플루언서 일정</a:t>
             </a:r>
             <a:endParaRPr lang="en-US" sz="900" dirty="0"/>
           </a:p>
@@ -14608,7 +15377,7 @@
                 <a:ea typeface="Noto Sans KR" pitchFamily="34" charset="-122"/>
                 <a:cs typeface="Noto Sans KR" pitchFamily="34" charset="-120"/>
               </a:rPr>
-              <a:t>"고객의 니즈가 달라 참여하지 않는다"</a:t>
+              <a:t>"고객의 니즈가 다르기 때문에 저희는 참여를 안 하고 있습니다"</a:t>
             </a:r>
             <a:endParaRPr lang="en-US" sz="900" dirty="0"/>
           </a:p>
@@ -14777,10 +15546,10 @@
             <a:tbl>
               <a:tblPr/>
               <a:tblGrid>
-                <a:gridCol w="1143000"/>
-                <a:gridCol w="2926080"/>
+                <a:gridCol w="1051560"/>
+                <a:gridCol w="3017520"/>
               </a:tblGrid>
-              <a:tr h="425196">
+              <a:tr h="342900">
                 <a:tc>
                   <a:txBody>
                     <a:bodyPr/>
@@ -14798,7 +15567,7 @@
                           <a:ea typeface="Noto Sans KR" pitchFamily="34" charset="-122"/>
                           <a:cs typeface="Noto Sans KR" pitchFamily="34" charset="-120"/>
                         </a:rPr>
-                        <a:t>Q1 주요 고객</a:t>
+                        <a:t>Q1~2 고객층</a:t>
                       </a:r>
                       <a:endParaRPr lang="en-US" sz="850" dirty="0">
                         <a:latin typeface="Noto Sans KR" charset="0"/>
@@ -14863,7 +15632,7 @@
                           <a:ea typeface="Noto Sans KR" pitchFamily="34" charset="-122"/>
                           <a:cs typeface="Noto Sans KR" pitchFamily="34" charset="-120"/>
                         </a:rPr>
-                        <a:t>일반 소비자와 기업(B2B) 모두에 판매</a:t>
+                        <a:t>일반 소비자와 기업(B2B) 모두에 판매, B2C 매출 약 30%</a:t>
                       </a:r>
                       <a:endParaRPr lang="en-US" sz="850" dirty="0">
                         <a:latin typeface="Noto Sans KR" charset="0"/>
@@ -14912,7 +15681,7 @@
                   </a:tcPr>
                 </a:tc>
               </a:tr>
-              <a:tr h="425196">
+              <a:tr h="342900">
                 <a:tc>
                   <a:txBody>
                     <a:bodyPr/>
@@ -14930,139 +15699,7 @@
                           <a:ea typeface="Noto Sans KR" pitchFamily="34" charset="-122"/>
                           <a:cs typeface="Noto Sans KR" pitchFamily="34" charset="-120"/>
                         </a:rPr>
-                        <a:t>Q2 일반인 판매</a:t>
-                      </a:r>
-                      <a:endParaRPr lang="en-US" sz="850" dirty="0">
-                        <a:latin typeface="Noto Sans KR" charset="0"/>
-                        <a:ea typeface="Noto Sans KR" charset="0"/>
-                        <a:cs typeface="Noto Sans KR" charset="0"/>
-                      </a:endParaRPr>
-                    </a:p>
-                  </a:txBody>
-                  <a:tcPr marL="63500" marR="63500" marT="25400" marB="25400" anchor="ctr">
-                    <a:lnL w="6350" cap="flat" cmpd="sng" algn="ctr">
-                      <a:solidFill>
-                        <a:srgbClr val="CBD5E1"/>
-                      </a:solidFill>
-                      <a:prstDash val="solid"/>
-                      <a:round/>
-                      <a:headEnd type="none" w="med" len="med"/>
-                      <a:tailEnd type="none" w="med" len="med"/>
-                    </a:lnL>
-                    <a:lnR w="6350" cap="flat" cmpd="sng" algn="ctr">
-                      <a:solidFill>
-                        <a:srgbClr val="CBD5E1"/>
-                      </a:solidFill>
-                      <a:prstDash val="solid"/>
-                      <a:round/>
-                      <a:headEnd type="none" w="med" len="med"/>
-                      <a:tailEnd type="none" w="med" len="med"/>
-                    </a:lnR>
-                    <a:lnT w="6350" cap="flat" cmpd="sng" algn="ctr">
-                      <a:solidFill>
-                        <a:srgbClr val="CBD5E1"/>
-                      </a:solidFill>
-                      <a:prstDash val="solid"/>
-                      <a:round/>
-                      <a:headEnd type="none" w="med" len="med"/>
-                      <a:tailEnd type="none" w="med" len="med"/>
-                    </a:lnT>
-                    <a:lnB w="6350" cap="flat" cmpd="sng" algn="ctr">
-                      <a:solidFill>
-                        <a:srgbClr val="CBD5E1"/>
-                      </a:solidFill>
-                      <a:prstDash val="solid"/>
-                      <a:round/>
-                      <a:headEnd type="none" w="med" len="med"/>
-                      <a:tailEnd type="none" w="med" len="med"/>
-                    </a:lnB>
-                  </a:tcPr>
-                </a:tc>
-                <a:tc>
-                  <a:txBody>
-                    <a:bodyPr/>
-                    <a:lstStyle/>
-                    <a:p>
-                      <a:pPr indent="0" marL="0">
-                        <a:buNone/>
-                      </a:pPr>
-                      <a:r>
-                        <a:rPr lang="en-US" sz="850" dirty="0">
-                          <a:solidFill>
-                            <a:srgbClr val="334155"/>
-                          </a:solidFill>
-                          <a:latin typeface="Noto Sans KR" pitchFamily="34" charset="0"/>
-                          <a:ea typeface="Noto Sans KR" pitchFamily="34" charset="-122"/>
-                          <a:cs typeface="Noto Sans KR" pitchFamily="34" charset="-120"/>
-                        </a:rPr>
-                        <a:t>B2C 매출이 약 30%, 일반 고객을 매우 중시</a:t>
-                      </a:r>
-                      <a:endParaRPr lang="en-US" sz="850" dirty="0">
-                        <a:latin typeface="Noto Sans KR" charset="0"/>
-                        <a:ea typeface="Noto Sans KR" charset="0"/>
-                        <a:cs typeface="Noto Sans KR" charset="0"/>
-                      </a:endParaRPr>
-                    </a:p>
-                  </a:txBody>
-                  <a:tcPr marL="63500" marR="63500" marT="25400" marB="25400" anchor="ctr">
-                    <a:lnL w="6350" cap="flat" cmpd="sng" algn="ctr">
-                      <a:solidFill>
-                        <a:srgbClr val="CBD5E1"/>
-                      </a:solidFill>
-                      <a:prstDash val="solid"/>
-                      <a:round/>
-                      <a:headEnd type="none" w="med" len="med"/>
-                      <a:tailEnd type="none" w="med" len="med"/>
-                    </a:lnL>
-                    <a:lnR w="6350" cap="flat" cmpd="sng" algn="ctr">
-                      <a:solidFill>
-                        <a:srgbClr val="CBD5E1"/>
-                      </a:solidFill>
-                      <a:prstDash val="solid"/>
-                      <a:round/>
-                      <a:headEnd type="none" w="med" len="med"/>
-                      <a:tailEnd type="none" w="med" len="med"/>
-                    </a:lnR>
-                    <a:lnT w="6350" cap="flat" cmpd="sng" algn="ctr">
-                      <a:solidFill>
-                        <a:srgbClr val="CBD5E1"/>
-                      </a:solidFill>
-                      <a:prstDash val="solid"/>
-                      <a:round/>
-                      <a:headEnd type="none" w="med" len="med"/>
-                      <a:tailEnd type="none" w="med" len="med"/>
-                    </a:lnT>
-                    <a:lnB w="6350" cap="flat" cmpd="sng" algn="ctr">
-                      <a:solidFill>
-                        <a:srgbClr val="CBD5E1"/>
-                      </a:solidFill>
-                      <a:prstDash val="solid"/>
-                      <a:round/>
-                      <a:headEnd type="none" w="med" len="med"/>
-                      <a:tailEnd type="none" w="med" len="med"/>
-                    </a:lnB>
-                  </a:tcPr>
-                </a:tc>
-              </a:tr>
-              <a:tr h="425196">
-                <a:tc>
-                  <a:txBody>
-                    <a:bodyPr/>
-                    <a:lstStyle/>
-                    <a:p>
-                      <a:pPr indent="0" marL="0">
-                        <a:buNone/>
-                      </a:pPr>
-                      <a:r>
-                        <a:rPr lang="en-US" sz="850" b="1" dirty="0">
-                          <a:solidFill>
-                            <a:srgbClr val="182F48"/>
-                          </a:solidFill>
-                          <a:latin typeface="Noto Sans KR" pitchFamily="34" charset="0"/>
-                          <a:ea typeface="Noto Sans KR" pitchFamily="34" charset="-122"/>
-                          <a:cs typeface="Noto Sans KR" pitchFamily="34" charset="-120"/>
-                        </a:rPr>
-                        <a:t>Q3 참여 결정 조건</a:t>
+                        <a:t>Q3 참여 조건</a:t>
                       </a:r>
                       <a:endParaRPr lang="en-US" sz="850" dirty="0">
                         <a:latin typeface="Noto Sans KR" charset="0"/>
@@ -15176,7 +15813,7 @@
                   </a:tcPr>
                 </a:tc>
               </a:tr>
-              <a:tr h="425196">
+              <a:tr h="342900">
                 <a:tc>
                   <a:txBody>
                     <a:bodyPr/>
@@ -15194,7 +15831,7 @@
                           <a:ea typeface="Noto Sans KR" pitchFamily="34" charset="-122"/>
                           <a:cs typeface="Noto Sans KR" pitchFamily="34" charset="-120"/>
                         </a:rPr>
-                        <a:t>Q4 부스비 수준</a:t>
+                        <a:t>Q4 부스비</a:t>
                       </a:r>
                       <a:endParaRPr lang="en-US" sz="850" dirty="0">
                         <a:latin typeface="Noto Sans KR" charset="0"/>
@@ -15259,7 +15896,7 @@
                           <a:ea typeface="Noto Sans KR" pitchFamily="34" charset="-122"/>
                           <a:cs typeface="Noto Sans KR" pitchFamily="34" charset="-120"/>
                         </a:rPr>
-                        <a:t>국내 부스 10년 이상, 해외(유럽·미국) 약 2년에 1회 참가, 부스비 2만~5만 달러</a:t>
+                        <a:t>국내 부스 10년 이상, 해외(유럽·미국) 약 2년에 1회, 부스비 2만~5만 달러</a:t>
                       </a:r>
                       <a:endParaRPr lang="en-US" sz="850" dirty="0">
                         <a:latin typeface="Noto Sans KR" charset="0"/>
@@ -15308,7 +15945,7 @@
                   </a:tcPr>
                 </a:tc>
               </a:tr>
-              <a:tr h="425196">
+              <a:tr h="342900">
                 <a:tc>
                   <a:txBody>
                     <a:bodyPr/>
@@ -15440,7 +16077,7 @@
                   </a:tcPr>
                 </a:tc>
               </a:tr>
-              <a:tr h="425196">
+              <a:tr h="342900">
                 <a:tc>
                   <a:txBody>
                     <a:bodyPr/>
@@ -15572,7 +16209,7 @@
                   </a:tcPr>
                 </a:tc>
               </a:tr>
-              <a:tr h="425196">
+              <a:tr h="342900">
                 <a:tc>
                   <a:txBody>
                     <a:bodyPr/>
@@ -15655,7 +16292,7 @@
                           <a:ea typeface="Noto Sans KR" pitchFamily="34" charset="-122"/>
                           <a:cs typeface="Noto Sans KR" pitchFamily="34" charset="-120"/>
                         </a:rPr>
-                        <a:t>"고객의 반응"</a:t>
+                        <a:t>고객의 반응</a:t>
                       </a:r>
                       <a:endParaRPr lang="en-US" sz="850" dirty="0">
                         <a:latin typeface="Noto Sans KR" charset="0"/>
@@ -15704,7 +16341,7 @@
                   </a:tcPr>
                 </a:tc>
               </a:tr>
-              <a:tr h="425196">
+              <a:tr h="342900">
                 <a:tc>
                   <a:txBody>
                     <a:bodyPr/>
@@ -15787,7 +16424,7 @@
                           <a:ea typeface="Noto Sans KR" pitchFamily="34" charset="-122"/>
                           <a:cs typeface="Noto Sans KR" pitchFamily="34" charset="-120"/>
                         </a:rPr>
-                        <a:t>투자·바이어·현장판매는 의미 적음. 장비의 장점을 관심 깊게 들어줄 고객이 있으면 참가</a:t>
+                        <a:t>투자·바이어·현장판매·고객 확보는 의미 적음, 브랜드 홍보가 목적</a:t>
                       </a:r>
                       <a:endParaRPr lang="en-US" sz="850" dirty="0">
                         <a:latin typeface="Noto Sans KR" charset="0"/>
@@ -15842,7 +16479,111 @@
       </p:graphicFrame>
       <p:sp>
         <p:nvSpPr>
-          <p:cNvPr id="26" name="기획 수정 제목"/>
+          <p:cNvPr id="26" name="핵심 발언 배경"/>
+          <p:cNvSpPr/>
+          <p:nvPr/>
+        </p:nvSpPr>
+        <p:spPr>
+          <a:xfrm>
+            <a:off x="4224528" y="5349240"/>
+            <a:ext cx="4069080" cy="914400"/>
+          </a:xfrm>
+          <a:prstGeom prst="roundRect">
+            <a:avLst>
+              <a:gd name="adj" fmla="val 6000"/>
+            </a:avLst>
+          </a:prstGeom>
+          <a:solidFill>
+            <a:srgbClr val="182F48"/>
+          </a:solidFill>
+          <a:ln/>
+        </p:spPr>
+      </p:sp>
+      <p:sp>
+        <p:nvSpPr>
+          <p:cNvPr id="27" name="핵심 발언"/>
+          <p:cNvSpPr txBox="1"/>
+          <p:nvPr/>
+        </p:nvSpPr>
+        <p:spPr>
+          <a:xfrm>
+            <a:off x="4315968" y="5376672"/>
+            <a:ext cx="3886200" cy="859536"/>
+          </a:xfrm>
+          <a:prstGeom prst="rect">
+            <a:avLst/>
+          </a:prstGeom>
+          <a:noFill/>
+          <a:ln/>
+        </p:spPr>
+        <p:txBody>
+          <a:bodyPr wrap="square" lIns="0" tIns="0" rIns="0" bIns="0" rtlCol="0" anchor="ctr"/>
+          <a:lstStyle/>
+          <a:p>
+            <a:pPr indent="0" marL="0">
+              <a:spcAft>
+                <a:spcPts val="200"/>
+              </a:spcAft>
+              <a:buNone/>
+            </a:pPr>
+            <a:r>
+              <a:rPr lang="en-US" sz="900" b="1" dirty="0">
+                <a:solidFill>
+                  <a:srgbClr val="9FE0E6"/>
+                </a:solidFill>
+                <a:latin typeface="Noto Sans KR" pitchFamily="34" charset="0"/>
+                <a:ea typeface="Noto Sans KR" pitchFamily="34" charset="-122"/>
+                <a:cs typeface="Noto Sans KR" pitchFamily="34" charset="-120"/>
+              </a:rPr>
+              <a:t>핵심 발언 (녹취 원문)</a:t>
+            </a:r>
+            <a:endParaRPr lang="en-US" sz="900" dirty="0"/>
+          </a:p>
+          <a:p>
+            <a:pPr indent="0" marL="0">
+              <a:spcAft>
+                <a:spcPts val="200"/>
+              </a:spcAft>
+              <a:buNone/>
+            </a:pPr>
+            <a:r>
+              <a:rPr lang="en-US" sz="850" b="1" dirty="0">
+                <a:solidFill>
+                  <a:srgbClr val="FFFFFF"/>
+                </a:solidFill>
+                <a:latin typeface="Noto Sans KR" pitchFamily="34" charset="0"/>
+                <a:ea typeface="Noto Sans KR" pitchFamily="34" charset="-122"/>
+                <a:cs typeface="Noto Sans KR" pitchFamily="34" charset="-120"/>
+              </a:rPr>
+              <a:t>"고객의 반응이겠죠." (성공 기준)</a:t>
+            </a:r>
+            <a:endParaRPr lang="en-US" sz="900" dirty="0"/>
+          </a:p>
+          <a:p>
+            <a:pPr indent="0" marL="0">
+              <a:spcAft>
+                <a:spcPts val="200"/>
+              </a:spcAft>
+              <a:buNone/>
+            </a:pPr>
+            <a:r>
+              <a:rPr lang="en-US" sz="850" dirty="0">
+                <a:solidFill>
+                  <a:srgbClr val="FFFFFF"/>
+                </a:solidFill>
+                <a:latin typeface="Noto Sans KR" pitchFamily="34" charset="0"/>
+                <a:ea typeface="Noto Sans KR" pitchFamily="34" charset="-122"/>
+                <a:cs typeface="Noto Sans KR" pitchFamily="34" charset="-120"/>
+              </a:rPr>
+              <a:t>"이 장비에 대한 좋은 점을 설명하는 것, 그걸 관심 깊게 들어주는 고객들이 필요하지, 현장에서 판매를 하거나 이런 거는 의미가 없고요."</a:t>
+            </a:r>
+            <a:endParaRPr lang="en-US" sz="900" dirty="0"/>
+          </a:p>
+        </p:txBody>
+      </p:sp>
+      <p:sp>
+        <p:nvSpPr>
+          <p:cNvPr id="28" name="기획 수정 제목"/>
           <p:cNvSpPr txBox="1"/>
           <p:nvPr/>
         </p:nvSpPr>
@@ -15881,7 +16622,7 @@
       </p:sp>
       <p:sp>
         <p:nvSpPr>
-          <p:cNvPr id="27" name="기획 수정 배경"/>
+          <p:cNvPr id="29" name="기획 수정 배경"/>
           <p:cNvSpPr/>
           <p:nvPr/>
         </p:nvSpPr>
@@ -15903,7 +16644,7 @@
       </p:sp>
       <p:sp>
         <p:nvSpPr>
-          <p:cNvPr id="28" name="기획 수정"/>
+          <p:cNvPr id="30" name="기획 수정"/>
           <p:cNvSpPr txBox="1"/>
           <p:nvPr/>
         </p:nvSpPr>
@@ -16013,7 +16754,7 @@
       </p:sp>
       <p:sp>
         <p:nvSpPr>
-          <p:cNvPr id="29" name="추가 확인 제목"/>
+          <p:cNvPr id="31" name="추가 확인 제목"/>
           <p:cNvSpPr txBox="1"/>
           <p:nvPr/>
         </p:nvSpPr>
@@ -16044,7 +16785,7 @@
                 <a:ea typeface="Noto Sans KR" pitchFamily="34" charset="-122"/>
                 <a:cs typeface="Noto Sans KR" pitchFamily="34" charset="-120"/>
               </a:rPr>
-              <a:t>추가 확인 사항</a:t>
+              <a:t>통화 후 추가로 확인할 사항</a:t>
             </a:r>
             <a:endParaRPr lang="en-US" sz="1100" dirty="0"/>
           </a:p>
@@ -16052,7 +16793,7 @@
       </p:sp>
       <p:sp>
         <p:nvSpPr>
-          <p:cNvPr id="30" name="추가 확인"/>
+          <p:cNvPr id="32" name="추가 확인"/>
           <p:cNvSpPr txBox="1"/>
           <p:nvPr/>
         </p:nvSpPr>

--- a/GFF_SEOUL_2027_전시산업론_중간과제.pptx
+++ b/GFF_SEOUL_2027_전시산업론_중간과제.pptx
@@ -967,7 +967,7 @@
               <a:rPr lang="en-US" dirty="0"/>
               <a:t>[이해관계자] 이해관계자는 공공기관, 협회·단체, 연구·시험기관, 미디어, 베뉴·플랫폼의 다섯 분류, 열두 곳입니다. 교수님 말씀대로 각 기관이 이 배에 타야 하는 이유, 즉 얻는 이익을 그 기관의 실제 사업 목표와 연결해 적었습니다. 역할 칸의 ①②③은 그 기관이 1장의 어느 병목을 푸는 데 힘을 보태는지를 표시한 것입니다.
 예를 들어 산업통상부는 230억 원 규모 'All in Korea' 사업의 목표인 소재-제조-브랜드 협력 성과를 우리 현장에서 얻고, KOTRA는 해외 바이어 초청으로 수출 상담 실적을, 서울시는 도심 봉제업체의 일감을 얻습니다. 협회는 회원사를 공동관으로 모으는 가장 강한 모집 파트너이고, FITI시험연구원은 Test Lab에 신뢰를, GO OUT KOREA와 패션비즈는 업계 홍보와 인플루언서 섭외를 맡습니다.
-[별첨] 참가업체 측은 마무트 종로점·제로그램 등을 운영하는 유통 담당자를 직접 만나 인터뷰했고, 질문 여덟 개의 답변을 녹취 그대로 별첨 1에 옮겼습니다. 바이어 측은 아웃도어 편집숍 홀라인의 바잉 담당자에게 전화할 예정이며, 행사 설명과 질문을 담은 통화 대본을 따로 준비했습니다.</a:t>
+[별첨] 참가업체 측은 마무트 종로점·제로그램 등을 운영하는 유통 담당자를 직접 만나 인터뷰했고, 질문 여덟 개의 답변을 녹취 그대로 별첨 1에 옮겼습니다. 바이어 측은 홀라인과 무신사에 전화했지만 매장 직원과 고객센터로만 연결돼 실무 바이어와는 통화하지 못했습니다. 그 시도 내역과 이유, 대신 확인한 자료를 별첨 2에 정리했습니다.</a:t>
             </a:r>
             <a:endParaRPr lang="en-US" dirty="0"/>
           </a:p>
@@ -1233,9 +1233,9 @@
           <a:p>
             <a:r>
               <a:rPr lang="en-US" dirty="0"/>
-              <a:t>바이어 측은 아웃도어 라이프스타일 편집숍 홀라인의 바잉 담당자에게 전화합니다. 2014년 홍대점을 연 독립 편집숍이라 대표번호로 바이어와 직접 연결될 가능성이 높고, 무신사나 백화점 MD보다 통화가 현실적입니다.
-홀라인은 파타고니아·아크테릭스·마무트 같은 해외 브랜드를 주로 다룹니다. 해외 브랜드의 직진출이 늘면 대신할 브랜드를 찾아야 하므로, 국내 고프코어 브랜드를 한자리에서 보는 행사가 실제로 필요한지 물어보기에 알맞습니다.
-통화는 행사를 1분 정도 설명한 뒤, 지금 겪는 어려움, 행사에서 원하는 것, 참관 의향과 걸림돌 순서로 묻습니다. 통화가 끝나면 오른쪽 표를 채우고 6장의 상태를 완료로 바꿉니다.</a:t>
+              <a:t>바이어 측은 아웃도어 편집숍 홀라인과 온라인 플랫폼 무신사에 전화했습니다. 홀라인은 매장 직원이 받았지만 바잉 담당이 아니어서 준비한 질문에 답할 수 있는 사람이 없었고, 무신사는 고객센터로 연결돼 MD에게 닿지 못했습니다.
+연결되지 않은 이유는 구조적입니다. 바이어의 직통 번호는 공개돼 있지 않고, 공개된 번호는 매장이나 고객센터로 이어지며, 고객센터는 소비자 문의만 다룹니다.
+이 경험이 기획 배경을 뒷받침합니다. 신진 브랜드도 이렇게 바이어에게 닿지 못하기 때문에, 바이어를 미리 등록받아 1:1 상담을 잡아 주는 트레이드 데이가 필요합니다. 바이어 수요는 무신사 도쿄 쇼룸과 무신사 스탠다드 수주회 자료로 대신 확인했습니다.</a:t>
             </a:r>
             <a:endParaRPr lang="en-US" dirty="0"/>
           </a:p>
@@ -29694,7 +29694,7 @@
                 <a:ea typeface="Noto Sans KR" pitchFamily="34" charset="-122"/>
                 <a:cs typeface="Noto Sans KR" pitchFamily="34" charset="-120"/>
               </a:rPr>
-              <a:t>바이어 측 · 통화 예정 (최소 1곳 필수)</a:t>
+              <a:t>바이어 측 · 통화 시도 (실무 바이어 연결 불가)</a:t>
             </a:r>
             <a:pPr algn="l" indent="0" marL="0">
               <a:lnSpc>
@@ -29737,7 +29737,7 @@
                 <a:ea typeface="Noto Sans KR" pitchFamily="34" charset="-122"/>
                 <a:cs typeface="Noto Sans KR" pitchFamily="34" charset="-120"/>
               </a:rPr>
-              <a:t>홀라인(아웃도어 라이프스타일 편집숍) 바잉 담당자 1곳</a:t>
+              <a:t>홀라인(아웃도어 편집숍) · 무신사(온라인 플랫폼)에 전화</a:t>
             </a:r>
             <a:endParaRPr lang="en-US" sz="750" dirty="0"/>
           </a:p>
@@ -29760,7 +29760,7 @@
                 <a:ea typeface="Noto Sans KR" pitchFamily="34" charset="-122"/>
                 <a:cs typeface="Noto Sans KR" pitchFamily="34" charset="-120"/>
               </a:rPr>
-              <a:t>국내 브랜드를 찾는 방법 · 어려움 · 참관 의향을 묻는다 (행사 설명이 담긴 통화 대본은 별도 PDF)</a:t>
+              <a:t>매장 직원 · 고객센터로만 연결돼 바이어와 통화하지 못함 → 시도 내역 · 사유 · 대체 자료를 정리</a:t>
             </a:r>
             <a:endParaRPr lang="en-US" sz="750" dirty="0"/>
           </a:p>
@@ -34879,7 +34879,7 @@
                 <a:ea typeface="Noto Sans KR" pitchFamily="34" charset="-122"/>
                 <a:cs typeface="Noto Sans KR" pitchFamily="34" charset="-120"/>
               </a:rPr>
-              <a:t>아웃도어 편집숍 바잉 담당자 1곳 — 통화 대상과 기록표 (통화 후 빈칸을 채운다)</a:t>
+              <a:t>바이어 통화 시도 기록 — 실무 바이어와 연결되지 않은 이유와 대신 확인한 것</a:t>
             </a:r>
             <a:endParaRPr lang="en-US" sz="1500" dirty="0"/>
           </a:p>
@@ -34921,7 +34921,7 @@
                 <a:ea typeface="Noto Sans KR" pitchFamily="34" charset="-122"/>
                 <a:cs typeface="Noto Sans KR" pitchFamily="34" charset="-120"/>
               </a:rPr>
-              <a:t>※ 대상 정보: 홀라인 공식 사이트(hollain.com) 고객센터 안내, 고도몰 고객사례(홍대점 2014년 3월 오픈), 어패럴뉴스 「패션 핫 플레이스」. 매장과 번호는 통화 전에 다시 확인한다.</a:t>
+              <a:t>※ 연결되지 않은 시도도 지우지 않고 시도 내역으로 남겼다(교수님 기준). 시도 일시는 실제로 전화한 날짜와 시각이다.</a:t>
             </a:r>
             <a:endParaRPr lang="en-US" sz="700" dirty="0"/>
           </a:p>
@@ -34941,7 +34941,7 @@
                 <a:ea typeface="Noto Sans KR" pitchFamily="34" charset="-122"/>
                 <a:cs typeface="Noto Sans KR" pitchFamily="34" charset="-120"/>
               </a:rPr>
-              <a:t>※ 결과 표기: 연결 성공 / 부재(재시도) / 거절. 연결되지 않은 시도도 지우지 않고 날짜와 함께 남긴다. 행사 설명과 질문 전체는 별도 PDF 「바이어 측 전화 검증 대본」에 있다.</a:t>
+              <a:t>※ 대신 확인한 자료: 무신사 뉴스룸(2024.7.17), 스마트투데이(2026.8). 준비한 행사 설명과 질문은 별도 PDF 「바이어 측 전화 검증 대본」에 있다.</a:t>
             </a:r>
             <a:endParaRPr lang="en-US" sz="700" dirty="0"/>
           </a:p>
@@ -34949,14 +34949,14 @@
       </p:sp>
       <p:sp>
         <p:nvSpPr>
-          <p:cNvPr id="7" name="제목 통화 대상"/>
+          <p:cNvPr id="7" name="제목 통화 시도 기록"/>
           <p:cNvSpPr txBox="1"/>
           <p:nvPr/>
         </p:nvSpPr>
         <p:spPr>
           <a:xfrm>
             <a:off x="612648" y="1463040"/>
-            <a:ext cx="4069080" cy="237744"/>
+            <a:ext cx="10963656" cy="237744"/>
           </a:xfrm>
           <a:prstGeom prst="rect">
             <a:avLst/>
@@ -34983,7 +34983,7 @@
                 <a:ea typeface="Noto Sans KR" pitchFamily="34" charset="-122"/>
                 <a:cs typeface="Noto Sans KR" pitchFamily="34" charset="-120"/>
               </a:rPr>
-              <a:t>통화 대상</a:t>
+              <a:t>통화 시도 기록</a:t>
             </a:r>
             <a:endParaRPr lang="en-US" sz="1050" dirty="0"/>
           </a:p>
@@ -34991,7 +34991,7 @@
       </p:sp>
       <p:graphicFrame>
         <p:nvGraphicFramePr>
-          <p:cNvPr id="10" name="통화 대상"/>
+          <p:cNvPr id="10" name="통화 시도 기록"/>
           <p:cNvGraphicFramePr>
             <a:graphicFrameLocks noGrp="1"/>
           </p:cNvGraphicFramePr>
@@ -35005,17 +35005,78 @@
         </p:nvGraphicFramePr>
         <p:xfrm>
           <a:off x="612648" y="1737360"/>
-          <a:ext cx="4069080" cy="914400"/>
+          <a:ext cx="10963656" cy="914400"/>
         </p:xfrm>
         <a:graphic>
           <a:graphicData uri="http://schemas.openxmlformats.org/drawingml/2006/table">
             <a:tbl>
               <a:tblPr/>
               <a:tblGrid>
-                <a:gridCol w="822960"/>
-                <a:gridCol w="3246120"/>
+                <a:gridCol w="365760"/>
+                <a:gridCol w="2240280"/>
+                <a:gridCol w="1600200"/>
+                <a:gridCol w="914400"/>
+                <a:gridCol w="1325880"/>
+                <a:gridCol w="4517136"/>
               </a:tblGrid>
-              <a:tr h="221549">
+              <a:tr h="234249">
+                <a:tc>
+                  <a:txBody>
+                    <a:bodyPr/>
+                    <a:lstStyle/>
+                    <a:p>
+                      <a:pPr algn="l" indent="0" marL="0">
+                        <a:buNone/>
+                      </a:pPr>
+                      <a:endParaRPr lang="en-US" sz="800" dirty="0">
+                        <a:latin typeface="Noto Sans KR" charset="0"/>
+                        <a:ea typeface="Noto Sans KR" charset="0"/>
+                        <a:cs typeface="Noto Sans KR" charset="0"/>
+                      </a:endParaRPr>
+                    </a:p>
+                  </a:txBody>
+                  <a:tcPr marL="76200" marR="76200" marT="38100" marB="38100" anchor="ctr">
+                    <a:lnL w="6350" cap="flat" cmpd="sng" algn="ctr">
+                      <a:solidFill>
+                        <a:srgbClr val="CBD5E1"/>
+                      </a:solidFill>
+                      <a:prstDash val="solid"/>
+                      <a:round/>
+                      <a:headEnd type="none" w="med" len="med"/>
+                      <a:tailEnd type="none" w="med" len="med"/>
+                    </a:lnL>
+                    <a:lnR w="6350" cap="flat" cmpd="sng" algn="ctr">
+                      <a:solidFill>
+                        <a:srgbClr val="CBD5E1"/>
+                      </a:solidFill>
+                      <a:prstDash val="solid"/>
+                      <a:round/>
+                      <a:headEnd type="none" w="med" len="med"/>
+                      <a:tailEnd type="none" w="med" len="med"/>
+                    </a:lnR>
+                    <a:lnT w="6350" cap="flat" cmpd="sng" algn="ctr">
+                      <a:solidFill>
+                        <a:srgbClr val="CBD5E1"/>
+                      </a:solidFill>
+                      <a:prstDash val="solid"/>
+                      <a:round/>
+                      <a:headEnd type="none" w="med" len="med"/>
+                      <a:tailEnd type="none" w="med" len="med"/>
+                    </a:lnT>
+                    <a:lnB w="6350" cap="flat" cmpd="sng" algn="ctr">
+                      <a:solidFill>
+                        <a:srgbClr val="CBD5E1"/>
+                      </a:solidFill>
+                      <a:prstDash val="solid"/>
+                      <a:round/>
+                      <a:headEnd type="none" w="med" len="med"/>
+                      <a:tailEnd type="none" w="med" len="med"/>
+                    </a:lnB>
+                    <a:solidFill>
+                      <a:srgbClr val="182F48"/>
+                    </a:solidFill>
+                  </a:tcPr>
+                </a:tc>
                 <a:tc>
                   <a:txBody>
                     <a:bodyPr/>
@@ -35027,13 +35088,13 @@
                       <a:r>
                         <a:rPr lang="en-US" sz="800" b="1" dirty="0">
                           <a:solidFill>
-                            <a:srgbClr val="182F48"/>
+                            <a:srgbClr val="FFFFFF"/>
                           </a:solidFill>
                           <a:latin typeface="Noto Sans KR" pitchFamily="34" charset="0"/>
                           <a:ea typeface="Noto Sans KR" pitchFamily="34" charset="-122"/>
                           <a:cs typeface="Noto Sans KR" pitchFamily="34" charset="-120"/>
                         </a:rPr>
-                        <a:t>대상</a:t>
+                        <a:t>업체 · 업종</a:t>
                       </a:r>
                       <a:endParaRPr lang="en-US" sz="800" dirty="0">
                         <a:latin typeface="Noto Sans KR" charset="0"/>
@@ -35042,7 +35103,7 @@
                       </a:endParaRPr>
                     </a:p>
                   </a:txBody>
-                  <a:tcPr marL="76200" marR="76200" marT="31750" marB="31750" anchor="ctr">
+                  <a:tcPr marL="76200" marR="76200" marT="38100" marB="38100" anchor="ctr">
                     <a:lnL w="6350" cap="flat" cmpd="sng" algn="ctr">
                       <a:solidFill>
                         <a:srgbClr val="CBD5E1"/>
@@ -35080,8 +35141,347 @@
                       <a:tailEnd type="none" w="med" len="med"/>
                     </a:lnB>
                     <a:solidFill>
-                      <a:srgbClr val="F1F5F9"/>
+                      <a:srgbClr val="182F48"/>
                     </a:solidFill>
+                  </a:tcPr>
+                </a:tc>
+                <a:tc>
+                  <a:txBody>
+                    <a:bodyPr/>
+                    <a:lstStyle/>
+                    <a:p>
+                      <a:pPr algn="l" indent="0" marL="0">
+                        <a:buNone/>
+                      </a:pPr>
+                      <a:r>
+                        <a:rPr lang="en-US" sz="800" b="1" dirty="0">
+                          <a:solidFill>
+                            <a:srgbClr val="FFFFFF"/>
+                          </a:solidFill>
+                          <a:latin typeface="Noto Sans KR" pitchFamily="34" charset="0"/>
+                          <a:ea typeface="Noto Sans KR" pitchFamily="34" charset="-122"/>
+                          <a:cs typeface="Noto Sans KR" pitchFamily="34" charset="-120"/>
+                        </a:rPr>
+                        <a:t>연락 경로 · 번호</a:t>
+                      </a:r>
+                      <a:endParaRPr lang="en-US" sz="800" dirty="0">
+                        <a:latin typeface="Noto Sans KR" charset="0"/>
+                        <a:ea typeface="Noto Sans KR" charset="0"/>
+                        <a:cs typeface="Noto Sans KR" charset="0"/>
+                      </a:endParaRPr>
+                    </a:p>
+                  </a:txBody>
+                  <a:tcPr marL="76200" marR="76200" marT="38100" marB="38100" anchor="ctr">
+                    <a:lnL w="6350" cap="flat" cmpd="sng" algn="ctr">
+                      <a:solidFill>
+                        <a:srgbClr val="CBD5E1"/>
+                      </a:solidFill>
+                      <a:prstDash val="solid"/>
+                      <a:round/>
+                      <a:headEnd type="none" w="med" len="med"/>
+                      <a:tailEnd type="none" w="med" len="med"/>
+                    </a:lnL>
+                    <a:lnR w="6350" cap="flat" cmpd="sng" algn="ctr">
+                      <a:solidFill>
+                        <a:srgbClr val="CBD5E1"/>
+                      </a:solidFill>
+                      <a:prstDash val="solid"/>
+                      <a:round/>
+                      <a:headEnd type="none" w="med" len="med"/>
+                      <a:tailEnd type="none" w="med" len="med"/>
+                    </a:lnR>
+                    <a:lnT w="6350" cap="flat" cmpd="sng" algn="ctr">
+                      <a:solidFill>
+                        <a:srgbClr val="CBD5E1"/>
+                      </a:solidFill>
+                      <a:prstDash val="solid"/>
+                      <a:round/>
+                      <a:headEnd type="none" w="med" len="med"/>
+                      <a:tailEnd type="none" w="med" len="med"/>
+                    </a:lnT>
+                    <a:lnB w="6350" cap="flat" cmpd="sng" algn="ctr">
+                      <a:solidFill>
+                        <a:srgbClr val="CBD5E1"/>
+                      </a:solidFill>
+                      <a:prstDash val="solid"/>
+                      <a:round/>
+                      <a:headEnd type="none" w="med" len="med"/>
+                      <a:tailEnd type="none" w="med" len="med"/>
+                    </a:lnB>
+                    <a:solidFill>
+                      <a:srgbClr val="182F48"/>
+                    </a:solidFill>
+                  </a:tcPr>
+                </a:tc>
+                <a:tc>
+                  <a:txBody>
+                    <a:bodyPr/>
+                    <a:lstStyle/>
+                    <a:p>
+                      <a:pPr algn="l" indent="0" marL="0">
+                        <a:buNone/>
+                      </a:pPr>
+                      <a:r>
+                        <a:rPr lang="en-US" sz="800" b="1" dirty="0">
+                          <a:solidFill>
+                            <a:srgbClr val="FFFFFF"/>
+                          </a:solidFill>
+                          <a:latin typeface="Noto Sans KR" pitchFamily="34" charset="0"/>
+                          <a:ea typeface="Noto Sans KR" pitchFamily="34" charset="-122"/>
+                          <a:cs typeface="Noto Sans KR" pitchFamily="34" charset="-120"/>
+                        </a:rPr>
+                        <a:t>시도 일시</a:t>
+                      </a:r>
+                      <a:endParaRPr lang="en-US" sz="800" dirty="0">
+                        <a:latin typeface="Noto Sans KR" charset="0"/>
+                        <a:ea typeface="Noto Sans KR" charset="0"/>
+                        <a:cs typeface="Noto Sans KR" charset="0"/>
+                      </a:endParaRPr>
+                    </a:p>
+                  </a:txBody>
+                  <a:tcPr marL="76200" marR="76200" marT="38100" marB="38100" anchor="ctr">
+                    <a:lnL w="6350" cap="flat" cmpd="sng" algn="ctr">
+                      <a:solidFill>
+                        <a:srgbClr val="CBD5E1"/>
+                      </a:solidFill>
+                      <a:prstDash val="solid"/>
+                      <a:round/>
+                      <a:headEnd type="none" w="med" len="med"/>
+                      <a:tailEnd type="none" w="med" len="med"/>
+                    </a:lnL>
+                    <a:lnR w="6350" cap="flat" cmpd="sng" algn="ctr">
+                      <a:solidFill>
+                        <a:srgbClr val="CBD5E1"/>
+                      </a:solidFill>
+                      <a:prstDash val="solid"/>
+                      <a:round/>
+                      <a:headEnd type="none" w="med" len="med"/>
+                      <a:tailEnd type="none" w="med" len="med"/>
+                    </a:lnR>
+                    <a:lnT w="6350" cap="flat" cmpd="sng" algn="ctr">
+                      <a:solidFill>
+                        <a:srgbClr val="CBD5E1"/>
+                      </a:solidFill>
+                      <a:prstDash val="solid"/>
+                      <a:round/>
+                      <a:headEnd type="none" w="med" len="med"/>
+                      <a:tailEnd type="none" w="med" len="med"/>
+                    </a:lnT>
+                    <a:lnB w="6350" cap="flat" cmpd="sng" algn="ctr">
+                      <a:solidFill>
+                        <a:srgbClr val="CBD5E1"/>
+                      </a:solidFill>
+                      <a:prstDash val="solid"/>
+                      <a:round/>
+                      <a:headEnd type="none" w="med" len="med"/>
+                      <a:tailEnd type="none" w="med" len="med"/>
+                    </a:lnB>
+                    <a:solidFill>
+                      <a:srgbClr val="182F48"/>
+                    </a:solidFill>
+                  </a:tcPr>
+                </a:tc>
+                <a:tc>
+                  <a:txBody>
+                    <a:bodyPr/>
+                    <a:lstStyle/>
+                    <a:p>
+                      <a:pPr algn="l" indent="0" marL="0">
+                        <a:buNone/>
+                      </a:pPr>
+                      <a:r>
+                        <a:rPr lang="en-US" sz="800" b="1" dirty="0">
+                          <a:solidFill>
+                            <a:srgbClr val="FFFFFF"/>
+                          </a:solidFill>
+                          <a:latin typeface="Noto Sans KR" pitchFamily="34" charset="0"/>
+                          <a:ea typeface="Noto Sans KR" pitchFamily="34" charset="-122"/>
+                          <a:cs typeface="Noto Sans KR" pitchFamily="34" charset="-120"/>
+                        </a:rPr>
+                        <a:t>결과</a:t>
+                      </a:r>
+                      <a:endParaRPr lang="en-US" sz="800" dirty="0">
+                        <a:latin typeface="Noto Sans KR" charset="0"/>
+                        <a:ea typeface="Noto Sans KR" charset="0"/>
+                        <a:cs typeface="Noto Sans KR" charset="0"/>
+                      </a:endParaRPr>
+                    </a:p>
+                  </a:txBody>
+                  <a:tcPr marL="76200" marR="76200" marT="38100" marB="38100" anchor="ctr">
+                    <a:lnL w="6350" cap="flat" cmpd="sng" algn="ctr">
+                      <a:solidFill>
+                        <a:srgbClr val="CBD5E1"/>
+                      </a:solidFill>
+                      <a:prstDash val="solid"/>
+                      <a:round/>
+                      <a:headEnd type="none" w="med" len="med"/>
+                      <a:tailEnd type="none" w="med" len="med"/>
+                    </a:lnL>
+                    <a:lnR w="6350" cap="flat" cmpd="sng" algn="ctr">
+                      <a:solidFill>
+                        <a:srgbClr val="CBD5E1"/>
+                      </a:solidFill>
+                      <a:prstDash val="solid"/>
+                      <a:round/>
+                      <a:headEnd type="none" w="med" len="med"/>
+                      <a:tailEnd type="none" w="med" len="med"/>
+                    </a:lnR>
+                    <a:lnT w="6350" cap="flat" cmpd="sng" algn="ctr">
+                      <a:solidFill>
+                        <a:srgbClr val="CBD5E1"/>
+                      </a:solidFill>
+                      <a:prstDash val="solid"/>
+                      <a:round/>
+                      <a:headEnd type="none" w="med" len="med"/>
+                      <a:tailEnd type="none" w="med" len="med"/>
+                    </a:lnT>
+                    <a:lnB w="6350" cap="flat" cmpd="sng" algn="ctr">
+                      <a:solidFill>
+                        <a:srgbClr val="CBD5E1"/>
+                      </a:solidFill>
+                      <a:prstDash val="solid"/>
+                      <a:round/>
+                      <a:headEnd type="none" w="med" len="med"/>
+                      <a:tailEnd type="none" w="med" len="med"/>
+                    </a:lnB>
+                    <a:solidFill>
+                      <a:srgbClr val="182F48"/>
+                    </a:solidFill>
+                  </a:tcPr>
+                </a:tc>
+                <a:tc>
+                  <a:txBody>
+                    <a:bodyPr/>
+                    <a:lstStyle/>
+                    <a:p>
+                      <a:pPr algn="l" indent="0" marL="0">
+                        <a:buNone/>
+                      </a:pPr>
+                      <a:r>
+                        <a:rPr lang="en-US" sz="800" b="1" dirty="0">
+                          <a:solidFill>
+                            <a:srgbClr val="FFFFFF"/>
+                          </a:solidFill>
+                          <a:latin typeface="Noto Sans KR" pitchFamily="34" charset="0"/>
+                          <a:ea typeface="Noto Sans KR" pitchFamily="34" charset="-122"/>
+                          <a:cs typeface="Noto Sans KR" pitchFamily="34" charset="-120"/>
+                        </a:rPr>
+                        <a:t>응대 내용</a:t>
+                      </a:r>
+                      <a:endParaRPr lang="en-US" sz="800" dirty="0">
+                        <a:latin typeface="Noto Sans KR" charset="0"/>
+                        <a:ea typeface="Noto Sans KR" charset="0"/>
+                        <a:cs typeface="Noto Sans KR" charset="0"/>
+                      </a:endParaRPr>
+                    </a:p>
+                  </a:txBody>
+                  <a:tcPr marL="76200" marR="76200" marT="38100" marB="38100" anchor="ctr">
+                    <a:lnL w="6350" cap="flat" cmpd="sng" algn="ctr">
+                      <a:solidFill>
+                        <a:srgbClr val="CBD5E1"/>
+                      </a:solidFill>
+                      <a:prstDash val="solid"/>
+                      <a:round/>
+                      <a:headEnd type="none" w="med" len="med"/>
+                      <a:tailEnd type="none" w="med" len="med"/>
+                    </a:lnL>
+                    <a:lnR w="6350" cap="flat" cmpd="sng" algn="ctr">
+                      <a:solidFill>
+                        <a:srgbClr val="CBD5E1"/>
+                      </a:solidFill>
+                      <a:prstDash val="solid"/>
+                      <a:round/>
+                      <a:headEnd type="none" w="med" len="med"/>
+                      <a:tailEnd type="none" w="med" len="med"/>
+                    </a:lnR>
+                    <a:lnT w="6350" cap="flat" cmpd="sng" algn="ctr">
+                      <a:solidFill>
+                        <a:srgbClr val="CBD5E1"/>
+                      </a:solidFill>
+                      <a:prstDash val="solid"/>
+                      <a:round/>
+                      <a:headEnd type="none" w="med" len="med"/>
+                      <a:tailEnd type="none" w="med" len="med"/>
+                    </a:lnT>
+                    <a:lnB w="6350" cap="flat" cmpd="sng" algn="ctr">
+                      <a:solidFill>
+                        <a:srgbClr val="CBD5E1"/>
+                      </a:solidFill>
+                      <a:prstDash val="solid"/>
+                      <a:round/>
+                      <a:headEnd type="none" w="med" len="med"/>
+                      <a:tailEnd type="none" w="med" len="med"/>
+                    </a:lnB>
+                    <a:solidFill>
+                      <a:srgbClr val="182F48"/>
+                    </a:solidFill>
+                  </a:tcPr>
+                </a:tc>
+              </a:tr>
+              <a:tr h="374010">
+                <a:tc>
+                  <a:txBody>
+                    <a:bodyPr/>
+                    <a:lstStyle/>
+                    <a:p>
+                      <a:pPr algn="ctr" indent="0" marL="0">
+                        <a:buNone/>
+                      </a:pPr>
+                      <a:r>
+                        <a:rPr lang="en-US" sz="800" b="1" dirty="0">
+                          <a:solidFill>
+                            <a:srgbClr val="267D86"/>
+                          </a:solidFill>
+                          <a:latin typeface="Noto Sans KR" pitchFamily="34" charset="0"/>
+                          <a:ea typeface="Noto Sans KR" pitchFamily="34" charset="-122"/>
+                          <a:cs typeface="Noto Sans KR" pitchFamily="34" charset="-120"/>
+                        </a:rPr>
+                        <a:t>1</a:t>
+                      </a:r>
+                      <a:endParaRPr lang="en-US" sz="800" dirty="0">
+                        <a:latin typeface="Noto Sans KR" charset="0"/>
+                        <a:ea typeface="Noto Sans KR" charset="0"/>
+                        <a:cs typeface="Noto Sans KR" charset="0"/>
+                      </a:endParaRPr>
+                    </a:p>
+                  </a:txBody>
+                  <a:tcPr marL="76200" marR="76200" marT="38100" marB="38100" anchor="ctr">
+                    <a:lnL w="6350" cap="flat" cmpd="sng" algn="ctr">
+                      <a:solidFill>
+                        <a:srgbClr val="CBD5E1"/>
+                      </a:solidFill>
+                      <a:prstDash val="solid"/>
+                      <a:round/>
+                      <a:headEnd type="none" w="med" len="med"/>
+                      <a:tailEnd type="none" w="med" len="med"/>
+                    </a:lnL>
+                    <a:lnR w="6350" cap="flat" cmpd="sng" algn="ctr">
+                      <a:solidFill>
+                        <a:srgbClr val="CBD5E1"/>
+                      </a:solidFill>
+                      <a:prstDash val="solid"/>
+                      <a:round/>
+                      <a:headEnd type="none" w="med" len="med"/>
+                      <a:tailEnd type="none" w="med" len="med"/>
+                    </a:lnR>
+                    <a:lnT w="6350" cap="flat" cmpd="sng" algn="ctr">
+                      <a:solidFill>
+                        <a:srgbClr val="CBD5E1"/>
+                      </a:solidFill>
+                      <a:prstDash val="solid"/>
+                      <a:round/>
+                      <a:headEnd type="none" w="med" len="med"/>
+                      <a:tailEnd type="none" w="med" len="med"/>
+                    </a:lnT>
+                    <a:lnB w="6350" cap="flat" cmpd="sng" algn="ctr">
+                      <a:solidFill>
+                        <a:srgbClr val="CBD5E1"/>
+                      </a:solidFill>
+                      <a:prstDash val="solid"/>
+                      <a:round/>
+                      <a:headEnd type="none" w="med" len="med"/>
+                      <a:tailEnd type="none" w="med" len="med"/>
+                    </a:lnB>
                   </a:tcPr>
                 </a:tc>
                 <a:tc>
@@ -35101,7 +35501,28 @@
                           <a:ea typeface="Noto Sans KR" pitchFamily="34" charset="-122"/>
                           <a:cs typeface="Noto Sans KR" pitchFamily="34" charset="-120"/>
                         </a:rPr>
-                        <a:t>홀라인(HOLLAIN) 바잉 담당자 또는 대표</a:t>
+                        <a:t>홀라인 (HOLLAIN)</a:t>
+                      </a:r>
+                      <a:endParaRPr lang="en-US" sz="800" dirty="0">
+                        <a:latin typeface="Noto Sans KR" charset="0"/>
+                        <a:ea typeface="Noto Sans KR" charset="0"/>
+                        <a:cs typeface="Noto Sans KR" charset="0"/>
+                      </a:endParaRPr>
+                    </a:p>
+                    <a:p>
+                      <a:pPr algn="l" indent="0" marL="0">
+                        <a:buNone/>
+                      </a:pPr>
+                      <a:r>
+                        <a:rPr lang="en-US" sz="800" dirty="0">
+                          <a:solidFill>
+                            <a:srgbClr val="334155"/>
+                          </a:solidFill>
+                          <a:latin typeface="Noto Sans KR" pitchFamily="34" charset="0"/>
+                          <a:ea typeface="Noto Sans KR" pitchFamily="34" charset="-122"/>
+                          <a:cs typeface="Noto Sans KR" pitchFamily="34" charset="-120"/>
+                        </a:rPr>
+                        <a:t>아웃도어 편집숍 · 서울 마포구</a:t>
                       </a:r>
                       <a:endParaRPr lang="en-US" sz="800" dirty="0">
                         <a:latin typeface="Noto Sans KR" charset="0"/>
@@ -35110,7 +35531,7 @@
                       </a:endParaRPr>
                     </a:p>
                   </a:txBody>
-                  <a:tcPr marL="76200" marR="76200" marT="31750" marB="31750" anchor="ctr">
+                  <a:tcPr marL="76200" marR="76200" marT="38100" marB="38100" anchor="ctr">
                     <a:lnL w="6350" cap="flat" cmpd="sng" algn="ctr">
                       <a:solidFill>
                         <a:srgbClr val="CBD5E1"/>
@@ -35147,76 +35568,6 @@
                       <a:headEnd type="none" w="med" len="med"/>
                       <a:tailEnd type="none" w="med" len="med"/>
                     </a:lnB>
-                  </a:tcPr>
-                </a:tc>
-              </a:tr>
-              <a:tr h="221549">
-                <a:tc>
-                  <a:txBody>
-                    <a:bodyPr/>
-                    <a:lstStyle/>
-                    <a:p>
-                      <a:pPr algn="l" indent="0" marL="0">
-                        <a:buNone/>
-                      </a:pPr>
-                      <a:r>
-                        <a:rPr lang="en-US" sz="800" b="1" dirty="0">
-                          <a:solidFill>
-                            <a:srgbClr val="182F48"/>
-                          </a:solidFill>
-                          <a:latin typeface="Noto Sans KR" pitchFamily="34" charset="0"/>
-                          <a:ea typeface="Noto Sans KR" pitchFamily="34" charset="-122"/>
-                          <a:cs typeface="Noto Sans KR" pitchFamily="34" charset="-120"/>
-                        </a:rPr>
-                        <a:t>업종</a:t>
-                      </a:r>
-                      <a:endParaRPr lang="en-US" sz="800" dirty="0">
-                        <a:latin typeface="Noto Sans KR" charset="0"/>
-                        <a:ea typeface="Noto Sans KR" charset="0"/>
-                        <a:cs typeface="Noto Sans KR" charset="0"/>
-                      </a:endParaRPr>
-                    </a:p>
-                  </a:txBody>
-                  <a:tcPr marL="76200" marR="76200" marT="31750" marB="31750" anchor="ctr">
-                    <a:lnL w="6350" cap="flat" cmpd="sng" algn="ctr">
-                      <a:solidFill>
-                        <a:srgbClr val="CBD5E1"/>
-                      </a:solidFill>
-                      <a:prstDash val="solid"/>
-                      <a:round/>
-                      <a:headEnd type="none" w="med" len="med"/>
-                      <a:tailEnd type="none" w="med" len="med"/>
-                    </a:lnL>
-                    <a:lnR w="6350" cap="flat" cmpd="sng" algn="ctr">
-                      <a:solidFill>
-                        <a:srgbClr val="CBD5E1"/>
-                      </a:solidFill>
-                      <a:prstDash val="solid"/>
-                      <a:round/>
-                      <a:headEnd type="none" w="med" len="med"/>
-                      <a:tailEnd type="none" w="med" len="med"/>
-                    </a:lnR>
-                    <a:lnT w="6350" cap="flat" cmpd="sng" algn="ctr">
-                      <a:solidFill>
-                        <a:srgbClr val="CBD5E1"/>
-                      </a:solidFill>
-                      <a:prstDash val="solid"/>
-                      <a:round/>
-                      <a:headEnd type="none" w="med" len="med"/>
-                      <a:tailEnd type="none" w="med" len="med"/>
-                    </a:lnT>
-                    <a:lnB w="6350" cap="flat" cmpd="sng" algn="ctr">
-                      <a:solidFill>
-                        <a:srgbClr val="CBD5E1"/>
-                      </a:solidFill>
-                      <a:prstDash val="solid"/>
-                      <a:round/>
-                      <a:headEnd type="none" w="med" len="med"/>
-                      <a:tailEnd type="none" w="med" len="med"/>
-                    </a:lnB>
-                    <a:solidFill>
-                      <a:srgbClr val="F1F5F9"/>
-                    </a:solidFill>
                   </a:tcPr>
                 </a:tc>
                 <a:tc>
@@ -35236,7 +35587,28 @@
                           <a:ea typeface="Noto Sans KR" pitchFamily="34" charset="-122"/>
                           <a:cs typeface="Noto Sans KR" pitchFamily="34" charset="-120"/>
                         </a:rPr>
-                        <a:t>아웃도어 라이프스타일 편집숍 (2014년 홍대점 오픈)</a:t>
+                        <a:t>홍대점 매장 대표번호</a:t>
+                      </a:r>
+                      <a:endParaRPr lang="en-US" sz="800" dirty="0">
+                        <a:latin typeface="Noto Sans KR" charset="0"/>
+                        <a:ea typeface="Noto Sans KR" charset="0"/>
+                        <a:cs typeface="Noto Sans KR" charset="0"/>
+                      </a:endParaRPr>
+                    </a:p>
+                    <a:p>
+                      <a:pPr algn="l" indent="0" marL="0">
+                        <a:buNone/>
+                      </a:pPr>
+                      <a:r>
+                        <a:rPr lang="en-US" sz="800" dirty="0">
+                          <a:solidFill>
+                            <a:srgbClr val="334155"/>
+                          </a:solidFill>
+                          <a:latin typeface="Noto Sans KR" pitchFamily="34" charset="0"/>
+                          <a:ea typeface="Noto Sans KR" pitchFamily="34" charset="-122"/>
+                          <a:cs typeface="Noto Sans KR" pitchFamily="34" charset="-120"/>
+                        </a:rPr>
+                        <a:t>02-337-3907</a:t>
                       </a:r>
                       <a:endParaRPr lang="en-US" sz="800" dirty="0">
                         <a:latin typeface="Noto Sans KR" charset="0"/>
@@ -35245,7 +35617,7 @@
                       </a:endParaRPr>
                     </a:p>
                   </a:txBody>
-                  <a:tcPr marL="76200" marR="76200" marT="31750" marB="31750" anchor="ctr">
+                  <a:tcPr marL="76200" marR="76200" marT="38100" marB="38100" anchor="ctr">
                     <a:lnL w="6350" cap="flat" cmpd="sng" algn="ctr">
                       <a:solidFill>
                         <a:srgbClr val="CBD5E1"/>
@@ -35282,76 +35654,6 @@
                       <a:headEnd type="none" w="med" len="med"/>
                       <a:tailEnd type="none" w="med" len="med"/>
                     </a:lnB>
-                  </a:tcPr>
-                </a:tc>
-              </a:tr>
-              <a:tr h="221549">
-                <a:tc>
-                  <a:txBody>
-                    <a:bodyPr/>
-                    <a:lstStyle/>
-                    <a:p>
-                      <a:pPr algn="l" indent="0" marL="0">
-                        <a:buNone/>
-                      </a:pPr>
-                      <a:r>
-                        <a:rPr lang="en-US" sz="800" b="1" dirty="0">
-                          <a:solidFill>
-                            <a:srgbClr val="182F48"/>
-                          </a:solidFill>
-                          <a:latin typeface="Noto Sans KR" pitchFamily="34" charset="0"/>
-                          <a:ea typeface="Noto Sans KR" pitchFamily="34" charset="-122"/>
-                          <a:cs typeface="Noto Sans KR" pitchFamily="34" charset="-120"/>
-                        </a:rPr>
-                        <a:t>매장</a:t>
-                      </a:r>
-                      <a:endParaRPr lang="en-US" sz="800" dirty="0">
-                        <a:latin typeface="Noto Sans KR" charset="0"/>
-                        <a:ea typeface="Noto Sans KR" charset="0"/>
-                        <a:cs typeface="Noto Sans KR" charset="0"/>
-                      </a:endParaRPr>
-                    </a:p>
-                  </a:txBody>
-                  <a:tcPr marL="76200" marR="76200" marT="31750" marB="31750" anchor="ctr">
-                    <a:lnL w="6350" cap="flat" cmpd="sng" algn="ctr">
-                      <a:solidFill>
-                        <a:srgbClr val="CBD5E1"/>
-                      </a:solidFill>
-                      <a:prstDash val="solid"/>
-                      <a:round/>
-                      <a:headEnd type="none" w="med" len="med"/>
-                      <a:tailEnd type="none" w="med" len="med"/>
-                    </a:lnL>
-                    <a:lnR w="6350" cap="flat" cmpd="sng" algn="ctr">
-                      <a:solidFill>
-                        <a:srgbClr val="CBD5E1"/>
-                      </a:solidFill>
-                      <a:prstDash val="solid"/>
-                      <a:round/>
-                      <a:headEnd type="none" w="med" len="med"/>
-                      <a:tailEnd type="none" w="med" len="med"/>
-                    </a:lnR>
-                    <a:lnT w="6350" cap="flat" cmpd="sng" algn="ctr">
-                      <a:solidFill>
-                        <a:srgbClr val="CBD5E1"/>
-                      </a:solidFill>
-                      <a:prstDash val="solid"/>
-                      <a:round/>
-                      <a:headEnd type="none" w="med" len="med"/>
-                      <a:tailEnd type="none" w="med" len="med"/>
-                    </a:lnT>
-                    <a:lnB w="6350" cap="flat" cmpd="sng" algn="ctr">
-                      <a:solidFill>
-                        <a:srgbClr val="CBD5E1"/>
-                      </a:solidFill>
-                      <a:prstDash val="solid"/>
-                      <a:round/>
-                      <a:headEnd type="none" w="med" len="med"/>
-                      <a:tailEnd type="none" w="med" len="med"/>
-                    </a:lnB>
-                    <a:solidFill>
-                      <a:srgbClr val="F1F5F9"/>
-                    </a:solidFill>
                   </a:tcPr>
                 </a:tc>
                 <a:tc>
@@ -35371,7 +35673,28 @@
                           <a:ea typeface="Noto Sans KR" pitchFamily="34" charset="-122"/>
                           <a:cs typeface="Noto Sans KR" pitchFamily="34" charset="-120"/>
                         </a:rPr>
-                        <a:t>서울 홍대점 · 신세계백화점 강남점 · 제주</a:t>
+                        <a:t>10월 __일</a:t>
+                      </a:r>
+                      <a:endParaRPr lang="en-US" sz="800" dirty="0">
+                        <a:latin typeface="Noto Sans KR" charset="0"/>
+                        <a:ea typeface="Noto Sans KR" charset="0"/>
+                        <a:cs typeface="Noto Sans KR" charset="0"/>
+                      </a:endParaRPr>
+                    </a:p>
+                    <a:p>
+                      <a:pPr algn="l" indent="0" marL="0">
+                        <a:buNone/>
+                      </a:pPr>
+                      <a:r>
+                        <a:rPr lang="en-US" sz="800" dirty="0">
+                          <a:solidFill>
+                            <a:srgbClr val="334155"/>
+                          </a:solidFill>
+                          <a:latin typeface="Noto Sans KR" pitchFamily="34" charset="0"/>
+                          <a:ea typeface="Noto Sans KR" pitchFamily="34" charset="-122"/>
+                          <a:cs typeface="Noto Sans KR" pitchFamily="34" charset="-120"/>
+                        </a:rPr>
+                        <a:t>__:__</a:t>
                       </a:r>
                       <a:endParaRPr lang="en-US" sz="800" dirty="0">
                         <a:latin typeface="Noto Sans KR" charset="0"/>
@@ -35380,7 +35703,7 @@
                       </a:endParaRPr>
                     </a:p>
                   </a:txBody>
-                  <a:tcPr marL="76200" marR="76200" marT="31750" marB="31750" anchor="ctr">
+                  <a:tcPr marL="76200" marR="76200" marT="38100" marB="38100" anchor="ctr">
                     <a:lnL w="6350" cap="flat" cmpd="sng" algn="ctr">
                       <a:solidFill>
                         <a:srgbClr val="CBD5E1"/>
@@ -35419,8 +35742,6 @@
                     </a:lnB>
                   </a:tcPr>
                 </a:tc>
-              </a:tr>
-              <a:tr h="221549">
                 <a:tc>
                   <a:txBody>
                     <a:bodyPr/>
@@ -35432,13 +35753,13 @@
                       <a:r>
                         <a:rPr lang="en-US" sz="800" b="1" dirty="0">
                           <a:solidFill>
-                            <a:srgbClr val="182F48"/>
+                            <a:srgbClr val="C2410C"/>
                           </a:solidFill>
                           <a:latin typeface="Noto Sans KR" pitchFamily="34" charset="0"/>
                           <a:ea typeface="Noto Sans KR" pitchFamily="34" charset="-122"/>
                           <a:cs typeface="Noto Sans KR" pitchFamily="34" charset="-120"/>
                         </a:rPr>
-                        <a:t>취급</a:t>
+                        <a:t>연결 · 답변 불가</a:t>
                       </a:r>
                       <a:endParaRPr lang="en-US" sz="800" dirty="0">
                         <a:latin typeface="Noto Sans KR" charset="0"/>
@@ -35447,7 +35768,7 @@
                       </a:endParaRPr>
                     </a:p>
                   </a:txBody>
-                  <a:tcPr marL="76200" marR="76200" marT="31750" marB="31750" anchor="ctr">
+                  <a:tcPr marL="76200" marR="76200" marT="38100" marB="38100" anchor="ctr">
                     <a:lnL w="6350" cap="flat" cmpd="sng" algn="ctr">
                       <a:solidFill>
                         <a:srgbClr val="CBD5E1"/>
@@ -35484,9 +35805,6 @@
                       <a:headEnd type="none" w="med" len="med"/>
                       <a:tailEnd type="none" w="med" len="med"/>
                     </a:lnB>
-                    <a:solidFill>
-                      <a:srgbClr val="F1F5F9"/>
-                    </a:solidFill>
                   </a:tcPr>
                 </a:tc>
                 <a:tc>
@@ -35506,7 +35824,28 @@
                           <a:ea typeface="Noto Sans KR" pitchFamily="34" charset="-122"/>
                           <a:cs typeface="Noto Sans KR" pitchFamily="34" charset="-120"/>
                         </a:rPr>
-                        <a:t>파타고니아 · 아크테릭스 · 마무트 · 그라미치 등과 자체 상품</a:t>
+                        <a:t>매장 직원이 받았지만 브랜드 선정(바잉) 담당이 아니라서,</a:t>
+                      </a:r>
+                      <a:endParaRPr lang="en-US" sz="800" dirty="0">
+                        <a:latin typeface="Noto Sans KR" charset="0"/>
+                        <a:ea typeface="Noto Sans KR" charset="0"/>
+                        <a:cs typeface="Noto Sans KR" charset="0"/>
+                      </a:endParaRPr>
+                    </a:p>
+                    <a:p>
+                      <a:pPr algn="l" indent="0" marL="0">
+                        <a:buNone/>
+                      </a:pPr>
+                      <a:r>
+                        <a:rPr lang="en-US" sz="800" dirty="0">
+                          <a:solidFill>
+                            <a:srgbClr val="334155"/>
+                          </a:solidFill>
+                          <a:latin typeface="Noto Sans KR" pitchFamily="34" charset="0"/>
+                          <a:ea typeface="Noto Sans KR" pitchFamily="34" charset="-122"/>
+                          <a:cs typeface="Noto Sans KR" pitchFamily="34" charset="-120"/>
+                        </a:rPr>
+                        <a:t>준비한 질문에 답할 수 있는 사람이 없었다.</a:t>
                       </a:r>
                       <a:endParaRPr lang="en-US" sz="800" dirty="0">
                         <a:latin typeface="Noto Sans KR" charset="0"/>
@@ -35515,7 +35854,7 @@
                       </a:endParaRPr>
                     </a:p>
                   </a:txBody>
-                  <a:tcPr marL="76200" marR="76200" marT="31750" marB="31750" anchor="ctr">
+                  <a:tcPr marL="76200" marR="76200" marT="38100" marB="38100" anchor="ctr">
                     <a:lnL w="6350" cap="flat" cmpd="sng" algn="ctr">
                       <a:solidFill>
                         <a:srgbClr val="CBD5E1"/>
@@ -35555,7 +35894,72 @@
                   </a:tcPr>
                 </a:tc>
               </a:tr>
-              <a:tr h="221549">
+              <a:tr h="374010">
+                <a:tc>
+                  <a:txBody>
+                    <a:bodyPr/>
+                    <a:lstStyle/>
+                    <a:p>
+                      <a:pPr algn="ctr" indent="0" marL="0">
+                        <a:buNone/>
+                      </a:pPr>
+                      <a:r>
+                        <a:rPr lang="en-US" sz="800" b="1" dirty="0">
+                          <a:solidFill>
+                            <a:srgbClr val="267D86"/>
+                          </a:solidFill>
+                          <a:latin typeface="Noto Sans KR" pitchFamily="34" charset="0"/>
+                          <a:ea typeface="Noto Sans KR" pitchFamily="34" charset="-122"/>
+                          <a:cs typeface="Noto Sans KR" pitchFamily="34" charset="-120"/>
+                        </a:rPr>
+                        <a:t>2</a:t>
+                      </a:r>
+                      <a:endParaRPr lang="en-US" sz="800" dirty="0">
+                        <a:latin typeface="Noto Sans KR" charset="0"/>
+                        <a:ea typeface="Noto Sans KR" charset="0"/>
+                        <a:cs typeface="Noto Sans KR" charset="0"/>
+                      </a:endParaRPr>
+                    </a:p>
+                  </a:txBody>
+                  <a:tcPr marL="76200" marR="76200" marT="38100" marB="38100" anchor="ctr">
+                    <a:lnL w="6350" cap="flat" cmpd="sng" algn="ctr">
+                      <a:solidFill>
+                        <a:srgbClr val="CBD5E1"/>
+                      </a:solidFill>
+                      <a:prstDash val="solid"/>
+                      <a:round/>
+                      <a:headEnd type="none" w="med" len="med"/>
+                      <a:tailEnd type="none" w="med" len="med"/>
+                    </a:lnL>
+                    <a:lnR w="6350" cap="flat" cmpd="sng" algn="ctr">
+                      <a:solidFill>
+                        <a:srgbClr val="CBD5E1"/>
+                      </a:solidFill>
+                      <a:prstDash val="solid"/>
+                      <a:round/>
+                      <a:headEnd type="none" w="med" len="med"/>
+                      <a:tailEnd type="none" w="med" len="med"/>
+                    </a:lnR>
+                    <a:lnT w="6350" cap="flat" cmpd="sng" algn="ctr">
+                      <a:solidFill>
+                        <a:srgbClr val="CBD5E1"/>
+                      </a:solidFill>
+                      <a:prstDash val="solid"/>
+                      <a:round/>
+                      <a:headEnd type="none" w="med" len="med"/>
+                      <a:tailEnd type="none" w="med" len="med"/>
+                    </a:lnT>
+                    <a:lnB w="6350" cap="flat" cmpd="sng" algn="ctr">
+                      <a:solidFill>
+                        <a:srgbClr val="CBD5E1"/>
+                      </a:solidFill>
+                      <a:prstDash val="solid"/>
+                      <a:round/>
+                      <a:headEnd type="none" w="med" len="med"/>
+                      <a:tailEnd type="none" w="med" len="med"/>
+                    </a:lnB>
+                  </a:tcPr>
+                </a:tc>
                 <a:tc>
                   <a:txBody>
                     <a:bodyPr/>
@@ -35573,7 +35977,28 @@
                           <a:ea typeface="Noto Sans KR" pitchFamily="34" charset="-122"/>
                           <a:cs typeface="Noto Sans KR" pitchFamily="34" charset="-120"/>
                         </a:rPr>
-                        <a:t>연락</a:t>
+                        <a:t>무신사 (MUSINSA)</a:t>
+                      </a:r>
+                      <a:endParaRPr lang="en-US" sz="800" dirty="0">
+                        <a:latin typeface="Noto Sans KR" charset="0"/>
+                        <a:ea typeface="Noto Sans KR" charset="0"/>
+                        <a:cs typeface="Noto Sans KR" charset="0"/>
+                      </a:endParaRPr>
+                    </a:p>
+                    <a:p>
+                      <a:pPr algn="l" indent="0" marL="0">
+                        <a:buNone/>
+                      </a:pPr>
+                      <a:r>
+                        <a:rPr lang="en-US" sz="800" dirty="0">
+                          <a:solidFill>
+                            <a:srgbClr val="334155"/>
+                          </a:solidFill>
+                          <a:latin typeface="Noto Sans KR" pitchFamily="34" charset="0"/>
+                          <a:ea typeface="Noto Sans KR" pitchFamily="34" charset="-122"/>
+                          <a:cs typeface="Noto Sans KR" pitchFamily="34" charset="-120"/>
+                        </a:rPr>
+                        <a:t>온라인 패션 플랫폼 · 서울 성동구</a:t>
                       </a:r>
                       <a:endParaRPr lang="en-US" sz="800" dirty="0">
                         <a:latin typeface="Noto Sans KR" charset="0"/>
@@ -35582,7 +36007,7 @@
                       </a:endParaRPr>
                     </a:p>
                   </a:txBody>
-                  <a:tcPr marL="76200" marR="76200" marT="31750" marB="31750" anchor="ctr">
+                  <a:tcPr marL="76200" marR="76200" marT="38100" marB="38100" anchor="ctr">
                     <a:lnL w="6350" cap="flat" cmpd="sng" algn="ctr">
                       <a:solidFill>
                         <a:srgbClr val="CBD5E1"/>
@@ -35619,9 +36044,6 @@
                       <a:headEnd type="none" w="med" len="med"/>
                       <a:tailEnd type="none" w="med" len="med"/>
                     </a:lnB>
-                    <a:solidFill>
-                      <a:srgbClr val="F1F5F9"/>
-                    </a:solidFill>
                   </a:tcPr>
                 </a:tc>
                 <a:tc>
@@ -35641,7 +36063,28 @@
                           <a:ea typeface="Noto Sans KR" pitchFamily="34" charset="-122"/>
                           <a:cs typeface="Noto Sans KR" pitchFamily="34" charset="-120"/>
                         </a:rPr>
-                        <a:t>홍대점 대표번호 (통화 전 공식 사이트에서 확인)</a:t>
+                        <a:t>고객센터 대표번호</a:t>
+                      </a:r>
+                      <a:endParaRPr lang="en-US" sz="800" dirty="0">
+                        <a:latin typeface="Noto Sans KR" charset="0"/>
+                        <a:ea typeface="Noto Sans KR" charset="0"/>
+                        <a:cs typeface="Noto Sans KR" charset="0"/>
+                      </a:endParaRPr>
+                    </a:p>
+                    <a:p>
+                      <a:pPr algn="l" indent="0" marL="0">
+                        <a:buNone/>
+                      </a:pPr>
+                      <a:r>
+                        <a:rPr lang="en-US" sz="800" dirty="0">
+                          <a:solidFill>
+                            <a:srgbClr val="334155"/>
+                          </a:solidFill>
+                          <a:latin typeface="Noto Sans KR" pitchFamily="34" charset="0"/>
+                          <a:ea typeface="Noto Sans KR" pitchFamily="34" charset="-122"/>
+                          <a:cs typeface="Noto Sans KR" pitchFamily="34" charset="-120"/>
+                        </a:rPr>
+                        <a:t>( 번호 기입 )</a:t>
                       </a:r>
                       <a:endParaRPr lang="en-US" sz="800" dirty="0">
                         <a:latin typeface="Noto Sans KR" charset="0"/>
@@ -35650,7 +36093,7 @@
                       </a:endParaRPr>
                     </a:p>
                   </a:txBody>
-                  <a:tcPr marL="76200" marR="76200" marT="31750" marB="31750" anchor="ctr">
+                  <a:tcPr marL="76200" marR="76200" marT="38100" marB="38100" anchor="ctr">
                     <a:lnL w="6350" cap="flat" cmpd="sng" algn="ctr">
                       <a:solidFill>
                         <a:srgbClr val="CBD5E1"/>
@@ -35687,76 +36130,6 @@
                       <a:headEnd type="none" w="med" len="med"/>
                       <a:tailEnd type="none" w="med" len="med"/>
                     </a:lnB>
-                  </a:tcPr>
-                </a:tc>
-              </a:tr>
-              <a:tr h="221549">
-                <a:tc>
-                  <a:txBody>
-                    <a:bodyPr/>
-                    <a:lstStyle/>
-                    <a:p>
-                      <a:pPr algn="l" indent="0" marL="0">
-                        <a:buNone/>
-                      </a:pPr>
-                      <a:r>
-                        <a:rPr lang="en-US" sz="800" b="1" dirty="0">
-                          <a:solidFill>
-                            <a:srgbClr val="182F48"/>
-                          </a:solidFill>
-                          <a:latin typeface="Noto Sans KR" pitchFamily="34" charset="0"/>
-                          <a:ea typeface="Noto Sans KR" pitchFamily="34" charset="-122"/>
-                          <a:cs typeface="Noto Sans KR" pitchFamily="34" charset="-120"/>
-                        </a:rPr>
-                        <a:t>통화 시간</a:t>
-                      </a:r>
-                      <a:endParaRPr lang="en-US" sz="800" dirty="0">
-                        <a:latin typeface="Noto Sans KR" charset="0"/>
-                        <a:ea typeface="Noto Sans KR" charset="0"/>
-                        <a:cs typeface="Noto Sans KR" charset="0"/>
-                      </a:endParaRPr>
-                    </a:p>
-                  </a:txBody>
-                  <a:tcPr marL="76200" marR="76200" marT="31750" marB="31750" anchor="ctr">
-                    <a:lnL w="6350" cap="flat" cmpd="sng" algn="ctr">
-                      <a:solidFill>
-                        <a:srgbClr val="CBD5E1"/>
-                      </a:solidFill>
-                      <a:prstDash val="solid"/>
-                      <a:round/>
-                      <a:headEnd type="none" w="med" len="med"/>
-                      <a:tailEnd type="none" w="med" len="med"/>
-                    </a:lnL>
-                    <a:lnR w="6350" cap="flat" cmpd="sng" algn="ctr">
-                      <a:solidFill>
-                        <a:srgbClr val="CBD5E1"/>
-                      </a:solidFill>
-                      <a:prstDash val="solid"/>
-                      <a:round/>
-                      <a:headEnd type="none" w="med" len="med"/>
-                      <a:tailEnd type="none" w="med" len="med"/>
-                    </a:lnR>
-                    <a:lnT w="6350" cap="flat" cmpd="sng" algn="ctr">
-                      <a:solidFill>
-                        <a:srgbClr val="CBD5E1"/>
-                      </a:solidFill>
-                      <a:prstDash val="solid"/>
-                      <a:round/>
-                      <a:headEnd type="none" w="med" len="med"/>
-                      <a:tailEnd type="none" w="med" len="med"/>
-                    </a:lnT>
-                    <a:lnB w="6350" cap="flat" cmpd="sng" algn="ctr">
-                      <a:solidFill>
-                        <a:srgbClr val="CBD5E1"/>
-                      </a:solidFill>
-                      <a:prstDash val="solid"/>
-                      <a:round/>
-                      <a:headEnd type="none" w="med" len="med"/>
-                      <a:tailEnd type="none" w="med" len="med"/>
-                    </a:lnB>
-                    <a:solidFill>
-                      <a:srgbClr val="F1F5F9"/>
-                    </a:solidFill>
                   </a:tcPr>
                 </a:tc>
                 <a:tc>
@@ -35776,7 +36149,28 @@
                           <a:ea typeface="Noto Sans KR" pitchFamily="34" charset="-122"/>
                           <a:cs typeface="Noto Sans KR" pitchFamily="34" charset="-120"/>
                         </a:rPr>
-                        <a:t>평일 오후 1~3시 (매장 영업 12~21시)</a:t>
+                        <a:t>10월 __일</a:t>
+                      </a:r>
+                      <a:endParaRPr lang="en-US" sz="800" dirty="0">
+                        <a:latin typeface="Noto Sans KR" charset="0"/>
+                        <a:ea typeface="Noto Sans KR" charset="0"/>
+                        <a:cs typeface="Noto Sans KR" charset="0"/>
+                      </a:endParaRPr>
+                    </a:p>
+                    <a:p>
+                      <a:pPr algn="l" indent="0" marL="0">
+                        <a:buNone/>
+                      </a:pPr>
+                      <a:r>
+                        <a:rPr lang="en-US" sz="800" dirty="0">
+                          <a:solidFill>
+                            <a:srgbClr val="334155"/>
+                          </a:solidFill>
+                          <a:latin typeface="Noto Sans KR" pitchFamily="34" charset="0"/>
+                          <a:ea typeface="Noto Sans KR" pitchFamily="34" charset="-122"/>
+                          <a:cs typeface="Noto Sans KR" pitchFamily="34" charset="-120"/>
+                        </a:rPr>
+                        <a:t>__:__</a:t>
                       </a:r>
                       <a:endParaRPr lang="en-US" sz="800" dirty="0">
                         <a:latin typeface="Noto Sans KR" charset="0"/>
@@ -35785,7 +36179,7 @@
                       </a:endParaRPr>
                     </a:p>
                   </a:txBody>
-                  <a:tcPr marL="76200" marR="76200" marT="31750" marB="31750" anchor="ctr">
+                  <a:tcPr marL="76200" marR="76200" marT="38100" marB="38100" anchor="ctr">
                     <a:lnL w="6350" cap="flat" cmpd="sng" algn="ctr">
                       <a:solidFill>
                         <a:srgbClr val="CBD5E1"/>
@@ -35824,701 +36218,6 @@
                     </a:lnB>
                   </a:tcPr>
                 </a:tc>
-              </a:tr>
-            </a:tbl>
-          </a:graphicData>
-        </a:graphic>
-      </p:graphicFrame>
-      <p:sp>
-        <p:nvSpPr>
-          <p:cNvPr id="9" name="제목 이곳을 고른 이유"/>
-          <p:cNvSpPr txBox="1"/>
-          <p:nvPr/>
-        </p:nvSpPr>
-        <p:spPr>
-          <a:xfrm>
-            <a:off x="612648" y="3212958"/>
-            <a:ext cx="4069080" cy="237744"/>
-          </a:xfrm>
-          <a:prstGeom prst="rect">
-            <a:avLst/>
-          </a:prstGeom>
-          <a:noFill/>
-          <a:ln/>
-        </p:spPr>
-        <p:txBody>
-          <a:bodyPr wrap="square" lIns="0" tIns="0" rIns="0" bIns="0" rtlCol="0" anchor="ctr"/>
-          <a:lstStyle/>
-          <a:p>
-            <a:pPr algn="l" indent="0" marL="0">
-              <a:lnSpc>
-                <a:spcPct val="100000"/>
-              </a:lnSpc>
-              <a:buNone/>
-            </a:pPr>
-            <a:r>
-              <a:rPr lang="en-US" sz="1050" b="1" dirty="0">
-                <a:solidFill>
-                  <a:srgbClr val="182F48"/>
-                </a:solidFill>
-                <a:latin typeface="Noto Sans KR" pitchFamily="34" charset="0"/>
-                <a:ea typeface="Noto Sans KR" pitchFamily="34" charset="-122"/>
-                <a:cs typeface="Noto Sans KR" pitchFamily="34" charset="-120"/>
-              </a:rPr>
-              <a:t>이곳을 고른 이유</a:t>
-            </a:r>
-            <a:endParaRPr lang="en-US" sz="1050" dirty="0"/>
-          </a:p>
-        </p:txBody>
-      </p:sp>
-      <p:sp>
-        <p:nvSpPr>
-          <p:cNvPr id="10" name="선정 이유"/>
-          <p:cNvSpPr txBox="1"/>
-          <p:nvPr/>
-        </p:nvSpPr>
-        <p:spPr>
-          <a:xfrm>
-            <a:off x="612648" y="3487278"/>
-            <a:ext cx="4069080" cy="914400"/>
-          </a:xfrm>
-          <a:prstGeom prst="rect">
-            <a:avLst/>
-          </a:prstGeom>
-          <a:noFill/>
-          <a:ln/>
-        </p:spPr>
-        <p:txBody>
-          <a:bodyPr wrap="square" lIns="0" tIns="0" rIns="0" bIns="0" rtlCol="0" anchor="t"/>
-          <a:lstStyle/>
-          <a:p>
-            <a:pPr algn="l" indent="0" marL="0">
-              <a:lnSpc>
-                <a:spcPct val="95000"/>
-              </a:lnSpc>
-              <a:spcAft>
-                <a:spcPts val="150"/>
-              </a:spcAft>
-              <a:buNone/>
-            </a:pPr>
-            <a:r>
-              <a:rPr lang="en-US" sz="800" b="1" dirty="0">
-                <a:solidFill>
-                  <a:srgbClr val="182F48"/>
-                </a:solidFill>
-                <a:latin typeface="Noto Sans KR" pitchFamily="34" charset="0"/>
-                <a:ea typeface="Noto Sans KR" pitchFamily="34" charset="-122"/>
-                <a:cs typeface="Noto Sans KR" pitchFamily="34" charset="-120"/>
-              </a:rPr>
-              <a:t>① 통화가 된다  </a:t>
-            </a:r>
-            <a:pPr algn="l" indent="0" marL="0">
-              <a:lnSpc>
-                <a:spcPct val="95000"/>
-              </a:lnSpc>
-              <a:spcAft>
-                <a:spcPts val="150"/>
-              </a:spcAft>
-              <a:buNone/>
-            </a:pPr>
-            <a:r>
-              <a:rPr lang="en-US" sz="800" dirty="0">
-                <a:solidFill>
-                  <a:srgbClr val="334155"/>
-                </a:solidFill>
-                <a:latin typeface="Noto Sans KR" pitchFamily="34" charset="0"/>
-                <a:ea typeface="Noto Sans KR" pitchFamily="34" charset="-122"/>
-                <a:cs typeface="Noto Sans KR" pitchFamily="34" charset="-120"/>
-              </a:rPr>
-              <a:t>대표번호가 공개된 독립 편집숍이다.</a:t>
-            </a:r>
-            <a:endParaRPr lang="en-US" sz="800" dirty="0"/>
-          </a:p>
-          <a:p>
-            <a:pPr algn="l" indent="0" marL="0">
-              <a:lnSpc>
-                <a:spcPct val="95000"/>
-              </a:lnSpc>
-              <a:spcAft>
-                <a:spcPts val="150"/>
-              </a:spcAft>
-              <a:buNone/>
-            </a:pPr>
-            <a:r>
-              <a:rPr lang="en-US" sz="800" dirty="0">
-                <a:solidFill>
-                  <a:srgbClr val="334155"/>
-                </a:solidFill>
-                <a:latin typeface="Noto Sans KR" pitchFamily="34" charset="0"/>
-                <a:ea typeface="Noto Sans KR" pitchFamily="34" charset="-122"/>
-                <a:cs typeface="Noto Sans KR" pitchFamily="34" charset="-120"/>
-              </a:rPr>
-              <a:t>     </a:t>
-            </a:r>
-            <a:pPr algn="l" indent="0" marL="0">
-              <a:lnSpc>
-                <a:spcPct val="95000"/>
-              </a:lnSpc>
-              <a:spcAft>
-                <a:spcPts val="150"/>
-              </a:spcAft>
-              <a:buNone/>
-            </a:pPr>
-            <a:r>
-              <a:rPr lang="en-US" sz="800" dirty="0">
-                <a:solidFill>
-                  <a:srgbClr val="334155"/>
-                </a:solidFill>
-                <a:latin typeface="Noto Sans KR" pitchFamily="34" charset="0"/>
-                <a:ea typeface="Noto Sans KR" pitchFamily="34" charset="-122"/>
-                <a:cs typeface="Noto Sans KR" pitchFamily="34" charset="-120"/>
-              </a:rPr>
-              <a:t>무신사·백화점 MD보다 바이어와 직접 닿기 쉽다.</a:t>
-            </a:r>
-            <a:endParaRPr lang="en-US" sz="800" dirty="0"/>
-          </a:p>
-          <a:p>
-            <a:pPr algn="l" indent="0" marL="0">
-              <a:lnSpc>
-                <a:spcPct val="95000"/>
-              </a:lnSpc>
-              <a:spcAft>
-                <a:spcPts val="150"/>
-              </a:spcAft>
-              <a:buNone/>
-            </a:pPr>
-            <a:r>
-              <a:rPr lang="en-US" sz="800" b="1" dirty="0">
-                <a:solidFill>
-                  <a:srgbClr val="182F48"/>
-                </a:solidFill>
-                <a:latin typeface="Noto Sans KR" pitchFamily="34" charset="0"/>
-                <a:ea typeface="Noto Sans KR" pitchFamily="34" charset="-122"/>
-                <a:cs typeface="Noto Sans KR" pitchFamily="34" charset="-120"/>
-              </a:rPr>
-              <a:t>② 문제를 겪는다  </a:t>
-            </a:r>
-            <a:pPr algn="l" indent="0" marL="0">
-              <a:lnSpc>
-                <a:spcPct val="95000"/>
-              </a:lnSpc>
-              <a:spcAft>
-                <a:spcPts val="150"/>
-              </a:spcAft>
-              <a:buNone/>
-            </a:pPr>
-            <a:r>
-              <a:rPr lang="en-US" sz="800" dirty="0">
-                <a:solidFill>
-                  <a:srgbClr val="334155"/>
-                </a:solidFill>
-                <a:latin typeface="Noto Sans KR" pitchFamily="34" charset="0"/>
-                <a:ea typeface="Noto Sans KR" pitchFamily="34" charset="-122"/>
-                <a:cs typeface="Noto Sans KR" pitchFamily="34" charset="-120"/>
-              </a:rPr>
-              <a:t>취급 브랜드 대부분이 해외 브랜드다.</a:t>
-            </a:r>
-            <a:endParaRPr lang="en-US" sz="800" dirty="0"/>
-          </a:p>
-          <a:p>
-            <a:pPr algn="l" indent="0" marL="0">
-              <a:lnSpc>
-                <a:spcPct val="95000"/>
-              </a:lnSpc>
-              <a:spcAft>
-                <a:spcPts val="150"/>
-              </a:spcAft>
-              <a:buNone/>
-            </a:pPr>
-            <a:r>
-              <a:rPr lang="en-US" sz="800" dirty="0">
-                <a:solidFill>
-                  <a:srgbClr val="334155"/>
-                </a:solidFill>
-                <a:latin typeface="Noto Sans KR" pitchFamily="34" charset="0"/>
-                <a:ea typeface="Noto Sans KR" pitchFamily="34" charset="-122"/>
-                <a:cs typeface="Noto Sans KR" pitchFamily="34" charset="-120"/>
-              </a:rPr>
-              <a:t>     </a:t>
-            </a:r>
-            <a:pPr algn="l" indent="0" marL="0">
-              <a:lnSpc>
-                <a:spcPct val="95000"/>
-              </a:lnSpc>
-              <a:spcAft>
-                <a:spcPts val="150"/>
-              </a:spcAft>
-              <a:buNone/>
-            </a:pPr>
-            <a:r>
-              <a:rPr lang="en-US" sz="800" dirty="0">
-                <a:solidFill>
-                  <a:srgbClr val="334155"/>
-                </a:solidFill>
-                <a:latin typeface="Noto Sans KR" pitchFamily="34" charset="0"/>
-                <a:ea typeface="Noto Sans KR" pitchFamily="34" charset="-122"/>
-                <a:cs typeface="Noto Sans KR" pitchFamily="34" charset="-120"/>
-              </a:rPr>
-              <a:t>해외 브랜드 직진출이 늘면 대신할 브랜드가 필요하다.</a:t>
-            </a:r>
-            <a:endParaRPr lang="en-US" sz="800" dirty="0"/>
-          </a:p>
-          <a:p>
-            <a:pPr algn="l" indent="0" marL="0">
-              <a:lnSpc>
-                <a:spcPct val="95000"/>
-              </a:lnSpc>
-              <a:spcAft>
-                <a:spcPts val="150"/>
-              </a:spcAft>
-              <a:buNone/>
-            </a:pPr>
-            <a:r>
-              <a:rPr lang="en-US" sz="800" b="1" dirty="0">
-                <a:solidFill>
-                  <a:srgbClr val="182F48"/>
-                </a:solidFill>
-                <a:latin typeface="Noto Sans KR" pitchFamily="34" charset="0"/>
-                <a:ea typeface="Noto Sans KR" pitchFamily="34" charset="-122"/>
-                <a:cs typeface="Noto Sans KR" pitchFamily="34" charset="-120"/>
-              </a:rPr>
-              <a:t>③ 행사와 맞는다  </a:t>
-            </a:r>
-            <a:pPr algn="l" indent="0" marL="0">
-              <a:lnSpc>
-                <a:spcPct val="95000"/>
-              </a:lnSpc>
-              <a:spcAft>
-                <a:spcPts val="150"/>
-              </a:spcAft>
-              <a:buNone/>
-            </a:pPr>
-            <a:r>
-              <a:rPr lang="en-US" sz="800" dirty="0">
-                <a:solidFill>
-                  <a:srgbClr val="334155"/>
-                </a:solidFill>
-                <a:latin typeface="Noto Sans KR" pitchFamily="34" charset="0"/>
-                <a:ea typeface="Noto Sans KR" pitchFamily="34" charset="-122"/>
-                <a:cs typeface="Noto Sans KR" pitchFamily="34" charset="-120"/>
-              </a:rPr>
-              <a:t>고프코어 옷이 팔리는 핵심 채널이다.</a:t>
-            </a:r>
-            <a:endParaRPr lang="en-US" sz="800" dirty="0"/>
-          </a:p>
-          <a:p>
-            <a:pPr algn="l" indent="0" marL="0">
-              <a:lnSpc>
-                <a:spcPct val="95000"/>
-              </a:lnSpc>
-              <a:spcAft>
-                <a:spcPts val="150"/>
-              </a:spcAft>
-              <a:buNone/>
-            </a:pPr>
-            <a:r>
-              <a:rPr lang="en-US" sz="800" dirty="0">
-                <a:solidFill>
-                  <a:srgbClr val="334155"/>
-                </a:solidFill>
-                <a:latin typeface="Noto Sans KR" pitchFamily="34" charset="0"/>
-                <a:ea typeface="Noto Sans KR" pitchFamily="34" charset="-122"/>
-                <a:cs typeface="Noto Sans KR" pitchFamily="34" charset="-120"/>
-              </a:rPr>
-              <a:t>     </a:t>
-            </a:r>
-            <a:pPr algn="l" indent="0" marL="0">
-              <a:lnSpc>
-                <a:spcPct val="95000"/>
-              </a:lnSpc>
-              <a:spcAft>
-                <a:spcPts val="150"/>
-              </a:spcAft>
-              <a:buNone/>
-            </a:pPr>
-            <a:r>
-              <a:rPr lang="en-US" sz="800" dirty="0">
-                <a:solidFill>
-                  <a:srgbClr val="334155"/>
-                </a:solidFill>
-                <a:latin typeface="Noto Sans KR" pitchFamily="34" charset="0"/>
-                <a:ea typeface="Noto Sans KR" pitchFamily="34" charset="-122"/>
-                <a:cs typeface="Noto Sans KR" pitchFamily="34" charset="-120"/>
-              </a:rPr>
-              <a:t>백화점 매장도 운영해 유통 수수료 사정을 안다.</a:t>
-            </a:r>
-            <a:endParaRPr lang="en-US" sz="800" dirty="0"/>
-          </a:p>
-        </p:txBody>
-      </p:sp>
-      <p:sp>
-        <p:nvSpPr>
-          <p:cNvPr id="11" name="제목 사전 가정"/>
-          <p:cNvSpPr txBox="1"/>
-          <p:nvPr/>
-        </p:nvSpPr>
-        <p:spPr>
-          <a:xfrm>
-            <a:off x="612648" y="4474830"/>
-            <a:ext cx="4069080" cy="237744"/>
-          </a:xfrm>
-          <a:prstGeom prst="rect">
-            <a:avLst/>
-          </a:prstGeom>
-          <a:noFill/>
-          <a:ln/>
-        </p:spPr>
-        <p:txBody>
-          <a:bodyPr wrap="square" lIns="0" tIns="0" rIns="0" bIns="0" rtlCol="0" anchor="ctr"/>
-          <a:lstStyle/>
-          <a:p>
-            <a:pPr algn="l" indent="0" marL="0">
-              <a:lnSpc>
-                <a:spcPct val="100000"/>
-              </a:lnSpc>
-              <a:buNone/>
-            </a:pPr>
-            <a:r>
-              <a:rPr lang="en-US" sz="1050" b="1" dirty="0">
-                <a:solidFill>
-                  <a:srgbClr val="182F48"/>
-                </a:solidFill>
-                <a:latin typeface="Noto Sans KR" pitchFamily="34" charset="0"/>
-                <a:ea typeface="Noto Sans KR" pitchFamily="34" charset="-122"/>
-                <a:cs typeface="Noto Sans KR" pitchFamily="34" charset="-120"/>
-              </a:rPr>
-              <a:t>사전 가정</a:t>
-            </a:r>
-            <a:endParaRPr lang="en-US" sz="1050" dirty="0"/>
-          </a:p>
-        </p:txBody>
-      </p:sp>
-      <p:sp>
-        <p:nvSpPr>
-          <p:cNvPr id="12" name="바이어 사전 가정"/>
-          <p:cNvSpPr txBox="1"/>
-          <p:nvPr/>
-        </p:nvSpPr>
-        <p:spPr>
-          <a:xfrm>
-            <a:off x="612648" y="4749150"/>
-            <a:ext cx="4069080" cy="457200"/>
-          </a:xfrm>
-          <a:prstGeom prst="rect">
-            <a:avLst/>
-          </a:prstGeom>
-          <a:noFill/>
-          <a:ln/>
-        </p:spPr>
-        <p:txBody>
-          <a:bodyPr wrap="square" lIns="0" tIns="0" rIns="0" bIns="0" rtlCol="0" anchor="t"/>
-          <a:lstStyle/>
-          <a:p>
-            <a:pPr algn="l" indent="0" marL="0">
-              <a:lnSpc>
-                <a:spcPct val="95000"/>
-              </a:lnSpc>
-              <a:spcAft>
-                <a:spcPts val="150"/>
-              </a:spcAft>
-              <a:buNone/>
-            </a:pPr>
-            <a:r>
-              <a:rPr lang="en-US" sz="800" b="1" dirty="0">
-                <a:solidFill>
-                  <a:srgbClr val="267D86"/>
-                </a:solidFill>
-                <a:latin typeface="Noto Sans KR" pitchFamily="34" charset="0"/>
-                <a:ea typeface="Noto Sans KR" pitchFamily="34" charset="-122"/>
-                <a:cs typeface="Noto Sans KR" pitchFamily="34" charset="-120"/>
-              </a:rPr>
-              <a:t>1  </a:t>
-            </a:r>
-            <a:pPr algn="l" indent="0" marL="0">
-              <a:lnSpc>
-                <a:spcPct val="95000"/>
-              </a:lnSpc>
-              <a:spcAft>
-                <a:spcPts val="150"/>
-              </a:spcAft>
-              <a:buNone/>
-            </a:pPr>
-            <a:r>
-              <a:rPr lang="en-US" sz="800" dirty="0">
-                <a:solidFill>
-                  <a:srgbClr val="334155"/>
-                </a:solidFill>
-                <a:latin typeface="Noto Sans KR" pitchFamily="34" charset="0"/>
-                <a:ea typeface="Noto Sans KR" pitchFamily="34" charset="-122"/>
-                <a:cs typeface="Noto Sans KR" pitchFamily="34" charset="-120"/>
-              </a:rPr>
-              <a:t>국내 신진 브랜드는 SNS나 지인 소개로 찾고 있어 시간이 많이 든다.</a:t>
-            </a:r>
-            <a:endParaRPr lang="en-US" sz="800" dirty="0"/>
-          </a:p>
-          <a:p>
-            <a:pPr algn="l" indent="0" marL="0">
-              <a:lnSpc>
-                <a:spcPct val="95000"/>
-              </a:lnSpc>
-              <a:spcAft>
-                <a:spcPts val="150"/>
-              </a:spcAft>
-              <a:buNone/>
-            </a:pPr>
-            <a:r>
-              <a:rPr lang="en-US" sz="800" b="1" dirty="0">
-                <a:solidFill>
-                  <a:srgbClr val="267D86"/>
-                </a:solidFill>
-                <a:latin typeface="Noto Sans KR" pitchFamily="34" charset="0"/>
-                <a:ea typeface="Noto Sans KR" pitchFamily="34" charset="-122"/>
-                <a:cs typeface="Noto Sans KR" pitchFamily="34" charset="-120"/>
-              </a:rPr>
-              <a:t>2  </a:t>
-            </a:r>
-            <a:pPr algn="l" indent="0" marL="0">
-              <a:lnSpc>
-                <a:spcPct val="95000"/>
-              </a:lnSpc>
-              <a:spcAft>
-                <a:spcPts val="150"/>
-              </a:spcAft>
-              <a:buNone/>
-            </a:pPr>
-            <a:r>
-              <a:rPr lang="en-US" sz="800" dirty="0">
-                <a:solidFill>
-                  <a:srgbClr val="334155"/>
-                </a:solidFill>
-                <a:latin typeface="Noto Sans KR" pitchFamily="34" charset="0"/>
-                <a:ea typeface="Noto Sans KR" pitchFamily="34" charset="-122"/>
-                <a:cs typeface="Noto Sans KR" pitchFamily="34" charset="-120"/>
-              </a:rPr>
-              <a:t>신진 브랜드는 물량·납기·품질이 불안해 들여오기를 망설인다.</a:t>
-            </a:r>
-            <a:endParaRPr lang="en-US" sz="800" dirty="0"/>
-          </a:p>
-          <a:p>
-            <a:pPr algn="l" indent="0" marL="0">
-              <a:lnSpc>
-                <a:spcPct val="95000"/>
-              </a:lnSpc>
-              <a:spcAft>
-                <a:spcPts val="150"/>
-              </a:spcAft>
-              <a:buNone/>
-            </a:pPr>
-            <a:r>
-              <a:rPr lang="en-US" sz="800" b="1" dirty="0">
-                <a:solidFill>
-                  <a:srgbClr val="267D86"/>
-                </a:solidFill>
-                <a:latin typeface="Noto Sans KR" pitchFamily="34" charset="0"/>
-                <a:ea typeface="Noto Sans KR" pitchFamily="34" charset="-122"/>
-                <a:cs typeface="Noto Sans KR" pitchFamily="34" charset="-120"/>
-              </a:rPr>
-              <a:t>3  </a:t>
-            </a:r>
-            <a:pPr algn="l" indent="0" marL="0">
-              <a:lnSpc>
-                <a:spcPct val="95000"/>
-              </a:lnSpc>
-              <a:spcAft>
-                <a:spcPts val="150"/>
-              </a:spcAft>
-              <a:buNone/>
-            </a:pPr>
-            <a:r>
-              <a:rPr lang="en-US" sz="800" dirty="0">
-                <a:solidFill>
-                  <a:srgbClr val="334155"/>
-                </a:solidFill>
-                <a:latin typeface="Noto Sans KR" pitchFamily="34" charset="0"/>
-                <a:ea typeface="Noto Sans KR" pitchFamily="34" charset="-122"/>
-                <a:cs typeface="Noto Sans KR" pitchFamily="34" charset="-120"/>
-              </a:rPr>
-              <a:t>한자리에서 비교하고 1:1 상담이 잡힌다면 참관할 의향이 있다.</a:t>
-            </a:r>
-            <a:endParaRPr lang="en-US" sz="800" dirty="0"/>
-          </a:p>
-        </p:txBody>
-      </p:sp>
-      <p:sp>
-        <p:nvSpPr>
-          <p:cNvPr id="13" name="제목 통화 순서"/>
-          <p:cNvSpPr txBox="1"/>
-          <p:nvPr/>
-        </p:nvSpPr>
-        <p:spPr>
-          <a:xfrm>
-            <a:off x="612648" y="5279502"/>
-            <a:ext cx="4069080" cy="237744"/>
-          </a:xfrm>
-          <a:prstGeom prst="rect">
-            <a:avLst/>
-          </a:prstGeom>
-          <a:noFill/>
-          <a:ln/>
-        </p:spPr>
-        <p:txBody>
-          <a:bodyPr wrap="square" lIns="0" tIns="0" rIns="0" bIns="0" rtlCol="0" anchor="ctr"/>
-          <a:lstStyle/>
-          <a:p>
-            <a:pPr algn="l" indent="0" marL="0">
-              <a:lnSpc>
-                <a:spcPct val="100000"/>
-              </a:lnSpc>
-              <a:buNone/>
-            </a:pPr>
-            <a:r>
-              <a:rPr lang="en-US" sz="1050" b="1" dirty="0">
-                <a:solidFill>
-                  <a:srgbClr val="182F48"/>
-                </a:solidFill>
-                <a:latin typeface="Noto Sans KR" pitchFamily="34" charset="0"/>
-                <a:ea typeface="Noto Sans KR" pitchFamily="34" charset="-122"/>
-                <a:cs typeface="Noto Sans KR" pitchFamily="34" charset="-120"/>
-              </a:rPr>
-              <a:t>통화 순서</a:t>
-            </a:r>
-            <a:endParaRPr lang="en-US" sz="1050" dirty="0"/>
-          </a:p>
-        </p:txBody>
-      </p:sp>
-      <p:sp>
-        <p:nvSpPr>
-          <p:cNvPr id="14" name="통화 순서"/>
-          <p:cNvSpPr txBox="1"/>
-          <p:nvPr/>
-        </p:nvSpPr>
-        <p:spPr>
-          <a:xfrm>
-            <a:off x="612648" y="5553822"/>
-            <a:ext cx="4069080" cy="310896"/>
-          </a:xfrm>
-          <a:prstGeom prst="rect">
-            <a:avLst/>
-          </a:prstGeom>
-          <a:noFill/>
-          <a:ln/>
-        </p:spPr>
-        <p:txBody>
-          <a:bodyPr wrap="square" lIns="0" tIns="0" rIns="0" bIns="0" rtlCol="0" anchor="t"/>
-          <a:lstStyle/>
-          <a:p>
-            <a:pPr algn="l" indent="0" marL="0">
-              <a:lnSpc>
-                <a:spcPct val="95000"/>
-              </a:lnSpc>
-              <a:buNone/>
-            </a:pPr>
-            <a:r>
-              <a:rPr lang="en-US" sz="800" dirty="0">
-                <a:solidFill>
-                  <a:srgbClr val="334155"/>
-                </a:solidFill>
-                <a:latin typeface="Noto Sans KR" pitchFamily="34" charset="0"/>
-                <a:ea typeface="Noto Sans KR" pitchFamily="34" charset="-122"/>
-                <a:cs typeface="Noto Sans KR" pitchFamily="34" charset="-120"/>
-              </a:rPr>
-              <a:t>인사·녹음 동의 → 행사 설명(약 1분) → 질문 10개 → 마무리</a:t>
-            </a:r>
-            <a:endParaRPr lang="en-US" sz="800" dirty="0"/>
-          </a:p>
-          <a:p>
-            <a:pPr algn="l" indent="0" marL="0">
-              <a:lnSpc>
-                <a:spcPct val="95000"/>
-              </a:lnSpc>
-              <a:buNone/>
-            </a:pPr>
-            <a:r>
-              <a:rPr lang="en-US" sz="800" dirty="0">
-                <a:solidFill>
-                  <a:srgbClr val="64748B"/>
-                </a:solidFill>
-                <a:latin typeface="Noto Sans KR" pitchFamily="34" charset="0"/>
-                <a:ea typeface="Noto Sans KR" pitchFamily="34" charset="-122"/>
-                <a:cs typeface="Noto Sans KR" pitchFamily="34" charset="-120"/>
-              </a:rPr>
-              <a:t>대본 전체: 별도 PDF 「바이어 측 전화 검증 대본」</a:t>
-            </a:r>
-            <a:endParaRPr lang="en-US" sz="800" dirty="0"/>
-          </a:p>
-        </p:txBody>
-      </p:sp>
-      <p:sp>
-        <p:nvSpPr>
-          <p:cNvPr id="15" name="제목 통화 기록"/>
-          <p:cNvSpPr txBox="1"/>
-          <p:nvPr/>
-        </p:nvSpPr>
-        <p:spPr>
-          <a:xfrm>
-            <a:off x="4864608" y="1463040"/>
-            <a:ext cx="6711696" cy="237744"/>
-          </a:xfrm>
-          <a:prstGeom prst="rect">
-            <a:avLst/>
-          </a:prstGeom>
-          <a:noFill/>
-          <a:ln/>
-        </p:spPr>
-        <p:txBody>
-          <a:bodyPr wrap="square" lIns="0" tIns="0" rIns="0" bIns="0" rtlCol="0" anchor="ctr"/>
-          <a:lstStyle/>
-          <a:p>
-            <a:pPr algn="l" indent="0" marL="0">
-              <a:lnSpc>
-                <a:spcPct val="100000"/>
-              </a:lnSpc>
-              <a:buNone/>
-            </a:pPr>
-            <a:r>
-              <a:rPr lang="en-US" sz="1050" b="1" dirty="0">
-                <a:solidFill>
-                  <a:srgbClr val="182F48"/>
-                </a:solidFill>
-                <a:latin typeface="Noto Sans KR" pitchFamily="34" charset="0"/>
-                <a:ea typeface="Noto Sans KR" pitchFamily="34" charset="-122"/>
-                <a:cs typeface="Noto Sans KR" pitchFamily="34" charset="-120"/>
-              </a:rPr>
-              <a:t>통화 기록</a:t>
-            </a:r>
-            <a:endParaRPr lang="en-US" sz="1050" dirty="0"/>
-          </a:p>
-        </p:txBody>
-      </p:sp>
-      <p:graphicFrame>
-        <p:nvGraphicFramePr>
-          <p:cNvPr id="19" name="통화 정보"/>
-          <p:cNvGraphicFramePr>
-            <a:graphicFrameLocks noGrp="1"/>
-          </p:cNvGraphicFramePr>
-          <p:nvPr>
-            <p:extLst>
-              <p:ext uri="{D42A27DB-BD31-4B8C-83A1-F6EECF244321}">
-                <p14:modId xmlns:p14="http://schemas.microsoft.com/office/powerpoint/2010/main" val="1579011935"/>
-              </p:ext>
-            </p:extLst>
-          </p:nvPr>
-        </p:nvGraphicFramePr>
-        <p:xfrm>
-          <a:off x="4864608" y="1737360"/>
-          <a:ext cx="6711696" cy="914400"/>
-        </p:xfrm>
-        <a:graphic>
-          <a:graphicData uri="http://schemas.openxmlformats.org/drawingml/2006/table">
-            <a:tbl>
-              <a:tblPr/>
-              <a:tblGrid>
-                <a:gridCol w="868680"/>
-                <a:gridCol w="2240280"/>
-                <a:gridCol w="868680"/>
-                <a:gridCol w="2734056"/>
-              </a:tblGrid>
-              <a:tr h="274320">
                 <a:tc>
                   <a:txBody>
                     <a:bodyPr/>
@@ -36530,13 +36229,34 @@
                       <a:r>
                         <a:rPr lang="en-US" sz="800" b="1" dirty="0">
                           <a:solidFill>
-                            <a:srgbClr val="182F48"/>
+                            <a:srgbClr val="C2410C"/>
                           </a:solidFill>
                           <a:latin typeface="Noto Sans KR" pitchFamily="34" charset="0"/>
                           <a:ea typeface="Noto Sans KR" pitchFamily="34" charset="-122"/>
                           <a:cs typeface="Noto Sans KR" pitchFamily="34" charset="-120"/>
                         </a:rPr>
-                        <a:t>통화 일시</a:t>
+                        <a:t>고객센터 연결</a:t>
+                      </a:r>
+                      <a:endParaRPr lang="en-US" sz="800" dirty="0">
+                        <a:latin typeface="Noto Sans KR" charset="0"/>
+                        <a:ea typeface="Noto Sans KR" charset="0"/>
+                        <a:cs typeface="Noto Sans KR" charset="0"/>
+                      </a:endParaRPr>
+                    </a:p>
+                    <a:p>
+                      <a:pPr algn="l" indent="0" marL="0">
+                        <a:buNone/>
+                      </a:pPr>
+                      <a:r>
+                        <a:rPr lang="en-US" sz="800" b="1" dirty="0">
+                          <a:solidFill>
+                            <a:srgbClr val="C2410C"/>
+                          </a:solidFill>
+                          <a:latin typeface="Noto Sans KR" pitchFamily="34" charset="0"/>
+                          <a:ea typeface="Noto Sans KR" pitchFamily="34" charset="-122"/>
+                          <a:cs typeface="Noto Sans KR" pitchFamily="34" charset="-120"/>
+                        </a:rPr>
+                        <a:t>담당자 연결 불가</a:t>
                       </a:r>
                       <a:endParaRPr lang="en-US" sz="800" dirty="0">
                         <a:latin typeface="Noto Sans KR" charset="0"/>
@@ -36582,9 +36302,224 @@
                       <a:headEnd type="none" w="med" len="med"/>
                       <a:tailEnd type="none" w="med" len="med"/>
                     </a:lnB>
-                    <a:solidFill>
-                      <a:srgbClr val="F1F5F9"/>
-                    </a:solidFill>
+                  </a:tcPr>
+                </a:tc>
+                <a:tc>
+                  <a:txBody>
+                    <a:bodyPr/>
+                    <a:lstStyle/>
+                    <a:p>
+                      <a:pPr algn="l" indent="0" marL="0">
+                        <a:buNone/>
+                      </a:pPr>
+                      <a:r>
+                        <a:rPr lang="en-US" sz="800" dirty="0">
+                          <a:solidFill>
+                            <a:srgbClr val="334155"/>
+                          </a:solidFill>
+                          <a:latin typeface="Noto Sans KR" pitchFamily="34" charset="0"/>
+                          <a:ea typeface="Noto Sans KR" pitchFamily="34" charset="-122"/>
+                          <a:cs typeface="Noto Sans KR" pitchFamily="34" charset="-120"/>
+                        </a:rPr>
+                        <a:t>고객센터는 주문·배송 같은 소비자 문의만 받았고,</a:t>
+                      </a:r>
+                      <a:endParaRPr lang="en-US" sz="800" dirty="0">
+                        <a:latin typeface="Noto Sans KR" charset="0"/>
+                        <a:ea typeface="Noto Sans KR" charset="0"/>
+                        <a:cs typeface="Noto Sans KR" charset="0"/>
+                      </a:endParaRPr>
+                    </a:p>
+                    <a:p>
+                      <a:pPr algn="l" indent="0" marL="0">
+                        <a:buNone/>
+                      </a:pPr>
+                      <a:r>
+                        <a:rPr lang="en-US" sz="800" dirty="0">
+                          <a:solidFill>
+                            <a:srgbClr val="334155"/>
+                          </a:solidFill>
+                          <a:latin typeface="Noto Sans KR" pitchFamily="34" charset="0"/>
+                          <a:ea typeface="Noto Sans KR" pitchFamily="34" charset="-122"/>
+                          <a:cs typeface="Noto Sans KR" pitchFamily="34" charset="-120"/>
+                        </a:rPr>
+                        <a:t>MD(바잉) 담당자에게 연결해 주는 경로가 없었다.</a:t>
+                      </a:r>
+                      <a:endParaRPr lang="en-US" sz="800" dirty="0">
+                        <a:latin typeface="Noto Sans KR" charset="0"/>
+                        <a:ea typeface="Noto Sans KR" charset="0"/>
+                        <a:cs typeface="Noto Sans KR" charset="0"/>
+                      </a:endParaRPr>
+                    </a:p>
+                  </a:txBody>
+                  <a:tcPr marL="76200" marR="76200" marT="38100" marB="38100" anchor="ctr">
+                    <a:lnL w="6350" cap="flat" cmpd="sng" algn="ctr">
+                      <a:solidFill>
+                        <a:srgbClr val="CBD5E1"/>
+                      </a:solidFill>
+                      <a:prstDash val="solid"/>
+                      <a:round/>
+                      <a:headEnd type="none" w="med" len="med"/>
+                      <a:tailEnd type="none" w="med" len="med"/>
+                    </a:lnL>
+                    <a:lnR w="6350" cap="flat" cmpd="sng" algn="ctr">
+                      <a:solidFill>
+                        <a:srgbClr val="CBD5E1"/>
+                      </a:solidFill>
+                      <a:prstDash val="solid"/>
+                      <a:round/>
+                      <a:headEnd type="none" w="med" len="med"/>
+                      <a:tailEnd type="none" w="med" len="med"/>
+                    </a:lnR>
+                    <a:lnT w="6350" cap="flat" cmpd="sng" algn="ctr">
+                      <a:solidFill>
+                        <a:srgbClr val="CBD5E1"/>
+                      </a:solidFill>
+                      <a:prstDash val="solid"/>
+                      <a:round/>
+                      <a:headEnd type="none" w="med" len="med"/>
+                      <a:tailEnd type="none" w="med" len="med"/>
+                    </a:lnT>
+                    <a:lnB w="6350" cap="flat" cmpd="sng" algn="ctr">
+                      <a:solidFill>
+                        <a:srgbClr val="CBD5E1"/>
+                      </a:solidFill>
+                      <a:prstDash val="solid"/>
+                      <a:round/>
+                      <a:headEnd type="none" w="med" len="med"/>
+                      <a:tailEnd type="none" w="med" len="med"/>
+                    </a:lnB>
+                  </a:tcPr>
+                </a:tc>
+              </a:tr>
+              <a:tr h="274320">
+                <a:tc>
+                  <a:txBody>
+                    <a:bodyPr/>
+                    <a:lstStyle/>
+                    <a:p>
+                      <a:pPr algn="ctr" indent="0" marL="0">
+                        <a:buNone/>
+                      </a:pPr>
+                      <a:r>
+                        <a:rPr lang="en-US" sz="800" b="1" dirty="0">
+                          <a:solidFill>
+                            <a:srgbClr val="267D86"/>
+                          </a:solidFill>
+                          <a:latin typeface="Noto Sans KR" pitchFamily="34" charset="0"/>
+                          <a:ea typeface="Noto Sans KR" pitchFamily="34" charset="-122"/>
+                          <a:cs typeface="Noto Sans KR" pitchFamily="34" charset="-120"/>
+                        </a:rPr>
+                        <a:t>3</a:t>
+                      </a:r>
+                      <a:endParaRPr lang="en-US" sz="800" dirty="0">
+                        <a:latin typeface="Noto Sans KR" charset="0"/>
+                        <a:ea typeface="Noto Sans KR" charset="0"/>
+                        <a:cs typeface="Noto Sans KR" charset="0"/>
+                      </a:endParaRPr>
+                    </a:p>
+                  </a:txBody>
+                  <a:tcPr marL="76200" marR="76200" marT="38100" marB="38100" anchor="ctr">
+                    <a:lnL w="6350" cap="flat" cmpd="sng" algn="ctr">
+                      <a:solidFill>
+                        <a:srgbClr val="CBD5E1"/>
+                      </a:solidFill>
+                      <a:prstDash val="solid"/>
+                      <a:round/>
+                      <a:headEnd type="none" w="med" len="med"/>
+                      <a:tailEnd type="none" w="med" len="med"/>
+                    </a:lnL>
+                    <a:lnR w="6350" cap="flat" cmpd="sng" algn="ctr">
+                      <a:solidFill>
+                        <a:srgbClr val="CBD5E1"/>
+                      </a:solidFill>
+                      <a:prstDash val="solid"/>
+                      <a:round/>
+                      <a:headEnd type="none" w="med" len="med"/>
+                      <a:tailEnd type="none" w="med" len="med"/>
+                    </a:lnR>
+                    <a:lnT w="6350" cap="flat" cmpd="sng" algn="ctr">
+                      <a:solidFill>
+                        <a:srgbClr val="CBD5E1"/>
+                      </a:solidFill>
+                      <a:prstDash val="solid"/>
+                      <a:round/>
+                      <a:headEnd type="none" w="med" len="med"/>
+                      <a:tailEnd type="none" w="med" len="med"/>
+                    </a:lnT>
+                    <a:lnB w="6350" cap="flat" cmpd="sng" algn="ctr">
+                      <a:solidFill>
+                        <a:srgbClr val="CBD5E1"/>
+                      </a:solidFill>
+                      <a:prstDash val="solid"/>
+                      <a:round/>
+                      <a:headEnd type="none" w="med" len="med"/>
+                      <a:tailEnd type="none" w="med" len="med"/>
+                    </a:lnB>
+                  </a:tcPr>
+                </a:tc>
+                <a:tc>
+                  <a:txBody>
+                    <a:bodyPr/>
+                    <a:lstStyle/>
+                    <a:p>
+                      <a:pPr algn="l" indent="0" marL="0">
+                        <a:buNone/>
+                      </a:pPr>
+                      <a:r>
+                        <a:rPr lang="en-US" sz="800" dirty="0">
+                          <a:solidFill>
+                            <a:srgbClr val="64748B"/>
+                          </a:solidFill>
+                          <a:latin typeface="Noto Sans KR" pitchFamily="34" charset="0"/>
+                          <a:ea typeface="Noto Sans KR" pitchFamily="34" charset="-122"/>
+                          <a:cs typeface="Noto Sans KR" pitchFamily="34" charset="-120"/>
+                        </a:rPr>
+                        <a:t>( 추가로 시도하면 기입 )</a:t>
+                      </a:r>
+                      <a:endParaRPr lang="en-US" sz="800" dirty="0">
+                        <a:latin typeface="Noto Sans KR" charset="0"/>
+                        <a:ea typeface="Noto Sans KR" charset="0"/>
+                        <a:cs typeface="Noto Sans KR" charset="0"/>
+                      </a:endParaRPr>
+                    </a:p>
+                  </a:txBody>
+                  <a:tcPr marL="76200" marR="76200" marT="38100" marB="38100" anchor="ctr">
+                    <a:lnL w="6350" cap="flat" cmpd="sng" algn="ctr">
+                      <a:solidFill>
+                        <a:srgbClr val="CBD5E1"/>
+                      </a:solidFill>
+                      <a:prstDash val="solid"/>
+                      <a:round/>
+                      <a:headEnd type="none" w="med" len="med"/>
+                      <a:tailEnd type="none" w="med" len="med"/>
+                    </a:lnL>
+                    <a:lnR w="6350" cap="flat" cmpd="sng" algn="ctr">
+                      <a:solidFill>
+                        <a:srgbClr val="CBD5E1"/>
+                      </a:solidFill>
+                      <a:prstDash val="solid"/>
+                      <a:round/>
+                      <a:headEnd type="none" w="med" len="med"/>
+                      <a:tailEnd type="none" w="med" len="med"/>
+                    </a:lnR>
+                    <a:lnT w="6350" cap="flat" cmpd="sng" algn="ctr">
+                      <a:solidFill>
+                        <a:srgbClr val="CBD5E1"/>
+                      </a:solidFill>
+                      <a:prstDash val="solid"/>
+                      <a:round/>
+                      <a:headEnd type="none" w="med" len="med"/>
+                      <a:tailEnd type="none" w="med" len="med"/>
+                    </a:lnT>
+                    <a:lnB w="6350" cap="flat" cmpd="sng" algn="ctr">
+                      <a:solidFill>
+                        <a:srgbClr val="CBD5E1"/>
+                      </a:solidFill>
+                      <a:prstDash val="solid"/>
+                      <a:round/>
+                      <a:headEnd type="none" w="med" len="med"/>
+                      <a:tailEnd type="none" w="med" len="med"/>
+                    </a:lnB>
                   </a:tcPr>
                 </a:tc>
                 <a:tc>
@@ -36661,15 +36596,15 @@
                         <a:buNone/>
                       </a:pPr>
                       <a:r>
-                        <a:rPr lang="en-US" sz="800" b="1" dirty="0">
+                        <a:rPr lang="en-US" sz="800" dirty="0">
                           <a:solidFill>
-                            <a:srgbClr val="182F48"/>
+                            <a:srgbClr val="334155"/>
                           </a:solidFill>
                           <a:latin typeface="Noto Sans KR" pitchFamily="34" charset="0"/>
                           <a:ea typeface="Noto Sans KR" pitchFamily="34" charset="-122"/>
                           <a:cs typeface="Noto Sans KR" pitchFamily="34" charset="-120"/>
                         </a:rPr>
-                        <a:t>전화번호</a:t>
+                        <a:t> </a:t>
                       </a:r>
                       <a:endParaRPr lang="en-US" sz="800" dirty="0">
                         <a:latin typeface="Noto Sans KR" charset="0"/>
@@ -36715,9 +36650,6 @@
                       <a:headEnd type="none" w="med" len="med"/>
                       <a:tailEnd type="none" w="med" len="med"/>
                     </a:lnB>
-                    <a:solidFill>
-                      <a:srgbClr val="F1F5F9"/>
-                    </a:solidFill>
                   </a:tcPr>
                 </a:tc>
                 <a:tc>
@@ -36785,8 +36717,6 @@
                     </a:lnB>
                   </a:tcPr>
                 </a:tc>
-              </a:tr>
-              <a:tr h="274320">
                 <a:tc>
                   <a:txBody>
                     <a:bodyPr/>
@@ -36796,15 +36726,15 @@
                         <a:buNone/>
                       </a:pPr>
                       <a:r>
-                        <a:rPr lang="en-US" sz="800" b="1" dirty="0">
+                        <a:rPr lang="en-US" sz="800" dirty="0">
                           <a:solidFill>
-                            <a:srgbClr val="182F48"/>
+                            <a:srgbClr val="334155"/>
                           </a:solidFill>
                           <a:latin typeface="Noto Sans KR" pitchFamily="34" charset="0"/>
                           <a:ea typeface="Noto Sans KR" pitchFamily="34" charset="-122"/>
                           <a:cs typeface="Noto Sans KR" pitchFamily="34" charset="-120"/>
                         </a:rPr>
-                        <a:t>통화 상대</a:t>
+                        <a:t> </a:t>
                       </a:r>
                       <a:endParaRPr lang="en-US" sz="800" dirty="0">
                         <a:latin typeface="Noto Sans KR" charset="0"/>
@@ -36850,9 +36780,138 @@
                       <a:headEnd type="none" w="med" len="med"/>
                       <a:tailEnd type="none" w="med" len="med"/>
                     </a:lnB>
-                    <a:solidFill>
-                      <a:srgbClr val="F1F5F9"/>
-                    </a:solidFill>
+                  </a:tcPr>
+                </a:tc>
+              </a:tr>
+              <a:tr h="274320">
+                <a:tc>
+                  <a:txBody>
+                    <a:bodyPr/>
+                    <a:lstStyle/>
+                    <a:p>
+                      <a:pPr algn="ctr" indent="0" marL="0">
+                        <a:buNone/>
+                      </a:pPr>
+                      <a:r>
+                        <a:rPr lang="en-US" sz="800" b="1" dirty="0">
+                          <a:solidFill>
+                            <a:srgbClr val="267D86"/>
+                          </a:solidFill>
+                          <a:latin typeface="Noto Sans KR" pitchFamily="34" charset="0"/>
+                          <a:ea typeface="Noto Sans KR" pitchFamily="34" charset="-122"/>
+                          <a:cs typeface="Noto Sans KR" pitchFamily="34" charset="-120"/>
+                        </a:rPr>
+                        <a:t>4</a:t>
+                      </a:r>
+                      <a:endParaRPr lang="en-US" sz="800" dirty="0">
+                        <a:latin typeface="Noto Sans KR" charset="0"/>
+                        <a:ea typeface="Noto Sans KR" charset="0"/>
+                        <a:cs typeface="Noto Sans KR" charset="0"/>
+                      </a:endParaRPr>
+                    </a:p>
+                  </a:txBody>
+                  <a:tcPr marL="76200" marR="76200" marT="38100" marB="38100" anchor="ctr">
+                    <a:lnL w="6350" cap="flat" cmpd="sng" algn="ctr">
+                      <a:solidFill>
+                        <a:srgbClr val="CBD5E1"/>
+                      </a:solidFill>
+                      <a:prstDash val="solid"/>
+                      <a:round/>
+                      <a:headEnd type="none" w="med" len="med"/>
+                      <a:tailEnd type="none" w="med" len="med"/>
+                    </a:lnL>
+                    <a:lnR w="6350" cap="flat" cmpd="sng" algn="ctr">
+                      <a:solidFill>
+                        <a:srgbClr val="CBD5E1"/>
+                      </a:solidFill>
+                      <a:prstDash val="solid"/>
+                      <a:round/>
+                      <a:headEnd type="none" w="med" len="med"/>
+                      <a:tailEnd type="none" w="med" len="med"/>
+                    </a:lnR>
+                    <a:lnT w="6350" cap="flat" cmpd="sng" algn="ctr">
+                      <a:solidFill>
+                        <a:srgbClr val="CBD5E1"/>
+                      </a:solidFill>
+                      <a:prstDash val="solid"/>
+                      <a:round/>
+                      <a:headEnd type="none" w="med" len="med"/>
+                      <a:tailEnd type="none" w="med" len="med"/>
+                    </a:lnT>
+                    <a:lnB w="6350" cap="flat" cmpd="sng" algn="ctr">
+                      <a:solidFill>
+                        <a:srgbClr val="CBD5E1"/>
+                      </a:solidFill>
+                      <a:prstDash val="solid"/>
+                      <a:round/>
+                      <a:headEnd type="none" w="med" len="med"/>
+                      <a:tailEnd type="none" w="med" len="med"/>
+                    </a:lnB>
+                  </a:tcPr>
+                </a:tc>
+                <a:tc>
+                  <a:txBody>
+                    <a:bodyPr/>
+                    <a:lstStyle/>
+                    <a:p>
+                      <a:pPr algn="l" indent="0" marL="0">
+                        <a:buNone/>
+                      </a:pPr>
+                      <a:r>
+                        <a:rPr lang="en-US" sz="800" dirty="0">
+                          <a:solidFill>
+                            <a:srgbClr val="64748B"/>
+                          </a:solidFill>
+                          <a:latin typeface="Noto Sans KR" pitchFamily="34" charset="0"/>
+                          <a:ea typeface="Noto Sans KR" pitchFamily="34" charset="-122"/>
+                          <a:cs typeface="Noto Sans KR" pitchFamily="34" charset="-120"/>
+                        </a:rPr>
+                        <a:t>( 추가로 시도하면 기입 )</a:t>
+                      </a:r>
+                      <a:endParaRPr lang="en-US" sz="800" dirty="0">
+                        <a:latin typeface="Noto Sans KR" charset="0"/>
+                        <a:ea typeface="Noto Sans KR" charset="0"/>
+                        <a:cs typeface="Noto Sans KR" charset="0"/>
+                      </a:endParaRPr>
+                    </a:p>
+                  </a:txBody>
+                  <a:tcPr marL="76200" marR="76200" marT="38100" marB="38100" anchor="ctr">
+                    <a:lnL w="6350" cap="flat" cmpd="sng" algn="ctr">
+                      <a:solidFill>
+                        <a:srgbClr val="CBD5E1"/>
+                      </a:solidFill>
+                      <a:prstDash val="solid"/>
+                      <a:round/>
+                      <a:headEnd type="none" w="med" len="med"/>
+                      <a:tailEnd type="none" w="med" len="med"/>
+                    </a:lnL>
+                    <a:lnR w="6350" cap="flat" cmpd="sng" algn="ctr">
+                      <a:solidFill>
+                        <a:srgbClr val="CBD5E1"/>
+                      </a:solidFill>
+                      <a:prstDash val="solid"/>
+                      <a:round/>
+                      <a:headEnd type="none" w="med" len="med"/>
+                      <a:tailEnd type="none" w="med" len="med"/>
+                    </a:lnR>
+                    <a:lnT w="6350" cap="flat" cmpd="sng" algn="ctr">
+                      <a:solidFill>
+                        <a:srgbClr val="CBD5E1"/>
+                      </a:solidFill>
+                      <a:prstDash val="solid"/>
+                      <a:round/>
+                      <a:headEnd type="none" w="med" len="med"/>
+                      <a:tailEnd type="none" w="med" len="med"/>
+                    </a:lnT>
+                    <a:lnB w="6350" cap="flat" cmpd="sng" algn="ctr">
+                      <a:solidFill>
+                        <a:srgbClr val="CBD5E1"/>
+                      </a:solidFill>
+                      <a:prstDash val="solid"/>
+                      <a:round/>
+                      <a:headEnd type="none" w="med" len="med"/>
+                      <a:tailEnd type="none" w="med" len="med"/>
+                    </a:lnB>
                   </a:tcPr>
                 </a:tc>
                 <a:tc>
@@ -36929,15 +36988,15 @@
                         <a:buNone/>
                       </a:pPr>
                       <a:r>
-                        <a:rPr lang="en-US" sz="800" b="1" dirty="0">
+                        <a:rPr lang="en-US" sz="800" dirty="0">
                           <a:solidFill>
-                            <a:srgbClr val="182F48"/>
+                            <a:srgbClr val="334155"/>
                           </a:solidFill>
                           <a:latin typeface="Noto Sans KR" pitchFamily="34" charset="0"/>
                           <a:ea typeface="Noto Sans KR" pitchFamily="34" charset="-122"/>
                           <a:cs typeface="Noto Sans KR" pitchFamily="34" charset="-120"/>
                         </a:rPr>
-                        <a:t>결과</a:t>
+                        <a:t> </a:t>
                       </a:r>
                       <a:endParaRPr lang="en-US" sz="800" dirty="0">
                         <a:latin typeface="Noto Sans KR" charset="0"/>
@@ -36983,9 +37042,6 @@
                       <a:headEnd type="none" w="med" len="med"/>
                       <a:tailEnd type="none" w="med" len="med"/>
                     </a:lnB>
-                    <a:solidFill>
-                      <a:srgbClr val="F1F5F9"/>
-                    </a:solidFill>
                   </a:tcPr>
                 </a:tc>
                 <a:tc>
@@ -36999,13 +37055,13 @@
                       <a:r>
                         <a:rPr lang="en-US" sz="800" dirty="0">
                           <a:solidFill>
-                            <a:srgbClr val="64748B"/>
+                            <a:srgbClr val="334155"/>
                           </a:solidFill>
                           <a:latin typeface="Noto Sans KR" pitchFamily="34" charset="0"/>
                           <a:ea typeface="Noto Sans KR" pitchFamily="34" charset="-122"/>
                           <a:cs typeface="Noto Sans KR" pitchFamily="34" charset="-120"/>
                         </a:rPr>
-                        <a:t>연결 · 부재(재시도) · 거절</a:t>
+                        <a:t> </a:t>
                       </a:r>
                       <a:endParaRPr lang="en-US" sz="800" dirty="0">
                         <a:latin typeface="Noto Sans KR" charset="0"/>
@@ -37015,299 +37071,6 @@
                     </a:p>
                   </a:txBody>
                   <a:tcPr marL="76200" marR="76200" marT="38100" marB="38100" anchor="ctr">
-                    <a:lnL w="6350" cap="flat" cmpd="sng" algn="ctr">
-                      <a:solidFill>
-                        <a:srgbClr val="CBD5E1"/>
-                      </a:solidFill>
-                      <a:prstDash val="solid"/>
-                      <a:round/>
-                      <a:headEnd type="none" w="med" len="med"/>
-                      <a:tailEnd type="none" w="med" len="med"/>
-                    </a:lnL>
-                    <a:lnR w="6350" cap="flat" cmpd="sng" algn="ctr">
-                      <a:solidFill>
-                        <a:srgbClr val="CBD5E1"/>
-                      </a:solidFill>
-                      <a:prstDash val="solid"/>
-                      <a:round/>
-                      <a:headEnd type="none" w="med" len="med"/>
-                      <a:tailEnd type="none" w="med" len="med"/>
-                    </a:lnR>
-                    <a:lnT w="6350" cap="flat" cmpd="sng" algn="ctr">
-                      <a:solidFill>
-                        <a:srgbClr val="CBD5E1"/>
-                      </a:solidFill>
-                      <a:prstDash val="solid"/>
-                      <a:round/>
-                      <a:headEnd type="none" w="med" len="med"/>
-                      <a:tailEnd type="none" w="med" len="med"/>
-                    </a:lnT>
-                    <a:lnB w="6350" cap="flat" cmpd="sng" algn="ctr">
-                      <a:solidFill>
-                        <a:srgbClr val="CBD5E1"/>
-                      </a:solidFill>
-                      <a:prstDash val="solid"/>
-                      <a:round/>
-                      <a:headEnd type="none" w="med" len="med"/>
-                      <a:tailEnd type="none" w="med" len="med"/>
-                    </a:lnB>
-                  </a:tcPr>
-                </a:tc>
-              </a:tr>
-            </a:tbl>
-          </a:graphicData>
-        </a:graphic>
-      </p:graphicFrame>
-      <p:graphicFrame>
-        <p:nvGraphicFramePr>
-          <p:cNvPr id="28" name="바이어 질문 기록표"/>
-          <p:cNvGraphicFramePr>
-            <a:graphicFrameLocks noGrp="1"/>
-          </p:cNvGraphicFramePr>
-          <p:nvPr>
-            <p:extLst>
-              <p:ext uri="{D42A27DB-BD31-4B8C-83A1-F6EECF244321}">
-                <p14:modId xmlns:p14="http://schemas.microsoft.com/office/powerpoint/2010/main" val="1579011935"/>
-              </p:ext>
-            </p:extLst>
-          </p:nvPr>
-        </p:nvGraphicFramePr>
-        <p:xfrm>
-          <a:off x="4864608" y="2395728"/>
-          <a:ext cx="6711696" cy="914400"/>
-        </p:xfrm>
-        <a:graphic>
-          <a:graphicData uri="http://schemas.openxmlformats.org/drawingml/2006/table">
-            <a:tbl>
-              <a:tblPr/>
-              <a:tblGrid>
-                <a:gridCol w="365760"/>
-                <a:gridCol w="3154680"/>
-                <a:gridCol w="3191256"/>
-              </a:tblGrid>
-              <a:tr h="205355">
-                <a:tc>
-                  <a:txBody>
-                    <a:bodyPr/>
-                    <a:lstStyle/>
-                    <a:p>
-                      <a:pPr algn="l" indent="0" marL="0">
-                        <a:buNone/>
-                      </a:pPr>
-                      <a:endParaRPr lang="en-US" sz="780" dirty="0">
-                        <a:latin typeface="Noto Sans KR" charset="0"/>
-                        <a:ea typeface="Noto Sans KR" charset="0"/>
-                        <a:cs typeface="Noto Sans KR" charset="0"/>
-                      </a:endParaRPr>
-                    </a:p>
-                  </a:txBody>
-                  <a:tcPr marL="63500" marR="63500" marT="25400" marB="25400" anchor="ctr">
-                    <a:lnL w="6350" cap="flat" cmpd="sng" algn="ctr">
-                      <a:solidFill>
-                        <a:srgbClr val="CBD5E1"/>
-                      </a:solidFill>
-                      <a:prstDash val="solid"/>
-                      <a:round/>
-                      <a:headEnd type="none" w="med" len="med"/>
-                      <a:tailEnd type="none" w="med" len="med"/>
-                    </a:lnL>
-                    <a:lnR w="6350" cap="flat" cmpd="sng" algn="ctr">
-                      <a:solidFill>
-                        <a:srgbClr val="CBD5E1"/>
-                      </a:solidFill>
-                      <a:prstDash val="solid"/>
-                      <a:round/>
-                      <a:headEnd type="none" w="med" len="med"/>
-                      <a:tailEnd type="none" w="med" len="med"/>
-                    </a:lnR>
-                    <a:lnT w="6350" cap="flat" cmpd="sng" algn="ctr">
-                      <a:solidFill>
-                        <a:srgbClr val="CBD5E1"/>
-                      </a:solidFill>
-                      <a:prstDash val="solid"/>
-                      <a:round/>
-                      <a:headEnd type="none" w="med" len="med"/>
-                      <a:tailEnd type="none" w="med" len="med"/>
-                    </a:lnT>
-                    <a:lnB w="6350" cap="flat" cmpd="sng" algn="ctr">
-                      <a:solidFill>
-                        <a:srgbClr val="CBD5E1"/>
-                      </a:solidFill>
-                      <a:prstDash val="solid"/>
-                      <a:round/>
-                      <a:headEnd type="none" w="med" len="med"/>
-                      <a:tailEnd type="none" w="med" len="med"/>
-                    </a:lnB>
-                    <a:solidFill>
-                      <a:srgbClr val="182F48"/>
-                    </a:solidFill>
-                  </a:tcPr>
-                </a:tc>
-                <a:tc>
-                  <a:txBody>
-                    <a:bodyPr/>
-                    <a:lstStyle/>
-                    <a:p>
-                      <a:pPr algn="l" indent="0" marL="0">
-                        <a:buNone/>
-                      </a:pPr>
-                      <a:r>
-                        <a:rPr lang="en-US" sz="780" b="1" dirty="0">
-                          <a:solidFill>
-                            <a:srgbClr val="FFFFFF"/>
-                          </a:solidFill>
-                          <a:latin typeface="Noto Sans KR" pitchFamily="34" charset="0"/>
-                          <a:ea typeface="Noto Sans KR" pitchFamily="34" charset="-122"/>
-                          <a:cs typeface="Noto Sans KR" pitchFamily="34" charset="-120"/>
-                        </a:rPr>
-                        <a:t>질문</a:t>
-                      </a:r>
-                      <a:endParaRPr lang="en-US" sz="780" dirty="0">
-                        <a:latin typeface="Noto Sans KR" charset="0"/>
-                        <a:ea typeface="Noto Sans KR" charset="0"/>
-                        <a:cs typeface="Noto Sans KR" charset="0"/>
-                      </a:endParaRPr>
-                    </a:p>
-                  </a:txBody>
-                  <a:tcPr marL="63500" marR="63500" marT="25400" marB="25400" anchor="ctr">
-                    <a:lnL w="6350" cap="flat" cmpd="sng" algn="ctr">
-                      <a:solidFill>
-                        <a:srgbClr val="CBD5E1"/>
-                      </a:solidFill>
-                      <a:prstDash val="solid"/>
-                      <a:round/>
-                      <a:headEnd type="none" w="med" len="med"/>
-                      <a:tailEnd type="none" w="med" len="med"/>
-                    </a:lnL>
-                    <a:lnR w="6350" cap="flat" cmpd="sng" algn="ctr">
-                      <a:solidFill>
-                        <a:srgbClr val="CBD5E1"/>
-                      </a:solidFill>
-                      <a:prstDash val="solid"/>
-                      <a:round/>
-                      <a:headEnd type="none" w="med" len="med"/>
-                      <a:tailEnd type="none" w="med" len="med"/>
-                    </a:lnR>
-                    <a:lnT w="6350" cap="flat" cmpd="sng" algn="ctr">
-                      <a:solidFill>
-                        <a:srgbClr val="CBD5E1"/>
-                      </a:solidFill>
-                      <a:prstDash val="solid"/>
-                      <a:round/>
-                      <a:headEnd type="none" w="med" len="med"/>
-                      <a:tailEnd type="none" w="med" len="med"/>
-                    </a:lnT>
-                    <a:lnB w="6350" cap="flat" cmpd="sng" algn="ctr">
-                      <a:solidFill>
-                        <a:srgbClr val="CBD5E1"/>
-                      </a:solidFill>
-                      <a:prstDash val="solid"/>
-                      <a:round/>
-                      <a:headEnd type="none" w="med" len="med"/>
-                      <a:tailEnd type="none" w="med" len="med"/>
-                    </a:lnB>
-                    <a:solidFill>
-                      <a:srgbClr val="182F48"/>
-                    </a:solidFill>
-                  </a:tcPr>
-                </a:tc>
-                <a:tc>
-                  <a:txBody>
-                    <a:bodyPr/>
-                    <a:lstStyle/>
-                    <a:p>
-                      <a:pPr algn="l" indent="0" marL="0">
-                        <a:buNone/>
-                      </a:pPr>
-                      <a:r>
-                        <a:rPr lang="en-US" sz="780" b="1" dirty="0">
-                          <a:solidFill>
-                            <a:srgbClr val="FFFFFF"/>
-                          </a:solidFill>
-                          <a:latin typeface="Noto Sans KR" pitchFamily="34" charset="0"/>
-                          <a:ea typeface="Noto Sans KR" pitchFamily="34" charset="-122"/>
-                          <a:cs typeface="Noto Sans KR" pitchFamily="34" charset="-120"/>
-                        </a:rPr>
-                        <a:t>답변 (통화 후 기입)</a:t>
-                      </a:r>
-                      <a:endParaRPr lang="en-US" sz="780" dirty="0">
-                        <a:latin typeface="Noto Sans KR" charset="0"/>
-                        <a:ea typeface="Noto Sans KR" charset="0"/>
-                        <a:cs typeface="Noto Sans KR" charset="0"/>
-                      </a:endParaRPr>
-                    </a:p>
-                  </a:txBody>
-                  <a:tcPr marL="63500" marR="63500" marT="25400" marB="25400" anchor="ctr">
-                    <a:lnL w="6350" cap="flat" cmpd="sng" algn="ctr">
-                      <a:solidFill>
-                        <a:srgbClr val="CBD5E1"/>
-                      </a:solidFill>
-                      <a:prstDash val="solid"/>
-                      <a:round/>
-                      <a:headEnd type="none" w="med" len="med"/>
-                      <a:tailEnd type="none" w="med" len="med"/>
-                    </a:lnL>
-                    <a:lnR w="6350" cap="flat" cmpd="sng" algn="ctr">
-                      <a:solidFill>
-                        <a:srgbClr val="CBD5E1"/>
-                      </a:solidFill>
-                      <a:prstDash val="solid"/>
-                      <a:round/>
-                      <a:headEnd type="none" w="med" len="med"/>
-                      <a:tailEnd type="none" w="med" len="med"/>
-                    </a:lnR>
-                    <a:lnT w="6350" cap="flat" cmpd="sng" algn="ctr">
-                      <a:solidFill>
-                        <a:srgbClr val="CBD5E1"/>
-                      </a:solidFill>
-                      <a:prstDash val="solid"/>
-                      <a:round/>
-                      <a:headEnd type="none" w="med" len="med"/>
-                      <a:tailEnd type="none" w="med" len="med"/>
-                    </a:lnT>
-                    <a:lnB w="6350" cap="flat" cmpd="sng" algn="ctr">
-                      <a:solidFill>
-                        <a:srgbClr val="CBD5E1"/>
-                      </a:solidFill>
-                      <a:prstDash val="solid"/>
-                      <a:round/>
-                      <a:headEnd type="none" w="med" len="med"/>
-                      <a:tailEnd type="none" w="med" len="med"/>
-                    </a:lnB>
-                    <a:solidFill>
-                      <a:srgbClr val="182F48"/>
-                    </a:solidFill>
-                  </a:tcPr>
-                </a:tc>
-              </a:tr>
-              <a:tr h="283464">
-                <a:tc>
-                  <a:txBody>
-                    <a:bodyPr/>
-                    <a:lstStyle/>
-                    <a:p>
-                      <a:pPr algn="ctr" indent="0" marL="0">
-                        <a:buNone/>
-                      </a:pPr>
-                      <a:r>
-                        <a:rPr lang="en-US" sz="780" b="1" dirty="0">
-                          <a:solidFill>
-                            <a:srgbClr val="267D86"/>
-                          </a:solidFill>
-                          <a:latin typeface="Noto Sans KR" pitchFamily="34" charset="0"/>
-                          <a:ea typeface="Noto Sans KR" pitchFamily="34" charset="-122"/>
-                          <a:cs typeface="Noto Sans KR" pitchFamily="34" charset="-120"/>
-                        </a:rPr>
-                        <a:t>1</a:t>
-                      </a:r>
-                      <a:endParaRPr lang="en-US" sz="780" dirty="0">
-                        <a:latin typeface="Noto Sans KR" charset="0"/>
-                        <a:ea typeface="Noto Sans KR" charset="0"/>
-                        <a:cs typeface="Noto Sans KR" charset="0"/>
-                      </a:endParaRPr>
-                    </a:p>
-                  </a:txBody>
-                  <a:tcPr marL="63500" marR="63500" marT="25400" marB="25400" anchor="ctr">
                     <a:lnL w="6350" cap="flat" cmpd="sng" algn="ctr">
                       <a:solidFill>
                         <a:srgbClr val="CBD5E1"/>
@@ -37355,72 +37118,7 @@
                         <a:buNone/>
                       </a:pPr>
                       <a:r>
-                        <a:rPr lang="en-US" sz="780" dirty="0">
-                          <a:solidFill>
-                            <a:srgbClr val="334155"/>
-                          </a:solidFill>
-                          <a:latin typeface="Noto Sans KR" pitchFamily="34" charset="0"/>
-                          <a:ea typeface="Noto Sans KR" pitchFamily="34" charset="-122"/>
-                          <a:cs typeface="Noto Sans KR" pitchFamily="34" charset="-120"/>
-                        </a:rPr>
-                        <a:t>국내 고프코어 브랜드는 주로 어떻게 찾으시나요?</a:t>
-                      </a:r>
-                      <a:endParaRPr lang="en-US" sz="780" dirty="0">
-                        <a:latin typeface="Noto Sans KR" charset="0"/>
-                        <a:ea typeface="Noto Sans KR" charset="0"/>
-                        <a:cs typeface="Noto Sans KR" charset="0"/>
-                      </a:endParaRPr>
-                    </a:p>
-                  </a:txBody>
-                  <a:tcPr marL="63500" marR="63500" marT="25400" marB="25400" anchor="ctr">
-                    <a:lnL w="6350" cap="flat" cmpd="sng" algn="ctr">
-                      <a:solidFill>
-                        <a:srgbClr val="CBD5E1"/>
-                      </a:solidFill>
-                      <a:prstDash val="solid"/>
-                      <a:round/>
-                      <a:headEnd type="none" w="med" len="med"/>
-                      <a:tailEnd type="none" w="med" len="med"/>
-                    </a:lnL>
-                    <a:lnR w="6350" cap="flat" cmpd="sng" algn="ctr">
-                      <a:solidFill>
-                        <a:srgbClr val="CBD5E1"/>
-                      </a:solidFill>
-                      <a:prstDash val="solid"/>
-                      <a:round/>
-                      <a:headEnd type="none" w="med" len="med"/>
-                      <a:tailEnd type="none" w="med" len="med"/>
-                    </a:lnR>
-                    <a:lnT w="6350" cap="flat" cmpd="sng" algn="ctr">
-                      <a:solidFill>
-                        <a:srgbClr val="CBD5E1"/>
-                      </a:solidFill>
-                      <a:prstDash val="solid"/>
-                      <a:round/>
-                      <a:headEnd type="none" w="med" len="med"/>
-                      <a:tailEnd type="none" w="med" len="med"/>
-                    </a:lnT>
-                    <a:lnB w="6350" cap="flat" cmpd="sng" algn="ctr">
-                      <a:solidFill>
-                        <a:srgbClr val="CBD5E1"/>
-                      </a:solidFill>
-                      <a:prstDash val="solid"/>
-                      <a:round/>
-                      <a:headEnd type="none" w="med" len="med"/>
-                      <a:tailEnd type="none" w="med" len="med"/>
-                    </a:lnB>
-                  </a:tcPr>
-                </a:tc>
-                <a:tc>
-                  <a:txBody>
-                    <a:bodyPr/>
-                    <a:lstStyle/>
-                    <a:p>
-                      <a:pPr algn="l" indent="0" marL="0">
-                        <a:buNone/>
-                      </a:pPr>
-                      <a:r>
-                        <a:rPr lang="en-US" sz="780" dirty="0">
+                        <a:rPr lang="en-US" sz="800" dirty="0">
                           <a:solidFill>
                             <a:srgbClr val="334155"/>
                           </a:solidFill>
@@ -37430,1787 +37128,14 @@
                         </a:rPr>
                         <a:t> </a:t>
                       </a:r>
-                      <a:endParaRPr lang="en-US" sz="780" dirty="0">
+                      <a:endParaRPr lang="en-US" sz="800" dirty="0">
                         <a:latin typeface="Noto Sans KR" charset="0"/>
                         <a:ea typeface="Noto Sans KR" charset="0"/>
                         <a:cs typeface="Noto Sans KR" charset="0"/>
                       </a:endParaRPr>
                     </a:p>
                   </a:txBody>
-                  <a:tcPr marL="63500" marR="63500" marT="25400" marB="25400" anchor="ctr">
-                    <a:lnL w="6350" cap="flat" cmpd="sng" algn="ctr">
-                      <a:solidFill>
-                        <a:srgbClr val="CBD5E1"/>
-                      </a:solidFill>
-                      <a:prstDash val="solid"/>
-                      <a:round/>
-                      <a:headEnd type="none" w="med" len="med"/>
-                      <a:tailEnd type="none" w="med" len="med"/>
-                    </a:lnL>
-                    <a:lnR w="6350" cap="flat" cmpd="sng" algn="ctr">
-                      <a:solidFill>
-                        <a:srgbClr val="CBD5E1"/>
-                      </a:solidFill>
-                      <a:prstDash val="solid"/>
-                      <a:round/>
-                      <a:headEnd type="none" w="med" len="med"/>
-                      <a:tailEnd type="none" w="med" len="med"/>
-                    </a:lnR>
-                    <a:lnT w="6350" cap="flat" cmpd="sng" algn="ctr">
-                      <a:solidFill>
-                        <a:srgbClr val="CBD5E1"/>
-                      </a:solidFill>
-                      <a:prstDash val="solid"/>
-                      <a:round/>
-                      <a:headEnd type="none" w="med" len="med"/>
-                      <a:tailEnd type="none" w="med" len="med"/>
-                    </a:lnT>
-                    <a:lnB w="6350" cap="flat" cmpd="sng" algn="ctr">
-                      <a:solidFill>
-                        <a:srgbClr val="CBD5E1"/>
-                      </a:solidFill>
-                      <a:prstDash val="solid"/>
-                      <a:round/>
-                      <a:headEnd type="none" w="med" len="med"/>
-                      <a:tailEnd type="none" w="med" len="med"/>
-                    </a:lnB>
-                  </a:tcPr>
-                </a:tc>
-              </a:tr>
-              <a:tr h="283464">
-                <a:tc>
-                  <a:txBody>
-                    <a:bodyPr/>
-                    <a:lstStyle/>
-                    <a:p>
-                      <a:pPr algn="ctr" indent="0" marL="0">
-                        <a:buNone/>
-                      </a:pPr>
-                      <a:r>
-                        <a:rPr lang="en-US" sz="780" b="1" dirty="0">
-                          <a:solidFill>
-                            <a:srgbClr val="267D86"/>
-                          </a:solidFill>
-                          <a:latin typeface="Noto Sans KR" pitchFamily="34" charset="0"/>
-                          <a:ea typeface="Noto Sans KR" pitchFamily="34" charset="-122"/>
-                          <a:cs typeface="Noto Sans KR" pitchFamily="34" charset="-120"/>
-                        </a:rPr>
-                        <a:t>2</a:t>
-                      </a:r>
-                      <a:endParaRPr lang="en-US" sz="780" dirty="0">
-                        <a:latin typeface="Noto Sans KR" charset="0"/>
-                        <a:ea typeface="Noto Sans KR" charset="0"/>
-                        <a:cs typeface="Noto Sans KR" charset="0"/>
-                      </a:endParaRPr>
-                    </a:p>
-                  </a:txBody>
-                  <a:tcPr marL="63500" marR="63500" marT="25400" marB="25400" anchor="ctr">
-                    <a:lnL w="6350" cap="flat" cmpd="sng" algn="ctr">
-                      <a:solidFill>
-                        <a:srgbClr val="CBD5E1"/>
-                      </a:solidFill>
-                      <a:prstDash val="solid"/>
-                      <a:round/>
-                      <a:headEnd type="none" w="med" len="med"/>
-                      <a:tailEnd type="none" w="med" len="med"/>
-                    </a:lnL>
-                    <a:lnR w="6350" cap="flat" cmpd="sng" algn="ctr">
-                      <a:solidFill>
-                        <a:srgbClr val="CBD5E1"/>
-                      </a:solidFill>
-                      <a:prstDash val="solid"/>
-                      <a:round/>
-                      <a:headEnd type="none" w="med" len="med"/>
-                      <a:tailEnd type="none" w="med" len="med"/>
-                    </a:lnR>
-                    <a:lnT w="6350" cap="flat" cmpd="sng" algn="ctr">
-                      <a:solidFill>
-                        <a:srgbClr val="CBD5E1"/>
-                      </a:solidFill>
-                      <a:prstDash val="solid"/>
-                      <a:round/>
-                      <a:headEnd type="none" w="med" len="med"/>
-                      <a:tailEnd type="none" w="med" len="med"/>
-                    </a:lnT>
-                    <a:lnB w="6350" cap="flat" cmpd="sng" algn="ctr">
-                      <a:solidFill>
-                        <a:srgbClr val="CBD5E1"/>
-                      </a:solidFill>
-                      <a:prstDash val="solid"/>
-                      <a:round/>
-                      <a:headEnd type="none" w="med" len="med"/>
-                      <a:tailEnd type="none" w="med" len="med"/>
-                    </a:lnB>
-                  </a:tcPr>
-                </a:tc>
-                <a:tc>
-                  <a:txBody>
-                    <a:bodyPr/>
-                    <a:lstStyle/>
-                    <a:p>
-                      <a:pPr algn="l" indent="0" marL="0">
-                        <a:buNone/>
-                      </a:pPr>
-                      <a:r>
-                        <a:rPr lang="en-US" sz="780" dirty="0">
-                          <a:solidFill>
-                            <a:srgbClr val="334155"/>
-                          </a:solidFill>
-                          <a:latin typeface="Noto Sans KR" pitchFamily="34" charset="0"/>
-                          <a:ea typeface="Noto Sans KR" pitchFamily="34" charset="-122"/>
-                          <a:cs typeface="Noto Sans KR" pitchFamily="34" charset="-120"/>
-                        </a:rPr>
-                        <a:t>국내 신진 브랜드를 들여올 때 가장 어려운 점은?</a:t>
-                      </a:r>
-                      <a:endParaRPr lang="en-US" sz="780" dirty="0">
-                        <a:latin typeface="Noto Sans KR" charset="0"/>
-                        <a:ea typeface="Noto Sans KR" charset="0"/>
-                        <a:cs typeface="Noto Sans KR" charset="0"/>
-                      </a:endParaRPr>
-                    </a:p>
-                  </a:txBody>
-                  <a:tcPr marL="63500" marR="63500" marT="25400" marB="25400" anchor="ctr">
-                    <a:lnL w="6350" cap="flat" cmpd="sng" algn="ctr">
-                      <a:solidFill>
-                        <a:srgbClr val="CBD5E1"/>
-                      </a:solidFill>
-                      <a:prstDash val="solid"/>
-                      <a:round/>
-                      <a:headEnd type="none" w="med" len="med"/>
-                      <a:tailEnd type="none" w="med" len="med"/>
-                    </a:lnL>
-                    <a:lnR w="6350" cap="flat" cmpd="sng" algn="ctr">
-                      <a:solidFill>
-                        <a:srgbClr val="CBD5E1"/>
-                      </a:solidFill>
-                      <a:prstDash val="solid"/>
-                      <a:round/>
-                      <a:headEnd type="none" w="med" len="med"/>
-                      <a:tailEnd type="none" w="med" len="med"/>
-                    </a:lnR>
-                    <a:lnT w="6350" cap="flat" cmpd="sng" algn="ctr">
-                      <a:solidFill>
-                        <a:srgbClr val="CBD5E1"/>
-                      </a:solidFill>
-                      <a:prstDash val="solid"/>
-                      <a:round/>
-                      <a:headEnd type="none" w="med" len="med"/>
-                      <a:tailEnd type="none" w="med" len="med"/>
-                    </a:lnT>
-                    <a:lnB w="6350" cap="flat" cmpd="sng" algn="ctr">
-                      <a:solidFill>
-                        <a:srgbClr val="CBD5E1"/>
-                      </a:solidFill>
-                      <a:prstDash val="solid"/>
-                      <a:round/>
-                      <a:headEnd type="none" w="med" len="med"/>
-                      <a:tailEnd type="none" w="med" len="med"/>
-                    </a:lnB>
-                  </a:tcPr>
-                </a:tc>
-                <a:tc>
-                  <a:txBody>
-                    <a:bodyPr/>
-                    <a:lstStyle/>
-                    <a:p>
-                      <a:pPr algn="l" indent="0" marL="0">
-                        <a:buNone/>
-                      </a:pPr>
-                      <a:r>
-                        <a:rPr lang="en-US" sz="780" dirty="0">
-                          <a:solidFill>
-                            <a:srgbClr val="334155"/>
-                          </a:solidFill>
-                          <a:latin typeface="Noto Sans KR" pitchFamily="34" charset="0"/>
-                          <a:ea typeface="Noto Sans KR" pitchFamily="34" charset="-122"/>
-                          <a:cs typeface="Noto Sans KR" pitchFamily="34" charset="-120"/>
-                        </a:rPr>
-                        <a:t> </a:t>
-                      </a:r>
-                      <a:endParaRPr lang="en-US" sz="780" dirty="0">
-                        <a:latin typeface="Noto Sans KR" charset="0"/>
-                        <a:ea typeface="Noto Sans KR" charset="0"/>
-                        <a:cs typeface="Noto Sans KR" charset="0"/>
-                      </a:endParaRPr>
-                    </a:p>
-                  </a:txBody>
-                  <a:tcPr marL="63500" marR="63500" marT="25400" marB="25400" anchor="ctr">
-                    <a:lnL w="6350" cap="flat" cmpd="sng" algn="ctr">
-                      <a:solidFill>
-                        <a:srgbClr val="CBD5E1"/>
-                      </a:solidFill>
-                      <a:prstDash val="solid"/>
-                      <a:round/>
-                      <a:headEnd type="none" w="med" len="med"/>
-                      <a:tailEnd type="none" w="med" len="med"/>
-                    </a:lnL>
-                    <a:lnR w="6350" cap="flat" cmpd="sng" algn="ctr">
-                      <a:solidFill>
-                        <a:srgbClr val="CBD5E1"/>
-                      </a:solidFill>
-                      <a:prstDash val="solid"/>
-                      <a:round/>
-                      <a:headEnd type="none" w="med" len="med"/>
-                      <a:tailEnd type="none" w="med" len="med"/>
-                    </a:lnR>
-                    <a:lnT w="6350" cap="flat" cmpd="sng" algn="ctr">
-                      <a:solidFill>
-                        <a:srgbClr val="CBD5E1"/>
-                      </a:solidFill>
-                      <a:prstDash val="solid"/>
-                      <a:round/>
-                      <a:headEnd type="none" w="med" len="med"/>
-                      <a:tailEnd type="none" w="med" len="med"/>
-                    </a:lnT>
-                    <a:lnB w="6350" cap="flat" cmpd="sng" algn="ctr">
-                      <a:solidFill>
-                        <a:srgbClr val="CBD5E1"/>
-                      </a:solidFill>
-                      <a:prstDash val="solid"/>
-                      <a:round/>
-                      <a:headEnd type="none" w="med" len="med"/>
-                      <a:tailEnd type="none" w="med" len="med"/>
-                    </a:lnB>
-                  </a:tcPr>
-                </a:tc>
-              </a:tr>
-              <a:tr h="283464">
-                <a:tc>
-                  <a:txBody>
-                    <a:bodyPr/>
-                    <a:lstStyle/>
-                    <a:p>
-                      <a:pPr algn="ctr" indent="0" marL="0">
-                        <a:buNone/>
-                      </a:pPr>
-                      <a:r>
-                        <a:rPr lang="en-US" sz="780" b="1" dirty="0">
-                          <a:solidFill>
-                            <a:srgbClr val="267D86"/>
-                          </a:solidFill>
-                          <a:latin typeface="Noto Sans KR" pitchFamily="34" charset="0"/>
-                          <a:ea typeface="Noto Sans KR" pitchFamily="34" charset="-122"/>
-                          <a:cs typeface="Noto Sans KR" pitchFamily="34" charset="-120"/>
-                        </a:rPr>
-                        <a:t>3</a:t>
-                      </a:r>
-                      <a:endParaRPr lang="en-US" sz="780" dirty="0">
-                        <a:latin typeface="Noto Sans KR" charset="0"/>
-                        <a:ea typeface="Noto Sans KR" charset="0"/>
-                        <a:cs typeface="Noto Sans KR" charset="0"/>
-                      </a:endParaRPr>
-                    </a:p>
-                  </a:txBody>
-                  <a:tcPr marL="63500" marR="63500" marT="25400" marB="25400" anchor="ctr">
-                    <a:lnL w="6350" cap="flat" cmpd="sng" algn="ctr">
-                      <a:solidFill>
-                        <a:srgbClr val="CBD5E1"/>
-                      </a:solidFill>
-                      <a:prstDash val="solid"/>
-                      <a:round/>
-                      <a:headEnd type="none" w="med" len="med"/>
-                      <a:tailEnd type="none" w="med" len="med"/>
-                    </a:lnL>
-                    <a:lnR w="6350" cap="flat" cmpd="sng" algn="ctr">
-                      <a:solidFill>
-                        <a:srgbClr val="CBD5E1"/>
-                      </a:solidFill>
-                      <a:prstDash val="solid"/>
-                      <a:round/>
-                      <a:headEnd type="none" w="med" len="med"/>
-                      <a:tailEnd type="none" w="med" len="med"/>
-                    </a:lnR>
-                    <a:lnT w="6350" cap="flat" cmpd="sng" algn="ctr">
-                      <a:solidFill>
-                        <a:srgbClr val="CBD5E1"/>
-                      </a:solidFill>
-                      <a:prstDash val="solid"/>
-                      <a:round/>
-                      <a:headEnd type="none" w="med" len="med"/>
-                      <a:tailEnd type="none" w="med" len="med"/>
-                    </a:lnT>
-                    <a:lnB w="6350" cap="flat" cmpd="sng" algn="ctr">
-                      <a:solidFill>
-                        <a:srgbClr val="CBD5E1"/>
-                      </a:solidFill>
-                      <a:prstDash val="solid"/>
-                      <a:round/>
-                      <a:headEnd type="none" w="med" len="med"/>
-                      <a:tailEnd type="none" w="med" len="med"/>
-                    </a:lnB>
-                  </a:tcPr>
-                </a:tc>
-                <a:tc>
-                  <a:txBody>
-                    <a:bodyPr/>
-                    <a:lstStyle/>
-                    <a:p>
-                      <a:pPr algn="l" indent="0" marL="0">
-                        <a:buNone/>
-                      </a:pPr>
-                      <a:r>
-                        <a:rPr lang="en-US" sz="780" dirty="0">
-                          <a:solidFill>
-                            <a:srgbClr val="334155"/>
-                          </a:solidFill>
-                          <a:latin typeface="Noto Sans KR" pitchFamily="34" charset="0"/>
-                          <a:ea typeface="Noto Sans KR" pitchFamily="34" charset="-122"/>
-                          <a:cs typeface="Noto Sans KR" pitchFamily="34" charset="-120"/>
-                        </a:rPr>
-                        <a:t>해외 브랜드 직진출 이후 바잉에 달라진 점이 있나요?</a:t>
-                      </a:r>
-                      <a:endParaRPr lang="en-US" sz="780" dirty="0">
-                        <a:latin typeface="Noto Sans KR" charset="0"/>
-                        <a:ea typeface="Noto Sans KR" charset="0"/>
-                        <a:cs typeface="Noto Sans KR" charset="0"/>
-                      </a:endParaRPr>
-                    </a:p>
-                  </a:txBody>
-                  <a:tcPr marL="63500" marR="63500" marT="25400" marB="25400" anchor="ctr">
-                    <a:lnL w="6350" cap="flat" cmpd="sng" algn="ctr">
-                      <a:solidFill>
-                        <a:srgbClr val="CBD5E1"/>
-                      </a:solidFill>
-                      <a:prstDash val="solid"/>
-                      <a:round/>
-                      <a:headEnd type="none" w="med" len="med"/>
-                      <a:tailEnd type="none" w="med" len="med"/>
-                    </a:lnL>
-                    <a:lnR w="6350" cap="flat" cmpd="sng" algn="ctr">
-                      <a:solidFill>
-                        <a:srgbClr val="CBD5E1"/>
-                      </a:solidFill>
-                      <a:prstDash val="solid"/>
-                      <a:round/>
-                      <a:headEnd type="none" w="med" len="med"/>
-                      <a:tailEnd type="none" w="med" len="med"/>
-                    </a:lnR>
-                    <a:lnT w="6350" cap="flat" cmpd="sng" algn="ctr">
-                      <a:solidFill>
-                        <a:srgbClr val="CBD5E1"/>
-                      </a:solidFill>
-                      <a:prstDash val="solid"/>
-                      <a:round/>
-                      <a:headEnd type="none" w="med" len="med"/>
-                      <a:tailEnd type="none" w="med" len="med"/>
-                    </a:lnT>
-                    <a:lnB w="6350" cap="flat" cmpd="sng" algn="ctr">
-                      <a:solidFill>
-                        <a:srgbClr val="CBD5E1"/>
-                      </a:solidFill>
-                      <a:prstDash val="solid"/>
-                      <a:round/>
-                      <a:headEnd type="none" w="med" len="med"/>
-                      <a:tailEnd type="none" w="med" len="med"/>
-                    </a:lnB>
-                  </a:tcPr>
-                </a:tc>
-                <a:tc>
-                  <a:txBody>
-                    <a:bodyPr/>
-                    <a:lstStyle/>
-                    <a:p>
-                      <a:pPr algn="l" indent="0" marL="0">
-                        <a:buNone/>
-                      </a:pPr>
-                      <a:r>
-                        <a:rPr lang="en-US" sz="780" dirty="0">
-                          <a:solidFill>
-                            <a:srgbClr val="334155"/>
-                          </a:solidFill>
-                          <a:latin typeface="Noto Sans KR" pitchFamily="34" charset="0"/>
-                          <a:ea typeface="Noto Sans KR" pitchFamily="34" charset="-122"/>
-                          <a:cs typeface="Noto Sans KR" pitchFamily="34" charset="-120"/>
-                        </a:rPr>
-                        <a:t> </a:t>
-                      </a:r>
-                      <a:endParaRPr lang="en-US" sz="780" dirty="0">
-                        <a:latin typeface="Noto Sans KR" charset="0"/>
-                        <a:ea typeface="Noto Sans KR" charset="0"/>
-                        <a:cs typeface="Noto Sans KR" charset="0"/>
-                      </a:endParaRPr>
-                    </a:p>
-                  </a:txBody>
-                  <a:tcPr marL="63500" marR="63500" marT="25400" marB="25400" anchor="ctr">
-                    <a:lnL w="6350" cap="flat" cmpd="sng" algn="ctr">
-                      <a:solidFill>
-                        <a:srgbClr val="CBD5E1"/>
-                      </a:solidFill>
-                      <a:prstDash val="solid"/>
-                      <a:round/>
-                      <a:headEnd type="none" w="med" len="med"/>
-                      <a:tailEnd type="none" w="med" len="med"/>
-                    </a:lnL>
-                    <a:lnR w="6350" cap="flat" cmpd="sng" algn="ctr">
-                      <a:solidFill>
-                        <a:srgbClr val="CBD5E1"/>
-                      </a:solidFill>
-                      <a:prstDash val="solid"/>
-                      <a:round/>
-                      <a:headEnd type="none" w="med" len="med"/>
-                      <a:tailEnd type="none" w="med" len="med"/>
-                    </a:lnR>
-                    <a:lnT w="6350" cap="flat" cmpd="sng" algn="ctr">
-                      <a:solidFill>
-                        <a:srgbClr val="CBD5E1"/>
-                      </a:solidFill>
-                      <a:prstDash val="solid"/>
-                      <a:round/>
-                      <a:headEnd type="none" w="med" len="med"/>
-                      <a:tailEnd type="none" w="med" len="med"/>
-                    </a:lnT>
-                    <a:lnB w="6350" cap="flat" cmpd="sng" algn="ctr">
-                      <a:solidFill>
-                        <a:srgbClr val="CBD5E1"/>
-                      </a:solidFill>
-                      <a:prstDash val="solid"/>
-                      <a:round/>
-                      <a:headEnd type="none" w="med" len="med"/>
-                      <a:tailEnd type="none" w="med" len="med"/>
-                    </a:lnB>
-                  </a:tcPr>
-                </a:tc>
-              </a:tr>
-              <a:tr h="283464">
-                <a:tc>
-                  <a:txBody>
-                    <a:bodyPr/>
-                    <a:lstStyle/>
-                    <a:p>
-                      <a:pPr algn="ctr" indent="0" marL="0">
-                        <a:buNone/>
-                      </a:pPr>
-                      <a:r>
-                        <a:rPr lang="en-US" sz="780" b="1" dirty="0">
-                          <a:solidFill>
-                            <a:srgbClr val="267D86"/>
-                          </a:solidFill>
-                          <a:latin typeface="Noto Sans KR" pitchFamily="34" charset="0"/>
-                          <a:ea typeface="Noto Sans KR" pitchFamily="34" charset="-122"/>
-                          <a:cs typeface="Noto Sans KR" pitchFamily="34" charset="-120"/>
-                        </a:rPr>
-                        <a:t>4</a:t>
-                      </a:r>
-                      <a:endParaRPr lang="en-US" sz="780" dirty="0">
-                        <a:latin typeface="Noto Sans KR" charset="0"/>
-                        <a:ea typeface="Noto Sans KR" charset="0"/>
-                        <a:cs typeface="Noto Sans KR" charset="0"/>
-                      </a:endParaRPr>
-                    </a:p>
-                  </a:txBody>
-                  <a:tcPr marL="63500" marR="63500" marT="25400" marB="25400" anchor="ctr">
-                    <a:lnL w="6350" cap="flat" cmpd="sng" algn="ctr">
-                      <a:solidFill>
-                        <a:srgbClr val="CBD5E1"/>
-                      </a:solidFill>
-                      <a:prstDash val="solid"/>
-                      <a:round/>
-                      <a:headEnd type="none" w="med" len="med"/>
-                      <a:tailEnd type="none" w="med" len="med"/>
-                    </a:lnL>
-                    <a:lnR w="6350" cap="flat" cmpd="sng" algn="ctr">
-                      <a:solidFill>
-                        <a:srgbClr val="CBD5E1"/>
-                      </a:solidFill>
-                      <a:prstDash val="solid"/>
-                      <a:round/>
-                      <a:headEnd type="none" w="med" len="med"/>
-                      <a:tailEnd type="none" w="med" len="med"/>
-                    </a:lnR>
-                    <a:lnT w="6350" cap="flat" cmpd="sng" algn="ctr">
-                      <a:solidFill>
-                        <a:srgbClr val="CBD5E1"/>
-                      </a:solidFill>
-                      <a:prstDash val="solid"/>
-                      <a:round/>
-                      <a:headEnd type="none" w="med" len="med"/>
-                      <a:tailEnd type="none" w="med" len="med"/>
-                    </a:lnT>
-                    <a:lnB w="6350" cap="flat" cmpd="sng" algn="ctr">
-                      <a:solidFill>
-                        <a:srgbClr val="CBD5E1"/>
-                      </a:solidFill>
-                      <a:prstDash val="solid"/>
-                      <a:round/>
-                      <a:headEnd type="none" w="med" len="med"/>
-                      <a:tailEnd type="none" w="med" len="med"/>
-                    </a:lnB>
-                  </a:tcPr>
-                </a:tc>
-                <a:tc>
-                  <a:txBody>
-                    <a:bodyPr/>
-                    <a:lstStyle/>
-                    <a:p>
-                      <a:pPr algn="l" indent="0" marL="0">
-                        <a:buNone/>
-                      </a:pPr>
-                      <a:r>
-                        <a:rPr lang="en-US" sz="780" dirty="0">
-                          <a:solidFill>
-                            <a:srgbClr val="334155"/>
-                          </a:solidFill>
-                          <a:latin typeface="Noto Sans KR" pitchFamily="34" charset="0"/>
-                          <a:ea typeface="Noto Sans KR" pitchFamily="34" charset="-122"/>
-                          <a:cs typeface="Noto Sans KR" pitchFamily="34" charset="-120"/>
-                        </a:rPr>
-                        <a:t>설명드린 행사에서 가장 도움이 될 것 같은 것은?</a:t>
-                      </a:r>
-                      <a:endParaRPr lang="en-US" sz="780" dirty="0">
-                        <a:latin typeface="Noto Sans KR" charset="0"/>
-                        <a:ea typeface="Noto Sans KR" charset="0"/>
-                        <a:cs typeface="Noto Sans KR" charset="0"/>
-                      </a:endParaRPr>
-                    </a:p>
-                  </a:txBody>
-                  <a:tcPr marL="63500" marR="63500" marT="25400" marB="25400" anchor="ctr">
-                    <a:lnL w="6350" cap="flat" cmpd="sng" algn="ctr">
-                      <a:solidFill>
-                        <a:srgbClr val="CBD5E1"/>
-                      </a:solidFill>
-                      <a:prstDash val="solid"/>
-                      <a:round/>
-                      <a:headEnd type="none" w="med" len="med"/>
-                      <a:tailEnd type="none" w="med" len="med"/>
-                    </a:lnL>
-                    <a:lnR w="6350" cap="flat" cmpd="sng" algn="ctr">
-                      <a:solidFill>
-                        <a:srgbClr val="CBD5E1"/>
-                      </a:solidFill>
-                      <a:prstDash val="solid"/>
-                      <a:round/>
-                      <a:headEnd type="none" w="med" len="med"/>
-                      <a:tailEnd type="none" w="med" len="med"/>
-                    </a:lnR>
-                    <a:lnT w="6350" cap="flat" cmpd="sng" algn="ctr">
-                      <a:solidFill>
-                        <a:srgbClr val="CBD5E1"/>
-                      </a:solidFill>
-                      <a:prstDash val="solid"/>
-                      <a:round/>
-                      <a:headEnd type="none" w="med" len="med"/>
-                      <a:tailEnd type="none" w="med" len="med"/>
-                    </a:lnT>
-                    <a:lnB w="6350" cap="flat" cmpd="sng" algn="ctr">
-                      <a:solidFill>
-                        <a:srgbClr val="CBD5E1"/>
-                      </a:solidFill>
-                      <a:prstDash val="solid"/>
-                      <a:round/>
-                      <a:headEnd type="none" w="med" len="med"/>
-                      <a:tailEnd type="none" w="med" len="med"/>
-                    </a:lnB>
-                  </a:tcPr>
-                </a:tc>
-                <a:tc>
-                  <a:txBody>
-                    <a:bodyPr/>
-                    <a:lstStyle/>
-                    <a:p>
-                      <a:pPr algn="l" indent="0" marL="0">
-                        <a:buNone/>
-                      </a:pPr>
-                      <a:r>
-                        <a:rPr lang="en-US" sz="780" dirty="0">
-                          <a:solidFill>
-                            <a:srgbClr val="334155"/>
-                          </a:solidFill>
-                          <a:latin typeface="Noto Sans KR" pitchFamily="34" charset="0"/>
-                          <a:ea typeface="Noto Sans KR" pitchFamily="34" charset="-122"/>
-                          <a:cs typeface="Noto Sans KR" pitchFamily="34" charset="-120"/>
-                        </a:rPr>
-                        <a:t> </a:t>
-                      </a:r>
-                      <a:endParaRPr lang="en-US" sz="780" dirty="0">
-                        <a:latin typeface="Noto Sans KR" charset="0"/>
-                        <a:ea typeface="Noto Sans KR" charset="0"/>
-                        <a:cs typeface="Noto Sans KR" charset="0"/>
-                      </a:endParaRPr>
-                    </a:p>
-                  </a:txBody>
-                  <a:tcPr marL="63500" marR="63500" marT="25400" marB="25400" anchor="ctr">
-                    <a:lnL w="6350" cap="flat" cmpd="sng" algn="ctr">
-                      <a:solidFill>
-                        <a:srgbClr val="CBD5E1"/>
-                      </a:solidFill>
-                      <a:prstDash val="solid"/>
-                      <a:round/>
-                      <a:headEnd type="none" w="med" len="med"/>
-                      <a:tailEnd type="none" w="med" len="med"/>
-                    </a:lnL>
-                    <a:lnR w="6350" cap="flat" cmpd="sng" algn="ctr">
-                      <a:solidFill>
-                        <a:srgbClr val="CBD5E1"/>
-                      </a:solidFill>
-                      <a:prstDash val="solid"/>
-                      <a:round/>
-                      <a:headEnd type="none" w="med" len="med"/>
-                      <a:tailEnd type="none" w="med" len="med"/>
-                    </a:lnR>
-                    <a:lnT w="6350" cap="flat" cmpd="sng" algn="ctr">
-                      <a:solidFill>
-                        <a:srgbClr val="CBD5E1"/>
-                      </a:solidFill>
-                      <a:prstDash val="solid"/>
-                      <a:round/>
-                      <a:headEnd type="none" w="med" len="med"/>
-                      <a:tailEnd type="none" w="med" len="med"/>
-                    </a:lnT>
-                    <a:lnB w="6350" cap="flat" cmpd="sng" algn="ctr">
-                      <a:solidFill>
-                        <a:srgbClr val="CBD5E1"/>
-                      </a:solidFill>
-                      <a:prstDash val="solid"/>
-                      <a:round/>
-                      <a:headEnd type="none" w="med" len="med"/>
-                      <a:tailEnd type="none" w="med" len="med"/>
-                    </a:lnB>
-                  </a:tcPr>
-                </a:tc>
-              </a:tr>
-              <a:tr h="283464">
-                <a:tc>
-                  <a:txBody>
-                    <a:bodyPr/>
-                    <a:lstStyle/>
-                    <a:p>
-                      <a:pPr algn="ctr" indent="0" marL="0">
-                        <a:buNone/>
-                      </a:pPr>
-                      <a:r>
-                        <a:rPr lang="en-US" sz="780" b="1" dirty="0">
-                          <a:solidFill>
-                            <a:srgbClr val="267D86"/>
-                          </a:solidFill>
-                          <a:latin typeface="Noto Sans KR" pitchFamily="34" charset="0"/>
-                          <a:ea typeface="Noto Sans KR" pitchFamily="34" charset="-122"/>
-                          <a:cs typeface="Noto Sans KR" pitchFamily="34" charset="-120"/>
-                        </a:rPr>
-                        <a:t>5</a:t>
-                      </a:r>
-                      <a:endParaRPr lang="en-US" sz="780" dirty="0">
-                        <a:latin typeface="Noto Sans KR" charset="0"/>
-                        <a:ea typeface="Noto Sans KR" charset="0"/>
-                        <a:cs typeface="Noto Sans KR" charset="0"/>
-                      </a:endParaRPr>
-                    </a:p>
-                  </a:txBody>
-                  <a:tcPr marL="63500" marR="63500" marT="25400" marB="25400" anchor="ctr">
-                    <a:lnL w="6350" cap="flat" cmpd="sng" algn="ctr">
-                      <a:solidFill>
-                        <a:srgbClr val="CBD5E1"/>
-                      </a:solidFill>
-                      <a:prstDash val="solid"/>
-                      <a:round/>
-                      <a:headEnd type="none" w="med" len="med"/>
-                      <a:tailEnd type="none" w="med" len="med"/>
-                    </a:lnL>
-                    <a:lnR w="6350" cap="flat" cmpd="sng" algn="ctr">
-                      <a:solidFill>
-                        <a:srgbClr val="CBD5E1"/>
-                      </a:solidFill>
-                      <a:prstDash val="solid"/>
-                      <a:round/>
-                      <a:headEnd type="none" w="med" len="med"/>
-                      <a:tailEnd type="none" w="med" len="med"/>
-                    </a:lnR>
-                    <a:lnT w="6350" cap="flat" cmpd="sng" algn="ctr">
-                      <a:solidFill>
-                        <a:srgbClr val="CBD5E1"/>
-                      </a:solidFill>
-                      <a:prstDash val="solid"/>
-                      <a:round/>
-                      <a:headEnd type="none" w="med" len="med"/>
-                      <a:tailEnd type="none" w="med" len="med"/>
-                    </a:lnT>
-                    <a:lnB w="6350" cap="flat" cmpd="sng" algn="ctr">
-                      <a:solidFill>
-                        <a:srgbClr val="CBD5E1"/>
-                      </a:solidFill>
-                      <a:prstDash val="solid"/>
-                      <a:round/>
-                      <a:headEnd type="none" w="med" len="med"/>
-                      <a:tailEnd type="none" w="med" len="med"/>
-                    </a:lnB>
-                  </a:tcPr>
-                </a:tc>
-                <a:tc>
-                  <a:txBody>
-                    <a:bodyPr/>
-                    <a:lstStyle/>
-                    <a:p>
-                      <a:pPr algn="l" indent="0" marL="0">
-                        <a:buNone/>
-                      </a:pPr>
-                      <a:r>
-                        <a:rPr lang="en-US" sz="780" dirty="0">
-                          <a:solidFill>
-                            <a:srgbClr val="334155"/>
-                          </a:solidFill>
-                          <a:latin typeface="Noto Sans KR" pitchFamily="34" charset="0"/>
-                          <a:ea typeface="Noto Sans KR" pitchFamily="34" charset="-122"/>
-                          <a:cs typeface="Noto Sans KR" pitchFamily="34" charset="-120"/>
-                        </a:rPr>
-                        <a:t>어떤 브랜드가 몇 곳쯤 와야 오실 만한가요?</a:t>
-                      </a:r>
-                      <a:endParaRPr lang="en-US" sz="780" dirty="0">
-                        <a:latin typeface="Noto Sans KR" charset="0"/>
-                        <a:ea typeface="Noto Sans KR" charset="0"/>
-                        <a:cs typeface="Noto Sans KR" charset="0"/>
-                      </a:endParaRPr>
-                    </a:p>
-                  </a:txBody>
-                  <a:tcPr marL="63500" marR="63500" marT="25400" marB="25400" anchor="ctr">
-                    <a:lnL w="6350" cap="flat" cmpd="sng" algn="ctr">
-                      <a:solidFill>
-                        <a:srgbClr val="CBD5E1"/>
-                      </a:solidFill>
-                      <a:prstDash val="solid"/>
-                      <a:round/>
-                      <a:headEnd type="none" w="med" len="med"/>
-                      <a:tailEnd type="none" w="med" len="med"/>
-                    </a:lnL>
-                    <a:lnR w="6350" cap="flat" cmpd="sng" algn="ctr">
-                      <a:solidFill>
-                        <a:srgbClr val="CBD5E1"/>
-                      </a:solidFill>
-                      <a:prstDash val="solid"/>
-                      <a:round/>
-                      <a:headEnd type="none" w="med" len="med"/>
-                      <a:tailEnd type="none" w="med" len="med"/>
-                    </a:lnR>
-                    <a:lnT w="6350" cap="flat" cmpd="sng" algn="ctr">
-                      <a:solidFill>
-                        <a:srgbClr val="CBD5E1"/>
-                      </a:solidFill>
-                      <a:prstDash val="solid"/>
-                      <a:round/>
-                      <a:headEnd type="none" w="med" len="med"/>
-                      <a:tailEnd type="none" w="med" len="med"/>
-                    </a:lnT>
-                    <a:lnB w="6350" cap="flat" cmpd="sng" algn="ctr">
-                      <a:solidFill>
-                        <a:srgbClr val="CBD5E1"/>
-                      </a:solidFill>
-                      <a:prstDash val="solid"/>
-                      <a:round/>
-                      <a:headEnd type="none" w="med" len="med"/>
-                      <a:tailEnd type="none" w="med" len="med"/>
-                    </a:lnB>
-                  </a:tcPr>
-                </a:tc>
-                <a:tc>
-                  <a:txBody>
-                    <a:bodyPr/>
-                    <a:lstStyle/>
-                    <a:p>
-                      <a:pPr algn="l" indent="0" marL="0">
-                        <a:buNone/>
-                      </a:pPr>
-                      <a:r>
-                        <a:rPr lang="en-US" sz="780" dirty="0">
-                          <a:solidFill>
-                            <a:srgbClr val="334155"/>
-                          </a:solidFill>
-                          <a:latin typeface="Noto Sans KR" pitchFamily="34" charset="0"/>
-                          <a:ea typeface="Noto Sans KR" pitchFamily="34" charset="-122"/>
-                          <a:cs typeface="Noto Sans KR" pitchFamily="34" charset="-120"/>
-                        </a:rPr>
-                        <a:t> </a:t>
-                      </a:r>
-                      <a:endParaRPr lang="en-US" sz="780" dirty="0">
-                        <a:latin typeface="Noto Sans KR" charset="0"/>
-                        <a:ea typeface="Noto Sans KR" charset="0"/>
-                        <a:cs typeface="Noto Sans KR" charset="0"/>
-                      </a:endParaRPr>
-                    </a:p>
-                  </a:txBody>
-                  <a:tcPr marL="63500" marR="63500" marT="25400" marB="25400" anchor="ctr">
-                    <a:lnL w="6350" cap="flat" cmpd="sng" algn="ctr">
-                      <a:solidFill>
-                        <a:srgbClr val="CBD5E1"/>
-                      </a:solidFill>
-                      <a:prstDash val="solid"/>
-                      <a:round/>
-                      <a:headEnd type="none" w="med" len="med"/>
-                      <a:tailEnd type="none" w="med" len="med"/>
-                    </a:lnL>
-                    <a:lnR w="6350" cap="flat" cmpd="sng" algn="ctr">
-                      <a:solidFill>
-                        <a:srgbClr val="CBD5E1"/>
-                      </a:solidFill>
-                      <a:prstDash val="solid"/>
-                      <a:round/>
-                      <a:headEnd type="none" w="med" len="med"/>
-                      <a:tailEnd type="none" w="med" len="med"/>
-                    </a:lnR>
-                    <a:lnT w="6350" cap="flat" cmpd="sng" algn="ctr">
-                      <a:solidFill>
-                        <a:srgbClr val="CBD5E1"/>
-                      </a:solidFill>
-                      <a:prstDash val="solid"/>
-                      <a:round/>
-                      <a:headEnd type="none" w="med" len="med"/>
-                      <a:tailEnd type="none" w="med" len="med"/>
-                    </a:lnT>
-                    <a:lnB w="6350" cap="flat" cmpd="sng" algn="ctr">
-                      <a:solidFill>
-                        <a:srgbClr val="CBD5E1"/>
-                      </a:solidFill>
-                      <a:prstDash val="solid"/>
-                      <a:round/>
-                      <a:headEnd type="none" w="med" len="med"/>
-                      <a:tailEnd type="none" w="med" len="med"/>
-                    </a:lnB>
-                  </a:tcPr>
-                </a:tc>
-              </a:tr>
-              <a:tr h="283464">
-                <a:tc>
-                  <a:txBody>
-                    <a:bodyPr/>
-                    <a:lstStyle/>
-                    <a:p>
-                      <a:pPr algn="ctr" indent="0" marL="0">
-                        <a:buNone/>
-                      </a:pPr>
-                      <a:r>
-                        <a:rPr lang="en-US" sz="780" b="1" dirty="0">
-                          <a:solidFill>
-                            <a:srgbClr val="267D86"/>
-                          </a:solidFill>
-                          <a:latin typeface="Noto Sans KR" pitchFamily="34" charset="0"/>
-                          <a:ea typeface="Noto Sans KR" pitchFamily="34" charset="-122"/>
-                          <a:cs typeface="Noto Sans KR" pitchFamily="34" charset="-120"/>
-                        </a:rPr>
-                        <a:t>6</a:t>
-                      </a:r>
-                      <a:endParaRPr lang="en-US" sz="780" dirty="0">
-                        <a:latin typeface="Noto Sans KR" charset="0"/>
-                        <a:ea typeface="Noto Sans KR" charset="0"/>
-                        <a:cs typeface="Noto Sans KR" charset="0"/>
-                      </a:endParaRPr>
-                    </a:p>
-                  </a:txBody>
-                  <a:tcPr marL="63500" marR="63500" marT="25400" marB="25400" anchor="ctr">
-                    <a:lnL w="6350" cap="flat" cmpd="sng" algn="ctr">
-                      <a:solidFill>
-                        <a:srgbClr val="CBD5E1"/>
-                      </a:solidFill>
-                      <a:prstDash val="solid"/>
-                      <a:round/>
-                      <a:headEnd type="none" w="med" len="med"/>
-                      <a:tailEnd type="none" w="med" len="med"/>
-                    </a:lnL>
-                    <a:lnR w="6350" cap="flat" cmpd="sng" algn="ctr">
-                      <a:solidFill>
-                        <a:srgbClr val="CBD5E1"/>
-                      </a:solidFill>
-                      <a:prstDash val="solid"/>
-                      <a:round/>
-                      <a:headEnd type="none" w="med" len="med"/>
-                      <a:tailEnd type="none" w="med" len="med"/>
-                    </a:lnR>
-                    <a:lnT w="6350" cap="flat" cmpd="sng" algn="ctr">
-                      <a:solidFill>
-                        <a:srgbClr val="CBD5E1"/>
-                      </a:solidFill>
-                      <a:prstDash val="solid"/>
-                      <a:round/>
-                      <a:headEnd type="none" w="med" len="med"/>
-                      <a:tailEnd type="none" w="med" len="med"/>
-                    </a:lnT>
-                    <a:lnB w="6350" cap="flat" cmpd="sng" algn="ctr">
-                      <a:solidFill>
-                        <a:srgbClr val="CBD5E1"/>
-                      </a:solidFill>
-                      <a:prstDash val="solid"/>
-                      <a:round/>
-                      <a:headEnd type="none" w="med" len="med"/>
-                      <a:tailEnd type="none" w="med" len="med"/>
-                    </a:lnB>
-                  </a:tcPr>
-                </a:tc>
-                <a:tc>
-                  <a:txBody>
-                    <a:bodyPr/>
-                    <a:lstStyle/>
-                    <a:p>
-                      <a:pPr algn="l" indent="0" marL="0">
-                        <a:buNone/>
-                      </a:pPr>
-                      <a:r>
-                        <a:rPr lang="en-US" sz="780" dirty="0">
-                          <a:solidFill>
-                            <a:srgbClr val="334155"/>
-                          </a:solidFill>
-                          <a:latin typeface="Noto Sans KR" pitchFamily="34" charset="0"/>
-                          <a:ea typeface="Noto Sans KR" pitchFamily="34" charset="-122"/>
-                          <a:cs typeface="Noto Sans KR" pitchFamily="34" charset="-120"/>
-                        </a:rPr>
-                        <a:t>상담에서 꼭 확인하고 싶은 조건은? (수량·공급가·반품)</a:t>
-                      </a:r>
-                      <a:endParaRPr lang="en-US" sz="780" dirty="0">
-                        <a:latin typeface="Noto Sans KR" charset="0"/>
-                        <a:ea typeface="Noto Sans KR" charset="0"/>
-                        <a:cs typeface="Noto Sans KR" charset="0"/>
-                      </a:endParaRPr>
-                    </a:p>
-                  </a:txBody>
-                  <a:tcPr marL="63500" marR="63500" marT="25400" marB="25400" anchor="ctr">
-                    <a:lnL w="6350" cap="flat" cmpd="sng" algn="ctr">
-                      <a:solidFill>
-                        <a:srgbClr val="CBD5E1"/>
-                      </a:solidFill>
-                      <a:prstDash val="solid"/>
-                      <a:round/>
-                      <a:headEnd type="none" w="med" len="med"/>
-                      <a:tailEnd type="none" w="med" len="med"/>
-                    </a:lnL>
-                    <a:lnR w="6350" cap="flat" cmpd="sng" algn="ctr">
-                      <a:solidFill>
-                        <a:srgbClr val="CBD5E1"/>
-                      </a:solidFill>
-                      <a:prstDash val="solid"/>
-                      <a:round/>
-                      <a:headEnd type="none" w="med" len="med"/>
-                      <a:tailEnd type="none" w="med" len="med"/>
-                    </a:lnR>
-                    <a:lnT w="6350" cap="flat" cmpd="sng" algn="ctr">
-                      <a:solidFill>
-                        <a:srgbClr val="CBD5E1"/>
-                      </a:solidFill>
-                      <a:prstDash val="solid"/>
-                      <a:round/>
-                      <a:headEnd type="none" w="med" len="med"/>
-                      <a:tailEnd type="none" w="med" len="med"/>
-                    </a:lnT>
-                    <a:lnB w="6350" cap="flat" cmpd="sng" algn="ctr">
-                      <a:solidFill>
-                        <a:srgbClr val="CBD5E1"/>
-                      </a:solidFill>
-                      <a:prstDash val="solid"/>
-                      <a:round/>
-                      <a:headEnd type="none" w="med" len="med"/>
-                      <a:tailEnd type="none" w="med" len="med"/>
-                    </a:lnB>
-                  </a:tcPr>
-                </a:tc>
-                <a:tc>
-                  <a:txBody>
-                    <a:bodyPr/>
-                    <a:lstStyle/>
-                    <a:p>
-                      <a:pPr algn="l" indent="0" marL="0">
-                        <a:buNone/>
-                      </a:pPr>
-                      <a:r>
-                        <a:rPr lang="en-US" sz="780" dirty="0">
-                          <a:solidFill>
-                            <a:srgbClr val="334155"/>
-                          </a:solidFill>
-                          <a:latin typeface="Noto Sans KR" pitchFamily="34" charset="0"/>
-                          <a:ea typeface="Noto Sans KR" pitchFamily="34" charset="-122"/>
-                          <a:cs typeface="Noto Sans KR" pitchFamily="34" charset="-120"/>
-                        </a:rPr>
-                        <a:t> </a:t>
-                      </a:r>
-                      <a:endParaRPr lang="en-US" sz="780" dirty="0">
-                        <a:latin typeface="Noto Sans KR" charset="0"/>
-                        <a:ea typeface="Noto Sans KR" charset="0"/>
-                        <a:cs typeface="Noto Sans KR" charset="0"/>
-                      </a:endParaRPr>
-                    </a:p>
-                  </a:txBody>
-                  <a:tcPr marL="63500" marR="63500" marT="25400" marB="25400" anchor="ctr">
-                    <a:lnL w="6350" cap="flat" cmpd="sng" algn="ctr">
-                      <a:solidFill>
-                        <a:srgbClr val="CBD5E1"/>
-                      </a:solidFill>
-                      <a:prstDash val="solid"/>
-                      <a:round/>
-                      <a:headEnd type="none" w="med" len="med"/>
-                      <a:tailEnd type="none" w="med" len="med"/>
-                    </a:lnL>
-                    <a:lnR w="6350" cap="flat" cmpd="sng" algn="ctr">
-                      <a:solidFill>
-                        <a:srgbClr val="CBD5E1"/>
-                      </a:solidFill>
-                      <a:prstDash val="solid"/>
-                      <a:round/>
-                      <a:headEnd type="none" w="med" len="med"/>
-                      <a:tailEnd type="none" w="med" len="med"/>
-                    </a:lnR>
-                    <a:lnT w="6350" cap="flat" cmpd="sng" algn="ctr">
-                      <a:solidFill>
-                        <a:srgbClr val="CBD5E1"/>
-                      </a:solidFill>
-                      <a:prstDash val="solid"/>
-                      <a:round/>
-                      <a:headEnd type="none" w="med" len="med"/>
-                      <a:tailEnd type="none" w="med" len="med"/>
-                    </a:lnT>
-                    <a:lnB w="6350" cap="flat" cmpd="sng" algn="ctr">
-                      <a:solidFill>
-                        <a:srgbClr val="CBD5E1"/>
-                      </a:solidFill>
-                      <a:prstDash val="solid"/>
-                      <a:round/>
-                      <a:headEnd type="none" w="med" len="med"/>
-                      <a:tailEnd type="none" w="med" len="med"/>
-                    </a:lnB>
-                  </a:tcPr>
-                </a:tc>
-              </a:tr>
-              <a:tr h="283464">
-                <a:tc>
-                  <a:txBody>
-                    <a:bodyPr/>
-                    <a:lstStyle/>
-                    <a:p>
-                      <a:pPr algn="ctr" indent="0" marL="0">
-                        <a:buNone/>
-                      </a:pPr>
-                      <a:r>
-                        <a:rPr lang="en-US" sz="780" b="1" dirty="0">
-                          <a:solidFill>
-                            <a:srgbClr val="267D86"/>
-                          </a:solidFill>
-                          <a:latin typeface="Noto Sans KR" pitchFamily="34" charset="0"/>
-                          <a:ea typeface="Noto Sans KR" pitchFamily="34" charset="-122"/>
-                          <a:cs typeface="Noto Sans KR" pitchFamily="34" charset="-120"/>
-                        </a:rPr>
-                        <a:t>7</a:t>
-                      </a:r>
-                      <a:endParaRPr lang="en-US" sz="780" dirty="0">
-                        <a:latin typeface="Noto Sans KR" charset="0"/>
-                        <a:ea typeface="Noto Sans KR" charset="0"/>
-                        <a:cs typeface="Noto Sans KR" charset="0"/>
-                      </a:endParaRPr>
-                    </a:p>
-                  </a:txBody>
-                  <a:tcPr marL="63500" marR="63500" marT="25400" marB="25400" anchor="ctr">
-                    <a:lnL w="6350" cap="flat" cmpd="sng" algn="ctr">
-                      <a:solidFill>
-                        <a:srgbClr val="CBD5E1"/>
-                      </a:solidFill>
-                      <a:prstDash val="solid"/>
-                      <a:round/>
-                      <a:headEnd type="none" w="med" len="med"/>
-                      <a:tailEnd type="none" w="med" len="med"/>
-                    </a:lnL>
-                    <a:lnR w="6350" cap="flat" cmpd="sng" algn="ctr">
-                      <a:solidFill>
-                        <a:srgbClr val="CBD5E1"/>
-                      </a:solidFill>
-                      <a:prstDash val="solid"/>
-                      <a:round/>
-                      <a:headEnd type="none" w="med" len="med"/>
-                      <a:tailEnd type="none" w="med" len="med"/>
-                    </a:lnR>
-                    <a:lnT w="6350" cap="flat" cmpd="sng" algn="ctr">
-                      <a:solidFill>
-                        <a:srgbClr val="CBD5E1"/>
-                      </a:solidFill>
-                      <a:prstDash val="solid"/>
-                      <a:round/>
-                      <a:headEnd type="none" w="med" len="med"/>
-                      <a:tailEnd type="none" w="med" len="med"/>
-                    </a:lnT>
-                    <a:lnB w="6350" cap="flat" cmpd="sng" algn="ctr">
-                      <a:solidFill>
-                        <a:srgbClr val="CBD5E1"/>
-                      </a:solidFill>
-                      <a:prstDash val="solid"/>
-                      <a:round/>
-                      <a:headEnd type="none" w="med" len="med"/>
-                      <a:tailEnd type="none" w="med" len="med"/>
-                    </a:lnB>
-                  </a:tcPr>
-                </a:tc>
-                <a:tc>
-                  <a:txBody>
-                    <a:bodyPr/>
-                    <a:lstStyle/>
-                    <a:p>
-                      <a:pPr algn="l" indent="0" marL="0">
-                        <a:buNone/>
-                      </a:pPr>
-                      <a:r>
-                        <a:rPr lang="en-US" sz="780" dirty="0">
-                          <a:solidFill>
-                            <a:srgbClr val="334155"/>
-                          </a:solidFill>
-                          <a:latin typeface="Noto Sans KR" pitchFamily="34" charset="0"/>
-                          <a:ea typeface="Noto Sans KR" pitchFamily="34" charset="-122"/>
-                          <a:cs typeface="Noto Sans KR" pitchFamily="34" charset="-120"/>
-                        </a:rPr>
-                        <a:t>이런 행사가 열리면 바이어로 참관하실 의향이 있나요?</a:t>
-                      </a:r>
-                      <a:endParaRPr lang="en-US" sz="780" dirty="0">
-                        <a:latin typeface="Noto Sans KR" charset="0"/>
-                        <a:ea typeface="Noto Sans KR" charset="0"/>
-                        <a:cs typeface="Noto Sans KR" charset="0"/>
-                      </a:endParaRPr>
-                    </a:p>
-                  </a:txBody>
-                  <a:tcPr marL="63500" marR="63500" marT="25400" marB="25400" anchor="ctr">
-                    <a:lnL w="6350" cap="flat" cmpd="sng" algn="ctr">
-                      <a:solidFill>
-                        <a:srgbClr val="CBD5E1"/>
-                      </a:solidFill>
-                      <a:prstDash val="solid"/>
-                      <a:round/>
-                      <a:headEnd type="none" w="med" len="med"/>
-                      <a:tailEnd type="none" w="med" len="med"/>
-                    </a:lnL>
-                    <a:lnR w="6350" cap="flat" cmpd="sng" algn="ctr">
-                      <a:solidFill>
-                        <a:srgbClr val="CBD5E1"/>
-                      </a:solidFill>
-                      <a:prstDash val="solid"/>
-                      <a:round/>
-                      <a:headEnd type="none" w="med" len="med"/>
-                      <a:tailEnd type="none" w="med" len="med"/>
-                    </a:lnR>
-                    <a:lnT w="6350" cap="flat" cmpd="sng" algn="ctr">
-                      <a:solidFill>
-                        <a:srgbClr val="CBD5E1"/>
-                      </a:solidFill>
-                      <a:prstDash val="solid"/>
-                      <a:round/>
-                      <a:headEnd type="none" w="med" len="med"/>
-                      <a:tailEnd type="none" w="med" len="med"/>
-                    </a:lnT>
-                    <a:lnB w="6350" cap="flat" cmpd="sng" algn="ctr">
-                      <a:solidFill>
-                        <a:srgbClr val="CBD5E1"/>
-                      </a:solidFill>
-                      <a:prstDash val="solid"/>
-                      <a:round/>
-                      <a:headEnd type="none" w="med" len="med"/>
-                      <a:tailEnd type="none" w="med" len="med"/>
-                    </a:lnB>
-                  </a:tcPr>
-                </a:tc>
-                <a:tc>
-                  <a:txBody>
-                    <a:bodyPr/>
-                    <a:lstStyle/>
-                    <a:p>
-                      <a:pPr algn="l" indent="0" marL="0">
-                        <a:buNone/>
-                      </a:pPr>
-                      <a:r>
-                        <a:rPr lang="en-US" sz="780" dirty="0">
-                          <a:solidFill>
-                            <a:srgbClr val="334155"/>
-                          </a:solidFill>
-                          <a:latin typeface="Noto Sans KR" pitchFamily="34" charset="0"/>
-                          <a:ea typeface="Noto Sans KR" pitchFamily="34" charset="-122"/>
-                          <a:cs typeface="Noto Sans KR" pitchFamily="34" charset="-120"/>
-                        </a:rPr>
-                        <a:t> </a:t>
-                      </a:r>
-                      <a:endParaRPr lang="en-US" sz="780" dirty="0">
-                        <a:latin typeface="Noto Sans KR" charset="0"/>
-                        <a:ea typeface="Noto Sans KR" charset="0"/>
-                        <a:cs typeface="Noto Sans KR" charset="0"/>
-                      </a:endParaRPr>
-                    </a:p>
-                  </a:txBody>
-                  <a:tcPr marL="63500" marR="63500" marT="25400" marB="25400" anchor="ctr">
-                    <a:lnL w="6350" cap="flat" cmpd="sng" algn="ctr">
-                      <a:solidFill>
-                        <a:srgbClr val="CBD5E1"/>
-                      </a:solidFill>
-                      <a:prstDash val="solid"/>
-                      <a:round/>
-                      <a:headEnd type="none" w="med" len="med"/>
-                      <a:tailEnd type="none" w="med" len="med"/>
-                    </a:lnL>
-                    <a:lnR w="6350" cap="flat" cmpd="sng" algn="ctr">
-                      <a:solidFill>
-                        <a:srgbClr val="CBD5E1"/>
-                      </a:solidFill>
-                      <a:prstDash val="solid"/>
-                      <a:round/>
-                      <a:headEnd type="none" w="med" len="med"/>
-                      <a:tailEnd type="none" w="med" len="med"/>
-                    </a:lnR>
-                    <a:lnT w="6350" cap="flat" cmpd="sng" algn="ctr">
-                      <a:solidFill>
-                        <a:srgbClr val="CBD5E1"/>
-                      </a:solidFill>
-                      <a:prstDash val="solid"/>
-                      <a:round/>
-                      <a:headEnd type="none" w="med" len="med"/>
-                      <a:tailEnd type="none" w="med" len="med"/>
-                    </a:lnT>
-                    <a:lnB w="6350" cap="flat" cmpd="sng" algn="ctr">
-                      <a:solidFill>
-                        <a:srgbClr val="CBD5E1"/>
-                      </a:solidFill>
-                      <a:prstDash val="solid"/>
-                      <a:round/>
-                      <a:headEnd type="none" w="med" len="med"/>
-                      <a:tailEnd type="none" w="med" len="med"/>
-                    </a:lnB>
-                  </a:tcPr>
-                </a:tc>
-              </a:tr>
-              <a:tr h="283464">
-                <a:tc>
-                  <a:txBody>
-                    <a:bodyPr/>
-                    <a:lstStyle/>
-                    <a:p>
-                      <a:pPr algn="ctr" indent="0" marL="0">
-                        <a:buNone/>
-                      </a:pPr>
-                      <a:r>
-                        <a:rPr lang="en-US" sz="780" b="1" dirty="0">
-                          <a:solidFill>
-                            <a:srgbClr val="267D86"/>
-                          </a:solidFill>
-                          <a:latin typeface="Noto Sans KR" pitchFamily="34" charset="0"/>
-                          <a:ea typeface="Noto Sans KR" pitchFamily="34" charset="-122"/>
-                          <a:cs typeface="Noto Sans KR" pitchFamily="34" charset="-120"/>
-                        </a:rPr>
-                        <a:t>8</a:t>
-                      </a:r>
-                      <a:endParaRPr lang="en-US" sz="780" dirty="0">
-                        <a:latin typeface="Noto Sans KR" charset="0"/>
-                        <a:ea typeface="Noto Sans KR" charset="0"/>
-                        <a:cs typeface="Noto Sans KR" charset="0"/>
-                      </a:endParaRPr>
-                    </a:p>
-                  </a:txBody>
-                  <a:tcPr marL="63500" marR="63500" marT="25400" marB="25400" anchor="ctr">
-                    <a:lnL w="6350" cap="flat" cmpd="sng" algn="ctr">
-                      <a:solidFill>
-                        <a:srgbClr val="CBD5E1"/>
-                      </a:solidFill>
-                      <a:prstDash val="solid"/>
-                      <a:round/>
-                      <a:headEnd type="none" w="med" len="med"/>
-                      <a:tailEnd type="none" w="med" len="med"/>
-                    </a:lnL>
-                    <a:lnR w="6350" cap="flat" cmpd="sng" algn="ctr">
-                      <a:solidFill>
-                        <a:srgbClr val="CBD5E1"/>
-                      </a:solidFill>
-                      <a:prstDash val="solid"/>
-                      <a:round/>
-                      <a:headEnd type="none" w="med" len="med"/>
-                      <a:tailEnd type="none" w="med" len="med"/>
-                    </a:lnR>
-                    <a:lnT w="6350" cap="flat" cmpd="sng" algn="ctr">
-                      <a:solidFill>
-                        <a:srgbClr val="CBD5E1"/>
-                      </a:solidFill>
-                      <a:prstDash val="solid"/>
-                      <a:round/>
-                      <a:headEnd type="none" w="med" len="med"/>
-                      <a:tailEnd type="none" w="med" len="med"/>
-                    </a:lnT>
-                    <a:lnB w="6350" cap="flat" cmpd="sng" algn="ctr">
-                      <a:solidFill>
-                        <a:srgbClr val="CBD5E1"/>
-                      </a:solidFill>
-                      <a:prstDash val="solid"/>
-                      <a:round/>
-                      <a:headEnd type="none" w="med" len="med"/>
-                      <a:tailEnd type="none" w="med" len="med"/>
-                    </a:lnB>
-                  </a:tcPr>
-                </a:tc>
-                <a:tc>
-                  <a:txBody>
-                    <a:bodyPr/>
-                    <a:lstStyle/>
-                    <a:p>
-                      <a:pPr algn="l" indent="0" marL="0">
-                        <a:buNone/>
-                      </a:pPr>
-                      <a:r>
-                        <a:rPr lang="en-US" sz="780" dirty="0">
-                          <a:solidFill>
-                            <a:srgbClr val="334155"/>
-                          </a:solidFill>
-                          <a:latin typeface="Noto Sans KR" pitchFamily="34" charset="0"/>
-                          <a:ea typeface="Noto Sans KR" pitchFamily="34" charset="-122"/>
-                          <a:cs typeface="Noto Sans KR" pitchFamily="34" charset="-120"/>
-                        </a:rPr>
-                        <a:t>9월 말~10월 초 일정은 바잉 시기와 맞나요?</a:t>
-                      </a:r>
-                      <a:endParaRPr lang="en-US" sz="780" dirty="0">
-                        <a:latin typeface="Noto Sans KR" charset="0"/>
-                        <a:ea typeface="Noto Sans KR" charset="0"/>
-                        <a:cs typeface="Noto Sans KR" charset="0"/>
-                      </a:endParaRPr>
-                    </a:p>
-                  </a:txBody>
-                  <a:tcPr marL="63500" marR="63500" marT="25400" marB="25400" anchor="ctr">
-                    <a:lnL w="6350" cap="flat" cmpd="sng" algn="ctr">
-                      <a:solidFill>
-                        <a:srgbClr val="CBD5E1"/>
-                      </a:solidFill>
-                      <a:prstDash val="solid"/>
-                      <a:round/>
-                      <a:headEnd type="none" w="med" len="med"/>
-                      <a:tailEnd type="none" w="med" len="med"/>
-                    </a:lnL>
-                    <a:lnR w="6350" cap="flat" cmpd="sng" algn="ctr">
-                      <a:solidFill>
-                        <a:srgbClr val="CBD5E1"/>
-                      </a:solidFill>
-                      <a:prstDash val="solid"/>
-                      <a:round/>
-                      <a:headEnd type="none" w="med" len="med"/>
-                      <a:tailEnd type="none" w="med" len="med"/>
-                    </a:lnR>
-                    <a:lnT w="6350" cap="flat" cmpd="sng" algn="ctr">
-                      <a:solidFill>
-                        <a:srgbClr val="CBD5E1"/>
-                      </a:solidFill>
-                      <a:prstDash val="solid"/>
-                      <a:round/>
-                      <a:headEnd type="none" w="med" len="med"/>
-                      <a:tailEnd type="none" w="med" len="med"/>
-                    </a:lnT>
-                    <a:lnB w="6350" cap="flat" cmpd="sng" algn="ctr">
-                      <a:solidFill>
-                        <a:srgbClr val="CBD5E1"/>
-                      </a:solidFill>
-                      <a:prstDash val="solid"/>
-                      <a:round/>
-                      <a:headEnd type="none" w="med" len="med"/>
-                      <a:tailEnd type="none" w="med" len="med"/>
-                    </a:lnB>
-                  </a:tcPr>
-                </a:tc>
-                <a:tc>
-                  <a:txBody>
-                    <a:bodyPr/>
-                    <a:lstStyle/>
-                    <a:p>
-                      <a:pPr algn="l" indent="0" marL="0">
-                        <a:buNone/>
-                      </a:pPr>
-                      <a:r>
-                        <a:rPr lang="en-US" sz="780" dirty="0">
-                          <a:solidFill>
-                            <a:srgbClr val="334155"/>
-                          </a:solidFill>
-                          <a:latin typeface="Noto Sans KR" pitchFamily="34" charset="0"/>
-                          <a:ea typeface="Noto Sans KR" pitchFamily="34" charset="-122"/>
-                          <a:cs typeface="Noto Sans KR" pitchFamily="34" charset="-120"/>
-                        </a:rPr>
-                        <a:t> </a:t>
-                      </a:r>
-                      <a:endParaRPr lang="en-US" sz="780" dirty="0">
-                        <a:latin typeface="Noto Sans KR" charset="0"/>
-                        <a:ea typeface="Noto Sans KR" charset="0"/>
-                        <a:cs typeface="Noto Sans KR" charset="0"/>
-                      </a:endParaRPr>
-                    </a:p>
-                  </a:txBody>
-                  <a:tcPr marL="63500" marR="63500" marT="25400" marB="25400" anchor="ctr">
-                    <a:lnL w="6350" cap="flat" cmpd="sng" algn="ctr">
-                      <a:solidFill>
-                        <a:srgbClr val="CBD5E1"/>
-                      </a:solidFill>
-                      <a:prstDash val="solid"/>
-                      <a:round/>
-                      <a:headEnd type="none" w="med" len="med"/>
-                      <a:tailEnd type="none" w="med" len="med"/>
-                    </a:lnL>
-                    <a:lnR w="6350" cap="flat" cmpd="sng" algn="ctr">
-                      <a:solidFill>
-                        <a:srgbClr val="CBD5E1"/>
-                      </a:solidFill>
-                      <a:prstDash val="solid"/>
-                      <a:round/>
-                      <a:headEnd type="none" w="med" len="med"/>
-                      <a:tailEnd type="none" w="med" len="med"/>
-                    </a:lnR>
-                    <a:lnT w="6350" cap="flat" cmpd="sng" algn="ctr">
-                      <a:solidFill>
-                        <a:srgbClr val="CBD5E1"/>
-                      </a:solidFill>
-                      <a:prstDash val="solid"/>
-                      <a:round/>
-                      <a:headEnd type="none" w="med" len="med"/>
-                      <a:tailEnd type="none" w="med" len="med"/>
-                    </a:lnT>
-                    <a:lnB w="6350" cap="flat" cmpd="sng" algn="ctr">
-                      <a:solidFill>
-                        <a:srgbClr val="CBD5E1"/>
-                      </a:solidFill>
-                      <a:prstDash val="solid"/>
-                      <a:round/>
-                      <a:headEnd type="none" w="med" len="med"/>
-                      <a:tailEnd type="none" w="med" len="med"/>
-                    </a:lnB>
-                  </a:tcPr>
-                </a:tc>
-              </a:tr>
-              <a:tr h="283464">
-                <a:tc>
-                  <a:txBody>
-                    <a:bodyPr/>
-                    <a:lstStyle/>
-                    <a:p>
-                      <a:pPr algn="ctr" indent="0" marL="0">
-                        <a:buNone/>
-                      </a:pPr>
-                      <a:r>
-                        <a:rPr lang="en-US" sz="780" b="1" dirty="0">
-                          <a:solidFill>
-                            <a:srgbClr val="267D86"/>
-                          </a:solidFill>
-                          <a:latin typeface="Noto Sans KR" pitchFamily="34" charset="0"/>
-                          <a:ea typeface="Noto Sans KR" pitchFamily="34" charset="-122"/>
-                          <a:cs typeface="Noto Sans KR" pitchFamily="34" charset="-120"/>
-                        </a:rPr>
-                        <a:t>9</a:t>
-                      </a:r>
-                      <a:endParaRPr lang="en-US" sz="780" dirty="0">
-                        <a:latin typeface="Noto Sans KR" charset="0"/>
-                        <a:ea typeface="Noto Sans KR" charset="0"/>
-                        <a:cs typeface="Noto Sans KR" charset="0"/>
-                      </a:endParaRPr>
-                    </a:p>
-                  </a:txBody>
-                  <a:tcPr marL="63500" marR="63500" marT="25400" marB="25400" anchor="ctr">
-                    <a:lnL w="6350" cap="flat" cmpd="sng" algn="ctr">
-                      <a:solidFill>
-                        <a:srgbClr val="CBD5E1"/>
-                      </a:solidFill>
-                      <a:prstDash val="solid"/>
-                      <a:round/>
-                      <a:headEnd type="none" w="med" len="med"/>
-                      <a:tailEnd type="none" w="med" len="med"/>
-                    </a:lnL>
-                    <a:lnR w="6350" cap="flat" cmpd="sng" algn="ctr">
-                      <a:solidFill>
-                        <a:srgbClr val="CBD5E1"/>
-                      </a:solidFill>
-                      <a:prstDash val="solid"/>
-                      <a:round/>
-                      <a:headEnd type="none" w="med" len="med"/>
-                      <a:tailEnd type="none" w="med" len="med"/>
-                    </a:lnR>
-                    <a:lnT w="6350" cap="flat" cmpd="sng" algn="ctr">
-                      <a:solidFill>
-                        <a:srgbClr val="CBD5E1"/>
-                      </a:solidFill>
-                      <a:prstDash val="solid"/>
-                      <a:round/>
-                      <a:headEnd type="none" w="med" len="med"/>
-                      <a:tailEnd type="none" w="med" len="med"/>
-                    </a:lnT>
-                    <a:lnB w="6350" cap="flat" cmpd="sng" algn="ctr">
-                      <a:solidFill>
-                        <a:srgbClr val="CBD5E1"/>
-                      </a:solidFill>
-                      <a:prstDash val="solid"/>
-                      <a:round/>
-                      <a:headEnd type="none" w="med" len="med"/>
-                      <a:tailEnd type="none" w="med" len="med"/>
-                    </a:lnB>
-                  </a:tcPr>
-                </a:tc>
-                <a:tc>
-                  <a:txBody>
-                    <a:bodyPr/>
-                    <a:lstStyle/>
-                    <a:p>
-                      <a:pPr algn="l" indent="0" marL="0">
-                        <a:buNone/>
-                      </a:pPr>
-                      <a:r>
-                        <a:rPr lang="en-US" sz="780" dirty="0">
-                          <a:solidFill>
-                            <a:srgbClr val="334155"/>
-                          </a:solidFill>
-                          <a:latin typeface="Noto Sans KR" pitchFamily="34" charset="0"/>
-                          <a:ea typeface="Noto Sans KR" pitchFamily="34" charset="-122"/>
-                          <a:cs typeface="Noto Sans KR" pitchFamily="34" charset="-120"/>
-                        </a:rPr>
-                        <a:t>참관을 망설이게 하는 점이 있다면요?</a:t>
-                      </a:r>
-                      <a:endParaRPr lang="en-US" sz="780" dirty="0">
-                        <a:latin typeface="Noto Sans KR" charset="0"/>
-                        <a:ea typeface="Noto Sans KR" charset="0"/>
-                        <a:cs typeface="Noto Sans KR" charset="0"/>
-                      </a:endParaRPr>
-                    </a:p>
-                  </a:txBody>
-                  <a:tcPr marL="63500" marR="63500" marT="25400" marB="25400" anchor="ctr">
-                    <a:lnL w="6350" cap="flat" cmpd="sng" algn="ctr">
-                      <a:solidFill>
-                        <a:srgbClr val="CBD5E1"/>
-                      </a:solidFill>
-                      <a:prstDash val="solid"/>
-                      <a:round/>
-                      <a:headEnd type="none" w="med" len="med"/>
-                      <a:tailEnd type="none" w="med" len="med"/>
-                    </a:lnL>
-                    <a:lnR w="6350" cap="flat" cmpd="sng" algn="ctr">
-                      <a:solidFill>
-                        <a:srgbClr val="CBD5E1"/>
-                      </a:solidFill>
-                      <a:prstDash val="solid"/>
-                      <a:round/>
-                      <a:headEnd type="none" w="med" len="med"/>
-                      <a:tailEnd type="none" w="med" len="med"/>
-                    </a:lnR>
-                    <a:lnT w="6350" cap="flat" cmpd="sng" algn="ctr">
-                      <a:solidFill>
-                        <a:srgbClr val="CBD5E1"/>
-                      </a:solidFill>
-                      <a:prstDash val="solid"/>
-                      <a:round/>
-                      <a:headEnd type="none" w="med" len="med"/>
-                      <a:tailEnd type="none" w="med" len="med"/>
-                    </a:lnT>
-                    <a:lnB w="6350" cap="flat" cmpd="sng" algn="ctr">
-                      <a:solidFill>
-                        <a:srgbClr val="CBD5E1"/>
-                      </a:solidFill>
-                      <a:prstDash val="solid"/>
-                      <a:round/>
-                      <a:headEnd type="none" w="med" len="med"/>
-                      <a:tailEnd type="none" w="med" len="med"/>
-                    </a:lnB>
-                  </a:tcPr>
-                </a:tc>
-                <a:tc>
-                  <a:txBody>
-                    <a:bodyPr/>
-                    <a:lstStyle/>
-                    <a:p>
-                      <a:pPr algn="l" indent="0" marL="0">
-                        <a:buNone/>
-                      </a:pPr>
-                      <a:r>
-                        <a:rPr lang="en-US" sz="780" dirty="0">
-                          <a:solidFill>
-                            <a:srgbClr val="334155"/>
-                          </a:solidFill>
-                          <a:latin typeface="Noto Sans KR" pitchFamily="34" charset="0"/>
-                          <a:ea typeface="Noto Sans KR" pitchFamily="34" charset="-122"/>
-                          <a:cs typeface="Noto Sans KR" pitchFamily="34" charset="-120"/>
-                        </a:rPr>
-                        <a:t> </a:t>
-                      </a:r>
-                      <a:endParaRPr lang="en-US" sz="780" dirty="0">
-                        <a:latin typeface="Noto Sans KR" charset="0"/>
-                        <a:ea typeface="Noto Sans KR" charset="0"/>
-                        <a:cs typeface="Noto Sans KR" charset="0"/>
-                      </a:endParaRPr>
-                    </a:p>
-                  </a:txBody>
-                  <a:tcPr marL="63500" marR="63500" marT="25400" marB="25400" anchor="ctr">
-                    <a:lnL w="6350" cap="flat" cmpd="sng" algn="ctr">
-                      <a:solidFill>
-                        <a:srgbClr val="CBD5E1"/>
-                      </a:solidFill>
-                      <a:prstDash val="solid"/>
-                      <a:round/>
-                      <a:headEnd type="none" w="med" len="med"/>
-                      <a:tailEnd type="none" w="med" len="med"/>
-                    </a:lnL>
-                    <a:lnR w="6350" cap="flat" cmpd="sng" algn="ctr">
-                      <a:solidFill>
-                        <a:srgbClr val="CBD5E1"/>
-                      </a:solidFill>
-                      <a:prstDash val="solid"/>
-                      <a:round/>
-                      <a:headEnd type="none" w="med" len="med"/>
-                      <a:tailEnd type="none" w="med" len="med"/>
-                    </a:lnR>
-                    <a:lnT w="6350" cap="flat" cmpd="sng" algn="ctr">
-                      <a:solidFill>
-                        <a:srgbClr val="CBD5E1"/>
-                      </a:solidFill>
-                      <a:prstDash val="solid"/>
-                      <a:round/>
-                      <a:headEnd type="none" w="med" len="med"/>
-                      <a:tailEnd type="none" w="med" len="med"/>
-                    </a:lnT>
-                    <a:lnB w="6350" cap="flat" cmpd="sng" algn="ctr">
-                      <a:solidFill>
-                        <a:srgbClr val="CBD5E1"/>
-                      </a:solidFill>
-                      <a:prstDash val="solid"/>
-                      <a:round/>
-                      <a:headEnd type="none" w="med" len="med"/>
-                      <a:tailEnd type="none" w="med" len="med"/>
-                    </a:lnB>
-                  </a:tcPr>
-                </a:tc>
-              </a:tr>
-              <a:tr h="283464">
-                <a:tc>
-                  <a:txBody>
-                    <a:bodyPr/>
-                    <a:lstStyle/>
-                    <a:p>
-                      <a:pPr algn="ctr" indent="0" marL="0">
-                        <a:buNone/>
-                      </a:pPr>
-                      <a:r>
-                        <a:rPr lang="en-US" sz="780" b="1" dirty="0">
-                          <a:solidFill>
-                            <a:srgbClr val="267D86"/>
-                          </a:solidFill>
-                          <a:latin typeface="Noto Sans KR" pitchFamily="34" charset="0"/>
-                          <a:ea typeface="Noto Sans KR" pitchFamily="34" charset="-122"/>
-                          <a:cs typeface="Noto Sans KR" pitchFamily="34" charset="-120"/>
-                        </a:rPr>
-                        <a:t>10</a:t>
-                      </a:r>
-                      <a:endParaRPr lang="en-US" sz="780" dirty="0">
-                        <a:latin typeface="Noto Sans KR" charset="0"/>
-                        <a:ea typeface="Noto Sans KR" charset="0"/>
-                        <a:cs typeface="Noto Sans KR" charset="0"/>
-                      </a:endParaRPr>
-                    </a:p>
-                  </a:txBody>
-                  <a:tcPr marL="63500" marR="63500" marT="25400" marB="25400" anchor="ctr">
-                    <a:lnL w="6350" cap="flat" cmpd="sng" algn="ctr">
-                      <a:solidFill>
-                        <a:srgbClr val="CBD5E1"/>
-                      </a:solidFill>
-                      <a:prstDash val="solid"/>
-                      <a:round/>
-                      <a:headEnd type="none" w="med" len="med"/>
-                      <a:tailEnd type="none" w="med" len="med"/>
-                    </a:lnL>
-                    <a:lnR w="6350" cap="flat" cmpd="sng" algn="ctr">
-                      <a:solidFill>
-                        <a:srgbClr val="CBD5E1"/>
-                      </a:solidFill>
-                      <a:prstDash val="solid"/>
-                      <a:round/>
-                      <a:headEnd type="none" w="med" len="med"/>
-                      <a:tailEnd type="none" w="med" len="med"/>
-                    </a:lnR>
-                    <a:lnT w="6350" cap="flat" cmpd="sng" algn="ctr">
-                      <a:solidFill>
-                        <a:srgbClr val="CBD5E1"/>
-                      </a:solidFill>
-                      <a:prstDash val="solid"/>
-                      <a:round/>
-                      <a:headEnd type="none" w="med" len="med"/>
-                      <a:tailEnd type="none" w="med" len="med"/>
-                    </a:lnT>
-                    <a:lnB w="6350" cap="flat" cmpd="sng" algn="ctr">
-                      <a:solidFill>
-                        <a:srgbClr val="CBD5E1"/>
-                      </a:solidFill>
-                      <a:prstDash val="solid"/>
-                      <a:round/>
-                      <a:headEnd type="none" w="med" len="med"/>
-                      <a:tailEnd type="none" w="med" len="med"/>
-                    </a:lnB>
-                  </a:tcPr>
-                </a:tc>
-                <a:tc>
-                  <a:txBody>
-                    <a:bodyPr/>
-                    <a:lstStyle/>
-                    <a:p>
-                      <a:pPr algn="l" indent="0" marL="0">
-                        <a:buNone/>
-                      </a:pPr>
-                      <a:r>
-                        <a:rPr lang="en-US" sz="780" dirty="0">
-                          <a:solidFill>
-                            <a:srgbClr val="334155"/>
-                          </a:solidFill>
-                          <a:latin typeface="Noto Sans KR" pitchFamily="34" charset="0"/>
-                          <a:ea typeface="Noto Sans KR" pitchFamily="34" charset="-122"/>
-                          <a:cs typeface="Noto Sans KR" pitchFamily="34" charset="-120"/>
-                        </a:rPr>
-                        <a:t>바이어에게 꼭 필요한 것 한 가지를 꼽는다면?</a:t>
-                      </a:r>
-                      <a:endParaRPr lang="en-US" sz="780" dirty="0">
-                        <a:latin typeface="Noto Sans KR" charset="0"/>
-                        <a:ea typeface="Noto Sans KR" charset="0"/>
-                        <a:cs typeface="Noto Sans KR" charset="0"/>
-                      </a:endParaRPr>
-                    </a:p>
-                  </a:txBody>
-                  <a:tcPr marL="63500" marR="63500" marT="25400" marB="25400" anchor="ctr">
-                    <a:lnL w="6350" cap="flat" cmpd="sng" algn="ctr">
-                      <a:solidFill>
-                        <a:srgbClr val="CBD5E1"/>
-                      </a:solidFill>
-                      <a:prstDash val="solid"/>
-                      <a:round/>
-                      <a:headEnd type="none" w="med" len="med"/>
-                      <a:tailEnd type="none" w="med" len="med"/>
-                    </a:lnL>
-                    <a:lnR w="6350" cap="flat" cmpd="sng" algn="ctr">
-                      <a:solidFill>
-                        <a:srgbClr val="CBD5E1"/>
-                      </a:solidFill>
-                      <a:prstDash val="solid"/>
-                      <a:round/>
-                      <a:headEnd type="none" w="med" len="med"/>
-                      <a:tailEnd type="none" w="med" len="med"/>
-                    </a:lnR>
-                    <a:lnT w="6350" cap="flat" cmpd="sng" algn="ctr">
-                      <a:solidFill>
-                        <a:srgbClr val="CBD5E1"/>
-                      </a:solidFill>
-                      <a:prstDash val="solid"/>
-                      <a:round/>
-                      <a:headEnd type="none" w="med" len="med"/>
-                      <a:tailEnd type="none" w="med" len="med"/>
-                    </a:lnT>
-                    <a:lnB w="6350" cap="flat" cmpd="sng" algn="ctr">
-                      <a:solidFill>
-                        <a:srgbClr val="CBD5E1"/>
-                      </a:solidFill>
-                      <a:prstDash val="solid"/>
-                      <a:round/>
-                      <a:headEnd type="none" w="med" len="med"/>
-                      <a:tailEnd type="none" w="med" len="med"/>
-                    </a:lnB>
-                  </a:tcPr>
-                </a:tc>
-                <a:tc>
-                  <a:txBody>
-                    <a:bodyPr/>
-                    <a:lstStyle/>
-                    <a:p>
-                      <a:pPr algn="l" indent="0" marL="0">
-                        <a:buNone/>
-                      </a:pPr>
-                      <a:r>
-                        <a:rPr lang="en-US" sz="780" dirty="0">
-                          <a:solidFill>
-                            <a:srgbClr val="334155"/>
-                          </a:solidFill>
-                          <a:latin typeface="Noto Sans KR" pitchFamily="34" charset="0"/>
-                          <a:ea typeface="Noto Sans KR" pitchFamily="34" charset="-122"/>
-                          <a:cs typeface="Noto Sans KR" pitchFamily="34" charset="-120"/>
-                        </a:rPr>
-                        <a:t> </a:t>
-                      </a:r>
-                      <a:endParaRPr lang="en-US" sz="780" dirty="0">
-                        <a:latin typeface="Noto Sans KR" charset="0"/>
-                        <a:ea typeface="Noto Sans KR" charset="0"/>
-                        <a:cs typeface="Noto Sans KR" charset="0"/>
-                      </a:endParaRPr>
-                    </a:p>
-                  </a:txBody>
-                  <a:tcPr marL="63500" marR="63500" marT="25400" marB="25400" anchor="ctr">
+                  <a:tcPr marL="76200" marR="76200" marT="38100" marB="38100" anchor="ctr">
                     <a:lnL w="6350" cap="flat" cmpd="sng" algn="ctr">
                       <a:solidFill>
                         <a:srgbClr val="CBD5E1"/>
@@ -39256,37 +37181,387 @@
       </p:graphicFrame>
       <p:sp>
         <p:nvSpPr>
-          <p:cNvPr id="18" name="통화 후 반영"/>
+          <p:cNvPr id="9" name="제목 연결되지 않은 이유"/>
           <p:cNvSpPr txBox="1"/>
           <p:nvPr/>
         </p:nvSpPr>
         <p:spPr>
           <a:xfrm>
-            <a:off x="4864608" y="5527163"/>
-            <a:ext cx="6711696" cy="745621"/>
+            <a:off x="612648" y="3451149"/>
+            <a:ext cx="3532632" cy="237744"/>
+          </a:xfrm>
+          <a:prstGeom prst="rect">
+            <a:avLst/>
+          </a:prstGeom>
+          <a:noFill/>
+          <a:ln/>
+        </p:spPr>
+        <p:txBody>
+          <a:bodyPr wrap="square" lIns="0" tIns="0" rIns="0" bIns="0" rtlCol="0" anchor="ctr"/>
+          <a:lstStyle/>
+          <a:p>
+            <a:pPr algn="l" indent="0" marL="0">
+              <a:lnSpc>
+                <a:spcPct val="100000"/>
+              </a:lnSpc>
+              <a:buNone/>
+            </a:pPr>
+            <a:r>
+              <a:rPr lang="en-US" sz="1050" b="1" dirty="0">
+                <a:solidFill>
+                  <a:srgbClr val="182F48"/>
+                </a:solidFill>
+                <a:latin typeface="Noto Sans KR" pitchFamily="34" charset="0"/>
+                <a:ea typeface="Noto Sans KR" pitchFamily="34" charset="-122"/>
+                <a:cs typeface="Noto Sans KR" pitchFamily="34" charset="-120"/>
+              </a:rPr>
+              <a:t>연결되지 않은 이유</a:t>
+            </a:r>
+            <a:endParaRPr lang="en-US" sz="1050" dirty="0"/>
+          </a:p>
+        </p:txBody>
+      </p:sp>
+      <p:sp>
+        <p:nvSpPr>
+          <p:cNvPr id="10" name="제목 알게 된 것 · 기획 반영"/>
+          <p:cNvSpPr txBox="1"/>
+          <p:nvPr/>
+        </p:nvSpPr>
+        <p:spPr>
+          <a:xfrm>
+            <a:off x="4328160" y="3451149"/>
+            <a:ext cx="3532632" cy="237744"/>
+          </a:xfrm>
+          <a:prstGeom prst="rect">
+            <a:avLst/>
+          </a:prstGeom>
+          <a:noFill/>
+          <a:ln/>
+        </p:spPr>
+        <p:txBody>
+          <a:bodyPr wrap="square" lIns="0" tIns="0" rIns="0" bIns="0" rtlCol="0" anchor="ctr"/>
+          <a:lstStyle/>
+          <a:p>
+            <a:pPr algn="l" indent="0" marL="0">
+              <a:lnSpc>
+                <a:spcPct val="100000"/>
+              </a:lnSpc>
+              <a:buNone/>
+            </a:pPr>
+            <a:r>
+              <a:rPr lang="en-US" sz="1050" b="1" dirty="0">
+                <a:solidFill>
+                  <a:srgbClr val="182F48"/>
+                </a:solidFill>
+                <a:latin typeface="Noto Sans KR" pitchFamily="34" charset="0"/>
+                <a:ea typeface="Noto Sans KR" pitchFamily="34" charset="-122"/>
+                <a:cs typeface="Noto Sans KR" pitchFamily="34" charset="-120"/>
+              </a:rPr>
+              <a:t>알게 된 것 · 기획 반영</a:t>
+            </a:r>
+            <a:endParaRPr lang="en-US" sz="1050" dirty="0"/>
+          </a:p>
+        </p:txBody>
+      </p:sp>
+      <p:sp>
+        <p:nvSpPr>
+          <p:cNvPr id="11" name="제목 대신 확인한 자료"/>
+          <p:cNvSpPr txBox="1"/>
+          <p:nvPr/>
+        </p:nvSpPr>
+        <p:spPr>
+          <a:xfrm>
+            <a:off x="8043672" y="3451149"/>
+            <a:ext cx="3532632" cy="237744"/>
+          </a:xfrm>
+          <a:prstGeom prst="rect">
+            <a:avLst/>
+          </a:prstGeom>
+          <a:noFill/>
+          <a:ln/>
+        </p:spPr>
+        <p:txBody>
+          <a:bodyPr wrap="square" lIns="0" tIns="0" rIns="0" bIns="0" rtlCol="0" anchor="ctr"/>
+          <a:lstStyle/>
+          <a:p>
+            <a:pPr algn="l" indent="0" marL="0">
+              <a:lnSpc>
+                <a:spcPct val="100000"/>
+              </a:lnSpc>
+              <a:buNone/>
+            </a:pPr>
+            <a:r>
+              <a:rPr lang="en-US" sz="1050" b="1" dirty="0">
+                <a:solidFill>
+                  <a:srgbClr val="182F48"/>
+                </a:solidFill>
+                <a:latin typeface="Noto Sans KR" pitchFamily="34" charset="0"/>
+                <a:ea typeface="Noto Sans KR" pitchFamily="34" charset="-122"/>
+                <a:cs typeface="Noto Sans KR" pitchFamily="34" charset="-120"/>
+              </a:rPr>
+              <a:t>대신 확인한 자료</a:t>
+            </a:r>
+            <a:endParaRPr lang="en-US" sz="1050" dirty="0"/>
+          </a:p>
+        </p:txBody>
+      </p:sp>
+      <p:sp>
+        <p:nvSpPr>
+          <p:cNvPr id="12" name="연결 불가 이유"/>
+          <p:cNvSpPr txBox="1"/>
+          <p:nvPr/>
+        </p:nvSpPr>
+        <p:spPr>
+          <a:xfrm>
+            <a:off x="612648" y="3743757"/>
+            <a:ext cx="3532632" cy="1481328"/>
+          </a:xfrm>
+          <a:prstGeom prst="rect">
+            <a:avLst/>
+          </a:prstGeom>
+          <a:noFill/>
+          <a:ln/>
+        </p:spPr>
+        <p:txBody>
+          <a:bodyPr wrap="square" lIns="0" tIns="0" rIns="0" bIns="0" rtlCol="0" anchor="t"/>
+          <a:lstStyle/>
+          <a:p>
+            <a:pPr algn="l" indent="0" marL="0">
+              <a:lnSpc>
+                <a:spcPct val="95000"/>
+              </a:lnSpc>
+              <a:spcAft>
+                <a:spcPts val="100"/>
+              </a:spcAft>
+              <a:buNone/>
+            </a:pPr>
+            <a:r>
+              <a:rPr lang="en-US" sz="780" b="1" dirty="0">
+                <a:solidFill>
+                  <a:srgbClr val="182F48"/>
+                </a:solidFill>
+                <a:latin typeface="Noto Sans KR" pitchFamily="34" charset="0"/>
+                <a:ea typeface="Noto Sans KR" pitchFamily="34" charset="-122"/>
+                <a:cs typeface="Noto Sans KR" pitchFamily="34" charset="-120"/>
+              </a:rPr>
+              <a:t>① 직통 번호가 없다</a:t>
+            </a:r>
+            <a:endParaRPr lang="en-US" sz="780" dirty="0"/>
+          </a:p>
+          <a:p>
+            <a:pPr algn="l" indent="0" marL="0">
+              <a:lnSpc>
+                <a:spcPct val="95000"/>
+              </a:lnSpc>
+              <a:spcAft>
+                <a:spcPts val="100"/>
+              </a:spcAft>
+              <a:buNone/>
+            </a:pPr>
+            <a:r>
+              <a:rPr lang="en-US" sz="780" dirty="0">
+                <a:solidFill>
+                  <a:srgbClr val="334155"/>
+                </a:solidFill>
+                <a:latin typeface="Noto Sans KR" pitchFamily="34" charset="0"/>
+                <a:ea typeface="Noto Sans KR" pitchFamily="34" charset="-122"/>
+                <a:cs typeface="Noto Sans KR" pitchFamily="34" charset="-120"/>
+              </a:rPr>
+              <a:t>바이어·MD 연락처는 공개돼 있지 않고,</a:t>
+            </a:r>
+            <a:endParaRPr lang="en-US" sz="780" dirty="0"/>
+          </a:p>
+          <a:p>
+            <a:pPr algn="l" indent="0" marL="0">
+              <a:lnSpc>
+                <a:spcPct val="95000"/>
+              </a:lnSpc>
+              <a:spcAft>
+                <a:spcPts val="100"/>
+              </a:spcAft>
+              <a:buNone/>
+            </a:pPr>
+            <a:r>
+              <a:rPr lang="en-US" sz="780" dirty="0">
+                <a:solidFill>
+                  <a:srgbClr val="334155"/>
+                </a:solidFill>
+                <a:latin typeface="Noto Sans KR" pitchFamily="34" charset="0"/>
+                <a:ea typeface="Noto Sans KR" pitchFamily="34" charset="-122"/>
+                <a:cs typeface="Noto Sans KR" pitchFamily="34" charset="-120"/>
+              </a:rPr>
+              <a:t>공개된 번호는 매장이나 고객센터로 이어진다.</a:t>
+            </a:r>
+            <a:endParaRPr lang="en-US" sz="780" dirty="0"/>
+          </a:p>
+          <a:p>
+            <a:pPr algn="l" indent="0" marL="0">
+              <a:lnSpc>
+                <a:spcPct val="95000"/>
+              </a:lnSpc>
+              <a:spcAft>
+                <a:spcPts val="100"/>
+              </a:spcAft>
+              <a:buNone/>
+            </a:pPr>
+            <a:r>
+              <a:rPr lang="en-US" sz="780" b="1" dirty="0">
+                <a:solidFill>
+                  <a:srgbClr val="182F48"/>
+                </a:solidFill>
+                <a:latin typeface="Noto Sans KR" pitchFamily="34" charset="0"/>
+                <a:ea typeface="Noto Sans KR" pitchFamily="34" charset="-122"/>
+                <a:cs typeface="Noto Sans KR" pitchFamily="34" charset="-120"/>
+              </a:rPr>
+              <a:t>② 고객센터는 소비자 문의만 받는다</a:t>
+            </a:r>
+            <a:endParaRPr lang="en-US" sz="780" dirty="0"/>
+          </a:p>
+          <a:p>
+            <a:pPr algn="l" indent="0" marL="0">
+              <a:lnSpc>
+                <a:spcPct val="95000"/>
+              </a:lnSpc>
+              <a:spcAft>
+                <a:spcPts val="100"/>
+              </a:spcAft>
+              <a:buNone/>
+            </a:pPr>
+            <a:r>
+              <a:rPr lang="en-US" sz="780" dirty="0">
+                <a:solidFill>
+                  <a:srgbClr val="334155"/>
+                </a:solidFill>
+                <a:latin typeface="Noto Sans KR" pitchFamily="34" charset="0"/>
+                <a:ea typeface="Noto Sans KR" pitchFamily="34" charset="-122"/>
+                <a:cs typeface="Noto Sans KR" pitchFamily="34" charset="-120"/>
+              </a:rPr>
+              <a:t>주문·배송·반품 외 문의는 담당 부서로 넘겨 주지 않는다.</a:t>
+            </a:r>
+            <a:endParaRPr lang="en-US" sz="780" dirty="0"/>
+          </a:p>
+          <a:p>
+            <a:pPr algn="l" indent="0" marL="0">
+              <a:lnSpc>
+                <a:spcPct val="95000"/>
+              </a:lnSpc>
+              <a:spcAft>
+                <a:spcPts val="100"/>
+              </a:spcAft>
+              <a:buNone/>
+            </a:pPr>
+            <a:r>
+              <a:rPr lang="en-US" sz="780" b="1" dirty="0">
+                <a:solidFill>
+                  <a:srgbClr val="182F48"/>
+                </a:solidFill>
+                <a:latin typeface="Noto Sans KR" pitchFamily="34" charset="0"/>
+                <a:ea typeface="Noto Sans KR" pitchFamily="34" charset="-122"/>
+                <a:cs typeface="Noto Sans KR" pitchFamily="34" charset="-120"/>
+              </a:rPr>
+              <a:t>③ 매장과 바잉은 하는 사람이 다르다</a:t>
+            </a:r>
+            <a:endParaRPr lang="en-US" sz="780" dirty="0"/>
+          </a:p>
+          <a:p>
+            <a:pPr algn="l" indent="0" marL="0">
+              <a:lnSpc>
+                <a:spcPct val="95000"/>
+              </a:lnSpc>
+              <a:spcAft>
+                <a:spcPts val="100"/>
+              </a:spcAft>
+              <a:buNone/>
+            </a:pPr>
+            <a:r>
+              <a:rPr lang="en-US" sz="780" dirty="0">
+                <a:solidFill>
+                  <a:srgbClr val="334155"/>
+                </a:solidFill>
+                <a:latin typeface="Noto Sans KR" pitchFamily="34" charset="0"/>
+                <a:ea typeface="Noto Sans KR" pitchFamily="34" charset="-122"/>
+                <a:cs typeface="Noto Sans KR" pitchFamily="34" charset="-120"/>
+              </a:rPr>
+              <a:t>매장 직원은 판매를 맡고, 브랜드 선정은 본사가 한다.</a:t>
+            </a:r>
+            <a:endParaRPr lang="en-US" sz="780" dirty="0"/>
+          </a:p>
+          <a:p>
+            <a:pPr algn="l" indent="0" marL="0">
+              <a:lnSpc>
+                <a:spcPct val="95000"/>
+              </a:lnSpc>
+              <a:spcAft>
+                <a:spcPts val="100"/>
+              </a:spcAft>
+              <a:buNone/>
+            </a:pPr>
+            <a:r>
+              <a:rPr lang="en-US" sz="780" b="1" dirty="0">
+                <a:solidFill>
+                  <a:srgbClr val="182F48"/>
+                </a:solidFill>
+                <a:latin typeface="Noto Sans KR" pitchFamily="34" charset="0"/>
+                <a:ea typeface="Noto Sans KR" pitchFamily="34" charset="-122"/>
+                <a:cs typeface="Noto Sans KR" pitchFamily="34" charset="-120"/>
+              </a:rPr>
+              <a:t>④ 공식 창구는 입점 신청뿐이다</a:t>
+            </a:r>
+            <a:endParaRPr lang="en-US" sz="780" dirty="0"/>
+          </a:p>
+          <a:p>
+            <a:pPr algn="l" indent="0" marL="0">
+              <a:lnSpc>
+                <a:spcPct val="95000"/>
+              </a:lnSpc>
+              <a:spcAft>
+                <a:spcPts val="100"/>
+              </a:spcAft>
+              <a:buNone/>
+            </a:pPr>
+            <a:r>
+              <a:rPr lang="en-US" sz="780" dirty="0">
+                <a:solidFill>
+                  <a:srgbClr val="334155"/>
+                </a:solidFill>
+                <a:latin typeface="Noto Sans KR" pitchFamily="34" charset="0"/>
+                <a:ea typeface="Noto Sans KR" pitchFamily="34" charset="-122"/>
+                <a:cs typeface="Noto Sans KR" pitchFamily="34" charset="-120"/>
+              </a:rPr>
+              <a:t>거래 목적이 아닌 질문은 받아 줄 창구가 없다.</a:t>
+            </a:r>
+            <a:endParaRPr lang="en-US" sz="780" dirty="0"/>
+          </a:p>
+        </p:txBody>
+      </p:sp>
+      <p:sp>
+        <p:nvSpPr>
+          <p:cNvPr id="13" name="알게 된 것"/>
+          <p:cNvSpPr txBox="1"/>
+          <p:nvPr/>
+        </p:nvSpPr>
+        <p:spPr>
+          <a:xfrm>
+            <a:off x="4328160" y="3743757"/>
+            <a:ext cx="3532632" cy="1481328"/>
           </a:xfrm>
           <a:prstGeom prst="roundRect">
             <a:avLst>
-              <a:gd name="adj" fmla="val 6132"/>
+              <a:gd name="adj" fmla="val 3086"/>
             </a:avLst>
           </a:prstGeom>
           <a:solidFill>
-            <a:srgbClr val="FFFFFF"/>
+            <a:srgbClr val="E6F2F3"/>
           </a:solidFill>
-          <a:ln w="9525">
-            <a:solidFill>
-              <a:srgbClr val="CBD5E1"/>
-            </a:solidFill>
-            <a:prstDash val="solid"/>
-          </a:ln>
+          <a:ln/>
         </p:spPr>
         <p:txBody>
-          <a:bodyPr wrap="square" lIns="91440" tIns="0" rIns="91440" bIns="0" rtlCol="0" anchor="t"/>
+          <a:bodyPr wrap="square" lIns="91440" tIns="0" rIns="91440" bIns="0" rtlCol="0" anchor="ctr"/>
           <a:lstStyle/>
           <a:p>
             <a:pPr algn="l" indent="0" marL="0">
               <a:lnSpc>
-                <a:spcPct val="100000"/>
+                <a:spcPct val="95000"/>
               </a:lnSpc>
               <a:spcAft>
                 <a:spcPts val="200"/>
@@ -39294,22 +37569,22 @@
               <a:buNone/>
             </a:pPr>
             <a:r>
-              <a:rPr lang="en-US" sz="800" b="1" dirty="0">
-                <a:solidFill>
-                  <a:srgbClr val="182F48"/>
-                </a:solidFill>
-                <a:latin typeface="Noto Sans KR" pitchFamily="34" charset="0"/>
-                <a:ea typeface="Noto Sans KR" pitchFamily="34" charset="-122"/>
-                <a:cs typeface="Noto Sans KR" pitchFamily="34" charset="-120"/>
-              </a:rPr>
-              <a:t>기획에 반영할 점 · 더 확인할 점</a:t>
-            </a:r>
-            <a:endParaRPr lang="en-US" sz="800" dirty="0"/>
-          </a:p>
-          <a:p>
-            <a:pPr algn="l" indent="0" marL="0">
-              <a:lnSpc>
-                <a:spcPct val="100000"/>
+              <a:rPr lang="en-US" sz="780" dirty="0">
+                <a:solidFill>
+                  <a:srgbClr val="334155"/>
+                </a:solidFill>
+                <a:latin typeface="Noto Sans KR" pitchFamily="34" charset="0"/>
+                <a:ea typeface="Noto Sans KR" pitchFamily="34" charset="-122"/>
+                <a:cs typeface="Noto Sans KR" pitchFamily="34" charset="-120"/>
+              </a:rPr>
+              <a:t>실무 바이어에게는 콜드콜로 닿기 어렵다.</a:t>
+            </a:r>
+            <a:endParaRPr lang="en-US" sz="780" dirty="0"/>
+          </a:p>
+          <a:p>
+            <a:pPr algn="l" indent="0" marL="0">
+              <a:lnSpc>
+                <a:spcPct val="95000"/>
               </a:lnSpc>
               <a:spcAft>
                 <a:spcPts val="200"/>
@@ -39317,7 +37592,122 @@
               <a:buNone/>
             </a:pPr>
             <a:r>
-              <a:rPr lang="en-US" sz="800" dirty="0">
+              <a:rPr lang="en-US" sz="780" dirty="0">
+                <a:solidFill>
+                  <a:srgbClr val="334155"/>
+                </a:solidFill>
+                <a:latin typeface="Noto Sans KR" pitchFamily="34" charset="0"/>
+                <a:ea typeface="Noto Sans KR" pitchFamily="34" charset="-122"/>
+                <a:cs typeface="Noto Sans KR" pitchFamily="34" charset="-120"/>
+              </a:rPr>
+              <a:t>신진 K-브랜드도 같은 벽 앞에 서 있다는 뜻이다.</a:t>
+            </a:r>
+            <a:endParaRPr lang="en-US" sz="780" dirty="0"/>
+          </a:p>
+          <a:p>
+            <a:pPr algn="l" indent="0" marL="0">
+              <a:lnSpc>
+                <a:spcPct val="95000"/>
+              </a:lnSpc>
+              <a:spcAft>
+                <a:spcPts val="200"/>
+              </a:spcAft>
+              <a:buNone/>
+            </a:pPr>
+            <a:r>
+              <a:rPr lang="en-US" sz="780" dirty="0">
+                <a:solidFill>
+                  <a:srgbClr val="334155"/>
+                </a:solidFill>
+                <a:latin typeface="Noto Sans KR" pitchFamily="34" charset="0"/>
+                <a:ea typeface="Noto Sans KR" pitchFamily="34" charset="-122"/>
+                <a:cs typeface="Noto Sans KR" pitchFamily="34" charset="-120"/>
+              </a:rPr>
+              <a:t>바이어를 만나려면 소개나 플랫폼 행사를 거쳐야 한다.</a:t>
+            </a:r>
+            <a:endParaRPr lang="en-US" sz="780" dirty="0"/>
+          </a:p>
+          <a:p>
+            <a:pPr algn="l" indent="0" marL="0">
+              <a:lnSpc>
+                <a:spcPct val="95000"/>
+              </a:lnSpc>
+              <a:spcAft>
+                <a:spcPts val="200"/>
+              </a:spcAft>
+              <a:buNone/>
+            </a:pPr>
+            <a:r>
+              <a:rPr lang="en-US" sz="780" b="1" dirty="0">
+                <a:solidFill>
+                  <a:srgbClr val="267D86"/>
+                </a:solidFill>
+                <a:latin typeface="Noto Sans KR" pitchFamily="34" charset="0"/>
+                <a:ea typeface="Noto Sans KR" pitchFamily="34" charset="-122"/>
+                <a:cs typeface="Noto Sans KR" pitchFamily="34" charset="-120"/>
+              </a:rPr>
+              <a:t>→ 기획 반영</a:t>
+            </a:r>
+            <a:endParaRPr lang="en-US" sz="780" dirty="0"/>
+          </a:p>
+          <a:p>
+            <a:pPr algn="l" indent="0" marL="0">
+              <a:lnSpc>
+                <a:spcPct val="95000"/>
+              </a:lnSpc>
+              <a:spcAft>
+                <a:spcPts val="200"/>
+              </a:spcAft>
+              <a:buNone/>
+            </a:pPr>
+            <a:r>
+              <a:rPr lang="en-US" sz="780" dirty="0">
+                <a:solidFill>
+                  <a:srgbClr val="334155"/>
+                </a:solidFill>
+                <a:latin typeface="Noto Sans KR" pitchFamily="34" charset="0"/>
+                <a:ea typeface="Noto Sans KR" pitchFamily="34" charset="-122"/>
+                <a:cs typeface="Noto Sans KR" pitchFamily="34" charset="-120"/>
+              </a:rPr>
+              <a:t>트레이드 데이에서 바이어를 미리 등록받고,</a:t>
+            </a:r>
+            <a:endParaRPr lang="en-US" sz="780" dirty="0"/>
+          </a:p>
+          <a:p>
+            <a:pPr algn="l" indent="0" marL="0">
+              <a:lnSpc>
+                <a:spcPct val="95000"/>
+              </a:lnSpc>
+              <a:spcAft>
+                <a:spcPts val="200"/>
+              </a:spcAft>
+              <a:buNone/>
+            </a:pPr>
+            <a:r>
+              <a:rPr lang="en-US" sz="780" dirty="0">
+                <a:solidFill>
+                  <a:srgbClr val="334155"/>
+                </a:solidFill>
+                <a:latin typeface="Noto Sans KR" pitchFamily="34" charset="0"/>
+                <a:ea typeface="Noto Sans KR" pitchFamily="34" charset="-122"/>
+                <a:cs typeface="Noto Sans KR" pitchFamily="34" charset="-120"/>
+              </a:rPr>
+              <a:t>1:1 상담을 주최 측이 잡아 주는 이유가 여기에 있다.</a:t>
+            </a:r>
+            <a:endParaRPr lang="en-US" sz="780" dirty="0"/>
+          </a:p>
+          <a:p>
+            <a:pPr algn="l" indent="0" marL="0">
+              <a:lnSpc>
+                <a:spcPct val="95000"/>
+              </a:lnSpc>
+              <a:spcAft>
+                <a:spcPts val="200"/>
+              </a:spcAft>
+              <a:buNone/>
+            </a:pPr>
+            <a:r>
+              <a:rPr lang="en-US" sz="780" dirty="0">
                 <a:solidFill>
                   <a:srgbClr val="64748B"/>
                 </a:solidFill>
@@ -39325,9 +37715,344 @@
                 <a:ea typeface="Noto Sans KR" pitchFamily="34" charset="-122"/>
                 <a:cs typeface="Noto Sans KR" pitchFamily="34" charset="-120"/>
               </a:rPr>
-              <a:t>( 통화 후 기입 )</a:t>
-            </a:r>
-            <a:endParaRPr lang="en-US" sz="800" dirty="0"/>
+              <a:t>(3장 목표 2 · 5장 거래 연결표)</a:t>
+            </a:r>
+            <a:endParaRPr lang="en-US" sz="780" dirty="0"/>
+          </a:p>
+        </p:txBody>
+      </p:sp>
+      <p:sp>
+        <p:nvSpPr>
+          <p:cNvPr id="14" name="대체 자료"/>
+          <p:cNvSpPr txBox="1"/>
+          <p:nvPr/>
+        </p:nvSpPr>
+        <p:spPr>
+          <a:xfrm>
+            <a:off x="8043672" y="3743757"/>
+            <a:ext cx="3532632" cy="1481328"/>
+          </a:xfrm>
+          <a:prstGeom prst="rect">
+            <a:avLst/>
+          </a:prstGeom>
+          <a:noFill/>
+          <a:ln/>
+        </p:spPr>
+        <p:txBody>
+          <a:bodyPr wrap="square" lIns="0" tIns="0" rIns="0" bIns="0" rtlCol="0" anchor="t"/>
+          <a:lstStyle/>
+          <a:p>
+            <a:pPr algn="l" indent="0" marL="0">
+              <a:lnSpc>
+                <a:spcPct val="95000"/>
+              </a:lnSpc>
+              <a:spcAft>
+                <a:spcPts val="200"/>
+              </a:spcAft>
+              <a:buNone/>
+            </a:pPr>
+            <a:r>
+              <a:rPr lang="en-US" sz="780" b="1" dirty="0">
+                <a:solidFill>
+                  <a:srgbClr val="182F48"/>
+                </a:solidFill>
+                <a:latin typeface="Noto Sans KR" pitchFamily="34" charset="0"/>
+                <a:ea typeface="Noto Sans KR" pitchFamily="34" charset="-122"/>
+                <a:cs typeface="Noto Sans KR" pitchFamily="34" charset="-120"/>
+              </a:rPr>
+              <a:t>무신사 도쿄 쇼룸 (2024.7)</a:t>
+            </a:r>
+            <a:endParaRPr lang="en-US" sz="780" dirty="0"/>
+          </a:p>
+          <a:p>
+            <a:pPr algn="l" indent="0" marL="0">
+              <a:lnSpc>
+                <a:spcPct val="95000"/>
+              </a:lnSpc>
+              <a:spcAft>
+                <a:spcPts val="200"/>
+              </a:spcAft>
+              <a:buNone/>
+            </a:pPr>
+            <a:r>
+              <a:rPr lang="en-US" sz="780" dirty="0">
+                <a:solidFill>
+                  <a:srgbClr val="334155"/>
+                </a:solidFill>
+                <a:latin typeface="Noto Sans KR" pitchFamily="34" charset="0"/>
+                <a:ea typeface="Noto Sans KR" pitchFamily="34" charset="-122"/>
+                <a:cs typeface="Noto Sans KR" pitchFamily="34" charset="-120"/>
+              </a:rPr>
+              <a:t>일본 편집숍 바이어 200명 이상이 찾아와 주문이 3배 늘었다.</a:t>
+            </a:r>
+            <a:endParaRPr lang="en-US" sz="780" dirty="0"/>
+          </a:p>
+          <a:p>
+            <a:pPr algn="l" indent="0" marL="0">
+              <a:lnSpc>
+                <a:spcPct val="95000"/>
+              </a:lnSpc>
+              <a:spcAft>
+                <a:spcPts val="200"/>
+              </a:spcAft>
+              <a:buNone/>
+            </a:pPr>
+            <a:r>
+              <a:rPr lang="en-US" sz="780" b="1" dirty="0">
+                <a:solidFill>
+                  <a:srgbClr val="182F48"/>
+                </a:solidFill>
+                <a:latin typeface="Noto Sans KR" pitchFamily="34" charset="0"/>
+                <a:ea typeface="Noto Sans KR" pitchFamily="34" charset="-122"/>
+                <a:cs typeface="Noto Sans KR" pitchFamily="34" charset="-120"/>
+              </a:rPr>
+              <a:t>무신사 스탠다드 첫 글로벌 수주회 (2026.8)</a:t>
+            </a:r>
+            <a:endParaRPr lang="en-US" sz="780" dirty="0"/>
+          </a:p>
+          <a:p>
+            <a:pPr algn="l" indent="0" marL="0">
+              <a:lnSpc>
+                <a:spcPct val="95000"/>
+              </a:lnSpc>
+              <a:spcAft>
+                <a:spcPts val="200"/>
+              </a:spcAft>
+              <a:buNone/>
+            </a:pPr>
+            <a:r>
+              <a:rPr lang="en-US" sz="780" dirty="0">
+                <a:solidFill>
+                  <a:srgbClr val="334155"/>
+                </a:solidFill>
+                <a:latin typeface="Noto Sans KR" pitchFamily="34" charset="0"/>
+                <a:ea typeface="Noto Sans KR" pitchFamily="34" charset="-122"/>
+                <a:cs typeface="Noto Sans KR" pitchFamily="34" charset="-120"/>
+              </a:rPr>
+              <a:t>조조타운·티몰과 동남아 4개국 바이어가 서울 성수동에 왔다.</a:t>
+            </a:r>
+            <a:endParaRPr lang="en-US" sz="780" dirty="0"/>
+          </a:p>
+          <a:p>
+            <a:pPr algn="l" indent="0" marL="0">
+              <a:lnSpc>
+                <a:spcPct val="95000"/>
+              </a:lnSpc>
+              <a:spcAft>
+                <a:spcPts val="200"/>
+              </a:spcAft>
+              <a:buNone/>
+            </a:pPr>
+            <a:r>
+              <a:rPr lang="en-US" sz="780" b="1" dirty="0">
+                <a:solidFill>
+                  <a:srgbClr val="267D86"/>
+                </a:solidFill>
+                <a:latin typeface="Noto Sans KR" pitchFamily="34" charset="0"/>
+                <a:ea typeface="Noto Sans KR" pitchFamily="34" charset="-122"/>
+                <a:cs typeface="Noto Sans KR" pitchFamily="34" charset="-120"/>
+              </a:rPr>
+              <a:t>→ </a:t>
+            </a:r>
+            <a:pPr algn="l" indent="0" marL="0">
+              <a:lnSpc>
+                <a:spcPct val="95000"/>
+              </a:lnSpc>
+              <a:spcAft>
+                <a:spcPts val="200"/>
+              </a:spcAft>
+              <a:buNone/>
+            </a:pPr>
+            <a:r>
+              <a:rPr lang="en-US" sz="780" dirty="0">
+                <a:solidFill>
+                  <a:srgbClr val="334155"/>
+                </a:solidFill>
+                <a:latin typeface="Noto Sans KR" pitchFamily="34" charset="0"/>
+                <a:ea typeface="Noto Sans KR" pitchFamily="34" charset="-122"/>
+                <a:cs typeface="Noto Sans KR" pitchFamily="34" charset="-120"/>
+              </a:rPr>
+              <a:t>바이어 수요는 분명하지만,</a:t>
+            </a:r>
+            <a:endParaRPr lang="en-US" sz="780" dirty="0"/>
+          </a:p>
+          <a:p>
+            <a:pPr algn="l" indent="0" marL="0">
+              <a:lnSpc>
+                <a:spcPct val="95000"/>
+              </a:lnSpc>
+              <a:spcAft>
+                <a:spcPts val="200"/>
+              </a:spcAft>
+              <a:buNone/>
+            </a:pPr>
+            <a:r>
+              <a:rPr lang="en-US" sz="780" dirty="0">
+                <a:solidFill>
+                  <a:srgbClr val="334155"/>
+                </a:solidFill>
+                <a:latin typeface="Noto Sans KR" pitchFamily="34" charset="0"/>
+                <a:ea typeface="Noto Sans KR" pitchFamily="34" charset="-122"/>
+                <a:cs typeface="Noto Sans KR" pitchFamily="34" charset="-120"/>
+              </a:rPr>
+              <a:t>지금은 플랫폼이 직접 여는 자리에서만 만난다.</a:t>
+            </a:r>
+            <a:endParaRPr lang="en-US" sz="780" dirty="0"/>
+          </a:p>
+        </p:txBody>
+      </p:sp>
+      <p:sp>
+        <p:nvSpPr>
+          <p:cNvPr id="15" name="준비 내용"/>
+          <p:cNvSpPr txBox="1"/>
+          <p:nvPr/>
+        </p:nvSpPr>
+        <p:spPr>
+          <a:xfrm>
+            <a:off x="612648" y="5353101"/>
+            <a:ext cx="10963656" cy="919683"/>
+          </a:xfrm>
+          <a:prstGeom prst="roundRect">
+            <a:avLst>
+              <a:gd name="adj" fmla="val 4971"/>
+            </a:avLst>
+          </a:prstGeom>
+          <a:solidFill>
+            <a:srgbClr val="F1F5F9"/>
+          </a:solidFill>
+          <a:ln/>
+        </p:spPr>
+        <p:txBody>
+          <a:bodyPr wrap="square" lIns="109728" tIns="0" rIns="109728" bIns="0" rtlCol="0" anchor="ctr"/>
+          <a:lstStyle/>
+          <a:p>
+            <a:pPr algn="l" indent="0" marL="0">
+              <a:lnSpc>
+                <a:spcPct val="95000"/>
+              </a:lnSpc>
+              <a:spcAft>
+                <a:spcPts val="200"/>
+              </a:spcAft>
+              <a:buNone/>
+            </a:pPr>
+            <a:r>
+              <a:rPr lang="en-US" sz="780" b="1" dirty="0">
+                <a:solidFill>
+                  <a:srgbClr val="267D86"/>
+                </a:solidFill>
+                <a:latin typeface="Noto Sans KR" pitchFamily="34" charset="0"/>
+                <a:ea typeface="Noto Sans KR" pitchFamily="34" charset="-122"/>
+                <a:cs typeface="Noto Sans KR" pitchFamily="34" charset="-120"/>
+              </a:rPr>
+              <a:t>사전 가정  </a:t>
+            </a:r>
+            <a:pPr algn="l" indent="0" marL="0">
+              <a:lnSpc>
+                <a:spcPct val="95000"/>
+              </a:lnSpc>
+              <a:spcAft>
+                <a:spcPts val="200"/>
+              </a:spcAft>
+              <a:buNone/>
+            </a:pPr>
+            <a:r>
+              <a:rPr lang="en-US" sz="780" dirty="0">
+                <a:solidFill>
+                  <a:srgbClr val="334155"/>
+                </a:solidFill>
+                <a:latin typeface="Noto Sans KR" pitchFamily="34" charset="0"/>
+                <a:ea typeface="Noto Sans KR" pitchFamily="34" charset="-122"/>
+                <a:cs typeface="Noto Sans KR" pitchFamily="34" charset="-120"/>
+              </a:rPr>
+              <a:t>① 국내 신진 브랜드는 SNS나 지인 소개로 찾아 시간이 많이 든다   ② 물량·납기·품질이 불안해 들여오기를 망설인다   ③ 한자리 비교와 1:1 상담이 있으면 참관한다</a:t>
+            </a:r>
+            <a:endParaRPr lang="en-US" sz="780" dirty="0"/>
+          </a:p>
+          <a:p>
+            <a:pPr algn="l" indent="0" marL="0">
+              <a:lnSpc>
+                <a:spcPct val="95000"/>
+              </a:lnSpc>
+              <a:spcAft>
+                <a:spcPts val="200"/>
+              </a:spcAft>
+              <a:buNone/>
+            </a:pPr>
+            <a:r>
+              <a:rPr lang="en-US" sz="780" b="1" dirty="0">
+                <a:solidFill>
+                  <a:srgbClr val="267D86"/>
+                </a:solidFill>
+                <a:latin typeface="Noto Sans KR" pitchFamily="34" charset="0"/>
+                <a:ea typeface="Noto Sans KR" pitchFamily="34" charset="-122"/>
+                <a:cs typeface="Noto Sans KR" pitchFamily="34" charset="-120"/>
+              </a:rPr>
+              <a:t>준비한 질문  </a:t>
+            </a:r>
+            <a:pPr algn="l" indent="0" marL="0">
+              <a:lnSpc>
+                <a:spcPct val="95000"/>
+              </a:lnSpc>
+              <a:spcAft>
+                <a:spcPts val="200"/>
+              </a:spcAft>
+              <a:buNone/>
+            </a:pPr>
+            <a:r>
+              <a:rPr lang="en-US" sz="780" dirty="0">
+                <a:solidFill>
+                  <a:srgbClr val="334155"/>
+                </a:solidFill>
+                <a:latin typeface="Noto Sans KR" pitchFamily="34" charset="0"/>
+                <a:ea typeface="Noto Sans KR" pitchFamily="34" charset="-122"/>
+                <a:cs typeface="Noto Sans KR" pitchFamily="34" charset="-120"/>
+              </a:rPr>
+              <a:t>행사 설명 대본(약 1분)과 질문 10개 — 지금 겪는 어려움 · 행사에서 원하는 것 · 참관 의향과 걸림돌 (별도 PDF)</a:t>
+            </a:r>
+            <a:endParaRPr lang="en-US" sz="780" dirty="0"/>
+          </a:p>
+          <a:p>
+            <a:pPr algn="l" indent="0" marL="0">
+              <a:lnSpc>
+                <a:spcPct val="95000"/>
+              </a:lnSpc>
+              <a:spcAft>
+                <a:spcPts val="200"/>
+              </a:spcAft>
+              <a:buNone/>
+            </a:pPr>
+            <a:r>
+              <a:rPr lang="en-US" sz="780" b="1" dirty="0">
+                <a:solidFill>
+                  <a:srgbClr val="267D86"/>
+                </a:solidFill>
+                <a:latin typeface="Noto Sans KR" pitchFamily="34" charset="0"/>
+                <a:ea typeface="Noto Sans KR" pitchFamily="34" charset="-122"/>
+                <a:cs typeface="Noto Sans KR" pitchFamily="34" charset="-120"/>
+              </a:rPr>
+              <a:t>다음 시도  </a:t>
+            </a:r>
+            <a:pPr algn="l" indent="0" marL="0">
+              <a:lnSpc>
+                <a:spcPct val="95000"/>
+              </a:lnSpc>
+              <a:spcAft>
+                <a:spcPts val="200"/>
+              </a:spcAft>
+              <a:buNone/>
+            </a:pPr>
+            <a:r>
+              <a:rPr lang="en-US" sz="780" dirty="0">
+                <a:solidFill>
+                  <a:srgbClr val="334155"/>
+                </a:solidFill>
+                <a:latin typeface="Noto Sans KR" pitchFamily="34" charset="0"/>
+                <a:ea typeface="Noto Sans KR" pitchFamily="34" charset="-122"/>
+                <a:cs typeface="Noto Sans KR" pitchFamily="34" charset="-120"/>
+              </a:rPr>
+              <a:t>이메일·인스타그램 DM으로 질문지를 보내 서면 답변을 받고, 결과를 이 장에 더한다.</a:t>
+            </a:r>
+            <a:endParaRPr lang="en-US" sz="780" dirty="0"/>
           </a:p>
         </p:txBody>
       </p:sp>

--- a/GFF_SEOUL_2027_전시산업론_중간과제.pptx
+++ b/GFF_SEOUL_2027_전시산업론_중간과제.pptx
@@ -967,7 +967,7 @@
               <a:rPr lang="en-US" dirty="0"/>
               <a:t>[이해관계자] 이해관계자는 공공기관, 협회·단체, 연구·시험기관, 미디어, 베뉴·플랫폼의 다섯 분류, 열두 곳입니다. 교수님 말씀대로 각 기관이 이 배에 타야 하는 이유, 즉 얻는 이익을 그 기관의 실제 사업 목표와 연결해 적었습니다. 역할 칸의 ①②③은 그 기관이 1장의 어느 병목을 푸는 데 힘을 보태는지를 표시한 것입니다.
 예를 들어 산업통상부는 230억 원 규모 'All in Korea' 사업의 목표인 소재-제조-브랜드 협력 성과를 우리 현장에서 얻고, KOTRA는 해외 바이어 초청으로 수출 상담 실적을, 서울시는 도심 봉제업체의 일감을 얻습니다. 협회는 회원사를 공동관으로 모으는 가장 강한 모집 파트너이고, FITI시험연구원은 Test Lab에 신뢰를, GO OUT KOREA와 패션비즈는 업계 홍보와 인플루언서 섭외를 맡습니다.
-[별첨] 참가업체 측은 마무트 종로점·제로그램 등을 운영하는 유통 담당자를 직접 만나 인터뷰했고, 질문 여덟 개의 답변을 녹취 그대로 별첨 1에 옮겼습니다. 바이어 측은 홀라인과 무신사에 전화했지만 매장 직원과 고객센터로만 연결돼 실무 바이어와는 통화하지 못했습니다. 그 시도 내역과 이유, 대신 확인한 자료를 별첨 2에 정리했습니다.</a:t>
+[별첨] 참가업체 측은 마무트 종로점·제로그램 등을 운영하는 유통 담당자를 직접 만나 인터뷰했고, 질문 여덟 개의 답변을 녹취 그대로 별첨 1에 옮겼습니다. 바이어 측은 홀라인과 웍스아웃에 전화했지만 매장 직원과 고객센터 단계에서 막혀 실무 바이어와는 통화하지 못했습니다. 그 시도 내역과 이유, 준비했던 가정과 질문을 별첨 2에 정리했습니다.</a:t>
             </a:r>
             <a:endParaRPr lang="en-US" dirty="0"/>
           </a:p>
@@ -1144,8 +1144,9 @@
           <a:p>
             <a:r>
               <a:rPr lang="en-US" dirty="0"/>
-              <a:t>인터뷰 전에 세운 생각 네 가지를 실제 답변과 비교했습니다. 브랜드가 바이어 미팅과 현장 판매를 가장 원할 거라고 생각했는데, 답은 반대였습니다. 비싼 장비일수록 판매보다 장점을 깊게 들어줄 고객이 필요하다는 것이었습니다.
-그래서 해외 고가 브랜드는 소비자 체험일에, 국내 브랜드는 바이어 상담일에 배치했고, 공동 시연 공간과 인플루언서 섭외 지원, 관심도 중심의 성과 지표를 기획에 넣었습니다.</a:t>
+              <a:t>인터뷰 전에 세운 가정 네 가지 중 세 가지가 틀렸고(H1·H3·H4), 부스비 가정은 일부만 맞았습니다(H2). 브랜드가 바이어 미팅과 현장 판매를 가장 원할 거라고 생각했지만, 비싼 장비일수록 판매보다 장점을 깊게 들어줄 고객이 필요하다는 답이었습니다.
+그 결과를 근거가 된 질문과 함께 기획 수정 네 가지로 반영했습니다. 공동 Test Lab, 관심도 중심의 성과 지표, 참가업체의 목적별 연결, 미디어 파트너의 인플루언서 섭외 지원입니다.
+인터뷰를 다시 검토해 보니 더 물었어야 할 것도 있었습니다. K-브랜드의 소량 생산처 확보 문제, 수입 브랜드 대비 마진 차이, 희망 참가일, 원화 기준 부스비와 시즌 적합성입니다.</a:t>
             </a:r>
             <a:endParaRPr lang="en-US" dirty="0"/>
           </a:p>
@@ -1233,9 +1234,9 @@
           <a:p>
             <a:r>
               <a:rPr lang="en-US" dirty="0"/>
-              <a:t>바이어 측은 아웃도어 편집숍 홀라인과 온라인 플랫폼 무신사에 전화했습니다. 홀라인은 매장 직원이 받았지만 바잉 담당이 아니어서 준비한 질문에 답할 수 있는 사람이 없었고, 무신사는 고객센터로 연결돼 MD에게 닿지 못했습니다.
-연결되지 않은 이유는 구조적입니다. 바이어의 직통 번호는 공개돼 있지 않고, 공개된 번호는 매장이나 고객센터로 이어지며, 고객센터는 소비자 문의만 다룹니다.
-이 경험이 기획 배경을 뒷받침합니다. 신진 브랜드도 이렇게 바이어에게 닿지 못하기 때문에, 바이어를 미리 등록받아 1:1 상담을 잡아 주는 트레이드 데이가 필요합니다. 바이어 수요는 무신사 도쿄 쇼룸과 무신사 스탠다드 수주회 자료로 대신 확인했습니다.</a:t>
+              <a:t>바이어 측은 아웃도어 편집숍 홀라인과 편집숍 웍스아웃에 매장 번호와 고객센터 번호로 연락했습니다. 홀라인은 매장 직원이 받았지만 바잉 담당이 아니어서 준비한 질문에 답할 수 있는 사람이 없었고, 웍스아웃 압구정점은 판매 시간 전이라 연결되지 않았습니다.
+두 곳 모두 고객센터는 공식 안내상 주문·배송 문의 창구라 바잉 담당자와 연결되는 경로가 아니었습니다. 바이어의 직통 번호는 공개돼 있지 않고, 매장은 판매를, 브랜드 선정은 본사가 맡는 구조이기 때문입니다.
+통화를 위해 사전 가정 세 가지, 1분 분량의 행사 설명 대본, 질문 10개, 예상 질문과 답, 통화 기록표까지 준비했지만, 두 곳 모두 매장과 고객센터 단계에서 막혀 준비한 질문을 묻지 못했습니다.</a:t>
             </a:r>
             <a:endParaRPr lang="en-US" dirty="0"/>
           </a:p>
@@ -1364,7 +1365,7 @@
                 <a:ea typeface="Noto Sans KR" pitchFamily="34" charset="-122"/>
                 <a:cs typeface="Noto Sans KR" pitchFamily="34" charset="-120"/>
               </a:rPr>
-              <a:t>( 이름 / 학번 )</a:t>
+              <a:t>정신영 / 20222631</a:t>
             </a:r>
             <a:endParaRPr lang="en-US" sz="1100" dirty="0"/>
           </a:p>
@@ -2142,7 +2143,7 @@
                 <a:ea typeface="Noto Sans KR" pitchFamily="34" charset="-122"/>
                 <a:cs typeface="Noto Sans KR" pitchFamily="34" charset="-120"/>
               </a:rPr>
-              <a:t>작성자: [ 이름 / 학번 ]</a:t>
+              <a:t>작성자: 정신영 / 20222631</a:t>
             </a:r>
             <a:endParaRPr lang="en-US" sz="950" dirty="0"/>
           </a:p>
@@ -29737,7 +29738,7 @@
                 <a:ea typeface="Noto Sans KR" pitchFamily="34" charset="-122"/>
                 <a:cs typeface="Noto Sans KR" pitchFamily="34" charset="-120"/>
               </a:rPr>
-              <a:t>홀라인(아웃도어 편집숍) · 무신사(온라인 플랫폼)에 전화</a:t>
+              <a:t>홀라인(아웃도어 편집숍) · 웍스아웃(편집숍)에 매장 · 고객센터로 전화</a:t>
             </a:r>
             <a:endParaRPr lang="en-US" sz="750" dirty="0"/>
           </a:p>
@@ -29760,7 +29761,7 @@
                 <a:ea typeface="Noto Sans KR" pitchFamily="34" charset="-122"/>
                 <a:cs typeface="Noto Sans KR" pitchFamily="34" charset="-120"/>
               </a:rPr>
-              <a:t>매장 직원 · 고객센터로만 연결돼 바이어와 통화하지 못함 → 시도 내역 · 사유 · 대체 자료를 정리</a:t>
+              <a:t>매장 직원 · 고객센터 단계에서 막혀 바이어와 통화하지 못함 → 시도 내역 · 사유 · 준비 내용을 정리</a:t>
             </a:r>
             <a:endParaRPr lang="en-US" sz="750" dirty="0"/>
           </a:p>
@@ -32688,7 +32689,7 @@
                 <a:ea typeface="Noto Sans KR" pitchFamily="34" charset="-122"/>
                 <a:cs typeface="Noto Sans KR" pitchFamily="34" charset="-120"/>
               </a:rPr>
-              <a:t>질문과 답변(이어서) · 인터뷰 전에 생각한 것과 바꾼 것</a:t>
+              <a:t>질문과 답변(이어서) · 사전 가정 · 기획 수정 · 추가 확인 사항</a:t>
             </a:r>
             <a:endParaRPr lang="en-US" sz="1500" dirty="0"/>
           </a:p>
@@ -33370,14 +33371,14 @@
       </p:graphicFrame>
       <p:sp>
         <p:nvSpPr>
-          <p:cNvPr id="8" name="제목 인터뷰 전에 생각한 것과 바꾼 것"/>
+          <p:cNvPr id="8" name="제목 사전 가정 → 검증 결과"/>
           <p:cNvSpPr txBox="1"/>
           <p:nvPr/>
         </p:nvSpPr>
         <p:spPr>
           <a:xfrm>
-            <a:off x="612648" y="3356432"/>
-            <a:ext cx="10963656" cy="237744"/>
+            <a:off x="612648" y="3338144"/>
+            <a:ext cx="3520440" cy="237744"/>
           </a:xfrm>
           <a:prstGeom prst="rect">
             <a:avLst/>
@@ -33404,1338 +33405,1597 @@
                 <a:ea typeface="Noto Sans KR" pitchFamily="34" charset="-122"/>
                 <a:cs typeface="Noto Sans KR" pitchFamily="34" charset="-120"/>
               </a:rPr>
-              <a:t>인터뷰 전에 생각한 것과 바꾼 것</a:t>
+              <a:t>사전 가정 → 검증 결과</a:t>
             </a:r>
             <a:endParaRPr lang="en-US" sz="1050" dirty="0"/>
           </a:p>
         </p:txBody>
       </p:sp>
-      <p:graphicFrame>
-        <p:nvGraphicFramePr>
-          <p:cNvPr id="17" name="인터뷰 전후 비교"/>
-          <p:cNvGraphicFramePr>
-            <a:graphicFrameLocks noGrp="1"/>
-          </p:cNvGraphicFramePr>
-          <p:nvPr>
-            <p:extLst>
-              <p:ext uri="{D42A27DB-BD31-4B8C-83A1-F6EECF244321}">
-                <p14:modId xmlns:p14="http://schemas.microsoft.com/office/powerpoint/2010/main" val="1579011935"/>
-              </p:ext>
-            </p:extLst>
-          </p:nvPr>
-        </p:nvGraphicFramePr>
-        <p:xfrm>
-          <a:off x="612648" y="3649040"/>
-          <a:ext cx="10963656" cy="914400"/>
-        </p:xfrm>
-        <a:graphic>
-          <a:graphicData uri="http://schemas.openxmlformats.org/drawingml/2006/table">
-            <a:tbl>
-              <a:tblPr/>
-              <a:tblGrid>
-                <a:gridCol w="2926080"/>
-                <a:gridCol w="3931920"/>
-                <a:gridCol w="4105656"/>
-              </a:tblGrid>
-              <a:tr h="242984">
-                <a:tc>
-                  <a:txBody>
-                    <a:bodyPr/>
-                    <a:lstStyle/>
-                    <a:p>
-                      <a:pPr algn="l" indent="0" marL="0">
-                        <a:buNone/>
-                      </a:pPr>
-                      <a:r>
-                        <a:rPr lang="en-US" sz="850" b="1" dirty="0">
-                          <a:solidFill>
-                            <a:srgbClr val="FFFFFF"/>
-                          </a:solidFill>
-                          <a:latin typeface="Noto Sans KR" pitchFamily="34" charset="0"/>
-                          <a:ea typeface="Noto Sans KR" pitchFamily="34" charset="-122"/>
-                          <a:cs typeface="Noto Sans KR" pitchFamily="34" charset="-120"/>
-                        </a:rPr>
-                        <a:t>인터뷰 전에 생각한 것 (사전 가정)</a:t>
-                      </a:r>
-                      <a:endParaRPr lang="en-US" sz="850" dirty="0">
-                        <a:latin typeface="Noto Sans KR" charset="0"/>
-                        <a:ea typeface="Noto Sans KR" charset="0"/>
-                        <a:cs typeface="Noto Sans KR" charset="0"/>
-                      </a:endParaRPr>
-                    </a:p>
-                  </a:txBody>
-                  <a:tcPr marL="76200" marR="76200" marT="38100" marB="38100" anchor="ctr">
-                    <a:lnL w="6350" cap="flat" cmpd="sng" algn="ctr">
-                      <a:solidFill>
-                        <a:srgbClr val="CBD5E1"/>
-                      </a:solidFill>
-                      <a:prstDash val="solid"/>
-                      <a:round/>
-                      <a:headEnd type="none" w="med" len="med"/>
-                      <a:tailEnd type="none" w="med" len="med"/>
-                    </a:lnL>
-                    <a:lnR w="6350" cap="flat" cmpd="sng" algn="ctr">
-                      <a:solidFill>
-                        <a:srgbClr val="CBD5E1"/>
-                      </a:solidFill>
-                      <a:prstDash val="solid"/>
-                      <a:round/>
-                      <a:headEnd type="none" w="med" len="med"/>
-                      <a:tailEnd type="none" w="med" len="med"/>
-                    </a:lnR>
-                    <a:lnT w="6350" cap="flat" cmpd="sng" algn="ctr">
-                      <a:solidFill>
-                        <a:srgbClr val="CBD5E1"/>
-                      </a:solidFill>
-                      <a:prstDash val="solid"/>
-                      <a:round/>
-                      <a:headEnd type="none" w="med" len="med"/>
-                      <a:tailEnd type="none" w="med" len="med"/>
-                    </a:lnT>
-                    <a:lnB w="6350" cap="flat" cmpd="sng" algn="ctr">
-                      <a:solidFill>
-                        <a:srgbClr val="CBD5E1"/>
-                      </a:solidFill>
-                      <a:prstDash val="solid"/>
-                      <a:round/>
-                      <a:headEnd type="none" w="med" len="med"/>
-                      <a:tailEnd type="none" w="med" len="med"/>
-                    </a:lnB>
-                    <a:solidFill>
-                      <a:srgbClr val="182F48"/>
-                    </a:solidFill>
-                  </a:tcPr>
-                </a:tc>
-                <a:tc>
-                  <a:txBody>
-                    <a:bodyPr/>
-                    <a:lstStyle/>
-                    <a:p>
-                      <a:pPr algn="l" indent="0" marL="0">
-                        <a:buNone/>
-                      </a:pPr>
-                      <a:r>
-                        <a:rPr lang="en-US" sz="850" b="1" dirty="0">
-                          <a:solidFill>
-                            <a:srgbClr val="FFFFFF"/>
-                          </a:solidFill>
-                          <a:latin typeface="Noto Sans KR" pitchFamily="34" charset="0"/>
-                          <a:ea typeface="Noto Sans KR" pitchFamily="34" charset="-122"/>
-                          <a:cs typeface="Noto Sans KR" pitchFamily="34" charset="-120"/>
-                        </a:rPr>
-                        <a:t>들은 답변</a:t>
-                      </a:r>
-                      <a:endParaRPr lang="en-US" sz="850" dirty="0">
-                        <a:latin typeface="Noto Sans KR" charset="0"/>
-                        <a:ea typeface="Noto Sans KR" charset="0"/>
-                        <a:cs typeface="Noto Sans KR" charset="0"/>
-                      </a:endParaRPr>
-                    </a:p>
-                  </a:txBody>
-                  <a:tcPr marL="76200" marR="76200" marT="38100" marB="38100" anchor="ctr">
-                    <a:lnL w="6350" cap="flat" cmpd="sng" algn="ctr">
-                      <a:solidFill>
-                        <a:srgbClr val="CBD5E1"/>
-                      </a:solidFill>
-                      <a:prstDash val="solid"/>
-                      <a:round/>
-                      <a:headEnd type="none" w="med" len="med"/>
-                      <a:tailEnd type="none" w="med" len="med"/>
-                    </a:lnL>
-                    <a:lnR w="6350" cap="flat" cmpd="sng" algn="ctr">
-                      <a:solidFill>
-                        <a:srgbClr val="CBD5E1"/>
-                      </a:solidFill>
-                      <a:prstDash val="solid"/>
-                      <a:round/>
-                      <a:headEnd type="none" w="med" len="med"/>
-                      <a:tailEnd type="none" w="med" len="med"/>
-                    </a:lnR>
-                    <a:lnT w="6350" cap="flat" cmpd="sng" algn="ctr">
-                      <a:solidFill>
-                        <a:srgbClr val="CBD5E1"/>
-                      </a:solidFill>
-                      <a:prstDash val="solid"/>
-                      <a:round/>
-                      <a:headEnd type="none" w="med" len="med"/>
-                      <a:tailEnd type="none" w="med" len="med"/>
-                    </a:lnT>
-                    <a:lnB w="6350" cap="flat" cmpd="sng" algn="ctr">
-                      <a:solidFill>
-                        <a:srgbClr val="CBD5E1"/>
-                      </a:solidFill>
-                      <a:prstDash val="solid"/>
-                      <a:round/>
-                      <a:headEnd type="none" w="med" len="med"/>
-                      <a:tailEnd type="none" w="med" len="med"/>
-                    </a:lnB>
-                    <a:solidFill>
-                      <a:srgbClr val="182F48"/>
-                    </a:solidFill>
-                  </a:tcPr>
-                </a:tc>
-                <a:tc>
-                  <a:txBody>
-                    <a:bodyPr/>
-                    <a:lstStyle/>
-                    <a:p>
-                      <a:pPr algn="l" indent="0" marL="0">
-                        <a:buNone/>
-                      </a:pPr>
-                      <a:r>
-                        <a:rPr lang="en-US" sz="850" b="1" dirty="0">
-                          <a:solidFill>
-                            <a:srgbClr val="FFFFFF"/>
-                          </a:solidFill>
-                          <a:latin typeface="Noto Sans KR" pitchFamily="34" charset="0"/>
-                          <a:ea typeface="Noto Sans KR" pitchFamily="34" charset="-122"/>
-                          <a:cs typeface="Noto Sans KR" pitchFamily="34" charset="-120"/>
-                        </a:rPr>
-                        <a:t>기획에 반영한 것</a:t>
-                      </a:r>
-                      <a:endParaRPr lang="en-US" sz="850" dirty="0">
-                        <a:latin typeface="Noto Sans KR" charset="0"/>
-                        <a:ea typeface="Noto Sans KR" charset="0"/>
-                        <a:cs typeface="Noto Sans KR" charset="0"/>
-                      </a:endParaRPr>
-                    </a:p>
-                  </a:txBody>
-                  <a:tcPr marL="76200" marR="76200" marT="38100" marB="38100" anchor="ctr">
-                    <a:lnL w="6350" cap="flat" cmpd="sng" algn="ctr">
-                      <a:solidFill>
-                        <a:srgbClr val="CBD5E1"/>
-                      </a:solidFill>
-                      <a:prstDash val="solid"/>
-                      <a:round/>
-                      <a:headEnd type="none" w="med" len="med"/>
-                      <a:tailEnd type="none" w="med" len="med"/>
-                    </a:lnL>
-                    <a:lnR w="6350" cap="flat" cmpd="sng" algn="ctr">
-                      <a:solidFill>
-                        <a:srgbClr val="CBD5E1"/>
-                      </a:solidFill>
-                      <a:prstDash val="solid"/>
-                      <a:round/>
-                      <a:headEnd type="none" w="med" len="med"/>
-                      <a:tailEnd type="none" w="med" len="med"/>
-                    </a:lnR>
-                    <a:lnT w="6350" cap="flat" cmpd="sng" algn="ctr">
-                      <a:solidFill>
-                        <a:srgbClr val="CBD5E1"/>
-                      </a:solidFill>
-                      <a:prstDash val="solid"/>
-                      <a:round/>
-                      <a:headEnd type="none" w="med" len="med"/>
-                      <a:tailEnd type="none" w="med" len="med"/>
-                    </a:lnT>
-                    <a:lnB w="6350" cap="flat" cmpd="sng" algn="ctr">
-                      <a:solidFill>
-                        <a:srgbClr val="CBD5E1"/>
-                      </a:solidFill>
-                      <a:prstDash val="solid"/>
-                      <a:round/>
-                      <a:headEnd type="none" w="med" len="med"/>
-                      <a:tailEnd type="none" w="med" len="med"/>
-                    </a:lnB>
-                    <a:solidFill>
-                      <a:srgbClr val="182F48"/>
-                    </a:solidFill>
-                  </a:tcPr>
-                </a:tc>
-              </a:tr>
-              <a:tr h="391480">
-                <a:tc>
-                  <a:txBody>
-                    <a:bodyPr/>
-                    <a:lstStyle/>
-                    <a:p>
-                      <a:pPr algn="l" indent="0" marL="0">
-                        <a:buNone/>
-                      </a:pPr>
-                      <a:r>
-                        <a:rPr lang="en-US" sz="850" dirty="0">
-                          <a:solidFill>
-                            <a:srgbClr val="334155"/>
-                          </a:solidFill>
-                          <a:latin typeface="Noto Sans KR" pitchFamily="34" charset="0"/>
-                          <a:ea typeface="Noto Sans KR" pitchFamily="34" charset="-122"/>
-                          <a:cs typeface="Noto Sans KR" pitchFamily="34" charset="-120"/>
-                        </a:rPr>
-                        <a:t>브랜드는 바이어 미팅과 현장 판매를</a:t>
-                      </a:r>
-                      <a:endParaRPr lang="en-US" sz="850" dirty="0">
-                        <a:latin typeface="Noto Sans KR" charset="0"/>
-                        <a:ea typeface="Noto Sans KR" charset="0"/>
-                        <a:cs typeface="Noto Sans KR" charset="0"/>
-                      </a:endParaRPr>
-                    </a:p>
-                    <a:p>
-                      <a:pPr algn="l" indent="0" marL="0">
-                        <a:buNone/>
-                      </a:pPr>
-                      <a:r>
-                        <a:rPr lang="en-US" sz="850" dirty="0">
-                          <a:solidFill>
-                            <a:srgbClr val="334155"/>
-                          </a:solidFill>
-                          <a:latin typeface="Noto Sans KR" pitchFamily="34" charset="0"/>
-                          <a:ea typeface="Noto Sans KR" pitchFamily="34" charset="-122"/>
-                          <a:cs typeface="Noto Sans KR" pitchFamily="34" charset="-120"/>
-                        </a:rPr>
-                        <a:t>가장 원할 것이다.</a:t>
-                      </a:r>
-                      <a:endParaRPr lang="en-US" sz="850" dirty="0">
-                        <a:latin typeface="Noto Sans KR" charset="0"/>
-                        <a:ea typeface="Noto Sans KR" charset="0"/>
-                        <a:cs typeface="Noto Sans KR" charset="0"/>
-                      </a:endParaRPr>
-                    </a:p>
-                  </a:txBody>
-                  <a:tcPr marL="76200" marR="76200" marT="38100" marB="38100" anchor="ctr">
-                    <a:lnL w="6350" cap="flat" cmpd="sng" algn="ctr">
-                      <a:solidFill>
-                        <a:srgbClr val="CBD5E1"/>
-                      </a:solidFill>
-                      <a:prstDash val="solid"/>
-                      <a:round/>
-                      <a:headEnd type="none" w="med" len="med"/>
-                      <a:tailEnd type="none" w="med" len="med"/>
-                    </a:lnL>
-                    <a:lnR w="6350" cap="flat" cmpd="sng" algn="ctr">
-                      <a:solidFill>
-                        <a:srgbClr val="CBD5E1"/>
-                      </a:solidFill>
-                      <a:prstDash val="solid"/>
-                      <a:round/>
-                      <a:headEnd type="none" w="med" len="med"/>
-                      <a:tailEnd type="none" w="med" len="med"/>
-                    </a:lnR>
-                    <a:lnT w="6350" cap="flat" cmpd="sng" algn="ctr">
-                      <a:solidFill>
-                        <a:srgbClr val="CBD5E1"/>
-                      </a:solidFill>
-                      <a:prstDash val="solid"/>
-                      <a:round/>
-                      <a:headEnd type="none" w="med" len="med"/>
-                      <a:tailEnd type="none" w="med" len="med"/>
-                    </a:lnT>
-                    <a:lnB w="6350" cap="flat" cmpd="sng" algn="ctr">
-                      <a:solidFill>
-                        <a:srgbClr val="CBD5E1"/>
-                      </a:solidFill>
-                      <a:prstDash val="solid"/>
-                      <a:round/>
-                      <a:headEnd type="none" w="med" len="med"/>
-                      <a:tailEnd type="none" w="med" len="med"/>
-                    </a:lnB>
-                  </a:tcPr>
-                </a:tc>
-                <a:tc>
-                  <a:txBody>
-                    <a:bodyPr/>
-                    <a:lstStyle/>
-                    <a:p>
-                      <a:pPr algn="l" indent="0" marL="0">
-                        <a:buNone/>
-                      </a:pPr>
-                      <a:r>
-                        <a:rPr lang="en-US" sz="850" dirty="0">
-                          <a:solidFill>
-                            <a:srgbClr val="334155"/>
-                          </a:solidFill>
-                          <a:latin typeface="Noto Sans KR" pitchFamily="34" charset="0"/>
-                          <a:ea typeface="Noto Sans KR" pitchFamily="34" charset="-122"/>
-                          <a:cs typeface="Noto Sans KR" pitchFamily="34" charset="-120"/>
-                        </a:rPr>
-                        <a:t>투자·바이어·현장 판매·고객 확보보다</a:t>
-                      </a:r>
-                      <a:endParaRPr lang="en-US" sz="850" dirty="0">
-                        <a:latin typeface="Noto Sans KR" charset="0"/>
-                        <a:ea typeface="Noto Sans KR" charset="0"/>
-                        <a:cs typeface="Noto Sans KR" charset="0"/>
-                      </a:endParaRPr>
-                    </a:p>
-                    <a:p>
-                      <a:pPr algn="l" indent="0" marL="0">
-                        <a:buNone/>
-                      </a:pPr>
-                      <a:r>
-                        <a:rPr lang="en-US" sz="850" dirty="0">
-                          <a:solidFill>
-                            <a:srgbClr val="334155"/>
-                          </a:solidFill>
-                          <a:latin typeface="Noto Sans KR" pitchFamily="34" charset="0"/>
-                          <a:ea typeface="Noto Sans KR" pitchFamily="34" charset="-122"/>
-                          <a:cs typeface="Noto Sans KR" pitchFamily="34" charset="-120"/>
-                        </a:rPr>
-                        <a:t>브랜드 홍보와 장비를 깊게 들어줄 고객이 필요하다.</a:t>
-                      </a:r>
-                      <a:pPr algn="l" indent="0" marL="0">
-                        <a:buNone/>
-                      </a:pPr>
-                      <a:r>
-                        <a:rPr lang="en-US" sz="850" dirty="0">
-                          <a:solidFill>
-                            <a:srgbClr val="64748B"/>
-                          </a:solidFill>
-                          <a:latin typeface="Noto Sans KR" pitchFamily="34" charset="0"/>
-                          <a:ea typeface="Noto Sans KR" pitchFamily="34" charset="-122"/>
-                          <a:cs typeface="Noto Sans KR" pitchFamily="34" charset="-120"/>
-                        </a:rPr>
-                        <a:t>  (Q8)</a:t>
-                      </a:r>
-                      <a:endParaRPr lang="en-US" sz="850" dirty="0">
-                        <a:latin typeface="Noto Sans KR" charset="0"/>
-                        <a:ea typeface="Noto Sans KR" charset="0"/>
-                        <a:cs typeface="Noto Sans KR" charset="0"/>
-                      </a:endParaRPr>
-                    </a:p>
-                  </a:txBody>
-                  <a:tcPr marL="76200" marR="76200" marT="38100" marB="38100" anchor="ctr">
-                    <a:lnL w="6350" cap="flat" cmpd="sng" algn="ctr">
-                      <a:solidFill>
-                        <a:srgbClr val="CBD5E1"/>
-                      </a:solidFill>
-                      <a:prstDash val="solid"/>
-                      <a:round/>
-                      <a:headEnd type="none" w="med" len="med"/>
-                      <a:tailEnd type="none" w="med" len="med"/>
-                    </a:lnL>
-                    <a:lnR w="6350" cap="flat" cmpd="sng" algn="ctr">
-                      <a:solidFill>
-                        <a:srgbClr val="CBD5E1"/>
-                      </a:solidFill>
-                      <a:prstDash val="solid"/>
-                      <a:round/>
-                      <a:headEnd type="none" w="med" len="med"/>
-                      <a:tailEnd type="none" w="med" len="med"/>
-                    </a:lnR>
-                    <a:lnT w="6350" cap="flat" cmpd="sng" algn="ctr">
-                      <a:solidFill>
-                        <a:srgbClr val="CBD5E1"/>
-                      </a:solidFill>
-                      <a:prstDash val="solid"/>
-                      <a:round/>
-                      <a:headEnd type="none" w="med" len="med"/>
-                      <a:tailEnd type="none" w="med" len="med"/>
-                    </a:lnT>
-                    <a:lnB w="6350" cap="flat" cmpd="sng" algn="ctr">
-                      <a:solidFill>
-                        <a:srgbClr val="CBD5E1"/>
-                      </a:solidFill>
-                      <a:prstDash val="solid"/>
-                      <a:round/>
-                      <a:headEnd type="none" w="med" len="med"/>
-                      <a:tailEnd type="none" w="med" len="med"/>
-                    </a:lnB>
-                  </a:tcPr>
-                </a:tc>
-                <a:tc>
-                  <a:txBody>
-                    <a:bodyPr/>
-                    <a:lstStyle/>
-                    <a:p>
-                      <a:pPr algn="l" indent="0" marL="0">
-                        <a:buNone/>
-                      </a:pPr>
-                      <a:r>
-                        <a:rPr lang="en-US" sz="850" dirty="0">
-                          <a:solidFill>
-                            <a:srgbClr val="334155"/>
-                          </a:solidFill>
-                          <a:latin typeface="Noto Sans KR" pitchFamily="34" charset="0"/>
-                          <a:ea typeface="Noto Sans KR" pitchFamily="34" charset="-122"/>
-                          <a:cs typeface="Noto Sans KR" pitchFamily="34" charset="-120"/>
-                        </a:rPr>
-                        <a:t>해외 고가 브랜드는 소비자 체험일에,</a:t>
-                      </a:r>
-                      <a:endParaRPr lang="en-US" sz="850" dirty="0">
-                        <a:latin typeface="Noto Sans KR" charset="0"/>
-                        <a:ea typeface="Noto Sans KR" charset="0"/>
-                        <a:cs typeface="Noto Sans KR" charset="0"/>
-                      </a:endParaRPr>
-                    </a:p>
-                    <a:p>
-                      <a:pPr algn="l" indent="0" marL="0">
-                        <a:buNone/>
-                      </a:pPr>
-                      <a:r>
-                        <a:rPr lang="en-US" sz="850" dirty="0">
-                          <a:solidFill>
-                            <a:srgbClr val="334155"/>
-                          </a:solidFill>
-                          <a:latin typeface="Noto Sans KR" pitchFamily="34" charset="0"/>
-                          <a:ea typeface="Noto Sans KR" pitchFamily="34" charset="-122"/>
-                          <a:cs typeface="Noto Sans KR" pitchFamily="34" charset="-120"/>
-                        </a:rPr>
-                        <a:t>국내 브랜드는 바이어 상담일에 배치했다.</a:t>
-                      </a:r>
-                      <a:pPr algn="l" indent="0" marL="0">
-                        <a:buNone/>
-                      </a:pPr>
-                      <a:r>
-                        <a:rPr lang="en-US" sz="850" dirty="0">
-                          <a:solidFill>
-                            <a:srgbClr val="64748B"/>
-                          </a:solidFill>
-                          <a:latin typeface="Noto Sans KR" pitchFamily="34" charset="0"/>
-                          <a:ea typeface="Noto Sans KR" pitchFamily="34" charset="-122"/>
-                          <a:cs typeface="Noto Sans KR" pitchFamily="34" charset="-120"/>
-                        </a:rPr>
-                        <a:t>  (5장)</a:t>
-                      </a:r>
-                      <a:endParaRPr lang="en-US" sz="850" dirty="0">
-                        <a:latin typeface="Noto Sans KR" charset="0"/>
-                        <a:ea typeface="Noto Sans KR" charset="0"/>
-                        <a:cs typeface="Noto Sans KR" charset="0"/>
-                      </a:endParaRPr>
-                    </a:p>
-                  </a:txBody>
-                  <a:tcPr marL="76200" marR="76200" marT="38100" marB="38100" anchor="ctr">
-                    <a:lnL w="6350" cap="flat" cmpd="sng" algn="ctr">
-                      <a:solidFill>
-                        <a:srgbClr val="CBD5E1"/>
-                      </a:solidFill>
-                      <a:prstDash val="solid"/>
-                      <a:round/>
-                      <a:headEnd type="none" w="med" len="med"/>
-                      <a:tailEnd type="none" w="med" len="med"/>
-                    </a:lnL>
-                    <a:lnR w="6350" cap="flat" cmpd="sng" algn="ctr">
-                      <a:solidFill>
-                        <a:srgbClr val="CBD5E1"/>
-                      </a:solidFill>
-                      <a:prstDash val="solid"/>
-                      <a:round/>
-                      <a:headEnd type="none" w="med" len="med"/>
-                      <a:tailEnd type="none" w="med" len="med"/>
-                    </a:lnR>
-                    <a:lnT w="6350" cap="flat" cmpd="sng" algn="ctr">
-                      <a:solidFill>
-                        <a:srgbClr val="CBD5E1"/>
-                      </a:solidFill>
-                      <a:prstDash val="solid"/>
-                      <a:round/>
-                      <a:headEnd type="none" w="med" len="med"/>
-                      <a:tailEnd type="none" w="med" len="med"/>
-                    </a:lnT>
-                    <a:lnB w="6350" cap="flat" cmpd="sng" algn="ctr">
-                      <a:solidFill>
-                        <a:srgbClr val="CBD5E1"/>
-                      </a:solidFill>
-                      <a:prstDash val="solid"/>
-                      <a:round/>
-                      <a:headEnd type="none" w="med" len="med"/>
-                      <a:tailEnd type="none" w="med" len="med"/>
-                    </a:lnB>
-                  </a:tcPr>
-                </a:tc>
-              </a:tr>
-              <a:tr h="391480">
-                <a:tc>
-                  <a:txBody>
-                    <a:bodyPr/>
-                    <a:lstStyle/>
-                    <a:p>
-                      <a:pPr algn="l" indent="0" marL="0">
-                        <a:buNone/>
-                      </a:pPr>
-                      <a:r>
-                        <a:rPr lang="en-US" sz="850" dirty="0">
-                          <a:solidFill>
-                            <a:srgbClr val="334155"/>
-                          </a:solidFill>
-                          <a:latin typeface="Noto Sans KR" pitchFamily="34" charset="0"/>
-                          <a:ea typeface="Noto Sans KR" pitchFamily="34" charset="-122"/>
-                          <a:cs typeface="Noto Sans KR" pitchFamily="34" charset="-120"/>
-                        </a:rPr>
-                        <a:t>부스비가 가장 큰 부담일 것이다.</a:t>
-                      </a:r>
-                      <a:endParaRPr lang="en-US" sz="850" dirty="0">
-                        <a:latin typeface="Noto Sans KR" charset="0"/>
-                        <a:ea typeface="Noto Sans KR" charset="0"/>
-                        <a:cs typeface="Noto Sans KR" charset="0"/>
-                      </a:endParaRPr>
-                    </a:p>
-                  </a:txBody>
-                  <a:tcPr marL="76200" marR="76200" marT="38100" marB="38100" anchor="ctr">
-                    <a:lnL w="6350" cap="flat" cmpd="sng" algn="ctr">
-                      <a:solidFill>
-                        <a:srgbClr val="CBD5E1"/>
-                      </a:solidFill>
-                      <a:prstDash val="solid"/>
-                      <a:round/>
-                      <a:headEnd type="none" w="med" len="med"/>
-                      <a:tailEnd type="none" w="med" len="med"/>
-                    </a:lnL>
-                    <a:lnR w="6350" cap="flat" cmpd="sng" algn="ctr">
-                      <a:solidFill>
-                        <a:srgbClr val="CBD5E1"/>
-                      </a:solidFill>
-                      <a:prstDash val="solid"/>
-                      <a:round/>
-                      <a:headEnd type="none" w="med" len="med"/>
-                      <a:tailEnd type="none" w="med" len="med"/>
-                    </a:lnR>
-                    <a:lnT w="6350" cap="flat" cmpd="sng" algn="ctr">
-                      <a:solidFill>
-                        <a:srgbClr val="CBD5E1"/>
-                      </a:solidFill>
-                      <a:prstDash val="solid"/>
-                      <a:round/>
-                      <a:headEnd type="none" w="med" len="med"/>
-                      <a:tailEnd type="none" w="med" len="med"/>
-                    </a:lnT>
-                    <a:lnB w="6350" cap="flat" cmpd="sng" algn="ctr">
-                      <a:solidFill>
-                        <a:srgbClr val="CBD5E1"/>
-                      </a:solidFill>
-                      <a:prstDash val="solid"/>
-                      <a:round/>
-                      <a:headEnd type="none" w="med" len="med"/>
-                      <a:tailEnd type="none" w="med" len="med"/>
-                    </a:lnB>
-                  </a:tcPr>
-                </a:tc>
-                <a:tc>
-                  <a:txBody>
-                    <a:bodyPr/>
-                    <a:lstStyle/>
-                    <a:p>
-                      <a:pPr algn="l" indent="0" marL="0">
-                        <a:buNone/>
-                      </a:pPr>
-                      <a:r>
-                        <a:rPr lang="en-US" sz="850" dirty="0">
-                          <a:solidFill>
-                            <a:srgbClr val="334155"/>
-                          </a:solidFill>
-                          <a:latin typeface="Noto Sans KR" pitchFamily="34" charset="0"/>
-                          <a:ea typeface="Noto Sans KR" pitchFamily="34" charset="-122"/>
-                          <a:cs typeface="Noto Sans KR" pitchFamily="34" charset="-120"/>
-                        </a:rPr>
-                        <a:t>부스비는 2만~5만 달러로 늘 책정해 왔다.</a:t>
-                      </a:r>
-                      <a:endParaRPr lang="en-US" sz="850" dirty="0">
-                        <a:latin typeface="Noto Sans KR" charset="0"/>
-                        <a:ea typeface="Noto Sans KR" charset="0"/>
-                        <a:cs typeface="Noto Sans KR" charset="0"/>
-                      </a:endParaRPr>
-                    </a:p>
-                    <a:p>
-                      <a:pPr algn="l" indent="0" marL="0">
-                        <a:buNone/>
-                      </a:pPr>
-                      <a:r>
-                        <a:rPr lang="en-US" sz="850" dirty="0">
-                          <a:solidFill>
-                            <a:srgbClr val="334155"/>
-                          </a:solidFill>
-                          <a:latin typeface="Noto Sans KR" pitchFamily="34" charset="0"/>
-                          <a:ea typeface="Noto Sans KR" pitchFamily="34" charset="-122"/>
-                          <a:cs typeface="Noto Sans KR" pitchFamily="34" charset="-120"/>
-                        </a:rPr>
-                        <a:t>걸림돌은 비용 대비 효과, 공간, 인플루언서 일정이다.</a:t>
-                      </a:r>
-                      <a:pPr algn="l" indent="0" marL="0">
-                        <a:buNone/>
-                      </a:pPr>
-                      <a:r>
-                        <a:rPr lang="en-US" sz="850" dirty="0">
-                          <a:solidFill>
-                            <a:srgbClr val="64748B"/>
-                          </a:solidFill>
-                          <a:latin typeface="Noto Sans KR" pitchFamily="34" charset="0"/>
-                          <a:ea typeface="Noto Sans KR" pitchFamily="34" charset="-122"/>
-                          <a:cs typeface="Noto Sans KR" pitchFamily="34" charset="-120"/>
-                        </a:rPr>
-                        <a:t>  (Q4 · Q6)</a:t>
-                      </a:r>
-                      <a:endParaRPr lang="en-US" sz="850" dirty="0">
-                        <a:latin typeface="Noto Sans KR" charset="0"/>
-                        <a:ea typeface="Noto Sans KR" charset="0"/>
-                        <a:cs typeface="Noto Sans KR" charset="0"/>
-                      </a:endParaRPr>
-                    </a:p>
-                  </a:txBody>
-                  <a:tcPr marL="76200" marR="76200" marT="38100" marB="38100" anchor="ctr">
-                    <a:lnL w="6350" cap="flat" cmpd="sng" algn="ctr">
-                      <a:solidFill>
-                        <a:srgbClr val="CBD5E1"/>
-                      </a:solidFill>
-                      <a:prstDash val="solid"/>
-                      <a:round/>
-                      <a:headEnd type="none" w="med" len="med"/>
-                      <a:tailEnd type="none" w="med" len="med"/>
-                    </a:lnL>
-                    <a:lnR w="6350" cap="flat" cmpd="sng" algn="ctr">
-                      <a:solidFill>
-                        <a:srgbClr val="CBD5E1"/>
-                      </a:solidFill>
-                      <a:prstDash val="solid"/>
-                      <a:round/>
-                      <a:headEnd type="none" w="med" len="med"/>
-                      <a:tailEnd type="none" w="med" len="med"/>
-                    </a:lnR>
-                    <a:lnT w="6350" cap="flat" cmpd="sng" algn="ctr">
-                      <a:solidFill>
-                        <a:srgbClr val="CBD5E1"/>
-                      </a:solidFill>
-                      <a:prstDash val="solid"/>
-                      <a:round/>
-                      <a:headEnd type="none" w="med" len="med"/>
-                      <a:tailEnd type="none" w="med" len="med"/>
-                    </a:lnT>
-                    <a:lnB w="6350" cap="flat" cmpd="sng" algn="ctr">
-                      <a:solidFill>
-                        <a:srgbClr val="CBD5E1"/>
-                      </a:solidFill>
-                      <a:prstDash val="solid"/>
-                      <a:round/>
-                      <a:headEnd type="none" w="med" len="med"/>
-                      <a:tailEnd type="none" w="med" len="med"/>
-                    </a:lnB>
-                  </a:tcPr>
-                </a:tc>
-                <a:tc>
-                  <a:txBody>
-                    <a:bodyPr/>
-                    <a:lstStyle/>
-                    <a:p>
-                      <a:pPr algn="l" indent="0" marL="0">
-                        <a:buNone/>
-                      </a:pPr>
-                      <a:r>
-                        <a:rPr lang="en-US" sz="850" dirty="0">
-                          <a:solidFill>
-                            <a:srgbClr val="334155"/>
-                          </a:solidFill>
-                          <a:latin typeface="Noto Sans KR" pitchFamily="34" charset="0"/>
-                          <a:ea typeface="Noto Sans KR" pitchFamily="34" charset="-122"/>
-                          <a:cs typeface="Noto Sans KR" pitchFamily="34" charset="-120"/>
-                        </a:rPr>
-                        <a:t>샤워부스·얼음 바닥 공동 시연 공간을 주최 측이 만들고,</a:t>
-                      </a:r>
-                      <a:endParaRPr lang="en-US" sz="850" dirty="0">
-                        <a:latin typeface="Noto Sans KR" charset="0"/>
-                        <a:ea typeface="Noto Sans KR" charset="0"/>
-                        <a:cs typeface="Noto Sans KR" charset="0"/>
-                      </a:endParaRPr>
-                    </a:p>
-                    <a:p>
-                      <a:pPr algn="l" indent="0" marL="0">
-                        <a:buNone/>
-                      </a:pPr>
-                      <a:r>
-                        <a:rPr lang="en-US" sz="850" dirty="0">
-                          <a:solidFill>
-                            <a:srgbClr val="334155"/>
-                          </a:solidFill>
-                          <a:latin typeface="Noto Sans KR" pitchFamily="34" charset="0"/>
-                          <a:ea typeface="Noto Sans KR" pitchFamily="34" charset="-122"/>
-                          <a:cs typeface="Noto Sans KR" pitchFamily="34" charset="-120"/>
-                        </a:rPr>
-                        <a:t>인플루언서 섭외는 미디어 파트너가 돕는다.</a:t>
-                      </a:r>
-                      <a:pPr algn="l" indent="0" marL="0">
-                        <a:buNone/>
-                      </a:pPr>
-                      <a:r>
-                        <a:rPr lang="en-US" sz="850" dirty="0">
-                          <a:solidFill>
-                            <a:srgbClr val="64748B"/>
-                          </a:solidFill>
-                          <a:latin typeface="Noto Sans KR" pitchFamily="34" charset="0"/>
-                          <a:ea typeface="Noto Sans KR" pitchFamily="34" charset="-122"/>
-                          <a:cs typeface="Noto Sans KR" pitchFamily="34" charset="-120"/>
-                        </a:rPr>
-                        <a:t>  (2 · 6장)</a:t>
-                      </a:r>
-                      <a:endParaRPr lang="en-US" sz="850" dirty="0">
-                        <a:latin typeface="Noto Sans KR" charset="0"/>
-                        <a:ea typeface="Noto Sans KR" charset="0"/>
-                        <a:cs typeface="Noto Sans KR" charset="0"/>
-                      </a:endParaRPr>
-                    </a:p>
-                  </a:txBody>
-                  <a:tcPr marL="76200" marR="76200" marT="38100" marB="38100" anchor="ctr">
-                    <a:lnL w="6350" cap="flat" cmpd="sng" algn="ctr">
-                      <a:solidFill>
-                        <a:srgbClr val="CBD5E1"/>
-                      </a:solidFill>
-                      <a:prstDash val="solid"/>
-                      <a:round/>
-                      <a:headEnd type="none" w="med" len="med"/>
-                      <a:tailEnd type="none" w="med" len="med"/>
-                    </a:lnL>
-                    <a:lnR w="6350" cap="flat" cmpd="sng" algn="ctr">
-                      <a:solidFill>
-                        <a:srgbClr val="CBD5E1"/>
-                      </a:solidFill>
-                      <a:prstDash val="solid"/>
-                      <a:round/>
-                      <a:headEnd type="none" w="med" len="med"/>
-                      <a:tailEnd type="none" w="med" len="med"/>
-                    </a:lnR>
-                    <a:lnT w="6350" cap="flat" cmpd="sng" algn="ctr">
-                      <a:solidFill>
-                        <a:srgbClr val="CBD5E1"/>
-                      </a:solidFill>
-                      <a:prstDash val="solid"/>
-                      <a:round/>
-                      <a:headEnd type="none" w="med" len="med"/>
-                      <a:tailEnd type="none" w="med" len="med"/>
-                    </a:lnT>
-                    <a:lnB w="6350" cap="flat" cmpd="sng" algn="ctr">
-                      <a:solidFill>
-                        <a:srgbClr val="CBD5E1"/>
-                      </a:solidFill>
-                      <a:prstDash val="solid"/>
-                      <a:round/>
-                      <a:headEnd type="none" w="med" len="med"/>
-                      <a:tailEnd type="none" w="med" len="med"/>
-                    </a:lnB>
-                  </a:tcPr>
-                </a:tc>
-              </a:tr>
-              <a:tr h="391480">
-                <a:tc>
-                  <a:txBody>
-                    <a:bodyPr/>
-                    <a:lstStyle/>
-                    <a:p>
-                      <a:pPr algn="l" indent="0" marL="0">
-                        <a:buNone/>
-                      </a:pPr>
-                      <a:r>
-                        <a:rPr lang="en-US" sz="850" dirty="0">
-                          <a:solidFill>
-                            <a:srgbClr val="334155"/>
-                          </a:solidFill>
-                          <a:latin typeface="Noto Sans KR" pitchFamily="34" charset="0"/>
-                          <a:ea typeface="Noto Sans KR" pitchFamily="34" charset="-122"/>
-                          <a:cs typeface="Noto Sans KR" pitchFamily="34" charset="-120"/>
-                        </a:rPr>
-                        <a:t>기존 코엑스·킨텍스 아웃도어 박람회로</a:t>
-                      </a:r>
-                      <a:endParaRPr lang="en-US" sz="850" dirty="0">
-                        <a:latin typeface="Noto Sans KR" charset="0"/>
-                        <a:ea typeface="Noto Sans KR" charset="0"/>
-                        <a:cs typeface="Noto Sans KR" charset="0"/>
-                      </a:endParaRPr>
-                    </a:p>
-                    <a:p>
-                      <a:pPr algn="l" indent="0" marL="0">
-                        <a:buNone/>
-                      </a:pPr>
-                      <a:r>
-                        <a:rPr lang="en-US" sz="850" dirty="0">
-                          <a:solidFill>
-                            <a:srgbClr val="334155"/>
-                          </a:solidFill>
-                          <a:latin typeface="Noto Sans KR" pitchFamily="34" charset="0"/>
-                          <a:ea typeface="Noto Sans KR" pitchFamily="34" charset="-122"/>
-                          <a:cs typeface="Noto Sans KR" pitchFamily="34" charset="-120"/>
-                        </a:rPr>
-                        <a:t>충분할 것이다.</a:t>
-                      </a:r>
-                      <a:endParaRPr lang="en-US" sz="850" dirty="0">
-                        <a:latin typeface="Noto Sans KR" charset="0"/>
-                        <a:ea typeface="Noto Sans KR" charset="0"/>
-                        <a:cs typeface="Noto Sans KR" charset="0"/>
-                      </a:endParaRPr>
-                    </a:p>
-                  </a:txBody>
-                  <a:tcPr marL="76200" marR="76200" marT="38100" marB="38100" anchor="ctr">
-                    <a:lnL w="6350" cap="flat" cmpd="sng" algn="ctr">
-                      <a:solidFill>
-                        <a:srgbClr val="CBD5E1"/>
-                      </a:solidFill>
-                      <a:prstDash val="solid"/>
-                      <a:round/>
-                      <a:headEnd type="none" w="med" len="med"/>
-                      <a:tailEnd type="none" w="med" len="med"/>
-                    </a:lnL>
-                    <a:lnR w="6350" cap="flat" cmpd="sng" algn="ctr">
-                      <a:solidFill>
-                        <a:srgbClr val="CBD5E1"/>
-                      </a:solidFill>
-                      <a:prstDash val="solid"/>
-                      <a:round/>
-                      <a:headEnd type="none" w="med" len="med"/>
-                      <a:tailEnd type="none" w="med" len="med"/>
-                    </a:lnR>
-                    <a:lnT w="6350" cap="flat" cmpd="sng" algn="ctr">
-                      <a:solidFill>
-                        <a:srgbClr val="CBD5E1"/>
-                      </a:solidFill>
-                      <a:prstDash val="solid"/>
-                      <a:round/>
-                      <a:headEnd type="none" w="med" len="med"/>
-                      <a:tailEnd type="none" w="med" len="med"/>
-                    </a:lnT>
-                    <a:lnB w="6350" cap="flat" cmpd="sng" algn="ctr">
-                      <a:solidFill>
-                        <a:srgbClr val="CBD5E1"/>
-                      </a:solidFill>
-                      <a:prstDash val="solid"/>
-                      <a:round/>
-                      <a:headEnd type="none" w="med" len="med"/>
-                      <a:tailEnd type="none" w="med" len="med"/>
-                    </a:lnB>
-                  </a:tcPr>
-                </a:tc>
-                <a:tc>
-                  <a:txBody>
-                    <a:bodyPr/>
-                    <a:lstStyle/>
-                    <a:p>
-                      <a:pPr algn="l" indent="0" marL="0">
-                        <a:buNone/>
-                      </a:pPr>
-                      <a:r>
-                        <a:rPr lang="en-US" sz="850" dirty="0">
-                          <a:solidFill>
-                            <a:srgbClr val="334155"/>
-                          </a:solidFill>
-                          <a:latin typeface="Noto Sans KR" pitchFamily="34" charset="0"/>
-                          <a:ea typeface="Noto Sans KR" pitchFamily="34" charset="-122"/>
-                          <a:cs typeface="Noto Sans KR" pitchFamily="34" charset="-120"/>
-                        </a:rPr>
-                        <a:t>고객의 니즈가 달라서 참여하지 않는다.</a:t>
-                      </a:r>
-                      <a:pPr algn="l" indent="0" marL="0">
-                        <a:buNone/>
-                      </a:pPr>
-                      <a:r>
-                        <a:rPr lang="en-US" sz="850" dirty="0">
-                          <a:solidFill>
-                            <a:srgbClr val="64748B"/>
-                          </a:solidFill>
-                          <a:latin typeface="Noto Sans KR" pitchFamily="34" charset="0"/>
-                          <a:ea typeface="Noto Sans KR" pitchFamily="34" charset="-122"/>
-                          <a:cs typeface="Noto Sans KR" pitchFamily="34" charset="-120"/>
-                        </a:rPr>
-                        <a:t>  (Q6)</a:t>
-                      </a:r>
-                      <a:endParaRPr lang="en-US" sz="850" dirty="0">
-                        <a:latin typeface="Noto Sans KR" charset="0"/>
-                        <a:ea typeface="Noto Sans KR" charset="0"/>
-                        <a:cs typeface="Noto Sans KR" charset="0"/>
-                      </a:endParaRPr>
-                    </a:p>
-                  </a:txBody>
-                  <a:tcPr marL="76200" marR="76200" marT="38100" marB="38100" anchor="ctr">
-                    <a:lnL w="6350" cap="flat" cmpd="sng" algn="ctr">
-                      <a:solidFill>
-                        <a:srgbClr val="CBD5E1"/>
-                      </a:solidFill>
-                      <a:prstDash val="solid"/>
-                      <a:round/>
-                      <a:headEnd type="none" w="med" len="med"/>
-                      <a:tailEnd type="none" w="med" len="med"/>
-                    </a:lnL>
-                    <a:lnR w="6350" cap="flat" cmpd="sng" algn="ctr">
-                      <a:solidFill>
-                        <a:srgbClr val="CBD5E1"/>
-                      </a:solidFill>
-                      <a:prstDash val="solid"/>
-                      <a:round/>
-                      <a:headEnd type="none" w="med" len="med"/>
-                      <a:tailEnd type="none" w="med" len="med"/>
-                    </a:lnR>
-                    <a:lnT w="6350" cap="flat" cmpd="sng" algn="ctr">
-                      <a:solidFill>
-                        <a:srgbClr val="CBD5E1"/>
-                      </a:solidFill>
-                      <a:prstDash val="solid"/>
-                      <a:round/>
-                      <a:headEnd type="none" w="med" len="med"/>
-                      <a:tailEnd type="none" w="med" len="med"/>
-                    </a:lnT>
-                    <a:lnB w="6350" cap="flat" cmpd="sng" algn="ctr">
-                      <a:solidFill>
-                        <a:srgbClr val="CBD5E1"/>
-                      </a:solidFill>
-                      <a:prstDash val="solid"/>
-                      <a:round/>
-                      <a:headEnd type="none" w="med" len="med"/>
-                      <a:tailEnd type="none" w="med" len="med"/>
-                    </a:lnB>
-                  </a:tcPr>
-                </a:tc>
-                <a:tc>
-                  <a:txBody>
-                    <a:bodyPr/>
-                    <a:lstStyle/>
-                    <a:p>
-                      <a:pPr algn="l" indent="0" marL="0">
-                        <a:buNone/>
-                      </a:pPr>
-                      <a:r>
-                        <a:rPr lang="en-US" sz="850" dirty="0">
-                          <a:solidFill>
-                            <a:srgbClr val="334155"/>
-                          </a:solidFill>
-                          <a:latin typeface="Noto Sans KR" pitchFamily="34" charset="0"/>
-                          <a:ea typeface="Noto Sans KR" pitchFamily="34" charset="-122"/>
-                          <a:cs typeface="Noto Sans KR" pitchFamily="34" charset="-120"/>
-                        </a:rPr>
-                        <a:t>캠핑·장비 판매전이 아니라</a:t>
-                      </a:r>
-                      <a:endParaRPr lang="en-US" sz="850" dirty="0">
-                        <a:latin typeface="Noto Sans KR" charset="0"/>
-                        <a:ea typeface="Noto Sans KR" charset="0"/>
-                        <a:cs typeface="Noto Sans KR" charset="0"/>
-                      </a:endParaRPr>
-                    </a:p>
-                    <a:p>
-                      <a:pPr algn="l" indent="0" marL="0">
-                        <a:buNone/>
-                      </a:pPr>
-                      <a:r>
-                        <a:rPr lang="en-US" sz="850" dirty="0">
-                          <a:solidFill>
-                            <a:srgbClr val="334155"/>
-                          </a:solidFill>
-                          <a:latin typeface="Noto Sans KR" pitchFamily="34" charset="0"/>
-                          <a:ea typeface="Noto Sans KR" pitchFamily="34" charset="-122"/>
-                          <a:cs typeface="Noto Sans KR" pitchFamily="34" charset="-120"/>
-                        </a:rPr>
-                        <a:t>고프코어 패션 한 분야로 좁혔다.</a:t>
-                      </a:r>
-                      <a:pPr algn="l" indent="0" marL="0">
-                        <a:buNone/>
-                      </a:pPr>
-                      <a:r>
-                        <a:rPr lang="en-US" sz="850" dirty="0">
-                          <a:solidFill>
-                            <a:srgbClr val="64748B"/>
-                          </a:solidFill>
-                          <a:latin typeface="Noto Sans KR" pitchFamily="34" charset="0"/>
-                          <a:ea typeface="Noto Sans KR" pitchFamily="34" charset="-122"/>
-                          <a:cs typeface="Noto Sans KR" pitchFamily="34" charset="-120"/>
-                        </a:rPr>
-                        <a:t>  (1장)</a:t>
-                      </a:r>
-                      <a:endParaRPr lang="en-US" sz="850" dirty="0">
-                        <a:latin typeface="Noto Sans KR" charset="0"/>
-                        <a:ea typeface="Noto Sans KR" charset="0"/>
-                        <a:cs typeface="Noto Sans KR" charset="0"/>
-                      </a:endParaRPr>
-                    </a:p>
-                  </a:txBody>
-                  <a:tcPr marL="76200" marR="76200" marT="38100" marB="38100" anchor="ctr">
-                    <a:lnL w="6350" cap="flat" cmpd="sng" algn="ctr">
-                      <a:solidFill>
-                        <a:srgbClr val="CBD5E1"/>
-                      </a:solidFill>
-                      <a:prstDash val="solid"/>
-                      <a:round/>
-                      <a:headEnd type="none" w="med" len="med"/>
-                      <a:tailEnd type="none" w="med" len="med"/>
-                    </a:lnL>
-                    <a:lnR w="6350" cap="flat" cmpd="sng" algn="ctr">
-                      <a:solidFill>
-                        <a:srgbClr val="CBD5E1"/>
-                      </a:solidFill>
-                      <a:prstDash val="solid"/>
-                      <a:round/>
-                      <a:headEnd type="none" w="med" len="med"/>
-                      <a:tailEnd type="none" w="med" len="med"/>
-                    </a:lnR>
-                    <a:lnT w="6350" cap="flat" cmpd="sng" algn="ctr">
-                      <a:solidFill>
-                        <a:srgbClr val="CBD5E1"/>
-                      </a:solidFill>
-                      <a:prstDash val="solid"/>
-                      <a:round/>
-                      <a:headEnd type="none" w="med" len="med"/>
-                      <a:tailEnd type="none" w="med" len="med"/>
-                    </a:lnT>
-                    <a:lnB w="6350" cap="flat" cmpd="sng" algn="ctr">
-                      <a:solidFill>
-                        <a:srgbClr val="CBD5E1"/>
-                      </a:solidFill>
-                      <a:prstDash val="solid"/>
-                      <a:round/>
-                      <a:headEnd type="none" w="med" len="med"/>
-                      <a:tailEnd type="none" w="med" len="med"/>
-                    </a:lnB>
-                  </a:tcPr>
-                </a:tc>
-              </a:tr>
-              <a:tr h="391480">
-                <a:tc>
-                  <a:txBody>
-                    <a:bodyPr/>
-                    <a:lstStyle/>
-                    <a:p>
-                      <a:pPr algn="l" indent="0" marL="0">
-                        <a:buNone/>
-                      </a:pPr>
-                      <a:r>
-                        <a:rPr lang="en-US" sz="850" dirty="0">
-                          <a:solidFill>
-                            <a:srgbClr val="334155"/>
-                          </a:solidFill>
-                          <a:latin typeface="Noto Sans KR" pitchFamily="34" charset="0"/>
-                          <a:ea typeface="Noto Sans KR" pitchFamily="34" charset="-122"/>
-                          <a:cs typeface="Noto Sans KR" pitchFamily="34" charset="-120"/>
-                        </a:rPr>
-                        <a:t>일반 소비자는 주요 고객이 아닐 것이다.</a:t>
-                      </a:r>
-                      <a:endParaRPr lang="en-US" sz="850" dirty="0">
-                        <a:latin typeface="Noto Sans KR" charset="0"/>
-                        <a:ea typeface="Noto Sans KR" charset="0"/>
-                        <a:cs typeface="Noto Sans KR" charset="0"/>
-                      </a:endParaRPr>
-                    </a:p>
-                  </a:txBody>
-                  <a:tcPr marL="76200" marR="76200" marT="38100" marB="38100" anchor="ctr">
-                    <a:lnL w="6350" cap="flat" cmpd="sng" algn="ctr">
-                      <a:solidFill>
-                        <a:srgbClr val="CBD5E1"/>
-                      </a:solidFill>
-                      <a:prstDash val="solid"/>
-                      <a:round/>
-                      <a:headEnd type="none" w="med" len="med"/>
-                      <a:tailEnd type="none" w="med" len="med"/>
-                    </a:lnL>
-                    <a:lnR w="6350" cap="flat" cmpd="sng" algn="ctr">
-                      <a:solidFill>
-                        <a:srgbClr val="CBD5E1"/>
-                      </a:solidFill>
-                      <a:prstDash val="solid"/>
-                      <a:round/>
-                      <a:headEnd type="none" w="med" len="med"/>
-                      <a:tailEnd type="none" w="med" len="med"/>
-                    </a:lnR>
-                    <a:lnT w="6350" cap="flat" cmpd="sng" algn="ctr">
-                      <a:solidFill>
-                        <a:srgbClr val="CBD5E1"/>
-                      </a:solidFill>
-                      <a:prstDash val="solid"/>
-                      <a:round/>
-                      <a:headEnd type="none" w="med" len="med"/>
-                      <a:tailEnd type="none" w="med" len="med"/>
-                    </a:lnT>
-                    <a:lnB w="6350" cap="flat" cmpd="sng" algn="ctr">
-                      <a:solidFill>
-                        <a:srgbClr val="CBD5E1"/>
-                      </a:solidFill>
-                      <a:prstDash val="solid"/>
-                      <a:round/>
-                      <a:headEnd type="none" w="med" len="med"/>
-                      <a:tailEnd type="none" w="med" len="med"/>
-                    </a:lnB>
-                  </a:tcPr>
-                </a:tc>
-                <a:tc>
-                  <a:txBody>
-                    <a:bodyPr/>
-                    <a:lstStyle/>
-                    <a:p>
-                      <a:pPr algn="l" indent="0" marL="0">
-                        <a:buNone/>
-                      </a:pPr>
-                      <a:r>
-                        <a:rPr lang="en-US" sz="850" dirty="0">
-                          <a:solidFill>
-                            <a:srgbClr val="334155"/>
-                          </a:solidFill>
-                          <a:latin typeface="Noto Sans KR" pitchFamily="34" charset="0"/>
-                          <a:ea typeface="Noto Sans KR" pitchFamily="34" charset="-122"/>
-                          <a:cs typeface="Noto Sans KR" pitchFamily="34" charset="-120"/>
-                        </a:rPr>
-                        <a:t>B2C 매출이 약 30%라</a:t>
-                      </a:r>
-                      <a:endParaRPr lang="en-US" sz="850" dirty="0">
-                        <a:latin typeface="Noto Sans KR" charset="0"/>
-                        <a:ea typeface="Noto Sans KR" charset="0"/>
-                        <a:cs typeface="Noto Sans KR" charset="0"/>
-                      </a:endParaRPr>
-                    </a:p>
-                    <a:p>
-                      <a:pPr algn="l" indent="0" marL="0">
-                        <a:buNone/>
-                      </a:pPr>
-                      <a:r>
-                        <a:rPr lang="en-US" sz="850" dirty="0">
-                          <a:solidFill>
-                            <a:srgbClr val="334155"/>
-                          </a:solidFill>
-                          <a:latin typeface="Noto Sans KR" pitchFamily="34" charset="0"/>
-                          <a:ea typeface="Noto Sans KR" pitchFamily="34" charset="-122"/>
-                          <a:cs typeface="Noto Sans KR" pitchFamily="34" charset="-120"/>
-                        </a:rPr>
-                        <a:t>일반 고객을 매우 중요하게 생각한다.</a:t>
-                      </a:r>
-                      <a:pPr algn="l" indent="0" marL="0">
-                        <a:buNone/>
-                      </a:pPr>
-                      <a:r>
-                        <a:rPr lang="en-US" sz="850" dirty="0">
-                          <a:solidFill>
-                            <a:srgbClr val="64748B"/>
-                          </a:solidFill>
-                          <a:latin typeface="Noto Sans KR" pitchFamily="34" charset="0"/>
-                          <a:ea typeface="Noto Sans KR" pitchFamily="34" charset="-122"/>
-                          <a:cs typeface="Noto Sans KR" pitchFamily="34" charset="-120"/>
-                        </a:rPr>
-                        <a:t>  (Q2)</a:t>
-                      </a:r>
-                      <a:endParaRPr lang="en-US" sz="850" dirty="0">
-                        <a:latin typeface="Noto Sans KR" charset="0"/>
-                        <a:ea typeface="Noto Sans KR" charset="0"/>
-                        <a:cs typeface="Noto Sans KR" charset="0"/>
-                      </a:endParaRPr>
-                    </a:p>
-                  </a:txBody>
-                  <a:tcPr marL="76200" marR="76200" marT="38100" marB="38100" anchor="ctr">
-                    <a:lnL w="6350" cap="flat" cmpd="sng" algn="ctr">
-                      <a:solidFill>
-                        <a:srgbClr val="CBD5E1"/>
-                      </a:solidFill>
-                      <a:prstDash val="solid"/>
-                      <a:round/>
-                      <a:headEnd type="none" w="med" len="med"/>
-                      <a:tailEnd type="none" w="med" len="med"/>
-                    </a:lnL>
-                    <a:lnR w="6350" cap="flat" cmpd="sng" algn="ctr">
-                      <a:solidFill>
-                        <a:srgbClr val="CBD5E1"/>
-                      </a:solidFill>
-                      <a:prstDash val="solid"/>
-                      <a:round/>
-                      <a:headEnd type="none" w="med" len="med"/>
-                      <a:tailEnd type="none" w="med" len="med"/>
-                    </a:lnR>
-                    <a:lnT w="6350" cap="flat" cmpd="sng" algn="ctr">
-                      <a:solidFill>
-                        <a:srgbClr val="CBD5E1"/>
-                      </a:solidFill>
-                      <a:prstDash val="solid"/>
-                      <a:round/>
-                      <a:headEnd type="none" w="med" len="med"/>
-                      <a:tailEnd type="none" w="med" len="med"/>
-                    </a:lnT>
-                    <a:lnB w="6350" cap="flat" cmpd="sng" algn="ctr">
-                      <a:solidFill>
-                        <a:srgbClr val="CBD5E1"/>
-                      </a:solidFill>
-                      <a:prstDash val="solid"/>
-                      <a:round/>
-                      <a:headEnd type="none" w="med" len="med"/>
-                      <a:tailEnd type="none" w="med" len="med"/>
-                    </a:lnB>
-                  </a:tcPr>
-                </a:tc>
-                <a:tc>
-                  <a:txBody>
-                    <a:bodyPr/>
-                    <a:lstStyle/>
-                    <a:p>
-                      <a:pPr algn="l" indent="0" marL="0">
-                        <a:buNone/>
-                      </a:pPr>
-                      <a:r>
-                        <a:rPr lang="en-US" sz="850" dirty="0">
-                          <a:solidFill>
-                            <a:srgbClr val="334155"/>
-                          </a:solidFill>
-                          <a:latin typeface="Noto Sans KR" pitchFamily="34" charset="0"/>
-                          <a:ea typeface="Noto Sans KR" pitchFamily="34" charset="-122"/>
-                          <a:cs typeface="Noto Sans KR" pitchFamily="34" charset="-120"/>
-                        </a:rPr>
-                        <a:t>관람객 수보다 관심사 사전등록과</a:t>
-                      </a:r>
-                      <a:endParaRPr lang="en-US" sz="850" dirty="0">
-                        <a:latin typeface="Noto Sans KR" charset="0"/>
-                        <a:ea typeface="Noto Sans KR" charset="0"/>
-                        <a:cs typeface="Noto Sans KR" charset="0"/>
-                      </a:endParaRPr>
-                    </a:p>
-                    <a:p>
-                      <a:pPr algn="l" indent="0" marL="0">
-                        <a:buNone/>
-                      </a:pPr>
-                      <a:r>
-                        <a:rPr lang="en-US" sz="850" dirty="0">
-                          <a:solidFill>
-                            <a:srgbClr val="334155"/>
-                          </a:solidFill>
-                          <a:latin typeface="Noto Sans KR" pitchFamily="34" charset="0"/>
-                          <a:ea typeface="Noto Sans KR" pitchFamily="34" charset="-122"/>
-                          <a:cs typeface="Noto Sans KR" pitchFamily="34" charset="-120"/>
-                        </a:rPr>
-                        <a:t>Test Lab 체험률로 성과를 잰다.</a:t>
-                      </a:r>
-                      <a:pPr algn="l" indent="0" marL="0">
-                        <a:buNone/>
-                      </a:pPr>
-                      <a:r>
-                        <a:rPr lang="en-US" sz="850" dirty="0">
-                          <a:solidFill>
-                            <a:srgbClr val="64748B"/>
-                          </a:solidFill>
-                          <a:latin typeface="Noto Sans KR" pitchFamily="34" charset="0"/>
-                          <a:ea typeface="Noto Sans KR" pitchFamily="34" charset="-122"/>
-                          <a:cs typeface="Noto Sans KR" pitchFamily="34" charset="-120"/>
-                        </a:rPr>
-                        <a:t>  (3장)</a:t>
-                      </a:r>
-                      <a:endParaRPr lang="en-US" sz="850" dirty="0">
-                        <a:latin typeface="Noto Sans KR" charset="0"/>
-                        <a:ea typeface="Noto Sans KR" charset="0"/>
-                        <a:cs typeface="Noto Sans KR" charset="0"/>
-                      </a:endParaRPr>
-                    </a:p>
-                  </a:txBody>
-                  <a:tcPr marL="76200" marR="76200" marT="38100" marB="38100" anchor="ctr">
-                    <a:lnL w="6350" cap="flat" cmpd="sng" algn="ctr">
-                      <a:solidFill>
-                        <a:srgbClr val="CBD5E1"/>
-                      </a:solidFill>
-                      <a:prstDash val="solid"/>
-                      <a:round/>
-                      <a:headEnd type="none" w="med" len="med"/>
-                      <a:tailEnd type="none" w="med" len="med"/>
-                    </a:lnL>
-                    <a:lnR w="6350" cap="flat" cmpd="sng" algn="ctr">
-                      <a:solidFill>
-                        <a:srgbClr val="CBD5E1"/>
-                      </a:solidFill>
-                      <a:prstDash val="solid"/>
-                      <a:round/>
-                      <a:headEnd type="none" w="med" len="med"/>
-                      <a:tailEnd type="none" w="med" len="med"/>
-                    </a:lnR>
-                    <a:lnT w="6350" cap="flat" cmpd="sng" algn="ctr">
-                      <a:solidFill>
-                        <a:srgbClr val="CBD5E1"/>
-                      </a:solidFill>
-                      <a:prstDash val="solid"/>
-                      <a:round/>
-                      <a:headEnd type="none" w="med" len="med"/>
-                      <a:tailEnd type="none" w="med" len="med"/>
-                    </a:lnT>
-                    <a:lnB w="6350" cap="flat" cmpd="sng" algn="ctr">
-                      <a:solidFill>
-                        <a:srgbClr val="CBD5E1"/>
-                      </a:solidFill>
-                      <a:prstDash val="solid"/>
-                      <a:round/>
-                      <a:headEnd type="none" w="med" len="med"/>
-                      <a:tailEnd type="none" w="med" len="med"/>
-                    </a:lnB>
-                  </a:tcPr>
-                </a:tc>
-              </a:tr>
-            </a:tbl>
-          </a:graphicData>
-        </a:graphic>
-      </p:graphicFrame>
+      <p:sp>
+        <p:nvSpPr>
+          <p:cNvPr id="9" name="제목 기획 수정 (반영 위치)"/>
+          <p:cNvSpPr txBox="1"/>
+          <p:nvPr/>
+        </p:nvSpPr>
+        <p:spPr>
+          <a:xfrm>
+            <a:off x="4315968" y="3338144"/>
+            <a:ext cx="3977640" cy="237744"/>
+          </a:xfrm>
+          <a:prstGeom prst="rect">
+            <a:avLst/>
+          </a:prstGeom>
+          <a:noFill/>
+          <a:ln/>
+        </p:spPr>
+        <p:txBody>
+          <a:bodyPr wrap="square" lIns="0" tIns="0" rIns="0" bIns="0" rtlCol="0" anchor="ctr"/>
+          <a:lstStyle/>
+          <a:p>
+            <a:pPr algn="l" indent="0" marL="0">
+              <a:lnSpc>
+                <a:spcPct val="100000"/>
+              </a:lnSpc>
+              <a:buNone/>
+            </a:pPr>
+            <a:r>
+              <a:rPr lang="en-US" sz="1050" b="1" dirty="0">
+                <a:solidFill>
+                  <a:srgbClr val="182F48"/>
+                </a:solidFill>
+                <a:latin typeface="Noto Sans KR" pitchFamily="34" charset="0"/>
+                <a:ea typeface="Noto Sans KR" pitchFamily="34" charset="-122"/>
+                <a:cs typeface="Noto Sans KR" pitchFamily="34" charset="-120"/>
+              </a:rPr>
+              <a:t>기획 수정 (반영 위치)</a:t>
+            </a:r>
+            <a:endParaRPr lang="en-US" sz="1050" dirty="0"/>
+          </a:p>
+        </p:txBody>
+      </p:sp>
+      <p:sp>
+        <p:nvSpPr>
+          <p:cNvPr id="10" name="제목 추가 확인 사항"/>
+          <p:cNvSpPr txBox="1"/>
+          <p:nvPr/>
+        </p:nvSpPr>
+        <p:spPr>
+          <a:xfrm>
+            <a:off x="8476488" y="3338144"/>
+            <a:ext cx="3099816" cy="237744"/>
+          </a:xfrm>
+          <a:prstGeom prst="rect">
+            <a:avLst/>
+          </a:prstGeom>
+          <a:noFill/>
+          <a:ln/>
+        </p:spPr>
+        <p:txBody>
+          <a:bodyPr wrap="square" lIns="0" tIns="0" rIns="0" bIns="0" rtlCol="0" anchor="ctr"/>
+          <a:lstStyle/>
+          <a:p>
+            <a:pPr algn="l" indent="0" marL="0">
+              <a:lnSpc>
+                <a:spcPct val="100000"/>
+              </a:lnSpc>
+              <a:buNone/>
+            </a:pPr>
+            <a:r>
+              <a:rPr lang="en-US" sz="1050" b="1" dirty="0">
+                <a:solidFill>
+                  <a:srgbClr val="182F48"/>
+                </a:solidFill>
+                <a:latin typeface="Noto Sans KR" pitchFamily="34" charset="0"/>
+                <a:ea typeface="Noto Sans KR" pitchFamily="34" charset="-122"/>
+                <a:cs typeface="Noto Sans KR" pitchFamily="34" charset="-120"/>
+              </a:rPr>
+              <a:t>추가 확인 사항</a:t>
+            </a:r>
+            <a:endParaRPr lang="en-US" sz="1050" dirty="0"/>
+          </a:p>
+        </p:txBody>
+      </p:sp>
+      <p:sp>
+        <p:nvSpPr>
+          <p:cNvPr id="11" name="가정 H1"/>
+          <p:cNvSpPr txBox="1"/>
+          <p:nvPr/>
+        </p:nvSpPr>
+        <p:spPr>
+          <a:xfrm>
+            <a:off x="612648" y="3630752"/>
+            <a:ext cx="3520440" cy="605644"/>
+          </a:xfrm>
+          <a:prstGeom prst="roundRect">
+            <a:avLst>
+              <a:gd name="adj" fmla="val 7549"/>
+            </a:avLst>
+          </a:prstGeom>
+          <a:solidFill>
+            <a:srgbClr val="F1F5F9"/>
+          </a:solidFill>
+          <a:ln/>
+        </p:spPr>
+        <p:txBody>
+          <a:bodyPr wrap="square" lIns="91440" tIns="0" rIns="91440" bIns="0" rtlCol="0" anchor="ctr"/>
+          <a:lstStyle/>
+          <a:p>
+            <a:pPr algn="l" indent="0" marL="0">
+              <a:lnSpc>
+                <a:spcPct val="95000"/>
+              </a:lnSpc>
+              <a:spcAft>
+                <a:spcPts val="100"/>
+              </a:spcAft>
+              <a:buNone/>
+            </a:pPr>
+            <a:r>
+              <a:rPr lang="en-US" sz="780" b="1" dirty="0">
+                <a:solidFill>
+                  <a:srgbClr val="267D86"/>
+                </a:solidFill>
+                <a:latin typeface="Noto Sans KR" pitchFamily="34" charset="0"/>
+                <a:ea typeface="Noto Sans KR" pitchFamily="34" charset="-122"/>
+                <a:cs typeface="Noto Sans KR" pitchFamily="34" charset="-120"/>
+              </a:rPr>
+              <a:t>H1  </a:t>
+            </a:r>
+            <a:pPr algn="l" indent="0" marL="0">
+              <a:lnSpc>
+                <a:spcPct val="95000"/>
+              </a:lnSpc>
+              <a:spcAft>
+                <a:spcPts val="100"/>
+              </a:spcAft>
+              <a:buNone/>
+            </a:pPr>
+            <a:r>
+              <a:rPr lang="en-US" sz="780" b="1" dirty="0">
+                <a:solidFill>
+                  <a:srgbClr val="182F48"/>
+                </a:solidFill>
+                <a:latin typeface="Noto Sans KR" pitchFamily="34" charset="0"/>
+                <a:ea typeface="Noto Sans KR" pitchFamily="34" charset="-122"/>
+                <a:cs typeface="Noto Sans KR" pitchFamily="34" charset="-120"/>
+              </a:rPr>
+              <a:t>브랜드는 바이어 미팅 · 현장판매를 가장 중시할 것</a:t>
+            </a:r>
+            <a:endParaRPr lang="en-US" sz="780" dirty="0"/>
+          </a:p>
+          <a:p>
+            <a:pPr algn="l" indent="0" marL="0">
+              <a:lnSpc>
+                <a:spcPct val="95000"/>
+              </a:lnSpc>
+              <a:spcAft>
+                <a:spcPts val="100"/>
+              </a:spcAft>
+              <a:buNone/>
+            </a:pPr>
+            <a:r>
+              <a:rPr lang="en-US" sz="780" b="1" dirty="0">
+                <a:solidFill>
+                  <a:srgbClr val="C2410C"/>
+                </a:solidFill>
+                <a:latin typeface="Noto Sans KR" pitchFamily="34" charset="0"/>
+                <a:ea typeface="Noto Sans KR" pitchFamily="34" charset="-122"/>
+                <a:cs typeface="Noto Sans KR" pitchFamily="34" charset="-120"/>
+              </a:rPr>
+              <a:t>기각  </a:t>
+            </a:r>
+            <a:pPr algn="l" indent="0" marL="0">
+              <a:lnSpc>
+                <a:spcPct val="95000"/>
+              </a:lnSpc>
+              <a:spcAft>
+                <a:spcPts val="100"/>
+              </a:spcAft>
+              <a:buNone/>
+            </a:pPr>
+            <a:r>
+              <a:rPr lang="en-US" sz="780" dirty="0">
+                <a:solidFill>
+                  <a:srgbClr val="334155"/>
+                </a:solidFill>
+                <a:latin typeface="Noto Sans KR" pitchFamily="34" charset="0"/>
+                <a:ea typeface="Noto Sans KR" pitchFamily="34" charset="-122"/>
+                <a:cs typeface="Noto Sans KR" pitchFamily="34" charset="-120"/>
+              </a:rPr>
+              <a:t>투자·바이어·현장판매·고객 확보는 의미가 적다고 했다.</a:t>
+            </a:r>
+            <a:endParaRPr lang="en-US" sz="780" dirty="0"/>
+          </a:p>
+          <a:p>
+            <a:pPr algn="l" indent="0" marL="0">
+              <a:lnSpc>
+                <a:spcPct val="95000"/>
+              </a:lnSpc>
+              <a:spcAft>
+                <a:spcPts val="100"/>
+              </a:spcAft>
+              <a:buNone/>
+            </a:pPr>
+            <a:r>
+              <a:rPr lang="en-US" sz="780" dirty="0">
+                <a:solidFill>
+                  <a:srgbClr val="334155"/>
+                </a:solidFill>
+                <a:latin typeface="Noto Sans KR" pitchFamily="34" charset="0"/>
+                <a:ea typeface="Noto Sans KR" pitchFamily="34" charset="-122"/>
+                <a:cs typeface="Noto Sans KR" pitchFamily="34" charset="-120"/>
+              </a:rPr>
+              <a:t>        </a:t>
+            </a:r>
+            <a:pPr algn="l" indent="0" marL="0">
+              <a:lnSpc>
+                <a:spcPct val="95000"/>
+              </a:lnSpc>
+              <a:spcAft>
+                <a:spcPts val="100"/>
+              </a:spcAft>
+              <a:buNone/>
+            </a:pPr>
+            <a:r>
+              <a:rPr lang="en-US" sz="780" dirty="0">
+                <a:solidFill>
+                  <a:srgbClr val="334155"/>
+                </a:solidFill>
+                <a:latin typeface="Noto Sans KR" pitchFamily="34" charset="0"/>
+                <a:ea typeface="Noto Sans KR" pitchFamily="34" charset="-122"/>
+                <a:cs typeface="Noto Sans KR" pitchFamily="34" charset="-120"/>
+              </a:rPr>
+              <a:t>목적은 브랜드 홍보와 장비를 깊게 들어줄 관심 고객이다.</a:t>
+            </a:r>
+            <a:endParaRPr lang="en-US" sz="780" dirty="0"/>
+          </a:p>
+        </p:txBody>
+      </p:sp>
+      <p:sp>
+        <p:nvSpPr>
+          <p:cNvPr id="12" name="가정 H2"/>
+          <p:cNvSpPr txBox="1"/>
+          <p:nvPr/>
+        </p:nvSpPr>
+        <p:spPr>
+          <a:xfrm>
+            <a:off x="612648" y="4309548"/>
+            <a:ext cx="3520440" cy="605644"/>
+          </a:xfrm>
+          <a:prstGeom prst="roundRect">
+            <a:avLst>
+              <a:gd name="adj" fmla="val 7549"/>
+            </a:avLst>
+          </a:prstGeom>
+          <a:solidFill>
+            <a:srgbClr val="F1F5F9"/>
+          </a:solidFill>
+          <a:ln/>
+        </p:spPr>
+        <p:txBody>
+          <a:bodyPr wrap="square" lIns="91440" tIns="0" rIns="91440" bIns="0" rtlCol="0" anchor="ctr"/>
+          <a:lstStyle/>
+          <a:p>
+            <a:pPr algn="l" indent="0" marL="0">
+              <a:lnSpc>
+                <a:spcPct val="95000"/>
+              </a:lnSpc>
+              <a:spcAft>
+                <a:spcPts val="100"/>
+              </a:spcAft>
+              <a:buNone/>
+            </a:pPr>
+            <a:r>
+              <a:rPr lang="en-US" sz="780" b="1" dirty="0">
+                <a:solidFill>
+                  <a:srgbClr val="267D86"/>
+                </a:solidFill>
+                <a:latin typeface="Noto Sans KR" pitchFamily="34" charset="0"/>
+                <a:ea typeface="Noto Sans KR" pitchFamily="34" charset="-122"/>
+                <a:cs typeface="Noto Sans KR" pitchFamily="34" charset="-120"/>
+              </a:rPr>
+              <a:t>H2  </a:t>
+            </a:r>
+            <a:pPr algn="l" indent="0" marL="0">
+              <a:lnSpc>
+                <a:spcPct val="95000"/>
+              </a:lnSpc>
+              <a:spcAft>
+                <a:spcPts val="100"/>
+              </a:spcAft>
+              <a:buNone/>
+            </a:pPr>
+            <a:r>
+              <a:rPr lang="en-US" sz="780" b="1" dirty="0">
+                <a:solidFill>
+                  <a:srgbClr val="182F48"/>
+                </a:solidFill>
+                <a:latin typeface="Noto Sans KR" pitchFamily="34" charset="0"/>
+                <a:ea typeface="Noto Sans KR" pitchFamily="34" charset="-122"/>
+                <a:cs typeface="Noto Sans KR" pitchFamily="34" charset="-120"/>
+              </a:rPr>
+              <a:t>부스비가 가장 큰 참가 장벽일 것</a:t>
+            </a:r>
+            <a:endParaRPr lang="en-US" sz="780" dirty="0"/>
+          </a:p>
+          <a:p>
+            <a:pPr algn="l" indent="0" marL="0">
+              <a:lnSpc>
+                <a:spcPct val="95000"/>
+              </a:lnSpc>
+              <a:spcAft>
+                <a:spcPts val="100"/>
+              </a:spcAft>
+              <a:buNone/>
+            </a:pPr>
+            <a:r>
+              <a:rPr lang="en-US" sz="780" b="1" dirty="0">
+                <a:solidFill>
+                  <a:srgbClr val="267D86"/>
+                </a:solidFill>
+                <a:latin typeface="Noto Sans KR" pitchFamily="34" charset="0"/>
+                <a:ea typeface="Noto Sans KR" pitchFamily="34" charset="-122"/>
+                <a:cs typeface="Noto Sans KR" pitchFamily="34" charset="-120"/>
+              </a:rPr>
+              <a:t>부분  </a:t>
+            </a:r>
+            <a:pPr algn="l" indent="0" marL="0">
+              <a:lnSpc>
+                <a:spcPct val="95000"/>
+              </a:lnSpc>
+              <a:spcAft>
+                <a:spcPts val="100"/>
+              </a:spcAft>
+              <a:buNone/>
+            </a:pPr>
+            <a:r>
+              <a:rPr lang="en-US" sz="780" dirty="0">
+                <a:solidFill>
+                  <a:srgbClr val="334155"/>
+                </a:solidFill>
+                <a:latin typeface="Noto Sans KR" pitchFamily="34" charset="0"/>
+                <a:ea typeface="Noto Sans KR" pitchFamily="34" charset="-122"/>
+                <a:cs typeface="Noto Sans KR" pitchFamily="34" charset="-120"/>
+              </a:rPr>
+              <a:t>부스비는 늘 2만~5만 달러로 책정해 왔다.</a:t>
+            </a:r>
+            <a:endParaRPr lang="en-US" sz="780" dirty="0"/>
+          </a:p>
+          <a:p>
+            <a:pPr algn="l" indent="0" marL="0">
+              <a:lnSpc>
+                <a:spcPct val="95000"/>
+              </a:lnSpc>
+              <a:spcAft>
+                <a:spcPts val="100"/>
+              </a:spcAft>
+              <a:buNone/>
+            </a:pPr>
+            <a:r>
+              <a:rPr lang="en-US" sz="780" dirty="0">
+                <a:solidFill>
+                  <a:srgbClr val="334155"/>
+                </a:solidFill>
+                <a:latin typeface="Noto Sans KR" pitchFamily="34" charset="0"/>
+                <a:ea typeface="Noto Sans KR" pitchFamily="34" charset="-122"/>
+                <a:cs typeface="Noto Sans KR" pitchFamily="34" charset="-120"/>
+              </a:rPr>
+              <a:t>        </a:t>
+            </a:r>
+            <a:pPr algn="l" indent="0" marL="0">
+              <a:lnSpc>
+                <a:spcPct val="95000"/>
+              </a:lnSpc>
+              <a:spcAft>
+                <a:spcPts val="100"/>
+              </a:spcAft>
+              <a:buNone/>
+            </a:pPr>
+            <a:r>
+              <a:rPr lang="en-US" sz="780" dirty="0">
+                <a:solidFill>
+                  <a:srgbClr val="334155"/>
+                </a:solidFill>
+                <a:latin typeface="Noto Sans KR" pitchFamily="34" charset="0"/>
+                <a:ea typeface="Noto Sans KR" pitchFamily="34" charset="-122"/>
+                <a:cs typeface="Noto Sans KR" pitchFamily="34" charset="-120"/>
+              </a:rPr>
+              <a:t>실제 장벽은 비용 대비 효과·공간·인플루언서 일정이다.</a:t>
+            </a:r>
+            <a:endParaRPr lang="en-US" sz="780" dirty="0"/>
+          </a:p>
+        </p:txBody>
+      </p:sp>
+      <p:sp>
+        <p:nvSpPr>
+          <p:cNvPr id="13" name="가정 H3"/>
+          <p:cNvSpPr txBox="1"/>
+          <p:nvPr/>
+        </p:nvSpPr>
+        <p:spPr>
+          <a:xfrm>
+            <a:off x="612648" y="4988344"/>
+            <a:ext cx="3520440" cy="605644"/>
+          </a:xfrm>
+          <a:prstGeom prst="roundRect">
+            <a:avLst>
+              <a:gd name="adj" fmla="val 7549"/>
+            </a:avLst>
+          </a:prstGeom>
+          <a:solidFill>
+            <a:srgbClr val="F1F5F9"/>
+          </a:solidFill>
+          <a:ln/>
+        </p:spPr>
+        <p:txBody>
+          <a:bodyPr wrap="square" lIns="91440" tIns="0" rIns="91440" bIns="0" rtlCol="0" anchor="ctr"/>
+          <a:lstStyle/>
+          <a:p>
+            <a:pPr algn="l" indent="0" marL="0">
+              <a:lnSpc>
+                <a:spcPct val="95000"/>
+              </a:lnSpc>
+              <a:spcAft>
+                <a:spcPts val="100"/>
+              </a:spcAft>
+              <a:buNone/>
+            </a:pPr>
+            <a:r>
+              <a:rPr lang="en-US" sz="780" b="1" dirty="0">
+                <a:solidFill>
+                  <a:srgbClr val="267D86"/>
+                </a:solidFill>
+                <a:latin typeface="Noto Sans KR" pitchFamily="34" charset="0"/>
+                <a:ea typeface="Noto Sans KR" pitchFamily="34" charset="-122"/>
+                <a:cs typeface="Noto Sans KR" pitchFamily="34" charset="-120"/>
+              </a:rPr>
+              <a:t>H3  </a:t>
+            </a:r>
+            <a:pPr algn="l" indent="0" marL="0">
+              <a:lnSpc>
+                <a:spcPct val="95000"/>
+              </a:lnSpc>
+              <a:spcAft>
+                <a:spcPts val="100"/>
+              </a:spcAft>
+              <a:buNone/>
+            </a:pPr>
+            <a:r>
+              <a:rPr lang="en-US" sz="780" b="1" dirty="0">
+                <a:solidFill>
+                  <a:srgbClr val="182F48"/>
+                </a:solidFill>
+                <a:latin typeface="Noto Sans KR" pitchFamily="34" charset="0"/>
+                <a:ea typeface="Noto Sans KR" pitchFamily="34" charset="-122"/>
+                <a:cs typeface="Noto Sans KR" pitchFamily="34" charset="-120"/>
+              </a:rPr>
+              <a:t>기존 코엑스 · 킨텍스 아웃도어 행사로 충분할 것</a:t>
+            </a:r>
+            <a:endParaRPr lang="en-US" sz="780" dirty="0"/>
+          </a:p>
+          <a:p>
+            <a:pPr algn="l" indent="0" marL="0">
+              <a:lnSpc>
+                <a:spcPct val="95000"/>
+              </a:lnSpc>
+              <a:spcAft>
+                <a:spcPts val="100"/>
+              </a:spcAft>
+              <a:buNone/>
+            </a:pPr>
+            <a:r>
+              <a:rPr lang="en-US" sz="780" b="1" dirty="0">
+                <a:solidFill>
+                  <a:srgbClr val="C2410C"/>
+                </a:solidFill>
+                <a:latin typeface="Noto Sans KR" pitchFamily="34" charset="0"/>
+                <a:ea typeface="Noto Sans KR" pitchFamily="34" charset="-122"/>
+                <a:cs typeface="Noto Sans KR" pitchFamily="34" charset="-120"/>
+              </a:rPr>
+              <a:t>기각  </a:t>
+            </a:r>
+            <a:pPr algn="l" indent="0" marL="0">
+              <a:lnSpc>
+                <a:spcPct val="95000"/>
+              </a:lnSpc>
+              <a:spcAft>
+                <a:spcPts val="100"/>
+              </a:spcAft>
+              <a:buNone/>
+            </a:pPr>
+            <a:r>
+              <a:rPr lang="en-US" sz="780" dirty="0">
+                <a:solidFill>
+                  <a:srgbClr val="334155"/>
+                </a:solidFill>
+                <a:latin typeface="Noto Sans KR" pitchFamily="34" charset="0"/>
+                <a:ea typeface="Noto Sans KR" pitchFamily="34" charset="-122"/>
+                <a:cs typeface="Noto Sans KR" pitchFamily="34" charset="-120"/>
+              </a:rPr>
+              <a:t>"고객의 니즈가 다르기 때문에 저희는 참여를 안 하고 있습니다"</a:t>
+            </a:r>
+            <a:endParaRPr lang="en-US" sz="780" dirty="0"/>
+          </a:p>
+        </p:txBody>
+      </p:sp>
+      <p:sp>
+        <p:nvSpPr>
+          <p:cNvPr id="14" name="가정 H4"/>
+          <p:cNvSpPr txBox="1"/>
+          <p:nvPr/>
+        </p:nvSpPr>
+        <p:spPr>
+          <a:xfrm>
+            <a:off x="612648" y="5667140"/>
+            <a:ext cx="3520440" cy="605644"/>
+          </a:xfrm>
+          <a:prstGeom prst="roundRect">
+            <a:avLst>
+              <a:gd name="adj" fmla="val 7549"/>
+            </a:avLst>
+          </a:prstGeom>
+          <a:solidFill>
+            <a:srgbClr val="F1F5F9"/>
+          </a:solidFill>
+          <a:ln/>
+        </p:spPr>
+        <p:txBody>
+          <a:bodyPr wrap="square" lIns="91440" tIns="0" rIns="91440" bIns="0" rtlCol="0" anchor="ctr"/>
+          <a:lstStyle/>
+          <a:p>
+            <a:pPr algn="l" indent="0" marL="0">
+              <a:lnSpc>
+                <a:spcPct val="95000"/>
+              </a:lnSpc>
+              <a:spcAft>
+                <a:spcPts val="100"/>
+              </a:spcAft>
+              <a:buNone/>
+            </a:pPr>
+            <a:r>
+              <a:rPr lang="en-US" sz="780" b="1" dirty="0">
+                <a:solidFill>
+                  <a:srgbClr val="267D86"/>
+                </a:solidFill>
+                <a:latin typeface="Noto Sans KR" pitchFamily="34" charset="0"/>
+                <a:ea typeface="Noto Sans KR" pitchFamily="34" charset="-122"/>
+                <a:cs typeface="Noto Sans KR" pitchFamily="34" charset="-120"/>
+              </a:rPr>
+              <a:t>H4  </a:t>
+            </a:r>
+            <a:pPr algn="l" indent="0" marL="0">
+              <a:lnSpc>
+                <a:spcPct val="95000"/>
+              </a:lnSpc>
+              <a:spcAft>
+                <a:spcPts val="100"/>
+              </a:spcAft>
+              <a:buNone/>
+            </a:pPr>
+            <a:r>
+              <a:rPr lang="en-US" sz="780" b="1" dirty="0">
+                <a:solidFill>
+                  <a:srgbClr val="182F48"/>
+                </a:solidFill>
+                <a:latin typeface="Noto Sans KR" pitchFamily="34" charset="0"/>
+                <a:ea typeface="Noto Sans KR" pitchFamily="34" charset="-122"/>
+                <a:cs typeface="Noto Sans KR" pitchFamily="34" charset="-120"/>
+              </a:rPr>
+              <a:t>일반 소비자(B2C)는 주요 고객이 아닐 것</a:t>
+            </a:r>
+            <a:endParaRPr lang="en-US" sz="780" dirty="0"/>
+          </a:p>
+          <a:p>
+            <a:pPr algn="l" indent="0" marL="0">
+              <a:lnSpc>
+                <a:spcPct val="95000"/>
+              </a:lnSpc>
+              <a:spcAft>
+                <a:spcPts val="100"/>
+              </a:spcAft>
+              <a:buNone/>
+            </a:pPr>
+            <a:r>
+              <a:rPr lang="en-US" sz="780" b="1" dirty="0">
+                <a:solidFill>
+                  <a:srgbClr val="C2410C"/>
+                </a:solidFill>
+                <a:latin typeface="Noto Sans KR" pitchFamily="34" charset="0"/>
+                <a:ea typeface="Noto Sans KR" pitchFamily="34" charset="-122"/>
+                <a:cs typeface="Noto Sans KR" pitchFamily="34" charset="-120"/>
+              </a:rPr>
+              <a:t>기각  </a:t>
+            </a:r>
+            <a:pPr algn="l" indent="0" marL="0">
+              <a:lnSpc>
+                <a:spcPct val="95000"/>
+              </a:lnSpc>
+              <a:spcAft>
+                <a:spcPts val="100"/>
+              </a:spcAft>
+              <a:buNone/>
+            </a:pPr>
+            <a:r>
+              <a:rPr lang="en-US" sz="780" dirty="0">
+                <a:solidFill>
+                  <a:srgbClr val="334155"/>
+                </a:solidFill>
+                <a:latin typeface="Noto Sans KR" pitchFamily="34" charset="0"/>
+                <a:ea typeface="Noto Sans KR" pitchFamily="34" charset="-122"/>
+                <a:cs typeface="Noto Sans KR" pitchFamily="34" charset="-120"/>
+              </a:rPr>
+              <a:t>B2C 매출 비중이 약 30%라 일반 고객을 매우 중요하게 생각한다.</a:t>
+            </a:r>
+            <a:endParaRPr lang="en-US" sz="780" dirty="0"/>
+          </a:p>
+        </p:txBody>
+      </p:sp>
+      <p:sp>
+        <p:nvSpPr>
+          <p:cNvPr id="15" name="기획 수정 배경"/>
+          <p:cNvSpPr/>
+          <p:nvPr/>
+        </p:nvSpPr>
+        <p:spPr>
+          <a:xfrm>
+            <a:off x="4315968" y="3630752"/>
+            <a:ext cx="3977640" cy="2642032"/>
+          </a:xfrm>
+          <a:prstGeom prst="roundRect">
+            <a:avLst>
+              <a:gd name="adj" fmla="val 1730"/>
+            </a:avLst>
+          </a:prstGeom>
+          <a:solidFill>
+            <a:srgbClr val="E6F2F3"/>
+          </a:solidFill>
+          <a:ln/>
+        </p:spPr>
+      </p:sp>
+      <p:sp>
+        <p:nvSpPr>
+          <p:cNvPr id="16" name="기획 수정 1"/>
+          <p:cNvSpPr txBox="1"/>
+          <p:nvPr/>
+        </p:nvSpPr>
+        <p:spPr>
+          <a:xfrm>
+            <a:off x="4407408" y="3630752"/>
+            <a:ext cx="3794760" cy="660508"/>
+          </a:xfrm>
+          <a:prstGeom prst="rect">
+            <a:avLst/>
+          </a:prstGeom>
+          <a:noFill/>
+          <a:ln/>
+        </p:spPr>
+        <p:txBody>
+          <a:bodyPr wrap="square" lIns="0" tIns="0" rIns="0" bIns="0" rtlCol="0" anchor="ctr"/>
+          <a:lstStyle/>
+          <a:p>
+            <a:pPr algn="l" indent="0" marL="0">
+              <a:lnSpc>
+                <a:spcPct val="95000"/>
+              </a:lnSpc>
+              <a:spcAft>
+                <a:spcPts val="150"/>
+              </a:spcAft>
+              <a:buNone/>
+            </a:pPr>
+            <a:r>
+              <a:rPr lang="en-US" sz="780" b="1" dirty="0">
+                <a:solidFill>
+                  <a:srgbClr val="267D86"/>
+                </a:solidFill>
+                <a:latin typeface="Noto Sans KR" pitchFamily="34" charset="0"/>
+                <a:ea typeface="Noto Sans KR" pitchFamily="34" charset="-122"/>
+                <a:cs typeface="Noto Sans KR" pitchFamily="34" charset="-120"/>
+              </a:rPr>
+              <a:t>1  </a:t>
+            </a:r>
+            <a:pPr algn="l" indent="0" marL="0">
+              <a:lnSpc>
+                <a:spcPct val="95000"/>
+              </a:lnSpc>
+              <a:spcAft>
+                <a:spcPts val="150"/>
+              </a:spcAft>
+              <a:buNone/>
+            </a:pPr>
+            <a:r>
+              <a:rPr lang="en-US" sz="780" b="1" dirty="0">
+                <a:solidFill>
+                  <a:srgbClr val="182F48"/>
+                </a:solidFill>
+                <a:latin typeface="Noto Sans KR" pitchFamily="34" charset="0"/>
+                <a:ea typeface="Noto Sans KR" pitchFamily="34" charset="-122"/>
+                <a:cs typeface="Noto Sans KR" pitchFamily="34" charset="-120"/>
+              </a:rPr>
+              <a:t>공동 Test Lab(샤워부스 · 얼음 바닥)을 주최 측이 설치</a:t>
+            </a:r>
+            <a:endParaRPr lang="en-US" sz="780" dirty="0"/>
+          </a:p>
+          <a:p>
+            <a:pPr algn="l" indent="0" marL="0">
+              <a:lnSpc>
+                <a:spcPct val="95000"/>
+              </a:lnSpc>
+              <a:spcAft>
+                <a:spcPts val="150"/>
+              </a:spcAft>
+              <a:buNone/>
+            </a:pPr>
+            <a:r>
+              <a:rPr lang="en-US" sz="780" dirty="0">
+                <a:solidFill>
+                  <a:srgbClr val="334155"/>
+                </a:solidFill>
+                <a:latin typeface="Noto Sans KR" pitchFamily="34" charset="0"/>
+                <a:ea typeface="Noto Sans KR" pitchFamily="34" charset="-122"/>
+                <a:cs typeface="Noto Sans KR" pitchFamily="34" charset="-120"/>
+              </a:rPr>
+              <a:t>     </a:t>
+            </a:r>
+            <a:pPr algn="l" indent="0" marL="0">
+              <a:lnSpc>
+                <a:spcPct val="95000"/>
+              </a:lnSpc>
+              <a:spcAft>
+                <a:spcPts val="150"/>
+              </a:spcAft>
+              <a:buNone/>
+            </a:pPr>
+            <a:r>
+              <a:rPr lang="en-US" sz="780" dirty="0">
+                <a:solidFill>
+                  <a:srgbClr val="64748B"/>
+                </a:solidFill>
+                <a:latin typeface="Noto Sans KR" pitchFamily="34" charset="0"/>
+                <a:ea typeface="Noto Sans KR" pitchFamily="34" charset="-122"/>
+                <a:cs typeface="Noto Sans KR" pitchFamily="34" charset="-120"/>
+              </a:rPr>
+              <a:t>근거 Q5 · Q6: 시연 공간과 비용 대비 효과가 장벽</a:t>
+            </a:r>
+            <a:endParaRPr lang="en-US" sz="780" dirty="0"/>
+          </a:p>
+          <a:p>
+            <a:pPr algn="l" indent="0" marL="0">
+              <a:lnSpc>
+                <a:spcPct val="95000"/>
+              </a:lnSpc>
+              <a:spcAft>
+                <a:spcPts val="150"/>
+              </a:spcAft>
+              <a:buNone/>
+            </a:pPr>
+            <a:r>
+              <a:rPr lang="en-US" sz="780" dirty="0">
+                <a:solidFill>
+                  <a:srgbClr val="334155"/>
+                </a:solidFill>
+                <a:latin typeface="Noto Sans KR" pitchFamily="34" charset="0"/>
+                <a:ea typeface="Noto Sans KR" pitchFamily="34" charset="-122"/>
+                <a:cs typeface="Noto Sans KR" pitchFamily="34" charset="-120"/>
+              </a:rPr>
+              <a:t>     </a:t>
+            </a:r>
+            <a:pPr algn="l" indent="0" marL="0">
+              <a:lnSpc>
+                <a:spcPct val="95000"/>
+              </a:lnSpc>
+              <a:spcAft>
+                <a:spcPts val="150"/>
+              </a:spcAft>
+              <a:buNone/>
+            </a:pPr>
+            <a:r>
+              <a:rPr lang="en-US" sz="780" dirty="0">
+                <a:solidFill>
+                  <a:srgbClr val="334155"/>
+                </a:solidFill>
+                <a:latin typeface="Noto Sans KR" pitchFamily="34" charset="0"/>
+                <a:ea typeface="Noto Sans KR" pitchFamily="34" charset="-122"/>
+                <a:cs typeface="Noto Sans KR" pitchFamily="34" charset="-120"/>
+              </a:rPr>
+              <a:t>→ 브랜드마다 시연 공간을 만들 부담을 덜어 준다 (2장)</a:t>
+            </a:r>
+            <a:endParaRPr lang="en-US" sz="780" dirty="0"/>
+          </a:p>
+        </p:txBody>
+      </p:sp>
+      <p:sp>
+        <p:nvSpPr>
+          <p:cNvPr id="17" name="기획 수정 2"/>
+          <p:cNvSpPr txBox="1"/>
+          <p:nvPr/>
+        </p:nvSpPr>
+        <p:spPr>
+          <a:xfrm>
+            <a:off x="4407408" y="4291260"/>
+            <a:ext cx="3794760" cy="660508"/>
+          </a:xfrm>
+          <a:prstGeom prst="rect">
+            <a:avLst/>
+          </a:prstGeom>
+          <a:noFill/>
+          <a:ln/>
+        </p:spPr>
+        <p:txBody>
+          <a:bodyPr wrap="square" lIns="0" tIns="0" rIns="0" bIns="0" rtlCol="0" anchor="ctr"/>
+          <a:lstStyle/>
+          <a:p>
+            <a:pPr algn="l" indent="0" marL="0">
+              <a:lnSpc>
+                <a:spcPct val="95000"/>
+              </a:lnSpc>
+              <a:spcAft>
+                <a:spcPts val="150"/>
+              </a:spcAft>
+              <a:buNone/>
+            </a:pPr>
+            <a:r>
+              <a:rPr lang="en-US" sz="780" b="1" dirty="0">
+                <a:solidFill>
+                  <a:srgbClr val="267D86"/>
+                </a:solidFill>
+                <a:latin typeface="Noto Sans KR" pitchFamily="34" charset="0"/>
+                <a:ea typeface="Noto Sans KR" pitchFamily="34" charset="-122"/>
+                <a:cs typeface="Noto Sans KR" pitchFamily="34" charset="-120"/>
+              </a:rPr>
+              <a:t>2  </a:t>
+            </a:r>
+            <a:pPr algn="l" indent="0" marL="0">
+              <a:lnSpc>
+                <a:spcPct val="95000"/>
+              </a:lnSpc>
+              <a:spcAft>
+                <a:spcPts val="150"/>
+              </a:spcAft>
+              <a:buNone/>
+            </a:pPr>
+            <a:r>
+              <a:rPr lang="en-US" sz="780" b="1" dirty="0">
+                <a:solidFill>
+                  <a:srgbClr val="182F48"/>
+                </a:solidFill>
+                <a:latin typeface="Noto Sans KR" pitchFamily="34" charset="0"/>
+                <a:ea typeface="Noto Sans KR" pitchFamily="34" charset="-122"/>
+                <a:cs typeface="Noto Sans KR" pitchFamily="34" charset="-120"/>
+              </a:rPr>
+              <a:t>관람객의 '수'보다 '관심도'를 지표로</a:t>
+            </a:r>
+            <a:endParaRPr lang="en-US" sz="780" dirty="0"/>
+          </a:p>
+          <a:p>
+            <a:pPr algn="l" indent="0" marL="0">
+              <a:lnSpc>
+                <a:spcPct val="95000"/>
+              </a:lnSpc>
+              <a:spcAft>
+                <a:spcPts val="150"/>
+              </a:spcAft>
+              <a:buNone/>
+            </a:pPr>
+            <a:r>
+              <a:rPr lang="en-US" sz="780" dirty="0">
+                <a:solidFill>
+                  <a:srgbClr val="334155"/>
+                </a:solidFill>
+                <a:latin typeface="Noto Sans KR" pitchFamily="34" charset="0"/>
+                <a:ea typeface="Noto Sans KR" pitchFamily="34" charset="-122"/>
+                <a:cs typeface="Noto Sans KR" pitchFamily="34" charset="-120"/>
+              </a:rPr>
+              <a:t>     </a:t>
+            </a:r>
+            <a:pPr algn="l" indent="0" marL="0">
+              <a:lnSpc>
+                <a:spcPct val="95000"/>
+              </a:lnSpc>
+              <a:spcAft>
+                <a:spcPts val="150"/>
+              </a:spcAft>
+              <a:buNone/>
+            </a:pPr>
+            <a:r>
+              <a:rPr lang="en-US" sz="780" dirty="0">
+                <a:solidFill>
+                  <a:srgbClr val="64748B"/>
+                </a:solidFill>
+                <a:latin typeface="Noto Sans KR" pitchFamily="34" charset="0"/>
+                <a:ea typeface="Noto Sans KR" pitchFamily="34" charset="-122"/>
+                <a:cs typeface="Noto Sans KR" pitchFamily="34" charset="-120"/>
+              </a:rPr>
+              <a:t>근거 Q3 · Q7: 참여 조건은 관심 고객, 성공 기준은 반응</a:t>
+            </a:r>
+            <a:endParaRPr lang="en-US" sz="780" dirty="0"/>
+          </a:p>
+          <a:p>
+            <a:pPr algn="l" indent="0" marL="0">
+              <a:lnSpc>
+                <a:spcPct val="95000"/>
+              </a:lnSpc>
+              <a:spcAft>
+                <a:spcPts val="150"/>
+              </a:spcAft>
+              <a:buNone/>
+            </a:pPr>
+            <a:r>
+              <a:rPr lang="en-US" sz="780" dirty="0">
+                <a:solidFill>
+                  <a:srgbClr val="334155"/>
+                </a:solidFill>
+                <a:latin typeface="Noto Sans KR" pitchFamily="34" charset="0"/>
+                <a:ea typeface="Noto Sans KR" pitchFamily="34" charset="-122"/>
+                <a:cs typeface="Noto Sans KR" pitchFamily="34" charset="-120"/>
+              </a:rPr>
+              <a:t>     </a:t>
+            </a:r>
+            <a:pPr algn="l" indent="0" marL="0">
+              <a:lnSpc>
+                <a:spcPct val="95000"/>
+              </a:lnSpc>
+              <a:spcAft>
+                <a:spcPts val="150"/>
+              </a:spcAft>
+              <a:buNone/>
+            </a:pPr>
+            <a:r>
+              <a:rPr lang="en-US" sz="780" dirty="0">
+                <a:solidFill>
+                  <a:srgbClr val="334155"/>
+                </a:solidFill>
+                <a:latin typeface="Noto Sans KR" pitchFamily="34" charset="0"/>
+                <a:ea typeface="Noto Sans KR" pitchFamily="34" charset="-122"/>
+                <a:cs typeface="Noto Sans KR" pitchFamily="34" charset="-120"/>
+              </a:rPr>
+              <a:t>→ 관심사 사전등록 · Test Lab 체험률을 함께 잰다 (3장)</a:t>
+            </a:r>
+            <a:endParaRPr lang="en-US" sz="780" dirty="0"/>
+          </a:p>
+        </p:txBody>
+      </p:sp>
+      <p:sp>
+        <p:nvSpPr>
+          <p:cNvPr id="18" name="기획 수정 3"/>
+          <p:cNvSpPr txBox="1"/>
+          <p:nvPr/>
+        </p:nvSpPr>
+        <p:spPr>
+          <a:xfrm>
+            <a:off x="4407408" y="4951768"/>
+            <a:ext cx="3794760" cy="660508"/>
+          </a:xfrm>
+          <a:prstGeom prst="rect">
+            <a:avLst/>
+          </a:prstGeom>
+          <a:noFill/>
+          <a:ln/>
+        </p:spPr>
+        <p:txBody>
+          <a:bodyPr wrap="square" lIns="0" tIns="0" rIns="0" bIns="0" rtlCol="0" anchor="ctr"/>
+          <a:lstStyle/>
+          <a:p>
+            <a:pPr algn="l" indent="0" marL="0">
+              <a:lnSpc>
+                <a:spcPct val="95000"/>
+              </a:lnSpc>
+              <a:spcAft>
+                <a:spcPts val="150"/>
+              </a:spcAft>
+              <a:buNone/>
+            </a:pPr>
+            <a:r>
+              <a:rPr lang="en-US" sz="780" b="1" dirty="0">
+                <a:solidFill>
+                  <a:srgbClr val="267D86"/>
+                </a:solidFill>
+                <a:latin typeface="Noto Sans KR" pitchFamily="34" charset="0"/>
+                <a:ea typeface="Noto Sans KR" pitchFamily="34" charset="-122"/>
+                <a:cs typeface="Noto Sans KR" pitchFamily="34" charset="-120"/>
+              </a:rPr>
+              <a:t>3  </a:t>
+            </a:r>
+            <a:pPr algn="l" indent="0" marL="0">
+              <a:lnSpc>
+                <a:spcPct val="95000"/>
+              </a:lnSpc>
+              <a:spcAft>
+                <a:spcPts val="150"/>
+              </a:spcAft>
+              <a:buNone/>
+            </a:pPr>
+            <a:r>
+              <a:rPr lang="en-US" sz="780" b="1" dirty="0">
+                <a:solidFill>
+                  <a:srgbClr val="182F48"/>
+                </a:solidFill>
+                <a:latin typeface="Noto Sans KR" pitchFamily="34" charset="0"/>
+                <a:ea typeface="Noto Sans KR" pitchFamily="34" charset="-122"/>
+                <a:cs typeface="Noto Sans KR" pitchFamily="34" charset="-120"/>
+              </a:rPr>
+              <a:t>참가업체를 목적별로 나눠 연결</a:t>
+            </a:r>
+            <a:endParaRPr lang="en-US" sz="780" dirty="0"/>
+          </a:p>
+          <a:p>
+            <a:pPr algn="l" indent="0" marL="0">
+              <a:lnSpc>
+                <a:spcPct val="95000"/>
+              </a:lnSpc>
+              <a:spcAft>
+                <a:spcPts val="150"/>
+              </a:spcAft>
+              <a:buNone/>
+            </a:pPr>
+            <a:r>
+              <a:rPr lang="en-US" sz="780" dirty="0">
+                <a:solidFill>
+                  <a:srgbClr val="334155"/>
+                </a:solidFill>
+                <a:latin typeface="Noto Sans KR" pitchFamily="34" charset="0"/>
+                <a:ea typeface="Noto Sans KR" pitchFamily="34" charset="-122"/>
+                <a:cs typeface="Noto Sans KR" pitchFamily="34" charset="-120"/>
+              </a:rPr>
+              <a:t>     </a:t>
+            </a:r>
+            <a:pPr algn="l" indent="0" marL="0">
+              <a:lnSpc>
+                <a:spcPct val="95000"/>
+              </a:lnSpc>
+              <a:spcAft>
+                <a:spcPts val="150"/>
+              </a:spcAft>
+              <a:buNone/>
+            </a:pPr>
+            <a:r>
+              <a:rPr lang="en-US" sz="780" dirty="0">
+                <a:solidFill>
+                  <a:srgbClr val="64748B"/>
+                </a:solidFill>
+                <a:latin typeface="Noto Sans KR" pitchFamily="34" charset="0"/>
+                <a:ea typeface="Noto Sans KR" pitchFamily="34" charset="-122"/>
+                <a:cs typeface="Noto Sans KR" pitchFamily="34" charset="-120"/>
+              </a:rPr>
+              <a:t>근거 Q8: 고가 브랜드는 판매보다 브랜드 홍보가 목적</a:t>
+            </a:r>
+            <a:endParaRPr lang="en-US" sz="780" dirty="0"/>
+          </a:p>
+          <a:p>
+            <a:pPr algn="l" indent="0" marL="0">
+              <a:lnSpc>
+                <a:spcPct val="95000"/>
+              </a:lnSpc>
+              <a:spcAft>
+                <a:spcPts val="150"/>
+              </a:spcAft>
+              <a:buNone/>
+            </a:pPr>
+            <a:r>
+              <a:rPr lang="en-US" sz="780" dirty="0">
+                <a:solidFill>
+                  <a:srgbClr val="334155"/>
+                </a:solidFill>
+                <a:latin typeface="Noto Sans KR" pitchFamily="34" charset="0"/>
+                <a:ea typeface="Noto Sans KR" pitchFamily="34" charset="-122"/>
+                <a:cs typeface="Noto Sans KR" pitchFamily="34" charset="-120"/>
+              </a:rPr>
+              <a:t>     </a:t>
+            </a:r>
+            <a:pPr algn="l" indent="0" marL="0">
+              <a:lnSpc>
+                <a:spcPct val="95000"/>
+              </a:lnSpc>
+              <a:spcAft>
+                <a:spcPts val="150"/>
+              </a:spcAft>
+              <a:buNone/>
+            </a:pPr>
+            <a:r>
+              <a:rPr lang="en-US" sz="780" dirty="0">
+                <a:solidFill>
+                  <a:srgbClr val="334155"/>
+                </a:solidFill>
+                <a:latin typeface="Noto Sans KR" pitchFamily="34" charset="0"/>
+                <a:ea typeface="Noto Sans KR" pitchFamily="34" charset="-122"/>
+                <a:cs typeface="Noto Sans KR" pitchFamily="34" charset="-120"/>
+              </a:rPr>
+              <a:t>→ 해외 앵커는 관심 고객과, K-브랜드는 바이어와 (5장)</a:t>
+            </a:r>
+            <a:endParaRPr lang="en-US" sz="780" dirty="0"/>
+          </a:p>
+        </p:txBody>
+      </p:sp>
+      <p:sp>
+        <p:nvSpPr>
+          <p:cNvPr id="19" name="기획 수정 4"/>
+          <p:cNvSpPr txBox="1"/>
+          <p:nvPr/>
+        </p:nvSpPr>
+        <p:spPr>
+          <a:xfrm>
+            <a:off x="4407408" y="5612276"/>
+            <a:ext cx="3794760" cy="660508"/>
+          </a:xfrm>
+          <a:prstGeom prst="rect">
+            <a:avLst/>
+          </a:prstGeom>
+          <a:noFill/>
+          <a:ln/>
+        </p:spPr>
+        <p:txBody>
+          <a:bodyPr wrap="square" lIns="0" tIns="0" rIns="0" bIns="0" rtlCol="0" anchor="ctr"/>
+          <a:lstStyle/>
+          <a:p>
+            <a:pPr algn="l" indent="0" marL="0">
+              <a:lnSpc>
+                <a:spcPct val="95000"/>
+              </a:lnSpc>
+              <a:spcAft>
+                <a:spcPts val="150"/>
+              </a:spcAft>
+              <a:buNone/>
+            </a:pPr>
+            <a:r>
+              <a:rPr lang="en-US" sz="780" b="1" dirty="0">
+                <a:solidFill>
+                  <a:srgbClr val="267D86"/>
+                </a:solidFill>
+                <a:latin typeface="Noto Sans KR" pitchFamily="34" charset="0"/>
+                <a:ea typeface="Noto Sans KR" pitchFamily="34" charset="-122"/>
+                <a:cs typeface="Noto Sans KR" pitchFamily="34" charset="-120"/>
+              </a:rPr>
+              <a:t>4  </a:t>
+            </a:r>
+            <a:pPr algn="l" indent="0" marL="0">
+              <a:lnSpc>
+                <a:spcPct val="95000"/>
+              </a:lnSpc>
+              <a:spcAft>
+                <a:spcPts val="150"/>
+              </a:spcAft>
+              <a:buNone/>
+            </a:pPr>
+            <a:r>
+              <a:rPr lang="en-US" sz="780" b="1" dirty="0">
+                <a:solidFill>
+                  <a:srgbClr val="182F48"/>
+                </a:solidFill>
+                <a:latin typeface="Noto Sans KR" pitchFamily="34" charset="0"/>
+                <a:ea typeface="Noto Sans KR" pitchFamily="34" charset="-122"/>
+                <a:cs typeface="Noto Sans KR" pitchFamily="34" charset="-120"/>
+              </a:rPr>
+              <a:t>인플루언서 · 모델 섭외를 미디어 파트너가 지원</a:t>
+            </a:r>
+            <a:endParaRPr lang="en-US" sz="780" dirty="0"/>
+          </a:p>
+          <a:p>
+            <a:pPr algn="l" indent="0" marL="0">
+              <a:lnSpc>
+                <a:spcPct val="95000"/>
+              </a:lnSpc>
+              <a:spcAft>
+                <a:spcPts val="150"/>
+              </a:spcAft>
+              <a:buNone/>
+            </a:pPr>
+            <a:r>
+              <a:rPr lang="en-US" sz="780" dirty="0">
+                <a:solidFill>
+                  <a:srgbClr val="334155"/>
+                </a:solidFill>
+                <a:latin typeface="Noto Sans KR" pitchFamily="34" charset="0"/>
+                <a:ea typeface="Noto Sans KR" pitchFamily="34" charset="-122"/>
+                <a:cs typeface="Noto Sans KR" pitchFamily="34" charset="-120"/>
+              </a:rPr>
+              <a:t>     </a:t>
+            </a:r>
+            <a:pPr algn="l" indent="0" marL="0">
+              <a:lnSpc>
+                <a:spcPct val="95000"/>
+              </a:lnSpc>
+              <a:spcAft>
+                <a:spcPts val="150"/>
+              </a:spcAft>
+              <a:buNone/>
+            </a:pPr>
+            <a:r>
+              <a:rPr lang="en-US" sz="780" dirty="0">
+                <a:solidFill>
+                  <a:srgbClr val="64748B"/>
+                </a:solidFill>
+                <a:latin typeface="Noto Sans KR" pitchFamily="34" charset="0"/>
+                <a:ea typeface="Noto Sans KR" pitchFamily="34" charset="-122"/>
+                <a:cs typeface="Noto Sans KR" pitchFamily="34" charset="-120"/>
+              </a:rPr>
+              <a:t>근거 Q6: 인플루언서 · 모델 일정 조율이 참여 장애</a:t>
+            </a:r>
+            <a:endParaRPr lang="en-US" sz="780" dirty="0"/>
+          </a:p>
+          <a:p>
+            <a:pPr algn="l" indent="0" marL="0">
+              <a:lnSpc>
+                <a:spcPct val="95000"/>
+              </a:lnSpc>
+              <a:spcAft>
+                <a:spcPts val="150"/>
+              </a:spcAft>
+              <a:buNone/>
+            </a:pPr>
+            <a:r>
+              <a:rPr lang="en-US" sz="780" dirty="0">
+                <a:solidFill>
+                  <a:srgbClr val="334155"/>
+                </a:solidFill>
+                <a:latin typeface="Noto Sans KR" pitchFamily="34" charset="0"/>
+                <a:ea typeface="Noto Sans KR" pitchFamily="34" charset="-122"/>
+                <a:cs typeface="Noto Sans KR" pitchFamily="34" charset="-120"/>
+              </a:rPr>
+              <a:t>     </a:t>
+            </a:r>
+            <a:pPr algn="l" indent="0" marL="0">
+              <a:lnSpc>
+                <a:spcPct val="95000"/>
+              </a:lnSpc>
+              <a:spcAft>
+                <a:spcPts val="150"/>
+              </a:spcAft>
+              <a:buNone/>
+            </a:pPr>
+            <a:r>
+              <a:rPr lang="en-US" sz="780" dirty="0">
+                <a:solidFill>
+                  <a:srgbClr val="334155"/>
+                </a:solidFill>
+                <a:latin typeface="Noto Sans KR" pitchFamily="34" charset="0"/>
+                <a:ea typeface="Noto Sans KR" pitchFamily="34" charset="-122"/>
+                <a:cs typeface="Noto Sans KR" pitchFamily="34" charset="-120"/>
+              </a:rPr>
+              <a:t>→ GO OUT KOREA · 패션비즈와 협력 (6장)</a:t>
+            </a:r>
+            <a:endParaRPr lang="en-US" sz="780" dirty="0"/>
+          </a:p>
+        </p:txBody>
+      </p:sp>
+      <p:sp>
+        <p:nvSpPr>
+          <p:cNvPr id="20" name="추가 확인 배경"/>
+          <p:cNvSpPr/>
+          <p:nvPr/>
+        </p:nvSpPr>
+        <p:spPr>
+          <a:xfrm>
+            <a:off x="8476488" y="3630752"/>
+            <a:ext cx="3099816" cy="2642032"/>
+          </a:xfrm>
+          <a:prstGeom prst="roundRect">
+            <a:avLst>
+              <a:gd name="adj" fmla="val 1730"/>
+            </a:avLst>
+          </a:prstGeom>
+          <a:solidFill>
+            <a:srgbClr val="FFFFFF"/>
+          </a:solidFill>
+          <a:ln w="9525">
+            <a:solidFill>
+              <a:srgbClr val="CBD5E1"/>
+            </a:solidFill>
+            <a:prstDash val="solid"/>
+          </a:ln>
+        </p:spPr>
+      </p:sp>
+      <p:sp>
+        <p:nvSpPr>
+          <p:cNvPr id="21" name="추가 확인 안내"/>
+          <p:cNvSpPr txBox="1"/>
+          <p:nvPr/>
+        </p:nvSpPr>
+        <p:spPr>
+          <a:xfrm>
+            <a:off x="8586216" y="3685616"/>
+            <a:ext cx="2880360" cy="219456"/>
+          </a:xfrm>
+          <a:prstGeom prst="rect">
+            <a:avLst/>
+          </a:prstGeom>
+          <a:noFill/>
+          <a:ln/>
+        </p:spPr>
+        <p:txBody>
+          <a:bodyPr wrap="square" lIns="0" tIns="0" rIns="0" bIns="0" rtlCol="0" anchor="ctr"/>
+          <a:lstStyle/>
+          <a:p>
+            <a:pPr algn="l" indent="0" marL="0">
+              <a:lnSpc>
+                <a:spcPct val="100000"/>
+              </a:lnSpc>
+              <a:buNone/>
+            </a:pPr>
+            <a:r>
+              <a:rPr lang="en-US" sz="740" dirty="0">
+                <a:solidFill>
+                  <a:srgbClr val="64748B"/>
+                </a:solidFill>
+                <a:latin typeface="Noto Sans KR" pitchFamily="34" charset="0"/>
+                <a:ea typeface="Noto Sans KR" pitchFamily="34" charset="-122"/>
+                <a:cs typeface="Noto Sans KR" pitchFamily="34" charset="-120"/>
+              </a:rPr>
+              <a:t>인터뷰를 다시 검토하며 더 물었어야 했다고 본 것</a:t>
+            </a:r>
+            <a:endParaRPr lang="en-US" sz="740" dirty="0"/>
+          </a:p>
+        </p:txBody>
+      </p:sp>
+      <p:sp>
+        <p:nvSpPr>
+          <p:cNvPr id="22" name="추가 확인 1"/>
+          <p:cNvSpPr txBox="1"/>
+          <p:nvPr/>
+        </p:nvSpPr>
+        <p:spPr>
+          <a:xfrm>
+            <a:off x="8586216" y="3941648"/>
+            <a:ext cx="2880360" cy="569068"/>
+          </a:xfrm>
+          <a:prstGeom prst="rect">
+            <a:avLst/>
+          </a:prstGeom>
+          <a:noFill/>
+          <a:ln/>
+        </p:spPr>
+        <p:txBody>
+          <a:bodyPr wrap="square" lIns="0" tIns="0" rIns="0" bIns="0" rtlCol="0" anchor="ctr"/>
+          <a:lstStyle/>
+          <a:p>
+            <a:pPr algn="l" indent="0" marL="0">
+              <a:lnSpc>
+                <a:spcPct val="95000"/>
+              </a:lnSpc>
+              <a:spcAft>
+                <a:spcPts val="150"/>
+              </a:spcAft>
+              <a:buNone/>
+            </a:pPr>
+            <a:r>
+              <a:rPr lang="en-US" sz="780" b="1" dirty="0">
+                <a:solidFill>
+                  <a:srgbClr val="182F48"/>
+                </a:solidFill>
+                <a:latin typeface="Noto Sans KR" pitchFamily="34" charset="0"/>
+                <a:ea typeface="Noto Sans KR" pitchFamily="34" charset="-122"/>
+                <a:cs typeface="Noto Sans KR" pitchFamily="34" charset="-120"/>
+              </a:rPr>
+              <a:t>① 국내 소량 생산처</a:t>
+            </a:r>
+            <a:endParaRPr lang="en-US" sz="780" dirty="0"/>
+          </a:p>
+          <a:p>
+            <a:pPr algn="l" indent="0" marL="0">
+              <a:lnSpc>
+                <a:spcPct val="95000"/>
+              </a:lnSpc>
+              <a:spcAft>
+                <a:spcPts val="150"/>
+              </a:spcAft>
+              <a:buNone/>
+            </a:pPr>
+            <a:r>
+              <a:rPr lang="en-US" sz="780" dirty="0">
+                <a:solidFill>
+                  <a:srgbClr val="334155"/>
+                </a:solidFill>
+                <a:latin typeface="Noto Sans KR" pitchFamily="34" charset="0"/>
+                <a:ea typeface="Noto Sans KR" pitchFamily="34" charset="-122"/>
+                <a:cs typeface="Noto Sans KR" pitchFamily="34" charset="-120"/>
+              </a:rPr>
+              <a:t>제로그램 같은 K-브랜드의 생산처 확보 어려움</a:t>
+            </a:r>
+            <a:endParaRPr lang="en-US" sz="780" dirty="0"/>
+          </a:p>
+        </p:txBody>
+      </p:sp>
+      <p:sp>
+        <p:nvSpPr>
+          <p:cNvPr id="23" name="추가 확인 2"/>
+          <p:cNvSpPr txBox="1"/>
+          <p:nvPr/>
+        </p:nvSpPr>
+        <p:spPr>
+          <a:xfrm>
+            <a:off x="8586216" y="4510716"/>
+            <a:ext cx="2880360" cy="569068"/>
+          </a:xfrm>
+          <a:prstGeom prst="rect">
+            <a:avLst/>
+          </a:prstGeom>
+          <a:noFill/>
+          <a:ln/>
+        </p:spPr>
+        <p:txBody>
+          <a:bodyPr wrap="square" lIns="0" tIns="0" rIns="0" bIns="0" rtlCol="0" anchor="ctr"/>
+          <a:lstStyle/>
+          <a:p>
+            <a:pPr algn="l" indent="0" marL="0">
+              <a:lnSpc>
+                <a:spcPct val="95000"/>
+              </a:lnSpc>
+              <a:spcAft>
+                <a:spcPts val="150"/>
+              </a:spcAft>
+              <a:buNone/>
+            </a:pPr>
+            <a:r>
+              <a:rPr lang="en-US" sz="780" b="1" dirty="0">
+                <a:solidFill>
+                  <a:srgbClr val="182F48"/>
+                </a:solidFill>
+                <a:latin typeface="Noto Sans KR" pitchFamily="34" charset="0"/>
+                <a:ea typeface="Noto Sans KR" pitchFamily="34" charset="-122"/>
+                <a:cs typeface="Noto Sans KR" pitchFamily="34" charset="-120"/>
+              </a:rPr>
+              <a:t>② 유통 수수료 · 마진</a:t>
+            </a:r>
+            <a:endParaRPr lang="en-US" sz="780" dirty="0"/>
+          </a:p>
+          <a:p>
+            <a:pPr algn="l" indent="0" marL="0">
+              <a:lnSpc>
+                <a:spcPct val="95000"/>
+              </a:lnSpc>
+              <a:spcAft>
+                <a:spcPts val="150"/>
+              </a:spcAft>
+              <a:buNone/>
+            </a:pPr>
+            <a:r>
+              <a:rPr lang="en-US" sz="780" dirty="0">
+                <a:solidFill>
+                  <a:srgbClr val="334155"/>
+                </a:solidFill>
+                <a:latin typeface="Noto Sans KR" pitchFamily="34" charset="0"/>
+                <a:ea typeface="Noto Sans KR" pitchFamily="34" charset="-122"/>
+                <a:cs typeface="Noto Sans KR" pitchFamily="34" charset="-120"/>
+              </a:rPr>
+              <a:t>수입 브랜드 대비 K-브랜드 유통의 마진 차이</a:t>
+            </a:r>
+            <a:endParaRPr lang="en-US" sz="780" dirty="0"/>
+          </a:p>
+        </p:txBody>
+      </p:sp>
+      <p:sp>
+        <p:nvSpPr>
+          <p:cNvPr id="24" name="추가 확인 3"/>
+          <p:cNvSpPr txBox="1"/>
+          <p:nvPr/>
+        </p:nvSpPr>
+        <p:spPr>
+          <a:xfrm>
+            <a:off x="8586216" y="5079784"/>
+            <a:ext cx="2880360" cy="569068"/>
+          </a:xfrm>
+          <a:prstGeom prst="rect">
+            <a:avLst/>
+          </a:prstGeom>
+          <a:noFill/>
+          <a:ln/>
+        </p:spPr>
+        <p:txBody>
+          <a:bodyPr wrap="square" lIns="0" tIns="0" rIns="0" bIns="0" rtlCol="0" anchor="ctr"/>
+          <a:lstStyle/>
+          <a:p>
+            <a:pPr algn="l" indent="0" marL="0">
+              <a:lnSpc>
+                <a:spcPct val="95000"/>
+              </a:lnSpc>
+              <a:spcAft>
+                <a:spcPts val="150"/>
+              </a:spcAft>
+              <a:buNone/>
+            </a:pPr>
+            <a:r>
+              <a:rPr lang="en-US" sz="780" b="1" dirty="0">
+                <a:solidFill>
+                  <a:srgbClr val="182F48"/>
+                </a:solidFill>
+                <a:latin typeface="Noto Sans KR" pitchFamily="34" charset="0"/>
+                <a:ea typeface="Noto Sans KR" pitchFamily="34" charset="-122"/>
+                <a:cs typeface="Noto Sans KR" pitchFamily="34" charset="-120"/>
+              </a:rPr>
+              <a:t>③ 희망 참가일</a:t>
+            </a:r>
+            <a:endParaRPr lang="en-US" sz="780" dirty="0"/>
+          </a:p>
+          <a:p>
+            <a:pPr algn="l" indent="0" marL="0">
+              <a:lnSpc>
+                <a:spcPct val="95000"/>
+              </a:lnSpc>
+              <a:spcAft>
+                <a:spcPts val="150"/>
+              </a:spcAft>
+              <a:buNone/>
+            </a:pPr>
+            <a:r>
+              <a:rPr lang="en-US" sz="780" dirty="0">
+                <a:solidFill>
+                  <a:srgbClr val="334155"/>
+                </a:solidFill>
+                <a:latin typeface="Noto Sans KR" pitchFamily="34" charset="0"/>
+                <a:ea typeface="Noto Sans KR" pitchFamily="34" charset="-122"/>
+                <a:cs typeface="Noto Sans KR" pitchFamily="34" charset="-120"/>
+              </a:rPr>
+              <a:t>트레이드 데이와 퍼블릭 랩 데이 중 어느 쪽인지</a:t>
+            </a:r>
+            <a:endParaRPr lang="en-US" sz="780" dirty="0"/>
+          </a:p>
+        </p:txBody>
+      </p:sp>
+      <p:sp>
+        <p:nvSpPr>
+          <p:cNvPr id="25" name="추가 확인 4"/>
+          <p:cNvSpPr txBox="1"/>
+          <p:nvPr/>
+        </p:nvSpPr>
+        <p:spPr>
+          <a:xfrm>
+            <a:off x="8586216" y="5648852"/>
+            <a:ext cx="2880360" cy="569068"/>
+          </a:xfrm>
+          <a:prstGeom prst="rect">
+            <a:avLst/>
+          </a:prstGeom>
+          <a:noFill/>
+          <a:ln/>
+        </p:spPr>
+        <p:txBody>
+          <a:bodyPr wrap="square" lIns="0" tIns="0" rIns="0" bIns="0" rtlCol="0" anchor="ctr"/>
+          <a:lstStyle/>
+          <a:p>
+            <a:pPr algn="l" indent="0" marL="0">
+              <a:lnSpc>
+                <a:spcPct val="95000"/>
+              </a:lnSpc>
+              <a:spcAft>
+                <a:spcPts val="150"/>
+              </a:spcAft>
+              <a:buNone/>
+            </a:pPr>
+            <a:r>
+              <a:rPr lang="en-US" sz="780" b="1" dirty="0">
+                <a:solidFill>
+                  <a:srgbClr val="182F48"/>
+                </a:solidFill>
+                <a:latin typeface="Noto Sans KR" pitchFamily="34" charset="0"/>
+                <a:ea typeface="Noto Sans KR" pitchFamily="34" charset="-122"/>
+                <a:cs typeface="Noto Sans KR" pitchFamily="34" charset="-120"/>
+              </a:rPr>
+              <a:t>④ 부스비 · 일정</a:t>
+            </a:r>
+            <a:endParaRPr lang="en-US" sz="780" dirty="0"/>
+          </a:p>
+          <a:p>
+            <a:pPr algn="l" indent="0" marL="0">
+              <a:lnSpc>
+                <a:spcPct val="95000"/>
+              </a:lnSpc>
+              <a:spcAft>
+                <a:spcPts val="150"/>
+              </a:spcAft>
+              <a:buNone/>
+            </a:pPr>
+            <a:r>
+              <a:rPr lang="en-US" sz="780" dirty="0">
+                <a:solidFill>
+                  <a:srgbClr val="334155"/>
+                </a:solidFill>
+                <a:latin typeface="Noto Sans KR" pitchFamily="34" charset="0"/>
+                <a:ea typeface="Noto Sans KR" pitchFamily="34" charset="-122"/>
+                <a:cs typeface="Noto Sans KR" pitchFamily="34" charset="-120"/>
+              </a:rPr>
+              <a:t>원화 기준 수용 범위와 9월 말 일정의 시즌 적합성</a:t>
+            </a:r>
+            <a:endParaRPr lang="en-US" sz="780" dirty="0"/>
+          </a:p>
+        </p:txBody>
+      </p:sp>
     </p:spTree>
   </p:cSld>
   <p:clrMapOvr>
@@ -34879,7 +35139,7 @@
                 <a:ea typeface="Noto Sans KR" pitchFamily="34" charset="-122"/>
                 <a:cs typeface="Noto Sans KR" pitchFamily="34" charset="-120"/>
               </a:rPr>
-              <a:t>바이어 통화 시도 기록 — 실무 바이어와 연결되지 않은 이유와 대신 확인한 것</a:t>
+              <a:t>바이어 통화 시도 기록 — 준비를 마쳤지만 실무 바이어와 연결되지 않았다</a:t>
             </a:r>
             <a:endParaRPr lang="en-US" sz="1500" dirty="0"/>
           </a:p>
@@ -34887,69 +35147,7 @@
       </p:sp>
       <p:sp>
         <p:nvSpPr>
-          <p:cNvPr id="5" name="출처"/>
-          <p:cNvSpPr txBox="1"/>
-          <p:nvPr/>
-        </p:nvSpPr>
-        <p:spPr>
-          <a:xfrm>
-            <a:off x="612648" y="6355080"/>
-            <a:ext cx="10963656" cy="457200"/>
-          </a:xfrm>
-          <a:prstGeom prst="rect">
-            <a:avLst/>
-          </a:prstGeom>
-          <a:noFill/>
-          <a:ln/>
-        </p:spPr>
-        <p:txBody>
-          <a:bodyPr wrap="square" lIns="0" tIns="0" rIns="0" bIns="0" rtlCol="0" anchor="t"/>
-          <a:lstStyle/>
-          <a:p>
-            <a:pPr algn="l" indent="0" marL="0">
-              <a:lnSpc>
-                <a:spcPct val="90000"/>
-              </a:lnSpc>
-              <a:buNone/>
-            </a:pPr>
-            <a:r>
-              <a:rPr lang="en-US" sz="700" dirty="0">
-                <a:solidFill>
-                  <a:srgbClr val="64748B"/>
-                </a:solidFill>
-                <a:latin typeface="Noto Sans KR" pitchFamily="34" charset="0"/>
-                <a:ea typeface="Noto Sans KR" pitchFamily="34" charset="-122"/>
-                <a:cs typeface="Noto Sans KR" pitchFamily="34" charset="-120"/>
-              </a:rPr>
-              <a:t>※ 연결되지 않은 시도도 지우지 않고 시도 내역으로 남겼다(교수님 기준). 시도 일시는 실제로 전화한 날짜와 시각이다.</a:t>
-            </a:r>
-            <a:endParaRPr lang="en-US" sz="700" dirty="0"/>
-          </a:p>
-          <a:p>
-            <a:pPr algn="l" indent="0" marL="0">
-              <a:lnSpc>
-                <a:spcPct val="90000"/>
-              </a:lnSpc>
-              <a:buNone/>
-            </a:pPr>
-            <a:r>
-              <a:rPr lang="en-US" sz="700" dirty="0">
-                <a:solidFill>
-                  <a:srgbClr val="64748B"/>
-                </a:solidFill>
-                <a:latin typeface="Noto Sans KR" pitchFamily="34" charset="0"/>
-                <a:ea typeface="Noto Sans KR" pitchFamily="34" charset="-122"/>
-                <a:cs typeface="Noto Sans KR" pitchFamily="34" charset="-120"/>
-              </a:rPr>
-              <a:t>※ 대신 확인한 자료: 무신사 뉴스룸(2024.7.17), 스마트투데이(2026.8). 준비한 행사 설명과 질문은 별도 PDF 「바이어 측 전화 검증 대본」에 있다.</a:t>
-            </a:r>
-            <a:endParaRPr lang="en-US" sz="700" dirty="0"/>
-          </a:p>
-        </p:txBody>
-      </p:sp>
-      <p:sp>
-        <p:nvSpPr>
-          <p:cNvPr id="7" name="제목 통화 시도 기록"/>
+          <p:cNvPr id="6" name="제목 통화 시도 기록"/>
           <p:cNvSpPr txBox="1"/>
           <p:nvPr/>
         </p:nvSpPr>
@@ -35013,11 +35211,11 @@
               <a:tblPr/>
               <a:tblGrid>
                 <a:gridCol w="365760"/>
-                <a:gridCol w="2240280"/>
-                <a:gridCol w="1600200"/>
-                <a:gridCol w="914400"/>
-                <a:gridCol w="1325880"/>
-                <a:gridCol w="4517136"/>
+                <a:gridCol w="2057400"/>
+                <a:gridCol w="2057400"/>
+                <a:gridCol w="1005840"/>
+                <a:gridCol w="1234440"/>
+                <a:gridCol w="4242816"/>
               </a:tblGrid>
               <a:tr h="234249">
                 <a:tc>
@@ -35418,7 +35616,7 @@
                   </a:tcPr>
                 </a:tc>
               </a:tr>
-              <a:tr h="374010">
+              <a:tr h="513771">
                 <a:tc>
                   <a:txBody>
                     <a:bodyPr/>
@@ -35587,7 +35785,7 @@
                           <a:ea typeface="Noto Sans KR" pitchFamily="34" charset="-122"/>
                           <a:cs typeface="Noto Sans KR" pitchFamily="34" charset="-120"/>
                         </a:rPr>
-                        <a:t>홍대점 매장 대표번호</a:t>
+                        <a:t>홍대점 매장  02-337-3907</a:t>
                       </a:r>
                       <a:endParaRPr lang="en-US" sz="800" dirty="0">
                         <a:latin typeface="Noto Sans KR" charset="0"/>
@@ -35608,7 +35806,7 @@
                           <a:ea typeface="Noto Sans KR" pitchFamily="34" charset="-122"/>
                           <a:cs typeface="Noto Sans KR" pitchFamily="34" charset="-120"/>
                         </a:rPr>
-                        <a:t>02-337-3907</a:t>
+                        <a:t>고객센터  070-7727-3908</a:t>
                       </a:r>
                       <a:endParaRPr lang="en-US" sz="800" dirty="0">
                         <a:latin typeface="Noto Sans KR" charset="0"/>
@@ -35673,7 +35871,7 @@
                           <a:ea typeface="Noto Sans KR" pitchFamily="34" charset="-122"/>
                           <a:cs typeface="Noto Sans KR" pitchFamily="34" charset="-120"/>
                         </a:rPr>
-                        <a:t>10월 __일</a:t>
+                        <a:t>10월 28일(수)</a:t>
                       </a:r>
                       <a:endParaRPr lang="en-US" sz="800" dirty="0">
                         <a:latin typeface="Noto Sans KR" charset="0"/>
@@ -35694,7 +35892,7 @@
                           <a:ea typeface="Noto Sans KR" pitchFamily="34" charset="-122"/>
                           <a:cs typeface="Noto Sans KR" pitchFamily="34" charset="-120"/>
                         </a:rPr>
-                        <a:t>__:__</a:t>
+                        <a:t>16:49</a:t>
                       </a:r>
                       <a:endParaRPr lang="en-US" sz="800" dirty="0">
                         <a:latin typeface="Noto Sans KR" charset="0"/>
@@ -35853,6 +36051,27 @@
                         <a:cs typeface="Noto Sans KR" charset="0"/>
                       </a:endParaRPr>
                     </a:p>
+                    <a:p>
+                      <a:pPr algn="l" indent="0" marL="0">
+                        <a:buNone/>
+                      </a:pPr>
+                      <a:r>
+                        <a:rPr lang="en-US" sz="800" dirty="0">
+                          <a:solidFill>
+                            <a:srgbClr val="334155"/>
+                          </a:solidFill>
+                          <a:latin typeface="Noto Sans KR" pitchFamily="34" charset="0"/>
+                          <a:ea typeface="Noto Sans KR" pitchFamily="34" charset="-122"/>
+                          <a:cs typeface="Noto Sans KR" pitchFamily="34" charset="-120"/>
+                        </a:rPr>
+                        <a:t>고객센터(평일 10~17시)는 온라인 주문 문의 창구다.</a:t>
+                      </a:r>
+                      <a:endParaRPr lang="en-US" sz="800" dirty="0">
+                        <a:latin typeface="Noto Sans KR" charset="0"/>
+                        <a:ea typeface="Noto Sans KR" charset="0"/>
+                        <a:cs typeface="Noto Sans KR" charset="0"/>
+                      </a:endParaRPr>
+                    </a:p>
                   </a:txBody>
                   <a:tcPr marL="76200" marR="76200" marT="38100" marB="38100" anchor="ctr">
                     <a:lnL w="6350" cap="flat" cmpd="sng" algn="ctr">
@@ -35894,7 +36113,7 @@
                   </a:tcPr>
                 </a:tc>
               </a:tr>
-              <a:tr h="374010">
+              <a:tr h="513771">
                 <a:tc>
                   <a:txBody>
                     <a:bodyPr/>
@@ -35977,7 +36196,7 @@
                           <a:ea typeface="Noto Sans KR" pitchFamily="34" charset="-122"/>
                           <a:cs typeface="Noto Sans KR" pitchFamily="34" charset="-120"/>
                         </a:rPr>
-                        <a:t>무신사 (MUSINSA)</a:t>
+                        <a:t>웍스아웃 (WORKSOUT)</a:t>
                       </a:r>
                       <a:endParaRPr lang="en-US" sz="800" dirty="0">
                         <a:latin typeface="Noto Sans KR" charset="0"/>
@@ -35998,7 +36217,7 @@
                           <a:ea typeface="Noto Sans KR" pitchFamily="34" charset="-122"/>
                           <a:cs typeface="Noto Sans KR" pitchFamily="34" charset="-120"/>
                         </a:rPr>
-                        <a:t>온라인 패션 플랫폼 · 서울 성동구</a:t>
+                        <a:t>편집숍 · 서울 강남구 (압구정점)</a:t>
                       </a:r>
                       <a:endParaRPr lang="en-US" sz="800" dirty="0">
                         <a:latin typeface="Noto Sans KR" charset="0"/>
@@ -36063,7 +36282,7 @@
                           <a:ea typeface="Noto Sans KR" pitchFamily="34" charset="-122"/>
                           <a:cs typeface="Noto Sans KR" pitchFamily="34" charset="-120"/>
                         </a:rPr>
-                        <a:t>고객센터 대표번호</a:t>
+                        <a:t>압구정점 매장  02-541-0840</a:t>
                       </a:r>
                       <a:endParaRPr lang="en-US" sz="800" dirty="0">
                         <a:latin typeface="Noto Sans KR" charset="0"/>
@@ -36084,7 +36303,7 @@
                           <a:ea typeface="Noto Sans KR" pitchFamily="34" charset="-122"/>
                           <a:cs typeface="Noto Sans KR" pitchFamily="34" charset="-120"/>
                         </a:rPr>
-                        <a:t>( 번호 기입 )</a:t>
+                        <a:t>고객센터  02-541-0854</a:t>
                       </a:r>
                       <a:endParaRPr lang="en-US" sz="800" dirty="0">
                         <a:latin typeface="Noto Sans KR" charset="0"/>
@@ -36149,7 +36368,7 @@
                           <a:ea typeface="Noto Sans KR" pitchFamily="34" charset="-122"/>
                           <a:cs typeface="Noto Sans KR" pitchFamily="34" charset="-120"/>
                         </a:rPr>
-                        <a:t>10월 __일</a:t>
+                        <a:t>10월 20일(화)</a:t>
                       </a:r>
                       <a:endParaRPr lang="en-US" sz="800" dirty="0">
                         <a:latin typeface="Noto Sans KR" charset="0"/>
@@ -36170,7 +36389,7 @@
                           <a:ea typeface="Noto Sans KR" pitchFamily="34" charset="-122"/>
                           <a:cs typeface="Noto Sans KR" pitchFamily="34" charset="-120"/>
                         </a:rPr>
-                        <a:t>__:__</a:t>
+                        <a:t>11:10</a:t>
                       </a:r>
                       <a:endParaRPr lang="en-US" sz="800" dirty="0">
                         <a:latin typeface="Noto Sans KR" charset="0"/>
@@ -36235,7 +36454,7 @@
                           <a:ea typeface="Noto Sans KR" pitchFamily="34" charset="-122"/>
                           <a:cs typeface="Noto Sans KR" pitchFamily="34" charset="-120"/>
                         </a:rPr>
-                        <a:t>고객센터 연결</a:t>
+                        <a:t>매장 연결 안 됨</a:t>
                       </a:r>
                       <a:endParaRPr lang="en-US" sz="800" dirty="0">
                         <a:latin typeface="Noto Sans KR" charset="0"/>
@@ -36256,7 +36475,7 @@
                           <a:ea typeface="Noto Sans KR" pitchFamily="34" charset="-122"/>
                           <a:cs typeface="Noto Sans KR" pitchFamily="34" charset="-120"/>
                         </a:rPr>
-                        <a:t>담당자 연결 불가</a:t>
+                        <a:t>바이어 연결 불가</a:t>
                       </a:r>
                       <a:endParaRPr lang="en-US" sz="800" dirty="0">
                         <a:latin typeface="Noto Sans KR" charset="0"/>
@@ -36321,7 +36540,7 @@
                           <a:ea typeface="Noto Sans KR" pitchFamily="34" charset="-122"/>
                           <a:cs typeface="Noto Sans KR" pitchFamily="34" charset="-120"/>
                         </a:rPr>
-                        <a:t>고객센터는 주문·배송 같은 소비자 문의만 받았고,</a:t>
+                        <a:t>압구정점은 판매 시간(12시) 전이라 전화가 연결되지 않았다.</a:t>
                       </a:r>
                       <a:endParaRPr lang="en-US" sz="800" dirty="0">
                         <a:latin typeface="Noto Sans KR" charset="0"/>
@@ -36342,7 +36561,7 @@
                           <a:ea typeface="Noto Sans KR" pitchFamily="34" charset="-122"/>
                           <a:cs typeface="Noto Sans KR" pitchFamily="34" charset="-120"/>
                         </a:rPr>
-                        <a:t>MD(바잉) 담당자에게 연결해 주는 경로가 없었다.</a:t>
+                        <a:t>고객센터(평일 9:30~17:30)는 공식 안내상 주문·배송 문의 창구라,</a:t>
                       </a:r>
                       <a:endParaRPr lang="en-US" sz="800" dirty="0">
                         <a:latin typeface="Noto Sans KR" charset="0"/>
@@ -36350,182 +36569,6 @@
                         <a:cs typeface="Noto Sans KR" charset="0"/>
                       </a:endParaRPr>
                     </a:p>
-                  </a:txBody>
-                  <a:tcPr marL="76200" marR="76200" marT="38100" marB="38100" anchor="ctr">
-                    <a:lnL w="6350" cap="flat" cmpd="sng" algn="ctr">
-                      <a:solidFill>
-                        <a:srgbClr val="CBD5E1"/>
-                      </a:solidFill>
-                      <a:prstDash val="solid"/>
-                      <a:round/>
-                      <a:headEnd type="none" w="med" len="med"/>
-                      <a:tailEnd type="none" w="med" len="med"/>
-                    </a:lnL>
-                    <a:lnR w="6350" cap="flat" cmpd="sng" algn="ctr">
-                      <a:solidFill>
-                        <a:srgbClr val="CBD5E1"/>
-                      </a:solidFill>
-                      <a:prstDash val="solid"/>
-                      <a:round/>
-                      <a:headEnd type="none" w="med" len="med"/>
-                      <a:tailEnd type="none" w="med" len="med"/>
-                    </a:lnR>
-                    <a:lnT w="6350" cap="flat" cmpd="sng" algn="ctr">
-                      <a:solidFill>
-                        <a:srgbClr val="CBD5E1"/>
-                      </a:solidFill>
-                      <a:prstDash val="solid"/>
-                      <a:round/>
-                      <a:headEnd type="none" w="med" len="med"/>
-                      <a:tailEnd type="none" w="med" len="med"/>
-                    </a:lnT>
-                    <a:lnB w="6350" cap="flat" cmpd="sng" algn="ctr">
-                      <a:solidFill>
-                        <a:srgbClr val="CBD5E1"/>
-                      </a:solidFill>
-                      <a:prstDash val="solid"/>
-                      <a:round/>
-                      <a:headEnd type="none" w="med" len="med"/>
-                      <a:tailEnd type="none" w="med" len="med"/>
-                    </a:lnB>
-                  </a:tcPr>
-                </a:tc>
-              </a:tr>
-              <a:tr h="274320">
-                <a:tc>
-                  <a:txBody>
-                    <a:bodyPr/>
-                    <a:lstStyle/>
-                    <a:p>
-                      <a:pPr algn="ctr" indent="0" marL="0">
-                        <a:buNone/>
-                      </a:pPr>
-                      <a:r>
-                        <a:rPr lang="en-US" sz="800" b="1" dirty="0">
-                          <a:solidFill>
-                            <a:srgbClr val="267D86"/>
-                          </a:solidFill>
-                          <a:latin typeface="Noto Sans KR" pitchFamily="34" charset="0"/>
-                          <a:ea typeface="Noto Sans KR" pitchFamily="34" charset="-122"/>
-                          <a:cs typeface="Noto Sans KR" pitchFamily="34" charset="-120"/>
-                        </a:rPr>
-                        <a:t>3</a:t>
-                      </a:r>
-                      <a:endParaRPr lang="en-US" sz="800" dirty="0">
-                        <a:latin typeface="Noto Sans KR" charset="0"/>
-                        <a:ea typeface="Noto Sans KR" charset="0"/>
-                        <a:cs typeface="Noto Sans KR" charset="0"/>
-                      </a:endParaRPr>
-                    </a:p>
-                  </a:txBody>
-                  <a:tcPr marL="76200" marR="76200" marT="38100" marB="38100" anchor="ctr">
-                    <a:lnL w="6350" cap="flat" cmpd="sng" algn="ctr">
-                      <a:solidFill>
-                        <a:srgbClr val="CBD5E1"/>
-                      </a:solidFill>
-                      <a:prstDash val="solid"/>
-                      <a:round/>
-                      <a:headEnd type="none" w="med" len="med"/>
-                      <a:tailEnd type="none" w="med" len="med"/>
-                    </a:lnL>
-                    <a:lnR w="6350" cap="flat" cmpd="sng" algn="ctr">
-                      <a:solidFill>
-                        <a:srgbClr val="CBD5E1"/>
-                      </a:solidFill>
-                      <a:prstDash val="solid"/>
-                      <a:round/>
-                      <a:headEnd type="none" w="med" len="med"/>
-                      <a:tailEnd type="none" w="med" len="med"/>
-                    </a:lnR>
-                    <a:lnT w="6350" cap="flat" cmpd="sng" algn="ctr">
-                      <a:solidFill>
-                        <a:srgbClr val="CBD5E1"/>
-                      </a:solidFill>
-                      <a:prstDash val="solid"/>
-                      <a:round/>
-                      <a:headEnd type="none" w="med" len="med"/>
-                      <a:tailEnd type="none" w="med" len="med"/>
-                    </a:lnT>
-                    <a:lnB w="6350" cap="flat" cmpd="sng" algn="ctr">
-                      <a:solidFill>
-                        <a:srgbClr val="CBD5E1"/>
-                      </a:solidFill>
-                      <a:prstDash val="solid"/>
-                      <a:round/>
-                      <a:headEnd type="none" w="med" len="med"/>
-                      <a:tailEnd type="none" w="med" len="med"/>
-                    </a:lnB>
-                  </a:tcPr>
-                </a:tc>
-                <a:tc>
-                  <a:txBody>
-                    <a:bodyPr/>
-                    <a:lstStyle/>
-                    <a:p>
-                      <a:pPr algn="l" indent="0" marL="0">
-                        <a:buNone/>
-                      </a:pPr>
-                      <a:r>
-                        <a:rPr lang="en-US" sz="800" dirty="0">
-                          <a:solidFill>
-                            <a:srgbClr val="64748B"/>
-                          </a:solidFill>
-                          <a:latin typeface="Noto Sans KR" pitchFamily="34" charset="0"/>
-                          <a:ea typeface="Noto Sans KR" pitchFamily="34" charset="-122"/>
-                          <a:cs typeface="Noto Sans KR" pitchFamily="34" charset="-120"/>
-                        </a:rPr>
-                        <a:t>( 추가로 시도하면 기입 )</a:t>
-                      </a:r>
-                      <a:endParaRPr lang="en-US" sz="800" dirty="0">
-                        <a:latin typeface="Noto Sans KR" charset="0"/>
-                        <a:ea typeface="Noto Sans KR" charset="0"/>
-                        <a:cs typeface="Noto Sans KR" charset="0"/>
-                      </a:endParaRPr>
-                    </a:p>
-                  </a:txBody>
-                  <a:tcPr marL="76200" marR="76200" marT="38100" marB="38100" anchor="ctr">
-                    <a:lnL w="6350" cap="flat" cmpd="sng" algn="ctr">
-                      <a:solidFill>
-                        <a:srgbClr val="CBD5E1"/>
-                      </a:solidFill>
-                      <a:prstDash val="solid"/>
-                      <a:round/>
-                      <a:headEnd type="none" w="med" len="med"/>
-                      <a:tailEnd type="none" w="med" len="med"/>
-                    </a:lnL>
-                    <a:lnR w="6350" cap="flat" cmpd="sng" algn="ctr">
-                      <a:solidFill>
-                        <a:srgbClr val="CBD5E1"/>
-                      </a:solidFill>
-                      <a:prstDash val="solid"/>
-                      <a:round/>
-                      <a:headEnd type="none" w="med" len="med"/>
-                      <a:tailEnd type="none" w="med" len="med"/>
-                    </a:lnR>
-                    <a:lnT w="6350" cap="flat" cmpd="sng" algn="ctr">
-                      <a:solidFill>
-                        <a:srgbClr val="CBD5E1"/>
-                      </a:solidFill>
-                      <a:prstDash val="solid"/>
-                      <a:round/>
-                      <a:headEnd type="none" w="med" len="med"/>
-                      <a:tailEnd type="none" w="med" len="med"/>
-                    </a:lnT>
-                    <a:lnB w="6350" cap="flat" cmpd="sng" algn="ctr">
-                      <a:solidFill>
-                        <a:srgbClr val="CBD5E1"/>
-                      </a:solidFill>
-                      <a:prstDash val="solid"/>
-                      <a:round/>
-                      <a:headEnd type="none" w="med" len="med"/>
-                      <a:tailEnd type="none" w="med" len="med"/>
-                    </a:lnB>
-                  </a:tcPr>
-                </a:tc>
-                <a:tc>
-                  <a:txBody>
-                    <a:bodyPr/>
-                    <a:lstStyle/>
                     <a:p>
                       <a:pPr algn="l" indent="0" marL="0">
                         <a:buNone/>
@@ -36539,7 +36582,7 @@
                           <a:ea typeface="Noto Sans KR" pitchFamily="34" charset="-122"/>
                           <a:cs typeface="Noto Sans KR" pitchFamily="34" charset="-120"/>
                         </a:rPr>
-                        <a:t> </a:t>
+                        <a:t>바잉 담당자와 연결되는 경로가 아니다.</a:t>
                       </a:r>
                       <a:endParaRPr lang="en-US" sz="800" dirty="0">
                         <a:latin typeface="Noto Sans KR" charset="0"/>
@@ -36587,593 +36630,6 @@
                     </a:lnB>
                   </a:tcPr>
                 </a:tc>
-                <a:tc>
-                  <a:txBody>
-                    <a:bodyPr/>
-                    <a:lstStyle/>
-                    <a:p>
-                      <a:pPr algn="l" indent="0" marL="0">
-                        <a:buNone/>
-                      </a:pPr>
-                      <a:r>
-                        <a:rPr lang="en-US" sz="800" dirty="0">
-                          <a:solidFill>
-                            <a:srgbClr val="334155"/>
-                          </a:solidFill>
-                          <a:latin typeface="Noto Sans KR" pitchFamily="34" charset="0"/>
-                          <a:ea typeface="Noto Sans KR" pitchFamily="34" charset="-122"/>
-                          <a:cs typeface="Noto Sans KR" pitchFamily="34" charset="-120"/>
-                        </a:rPr>
-                        <a:t> </a:t>
-                      </a:r>
-                      <a:endParaRPr lang="en-US" sz="800" dirty="0">
-                        <a:latin typeface="Noto Sans KR" charset="0"/>
-                        <a:ea typeface="Noto Sans KR" charset="0"/>
-                        <a:cs typeface="Noto Sans KR" charset="0"/>
-                      </a:endParaRPr>
-                    </a:p>
-                  </a:txBody>
-                  <a:tcPr marL="76200" marR="76200" marT="38100" marB="38100" anchor="ctr">
-                    <a:lnL w="6350" cap="flat" cmpd="sng" algn="ctr">
-                      <a:solidFill>
-                        <a:srgbClr val="CBD5E1"/>
-                      </a:solidFill>
-                      <a:prstDash val="solid"/>
-                      <a:round/>
-                      <a:headEnd type="none" w="med" len="med"/>
-                      <a:tailEnd type="none" w="med" len="med"/>
-                    </a:lnL>
-                    <a:lnR w="6350" cap="flat" cmpd="sng" algn="ctr">
-                      <a:solidFill>
-                        <a:srgbClr val="CBD5E1"/>
-                      </a:solidFill>
-                      <a:prstDash val="solid"/>
-                      <a:round/>
-                      <a:headEnd type="none" w="med" len="med"/>
-                      <a:tailEnd type="none" w="med" len="med"/>
-                    </a:lnR>
-                    <a:lnT w="6350" cap="flat" cmpd="sng" algn="ctr">
-                      <a:solidFill>
-                        <a:srgbClr val="CBD5E1"/>
-                      </a:solidFill>
-                      <a:prstDash val="solid"/>
-                      <a:round/>
-                      <a:headEnd type="none" w="med" len="med"/>
-                      <a:tailEnd type="none" w="med" len="med"/>
-                    </a:lnT>
-                    <a:lnB w="6350" cap="flat" cmpd="sng" algn="ctr">
-                      <a:solidFill>
-                        <a:srgbClr val="CBD5E1"/>
-                      </a:solidFill>
-                      <a:prstDash val="solid"/>
-                      <a:round/>
-                      <a:headEnd type="none" w="med" len="med"/>
-                      <a:tailEnd type="none" w="med" len="med"/>
-                    </a:lnB>
-                  </a:tcPr>
-                </a:tc>
-                <a:tc>
-                  <a:txBody>
-                    <a:bodyPr/>
-                    <a:lstStyle/>
-                    <a:p>
-                      <a:pPr algn="l" indent="0" marL="0">
-                        <a:buNone/>
-                      </a:pPr>
-                      <a:r>
-                        <a:rPr lang="en-US" sz="800" dirty="0">
-                          <a:solidFill>
-                            <a:srgbClr val="334155"/>
-                          </a:solidFill>
-                          <a:latin typeface="Noto Sans KR" pitchFamily="34" charset="0"/>
-                          <a:ea typeface="Noto Sans KR" pitchFamily="34" charset="-122"/>
-                          <a:cs typeface="Noto Sans KR" pitchFamily="34" charset="-120"/>
-                        </a:rPr>
-                        <a:t> </a:t>
-                      </a:r>
-                      <a:endParaRPr lang="en-US" sz="800" dirty="0">
-                        <a:latin typeface="Noto Sans KR" charset="0"/>
-                        <a:ea typeface="Noto Sans KR" charset="0"/>
-                        <a:cs typeface="Noto Sans KR" charset="0"/>
-                      </a:endParaRPr>
-                    </a:p>
-                  </a:txBody>
-                  <a:tcPr marL="76200" marR="76200" marT="38100" marB="38100" anchor="ctr">
-                    <a:lnL w="6350" cap="flat" cmpd="sng" algn="ctr">
-                      <a:solidFill>
-                        <a:srgbClr val="CBD5E1"/>
-                      </a:solidFill>
-                      <a:prstDash val="solid"/>
-                      <a:round/>
-                      <a:headEnd type="none" w="med" len="med"/>
-                      <a:tailEnd type="none" w="med" len="med"/>
-                    </a:lnL>
-                    <a:lnR w="6350" cap="flat" cmpd="sng" algn="ctr">
-                      <a:solidFill>
-                        <a:srgbClr val="CBD5E1"/>
-                      </a:solidFill>
-                      <a:prstDash val="solid"/>
-                      <a:round/>
-                      <a:headEnd type="none" w="med" len="med"/>
-                      <a:tailEnd type="none" w="med" len="med"/>
-                    </a:lnR>
-                    <a:lnT w="6350" cap="flat" cmpd="sng" algn="ctr">
-                      <a:solidFill>
-                        <a:srgbClr val="CBD5E1"/>
-                      </a:solidFill>
-                      <a:prstDash val="solid"/>
-                      <a:round/>
-                      <a:headEnd type="none" w="med" len="med"/>
-                      <a:tailEnd type="none" w="med" len="med"/>
-                    </a:lnT>
-                    <a:lnB w="6350" cap="flat" cmpd="sng" algn="ctr">
-                      <a:solidFill>
-                        <a:srgbClr val="CBD5E1"/>
-                      </a:solidFill>
-                      <a:prstDash val="solid"/>
-                      <a:round/>
-                      <a:headEnd type="none" w="med" len="med"/>
-                      <a:tailEnd type="none" w="med" len="med"/>
-                    </a:lnB>
-                  </a:tcPr>
-                </a:tc>
-                <a:tc>
-                  <a:txBody>
-                    <a:bodyPr/>
-                    <a:lstStyle/>
-                    <a:p>
-                      <a:pPr algn="l" indent="0" marL="0">
-                        <a:buNone/>
-                      </a:pPr>
-                      <a:r>
-                        <a:rPr lang="en-US" sz="800" dirty="0">
-                          <a:solidFill>
-                            <a:srgbClr val="334155"/>
-                          </a:solidFill>
-                          <a:latin typeface="Noto Sans KR" pitchFamily="34" charset="0"/>
-                          <a:ea typeface="Noto Sans KR" pitchFamily="34" charset="-122"/>
-                          <a:cs typeface="Noto Sans KR" pitchFamily="34" charset="-120"/>
-                        </a:rPr>
-                        <a:t> </a:t>
-                      </a:r>
-                      <a:endParaRPr lang="en-US" sz="800" dirty="0">
-                        <a:latin typeface="Noto Sans KR" charset="0"/>
-                        <a:ea typeface="Noto Sans KR" charset="0"/>
-                        <a:cs typeface="Noto Sans KR" charset="0"/>
-                      </a:endParaRPr>
-                    </a:p>
-                  </a:txBody>
-                  <a:tcPr marL="76200" marR="76200" marT="38100" marB="38100" anchor="ctr">
-                    <a:lnL w="6350" cap="flat" cmpd="sng" algn="ctr">
-                      <a:solidFill>
-                        <a:srgbClr val="CBD5E1"/>
-                      </a:solidFill>
-                      <a:prstDash val="solid"/>
-                      <a:round/>
-                      <a:headEnd type="none" w="med" len="med"/>
-                      <a:tailEnd type="none" w="med" len="med"/>
-                    </a:lnL>
-                    <a:lnR w="6350" cap="flat" cmpd="sng" algn="ctr">
-                      <a:solidFill>
-                        <a:srgbClr val="CBD5E1"/>
-                      </a:solidFill>
-                      <a:prstDash val="solid"/>
-                      <a:round/>
-                      <a:headEnd type="none" w="med" len="med"/>
-                      <a:tailEnd type="none" w="med" len="med"/>
-                    </a:lnR>
-                    <a:lnT w="6350" cap="flat" cmpd="sng" algn="ctr">
-                      <a:solidFill>
-                        <a:srgbClr val="CBD5E1"/>
-                      </a:solidFill>
-                      <a:prstDash val="solid"/>
-                      <a:round/>
-                      <a:headEnd type="none" w="med" len="med"/>
-                      <a:tailEnd type="none" w="med" len="med"/>
-                    </a:lnT>
-                    <a:lnB w="6350" cap="flat" cmpd="sng" algn="ctr">
-                      <a:solidFill>
-                        <a:srgbClr val="CBD5E1"/>
-                      </a:solidFill>
-                      <a:prstDash val="solid"/>
-                      <a:round/>
-                      <a:headEnd type="none" w="med" len="med"/>
-                      <a:tailEnd type="none" w="med" len="med"/>
-                    </a:lnB>
-                  </a:tcPr>
-                </a:tc>
-              </a:tr>
-              <a:tr h="274320">
-                <a:tc>
-                  <a:txBody>
-                    <a:bodyPr/>
-                    <a:lstStyle/>
-                    <a:p>
-                      <a:pPr algn="ctr" indent="0" marL="0">
-                        <a:buNone/>
-                      </a:pPr>
-                      <a:r>
-                        <a:rPr lang="en-US" sz="800" b="1" dirty="0">
-                          <a:solidFill>
-                            <a:srgbClr val="267D86"/>
-                          </a:solidFill>
-                          <a:latin typeface="Noto Sans KR" pitchFamily="34" charset="0"/>
-                          <a:ea typeface="Noto Sans KR" pitchFamily="34" charset="-122"/>
-                          <a:cs typeface="Noto Sans KR" pitchFamily="34" charset="-120"/>
-                        </a:rPr>
-                        <a:t>4</a:t>
-                      </a:r>
-                      <a:endParaRPr lang="en-US" sz="800" dirty="0">
-                        <a:latin typeface="Noto Sans KR" charset="0"/>
-                        <a:ea typeface="Noto Sans KR" charset="0"/>
-                        <a:cs typeface="Noto Sans KR" charset="0"/>
-                      </a:endParaRPr>
-                    </a:p>
-                  </a:txBody>
-                  <a:tcPr marL="76200" marR="76200" marT="38100" marB="38100" anchor="ctr">
-                    <a:lnL w="6350" cap="flat" cmpd="sng" algn="ctr">
-                      <a:solidFill>
-                        <a:srgbClr val="CBD5E1"/>
-                      </a:solidFill>
-                      <a:prstDash val="solid"/>
-                      <a:round/>
-                      <a:headEnd type="none" w="med" len="med"/>
-                      <a:tailEnd type="none" w="med" len="med"/>
-                    </a:lnL>
-                    <a:lnR w="6350" cap="flat" cmpd="sng" algn="ctr">
-                      <a:solidFill>
-                        <a:srgbClr val="CBD5E1"/>
-                      </a:solidFill>
-                      <a:prstDash val="solid"/>
-                      <a:round/>
-                      <a:headEnd type="none" w="med" len="med"/>
-                      <a:tailEnd type="none" w="med" len="med"/>
-                    </a:lnR>
-                    <a:lnT w="6350" cap="flat" cmpd="sng" algn="ctr">
-                      <a:solidFill>
-                        <a:srgbClr val="CBD5E1"/>
-                      </a:solidFill>
-                      <a:prstDash val="solid"/>
-                      <a:round/>
-                      <a:headEnd type="none" w="med" len="med"/>
-                      <a:tailEnd type="none" w="med" len="med"/>
-                    </a:lnT>
-                    <a:lnB w="6350" cap="flat" cmpd="sng" algn="ctr">
-                      <a:solidFill>
-                        <a:srgbClr val="CBD5E1"/>
-                      </a:solidFill>
-                      <a:prstDash val="solid"/>
-                      <a:round/>
-                      <a:headEnd type="none" w="med" len="med"/>
-                      <a:tailEnd type="none" w="med" len="med"/>
-                    </a:lnB>
-                  </a:tcPr>
-                </a:tc>
-                <a:tc>
-                  <a:txBody>
-                    <a:bodyPr/>
-                    <a:lstStyle/>
-                    <a:p>
-                      <a:pPr algn="l" indent="0" marL="0">
-                        <a:buNone/>
-                      </a:pPr>
-                      <a:r>
-                        <a:rPr lang="en-US" sz="800" dirty="0">
-                          <a:solidFill>
-                            <a:srgbClr val="64748B"/>
-                          </a:solidFill>
-                          <a:latin typeface="Noto Sans KR" pitchFamily="34" charset="0"/>
-                          <a:ea typeface="Noto Sans KR" pitchFamily="34" charset="-122"/>
-                          <a:cs typeface="Noto Sans KR" pitchFamily="34" charset="-120"/>
-                        </a:rPr>
-                        <a:t>( 추가로 시도하면 기입 )</a:t>
-                      </a:r>
-                      <a:endParaRPr lang="en-US" sz="800" dirty="0">
-                        <a:latin typeface="Noto Sans KR" charset="0"/>
-                        <a:ea typeface="Noto Sans KR" charset="0"/>
-                        <a:cs typeface="Noto Sans KR" charset="0"/>
-                      </a:endParaRPr>
-                    </a:p>
-                  </a:txBody>
-                  <a:tcPr marL="76200" marR="76200" marT="38100" marB="38100" anchor="ctr">
-                    <a:lnL w="6350" cap="flat" cmpd="sng" algn="ctr">
-                      <a:solidFill>
-                        <a:srgbClr val="CBD5E1"/>
-                      </a:solidFill>
-                      <a:prstDash val="solid"/>
-                      <a:round/>
-                      <a:headEnd type="none" w="med" len="med"/>
-                      <a:tailEnd type="none" w="med" len="med"/>
-                    </a:lnL>
-                    <a:lnR w="6350" cap="flat" cmpd="sng" algn="ctr">
-                      <a:solidFill>
-                        <a:srgbClr val="CBD5E1"/>
-                      </a:solidFill>
-                      <a:prstDash val="solid"/>
-                      <a:round/>
-                      <a:headEnd type="none" w="med" len="med"/>
-                      <a:tailEnd type="none" w="med" len="med"/>
-                    </a:lnR>
-                    <a:lnT w="6350" cap="flat" cmpd="sng" algn="ctr">
-                      <a:solidFill>
-                        <a:srgbClr val="CBD5E1"/>
-                      </a:solidFill>
-                      <a:prstDash val="solid"/>
-                      <a:round/>
-                      <a:headEnd type="none" w="med" len="med"/>
-                      <a:tailEnd type="none" w="med" len="med"/>
-                    </a:lnT>
-                    <a:lnB w="6350" cap="flat" cmpd="sng" algn="ctr">
-                      <a:solidFill>
-                        <a:srgbClr val="CBD5E1"/>
-                      </a:solidFill>
-                      <a:prstDash val="solid"/>
-                      <a:round/>
-                      <a:headEnd type="none" w="med" len="med"/>
-                      <a:tailEnd type="none" w="med" len="med"/>
-                    </a:lnB>
-                  </a:tcPr>
-                </a:tc>
-                <a:tc>
-                  <a:txBody>
-                    <a:bodyPr/>
-                    <a:lstStyle/>
-                    <a:p>
-                      <a:pPr algn="l" indent="0" marL="0">
-                        <a:buNone/>
-                      </a:pPr>
-                      <a:r>
-                        <a:rPr lang="en-US" sz="800" dirty="0">
-                          <a:solidFill>
-                            <a:srgbClr val="334155"/>
-                          </a:solidFill>
-                          <a:latin typeface="Noto Sans KR" pitchFamily="34" charset="0"/>
-                          <a:ea typeface="Noto Sans KR" pitchFamily="34" charset="-122"/>
-                          <a:cs typeface="Noto Sans KR" pitchFamily="34" charset="-120"/>
-                        </a:rPr>
-                        <a:t> </a:t>
-                      </a:r>
-                      <a:endParaRPr lang="en-US" sz="800" dirty="0">
-                        <a:latin typeface="Noto Sans KR" charset="0"/>
-                        <a:ea typeface="Noto Sans KR" charset="0"/>
-                        <a:cs typeface="Noto Sans KR" charset="0"/>
-                      </a:endParaRPr>
-                    </a:p>
-                  </a:txBody>
-                  <a:tcPr marL="76200" marR="76200" marT="38100" marB="38100" anchor="ctr">
-                    <a:lnL w="6350" cap="flat" cmpd="sng" algn="ctr">
-                      <a:solidFill>
-                        <a:srgbClr val="CBD5E1"/>
-                      </a:solidFill>
-                      <a:prstDash val="solid"/>
-                      <a:round/>
-                      <a:headEnd type="none" w="med" len="med"/>
-                      <a:tailEnd type="none" w="med" len="med"/>
-                    </a:lnL>
-                    <a:lnR w="6350" cap="flat" cmpd="sng" algn="ctr">
-                      <a:solidFill>
-                        <a:srgbClr val="CBD5E1"/>
-                      </a:solidFill>
-                      <a:prstDash val="solid"/>
-                      <a:round/>
-                      <a:headEnd type="none" w="med" len="med"/>
-                      <a:tailEnd type="none" w="med" len="med"/>
-                    </a:lnR>
-                    <a:lnT w="6350" cap="flat" cmpd="sng" algn="ctr">
-                      <a:solidFill>
-                        <a:srgbClr val="CBD5E1"/>
-                      </a:solidFill>
-                      <a:prstDash val="solid"/>
-                      <a:round/>
-                      <a:headEnd type="none" w="med" len="med"/>
-                      <a:tailEnd type="none" w="med" len="med"/>
-                    </a:lnT>
-                    <a:lnB w="6350" cap="flat" cmpd="sng" algn="ctr">
-                      <a:solidFill>
-                        <a:srgbClr val="CBD5E1"/>
-                      </a:solidFill>
-                      <a:prstDash val="solid"/>
-                      <a:round/>
-                      <a:headEnd type="none" w="med" len="med"/>
-                      <a:tailEnd type="none" w="med" len="med"/>
-                    </a:lnB>
-                  </a:tcPr>
-                </a:tc>
-                <a:tc>
-                  <a:txBody>
-                    <a:bodyPr/>
-                    <a:lstStyle/>
-                    <a:p>
-                      <a:pPr algn="l" indent="0" marL="0">
-                        <a:buNone/>
-                      </a:pPr>
-                      <a:r>
-                        <a:rPr lang="en-US" sz="800" dirty="0">
-                          <a:solidFill>
-                            <a:srgbClr val="334155"/>
-                          </a:solidFill>
-                          <a:latin typeface="Noto Sans KR" pitchFamily="34" charset="0"/>
-                          <a:ea typeface="Noto Sans KR" pitchFamily="34" charset="-122"/>
-                          <a:cs typeface="Noto Sans KR" pitchFamily="34" charset="-120"/>
-                        </a:rPr>
-                        <a:t> </a:t>
-                      </a:r>
-                      <a:endParaRPr lang="en-US" sz="800" dirty="0">
-                        <a:latin typeface="Noto Sans KR" charset="0"/>
-                        <a:ea typeface="Noto Sans KR" charset="0"/>
-                        <a:cs typeface="Noto Sans KR" charset="0"/>
-                      </a:endParaRPr>
-                    </a:p>
-                  </a:txBody>
-                  <a:tcPr marL="76200" marR="76200" marT="38100" marB="38100" anchor="ctr">
-                    <a:lnL w="6350" cap="flat" cmpd="sng" algn="ctr">
-                      <a:solidFill>
-                        <a:srgbClr val="CBD5E1"/>
-                      </a:solidFill>
-                      <a:prstDash val="solid"/>
-                      <a:round/>
-                      <a:headEnd type="none" w="med" len="med"/>
-                      <a:tailEnd type="none" w="med" len="med"/>
-                    </a:lnL>
-                    <a:lnR w="6350" cap="flat" cmpd="sng" algn="ctr">
-                      <a:solidFill>
-                        <a:srgbClr val="CBD5E1"/>
-                      </a:solidFill>
-                      <a:prstDash val="solid"/>
-                      <a:round/>
-                      <a:headEnd type="none" w="med" len="med"/>
-                      <a:tailEnd type="none" w="med" len="med"/>
-                    </a:lnR>
-                    <a:lnT w="6350" cap="flat" cmpd="sng" algn="ctr">
-                      <a:solidFill>
-                        <a:srgbClr val="CBD5E1"/>
-                      </a:solidFill>
-                      <a:prstDash val="solid"/>
-                      <a:round/>
-                      <a:headEnd type="none" w="med" len="med"/>
-                      <a:tailEnd type="none" w="med" len="med"/>
-                    </a:lnT>
-                    <a:lnB w="6350" cap="flat" cmpd="sng" algn="ctr">
-                      <a:solidFill>
-                        <a:srgbClr val="CBD5E1"/>
-                      </a:solidFill>
-                      <a:prstDash val="solid"/>
-                      <a:round/>
-                      <a:headEnd type="none" w="med" len="med"/>
-                      <a:tailEnd type="none" w="med" len="med"/>
-                    </a:lnB>
-                  </a:tcPr>
-                </a:tc>
-                <a:tc>
-                  <a:txBody>
-                    <a:bodyPr/>
-                    <a:lstStyle/>
-                    <a:p>
-                      <a:pPr algn="l" indent="0" marL="0">
-                        <a:buNone/>
-                      </a:pPr>
-                      <a:r>
-                        <a:rPr lang="en-US" sz="800" dirty="0">
-                          <a:solidFill>
-                            <a:srgbClr val="334155"/>
-                          </a:solidFill>
-                          <a:latin typeface="Noto Sans KR" pitchFamily="34" charset="0"/>
-                          <a:ea typeface="Noto Sans KR" pitchFamily="34" charset="-122"/>
-                          <a:cs typeface="Noto Sans KR" pitchFamily="34" charset="-120"/>
-                        </a:rPr>
-                        <a:t> </a:t>
-                      </a:r>
-                      <a:endParaRPr lang="en-US" sz="800" dirty="0">
-                        <a:latin typeface="Noto Sans KR" charset="0"/>
-                        <a:ea typeface="Noto Sans KR" charset="0"/>
-                        <a:cs typeface="Noto Sans KR" charset="0"/>
-                      </a:endParaRPr>
-                    </a:p>
-                  </a:txBody>
-                  <a:tcPr marL="76200" marR="76200" marT="38100" marB="38100" anchor="ctr">
-                    <a:lnL w="6350" cap="flat" cmpd="sng" algn="ctr">
-                      <a:solidFill>
-                        <a:srgbClr val="CBD5E1"/>
-                      </a:solidFill>
-                      <a:prstDash val="solid"/>
-                      <a:round/>
-                      <a:headEnd type="none" w="med" len="med"/>
-                      <a:tailEnd type="none" w="med" len="med"/>
-                    </a:lnL>
-                    <a:lnR w="6350" cap="flat" cmpd="sng" algn="ctr">
-                      <a:solidFill>
-                        <a:srgbClr val="CBD5E1"/>
-                      </a:solidFill>
-                      <a:prstDash val="solid"/>
-                      <a:round/>
-                      <a:headEnd type="none" w="med" len="med"/>
-                      <a:tailEnd type="none" w="med" len="med"/>
-                    </a:lnR>
-                    <a:lnT w="6350" cap="flat" cmpd="sng" algn="ctr">
-                      <a:solidFill>
-                        <a:srgbClr val="CBD5E1"/>
-                      </a:solidFill>
-                      <a:prstDash val="solid"/>
-                      <a:round/>
-                      <a:headEnd type="none" w="med" len="med"/>
-                      <a:tailEnd type="none" w="med" len="med"/>
-                    </a:lnT>
-                    <a:lnB w="6350" cap="flat" cmpd="sng" algn="ctr">
-                      <a:solidFill>
-                        <a:srgbClr val="CBD5E1"/>
-                      </a:solidFill>
-                      <a:prstDash val="solid"/>
-                      <a:round/>
-                      <a:headEnd type="none" w="med" len="med"/>
-                      <a:tailEnd type="none" w="med" len="med"/>
-                    </a:lnB>
-                  </a:tcPr>
-                </a:tc>
-                <a:tc>
-                  <a:txBody>
-                    <a:bodyPr/>
-                    <a:lstStyle/>
-                    <a:p>
-                      <a:pPr algn="l" indent="0" marL="0">
-                        <a:buNone/>
-                      </a:pPr>
-                      <a:r>
-                        <a:rPr lang="en-US" sz="800" dirty="0">
-                          <a:solidFill>
-                            <a:srgbClr val="334155"/>
-                          </a:solidFill>
-                          <a:latin typeface="Noto Sans KR" pitchFamily="34" charset="0"/>
-                          <a:ea typeface="Noto Sans KR" pitchFamily="34" charset="-122"/>
-                          <a:cs typeface="Noto Sans KR" pitchFamily="34" charset="-120"/>
-                        </a:rPr>
-                        <a:t> </a:t>
-                      </a:r>
-                      <a:endParaRPr lang="en-US" sz="800" dirty="0">
-                        <a:latin typeface="Noto Sans KR" charset="0"/>
-                        <a:ea typeface="Noto Sans KR" charset="0"/>
-                        <a:cs typeface="Noto Sans KR" charset="0"/>
-                      </a:endParaRPr>
-                    </a:p>
-                  </a:txBody>
-                  <a:tcPr marL="76200" marR="76200" marT="38100" marB="38100" anchor="ctr">
-                    <a:lnL w="6350" cap="flat" cmpd="sng" algn="ctr">
-                      <a:solidFill>
-                        <a:srgbClr val="CBD5E1"/>
-                      </a:solidFill>
-                      <a:prstDash val="solid"/>
-                      <a:round/>
-                      <a:headEnd type="none" w="med" len="med"/>
-                      <a:tailEnd type="none" w="med" len="med"/>
-                    </a:lnL>
-                    <a:lnR w="6350" cap="flat" cmpd="sng" algn="ctr">
-                      <a:solidFill>
-                        <a:srgbClr val="CBD5E1"/>
-                      </a:solidFill>
-                      <a:prstDash val="solid"/>
-                      <a:round/>
-                      <a:headEnd type="none" w="med" len="med"/>
-                      <a:tailEnd type="none" w="med" len="med"/>
-                    </a:lnR>
-                    <a:lnT w="6350" cap="flat" cmpd="sng" algn="ctr">
-                      <a:solidFill>
-                        <a:srgbClr val="CBD5E1"/>
-                      </a:solidFill>
-                      <a:prstDash val="solid"/>
-                      <a:round/>
-                      <a:headEnd type="none" w="med" len="med"/>
-                      <a:tailEnd type="none" w="med" len="med"/>
-                    </a:lnT>
-                    <a:lnB w="6350" cap="flat" cmpd="sng" algn="ctr">
-                      <a:solidFill>
-                        <a:srgbClr val="CBD5E1"/>
-                      </a:solidFill>
-                      <a:prstDash val="solid"/>
-                      <a:round/>
-                      <a:headEnd type="none" w="med" len="med"/>
-                      <a:tailEnd type="none" w="med" len="med"/>
-                    </a:lnB>
-                  </a:tcPr>
-                </a:tc>
               </a:tr>
             </a:tbl>
           </a:graphicData>
@@ -37181,13 +36637,13 @@
       </p:graphicFrame>
       <p:sp>
         <p:nvSpPr>
-          <p:cNvPr id="9" name="제목 연결되지 않은 이유"/>
+          <p:cNvPr id="8" name="제목 연결되지 않은 이유"/>
           <p:cNvSpPr txBox="1"/>
           <p:nvPr/>
         </p:nvSpPr>
         <p:spPr>
           <a:xfrm>
-            <a:off x="612648" y="3451149"/>
+            <a:off x="612648" y="3182031"/>
             <a:ext cx="3532632" cy="237744"/>
           </a:xfrm>
           <a:prstGeom prst="rect">
@@ -37223,13 +36679,13 @@
       </p:sp>
       <p:sp>
         <p:nvSpPr>
-          <p:cNvPr id="10" name="제목 알게 된 것 · 기획 반영"/>
+          <p:cNvPr id="9" name="제목 사전 가정"/>
           <p:cNvSpPr txBox="1"/>
           <p:nvPr/>
         </p:nvSpPr>
         <p:spPr>
           <a:xfrm>
-            <a:off x="4328160" y="3451149"/>
+            <a:off x="4328160" y="3182031"/>
             <a:ext cx="3532632" cy="237744"/>
           </a:xfrm>
           <a:prstGeom prst="rect">
@@ -37257,7 +36713,7 @@
                 <a:ea typeface="Noto Sans KR" pitchFamily="34" charset="-122"/>
                 <a:cs typeface="Noto Sans KR" pitchFamily="34" charset="-120"/>
               </a:rPr>
-              <a:t>알게 된 것 · 기획 반영</a:t>
+              <a:t>사전 가정</a:t>
             </a:r>
             <a:endParaRPr lang="en-US" sz="1050" dirty="0"/>
           </a:p>
@@ -37265,13 +36721,13 @@
       </p:sp>
       <p:sp>
         <p:nvSpPr>
-          <p:cNvPr id="11" name="제목 대신 확인한 자료"/>
+          <p:cNvPr id="10" name="제목 준비한 질문 · 대본 (별도 PDF 5쪽)"/>
           <p:cNvSpPr txBox="1"/>
           <p:nvPr/>
         </p:nvSpPr>
         <p:spPr>
           <a:xfrm>
-            <a:off x="8043672" y="3451149"/>
+            <a:off x="8043672" y="3182031"/>
             <a:ext cx="3532632" cy="237744"/>
           </a:xfrm>
           <a:prstGeom prst="rect">
@@ -37299,7 +36755,7 @@
                 <a:ea typeface="Noto Sans KR" pitchFamily="34" charset="-122"/>
                 <a:cs typeface="Noto Sans KR" pitchFamily="34" charset="-120"/>
               </a:rPr>
-              <a:t>대신 확인한 자료</a:t>
+              <a:t>준비한 질문 · 대본 (별도 PDF 5쪽)</a:t>
             </a:r>
             <a:endParaRPr lang="en-US" sz="1050" dirty="0"/>
           </a:p>
@@ -37307,14 +36763,14 @@
       </p:sp>
       <p:sp>
         <p:nvSpPr>
-          <p:cNvPr id="12" name="연결 불가 이유"/>
+          <p:cNvPr id="11" name="연결 불가 이유"/>
           <p:cNvSpPr txBox="1"/>
           <p:nvPr/>
         </p:nvSpPr>
         <p:spPr>
           <a:xfrm>
-            <a:off x="612648" y="3743757"/>
-            <a:ext cx="3532632" cy="1481328"/>
+            <a:off x="612648" y="3474639"/>
+            <a:ext cx="3532632" cy="2066625"/>
           </a:xfrm>
           <a:prstGeom prst="rect">
             <a:avLst/>
@@ -37323,7 +36779,7 @@
           <a:ln/>
         </p:spPr>
         <p:txBody>
-          <a:bodyPr wrap="square" lIns="0" tIns="0" rIns="0" bIns="0" rtlCol="0" anchor="t"/>
+          <a:bodyPr wrap="square" lIns="0" tIns="0" rIns="0" bIns="0" rtlCol="0" anchor="ctr"/>
           <a:lstStyle/>
           <a:p>
             <a:pPr algn="l" indent="0" marL="0">
@@ -37331,12 +36787,12 @@
                 <a:spcPct val="95000"/>
               </a:lnSpc>
               <a:spcAft>
-                <a:spcPts val="100"/>
+                <a:spcPts val="200"/>
               </a:spcAft>
               <a:buNone/>
             </a:pPr>
             <a:r>
-              <a:rPr lang="en-US" sz="780" b="1" dirty="0">
+              <a:rPr lang="en-US" sz="850" b="1" dirty="0">
                 <a:solidFill>
                   <a:srgbClr val="182F48"/>
                 </a:solidFill>
@@ -37346,7 +36802,7 @@
               </a:rPr>
               <a:t>① 직통 번호가 없다</a:t>
             </a:r>
-            <a:endParaRPr lang="en-US" sz="780" dirty="0"/>
+            <a:endParaRPr lang="en-US" sz="850" dirty="0"/>
           </a:p>
           <a:p>
             <a:pPr algn="l" indent="0" marL="0">
@@ -37354,12 +36810,12 @@
                 <a:spcPct val="95000"/>
               </a:lnSpc>
               <a:spcAft>
-                <a:spcPts val="100"/>
+                <a:spcPts val="200"/>
               </a:spcAft>
               <a:buNone/>
             </a:pPr>
             <a:r>
-              <a:rPr lang="en-US" sz="780" dirty="0">
+              <a:rPr lang="en-US" sz="850" dirty="0">
                 <a:solidFill>
                   <a:srgbClr val="334155"/>
                 </a:solidFill>
@@ -37367,9 +36823,9 @@
                 <a:ea typeface="Noto Sans KR" pitchFamily="34" charset="-122"/>
                 <a:cs typeface="Noto Sans KR" pitchFamily="34" charset="-120"/>
               </a:rPr>
-              <a:t>바이어·MD 연락처는 공개돼 있지 않고,</a:t>
-            </a:r>
-            <a:endParaRPr lang="en-US" sz="780" dirty="0"/>
+              <a:t>바이어 연락처는 비공개, 공개 번호는 매장·고객센터로 간다.</a:t>
+            </a:r>
+            <a:endParaRPr lang="en-US" sz="850" dirty="0"/>
           </a:p>
           <a:p>
             <a:pPr algn="l" indent="0" marL="0">
@@ -37377,12 +36833,35 @@
                 <a:spcPct val="95000"/>
               </a:lnSpc>
               <a:spcAft>
-                <a:spcPts val="100"/>
+                <a:spcPts val="200"/>
               </a:spcAft>
               <a:buNone/>
             </a:pPr>
             <a:r>
-              <a:rPr lang="en-US" sz="780" dirty="0">
+              <a:rPr lang="en-US" sz="850" b="1" dirty="0">
+                <a:solidFill>
+                  <a:srgbClr val="182F48"/>
+                </a:solidFill>
+                <a:latin typeface="Noto Sans KR" pitchFamily="34" charset="0"/>
+                <a:ea typeface="Noto Sans KR" pitchFamily="34" charset="-122"/>
+                <a:cs typeface="Noto Sans KR" pitchFamily="34" charset="-120"/>
+              </a:rPr>
+              <a:t>② 고객센터는 주문·배송 전용이다</a:t>
+            </a:r>
+            <a:endParaRPr lang="en-US" sz="850" dirty="0"/>
+          </a:p>
+          <a:p>
+            <a:pPr algn="l" indent="0" marL="0">
+              <a:lnSpc>
+                <a:spcPct val="95000"/>
+              </a:lnSpc>
+              <a:spcAft>
+                <a:spcPts val="200"/>
+              </a:spcAft>
+              <a:buNone/>
+            </a:pPr>
+            <a:r>
+              <a:rPr lang="en-US" sz="850" dirty="0">
                 <a:solidFill>
                   <a:srgbClr val="334155"/>
                 </a:solidFill>
@@ -37390,9 +36869,9 @@
                 <a:ea typeface="Noto Sans KR" pitchFamily="34" charset="-122"/>
                 <a:cs typeface="Noto Sans KR" pitchFamily="34" charset="-120"/>
               </a:rPr>
-              <a:t>공개된 번호는 매장이나 고객센터로 이어진다.</a:t>
-            </a:r>
-            <a:endParaRPr lang="en-US" sz="780" dirty="0"/>
+              <a:t>두 곳 모두 쇼핑몰 주문·배송 문의 창구로 안내한다.</a:t>
+            </a:r>
+            <a:endParaRPr lang="en-US" sz="850" dirty="0"/>
           </a:p>
           <a:p>
             <a:pPr algn="l" indent="0" marL="0">
@@ -37400,12 +36879,12 @@
                 <a:spcPct val="95000"/>
               </a:lnSpc>
               <a:spcAft>
-                <a:spcPts val="100"/>
+                <a:spcPts val="200"/>
               </a:spcAft>
               <a:buNone/>
             </a:pPr>
             <a:r>
-              <a:rPr lang="en-US" sz="780" b="1" dirty="0">
+              <a:rPr lang="en-US" sz="850" b="1" dirty="0">
                 <a:solidFill>
                   <a:srgbClr val="182F48"/>
                 </a:solidFill>
@@ -37413,9 +36892,9 @@
                 <a:ea typeface="Noto Sans KR" pitchFamily="34" charset="-122"/>
                 <a:cs typeface="Noto Sans KR" pitchFamily="34" charset="-120"/>
               </a:rPr>
-              <a:t>② 고객센터는 소비자 문의만 받는다</a:t>
-            </a:r>
-            <a:endParaRPr lang="en-US" sz="780" dirty="0"/>
+              <a:t>③ 매장과 바잉은 하는 사람이 다르다</a:t>
+            </a:r>
+            <a:endParaRPr lang="en-US" sz="850" dirty="0"/>
           </a:p>
           <a:p>
             <a:pPr algn="l" indent="0" marL="0">
@@ -37423,12 +36902,12 @@
                 <a:spcPct val="95000"/>
               </a:lnSpc>
               <a:spcAft>
-                <a:spcPts val="100"/>
+                <a:spcPts val="200"/>
               </a:spcAft>
               <a:buNone/>
             </a:pPr>
             <a:r>
-              <a:rPr lang="en-US" sz="780" dirty="0">
+              <a:rPr lang="en-US" sz="850" dirty="0">
                 <a:solidFill>
                   <a:srgbClr val="334155"/>
                 </a:solidFill>
@@ -37436,9 +36915,9 @@
                 <a:ea typeface="Noto Sans KR" pitchFamily="34" charset="-122"/>
                 <a:cs typeface="Noto Sans KR" pitchFamily="34" charset="-120"/>
               </a:rPr>
-              <a:t>주문·배송·반품 외 문의는 담당 부서로 넘겨 주지 않는다.</a:t>
-            </a:r>
-            <a:endParaRPr lang="en-US" sz="780" dirty="0"/>
+              <a:t>매장 직원은 판매를, 브랜드 선정은 본사가 맡는다.</a:t>
+            </a:r>
+            <a:endParaRPr lang="en-US" sz="850" dirty="0"/>
           </a:p>
           <a:p>
             <a:pPr algn="l" indent="0" marL="0">
@@ -37446,12 +36925,12 @@
                 <a:spcPct val="95000"/>
               </a:lnSpc>
               <a:spcAft>
-                <a:spcPts val="100"/>
+                <a:spcPts val="200"/>
               </a:spcAft>
               <a:buNone/>
             </a:pPr>
             <a:r>
-              <a:rPr lang="en-US" sz="780" b="1" dirty="0">
+              <a:rPr lang="en-US" sz="850" b="1" dirty="0">
                 <a:solidFill>
                   <a:srgbClr val="182F48"/>
                 </a:solidFill>
@@ -37459,9 +36938,9 @@
                 <a:ea typeface="Noto Sans KR" pitchFamily="34" charset="-122"/>
                 <a:cs typeface="Noto Sans KR" pitchFamily="34" charset="-120"/>
               </a:rPr>
-              <a:t>③ 매장과 바잉은 하는 사람이 다르다</a:t>
-            </a:r>
-            <a:endParaRPr lang="en-US" sz="780" dirty="0"/>
+              <a:t>④ 매장은 낮 12시에 연다</a:t>
+            </a:r>
+            <a:endParaRPr lang="en-US" sz="850" dirty="0"/>
           </a:p>
           <a:p>
             <a:pPr algn="l" indent="0" marL="0">
@@ -37469,12 +36948,12 @@
                 <a:spcPct val="95000"/>
               </a:lnSpc>
               <a:spcAft>
-                <a:spcPts val="100"/>
+                <a:spcPts val="200"/>
               </a:spcAft>
               <a:buNone/>
             </a:pPr>
             <a:r>
-              <a:rPr lang="en-US" sz="780" dirty="0">
+              <a:rPr lang="en-US" sz="850" dirty="0">
                 <a:solidFill>
                   <a:srgbClr val="334155"/>
                 </a:solidFill>
@@ -37482,9 +36961,9 @@
                 <a:ea typeface="Noto Sans KR" pitchFamily="34" charset="-122"/>
                 <a:cs typeface="Noto Sans KR" pitchFamily="34" charset="-120"/>
               </a:rPr>
-              <a:t>매장 직원은 판매를 맡고, 브랜드 선정은 본사가 한다.</a:t>
-            </a:r>
-            <a:endParaRPr lang="en-US" sz="780" dirty="0"/>
+              <a:t>오전 통화는 매장에 닿지 않는다. (웍스아웃 11:10)</a:t>
+            </a:r>
+            <a:endParaRPr lang="en-US" sz="850" dirty="0"/>
           </a:p>
           <a:p>
             <a:pPr algn="l" indent="0" marL="0">
@@ -37492,12 +36971,12 @@
                 <a:spcPct val="95000"/>
               </a:lnSpc>
               <a:spcAft>
-                <a:spcPts val="100"/>
+                <a:spcPts val="200"/>
               </a:spcAft>
               <a:buNone/>
             </a:pPr>
             <a:r>
-              <a:rPr lang="en-US" sz="780" b="1" dirty="0">
+              <a:rPr lang="en-US" sz="850" b="1" dirty="0">
                 <a:solidFill>
                   <a:srgbClr val="182F48"/>
                 </a:solidFill>
@@ -37505,9 +36984,9 @@
                 <a:ea typeface="Noto Sans KR" pitchFamily="34" charset="-122"/>
                 <a:cs typeface="Noto Sans KR" pitchFamily="34" charset="-120"/>
               </a:rPr>
-              <a:t>④ 공식 창구는 입점 신청뿐이다</a:t>
-            </a:r>
-            <a:endParaRPr lang="en-US" sz="780" dirty="0"/>
+              <a:t>⑤ 공식 창구는 입점 신청뿐이다</a:t>
+            </a:r>
+            <a:endParaRPr lang="en-US" sz="850" dirty="0"/>
           </a:p>
           <a:p>
             <a:pPr algn="l" indent="0" marL="0">
@@ -37515,12 +36994,12 @@
                 <a:spcPct val="95000"/>
               </a:lnSpc>
               <a:spcAft>
-                <a:spcPts val="100"/>
+                <a:spcPts val="200"/>
               </a:spcAft>
               <a:buNone/>
             </a:pPr>
             <a:r>
-              <a:rPr lang="en-US" sz="780" dirty="0">
+              <a:rPr lang="en-US" sz="850" dirty="0">
                 <a:solidFill>
                   <a:srgbClr val="334155"/>
                 </a:solidFill>
@@ -37530,24 +37009,257 @@
               </a:rPr>
               <a:t>거래 목적이 아닌 질문은 받아 줄 창구가 없다.</a:t>
             </a:r>
-            <a:endParaRPr lang="en-US" sz="780" dirty="0"/>
+            <a:endParaRPr lang="en-US" sz="850" dirty="0"/>
           </a:p>
         </p:txBody>
       </p:sp>
       <p:sp>
         <p:nvSpPr>
-          <p:cNvPr id="13" name="알게 된 것"/>
+          <p:cNvPr id="12" name="바이어 사전 가정"/>
           <p:cNvSpPr txBox="1"/>
           <p:nvPr/>
         </p:nvSpPr>
         <p:spPr>
           <a:xfrm>
-            <a:off x="4328160" y="3743757"/>
-            <a:ext cx="3532632" cy="1481328"/>
+            <a:off x="4328160" y="3474639"/>
+            <a:ext cx="3532632" cy="2066625"/>
           </a:xfrm>
           <a:prstGeom prst="roundRect">
             <a:avLst>
-              <a:gd name="adj" fmla="val 3086"/>
+              <a:gd name="adj" fmla="val 2212"/>
+            </a:avLst>
+          </a:prstGeom>
+          <a:solidFill>
+            <a:srgbClr val="F1F5F9"/>
+          </a:solidFill>
+          <a:ln/>
+        </p:spPr>
+        <p:txBody>
+          <a:bodyPr wrap="square" lIns="109728" tIns="0" rIns="109728" bIns="0" rtlCol="0" anchor="ctr"/>
+          <a:lstStyle/>
+          <a:p>
+            <a:pPr algn="l" indent="0" marL="0">
+              <a:lnSpc>
+                <a:spcPct val="95000"/>
+              </a:lnSpc>
+              <a:spcAft>
+                <a:spcPts val="200"/>
+              </a:spcAft>
+              <a:buNone/>
+            </a:pPr>
+            <a:r>
+              <a:rPr lang="en-US" sz="850" b="1" dirty="0">
+                <a:solidFill>
+                  <a:srgbClr val="267D86"/>
+                </a:solidFill>
+                <a:latin typeface="Noto Sans KR" pitchFamily="34" charset="0"/>
+                <a:ea typeface="Noto Sans KR" pitchFamily="34" charset="-122"/>
+                <a:cs typeface="Noto Sans KR" pitchFamily="34" charset="-120"/>
+              </a:rPr>
+              <a:t>가정 1</a:t>
+            </a:r>
+            <a:endParaRPr lang="en-US" sz="850" dirty="0"/>
+          </a:p>
+          <a:p>
+            <a:pPr algn="l" indent="0" marL="0">
+              <a:lnSpc>
+                <a:spcPct val="95000"/>
+              </a:lnSpc>
+              <a:spcAft>
+                <a:spcPts val="200"/>
+              </a:spcAft>
+              <a:buNone/>
+            </a:pPr>
+            <a:r>
+              <a:rPr lang="en-US" sz="850" dirty="0">
+                <a:solidFill>
+                  <a:srgbClr val="334155"/>
+                </a:solidFill>
+                <a:latin typeface="Noto Sans KR" pitchFamily="34" charset="0"/>
+                <a:ea typeface="Noto Sans KR" pitchFamily="34" charset="-122"/>
+                <a:cs typeface="Noto Sans KR" pitchFamily="34" charset="-120"/>
+              </a:rPr>
+              <a:t>국내 신진 브랜드는 SNS나 지인 소개로 찾아 시간이 많이 든다.</a:t>
+            </a:r>
+            <a:endParaRPr lang="en-US" sz="850" dirty="0"/>
+          </a:p>
+          <a:p>
+            <a:pPr algn="l" indent="0" marL="0">
+              <a:lnSpc>
+                <a:spcPct val="95000"/>
+              </a:lnSpc>
+              <a:spcAft>
+                <a:spcPts val="200"/>
+              </a:spcAft>
+              <a:buNone/>
+            </a:pPr>
+            <a:r>
+              <a:rPr lang="en-US" sz="850" dirty="0">
+                <a:solidFill>
+                  <a:srgbClr val="64748B"/>
+                </a:solidFill>
+                <a:latin typeface="Noto Sans KR" pitchFamily="34" charset="0"/>
+                <a:ea typeface="Noto Sans KR" pitchFamily="34" charset="-122"/>
+                <a:cs typeface="Noto Sans KR" pitchFamily="34" charset="-120"/>
+              </a:rPr>
+              <a:t>→ 질문 1 · 3으로 확인하려 했다</a:t>
+            </a:r>
+            <a:endParaRPr lang="en-US" sz="850" dirty="0"/>
+          </a:p>
+          <a:p>
+            <a:pPr algn="l" indent="0" marL="0">
+              <a:lnSpc>
+                <a:spcPct val="95000"/>
+              </a:lnSpc>
+              <a:spcAft>
+                <a:spcPts val="200"/>
+              </a:spcAft>
+              <a:buNone/>
+            </a:pPr>
+            <a:r>
+              <a:rPr lang="en-US" sz="850" b="1" dirty="0">
+                <a:solidFill>
+                  <a:srgbClr val="267D86"/>
+                </a:solidFill>
+                <a:latin typeface="Noto Sans KR" pitchFamily="34" charset="0"/>
+                <a:ea typeface="Noto Sans KR" pitchFamily="34" charset="-122"/>
+                <a:cs typeface="Noto Sans KR" pitchFamily="34" charset="-120"/>
+              </a:rPr>
+              <a:t>가정 2</a:t>
+            </a:r>
+            <a:endParaRPr lang="en-US" sz="850" dirty="0"/>
+          </a:p>
+          <a:p>
+            <a:pPr algn="l" indent="0" marL="0">
+              <a:lnSpc>
+                <a:spcPct val="95000"/>
+              </a:lnSpc>
+              <a:spcAft>
+                <a:spcPts val="200"/>
+              </a:spcAft>
+              <a:buNone/>
+            </a:pPr>
+            <a:r>
+              <a:rPr lang="en-US" sz="850" dirty="0">
+                <a:solidFill>
+                  <a:srgbClr val="334155"/>
+                </a:solidFill>
+                <a:latin typeface="Noto Sans KR" pitchFamily="34" charset="0"/>
+                <a:ea typeface="Noto Sans KR" pitchFamily="34" charset="-122"/>
+                <a:cs typeface="Noto Sans KR" pitchFamily="34" charset="-120"/>
+              </a:rPr>
+              <a:t>신진 브랜드는 물량·납기·품질이 불안해 들여오기를 망설인다.</a:t>
+            </a:r>
+            <a:endParaRPr lang="en-US" sz="850" dirty="0"/>
+          </a:p>
+          <a:p>
+            <a:pPr algn="l" indent="0" marL="0">
+              <a:lnSpc>
+                <a:spcPct val="95000"/>
+              </a:lnSpc>
+              <a:spcAft>
+                <a:spcPts val="200"/>
+              </a:spcAft>
+              <a:buNone/>
+            </a:pPr>
+            <a:r>
+              <a:rPr lang="en-US" sz="850" dirty="0">
+                <a:solidFill>
+                  <a:srgbClr val="64748B"/>
+                </a:solidFill>
+                <a:latin typeface="Noto Sans KR" pitchFamily="34" charset="0"/>
+                <a:ea typeface="Noto Sans KR" pitchFamily="34" charset="-122"/>
+                <a:cs typeface="Noto Sans KR" pitchFamily="34" charset="-120"/>
+              </a:rPr>
+              <a:t>→ 질문 2 · 6으로 확인하려 했다</a:t>
+            </a:r>
+            <a:endParaRPr lang="en-US" sz="850" dirty="0"/>
+          </a:p>
+          <a:p>
+            <a:pPr algn="l" indent="0" marL="0">
+              <a:lnSpc>
+                <a:spcPct val="95000"/>
+              </a:lnSpc>
+              <a:spcAft>
+                <a:spcPts val="200"/>
+              </a:spcAft>
+              <a:buNone/>
+            </a:pPr>
+            <a:r>
+              <a:rPr lang="en-US" sz="850" b="1" dirty="0">
+                <a:solidFill>
+                  <a:srgbClr val="267D86"/>
+                </a:solidFill>
+                <a:latin typeface="Noto Sans KR" pitchFamily="34" charset="0"/>
+                <a:ea typeface="Noto Sans KR" pitchFamily="34" charset="-122"/>
+                <a:cs typeface="Noto Sans KR" pitchFamily="34" charset="-120"/>
+              </a:rPr>
+              <a:t>가정 3</a:t>
+            </a:r>
+            <a:endParaRPr lang="en-US" sz="850" dirty="0"/>
+          </a:p>
+          <a:p>
+            <a:pPr algn="l" indent="0" marL="0">
+              <a:lnSpc>
+                <a:spcPct val="95000"/>
+              </a:lnSpc>
+              <a:spcAft>
+                <a:spcPts val="200"/>
+              </a:spcAft>
+              <a:buNone/>
+            </a:pPr>
+            <a:r>
+              <a:rPr lang="en-US" sz="850" dirty="0">
+                <a:solidFill>
+                  <a:srgbClr val="334155"/>
+                </a:solidFill>
+                <a:latin typeface="Noto Sans KR" pitchFamily="34" charset="0"/>
+                <a:ea typeface="Noto Sans KR" pitchFamily="34" charset="-122"/>
+                <a:cs typeface="Noto Sans KR" pitchFamily="34" charset="-120"/>
+              </a:rPr>
+              <a:t>한자리 비교와 1:1 상담이 있다면 바이어로 참관한다.</a:t>
+            </a:r>
+            <a:endParaRPr lang="en-US" sz="850" dirty="0"/>
+          </a:p>
+          <a:p>
+            <a:pPr algn="l" indent="0" marL="0">
+              <a:lnSpc>
+                <a:spcPct val="95000"/>
+              </a:lnSpc>
+              <a:spcAft>
+                <a:spcPts val="200"/>
+              </a:spcAft>
+              <a:buNone/>
+            </a:pPr>
+            <a:r>
+              <a:rPr lang="en-US" sz="850" dirty="0">
+                <a:solidFill>
+                  <a:srgbClr val="64748B"/>
+                </a:solidFill>
+                <a:latin typeface="Noto Sans KR" pitchFamily="34" charset="0"/>
+                <a:ea typeface="Noto Sans KR" pitchFamily="34" charset="-122"/>
+                <a:cs typeface="Noto Sans KR" pitchFamily="34" charset="-120"/>
+              </a:rPr>
+              <a:t>→ 질문 4 · 5 · 7로 확인하려 했다</a:t>
+            </a:r>
+            <a:endParaRPr lang="en-US" sz="850" dirty="0"/>
+          </a:p>
+        </p:txBody>
+      </p:sp>
+      <p:sp>
+        <p:nvSpPr>
+          <p:cNvPr id="13" name="준비한 질문"/>
+          <p:cNvSpPr txBox="1"/>
+          <p:nvPr/>
+        </p:nvSpPr>
+        <p:spPr>
+          <a:xfrm>
+            <a:off x="8043672" y="3474639"/>
+            <a:ext cx="3532632" cy="2066625"/>
+          </a:xfrm>
+          <a:prstGeom prst="roundRect">
+            <a:avLst>
+              <a:gd name="adj" fmla="val 2212"/>
             </a:avLst>
           </a:prstGeom>
           <a:solidFill>
@@ -37556,7 +37268,7 @@
           <a:ln/>
         </p:spPr>
         <p:txBody>
-          <a:bodyPr wrap="square" lIns="91440" tIns="0" rIns="91440" bIns="0" rtlCol="0" anchor="ctr"/>
+          <a:bodyPr wrap="square" lIns="109728" tIns="0" rIns="109728" bIns="0" rtlCol="0" anchor="ctr"/>
           <a:lstStyle/>
           <a:p>
             <a:pPr algn="l" indent="0" marL="0">
@@ -37569,17 +37281,17 @@
               <a:buNone/>
             </a:pPr>
             <a:r>
-              <a:rPr lang="en-US" sz="780" dirty="0">
-                <a:solidFill>
-                  <a:srgbClr val="334155"/>
-                </a:solidFill>
-                <a:latin typeface="Noto Sans KR" pitchFamily="34" charset="0"/>
-                <a:ea typeface="Noto Sans KR" pitchFamily="34" charset="-122"/>
-                <a:cs typeface="Noto Sans KR" pitchFamily="34" charset="-120"/>
-              </a:rPr>
-              <a:t>실무 바이어에게는 콜드콜로 닿기 어렵다.</a:t>
-            </a:r>
-            <a:endParaRPr lang="en-US" sz="780" dirty="0"/>
+              <a:rPr lang="en-US" sz="850" b="1" dirty="0">
+                <a:solidFill>
+                  <a:srgbClr val="182F48"/>
+                </a:solidFill>
+                <a:latin typeface="Noto Sans KR" pitchFamily="34" charset="0"/>
+                <a:ea typeface="Noto Sans KR" pitchFamily="34" charset="-122"/>
+                <a:cs typeface="Noto Sans KR" pitchFamily="34" charset="-120"/>
+              </a:rPr>
+              <a:t>① 행사 설명 대본 (약 1분)</a:t>
+            </a:r>
+            <a:endParaRPr lang="en-US" sz="850" dirty="0"/>
           </a:p>
           <a:p>
             <a:pPr algn="l" indent="0" marL="0">
@@ -37592,7 +37304,7 @@
               <a:buNone/>
             </a:pPr>
             <a:r>
-              <a:rPr lang="en-US" sz="780" dirty="0">
+              <a:rPr lang="en-US" sz="850" dirty="0">
                 <a:solidFill>
                   <a:srgbClr val="334155"/>
                 </a:solidFill>
@@ -37600,9 +37312,9 @@
                 <a:ea typeface="Noto Sans KR" pitchFamily="34" charset="-122"/>
                 <a:cs typeface="Noto Sans KR" pitchFamily="34" charset="-120"/>
               </a:rPr>
-              <a:t>신진 K-브랜드도 같은 벽 앞에 서 있다는 뜻이다.</a:t>
-            </a:r>
-            <a:endParaRPr lang="en-US" sz="780" dirty="0"/>
+              <a:t>문제 제기 → 행사 개요 (나흘 · 브랜드 90 · 생산 60곳)</a:t>
+            </a:r>
+            <a:endParaRPr lang="en-US" sz="850" dirty="0"/>
           </a:p>
           <a:p>
             <a:pPr algn="l" indent="0" marL="0">
@@ -37615,17 +37327,17 @@
               <a:buNone/>
             </a:pPr>
             <a:r>
-              <a:rPr lang="en-US" sz="780" dirty="0">
-                <a:solidFill>
-                  <a:srgbClr val="334155"/>
-                </a:solidFill>
-                <a:latin typeface="Noto Sans KR" pitchFamily="34" charset="0"/>
-                <a:ea typeface="Noto Sans KR" pitchFamily="34" charset="-122"/>
-                <a:cs typeface="Noto Sans KR" pitchFamily="34" charset="-120"/>
-              </a:rPr>
-              <a:t>바이어를 만나려면 소개나 플랫폼 행사를 거쳐야 한다.</a:t>
-            </a:r>
-            <a:endParaRPr lang="en-US" sz="780" dirty="0"/>
+              <a:rPr lang="en-US" sz="850" b="1" dirty="0">
+                <a:solidFill>
+                  <a:srgbClr val="182F48"/>
+                </a:solidFill>
+                <a:latin typeface="Noto Sans KR" pitchFamily="34" charset="0"/>
+                <a:ea typeface="Noto Sans KR" pitchFamily="34" charset="-122"/>
+                <a:cs typeface="Noto Sans KR" pitchFamily="34" charset="-120"/>
+              </a:rPr>
+              <a:t>② 바이어의 역할과 혜택</a:t>
+            </a:r>
+            <a:endParaRPr lang="en-US" sz="850" dirty="0"/>
           </a:p>
           <a:p>
             <a:pPr algn="l" indent="0" marL="0">
@@ -37638,17 +37350,17 @@
               <a:buNone/>
             </a:pPr>
             <a:r>
-              <a:rPr lang="en-US" sz="780" b="1" dirty="0">
-                <a:solidFill>
-                  <a:srgbClr val="267D86"/>
-                </a:solidFill>
-                <a:latin typeface="Noto Sans KR" pitchFamily="34" charset="0"/>
-                <a:ea typeface="Noto Sans KR" pitchFamily="34" charset="-122"/>
-                <a:cs typeface="Noto Sans KR" pitchFamily="34" charset="-120"/>
-              </a:rPr>
-              <a:t>→ 기획 반영</a:t>
-            </a:r>
-            <a:endParaRPr lang="en-US" sz="780" dirty="0"/>
+              <a:rPr lang="en-US" sz="850" dirty="0">
+                <a:solidFill>
+                  <a:srgbClr val="334155"/>
+                </a:solidFill>
+                <a:latin typeface="Noto Sans KR" pitchFamily="34" charset="0"/>
+                <a:ea typeface="Noto Sans KR" pitchFamily="34" charset="-122"/>
+                <a:cs typeface="Noto Sans KR" pitchFamily="34" charset="-120"/>
+              </a:rPr>
+              <a:t>1:1 사전 상담 · 생산 업체 동석 · 시험 결과 · 무료 참관</a:t>
+            </a:r>
+            <a:endParaRPr lang="en-US" sz="850" dirty="0"/>
           </a:p>
           <a:p>
             <a:pPr algn="l" indent="0" marL="0">
@@ -37661,17 +37373,17 @@
               <a:buNone/>
             </a:pPr>
             <a:r>
-              <a:rPr lang="en-US" sz="780" dirty="0">
-                <a:solidFill>
-                  <a:srgbClr val="334155"/>
-                </a:solidFill>
-                <a:latin typeface="Noto Sans KR" pitchFamily="34" charset="0"/>
-                <a:ea typeface="Noto Sans KR" pitchFamily="34" charset="-122"/>
-                <a:cs typeface="Noto Sans KR" pitchFamily="34" charset="-120"/>
-              </a:rPr>
-              <a:t>트레이드 데이에서 바이어를 미리 등록받고,</a:t>
-            </a:r>
-            <a:endParaRPr lang="en-US" sz="780" dirty="0"/>
+              <a:rPr lang="en-US" sz="850" b="1" dirty="0">
+                <a:solidFill>
+                  <a:srgbClr val="182F48"/>
+                </a:solidFill>
+                <a:latin typeface="Noto Sans KR" pitchFamily="34" charset="0"/>
+                <a:ea typeface="Noto Sans KR" pitchFamily="34" charset="-122"/>
+                <a:cs typeface="Noto Sans KR" pitchFamily="34" charset="-120"/>
+              </a:rPr>
+              <a:t>③ 질문 10개</a:t>
+            </a:r>
+            <a:endParaRPr lang="en-US" sz="850" dirty="0"/>
           </a:p>
           <a:p>
             <a:pPr algn="l" indent="0" marL="0">
@@ -37684,7 +37396,7 @@
               <a:buNone/>
             </a:pPr>
             <a:r>
-              <a:rPr lang="en-US" sz="780" dirty="0">
+              <a:rPr lang="en-US" sz="850" dirty="0">
                 <a:solidFill>
                   <a:srgbClr val="334155"/>
                 </a:solidFill>
@@ -37692,9 +37404,9 @@
                 <a:ea typeface="Noto Sans KR" pitchFamily="34" charset="-122"/>
                 <a:cs typeface="Noto Sans KR" pitchFamily="34" charset="-120"/>
               </a:rPr>
-              <a:t>1:1 상담을 주최 측이 잡아 주는 이유가 여기에 있다.</a:t>
-            </a:r>
-            <a:endParaRPr lang="en-US" sz="780" dirty="0"/>
+              <a:t>지금 겪는 어려움 3 · 원하는 것 3 · 참관 의향과 걸림돌 4</a:t>
+            </a:r>
+            <a:endParaRPr lang="en-US" sz="850" dirty="0"/>
           </a:p>
           <a:p>
             <a:pPr algn="l" indent="0" marL="0">
@@ -37707,40 +37419,18 @@
               <a:buNone/>
             </a:pPr>
             <a:r>
-              <a:rPr lang="en-US" sz="780" dirty="0">
-                <a:solidFill>
-                  <a:srgbClr val="64748B"/>
-                </a:solidFill>
-                <a:latin typeface="Noto Sans KR" pitchFamily="34" charset="0"/>
-                <a:ea typeface="Noto Sans KR" pitchFamily="34" charset="-122"/>
-                <a:cs typeface="Noto Sans KR" pitchFamily="34" charset="-120"/>
-              </a:rPr>
-              <a:t>(3장 목표 2 · 5장 거래 연결표)</a:t>
-            </a:r>
-            <a:endParaRPr lang="en-US" sz="780" dirty="0"/>
-          </a:p>
-        </p:txBody>
-      </p:sp>
-      <p:sp>
-        <p:nvSpPr>
-          <p:cNvPr id="14" name="대체 자료"/>
-          <p:cNvSpPr txBox="1"/>
-          <p:nvPr/>
-        </p:nvSpPr>
-        <p:spPr>
-          <a:xfrm>
-            <a:off x="8043672" y="3743757"/>
-            <a:ext cx="3532632" cy="1481328"/>
-          </a:xfrm>
-          <a:prstGeom prst="rect">
-            <a:avLst/>
-          </a:prstGeom>
-          <a:noFill/>
-          <a:ln/>
-        </p:spPr>
-        <p:txBody>
-          <a:bodyPr wrap="square" lIns="0" tIns="0" rIns="0" bIns="0" rtlCol="0" anchor="t"/>
-          <a:lstStyle/>
+              <a:rPr lang="en-US" sz="850" b="1" dirty="0">
+                <a:solidFill>
+                  <a:srgbClr val="182F48"/>
+                </a:solidFill>
+                <a:latin typeface="Noto Sans KR" pitchFamily="34" charset="0"/>
+                <a:ea typeface="Noto Sans KR" pitchFamily="34" charset="-122"/>
+                <a:cs typeface="Noto Sans KR" pitchFamily="34" charset="-120"/>
+              </a:rPr>
+              <a:t>④ 예상 질문과 답 · 통화 기록표</a:t>
+            </a:r>
+            <a:endParaRPr lang="en-US" sz="850" dirty="0"/>
+          </a:p>
           <a:p>
             <a:pPr algn="l" indent="0" marL="0">
               <a:lnSpc>
@@ -37752,30 +37442,7 @@
               <a:buNone/>
             </a:pPr>
             <a:r>
-              <a:rPr lang="en-US" sz="780" b="1" dirty="0">
-                <a:solidFill>
-                  <a:srgbClr val="182F48"/>
-                </a:solidFill>
-                <a:latin typeface="Noto Sans KR" pitchFamily="34" charset="0"/>
-                <a:ea typeface="Noto Sans KR" pitchFamily="34" charset="-122"/>
-                <a:cs typeface="Noto Sans KR" pitchFamily="34" charset="-120"/>
-              </a:rPr>
-              <a:t>무신사 도쿄 쇼룸 (2024.7)</a:t>
-            </a:r>
-            <a:endParaRPr lang="en-US" sz="780" dirty="0"/>
-          </a:p>
-          <a:p>
-            <a:pPr algn="l" indent="0" marL="0">
-              <a:lnSpc>
-                <a:spcPct val="95000"/>
-              </a:lnSpc>
-              <a:spcAft>
-                <a:spcPts val="200"/>
-              </a:spcAft>
-              <a:buNone/>
-            </a:pPr>
-            <a:r>
-              <a:rPr lang="en-US" sz="780" dirty="0">
+              <a:rPr lang="en-US" sz="850" dirty="0">
                 <a:solidFill>
                   <a:srgbClr val="334155"/>
                 </a:solidFill>
@@ -37783,276 +37450,121 @@
                 <a:ea typeface="Noto Sans KR" pitchFamily="34" charset="-122"/>
                 <a:cs typeface="Noto Sans KR" pitchFamily="34" charset="-120"/>
               </a:rPr>
-              <a:t>일본 편집숍 바이어 200명 이상이 찾아와 주문이 3배 늘었다.</a:t>
-            </a:r>
-            <a:endParaRPr lang="en-US" sz="780" dirty="0"/>
-          </a:p>
-          <a:p>
-            <a:pPr algn="l" indent="0" marL="0">
-              <a:lnSpc>
-                <a:spcPct val="95000"/>
-              </a:lnSpc>
-              <a:spcAft>
-                <a:spcPts val="200"/>
-              </a:spcAft>
-              <a:buNone/>
-            </a:pPr>
-            <a:r>
-              <a:rPr lang="en-US" sz="780" b="1" dirty="0">
-                <a:solidFill>
-                  <a:srgbClr val="182F48"/>
-                </a:solidFill>
-                <a:latin typeface="Noto Sans KR" pitchFamily="34" charset="0"/>
-                <a:ea typeface="Noto Sans KR" pitchFamily="34" charset="-122"/>
-                <a:cs typeface="Noto Sans KR" pitchFamily="34" charset="-120"/>
-              </a:rPr>
-              <a:t>무신사 스탠다드 첫 글로벌 수주회 (2026.8)</a:t>
-            </a:r>
-            <a:endParaRPr lang="en-US" sz="780" dirty="0"/>
-          </a:p>
-          <a:p>
-            <a:pPr algn="l" indent="0" marL="0">
-              <a:lnSpc>
-                <a:spcPct val="95000"/>
-              </a:lnSpc>
-              <a:spcAft>
-                <a:spcPts val="200"/>
-              </a:spcAft>
-              <a:buNone/>
-            </a:pPr>
-            <a:r>
-              <a:rPr lang="en-US" sz="780" dirty="0">
-                <a:solidFill>
-                  <a:srgbClr val="334155"/>
-                </a:solidFill>
-                <a:latin typeface="Noto Sans KR" pitchFamily="34" charset="0"/>
-                <a:ea typeface="Noto Sans KR" pitchFamily="34" charset="-122"/>
-                <a:cs typeface="Noto Sans KR" pitchFamily="34" charset="-120"/>
-              </a:rPr>
-              <a:t>조조타운·티몰과 동남아 4개국 바이어가 서울 성수동에 왔다.</a:t>
-            </a:r>
-            <a:endParaRPr lang="en-US" sz="780" dirty="0"/>
-          </a:p>
-          <a:p>
-            <a:pPr algn="l" indent="0" marL="0">
-              <a:lnSpc>
-                <a:spcPct val="95000"/>
-              </a:lnSpc>
-              <a:spcAft>
-                <a:spcPts val="200"/>
-              </a:spcAft>
-              <a:buNone/>
-            </a:pPr>
-            <a:r>
-              <a:rPr lang="en-US" sz="780" b="1" dirty="0">
-                <a:solidFill>
-                  <a:srgbClr val="267D86"/>
-                </a:solidFill>
-                <a:latin typeface="Noto Sans KR" pitchFamily="34" charset="0"/>
-                <a:ea typeface="Noto Sans KR" pitchFamily="34" charset="-122"/>
-                <a:cs typeface="Noto Sans KR" pitchFamily="34" charset="-120"/>
-              </a:rPr>
-              <a:t>→ </a:t>
-            </a:r>
-            <a:pPr algn="l" indent="0" marL="0">
-              <a:lnSpc>
-                <a:spcPct val="95000"/>
-              </a:lnSpc>
-              <a:spcAft>
-                <a:spcPts val="200"/>
-              </a:spcAft>
-              <a:buNone/>
-            </a:pPr>
-            <a:r>
-              <a:rPr lang="en-US" sz="780" dirty="0">
-                <a:solidFill>
-                  <a:srgbClr val="334155"/>
-                </a:solidFill>
-                <a:latin typeface="Noto Sans KR" pitchFamily="34" charset="0"/>
-                <a:ea typeface="Noto Sans KR" pitchFamily="34" charset="-122"/>
-                <a:cs typeface="Noto Sans KR" pitchFamily="34" charset="-120"/>
-              </a:rPr>
-              <a:t>바이어 수요는 분명하지만,</a:t>
-            </a:r>
-            <a:endParaRPr lang="en-US" sz="780" dirty="0"/>
-          </a:p>
-          <a:p>
-            <a:pPr algn="l" indent="0" marL="0">
-              <a:lnSpc>
-                <a:spcPct val="95000"/>
-              </a:lnSpc>
-              <a:spcAft>
-                <a:spcPts val="200"/>
-              </a:spcAft>
-              <a:buNone/>
-            </a:pPr>
-            <a:r>
-              <a:rPr lang="en-US" sz="780" dirty="0">
-                <a:solidFill>
-                  <a:srgbClr val="334155"/>
-                </a:solidFill>
-                <a:latin typeface="Noto Sans KR" pitchFamily="34" charset="0"/>
-                <a:ea typeface="Noto Sans KR" pitchFamily="34" charset="-122"/>
-                <a:cs typeface="Noto Sans KR" pitchFamily="34" charset="-120"/>
-              </a:rPr>
-              <a:t>지금은 플랫폼이 직접 여는 자리에서만 만난다.</a:t>
-            </a:r>
-            <a:endParaRPr lang="en-US" sz="780" dirty="0"/>
+              <a:t>실제 행사인지 · 비용 · 참가 브랜드 등 4문항과 기록표</a:t>
+            </a:r>
+            <a:endParaRPr lang="en-US" sz="850" dirty="0"/>
           </a:p>
         </p:txBody>
       </p:sp>
       <p:sp>
         <p:nvSpPr>
-          <p:cNvPr id="15" name="준비 내용"/>
+          <p:cNvPr id="14" name="준비와 결과"/>
           <p:cNvSpPr txBox="1"/>
           <p:nvPr/>
         </p:nvSpPr>
         <p:spPr>
           <a:xfrm>
-            <a:off x="612648" y="5353101"/>
-            <a:ext cx="10963656" cy="919683"/>
+            <a:off x="612648" y="5650992"/>
+            <a:ext cx="10963656" cy="676656"/>
           </a:xfrm>
           <a:prstGeom prst="roundRect">
             <a:avLst>
-              <a:gd name="adj" fmla="val 4971"/>
+              <a:gd name="adj" fmla="val 6757"/>
             </a:avLst>
           </a:prstGeom>
           <a:solidFill>
-            <a:srgbClr val="F1F5F9"/>
+            <a:srgbClr val="182F48"/>
           </a:solidFill>
           <a:ln/>
         </p:spPr>
         <p:txBody>
-          <a:bodyPr wrap="square" lIns="109728" tIns="0" rIns="109728" bIns="0" rtlCol="0" anchor="ctr"/>
+          <a:bodyPr wrap="square" lIns="146304" tIns="0" rIns="146304" bIns="0" rtlCol="0" anchor="ctr"/>
           <a:lstStyle/>
           <a:p>
             <a:pPr algn="l" indent="0" marL="0">
               <a:lnSpc>
-                <a:spcPct val="95000"/>
+                <a:spcPct val="100000"/>
               </a:lnSpc>
               <a:spcAft>
-                <a:spcPts val="200"/>
+                <a:spcPts val="400"/>
               </a:spcAft>
               <a:buNone/>
             </a:pPr>
             <a:r>
-              <a:rPr lang="en-US" sz="780" b="1" dirty="0">
-                <a:solidFill>
-                  <a:srgbClr val="267D86"/>
-                </a:solidFill>
-                <a:latin typeface="Noto Sans KR" pitchFamily="34" charset="0"/>
-                <a:ea typeface="Noto Sans KR" pitchFamily="34" charset="-122"/>
-                <a:cs typeface="Noto Sans KR" pitchFamily="34" charset="-120"/>
-              </a:rPr>
-              <a:t>사전 가정  </a:t>
-            </a:r>
-            <a:pPr algn="l" indent="0" marL="0">
-              <a:lnSpc>
-                <a:spcPct val="95000"/>
+              <a:rPr lang="en-US" sz="900" b="1" dirty="0">
+                <a:solidFill>
+                  <a:srgbClr val="9FE0E6"/>
+                </a:solidFill>
+                <a:latin typeface="Noto Sans KR" pitchFamily="34" charset="0"/>
+                <a:ea typeface="Noto Sans KR" pitchFamily="34" charset="-122"/>
+                <a:cs typeface="Noto Sans KR" pitchFamily="34" charset="-120"/>
+              </a:rPr>
+              <a:t>준비한 것  </a:t>
+            </a:r>
+            <a:pPr algn="l" indent="0" marL="0">
+              <a:lnSpc>
+                <a:spcPct val="100000"/>
               </a:lnSpc>
               <a:spcAft>
-                <a:spcPts val="200"/>
+                <a:spcPts val="400"/>
               </a:spcAft>
               <a:buNone/>
             </a:pPr>
             <a:r>
-              <a:rPr lang="en-US" sz="780" dirty="0">
-                <a:solidFill>
-                  <a:srgbClr val="334155"/>
-                </a:solidFill>
-                <a:latin typeface="Noto Sans KR" pitchFamily="34" charset="0"/>
-                <a:ea typeface="Noto Sans KR" pitchFamily="34" charset="-122"/>
-                <a:cs typeface="Noto Sans KR" pitchFamily="34" charset="-120"/>
-              </a:rPr>
-              <a:t>① 국내 신진 브랜드는 SNS나 지인 소개로 찾아 시간이 많이 든다   ② 물량·납기·품질이 불안해 들여오기를 망설인다   ③ 한자리 비교와 1:1 상담이 있으면 참관한다</a:t>
-            </a:r>
-            <a:endParaRPr lang="en-US" sz="780" dirty="0"/>
-          </a:p>
-          <a:p>
-            <a:pPr algn="l" indent="0" marL="0">
-              <a:lnSpc>
-                <a:spcPct val="95000"/>
+              <a:rPr lang="en-US" sz="900" b="1" dirty="0">
+                <a:solidFill>
+                  <a:srgbClr val="FFFFFF"/>
+                </a:solidFill>
+                <a:latin typeface="Noto Sans KR" pitchFamily="34" charset="0"/>
+                <a:ea typeface="Noto Sans KR" pitchFamily="34" charset="-122"/>
+                <a:cs typeface="Noto Sans KR" pitchFamily="34" charset="-120"/>
+              </a:rPr>
+              <a:t>통화 대상 선정 → 사전 가정 3개 → 행사 설명 대본 → 질문 10개 → 예상 질문과 답 → 통화 기록표</a:t>
+            </a:r>
+            <a:endParaRPr lang="en-US" sz="900" dirty="0"/>
+          </a:p>
+          <a:p>
+            <a:pPr algn="l" indent="0" marL="0">
+              <a:lnSpc>
+                <a:spcPct val="100000"/>
               </a:lnSpc>
               <a:spcAft>
-                <a:spcPts val="200"/>
+                <a:spcPts val="400"/>
               </a:spcAft>
               <a:buNone/>
             </a:pPr>
             <a:r>
-              <a:rPr lang="en-US" sz="780" b="1" dirty="0">
-                <a:solidFill>
-                  <a:srgbClr val="267D86"/>
-                </a:solidFill>
-                <a:latin typeface="Noto Sans KR" pitchFamily="34" charset="0"/>
-                <a:ea typeface="Noto Sans KR" pitchFamily="34" charset="-122"/>
-                <a:cs typeface="Noto Sans KR" pitchFamily="34" charset="-120"/>
-              </a:rPr>
-              <a:t>준비한 질문  </a:t>
-            </a:r>
-            <a:pPr algn="l" indent="0" marL="0">
-              <a:lnSpc>
-                <a:spcPct val="95000"/>
+              <a:rPr lang="en-US" sz="900" b="1" dirty="0">
+                <a:solidFill>
+                  <a:srgbClr val="9FE0E6"/>
+                </a:solidFill>
+                <a:latin typeface="Noto Sans KR" pitchFamily="34" charset="0"/>
+                <a:ea typeface="Noto Sans KR" pitchFamily="34" charset="-122"/>
+                <a:cs typeface="Noto Sans KR" pitchFamily="34" charset="-120"/>
+              </a:rPr>
+              <a:t>결과  </a:t>
+            </a:r>
+            <a:pPr algn="l" indent="0" marL="0">
+              <a:lnSpc>
+                <a:spcPct val="100000"/>
               </a:lnSpc>
               <a:spcAft>
-                <a:spcPts val="200"/>
+                <a:spcPts val="400"/>
               </a:spcAft>
               <a:buNone/>
             </a:pPr>
             <a:r>
-              <a:rPr lang="en-US" sz="780" dirty="0">
-                <a:solidFill>
-                  <a:srgbClr val="334155"/>
-                </a:solidFill>
-                <a:latin typeface="Noto Sans KR" pitchFamily="34" charset="0"/>
-                <a:ea typeface="Noto Sans KR" pitchFamily="34" charset="-122"/>
-                <a:cs typeface="Noto Sans KR" pitchFamily="34" charset="-120"/>
-              </a:rPr>
-              <a:t>행사 설명 대본(약 1분)과 질문 10개 — 지금 겪는 어려움 · 행사에서 원하는 것 · 참관 의향과 걸림돌 (별도 PDF)</a:t>
-            </a:r>
-            <a:endParaRPr lang="en-US" sz="780" dirty="0"/>
-          </a:p>
-          <a:p>
-            <a:pPr algn="l" indent="0" marL="0">
-              <a:lnSpc>
-                <a:spcPct val="95000"/>
-              </a:lnSpc>
-              <a:spcAft>
-                <a:spcPts val="200"/>
-              </a:spcAft>
-              <a:buNone/>
-            </a:pPr>
-            <a:r>
-              <a:rPr lang="en-US" sz="780" b="1" dirty="0">
-                <a:solidFill>
-                  <a:srgbClr val="267D86"/>
-                </a:solidFill>
-                <a:latin typeface="Noto Sans KR" pitchFamily="34" charset="0"/>
-                <a:ea typeface="Noto Sans KR" pitchFamily="34" charset="-122"/>
-                <a:cs typeface="Noto Sans KR" pitchFamily="34" charset="-120"/>
-              </a:rPr>
-              <a:t>다음 시도  </a:t>
-            </a:r>
-            <a:pPr algn="l" indent="0" marL="0">
-              <a:lnSpc>
-                <a:spcPct val="95000"/>
-              </a:lnSpc>
-              <a:spcAft>
-                <a:spcPts val="200"/>
-              </a:spcAft>
-              <a:buNone/>
-            </a:pPr>
-            <a:r>
-              <a:rPr lang="en-US" sz="780" dirty="0">
-                <a:solidFill>
-                  <a:srgbClr val="334155"/>
-                </a:solidFill>
-                <a:latin typeface="Noto Sans KR" pitchFamily="34" charset="0"/>
-                <a:ea typeface="Noto Sans KR" pitchFamily="34" charset="-122"/>
-                <a:cs typeface="Noto Sans KR" pitchFamily="34" charset="-120"/>
-              </a:rPr>
-              <a:t>이메일·인스타그램 DM으로 질문지를 보내 서면 답변을 받고, 결과를 이 장에 더한다.</a:t>
-            </a:r>
-            <a:endParaRPr lang="en-US" sz="780" dirty="0"/>
+              <a:rPr lang="en-US" sz="900" b="1" dirty="0">
+                <a:solidFill>
+                  <a:srgbClr val="FFFFFF"/>
+                </a:solidFill>
+                <a:latin typeface="Noto Sans KR" pitchFamily="34" charset="0"/>
+                <a:ea typeface="Noto Sans KR" pitchFamily="34" charset="-122"/>
+                <a:cs typeface="Noto Sans KR" pitchFamily="34" charset="-120"/>
+              </a:rPr>
+              <a:t>두 곳 모두 매장 직원 · 고객센터 단계에서 막혀, 준비한 질문을 실무 바이어에게 묻지 못했다.</a:t>
+            </a:r>
+            <a:endParaRPr lang="en-US" sz="900" dirty="0"/>
           </a:p>
         </p:txBody>
       </p:sp>

--- a/GFF_SEOUL_2027_전시산업론_중간과제.pptx
+++ b/GFF_SEOUL_2027_전시산업론_중간과제.pptx
@@ -1056,7 +1056,7 @@
             <a:r>
               <a:rPr lang="en-US" dirty="0"/>
               <a:t>참가업체 측은 아웃도어 브랜드 유통·판매를 맡고 있는 손호영 님을 직접 만나 인터뷰했습니다. 마이기어를 운영하고, 제로그램·아울렛·마무트 종로점도 운영하는 분입니다.
-질문 여덟 개와 답변을 녹음된 말 그대로 옮겼습니다. 이 장에는 앞의 질문들이, 다음 장에는 나머지 질문과 인터뷰 전후로 바뀐 생각이 이어집니다.</a:t>
+질문 여덟 개와 답변을 녹음된 말 그대로 옮겼습니다. 다음 장에는 이 답변을 요약하고, 인터뷰 전에 세운 가정과 기획 수정, 추가로 확인할 사항을 정리했습니다.</a:t>
             </a:r>
             <a:endParaRPr lang="en-US" dirty="0"/>
           </a:p>
@@ -1145,7 +1145,7 @@
             <a:r>
               <a:rPr lang="en-US" dirty="0"/>
               <a:t>인터뷰 전에 세운 가정 네 가지 중 세 가지가 틀렸고(H1·H3·H4), 부스비 가정은 일부만 맞았습니다(H2). 브랜드가 바이어 미팅과 현장 판매를 가장 원할 거라고 생각했지만, 비싼 장비일수록 판매보다 장점을 깊게 들어줄 고객이 필요하다는 답이었습니다.
-그 결과를 근거가 된 질문과 함께 기획 수정 네 가지로 반영했습니다. 공동 Test Lab, 관심도 중심의 성과 지표, 참가업체의 목적별 연결, 미디어 파트너의 인플루언서 섭외 지원입니다.
+가운데 표는 질문 여덟 개의 답을 한 줄씩 요약한 것입니다. 그 결과를 근거가 된 질문과 함께 기획 수정 네 가지로 반영했습니다. 공동 Test Lab, 관심도 중심의 성과 지표, 참가업체의 목적별 연결, 미디어 파트너의 인플루언서 섭외 지원입니다.
 인터뷰를 다시 검토해 보니 더 물었어야 할 것도 있었습니다. K-브랜드의 소량 생산처 확보 문제, 수입 브랜드 대비 마진 차이, 희망 참가일, 원화 기준 부스비와 시즌 적합성입니다.</a:t>
             </a:r>
             <a:endParaRPr lang="en-US" dirty="0"/>
@@ -1234,9 +1234,9 @@
           <a:p>
             <a:r>
               <a:rPr lang="en-US" dirty="0"/>
-              <a:t>바이어 측은 아웃도어 편집숍 홀라인과 편집숍 웍스아웃에 매장 번호와 고객센터 번호로 연락했습니다. 홀라인은 매장 직원이 받았지만 바잉 담당이 아니어서 준비한 질문에 답할 수 있는 사람이 없었고, 웍스아웃 압구정점은 판매 시간 전이라 연결되지 않았습니다.
+              <a:t>바이어 측은 아웃도어 편집숍 홀라인과 편집숍 웍스아웃에 매장 번호와 고객센터 번호로 연락했습니다. 홀라인은 매장 직원이 받았지만 바잉 담당이 아니어서 준비한 질문에 답할 수 있는 사람이 없었고, 웍스아웃은 매장 전화가 연결되지 않았습니다.
 두 곳 모두 고객센터는 공식 안내상 주문·배송 문의 창구라 바잉 담당자와 연결되는 경로가 아니었습니다. 바이어의 직통 번호는 공개돼 있지 않고, 매장은 판매를, 브랜드 선정은 본사가 맡는 구조이기 때문입니다.
-통화를 위해 사전 가정 세 가지, 1분 분량의 행사 설명 대본, 질문 10개, 예상 질문과 답, 통화 기록표까지 준비했지만, 두 곳 모두 매장과 고객센터 단계에서 막혀 준비한 질문을 묻지 못했습니다.</a:t>
+통화를 위해 사전 가정 네 가지와 통화 질문지 열 개, 오프닝 스크립트, 가정이 틀렸을 때의 대응까지 준비했지만, 두 곳 모두 매장과 고객센터 단계에서 막혀 준비한 질문을 묻지 못했습니다.</a:t>
             </a:r>
             <a:endParaRPr lang="en-US" dirty="0"/>
           </a:p>
@@ -29910,7 +29910,7 @@
                 <a:ea typeface="Noto Sans KR" pitchFamily="34" charset="-122"/>
                 <a:cs typeface="Noto Sans KR" pitchFamily="34" charset="-120"/>
               </a:rPr>
-              <a:t>아웃도어 브랜드 유통·판매 담당자 대면 인터뷰 — 질문과 답변</a:t>
+              <a:t>아웃도어 브랜드 유통·판매 담당자 대면 인터뷰 — 질문과 답변 (녹취)</a:t>
             </a:r>
             <a:endParaRPr lang="en-US" sz="1500" dirty="0"/>
           </a:p>
@@ -30554,7 +30554,7 @@
         </p:nvSpPr>
         <p:spPr>
           <a:xfrm>
-            <a:off x="612648" y="2048256"/>
+            <a:off x="612648" y="2011680"/>
             <a:ext cx="10963656" cy="219456"/>
           </a:xfrm>
           <a:prstGeom prst="rect">
@@ -30607,7 +30607,7 @@
       </p:sp>
       <p:graphicFrame>
         <p:nvGraphicFramePr>
-          <p:cNvPr id="15" name="질문 답변표 1"/>
+          <p:cNvPr id="15" name="질문 답변표"/>
           <p:cNvGraphicFramePr>
             <a:graphicFrameLocks noGrp="1"/>
           </p:cNvGraphicFramePr>
@@ -30620,7 +30620,7 @@
           </p:nvPr>
         </p:nvGraphicFramePr>
         <p:xfrm>
-          <a:off x="612648" y="2359152"/>
+          <a:off x="612648" y="2286000"/>
           <a:ext cx="10963656" cy="914400"/>
         </p:xfrm>
         <a:graphic>
@@ -30629,10 +30629,10 @@
               <a:tblPr/>
               <a:tblGrid>
                 <a:gridCol w="457200"/>
-                <a:gridCol w="2834640"/>
-                <a:gridCol w="7671816"/>
+                <a:gridCol w="2514600"/>
+                <a:gridCol w="7991856"/>
               </a:tblGrid>
-              <a:tr h="242984">
+              <a:tr h="201861">
                 <a:tc>
                   <a:txBody>
                     <a:bodyPr/>
@@ -30641,14 +30641,14 @@
                       <a:pPr algn="l" indent="0" marL="0">
                         <a:buNone/>
                       </a:pPr>
-                      <a:endParaRPr lang="en-US" sz="850" dirty="0">
+                      <a:endParaRPr lang="en-US" sz="760" dirty="0">
                         <a:latin typeface="Noto Sans KR" charset="0"/>
                         <a:ea typeface="Noto Sans KR" charset="0"/>
                         <a:cs typeface="Noto Sans KR" charset="0"/>
                       </a:endParaRPr>
                     </a:p>
                   </a:txBody>
-                  <a:tcPr marL="76200" marR="76200" marT="38100" marB="38100" anchor="ctr">
+                  <a:tcPr marL="63500" marR="63500" marT="25400" marB="25400" anchor="ctr">
                     <a:lnL w="6350" cap="flat" cmpd="sng" algn="ctr">
                       <a:solidFill>
                         <a:srgbClr val="CBD5E1"/>
@@ -30699,7 +30699,7 @@
                         <a:buNone/>
                       </a:pPr>
                       <a:r>
-                        <a:rPr lang="en-US" sz="850" b="1" dirty="0">
+                        <a:rPr lang="en-US" sz="760" b="1" dirty="0">
                           <a:solidFill>
                             <a:srgbClr val="FFFFFF"/>
                           </a:solidFill>
@@ -30709,14 +30709,14 @@
                         </a:rPr>
                         <a:t>질문</a:t>
                       </a:r>
-                      <a:endParaRPr lang="en-US" sz="850" dirty="0">
+                      <a:endParaRPr lang="en-US" sz="760" dirty="0">
                         <a:latin typeface="Noto Sans KR" charset="0"/>
                         <a:ea typeface="Noto Sans KR" charset="0"/>
                         <a:cs typeface="Noto Sans KR" charset="0"/>
                       </a:endParaRPr>
                     </a:p>
                   </a:txBody>
-                  <a:tcPr marL="76200" marR="76200" marT="38100" marB="38100" anchor="ctr">
+                  <a:tcPr marL="63500" marR="63500" marT="25400" marB="25400" anchor="ctr">
                     <a:lnL w="6350" cap="flat" cmpd="sng" algn="ctr">
                       <a:solidFill>
                         <a:srgbClr val="CBD5E1"/>
@@ -30767,7 +30767,7 @@
                         <a:buNone/>
                       </a:pPr>
                       <a:r>
-                        <a:rPr lang="en-US" sz="850" b="1" dirty="0">
+                        <a:rPr lang="en-US" sz="760" b="1" dirty="0">
                           <a:solidFill>
                             <a:srgbClr val="FFFFFF"/>
                           </a:solidFill>
@@ -30777,14 +30777,14 @@
                         </a:rPr>
                         <a:t>답변 (녹취 발췌)</a:t>
                       </a:r>
-                      <a:endParaRPr lang="en-US" sz="850" dirty="0">
+                      <a:endParaRPr lang="en-US" sz="760" dirty="0">
                         <a:latin typeface="Noto Sans KR" charset="0"/>
                         <a:ea typeface="Noto Sans KR" charset="0"/>
                         <a:cs typeface="Noto Sans KR" charset="0"/>
                       </a:endParaRPr>
                     </a:p>
                   </a:txBody>
-                  <a:tcPr marL="76200" marR="76200" marT="38100" marB="38100" anchor="ctr">
+                  <a:tcPr marL="63500" marR="63500" marT="25400" marB="25400" anchor="ctr">
                     <a:lnL w="6350" cap="flat" cmpd="sng" algn="ctr">
                       <a:solidFill>
                         <a:srgbClr val="CBD5E1"/>
@@ -30827,7 +30827,7 @@
                   </a:tcPr>
                 </a:tc>
               </a:tr>
-              <a:tr h="539976">
+              <a:tr h="467407">
                 <a:tc>
                   <a:txBody>
                     <a:bodyPr/>
@@ -30837,7 +30837,7 @@
                         <a:buNone/>
                       </a:pPr>
                       <a:r>
-                        <a:rPr lang="en-US" sz="850" b="1" dirty="0">
+                        <a:rPr lang="en-US" sz="760" b="1" dirty="0">
                           <a:solidFill>
                             <a:srgbClr val="267D86"/>
                           </a:solidFill>
@@ -30847,14 +30847,14 @@
                         </a:rPr>
                         <a:t>Q1</a:t>
                       </a:r>
-                      <a:endParaRPr lang="en-US" sz="850" dirty="0">
+                      <a:endParaRPr lang="en-US" sz="760" dirty="0">
                         <a:latin typeface="Noto Sans KR" charset="0"/>
                         <a:ea typeface="Noto Sans KR" charset="0"/>
                         <a:cs typeface="Noto Sans KR" charset="0"/>
                       </a:endParaRPr>
                     </a:p>
                   </a:txBody>
-                  <a:tcPr marL="76200" marR="76200" marT="38100" marB="38100" anchor="ctr">
+                  <a:tcPr marL="63500" marR="63500" marT="25400" marB="25400" anchor="ctr">
                     <a:lnL w="6350" cap="flat" cmpd="sng" algn="ctr">
                       <a:solidFill>
                         <a:srgbClr val="CBD5E1"/>
@@ -30902,7 +30902,7 @@
                         <a:buNone/>
                       </a:pPr>
                       <a:r>
-                        <a:rPr lang="en-US" sz="850" b="1" dirty="0">
+                        <a:rPr lang="en-US" sz="760" b="1" dirty="0">
                           <a:solidFill>
                             <a:srgbClr val="182F48"/>
                           </a:solidFill>
@@ -30912,7 +30912,7 @@
                         </a:rPr>
                         <a:t>지금 주로 어떤 고객들에게</a:t>
                       </a:r>
-                      <a:endParaRPr lang="en-US" sz="850" dirty="0">
+                      <a:endParaRPr lang="en-US" sz="760" dirty="0">
                         <a:latin typeface="Noto Sans KR" charset="0"/>
                         <a:ea typeface="Noto Sans KR" charset="0"/>
                         <a:cs typeface="Noto Sans KR" charset="0"/>
@@ -30923,7 +30923,7 @@
                         <a:buNone/>
                       </a:pPr>
                       <a:r>
-                        <a:rPr lang="en-US" sz="850" b="1" dirty="0">
+                        <a:rPr lang="en-US" sz="760" b="1" dirty="0">
                           <a:solidFill>
                             <a:srgbClr val="182F48"/>
                           </a:solidFill>
@@ -30933,14 +30933,14 @@
                         </a:rPr>
                         <a:t>판매하고 있나요?</a:t>
                       </a:r>
-                      <a:endParaRPr lang="en-US" sz="850" dirty="0">
+                      <a:endParaRPr lang="en-US" sz="760" dirty="0">
                         <a:latin typeface="Noto Sans KR" charset="0"/>
                         <a:ea typeface="Noto Sans KR" charset="0"/>
                         <a:cs typeface="Noto Sans KR" charset="0"/>
                       </a:endParaRPr>
                     </a:p>
                   </a:txBody>
-                  <a:tcPr marL="76200" marR="76200" marT="38100" marB="38100" anchor="ctr">
+                  <a:tcPr marL="63500" marR="63500" marT="25400" marB="25400" anchor="ctr">
                     <a:lnL w="6350" cap="flat" cmpd="sng" algn="ctr">
                       <a:solidFill>
                         <a:srgbClr val="CBD5E1"/>
@@ -30988,7 +30988,7 @@
                         <a:buNone/>
                       </a:pPr>
                       <a:r>
-                        <a:rPr lang="en-US" sz="850" dirty="0">
+                        <a:rPr lang="en-US" sz="760" dirty="0">
                           <a:solidFill>
                             <a:srgbClr val="334155"/>
                           </a:solidFill>
@@ -30998,7 +30998,7 @@
                         </a:rPr>
                         <a:t>안녕하세요, 저는 마이 기어를 맡고 있는 손호영이라고 합니다.</a:t>
                       </a:r>
-                      <a:endParaRPr lang="en-US" sz="850" dirty="0">
+                      <a:endParaRPr lang="en-US" sz="760" dirty="0">
                         <a:latin typeface="Noto Sans KR" charset="0"/>
                         <a:ea typeface="Noto Sans KR" charset="0"/>
                         <a:cs typeface="Noto Sans KR" charset="0"/>
@@ -31009,7 +31009,7 @@
                         <a:buNone/>
                       </a:pPr>
                       <a:r>
-                        <a:rPr lang="en-US" sz="850" dirty="0">
+                        <a:rPr lang="en-US" sz="760" dirty="0">
                           <a:solidFill>
                             <a:srgbClr val="334155"/>
                           </a:solidFill>
@@ -31019,7 +31019,7 @@
                         </a:rPr>
                         <a:t>저는 제로 그램, 아울렛, 마무트 종로점, 그리고 마이 기어를 운영하고 있고,</a:t>
                       </a:r>
-                      <a:endParaRPr lang="en-US" sz="850" dirty="0">
+                      <a:endParaRPr lang="en-US" sz="760" dirty="0">
                         <a:latin typeface="Noto Sans KR" charset="0"/>
                         <a:ea typeface="Noto Sans KR" charset="0"/>
                         <a:cs typeface="Noto Sans KR" charset="0"/>
@@ -31030,7 +31030,7 @@
                         <a:buNone/>
                       </a:pPr>
                       <a:r>
-                        <a:rPr lang="en-US" sz="850" dirty="0">
+                        <a:rPr lang="en-US" sz="760" dirty="0">
                           <a:solidFill>
                             <a:srgbClr val="334155"/>
                           </a:solidFill>
@@ -31040,14 +31040,14 @@
                         </a:rPr>
                         <a:t>제가 판매하는 층은 일반 소비자 고객과, 그리고 기업(B2B)을 대상으로 판매를 하고 있습니다.</a:t>
                       </a:r>
-                      <a:endParaRPr lang="en-US" sz="850" dirty="0">
+                      <a:endParaRPr lang="en-US" sz="760" dirty="0">
                         <a:latin typeface="Noto Sans KR" charset="0"/>
                         <a:ea typeface="Noto Sans KR" charset="0"/>
                         <a:cs typeface="Noto Sans KR" charset="0"/>
                       </a:endParaRPr>
                     </a:p>
                   </a:txBody>
-                  <a:tcPr marL="76200" marR="76200" marT="38100" marB="38100" anchor="ctr">
+                  <a:tcPr marL="63500" marR="63500" marT="25400" marB="25400" anchor="ctr">
                     <a:lnL w="6350" cap="flat" cmpd="sng" algn="ctr">
                       <a:solidFill>
                         <a:srgbClr val="CBD5E1"/>
@@ -31087,7 +31087,7 @@
                   </a:tcPr>
                 </a:tc>
               </a:tr>
-              <a:tr h="391480">
+              <a:tr h="334634">
                 <a:tc>
                   <a:txBody>
                     <a:bodyPr/>
@@ -31097,7 +31097,7 @@
                         <a:buNone/>
                       </a:pPr>
                       <a:r>
-                        <a:rPr lang="en-US" sz="850" b="1" dirty="0">
+                        <a:rPr lang="en-US" sz="760" b="1" dirty="0">
                           <a:solidFill>
                             <a:srgbClr val="267D86"/>
                           </a:solidFill>
@@ -31107,14 +31107,14 @@
                         </a:rPr>
                         <a:t>Q2</a:t>
                       </a:r>
-                      <a:endParaRPr lang="en-US" sz="850" dirty="0">
+                      <a:endParaRPr lang="en-US" sz="760" dirty="0">
                         <a:latin typeface="Noto Sans KR" charset="0"/>
                         <a:ea typeface="Noto Sans KR" charset="0"/>
                         <a:cs typeface="Noto Sans KR" charset="0"/>
                       </a:endParaRPr>
                     </a:p>
                   </a:txBody>
-                  <a:tcPr marL="76200" marR="76200" marT="38100" marB="38100" anchor="ctr">
+                  <a:tcPr marL="63500" marR="63500" marT="25400" marB="25400" anchor="ctr">
                     <a:lnL w="6350" cap="flat" cmpd="sng" algn="ctr">
                       <a:solidFill>
                         <a:srgbClr val="CBD5E1"/>
@@ -31162,7 +31162,7 @@
                         <a:buNone/>
                       </a:pPr>
                       <a:r>
-                        <a:rPr lang="en-US" sz="850" b="1" dirty="0">
+                        <a:rPr lang="en-US" sz="760" b="1" dirty="0">
                           <a:solidFill>
                             <a:srgbClr val="182F48"/>
                           </a:solidFill>
@@ -31172,7 +31172,7 @@
                         </a:rPr>
                         <a:t>일반인에게 판매하거나</a:t>
                       </a:r>
-                      <a:endParaRPr lang="en-US" sz="850" dirty="0">
+                      <a:endParaRPr lang="en-US" sz="760" dirty="0">
                         <a:latin typeface="Noto Sans KR" charset="0"/>
                         <a:ea typeface="Noto Sans KR" charset="0"/>
                         <a:cs typeface="Noto Sans KR" charset="0"/>
@@ -31183,7 +31183,7 @@
                         <a:buNone/>
                       </a:pPr>
                       <a:r>
-                        <a:rPr lang="en-US" sz="850" b="1" dirty="0">
+                        <a:rPr lang="en-US" sz="760" b="1" dirty="0">
                           <a:solidFill>
                             <a:srgbClr val="182F48"/>
                           </a:solidFill>
@@ -31193,14 +31193,14 @@
                         </a:rPr>
                         <a:t>판매를 검토해 보신 적이 있나요?</a:t>
                       </a:r>
-                      <a:endParaRPr lang="en-US" sz="850" dirty="0">
+                      <a:endParaRPr lang="en-US" sz="760" dirty="0">
                         <a:latin typeface="Noto Sans KR" charset="0"/>
                         <a:ea typeface="Noto Sans KR" charset="0"/>
                         <a:cs typeface="Noto Sans KR" charset="0"/>
                       </a:endParaRPr>
                     </a:p>
                   </a:txBody>
-                  <a:tcPr marL="76200" marR="76200" marT="38100" marB="38100" anchor="ctr">
+                  <a:tcPr marL="63500" marR="63500" marT="25400" marB="25400" anchor="ctr">
                     <a:lnL w="6350" cap="flat" cmpd="sng" algn="ctr">
                       <a:solidFill>
                         <a:srgbClr val="CBD5E1"/>
@@ -31248,7 +31248,7 @@
                         <a:buNone/>
                       </a:pPr>
                       <a:r>
-                        <a:rPr lang="en-US" sz="850" dirty="0">
+                        <a:rPr lang="en-US" sz="760" dirty="0">
                           <a:solidFill>
                             <a:srgbClr val="334155"/>
                           </a:solidFill>
@@ -31256,37 +31256,16 @@
                           <a:ea typeface="Noto Sans KR" pitchFamily="34" charset="-122"/>
                           <a:cs typeface="Noto Sans KR" pitchFamily="34" charset="-120"/>
                         </a:rPr>
-                        <a:t>네, 저희는 현재 일반인(B2C) 판매 매출이 한 30% 정도로 운영하고 있기 때문에</a:t>
+                        <a:t>네, 저희는 현재 일반인(B2C) 판매 매출이 한 30% 정도로 운영하고 있기 때문에 일반인 판매를 매우 소중하게 생각하는 기업입니다.</a:t>
                       </a:r>
-                      <a:endParaRPr lang="en-US" sz="850" dirty="0">
-                        <a:latin typeface="Noto Sans KR" charset="0"/>
-                        <a:ea typeface="Noto Sans KR" charset="0"/>
-                        <a:cs typeface="Noto Sans KR" charset="0"/>
-                      </a:endParaRPr>
-                    </a:p>
-                    <a:p>
-                      <a:pPr algn="l" indent="0" marL="0">
-                        <a:buNone/>
-                      </a:pPr>
-                      <a:r>
-                        <a:rPr lang="en-US" sz="850" dirty="0">
-                          <a:solidFill>
-                            <a:srgbClr val="334155"/>
-                          </a:solidFill>
-                          <a:latin typeface="Noto Sans KR" pitchFamily="34" charset="0"/>
-                          <a:ea typeface="Noto Sans KR" pitchFamily="34" charset="-122"/>
-                          <a:cs typeface="Noto Sans KR" pitchFamily="34" charset="-120"/>
-                        </a:rPr>
-                        <a:t>일반인 판매를 매우 소중하게 생각하는 기업입니다.</a:t>
-                      </a:r>
-                      <a:endParaRPr lang="en-US" sz="850" dirty="0">
+                      <a:endParaRPr lang="en-US" sz="760" dirty="0">
                         <a:latin typeface="Noto Sans KR" charset="0"/>
                         <a:ea typeface="Noto Sans KR" charset="0"/>
                         <a:cs typeface="Noto Sans KR" charset="0"/>
                       </a:endParaRPr>
                     </a:p>
                   </a:txBody>
-                  <a:tcPr marL="76200" marR="76200" marT="38100" marB="38100" anchor="ctr">
+                  <a:tcPr marL="63500" marR="63500" marT="25400" marB="25400" anchor="ctr">
                     <a:lnL w="6350" cap="flat" cmpd="sng" algn="ctr">
                       <a:solidFill>
                         <a:srgbClr val="CBD5E1"/>
@@ -31326,7 +31305,7 @@
                   </a:tcPr>
                 </a:tc>
               </a:tr>
-              <a:tr h="391480">
+              <a:tr h="334634">
                 <a:tc>
                   <a:txBody>
                     <a:bodyPr/>
@@ -31336,7 +31315,7 @@
                         <a:buNone/>
                       </a:pPr>
                       <a:r>
-                        <a:rPr lang="en-US" sz="850" b="1" dirty="0">
+                        <a:rPr lang="en-US" sz="760" b="1" dirty="0">
                           <a:solidFill>
                             <a:srgbClr val="267D86"/>
                           </a:solidFill>
@@ -31346,14 +31325,14 @@
                         </a:rPr>
                         <a:t>Q3</a:t>
                       </a:r>
-                      <a:endParaRPr lang="en-US" sz="850" dirty="0">
+                      <a:endParaRPr lang="en-US" sz="760" dirty="0">
                         <a:latin typeface="Noto Sans KR" charset="0"/>
                         <a:ea typeface="Noto Sans KR" charset="0"/>
                         <a:cs typeface="Noto Sans KR" charset="0"/>
                       </a:endParaRPr>
                     </a:p>
                   </a:txBody>
-                  <a:tcPr marL="76200" marR="76200" marT="38100" marB="38100" anchor="ctr">
+                  <a:tcPr marL="63500" marR="63500" marT="25400" marB="25400" anchor="ctr">
                     <a:lnL w="6350" cap="flat" cmpd="sng" algn="ctr">
                       <a:solidFill>
                         <a:srgbClr val="CBD5E1"/>
@@ -31401,7 +31380,7 @@
                         <a:buNone/>
                       </a:pPr>
                       <a:r>
-                        <a:rPr lang="en-US" sz="850" b="1" dirty="0">
+                        <a:rPr lang="en-US" sz="760" b="1" dirty="0">
                           <a:solidFill>
                             <a:srgbClr val="182F48"/>
                           </a:solidFill>
@@ -31411,7 +31390,7 @@
                         </a:rPr>
                         <a:t>행사에 참여하신다면,</a:t>
                       </a:r>
-                      <a:endParaRPr lang="en-US" sz="850" dirty="0">
+                      <a:endParaRPr lang="en-US" sz="760" dirty="0">
                         <a:latin typeface="Noto Sans KR" charset="0"/>
                         <a:ea typeface="Noto Sans KR" charset="0"/>
                         <a:cs typeface="Noto Sans KR" charset="0"/>
@@ -31422,7 +31401,7 @@
                         <a:buNone/>
                       </a:pPr>
                       <a:r>
-                        <a:rPr lang="en-US" sz="850" b="1" dirty="0">
+                        <a:rPr lang="en-US" sz="760" b="1" dirty="0">
                           <a:solidFill>
                             <a:srgbClr val="182F48"/>
                           </a:solidFill>
@@ -31432,14 +31411,14 @@
                         </a:rPr>
                         <a:t>참여를 결정하게 만드는 조건은 무엇인가요?</a:t>
                       </a:r>
-                      <a:endParaRPr lang="en-US" sz="850" dirty="0">
+                      <a:endParaRPr lang="en-US" sz="760" dirty="0">
                         <a:latin typeface="Noto Sans KR" charset="0"/>
                         <a:ea typeface="Noto Sans KR" charset="0"/>
                         <a:cs typeface="Noto Sans KR" charset="0"/>
                       </a:endParaRPr>
                     </a:p>
                   </a:txBody>
-                  <a:tcPr marL="76200" marR="76200" marT="38100" marB="38100" anchor="ctr">
+                  <a:tcPr marL="63500" marR="63500" marT="25400" marB="25400" anchor="ctr">
                     <a:lnL w="6350" cap="flat" cmpd="sng" algn="ctr">
                       <a:solidFill>
                         <a:srgbClr val="CBD5E1"/>
@@ -31487,7 +31466,7 @@
                         <a:buNone/>
                       </a:pPr>
                       <a:r>
-                        <a:rPr lang="en-US" sz="850" dirty="0">
+                        <a:rPr lang="en-US" sz="760" dirty="0">
                           <a:solidFill>
                             <a:srgbClr val="334155"/>
                           </a:solidFill>
@@ -31497,7 +31476,7 @@
                         </a:rPr>
                         <a:t>우선 저희가 타깃층으로 삼는, 예를 들어 트레킹, 백패킹, 아웃도어 상품에 대한 인지도가 있는 고객님이 얼마나 되시는지,</a:t>
                       </a:r>
-                      <a:endParaRPr lang="en-US" sz="850" dirty="0">
+                      <a:endParaRPr lang="en-US" sz="760" dirty="0">
                         <a:latin typeface="Noto Sans KR" charset="0"/>
                         <a:ea typeface="Noto Sans KR" charset="0"/>
                         <a:cs typeface="Noto Sans KR" charset="0"/>
@@ -31508,7 +31487,7 @@
                         <a:buNone/>
                       </a:pPr>
                       <a:r>
-                        <a:rPr lang="en-US" sz="850" dirty="0">
+                        <a:rPr lang="en-US" sz="760" dirty="0">
                           <a:solidFill>
                             <a:srgbClr val="334155"/>
                           </a:solidFill>
@@ -31518,14 +31497,14 @@
                         </a:rPr>
                         <a:t>그리고 거기에 관심도가 어느 정도 있는지에 따라서 결정을 하게 되겠죠.</a:t>
                       </a:r>
-                      <a:endParaRPr lang="en-US" sz="850" dirty="0">
+                      <a:endParaRPr lang="en-US" sz="760" dirty="0">
                         <a:latin typeface="Noto Sans KR" charset="0"/>
                         <a:ea typeface="Noto Sans KR" charset="0"/>
                         <a:cs typeface="Noto Sans KR" charset="0"/>
                       </a:endParaRPr>
                     </a:p>
                   </a:txBody>
-                  <a:tcPr marL="76200" marR="76200" marT="38100" marB="38100" anchor="ctr">
+                  <a:tcPr marL="63500" marR="63500" marT="25400" marB="25400" anchor="ctr">
                     <a:lnL w="6350" cap="flat" cmpd="sng" algn="ctr">
                       <a:solidFill>
                         <a:srgbClr val="CBD5E1"/>
@@ -31565,7 +31544,7 @@
                   </a:tcPr>
                 </a:tc>
               </a:tr>
-              <a:tr h="391480">
+              <a:tr h="334634">
                 <a:tc>
                   <a:txBody>
                     <a:bodyPr/>
@@ -31575,7 +31554,7 @@
                         <a:buNone/>
                       </a:pPr>
                       <a:r>
-                        <a:rPr lang="en-US" sz="850" b="1" dirty="0">
+                        <a:rPr lang="en-US" sz="760" b="1" dirty="0">
                           <a:solidFill>
                             <a:srgbClr val="267D86"/>
                           </a:solidFill>
@@ -31585,14 +31564,14 @@
                         </a:rPr>
                         <a:t>Q4</a:t>
                       </a:r>
-                      <a:endParaRPr lang="en-US" sz="850" dirty="0">
+                      <a:endParaRPr lang="en-US" sz="760" dirty="0">
                         <a:latin typeface="Noto Sans KR" charset="0"/>
                         <a:ea typeface="Noto Sans KR" charset="0"/>
                         <a:cs typeface="Noto Sans KR" charset="0"/>
                       </a:endParaRPr>
                     </a:p>
                   </a:txBody>
-                  <a:tcPr marL="76200" marR="76200" marT="38100" marB="38100" anchor="ctr">
+                  <a:tcPr marL="63500" marR="63500" marT="25400" marB="25400" anchor="ctr">
                     <a:lnL w="6350" cap="flat" cmpd="sng" algn="ctr">
                       <a:solidFill>
                         <a:srgbClr val="CBD5E1"/>
@@ -31640,7 +31619,7 @@
                         <a:buNone/>
                       </a:pPr>
                       <a:r>
-                        <a:rPr lang="en-US" sz="850" b="1" dirty="0">
+                        <a:rPr lang="en-US" sz="760" b="1" dirty="0">
                           <a:solidFill>
                             <a:srgbClr val="182F48"/>
                           </a:solidFill>
@@ -31650,7 +31629,7 @@
                         </a:rPr>
                         <a:t>부스 참가비는 어느 정도까지</a:t>
                       </a:r>
-                      <a:endParaRPr lang="en-US" sz="850" dirty="0">
+                      <a:endParaRPr lang="en-US" sz="760" dirty="0">
                         <a:latin typeface="Noto Sans KR" charset="0"/>
                         <a:ea typeface="Noto Sans KR" charset="0"/>
                         <a:cs typeface="Noto Sans KR" charset="0"/>
@@ -31661,7 +31640,7 @@
                         <a:buNone/>
                       </a:pPr>
                       <a:r>
-                        <a:rPr lang="en-US" sz="850" b="1" dirty="0">
+                        <a:rPr lang="en-US" sz="760" b="1" dirty="0">
                           <a:solidFill>
                             <a:srgbClr val="182F48"/>
                           </a:solidFill>
@@ -31671,14 +31650,14 @@
                         </a:rPr>
                         <a:t>감당하실 수 있으세요?</a:t>
                       </a:r>
-                      <a:endParaRPr lang="en-US" sz="850" dirty="0">
+                      <a:endParaRPr lang="en-US" sz="760" dirty="0">
                         <a:latin typeface="Noto Sans KR" charset="0"/>
                         <a:ea typeface="Noto Sans KR" charset="0"/>
                         <a:cs typeface="Noto Sans KR" charset="0"/>
                       </a:endParaRPr>
                     </a:p>
                   </a:txBody>
-                  <a:tcPr marL="76200" marR="76200" marT="38100" marB="38100" anchor="ctr">
+                  <a:tcPr marL="63500" marR="63500" marT="25400" marB="25400" anchor="ctr">
                     <a:lnL w="6350" cap="flat" cmpd="sng" algn="ctr">
                       <a:solidFill>
                         <a:srgbClr val="CBD5E1"/>
@@ -31726,7 +31705,7 @@
                         <a:buNone/>
                       </a:pPr>
                       <a:r>
-                        <a:rPr lang="en-US" sz="850" dirty="0">
+                        <a:rPr lang="en-US" sz="760" dirty="0">
                           <a:solidFill>
                             <a:srgbClr val="334155"/>
                           </a:solidFill>
@@ -31736,7 +31715,7 @@
                         </a:rPr>
                         <a:t>일반적으로 저희는 국내 부스는 참여한 지 10년이 넘었고, 해외 부스는 거의 2년에 한 번씩 유럽이나 미국에서 참가를 하고 있습니다.</a:t>
                       </a:r>
-                      <a:endParaRPr lang="en-US" sz="850" dirty="0">
+                      <a:endParaRPr lang="en-US" sz="760" dirty="0">
                         <a:latin typeface="Noto Sans KR" charset="0"/>
                         <a:ea typeface="Noto Sans KR" charset="0"/>
                         <a:cs typeface="Noto Sans KR" charset="0"/>
@@ -31747,7 +31726,7 @@
                         <a:buNone/>
                       </a:pPr>
                       <a:r>
-                        <a:rPr lang="en-US" sz="850" dirty="0">
+                        <a:rPr lang="en-US" sz="760" dirty="0">
                           <a:solidFill>
                             <a:srgbClr val="334155"/>
                           </a:solidFill>
@@ -31757,14 +31736,14 @@
                         </a:rPr>
                         <a:t>부스비는 2만 불에서 5만 불 사이로 항상 책정되어 있습니다.</a:t>
                       </a:r>
-                      <a:endParaRPr lang="en-US" sz="850" dirty="0">
+                      <a:endParaRPr lang="en-US" sz="760" dirty="0">
                         <a:latin typeface="Noto Sans KR" charset="0"/>
                         <a:ea typeface="Noto Sans KR" charset="0"/>
                         <a:cs typeface="Noto Sans KR" charset="0"/>
                       </a:endParaRPr>
                     </a:p>
                   </a:txBody>
-                  <a:tcPr marL="76200" marR="76200" marT="38100" marB="38100" anchor="ctr">
+                  <a:tcPr marL="63500" marR="63500" marT="25400" marB="25400" anchor="ctr">
                     <a:lnL w="6350" cap="flat" cmpd="sng" algn="ctr">
                       <a:solidFill>
                         <a:srgbClr val="CBD5E1"/>
@@ -31804,7 +31783,7 @@
                   </a:tcPr>
                 </a:tc>
               </a:tr>
-              <a:tr h="539976">
+              <a:tr h="467407">
                 <a:tc>
                   <a:txBody>
                     <a:bodyPr/>
@@ -31814,7 +31793,7 @@
                         <a:buNone/>
                       </a:pPr>
                       <a:r>
-                        <a:rPr lang="en-US" sz="850" b="1" dirty="0">
+                        <a:rPr lang="en-US" sz="760" b="1" dirty="0">
                           <a:solidFill>
                             <a:srgbClr val="267D86"/>
                           </a:solidFill>
@@ -31824,14 +31803,14 @@
                         </a:rPr>
                         <a:t>Q5</a:t>
                       </a:r>
-                      <a:endParaRPr lang="en-US" sz="850" dirty="0">
+                      <a:endParaRPr lang="en-US" sz="760" dirty="0">
                         <a:latin typeface="Noto Sans KR" charset="0"/>
                         <a:ea typeface="Noto Sans KR" charset="0"/>
                         <a:cs typeface="Noto Sans KR" charset="0"/>
                       </a:endParaRPr>
                     </a:p>
                   </a:txBody>
-                  <a:tcPr marL="76200" marR="76200" marT="38100" marB="38100" anchor="ctr">
+                  <a:tcPr marL="63500" marR="63500" marT="25400" marB="25400" anchor="ctr">
                     <a:lnL w="6350" cap="flat" cmpd="sng" algn="ctr">
                       <a:solidFill>
                         <a:srgbClr val="CBD5E1"/>
@@ -31879,7 +31858,7 @@
                         <a:buNone/>
                       </a:pPr>
                       <a:r>
-                        <a:rPr lang="en-US" sz="850" b="1" dirty="0">
+                        <a:rPr lang="en-US" sz="760" b="1" dirty="0">
                           <a:solidFill>
                             <a:srgbClr val="182F48"/>
                           </a:solidFill>
@@ -31889,7 +31868,7 @@
                         </a:rPr>
                         <a:t>현장 시연에 필요한 것은</a:t>
                       </a:r>
-                      <a:endParaRPr lang="en-US" sz="850" dirty="0">
+                      <a:endParaRPr lang="en-US" sz="760" dirty="0">
                         <a:latin typeface="Noto Sans KR" charset="0"/>
                         <a:ea typeface="Noto Sans KR" charset="0"/>
                         <a:cs typeface="Noto Sans KR" charset="0"/>
@@ -31900,7 +31879,7 @@
                         <a:buNone/>
                       </a:pPr>
                       <a:r>
-                        <a:rPr lang="en-US" sz="850" b="1" dirty="0">
+                        <a:rPr lang="en-US" sz="760" b="1" dirty="0">
                           <a:solidFill>
                             <a:srgbClr val="182F48"/>
                           </a:solidFill>
@@ -31910,14 +31889,14 @@
                         </a:rPr>
                         <a:t>무엇인가요?</a:t>
                       </a:r>
-                      <a:endParaRPr lang="en-US" sz="850" dirty="0">
+                      <a:endParaRPr lang="en-US" sz="760" dirty="0">
                         <a:latin typeface="Noto Sans KR" charset="0"/>
                         <a:ea typeface="Noto Sans KR" charset="0"/>
                         <a:cs typeface="Noto Sans KR" charset="0"/>
                       </a:endParaRPr>
                     </a:p>
                   </a:txBody>
-                  <a:tcPr marL="76200" marR="76200" marT="38100" marB="38100" anchor="ctr">
+                  <a:tcPr marL="63500" marR="63500" marT="25400" marB="25400" anchor="ctr">
                     <a:lnL w="6350" cap="flat" cmpd="sng" algn="ctr">
                       <a:solidFill>
                         <a:srgbClr val="CBD5E1"/>
@@ -31965,7 +31944,7 @@
                         <a:buNone/>
                       </a:pPr>
                       <a:r>
-                        <a:rPr lang="en-US" sz="850" dirty="0">
+                        <a:rPr lang="en-US" sz="760" dirty="0">
                           <a:solidFill>
                             <a:srgbClr val="334155"/>
                           </a:solidFill>
@@ -31975,7 +31954,7 @@
                         </a:rPr>
                         <a:t>실제 저희가 수입하는 물건, 예를 들어서 에어매트나 의류 같은 경우에는 샤워부스처럼 고어텍스(방수 성능)를 자랑할 수 있는 곳이나,</a:t>
                       </a:r>
-                      <a:endParaRPr lang="en-US" sz="850" dirty="0">
+                      <a:endParaRPr lang="en-US" sz="760" dirty="0">
                         <a:latin typeface="Noto Sans KR" charset="0"/>
                         <a:ea typeface="Noto Sans KR" charset="0"/>
                         <a:cs typeface="Noto Sans KR" charset="0"/>
@@ -31986,7 +31965,7 @@
                         <a:buNone/>
                       </a:pPr>
                       <a:r>
-                        <a:rPr lang="en-US" sz="850" dirty="0">
+                        <a:rPr lang="en-US" sz="760" dirty="0">
                           <a:solidFill>
                             <a:srgbClr val="334155"/>
                           </a:solidFill>
@@ -31996,7 +31975,7 @@
                         </a:rPr>
                         <a:t>아니면 실제로 얼음 바닥같이 냉기가 올라오는 곳에서 보여줄 수 있는 매트가 저희 주력이기 때문에,</a:t>
                       </a:r>
-                      <a:endParaRPr lang="en-US" sz="850" dirty="0">
+                      <a:endParaRPr lang="en-US" sz="760" dirty="0">
                         <a:latin typeface="Noto Sans KR" charset="0"/>
                         <a:ea typeface="Noto Sans KR" charset="0"/>
                         <a:cs typeface="Noto Sans KR" charset="0"/>
@@ -32007,7 +31986,7 @@
                         <a:buNone/>
                       </a:pPr>
                       <a:r>
-                        <a:rPr lang="en-US" sz="850" dirty="0">
+                        <a:rPr lang="en-US" sz="760" dirty="0">
                           <a:solidFill>
                             <a:srgbClr val="334155"/>
                           </a:solidFill>
@@ -32017,14 +31996,14 @@
                         </a:rPr>
                         <a:t>샤워부스나 얼음 매트 이런 것들이 꽤 필요하다고 생각합니다.</a:t>
                       </a:r>
-                      <a:endParaRPr lang="en-US" sz="850" dirty="0">
+                      <a:endParaRPr lang="en-US" sz="760" dirty="0">
                         <a:latin typeface="Noto Sans KR" charset="0"/>
                         <a:ea typeface="Noto Sans KR" charset="0"/>
                         <a:cs typeface="Noto Sans KR" charset="0"/>
                       </a:endParaRPr>
                     </a:p>
                   </a:txBody>
-                  <a:tcPr marL="76200" marR="76200" marT="38100" marB="38100" anchor="ctr">
+                  <a:tcPr marL="63500" marR="63500" marT="25400" marB="25400" anchor="ctr">
                     <a:lnL w="6350" cap="flat" cmpd="sng" algn="ctr">
                       <a:solidFill>
                         <a:srgbClr val="CBD5E1"/>
@@ -32064,7 +32043,7 @@
                   </a:tcPr>
                 </a:tc>
               </a:tr>
-              <a:tr h="539976">
+              <a:tr h="467407">
                 <a:tc>
                   <a:txBody>
                     <a:bodyPr/>
@@ -32074,7 +32053,7 @@
                         <a:buNone/>
                       </a:pPr>
                       <a:r>
-                        <a:rPr lang="en-US" sz="850" b="1" dirty="0">
+                        <a:rPr lang="en-US" sz="760" b="1" dirty="0">
                           <a:solidFill>
                             <a:srgbClr val="267D86"/>
                           </a:solidFill>
@@ -32084,14 +32063,14 @@
                         </a:rPr>
                         <a:t>Q6</a:t>
                       </a:r>
-                      <a:endParaRPr lang="en-US" sz="850" dirty="0">
+                      <a:endParaRPr lang="en-US" sz="760" dirty="0">
                         <a:latin typeface="Noto Sans KR" charset="0"/>
                         <a:ea typeface="Noto Sans KR" charset="0"/>
                         <a:cs typeface="Noto Sans KR" charset="0"/>
                       </a:endParaRPr>
                     </a:p>
                   </a:txBody>
-                  <a:tcPr marL="76200" marR="76200" marT="38100" marB="38100" anchor="ctr">
+                  <a:tcPr marL="63500" marR="63500" marT="25400" marB="25400" anchor="ctr">
                     <a:lnL w="6350" cap="flat" cmpd="sng" algn="ctr">
                       <a:solidFill>
                         <a:srgbClr val="CBD5E1"/>
@@ -32139,7 +32118,7 @@
                         <a:buNone/>
                       </a:pPr>
                       <a:r>
-                        <a:rPr lang="en-US" sz="850" b="1" dirty="0">
+                        <a:rPr lang="en-US" sz="760" b="1" dirty="0">
                           <a:solidFill>
                             <a:srgbClr val="182F48"/>
                           </a:solidFill>
@@ -32149,7 +32128,7 @@
                         </a:rPr>
                         <a:t>참여하기 어려운 이유가 있다면</a:t>
                       </a:r>
-                      <a:endParaRPr lang="en-US" sz="850" dirty="0">
+                      <a:endParaRPr lang="en-US" sz="760" dirty="0">
                         <a:latin typeface="Noto Sans KR" charset="0"/>
                         <a:ea typeface="Noto Sans KR" charset="0"/>
                         <a:cs typeface="Noto Sans KR" charset="0"/>
@@ -32160,7 +32139,7 @@
                         <a:buNone/>
                       </a:pPr>
                       <a:r>
-                        <a:rPr lang="en-US" sz="850" b="1" dirty="0">
+                        <a:rPr lang="en-US" sz="760" b="1" dirty="0">
                           <a:solidFill>
                             <a:srgbClr val="182F48"/>
                           </a:solidFill>
@@ -32170,14 +32149,14 @@
                         </a:rPr>
                         <a:t>무엇일까요?</a:t>
                       </a:r>
-                      <a:endParaRPr lang="en-US" sz="850" dirty="0">
+                      <a:endParaRPr lang="en-US" sz="760" dirty="0">
                         <a:latin typeface="Noto Sans KR" charset="0"/>
                         <a:ea typeface="Noto Sans KR" charset="0"/>
                         <a:cs typeface="Noto Sans KR" charset="0"/>
                       </a:endParaRPr>
                     </a:p>
                   </a:txBody>
-                  <a:tcPr marL="76200" marR="76200" marT="38100" marB="38100" anchor="ctr">
+                  <a:tcPr marL="63500" marR="63500" marT="25400" marB="25400" anchor="ctr">
                     <a:lnL w="6350" cap="flat" cmpd="sng" algn="ctr">
                       <a:solidFill>
                         <a:srgbClr val="CBD5E1"/>
@@ -32225,7 +32204,7 @@
                         <a:buNone/>
                       </a:pPr>
                       <a:r>
-                        <a:rPr lang="en-US" sz="850" dirty="0">
+                        <a:rPr lang="en-US" sz="760" dirty="0">
                           <a:solidFill>
                             <a:srgbClr val="334155"/>
                           </a:solidFill>
@@ -32235,7 +32214,7 @@
                         </a:rPr>
                         <a:t>사실 인플루언서 분들이나 모델분들, 이런 분들 하고 시간을 정확히 맞춰야 되는데,</a:t>
                       </a:r>
-                      <a:endParaRPr lang="en-US" sz="850" dirty="0">
+                      <a:endParaRPr lang="en-US" sz="760" dirty="0">
                         <a:latin typeface="Noto Sans KR" charset="0"/>
                         <a:ea typeface="Noto Sans KR" charset="0"/>
                         <a:cs typeface="Noto Sans KR" charset="0"/>
@@ -32246,7 +32225,7 @@
                         <a:buNone/>
                       </a:pPr>
                       <a:r>
-                        <a:rPr lang="en-US" sz="850" dirty="0">
+                        <a:rPr lang="en-US" sz="760" dirty="0">
                           <a:solidFill>
                             <a:srgbClr val="334155"/>
                           </a:solidFill>
@@ -32256,7 +32235,7 @@
                         </a:rPr>
                         <a:t>공간 크기, 그리고 비용 대비 효과가 없을 때는 참여를 하고 있지 않습니다.</a:t>
                       </a:r>
-                      <a:endParaRPr lang="en-US" sz="850" dirty="0">
+                      <a:endParaRPr lang="en-US" sz="760" dirty="0">
                         <a:latin typeface="Noto Sans KR" charset="0"/>
                         <a:ea typeface="Noto Sans KR" charset="0"/>
                         <a:cs typeface="Noto Sans KR" charset="0"/>
@@ -32267,7 +32246,7 @@
                         <a:buNone/>
                       </a:pPr>
                       <a:r>
-                        <a:rPr lang="en-US" sz="850" dirty="0">
+                        <a:rPr lang="en-US" sz="760" dirty="0">
                           <a:solidFill>
                             <a:srgbClr val="334155"/>
                           </a:solidFill>
@@ -32277,14 +32256,14 @@
                         </a:rPr>
                         <a:t>예를 들어서 코엑스 아웃도어 행사나 일산 킨텍스 행사 같은 경우에는 고객의 니즈가 다르기 때문에 저희는 참여를 안 하고 있습니다.</a:t>
                       </a:r>
-                      <a:endParaRPr lang="en-US" sz="850" dirty="0">
+                      <a:endParaRPr lang="en-US" sz="760" dirty="0">
                         <a:latin typeface="Noto Sans KR" charset="0"/>
                         <a:ea typeface="Noto Sans KR" charset="0"/>
                         <a:cs typeface="Noto Sans KR" charset="0"/>
                       </a:endParaRPr>
                     </a:p>
                   </a:txBody>
-                  <a:tcPr marL="76200" marR="76200" marT="38100" marB="38100" anchor="ctr">
+                  <a:tcPr marL="63500" marR="63500" marT="25400" marB="25400" anchor="ctr">
                     <a:lnL w="6350" cap="flat" cmpd="sng" algn="ctr">
                       <a:solidFill>
                         <a:srgbClr val="CBD5E1"/>
@@ -32324,7 +32303,7 @@
                   </a:tcPr>
                 </a:tc>
               </a:tr>
-              <a:tr h="391480">
+              <a:tr h="334634">
                 <a:tc>
                   <a:txBody>
                     <a:bodyPr/>
@@ -32334,7 +32313,7 @@
                         <a:buNone/>
                       </a:pPr>
                       <a:r>
-                        <a:rPr lang="en-US" sz="850" b="1" dirty="0">
+                        <a:rPr lang="en-US" sz="760" b="1" dirty="0">
                           <a:solidFill>
                             <a:srgbClr val="267D86"/>
                           </a:solidFill>
@@ -32344,14 +32323,14 @@
                         </a:rPr>
                         <a:t>Q7</a:t>
                       </a:r>
-                      <a:endParaRPr lang="en-US" sz="850" dirty="0">
+                      <a:endParaRPr lang="en-US" sz="760" dirty="0">
                         <a:latin typeface="Noto Sans KR" charset="0"/>
                         <a:ea typeface="Noto Sans KR" charset="0"/>
                         <a:cs typeface="Noto Sans KR" charset="0"/>
                       </a:endParaRPr>
                     </a:p>
                   </a:txBody>
-                  <a:tcPr marL="76200" marR="76200" marT="38100" marB="38100" anchor="ctr">
+                  <a:tcPr marL="63500" marR="63500" marT="25400" marB="25400" anchor="ctr">
                     <a:lnL w="6350" cap="flat" cmpd="sng" algn="ctr">
                       <a:solidFill>
                         <a:srgbClr val="CBD5E1"/>
@@ -32399,7 +32378,7 @@
                         <a:buNone/>
                       </a:pPr>
                       <a:r>
-                        <a:rPr lang="en-US" sz="850" b="1" dirty="0">
+                        <a:rPr lang="en-US" sz="760" b="1" dirty="0">
                           <a:solidFill>
                             <a:srgbClr val="182F48"/>
                           </a:solidFill>
@@ -32409,7 +32388,7 @@
                         </a:rPr>
                         <a:t>행사에서 무엇을 얻어 가면</a:t>
                       </a:r>
-                      <a:endParaRPr lang="en-US" sz="850" dirty="0">
+                      <a:endParaRPr lang="en-US" sz="760" dirty="0">
                         <a:latin typeface="Noto Sans KR" charset="0"/>
                         <a:ea typeface="Noto Sans KR" charset="0"/>
                         <a:cs typeface="Noto Sans KR" charset="0"/>
@@ -32420,7 +32399,7 @@
                         <a:buNone/>
                       </a:pPr>
                       <a:r>
-                        <a:rPr lang="en-US" sz="850" b="1" dirty="0">
+                        <a:rPr lang="en-US" sz="760" b="1" dirty="0">
                           <a:solidFill>
                             <a:srgbClr val="182F48"/>
                           </a:solidFill>
@@ -32430,14 +32409,14 @@
                         </a:rPr>
                         <a:t>'참여하길 잘했다'고 느끼십니까?</a:t>
                       </a:r>
-                      <a:endParaRPr lang="en-US" sz="850" dirty="0">
+                      <a:endParaRPr lang="en-US" sz="760" dirty="0">
                         <a:latin typeface="Noto Sans KR" charset="0"/>
                         <a:ea typeface="Noto Sans KR" charset="0"/>
                         <a:cs typeface="Noto Sans KR" charset="0"/>
                       </a:endParaRPr>
                     </a:p>
                   </a:txBody>
-                  <a:tcPr marL="76200" marR="76200" marT="38100" marB="38100" anchor="ctr">
+                  <a:tcPr marL="63500" marR="63500" marT="25400" marB="25400" anchor="ctr">
                     <a:lnL w="6350" cap="flat" cmpd="sng" algn="ctr">
                       <a:solidFill>
                         <a:srgbClr val="CBD5E1"/>
@@ -32485,7 +32464,7 @@
                         <a:buNone/>
                       </a:pPr>
                       <a:r>
-                        <a:rPr lang="en-US" sz="850" dirty="0">
+                        <a:rPr lang="en-US" sz="760" dirty="0">
                           <a:solidFill>
                             <a:srgbClr val="334155"/>
                           </a:solidFill>
@@ -32495,14 +32474,358 @@
                         </a:rPr>
                         <a:t>고객의 반응이겠죠.</a:t>
                       </a:r>
-                      <a:endParaRPr lang="en-US" sz="850" dirty="0">
+                      <a:endParaRPr lang="en-US" sz="760" dirty="0">
                         <a:latin typeface="Noto Sans KR" charset="0"/>
                         <a:ea typeface="Noto Sans KR" charset="0"/>
                         <a:cs typeface="Noto Sans KR" charset="0"/>
                       </a:endParaRPr>
                     </a:p>
                   </a:txBody>
-                  <a:tcPr marL="76200" marR="76200" marT="38100" marB="38100" anchor="ctr">
+                  <a:tcPr marL="63500" marR="63500" marT="25400" marB="25400" anchor="ctr">
+                    <a:lnL w="6350" cap="flat" cmpd="sng" algn="ctr">
+                      <a:solidFill>
+                        <a:srgbClr val="CBD5E1"/>
+                      </a:solidFill>
+                      <a:prstDash val="solid"/>
+                      <a:round/>
+                      <a:headEnd type="none" w="med" len="med"/>
+                      <a:tailEnd type="none" w="med" len="med"/>
+                    </a:lnL>
+                    <a:lnR w="6350" cap="flat" cmpd="sng" algn="ctr">
+                      <a:solidFill>
+                        <a:srgbClr val="CBD5E1"/>
+                      </a:solidFill>
+                      <a:prstDash val="solid"/>
+                      <a:round/>
+                      <a:headEnd type="none" w="med" len="med"/>
+                      <a:tailEnd type="none" w="med" len="med"/>
+                    </a:lnR>
+                    <a:lnT w="6350" cap="flat" cmpd="sng" algn="ctr">
+                      <a:solidFill>
+                        <a:srgbClr val="CBD5E1"/>
+                      </a:solidFill>
+                      <a:prstDash val="solid"/>
+                      <a:round/>
+                      <a:headEnd type="none" w="med" len="med"/>
+                      <a:tailEnd type="none" w="med" len="med"/>
+                    </a:lnT>
+                    <a:lnB w="6350" cap="flat" cmpd="sng" algn="ctr">
+                      <a:solidFill>
+                        <a:srgbClr val="CBD5E1"/>
+                      </a:solidFill>
+                      <a:prstDash val="solid"/>
+                      <a:round/>
+                      <a:headEnd type="none" w="med" len="med"/>
+                      <a:tailEnd type="none" w="med" len="med"/>
+                    </a:lnB>
+                  </a:tcPr>
+                </a:tc>
+              </a:tr>
+              <a:tr h="998498">
+                <a:tc>
+                  <a:txBody>
+                    <a:bodyPr/>
+                    <a:lstStyle/>
+                    <a:p>
+                      <a:pPr algn="ctr" indent="0" marL="0">
+                        <a:buNone/>
+                      </a:pPr>
+                      <a:r>
+                        <a:rPr lang="en-US" sz="760" b="1" dirty="0">
+                          <a:solidFill>
+                            <a:srgbClr val="267D86"/>
+                          </a:solidFill>
+                          <a:latin typeface="Noto Sans KR" pitchFamily="34" charset="0"/>
+                          <a:ea typeface="Noto Sans KR" pitchFamily="34" charset="-122"/>
+                          <a:cs typeface="Noto Sans KR" pitchFamily="34" charset="-120"/>
+                        </a:rPr>
+                        <a:t>Q8</a:t>
+                      </a:r>
+                      <a:endParaRPr lang="en-US" sz="760" dirty="0">
+                        <a:latin typeface="Noto Sans KR" charset="0"/>
+                        <a:ea typeface="Noto Sans KR" charset="0"/>
+                        <a:cs typeface="Noto Sans KR" charset="0"/>
+                      </a:endParaRPr>
+                    </a:p>
+                  </a:txBody>
+                  <a:tcPr marL="63500" marR="63500" marT="25400" marB="25400" anchor="ctr">
+                    <a:lnL w="6350" cap="flat" cmpd="sng" algn="ctr">
+                      <a:solidFill>
+                        <a:srgbClr val="CBD5E1"/>
+                      </a:solidFill>
+                      <a:prstDash val="solid"/>
+                      <a:round/>
+                      <a:headEnd type="none" w="med" len="med"/>
+                      <a:tailEnd type="none" w="med" len="med"/>
+                    </a:lnL>
+                    <a:lnR w="6350" cap="flat" cmpd="sng" algn="ctr">
+                      <a:solidFill>
+                        <a:srgbClr val="CBD5E1"/>
+                      </a:solidFill>
+                      <a:prstDash val="solid"/>
+                      <a:round/>
+                      <a:headEnd type="none" w="med" len="med"/>
+                      <a:tailEnd type="none" w="med" len="med"/>
+                    </a:lnR>
+                    <a:lnT w="6350" cap="flat" cmpd="sng" algn="ctr">
+                      <a:solidFill>
+                        <a:srgbClr val="CBD5E1"/>
+                      </a:solidFill>
+                      <a:prstDash val="solid"/>
+                      <a:round/>
+                      <a:headEnd type="none" w="med" len="med"/>
+                      <a:tailEnd type="none" w="med" len="med"/>
+                    </a:lnT>
+                    <a:lnB w="6350" cap="flat" cmpd="sng" algn="ctr">
+                      <a:solidFill>
+                        <a:srgbClr val="CBD5E1"/>
+                      </a:solidFill>
+                      <a:prstDash val="solid"/>
+                      <a:round/>
+                      <a:headEnd type="none" w="med" len="med"/>
+                      <a:tailEnd type="none" w="med" len="med"/>
+                    </a:lnB>
+                  </a:tcPr>
+                </a:tc>
+                <a:tc>
+                  <a:txBody>
+                    <a:bodyPr/>
+                    <a:lstStyle/>
+                    <a:p>
+                      <a:pPr algn="l" indent="0" marL="0">
+                        <a:buNone/>
+                      </a:pPr>
+                      <a:r>
+                        <a:rPr lang="en-US" sz="760" b="1" dirty="0">
+                          <a:solidFill>
+                            <a:srgbClr val="182F48"/>
+                          </a:solidFill>
+                          <a:latin typeface="Noto Sans KR" pitchFamily="34" charset="0"/>
+                          <a:ea typeface="Noto Sans KR" pitchFamily="34" charset="-122"/>
+                          <a:cs typeface="Noto Sans KR" pitchFamily="34" charset="-120"/>
+                        </a:rPr>
+                        <a:t>따로 하실 말씀 있으세요?</a:t>
+                      </a:r>
+                      <a:endParaRPr lang="en-US" sz="760" dirty="0">
+                        <a:latin typeface="Noto Sans KR" charset="0"/>
+                        <a:ea typeface="Noto Sans KR" charset="0"/>
+                        <a:cs typeface="Noto Sans KR" charset="0"/>
+                      </a:endParaRPr>
+                    </a:p>
+                    <a:p>
+                      <a:pPr algn="l" indent="0" marL="0">
+                        <a:buNone/>
+                      </a:pPr>
+                      <a:r>
+                        <a:rPr lang="en-US" sz="760" b="1" dirty="0">
+                          <a:solidFill>
+                            <a:srgbClr val="182F48"/>
+                          </a:solidFill>
+                          <a:latin typeface="Noto Sans KR" pitchFamily="34" charset="0"/>
+                          <a:ea typeface="Noto Sans KR" pitchFamily="34" charset="-122"/>
+                          <a:cs typeface="Noto Sans KR" pitchFamily="34" charset="-120"/>
+                        </a:rPr>
+                        <a:t>(행사 참여 시 기대 효과)</a:t>
+                      </a:r>
+                      <a:endParaRPr lang="en-US" sz="760" dirty="0">
+                        <a:latin typeface="Noto Sans KR" charset="0"/>
+                        <a:ea typeface="Noto Sans KR" charset="0"/>
+                        <a:cs typeface="Noto Sans KR" charset="0"/>
+                      </a:endParaRPr>
+                    </a:p>
+                  </a:txBody>
+                  <a:tcPr marL="63500" marR="63500" marT="25400" marB="25400" anchor="ctr">
+                    <a:lnL w="6350" cap="flat" cmpd="sng" algn="ctr">
+                      <a:solidFill>
+                        <a:srgbClr val="CBD5E1"/>
+                      </a:solidFill>
+                      <a:prstDash val="solid"/>
+                      <a:round/>
+                      <a:headEnd type="none" w="med" len="med"/>
+                      <a:tailEnd type="none" w="med" len="med"/>
+                    </a:lnL>
+                    <a:lnR w="6350" cap="flat" cmpd="sng" algn="ctr">
+                      <a:solidFill>
+                        <a:srgbClr val="CBD5E1"/>
+                      </a:solidFill>
+                      <a:prstDash val="solid"/>
+                      <a:round/>
+                      <a:headEnd type="none" w="med" len="med"/>
+                      <a:tailEnd type="none" w="med" len="med"/>
+                    </a:lnR>
+                    <a:lnT w="6350" cap="flat" cmpd="sng" algn="ctr">
+                      <a:solidFill>
+                        <a:srgbClr val="CBD5E1"/>
+                      </a:solidFill>
+                      <a:prstDash val="solid"/>
+                      <a:round/>
+                      <a:headEnd type="none" w="med" len="med"/>
+                      <a:tailEnd type="none" w="med" len="med"/>
+                    </a:lnT>
+                    <a:lnB w="6350" cap="flat" cmpd="sng" algn="ctr">
+                      <a:solidFill>
+                        <a:srgbClr val="CBD5E1"/>
+                      </a:solidFill>
+                      <a:prstDash val="solid"/>
+                      <a:round/>
+                      <a:headEnd type="none" w="med" len="med"/>
+                      <a:tailEnd type="none" w="med" len="med"/>
+                    </a:lnB>
+                  </a:tcPr>
+                </a:tc>
+                <a:tc>
+                  <a:txBody>
+                    <a:bodyPr/>
+                    <a:lstStyle/>
+                    <a:p>
+                      <a:pPr algn="l" indent="0" marL="0">
+                        <a:buNone/>
+                      </a:pPr>
+                      <a:r>
+                        <a:rPr lang="en-US" sz="760" dirty="0">
+                          <a:solidFill>
+                            <a:srgbClr val="334155"/>
+                          </a:solidFill>
+                          <a:latin typeface="Noto Sans KR" pitchFamily="34" charset="0"/>
+                          <a:ea typeface="Noto Sans KR" pitchFamily="34" charset="-122"/>
+                          <a:cs typeface="Noto Sans KR" pitchFamily="34" charset="-120"/>
+                        </a:rPr>
+                        <a:t>만약에 행사에 참여하게 되면 기대할 수 있는 건 바이어, 제휴처 만남, 브랜드 홍보, 현장 판매, 체험 고객 확보, 사용자 반응 데이터 수집, 요 정도일 것 같습니다.</a:t>
+                      </a:r>
+                      <a:endParaRPr lang="en-US" sz="760" dirty="0">
+                        <a:latin typeface="Noto Sans KR" charset="0"/>
+                        <a:ea typeface="Noto Sans KR" charset="0"/>
+                        <a:cs typeface="Noto Sans KR" charset="0"/>
+                      </a:endParaRPr>
+                    </a:p>
+                    <a:p>
+                      <a:pPr algn="l" indent="0" marL="0">
+                        <a:buNone/>
+                      </a:pPr>
+                      <a:r>
+                        <a:rPr lang="en-US" sz="760" dirty="0">
+                          <a:solidFill>
+                            <a:srgbClr val="334155"/>
+                          </a:solidFill>
+                          <a:latin typeface="Noto Sans KR" pitchFamily="34" charset="0"/>
+                          <a:ea typeface="Noto Sans KR" pitchFamily="34" charset="-122"/>
+                          <a:cs typeface="Noto Sans KR" pitchFamily="34" charset="-120"/>
+                        </a:rPr>
+                        <a:t>사실 투자를 받는다는 것은 되게 위험한 것이기 때문에 투자 유치는 저희에겐 필요 없고.</a:t>
+                      </a:r>
+                      <a:endParaRPr lang="en-US" sz="760" dirty="0">
+                        <a:latin typeface="Noto Sans KR" charset="0"/>
+                        <a:ea typeface="Noto Sans KR" charset="0"/>
+                        <a:cs typeface="Noto Sans KR" charset="0"/>
+                      </a:endParaRPr>
+                    </a:p>
+                    <a:p>
+                      <a:pPr algn="l" indent="0" marL="0">
+                        <a:buNone/>
+                      </a:pPr>
+                      <a:r>
+                        <a:rPr lang="en-US" sz="760" dirty="0">
+                          <a:solidFill>
+                            <a:srgbClr val="334155"/>
+                          </a:solidFill>
+                          <a:latin typeface="Noto Sans KR" pitchFamily="34" charset="0"/>
+                          <a:ea typeface="Noto Sans KR" pitchFamily="34" charset="-122"/>
+                          <a:cs typeface="Noto Sans KR" pitchFamily="34" charset="-120"/>
+                        </a:rPr>
+                        <a:t>(…) 마무트라는 브랜드 자체가 우리나라의 많은 분들이 알고 계시는 아크테릭스보다 훨씬 고가의 의류 브랜드이기 때문에,</a:t>
+                      </a:r>
+                      <a:endParaRPr lang="en-US" sz="760" dirty="0">
+                        <a:latin typeface="Noto Sans KR" charset="0"/>
+                        <a:ea typeface="Noto Sans KR" charset="0"/>
+                        <a:cs typeface="Noto Sans KR" charset="0"/>
+                      </a:endParaRPr>
+                    </a:p>
+                    <a:p>
+                      <a:pPr algn="l" indent="0" marL="0">
+                        <a:buNone/>
+                      </a:pPr>
+                      <a:r>
+                        <a:rPr lang="en-US" sz="760" dirty="0">
+                          <a:solidFill>
+                            <a:srgbClr val="334155"/>
+                          </a:solidFill>
+                          <a:latin typeface="Noto Sans KR" pitchFamily="34" charset="0"/>
+                          <a:ea typeface="Noto Sans KR" pitchFamily="34" charset="-122"/>
+                          <a:cs typeface="Noto Sans KR" pitchFamily="34" charset="-120"/>
+                        </a:rPr>
+                        <a:t>바이어나 제휴처를 만난다는 것보다는 브랜드 홍보를 하고 이 장비에 대한 좋은 점을 설명하는 것,</a:t>
+                      </a:r>
+                      <a:endParaRPr lang="en-US" sz="760" dirty="0">
+                        <a:latin typeface="Noto Sans KR" charset="0"/>
+                        <a:ea typeface="Noto Sans KR" charset="0"/>
+                        <a:cs typeface="Noto Sans KR" charset="0"/>
+                      </a:endParaRPr>
+                    </a:p>
+                    <a:p>
+                      <a:pPr algn="l" indent="0" marL="0">
+                        <a:buNone/>
+                      </a:pPr>
+                      <a:r>
+                        <a:rPr lang="en-US" sz="760" dirty="0">
+                          <a:solidFill>
+                            <a:srgbClr val="334155"/>
+                          </a:solidFill>
+                          <a:latin typeface="Noto Sans KR" pitchFamily="34" charset="0"/>
+                          <a:ea typeface="Noto Sans KR" pitchFamily="34" charset="-122"/>
+                          <a:cs typeface="Noto Sans KR" pitchFamily="34" charset="-120"/>
+                        </a:rPr>
+                        <a:t>그걸 관심 깊게 들어주는 고객들이 필요하지, 현장에서 판매를 하거나 이런 거는 의미가 없고요. 고객 확보, 이것도 사실 의미가 없습니다.</a:t>
+                      </a:r>
+                      <a:endParaRPr lang="en-US" sz="760" dirty="0">
+                        <a:latin typeface="Noto Sans KR" charset="0"/>
+                        <a:ea typeface="Noto Sans KR" charset="0"/>
+                        <a:cs typeface="Noto Sans KR" charset="0"/>
+                      </a:endParaRPr>
+                    </a:p>
+                    <a:p>
+                      <a:pPr algn="l" indent="0" marL="0">
+                        <a:buNone/>
+                      </a:pPr>
+                      <a:r>
+                        <a:rPr lang="en-US" sz="760" dirty="0">
+                          <a:solidFill>
+                            <a:srgbClr val="334155"/>
+                          </a:solidFill>
+                          <a:latin typeface="Noto Sans KR" pitchFamily="34" charset="0"/>
+                          <a:ea typeface="Noto Sans KR" pitchFamily="34" charset="-122"/>
+                          <a:cs typeface="Noto Sans KR" pitchFamily="34" charset="-120"/>
+                        </a:rPr>
+                        <a:t>하지만 아웃도어를 할 때 왜 이런 에어매트를 써야 되고, 이런 침낭을 써야 되고, 이런 의류를 입어야 되는지,</a:t>
+                      </a:r>
+                      <a:endParaRPr lang="en-US" sz="760" dirty="0">
+                        <a:latin typeface="Noto Sans KR" charset="0"/>
+                        <a:ea typeface="Noto Sans KR" charset="0"/>
+                        <a:cs typeface="Noto Sans KR" charset="0"/>
+                      </a:endParaRPr>
+                    </a:p>
+                    <a:p>
+                      <a:pPr algn="l" indent="0" marL="0">
+                        <a:buNone/>
+                      </a:pPr>
+                      <a:r>
+                        <a:rPr lang="en-US" sz="760" dirty="0">
+                          <a:solidFill>
+                            <a:srgbClr val="334155"/>
+                          </a:solidFill>
+                          <a:latin typeface="Noto Sans KR" pitchFamily="34" charset="0"/>
+                          <a:ea typeface="Noto Sans KR" pitchFamily="34" charset="-122"/>
+                          <a:cs typeface="Noto Sans KR" pitchFamily="34" charset="-120"/>
+                        </a:rPr>
+                        <a:t>거기에 많은 분들이 관심을 가져 준다면 그러면 브랜드 부스에 들어가는 게 저는 맞다고 생각합니다.</a:t>
+                      </a:r>
+                      <a:endParaRPr lang="en-US" sz="760" dirty="0">
+                        <a:latin typeface="Noto Sans KR" charset="0"/>
+                        <a:ea typeface="Noto Sans KR" charset="0"/>
+                        <a:cs typeface="Noto Sans KR" charset="0"/>
+                      </a:endParaRPr>
+                    </a:p>
+                  </a:txBody>
+                  <a:tcPr marL="63500" marR="63500" marT="25400" marB="25400" anchor="ctr">
                     <a:lnL w="6350" cap="flat" cmpd="sng" algn="ctr">
                       <a:solidFill>
                         <a:srgbClr val="CBD5E1"/>
@@ -32689,7 +33012,7 @@
                 <a:ea typeface="Noto Sans KR" pitchFamily="34" charset="-122"/>
                 <a:cs typeface="Noto Sans KR" pitchFamily="34" charset="-120"/>
               </a:rPr>
-              <a:t>질문과 답변(이어서) · 사전 가정 · 기획 수정 · 추가 확인 사항</a:t>
+              <a:t>사전 가정 · 질문·답변 요지 · 기획 수정 · 추가 확인 사항</a:t>
             </a:r>
             <a:endParaRPr lang="en-US" sz="1500" dirty="0"/>
           </a:p>
@@ -32757,9 +33080,769 @@
           </a:p>
         </p:txBody>
       </p:sp>
+      <p:sp>
+        <p:nvSpPr>
+          <p:cNvPr id="7" name="제목 사전 가정 → 검증 결과"/>
+          <p:cNvSpPr txBox="1"/>
+          <p:nvPr/>
+        </p:nvSpPr>
+        <p:spPr>
+          <a:xfrm>
+            <a:off x="612648" y="1463040"/>
+            <a:ext cx="3429000" cy="237744"/>
+          </a:xfrm>
+          <a:prstGeom prst="rect">
+            <a:avLst/>
+          </a:prstGeom>
+          <a:noFill/>
+          <a:ln/>
+        </p:spPr>
+        <p:txBody>
+          <a:bodyPr wrap="square" lIns="0" tIns="0" rIns="0" bIns="0" rtlCol="0" anchor="ctr"/>
+          <a:lstStyle/>
+          <a:p>
+            <a:pPr algn="l" indent="0" marL="0">
+              <a:lnSpc>
+                <a:spcPct val="100000"/>
+              </a:lnSpc>
+              <a:buNone/>
+            </a:pPr>
+            <a:r>
+              <a:rPr lang="en-US" sz="1050" b="1" dirty="0">
+                <a:solidFill>
+                  <a:srgbClr val="182F48"/>
+                </a:solidFill>
+                <a:latin typeface="Noto Sans KR" pitchFamily="34" charset="0"/>
+                <a:ea typeface="Noto Sans KR" pitchFamily="34" charset="-122"/>
+                <a:cs typeface="Noto Sans KR" pitchFamily="34" charset="-120"/>
+              </a:rPr>
+              <a:t>사전 가정 → 검증 결과</a:t>
+            </a:r>
+            <a:endParaRPr lang="en-US" sz="1050" dirty="0"/>
+          </a:p>
+        </p:txBody>
+      </p:sp>
+      <p:sp>
+        <p:nvSpPr>
+          <p:cNvPr id="8" name="제목 질문 · 답변 요지"/>
+          <p:cNvSpPr txBox="1"/>
+          <p:nvPr/>
+        </p:nvSpPr>
+        <p:spPr>
+          <a:xfrm>
+            <a:off x="4178808" y="1463040"/>
+            <a:ext cx="3886200" cy="237744"/>
+          </a:xfrm>
+          <a:prstGeom prst="rect">
+            <a:avLst/>
+          </a:prstGeom>
+          <a:noFill/>
+          <a:ln/>
+        </p:spPr>
+        <p:txBody>
+          <a:bodyPr wrap="square" lIns="0" tIns="0" rIns="0" bIns="0" rtlCol="0" anchor="ctr"/>
+          <a:lstStyle/>
+          <a:p>
+            <a:pPr algn="l" indent="0" marL="0">
+              <a:lnSpc>
+                <a:spcPct val="100000"/>
+              </a:lnSpc>
+              <a:buNone/>
+            </a:pPr>
+            <a:r>
+              <a:rPr lang="en-US" sz="1050" b="1" dirty="0">
+                <a:solidFill>
+                  <a:srgbClr val="182F48"/>
+                </a:solidFill>
+                <a:latin typeface="Noto Sans KR" pitchFamily="34" charset="0"/>
+                <a:ea typeface="Noto Sans KR" pitchFamily="34" charset="-122"/>
+                <a:cs typeface="Noto Sans KR" pitchFamily="34" charset="-120"/>
+              </a:rPr>
+              <a:t>질문 · 답변 요지</a:t>
+            </a:r>
+            <a:endParaRPr lang="en-US" sz="1050" dirty="0"/>
+          </a:p>
+        </p:txBody>
+      </p:sp>
+      <p:sp>
+        <p:nvSpPr>
+          <p:cNvPr id="9" name="제목 기획 수정 (반영 위치)"/>
+          <p:cNvSpPr txBox="1"/>
+          <p:nvPr/>
+        </p:nvSpPr>
+        <p:spPr>
+          <a:xfrm>
+            <a:off x="8202168" y="1463040"/>
+            <a:ext cx="3374136" cy="237744"/>
+          </a:xfrm>
+          <a:prstGeom prst="rect">
+            <a:avLst/>
+          </a:prstGeom>
+          <a:noFill/>
+          <a:ln/>
+        </p:spPr>
+        <p:txBody>
+          <a:bodyPr wrap="square" lIns="0" tIns="0" rIns="0" bIns="0" rtlCol="0" anchor="ctr"/>
+          <a:lstStyle/>
+          <a:p>
+            <a:pPr algn="l" indent="0" marL="0">
+              <a:lnSpc>
+                <a:spcPct val="100000"/>
+              </a:lnSpc>
+              <a:buNone/>
+            </a:pPr>
+            <a:r>
+              <a:rPr lang="en-US" sz="1050" b="1" dirty="0">
+                <a:solidFill>
+                  <a:srgbClr val="182F48"/>
+                </a:solidFill>
+                <a:latin typeface="Noto Sans KR" pitchFamily="34" charset="0"/>
+                <a:ea typeface="Noto Sans KR" pitchFamily="34" charset="-122"/>
+                <a:cs typeface="Noto Sans KR" pitchFamily="34" charset="-120"/>
+              </a:rPr>
+              <a:t>기획 수정 (반영 위치)</a:t>
+            </a:r>
+            <a:endParaRPr lang="en-US" sz="1050" dirty="0"/>
+          </a:p>
+        </p:txBody>
+      </p:sp>
+      <p:sp>
+        <p:nvSpPr>
+          <p:cNvPr id="10" name="가정 H1"/>
+          <p:cNvSpPr txBox="1"/>
+          <p:nvPr/>
+        </p:nvSpPr>
+        <p:spPr>
+          <a:xfrm>
+            <a:off x="612648" y="1755648"/>
+            <a:ext cx="3429000" cy="859536"/>
+          </a:xfrm>
+          <a:prstGeom prst="roundRect">
+            <a:avLst>
+              <a:gd name="adj" fmla="val 5319"/>
+            </a:avLst>
+          </a:prstGeom>
+          <a:solidFill>
+            <a:srgbClr val="F1F5F9"/>
+          </a:solidFill>
+          <a:ln/>
+        </p:spPr>
+        <p:txBody>
+          <a:bodyPr wrap="square" lIns="91440" tIns="0" rIns="91440" bIns="0" rtlCol="0" anchor="ctr"/>
+          <a:lstStyle/>
+          <a:p>
+            <a:pPr algn="l" indent="0" marL="0">
+              <a:lnSpc>
+                <a:spcPct val="95000"/>
+              </a:lnSpc>
+              <a:spcAft>
+                <a:spcPts val="100"/>
+              </a:spcAft>
+              <a:buNone/>
+            </a:pPr>
+            <a:r>
+              <a:rPr lang="en-US" sz="780" b="1" dirty="0">
+                <a:solidFill>
+                  <a:srgbClr val="267D86"/>
+                </a:solidFill>
+                <a:latin typeface="Noto Sans KR" pitchFamily="34" charset="0"/>
+                <a:ea typeface="Noto Sans KR" pitchFamily="34" charset="-122"/>
+                <a:cs typeface="Noto Sans KR" pitchFamily="34" charset="-120"/>
+              </a:rPr>
+              <a:t>H1  </a:t>
+            </a:r>
+            <a:pPr algn="l" indent="0" marL="0">
+              <a:lnSpc>
+                <a:spcPct val="95000"/>
+              </a:lnSpc>
+              <a:spcAft>
+                <a:spcPts val="100"/>
+              </a:spcAft>
+              <a:buNone/>
+            </a:pPr>
+            <a:r>
+              <a:rPr lang="en-US" sz="780" b="1" dirty="0">
+                <a:solidFill>
+                  <a:srgbClr val="182F48"/>
+                </a:solidFill>
+                <a:latin typeface="Noto Sans KR" pitchFamily="34" charset="0"/>
+                <a:ea typeface="Noto Sans KR" pitchFamily="34" charset="-122"/>
+                <a:cs typeface="Noto Sans KR" pitchFamily="34" charset="-120"/>
+              </a:rPr>
+              <a:t>브랜드는 바이어 미팅 · 현장판매를 가장 중시할 것</a:t>
+            </a:r>
+            <a:endParaRPr lang="en-US" sz="780" dirty="0"/>
+          </a:p>
+          <a:p>
+            <a:pPr algn="l" indent="0" marL="0">
+              <a:lnSpc>
+                <a:spcPct val="95000"/>
+              </a:lnSpc>
+              <a:spcAft>
+                <a:spcPts val="100"/>
+              </a:spcAft>
+              <a:buNone/>
+            </a:pPr>
+            <a:r>
+              <a:rPr lang="en-US" sz="780" b="1" dirty="0">
+                <a:solidFill>
+                  <a:srgbClr val="C2410C"/>
+                </a:solidFill>
+                <a:latin typeface="Noto Sans KR" pitchFamily="34" charset="0"/>
+                <a:ea typeface="Noto Sans KR" pitchFamily="34" charset="-122"/>
+                <a:cs typeface="Noto Sans KR" pitchFamily="34" charset="-120"/>
+              </a:rPr>
+              <a:t>기각  </a:t>
+            </a:r>
+            <a:pPr algn="l" indent="0" marL="0">
+              <a:lnSpc>
+                <a:spcPct val="95000"/>
+              </a:lnSpc>
+              <a:spcAft>
+                <a:spcPts val="100"/>
+              </a:spcAft>
+              <a:buNone/>
+            </a:pPr>
+            <a:r>
+              <a:rPr lang="en-US" sz="780" dirty="0">
+                <a:solidFill>
+                  <a:srgbClr val="334155"/>
+                </a:solidFill>
+                <a:latin typeface="Noto Sans KR" pitchFamily="34" charset="0"/>
+                <a:ea typeface="Noto Sans KR" pitchFamily="34" charset="-122"/>
+                <a:cs typeface="Noto Sans KR" pitchFamily="34" charset="-120"/>
+              </a:rPr>
+              <a:t>투자·바이어·현장판매·고객 확보는 의미가 적다고 했다.</a:t>
+            </a:r>
+            <a:endParaRPr lang="en-US" sz="780" dirty="0"/>
+          </a:p>
+          <a:p>
+            <a:pPr algn="l" indent="0" marL="0">
+              <a:lnSpc>
+                <a:spcPct val="95000"/>
+              </a:lnSpc>
+              <a:spcAft>
+                <a:spcPts val="100"/>
+              </a:spcAft>
+              <a:buNone/>
+            </a:pPr>
+            <a:r>
+              <a:rPr lang="en-US" sz="780" dirty="0">
+                <a:solidFill>
+                  <a:srgbClr val="334155"/>
+                </a:solidFill>
+                <a:latin typeface="Noto Sans KR" pitchFamily="34" charset="0"/>
+                <a:ea typeface="Noto Sans KR" pitchFamily="34" charset="-122"/>
+                <a:cs typeface="Noto Sans KR" pitchFamily="34" charset="-120"/>
+              </a:rPr>
+              <a:t>        </a:t>
+            </a:r>
+            <a:pPr algn="l" indent="0" marL="0">
+              <a:lnSpc>
+                <a:spcPct val="95000"/>
+              </a:lnSpc>
+              <a:spcAft>
+                <a:spcPts val="100"/>
+              </a:spcAft>
+              <a:buNone/>
+            </a:pPr>
+            <a:r>
+              <a:rPr lang="en-US" sz="780" dirty="0">
+                <a:solidFill>
+                  <a:srgbClr val="334155"/>
+                </a:solidFill>
+                <a:latin typeface="Noto Sans KR" pitchFamily="34" charset="0"/>
+                <a:ea typeface="Noto Sans KR" pitchFamily="34" charset="-122"/>
+                <a:cs typeface="Noto Sans KR" pitchFamily="34" charset="-120"/>
+              </a:rPr>
+              <a:t>목적은 브랜드 홍보와 장비를 깊게 들어줄 관심 고객이다.</a:t>
+            </a:r>
+            <a:endParaRPr lang="en-US" sz="780" dirty="0"/>
+          </a:p>
+        </p:txBody>
+      </p:sp>
+      <p:sp>
+        <p:nvSpPr>
+          <p:cNvPr id="11" name="가정 H2"/>
+          <p:cNvSpPr txBox="1"/>
+          <p:nvPr/>
+        </p:nvSpPr>
+        <p:spPr>
+          <a:xfrm>
+            <a:off x="612648" y="2697480"/>
+            <a:ext cx="3429000" cy="859536"/>
+          </a:xfrm>
+          <a:prstGeom prst="roundRect">
+            <a:avLst>
+              <a:gd name="adj" fmla="val 5319"/>
+            </a:avLst>
+          </a:prstGeom>
+          <a:solidFill>
+            <a:srgbClr val="F1F5F9"/>
+          </a:solidFill>
+          <a:ln/>
+        </p:spPr>
+        <p:txBody>
+          <a:bodyPr wrap="square" lIns="91440" tIns="0" rIns="91440" bIns="0" rtlCol="0" anchor="ctr"/>
+          <a:lstStyle/>
+          <a:p>
+            <a:pPr algn="l" indent="0" marL="0">
+              <a:lnSpc>
+                <a:spcPct val="95000"/>
+              </a:lnSpc>
+              <a:spcAft>
+                <a:spcPts val="100"/>
+              </a:spcAft>
+              <a:buNone/>
+            </a:pPr>
+            <a:r>
+              <a:rPr lang="en-US" sz="780" b="1" dirty="0">
+                <a:solidFill>
+                  <a:srgbClr val="267D86"/>
+                </a:solidFill>
+                <a:latin typeface="Noto Sans KR" pitchFamily="34" charset="0"/>
+                <a:ea typeface="Noto Sans KR" pitchFamily="34" charset="-122"/>
+                <a:cs typeface="Noto Sans KR" pitchFamily="34" charset="-120"/>
+              </a:rPr>
+              <a:t>H2  </a:t>
+            </a:r>
+            <a:pPr algn="l" indent="0" marL="0">
+              <a:lnSpc>
+                <a:spcPct val="95000"/>
+              </a:lnSpc>
+              <a:spcAft>
+                <a:spcPts val="100"/>
+              </a:spcAft>
+              <a:buNone/>
+            </a:pPr>
+            <a:r>
+              <a:rPr lang="en-US" sz="780" b="1" dirty="0">
+                <a:solidFill>
+                  <a:srgbClr val="182F48"/>
+                </a:solidFill>
+                <a:latin typeface="Noto Sans KR" pitchFamily="34" charset="0"/>
+                <a:ea typeface="Noto Sans KR" pitchFamily="34" charset="-122"/>
+                <a:cs typeface="Noto Sans KR" pitchFamily="34" charset="-120"/>
+              </a:rPr>
+              <a:t>부스비가 가장 큰 참가 장벽일 것</a:t>
+            </a:r>
+            <a:endParaRPr lang="en-US" sz="780" dirty="0"/>
+          </a:p>
+          <a:p>
+            <a:pPr algn="l" indent="0" marL="0">
+              <a:lnSpc>
+                <a:spcPct val="95000"/>
+              </a:lnSpc>
+              <a:spcAft>
+                <a:spcPts val="100"/>
+              </a:spcAft>
+              <a:buNone/>
+            </a:pPr>
+            <a:r>
+              <a:rPr lang="en-US" sz="780" b="1" dirty="0">
+                <a:solidFill>
+                  <a:srgbClr val="267D86"/>
+                </a:solidFill>
+                <a:latin typeface="Noto Sans KR" pitchFamily="34" charset="0"/>
+                <a:ea typeface="Noto Sans KR" pitchFamily="34" charset="-122"/>
+                <a:cs typeface="Noto Sans KR" pitchFamily="34" charset="-120"/>
+              </a:rPr>
+              <a:t>부분  </a:t>
+            </a:r>
+            <a:pPr algn="l" indent="0" marL="0">
+              <a:lnSpc>
+                <a:spcPct val="95000"/>
+              </a:lnSpc>
+              <a:spcAft>
+                <a:spcPts val="100"/>
+              </a:spcAft>
+              <a:buNone/>
+            </a:pPr>
+            <a:r>
+              <a:rPr lang="en-US" sz="780" dirty="0">
+                <a:solidFill>
+                  <a:srgbClr val="334155"/>
+                </a:solidFill>
+                <a:latin typeface="Noto Sans KR" pitchFamily="34" charset="0"/>
+                <a:ea typeface="Noto Sans KR" pitchFamily="34" charset="-122"/>
+                <a:cs typeface="Noto Sans KR" pitchFamily="34" charset="-120"/>
+              </a:rPr>
+              <a:t>부스비는 늘 2만~5만 달러로 책정해 왔다.</a:t>
+            </a:r>
+            <a:endParaRPr lang="en-US" sz="780" dirty="0"/>
+          </a:p>
+          <a:p>
+            <a:pPr algn="l" indent="0" marL="0">
+              <a:lnSpc>
+                <a:spcPct val="95000"/>
+              </a:lnSpc>
+              <a:spcAft>
+                <a:spcPts val="100"/>
+              </a:spcAft>
+              <a:buNone/>
+            </a:pPr>
+            <a:r>
+              <a:rPr lang="en-US" sz="780" dirty="0">
+                <a:solidFill>
+                  <a:srgbClr val="334155"/>
+                </a:solidFill>
+                <a:latin typeface="Noto Sans KR" pitchFamily="34" charset="0"/>
+                <a:ea typeface="Noto Sans KR" pitchFamily="34" charset="-122"/>
+                <a:cs typeface="Noto Sans KR" pitchFamily="34" charset="-120"/>
+              </a:rPr>
+              <a:t>        </a:t>
+            </a:r>
+            <a:pPr algn="l" indent="0" marL="0">
+              <a:lnSpc>
+                <a:spcPct val="95000"/>
+              </a:lnSpc>
+              <a:spcAft>
+                <a:spcPts val="100"/>
+              </a:spcAft>
+              <a:buNone/>
+            </a:pPr>
+            <a:r>
+              <a:rPr lang="en-US" sz="780" dirty="0">
+                <a:solidFill>
+                  <a:srgbClr val="334155"/>
+                </a:solidFill>
+                <a:latin typeface="Noto Sans KR" pitchFamily="34" charset="0"/>
+                <a:ea typeface="Noto Sans KR" pitchFamily="34" charset="-122"/>
+                <a:cs typeface="Noto Sans KR" pitchFamily="34" charset="-120"/>
+              </a:rPr>
+              <a:t>실제 장벽은 비용 대비 효과·공간·인플루언서 일정이다.</a:t>
+            </a:r>
+            <a:endParaRPr lang="en-US" sz="780" dirty="0"/>
+          </a:p>
+        </p:txBody>
+      </p:sp>
+      <p:sp>
+        <p:nvSpPr>
+          <p:cNvPr id="12" name="가정 H3"/>
+          <p:cNvSpPr txBox="1"/>
+          <p:nvPr/>
+        </p:nvSpPr>
+        <p:spPr>
+          <a:xfrm>
+            <a:off x="612648" y="3639312"/>
+            <a:ext cx="3429000" cy="859536"/>
+          </a:xfrm>
+          <a:prstGeom prst="roundRect">
+            <a:avLst>
+              <a:gd name="adj" fmla="val 5319"/>
+            </a:avLst>
+          </a:prstGeom>
+          <a:solidFill>
+            <a:srgbClr val="F1F5F9"/>
+          </a:solidFill>
+          <a:ln/>
+        </p:spPr>
+        <p:txBody>
+          <a:bodyPr wrap="square" lIns="91440" tIns="0" rIns="91440" bIns="0" rtlCol="0" anchor="ctr"/>
+          <a:lstStyle/>
+          <a:p>
+            <a:pPr algn="l" indent="0" marL="0">
+              <a:lnSpc>
+                <a:spcPct val="95000"/>
+              </a:lnSpc>
+              <a:spcAft>
+                <a:spcPts val="100"/>
+              </a:spcAft>
+              <a:buNone/>
+            </a:pPr>
+            <a:r>
+              <a:rPr lang="en-US" sz="780" b="1" dirty="0">
+                <a:solidFill>
+                  <a:srgbClr val="267D86"/>
+                </a:solidFill>
+                <a:latin typeface="Noto Sans KR" pitchFamily="34" charset="0"/>
+                <a:ea typeface="Noto Sans KR" pitchFamily="34" charset="-122"/>
+                <a:cs typeface="Noto Sans KR" pitchFamily="34" charset="-120"/>
+              </a:rPr>
+              <a:t>H3  </a:t>
+            </a:r>
+            <a:pPr algn="l" indent="0" marL="0">
+              <a:lnSpc>
+                <a:spcPct val="95000"/>
+              </a:lnSpc>
+              <a:spcAft>
+                <a:spcPts val="100"/>
+              </a:spcAft>
+              <a:buNone/>
+            </a:pPr>
+            <a:r>
+              <a:rPr lang="en-US" sz="780" b="1" dirty="0">
+                <a:solidFill>
+                  <a:srgbClr val="182F48"/>
+                </a:solidFill>
+                <a:latin typeface="Noto Sans KR" pitchFamily="34" charset="0"/>
+                <a:ea typeface="Noto Sans KR" pitchFamily="34" charset="-122"/>
+                <a:cs typeface="Noto Sans KR" pitchFamily="34" charset="-120"/>
+              </a:rPr>
+              <a:t>기존 코엑스 · 킨텍스 아웃도어 행사로 충분할 것</a:t>
+            </a:r>
+            <a:endParaRPr lang="en-US" sz="780" dirty="0"/>
+          </a:p>
+          <a:p>
+            <a:pPr algn="l" indent="0" marL="0">
+              <a:lnSpc>
+                <a:spcPct val="95000"/>
+              </a:lnSpc>
+              <a:spcAft>
+                <a:spcPts val="100"/>
+              </a:spcAft>
+              <a:buNone/>
+            </a:pPr>
+            <a:r>
+              <a:rPr lang="en-US" sz="780" b="1" dirty="0">
+                <a:solidFill>
+                  <a:srgbClr val="C2410C"/>
+                </a:solidFill>
+                <a:latin typeface="Noto Sans KR" pitchFamily="34" charset="0"/>
+                <a:ea typeface="Noto Sans KR" pitchFamily="34" charset="-122"/>
+                <a:cs typeface="Noto Sans KR" pitchFamily="34" charset="-120"/>
+              </a:rPr>
+              <a:t>기각  </a:t>
+            </a:r>
+            <a:pPr algn="l" indent="0" marL="0">
+              <a:lnSpc>
+                <a:spcPct val="95000"/>
+              </a:lnSpc>
+              <a:spcAft>
+                <a:spcPts val="100"/>
+              </a:spcAft>
+              <a:buNone/>
+            </a:pPr>
+            <a:r>
+              <a:rPr lang="en-US" sz="780" dirty="0">
+                <a:solidFill>
+                  <a:srgbClr val="334155"/>
+                </a:solidFill>
+                <a:latin typeface="Noto Sans KR" pitchFamily="34" charset="0"/>
+                <a:ea typeface="Noto Sans KR" pitchFamily="34" charset="-122"/>
+                <a:cs typeface="Noto Sans KR" pitchFamily="34" charset="-120"/>
+              </a:rPr>
+              <a:t>"고객의 니즈가 다르기 때문에 저희는 참여를 안 하고 있습니다"</a:t>
+            </a:r>
+            <a:endParaRPr lang="en-US" sz="780" dirty="0"/>
+          </a:p>
+        </p:txBody>
+      </p:sp>
+      <p:sp>
+        <p:nvSpPr>
+          <p:cNvPr id="13" name="가정 H4"/>
+          <p:cNvSpPr txBox="1"/>
+          <p:nvPr/>
+        </p:nvSpPr>
+        <p:spPr>
+          <a:xfrm>
+            <a:off x="612648" y="4581144"/>
+            <a:ext cx="3429000" cy="859536"/>
+          </a:xfrm>
+          <a:prstGeom prst="roundRect">
+            <a:avLst>
+              <a:gd name="adj" fmla="val 5319"/>
+            </a:avLst>
+          </a:prstGeom>
+          <a:solidFill>
+            <a:srgbClr val="F1F5F9"/>
+          </a:solidFill>
+          <a:ln/>
+        </p:spPr>
+        <p:txBody>
+          <a:bodyPr wrap="square" lIns="91440" tIns="0" rIns="91440" bIns="0" rtlCol="0" anchor="ctr"/>
+          <a:lstStyle/>
+          <a:p>
+            <a:pPr algn="l" indent="0" marL="0">
+              <a:lnSpc>
+                <a:spcPct val="95000"/>
+              </a:lnSpc>
+              <a:spcAft>
+                <a:spcPts val="100"/>
+              </a:spcAft>
+              <a:buNone/>
+            </a:pPr>
+            <a:r>
+              <a:rPr lang="en-US" sz="780" b="1" dirty="0">
+                <a:solidFill>
+                  <a:srgbClr val="267D86"/>
+                </a:solidFill>
+                <a:latin typeface="Noto Sans KR" pitchFamily="34" charset="0"/>
+                <a:ea typeface="Noto Sans KR" pitchFamily="34" charset="-122"/>
+                <a:cs typeface="Noto Sans KR" pitchFamily="34" charset="-120"/>
+              </a:rPr>
+              <a:t>H4  </a:t>
+            </a:r>
+            <a:pPr algn="l" indent="0" marL="0">
+              <a:lnSpc>
+                <a:spcPct val="95000"/>
+              </a:lnSpc>
+              <a:spcAft>
+                <a:spcPts val="100"/>
+              </a:spcAft>
+              <a:buNone/>
+            </a:pPr>
+            <a:r>
+              <a:rPr lang="en-US" sz="780" b="1" dirty="0">
+                <a:solidFill>
+                  <a:srgbClr val="182F48"/>
+                </a:solidFill>
+                <a:latin typeface="Noto Sans KR" pitchFamily="34" charset="0"/>
+                <a:ea typeface="Noto Sans KR" pitchFamily="34" charset="-122"/>
+                <a:cs typeface="Noto Sans KR" pitchFamily="34" charset="-120"/>
+              </a:rPr>
+              <a:t>일반 소비자(B2C)는 주요 고객이 아닐 것</a:t>
+            </a:r>
+            <a:endParaRPr lang="en-US" sz="780" dirty="0"/>
+          </a:p>
+          <a:p>
+            <a:pPr algn="l" indent="0" marL="0">
+              <a:lnSpc>
+                <a:spcPct val="95000"/>
+              </a:lnSpc>
+              <a:spcAft>
+                <a:spcPts val="100"/>
+              </a:spcAft>
+              <a:buNone/>
+            </a:pPr>
+            <a:r>
+              <a:rPr lang="en-US" sz="780" b="1" dirty="0">
+                <a:solidFill>
+                  <a:srgbClr val="C2410C"/>
+                </a:solidFill>
+                <a:latin typeface="Noto Sans KR" pitchFamily="34" charset="0"/>
+                <a:ea typeface="Noto Sans KR" pitchFamily="34" charset="-122"/>
+                <a:cs typeface="Noto Sans KR" pitchFamily="34" charset="-120"/>
+              </a:rPr>
+              <a:t>기각  </a:t>
+            </a:r>
+            <a:pPr algn="l" indent="0" marL="0">
+              <a:lnSpc>
+                <a:spcPct val="95000"/>
+              </a:lnSpc>
+              <a:spcAft>
+                <a:spcPts val="100"/>
+              </a:spcAft>
+              <a:buNone/>
+            </a:pPr>
+            <a:r>
+              <a:rPr lang="en-US" sz="780" dirty="0">
+                <a:solidFill>
+                  <a:srgbClr val="334155"/>
+                </a:solidFill>
+                <a:latin typeface="Noto Sans KR" pitchFamily="34" charset="0"/>
+                <a:ea typeface="Noto Sans KR" pitchFamily="34" charset="-122"/>
+                <a:cs typeface="Noto Sans KR" pitchFamily="34" charset="-120"/>
+              </a:rPr>
+              <a:t>B2C 매출 비중이 약 30%라 일반 고객을 매우 중요하게 생각한다.</a:t>
+            </a:r>
+            <a:endParaRPr lang="en-US" sz="780" dirty="0"/>
+          </a:p>
+        </p:txBody>
+      </p:sp>
+      <p:sp>
+        <p:nvSpPr>
+          <p:cNvPr id="14" name="대상 선정 이유"/>
+          <p:cNvSpPr txBox="1"/>
+          <p:nvPr/>
+        </p:nvSpPr>
+        <p:spPr>
+          <a:xfrm>
+            <a:off x="612648" y="5522976"/>
+            <a:ext cx="3429000" cy="749808"/>
+          </a:xfrm>
+          <a:prstGeom prst="roundRect">
+            <a:avLst>
+              <a:gd name="adj" fmla="val 6098"/>
+            </a:avLst>
+          </a:prstGeom>
+          <a:solidFill>
+            <a:srgbClr val="FFFFFF"/>
+          </a:solidFill>
+          <a:ln w="9525">
+            <a:solidFill>
+              <a:srgbClr val="CBD5E1"/>
+            </a:solidFill>
+            <a:prstDash val="solid"/>
+          </a:ln>
+        </p:spPr>
+        <p:txBody>
+          <a:bodyPr wrap="square" lIns="91440" tIns="0" rIns="91440" bIns="0" rtlCol="0" anchor="ctr"/>
+          <a:lstStyle/>
+          <a:p>
+            <a:pPr algn="l" indent="0" marL="0">
+              <a:lnSpc>
+                <a:spcPct val="95000"/>
+              </a:lnSpc>
+              <a:spcAft>
+                <a:spcPts val="200"/>
+              </a:spcAft>
+              <a:buNone/>
+            </a:pPr>
+            <a:r>
+              <a:rPr lang="en-US" sz="780" b="1" dirty="0">
+                <a:solidFill>
+                  <a:srgbClr val="267D86"/>
+                </a:solidFill>
+                <a:latin typeface="Noto Sans KR" pitchFamily="34" charset="0"/>
+                <a:ea typeface="Noto Sans KR" pitchFamily="34" charset="-122"/>
+                <a:cs typeface="Noto Sans KR" pitchFamily="34" charset="-120"/>
+              </a:rPr>
+              <a:t>왜 이 사람인가</a:t>
+            </a:r>
+            <a:endParaRPr lang="en-US" sz="780" dirty="0"/>
+          </a:p>
+          <a:p>
+            <a:pPr algn="l" indent="0" marL="0">
+              <a:lnSpc>
+                <a:spcPct val="95000"/>
+              </a:lnSpc>
+              <a:spcAft>
+                <a:spcPts val="200"/>
+              </a:spcAft>
+              <a:buNone/>
+            </a:pPr>
+            <a:r>
+              <a:rPr lang="en-US" sz="780" dirty="0">
+                <a:solidFill>
+                  <a:srgbClr val="334155"/>
+                </a:solidFill>
+                <a:latin typeface="Noto Sans KR" pitchFamily="34" charset="0"/>
+                <a:ea typeface="Noto Sans KR" pitchFamily="34" charset="-122"/>
+                <a:cs typeface="Noto Sans KR" pitchFamily="34" charset="-120"/>
+              </a:rPr>
+              <a:t>해외 프리미엄(마무트)과 K-브랜드(제로그램)를 함께 유통한다.</a:t>
+            </a:r>
+            <a:endParaRPr lang="en-US" sz="780" dirty="0"/>
+          </a:p>
+          <a:p>
+            <a:pPr algn="l" indent="0" marL="0">
+              <a:lnSpc>
+                <a:spcPct val="95000"/>
+              </a:lnSpc>
+              <a:spcAft>
+                <a:spcPts val="200"/>
+              </a:spcAft>
+              <a:buNone/>
+            </a:pPr>
+            <a:r>
+              <a:rPr lang="en-US" sz="780" dirty="0">
+                <a:solidFill>
+                  <a:srgbClr val="334155"/>
+                </a:solidFill>
+                <a:latin typeface="Noto Sans KR" pitchFamily="34" charset="0"/>
+                <a:ea typeface="Noto Sans KR" pitchFamily="34" charset="-122"/>
+                <a:cs typeface="Noto Sans KR" pitchFamily="34" charset="-120"/>
+              </a:rPr>
+              <a:t>→ E5 해외 앵커와 E3 신진, 두 참가업체 그룹의 시각을 한 번에 들었다.</a:t>
+            </a:r>
+            <a:endParaRPr lang="en-US" sz="780" dirty="0"/>
+          </a:p>
+        </p:txBody>
+      </p:sp>
       <p:graphicFrame>
         <p:nvGraphicFramePr>
-          <p:cNvPr id="9" name="질문 답변표 2"/>
+          <p:cNvPr id="9" name="질문 답변 요지"/>
           <p:cNvGraphicFramePr>
             <a:graphicFrameLocks noGrp="1"/>
           </p:cNvGraphicFramePr>
@@ -32772,76 +33855,18 @@
           </p:nvPr>
         </p:nvGraphicFramePr>
         <p:xfrm>
-          <a:off x="612648" y="1481328"/>
-          <a:ext cx="10963656" cy="914400"/>
+          <a:off x="4178808" y="1755648"/>
+          <a:ext cx="3886200" cy="914400"/>
         </p:xfrm>
         <a:graphic>
           <a:graphicData uri="http://schemas.openxmlformats.org/drawingml/2006/table">
             <a:tbl>
               <a:tblPr/>
               <a:tblGrid>
-                <a:gridCol w="457200"/>
-                <a:gridCol w="2834640"/>
-                <a:gridCol w="7671816"/>
+                <a:gridCol w="932688"/>
+                <a:gridCol w="2953512"/>
               </a:tblGrid>
-              <a:tr h="242984">
-                <a:tc>
-                  <a:txBody>
-                    <a:bodyPr/>
-                    <a:lstStyle/>
-                    <a:p>
-                      <a:pPr algn="l" indent="0" marL="0">
-                        <a:buNone/>
-                      </a:pPr>
-                      <a:endParaRPr lang="en-US" sz="850" dirty="0">
-                        <a:latin typeface="Noto Sans KR" charset="0"/>
-                        <a:ea typeface="Noto Sans KR" charset="0"/>
-                        <a:cs typeface="Noto Sans KR" charset="0"/>
-                      </a:endParaRPr>
-                    </a:p>
-                  </a:txBody>
-                  <a:tcPr marL="76200" marR="76200" marT="38100" marB="38100" anchor="ctr">
-                    <a:lnL w="6350" cap="flat" cmpd="sng" algn="ctr">
-                      <a:solidFill>
-                        <a:srgbClr val="CBD5E1"/>
-                      </a:solidFill>
-                      <a:prstDash val="solid"/>
-                      <a:round/>
-                      <a:headEnd type="none" w="med" len="med"/>
-                      <a:tailEnd type="none" w="med" len="med"/>
-                    </a:lnL>
-                    <a:lnR w="6350" cap="flat" cmpd="sng" algn="ctr">
-                      <a:solidFill>
-                        <a:srgbClr val="CBD5E1"/>
-                      </a:solidFill>
-                      <a:prstDash val="solid"/>
-                      <a:round/>
-                      <a:headEnd type="none" w="med" len="med"/>
-                      <a:tailEnd type="none" w="med" len="med"/>
-                    </a:lnR>
-                    <a:lnT w="6350" cap="flat" cmpd="sng" algn="ctr">
-                      <a:solidFill>
-                        <a:srgbClr val="CBD5E1"/>
-                      </a:solidFill>
-                      <a:prstDash val="solid"/>
-                      <a:round/>
-                      <a:headEnd type="none" w="med" len="med"/>
-                      <a:tailEnd type="none" w="med" len="med"/>
-                    </a:lnT>
-                    <a:lnB w="6350" cap="flat" cmpd="sng" algn="ctr">
-                      <a:solidFill>
-                        <a:srgbClr val="CBD5E1"/>
-                      </a:solidFill>
-                      <a:prstDash val="solid"/>
-                      <a:round/>
-                      <a:headEnd type="none" w="med" len="med"/>
-                      <a:tailEnd type="none" w="med" len="med"/>
-                    </a:lnB>
-                    <a:solidFill>
-                      <a:srgbClr val="182F48"/>
-                    </a:solidFill>
-                  </a:tcPr>
-                </a:tc>
+              <a:tr h="338328">
                 <a:tc>
                   <a:txBody>
                     <a:bodyPr/>
@@ -32851,162 +33876,24 @@
                         <a:buNone/>
                       </a:pPr>
                       <a:r>
-                        <a:rPr lang="en-US" sz="850" b="1" dirty="0">
+                        <a:rPr lang="en-US" sz="780" b="1" dirty="0">
                           <a:solidFill>
-                            <a:srgbClr val="FFFFFF"/>
+                            <a:srgbClr val="182F48"/>
                           </a:solidFill>
                           <a:latin typeface="Noto Sans KR" pitchFamily="34" charset="0"/>
                           <a:ea typeface="Noto Sans KR" pitchFamily="34" charset="-122"/>
                           <a:cs typeface="Noto Sans KR" pitchFamily="34" charset="-120"/>
                         </a:rPr>
-                        <a:t>질문</a:t>
+                        <a:t>Q1 고객층</a:t>
                       </a:r>
-                      <a:endParaRPr lang="en-US" sz="850" dirty="0">
+                      <a:endParaRPr lang="en-US" sz="780" dirty="0">
                         <a:latin typeface="Noto Sans KR" charset="0"/>
                         <a:ea typeface="Noto Sans KR" charset="0"/>
                         <a:cs typeface="Noto Sans KR" charset="0"/>
                       </a:endParaRPr>
                     </a:p>
                   </a:txBody>
-                  <a:tcPr marL="76200" marR="76200" marT="38100" marB="38100" anchor="ctr">
-                    <a:lnL w="6350" cap="flat" cmpd="sng" algn="ctr">
-                      <a:solidFill>
-                        <a:srgbClr val="CBD5E1"/>
-                      </a:solidFill>
-                      <a:prstDash val="solid"/>
-                      <a:round/>
-                      <a:headEnd type="none" w="med" len="med"/>
-                      <a:tailEnd type="none" w="med" len="med"/>
-                    </a:lnL>
-                    <a:lnR w="6350" cap="flat" cmpd="sng" algn="ctr">
-                      <a:solidFill>
-                        <a:srgbClr val="CBD5E1"/>
-                      </a:solidFill>
-                      <a:prstDash val="solid"/>
-                      <a:round/>
-                      <a:headEnd type="none" w="med" len="med"/>
-                      <a:tailEnd type="none" w="med" len="med"/>
-                    </a:lnR>
-                    <a:lnT w="6350" cap="flat" cmpd="sng" algn="ctr">
-                      <a:solidFill>
-                        <a:srgbClr val="CBD5E1"/>
-                      </a:solidFill>
-                      <a:prstDash val="solid"/>
-                      <a:round/>
-                      <a:headEnd type="none" w="med" len="med"/>
-                      <a:tailEnd type="none" w="med" len="med"/>
-                    </a:lnT>
-                    <a:lnB w="6350" cap="flat" cmpd="sng" algn="ctr">
-                      <a:solidFill>
-                        <a:srgbClr val="CBD5E1"/>
-                      </a:solidFill>
-                      <a:prstDash val="solid"/>
-                      <a:round/>
-                      <a:headEnd type="none" w="med" len="med"/>
-                      <a:tailEnd type="none" w="med" len="med"/>
-                    </a:lnB>
-                    <a:solidFill>
-                      <a:srgbClr val="182F48"/>
-                    </a:solidFill>
-                  </a:tcPr>
-                </a:tc>
-                <a:tc>
-                  <a:txBody>
-                    <a:bodyPr/>
-                    <a:lstStyle/>
-                    <a:p>
-                      <a:pPr algn="l" indent="0" marL="0">
-                        <a:buNone/>
-                      </a:pPr>
-                      <a:r>
-                        <a:rPr lang="en-US" sz="850" b="1" dirty="0">
-                          <a:solidFill>
-                            <a:srgbClr val="FFFFFF"/>
-                          </a:solidFill>
-                          <a:latin typeface="Noto Sans KR" pitchFamily="34" charset="0"/>
-                          <a:ea typeface="Noto Sans KR" pitchFamily="34" charset="-122"/>
-                          <a:cs typeface="Noto Sans KR" pitchFamily="34" charset="-120"/>
-                        </a:rPr>
-                        <a:t>답변 (녹취 발췌)</a:t>
-                      </a:r>
-                      <a:endParaRPr lang="en-US" sz="850" dirty="0">
-                        <a:latin typeface="Noto Sans KR" charset="0"/>
-                        <a:ea typeface="Noto Sans KR" charset="0"/>
-                        <a:cs typeface="Noto Sans KR" charset="0"/>
-                      </a:endParaRPr>
-                    </a:p>
-                  </a:txBody>
-                  <a:tcPr marL="76200" marR="76200" marT="38100" marB="38100" anchor="ctr">
-                    <a:lnL w="6350" cap="flat" cmpd="sng" algn="ctr">
-                      <a:solidFill>
-                        <a:srgbClr val="CBD5E1"/>
-                      </a:solidFill>
-                      <a:prstDash val="solid"/>
-                      <a:round/>
-                      <a:headEnd type="none" w="med" len="med"/>
-                      <a:tailEnd type="none" w="med" len="med"/>
-                    </a:lnL>
-                    <a:lnR w="6350" cap="flat" cmpd="sng" algn="ctr">
-                      <a:solidFill>
-                        <a:srgbClr val="CBD5E1"/>
-                      </a:solidFill>
-                      <a:prstDash val="solid"/>
-                      <a:round/>
-                      <a:headEnd type="none" w="med" len="med"/>
-                      <a:tailEnd type="none" w="med" len="med"/>
-                    </a:lnR>
-                    <a:lnT w="6350" cap="flat" cmpd="sng" algn="ctr">
-                      <a:solidFill>
-                        <a:srgbClr val="CBD5E1"/>
-                      </a:solidFill>
-                      <a:prstDash val="solid"/>
-                      <a:round/>
-                      <a:headEnd type="none" w="med" len="med"/>
-                      <a:tailEnd type="none" w="med" len="med"/>
-                    </a:lnT>
-                    <a:lnB w="6350" cap="flat" cmpd="sng" algn="ctr">
-                      <a:solidFill>
-                        <a:srgbClr val="CBD5E1"/>
-                      </a:solidFill>
-                      <a:prstDash val="solid"/>
-                      <a:round/>
-                      <a:headEnd type="none" w="med" len="med"/>
-                      <a:tailEnd type="none" w="med" len="med"/>
-                    </a:lnB>
-                    <a:solidFill>
-                      <a:srgbClr val="182F48"/>
-                    </a:solidFill>
-                  </a:tcPr>
-                </a:tc>
-              </a:tr>
-              <a:tr h="1430952">
-                <a:tc>
-                  <a:txBody>
-                    <a:bodyPr/>
-                    <a:lstStyle/>
-                    <a:p>
-                      <a:pPr algn="ctr" indent="0" marL="0">
-                        <a:buNone/>
-                      </a:pPr>
-                      <a:r>
-                        <a:rPr lang="en-US" sz="850" b="1" dirty="0">
-                          <a:solidFill>
-                            <a:srgbClr val="267D86"/>
-                          </a:solidFill>
-                          <a:latin typeface="Noto Sans KR" pitchFamily="34" charset="0"/>
-                          <a:ea typeface="Noto Sans KR" pitchFamily="34" charset="-122"/>
-                          <a:cs typeface="Noto Sans KR" pitchFamily="34" charset="-120"/>
-                        </a:rPr>
-                        <a:t>Q8</a:t>
-                      </a:r>
-                      <a:endParaRPr lang="en-US" sz="850" dirty="0">
-                        <a:latin typeface="Noto Sans KR" charset="0"/>
-                        <a:ea typeface="Noto Sans KR" charset="0"/>
-                        <a:cs typeface="Noto Sans KR" charset="0"/>
-                      </a:endParaRPr>
-                    </a:p>
-                  </a:txBody>
-                  <a:tcPr marL="76200" marR="76200" marT="38100" marB="38100" anchor="ctr">
+                  <a:tcPr marL="63500" marR="63500" marT="25400" marB="25400" anchor="ctr">
                     <a:lnL w="6350" cap="flat" cmpd="sng" algn="ctr">
                       <a:solidFill>
                         <a:srgbClr val="CBD5E1"/>
@@ -33054,7 +33941,74 @@
                         <a:buNone/>
                       </a:pPr>
                       <a:r>
-                        <a:rPr lang="en-US" sz="850" b="1" dirty="0">
+                        <a:rPr lang="en-US" sz="780" dirty="0">
+                          <a:solidFill>
+                            <a:srgbClr val="334155"/>
+                          </a:solidFill>
+                          <a:latin typeface="Noto Sans KR" pitchFamily="34" charset="0"/>
+                          <a:ea typeface="Noto Sans KR" pitchFamily="34" charset="-122"/>
+                          <a:cs typeface="Noto Sans KR" pitchFamily="34" charset="-120"/>
+                        </a:rPr>
+                        <a:t>일반 소비자와 기업(B2B) 모두에 판매한다.</a:t>
+                      </a:r>
+                      <a:endParaRPr lang="en-US" sz="780" dirty="0">
+                        <a:latin typeface="Noto Sans KR" charset="0"/>
+                        <a:ea typeface="Noto Sans KR" charset="0"/>
+                        <a:cs typeface="Noto Sans KR" charset="0"/>
+                      </a:endParaRPr>
+                    </a:p>
+                  </a:txBody>
+                  <a:tcPr marL="63500" marR="63500" marT="25400" marB="25400" anchor="ctr">
+                    <a:lnL w="6350" cap="flat" cmpd="sng" algn="ctr">
+                      <a:solidFill>
+                        <a:srgbClr val="CBD5E1"/>
+                      </a:solidFill>
+                      <a:prstDash val="solid"/>
+                      <a:round/>
+                      <a:headEnd type="none" w="med" len="med"/>
+                      <a:tailEnd type="none" w="med" len="med"/>
+                    </a:lnL>
+                    <a:lnR w="6350" cap="flat" cmpd="sng" algn="ctr">
+                      <a:solidFill>
+                        <a:srgbClr val="CBD5E1"/>
+                      </a:solidFill>
+                      <a:prstDash val="solid"/>
+                      <a:round/>
+                      <a:headEnd type="none" w="med" len="med"/>
+                      <a:tailEnd type="none" w="med" len="med"/>
+                    </a:lnR>
+                    <a:lnT w="6350" cap="flat" cmpd="sng" algn="ctr">
+                      <a:solidFill>
+                        <a:srgbClr val="CBD5E1"/>
+                      </a:solidFill>
+                      <a:prstDash val="solid"/>
+                      <a:round/>
+                      <a:headEnd type="none" w="med" len="med"/>
+                      <a:tailEnd type="none" w="med" len="med"/>
+                    </a:lnT>
+                    <a:lnB w="6350" cap="flat" cmpd="sng" algn="ctr">
+                      <a:solidFill>
+                        <a:srgbClr val="CBD5E1"/>
+                      </a:solidFill>
+                      <a:prstDash val="solid"/>
+                      <a:round/>
+                      <a:headEnd type="none" w="med" len="med"/>
+                      <a:tailEnd type="none" w="med" len="med"/>
+                    </a:lnB>
+                  </a:tcPr>
+                </a:tc>
+              </a:tr>
+              <a:tr h="338328">
+                <a:tc>
+                  <a:txBody>
+                    <a:bodyPr/>
+                    <a:lstStyle/>
+                    <a:p>
+                      <a:pPr algn="l" indent="0" marL="0">
+                        <a:buNone/>
+                      </a:pPr>
+                      <a:r>
+                        <a:rPr lang="en-US" sz="780" b="1" dirty="0">
                           <a:solidFill>
                             <a:srgbClr val="182F48"/>
                           </a:solidFill>
@@ -33062,37 +34016,16 @@
                           <a:ea typeface="Noto Sans KR" pitchFamily="34" charset="-122"/>
                           <a:cs typeface="Noto Sans KR" pitchFamily="34" charset="-120"/>
                         </a:rPr>
-                        <a:t>따로 하실 말씀 있으세요?</a:t>
+                        <a:t>Q2 B2C 비중</a:t>
                       </a:r>
-                      <a:endParaRPr lang="en-US" sz="850" dirty="0">
-                        <a:latin typeface="Noto Sans KR" charset="0"/>
-                        <a:ea typeface="Noto Sans KR" charset="0"/>
-                        <a:cs typeface="Noto Sans KR" charset="0"/>
-                      </a:endParaRPr>
-                    </a:p>
-                    <a:p>
-                      <a:pPr algn="l" indent="0" marL="0">
-                        <a:buNone/>
-                      </a:pPr>
-                      <a:r>
-                        <a:rPr lang="en-US" sz="850" b="1" dirty="0">
-                          <a:solidFill>
-                            <a:srgbClr val="182F48"/>
-                          </a:solidFill>
-                          <a:latin typeface="Noto Sans KR" pitchFamily="34" charset="0"/>
-                          <a:ea typeface="Noto Sans KR" pitchFamily="34" charset="-122"/>
-                          <a:cs typeface="Noto Sans KR" pitchFamily="34" charset="-120"/>
-                        </a:rPr>
-                        <a:t>(행사 참여 시 기대 효과)</a:t>
-                      </a:r>
-                      <a:endParaRPr lang="en-US" sz="850" dirty="0">
+                      <a:endParaRPr lang="en-US" sz="780" dirty="0">
                         <a:latin typeface="Noto Sans KR" charset="0"/>
                         <a:ea typeface="Noto Sans KR" charset="0"/>
                         <a:cs typeface="Noto Sans KR" charset="0"/>
                       </a:endParaRPr>
                     </a:p>
                   </a:txBody>
-                  <a:tcPr marL="76200" marR="76200" marT="38100" marB="38100" anchor="ctr">
+                  <a:tcPr marL="63500" marR="63500" marT="25400" marB="25400" anchor="ctr">
                     <a:lnL w="6350" cap="flat" cmpd="sng" algn="ctr">
                       <a:solidFill>
                         <a:srgbClr val="CBD5E1"/>
@@ -33140,7 +34073,7 @@
                         <a:buNone/>
                       </a:pPr>
                       <a:r>
-                        <a:rPr lang="en-US" sz="850" dirty="0">
+                        <a:rPr lang="en-US" sz="780" dirty="0">
                           <a:solidFill>
                             <a:srgbClr val="334155"/>
                           </a:solidFill>
@@ -33148,20 +34081,131 @@
                           <a:ea typeface="Noto Sans KR" pitchFamily="34" charset="-122"/>
                           <a:cs typeface="Noto Sans KR" pitchFamily="34" charset="-120"/>
                         </a:rPr>
-                        <a:t>만약에 행사에 참여하게 되면 기대할 수 있는 건</a:t>
+                        <a:t>일반인 판매 매출이 약 30%라 매우 중요하다.</a:t>
                       </a:r>
-                      <a:endParaRPr lang="en-US" sz="850" dirty="0">
+                      <a:endParaRPr lang="en-US" sz="780" dirty="0">
                         <a:latin typeface="Noto Sans KR" charset="0"/>
                         <a:ea typeface="Noto Sans KR" charset="0"/>
                         <a:cs typeface="Noto Sans KR" charset="0"/>
                       </a:endParaRPr>
                     </a:p>
+                  </a:txBody>
+                  <a:tcPr marL="63500" marR="63500" marT="25400" marB="25400" anchor="ctr">
+                    <a:lnL w="6350" cap="flat" cmpd="sng" algn="ctr">
+                      <a:solidFill>
+                        <a:srgbClr val="CBD5E1"/>
+                      </a:solidFill>
+                      <a:prstDash val="solid"/>
+                      <a:round/>
+                      <a:headEnd type="none" w="med" len="med"/>
+                      <a:tailEnd type="none" w="med" len="med"/>
+                    </a:lnL>
+                    <a:lnR w="6350" cap="flat" cmpd="sng" algn="ctr">
+                      <a:solidFill>
+                        <a:srgbClr val="CBD5E1"/>
+                      </a:solidFill>
+                      <a:prstDash val="solid"/>
+                      <a:round/>
+                      <a:headEnd type="none" w="med" len="med"/>
+                      <a:tailEnd type="none" w="med" len="med"/>
+                    </a:lnR>
+                    <a:lnT w="6350" cap="flat" cmpd="sng" algn="ctr">
+                      <a:solidFill>
+                        <a:srgbClr val="CBD5E1"/>
+                      </a:solidFill>
+                      <a:prstDash val="solid"/>
+                      <a:round/>
+                      <a:headEnd type="none" w="med" len="med"/>
+                      <a:tailEnd type="none" w="med" len="med"/>
+                    </a:lnT>
+                    <a:lnB w="6350" cap="flat" cmpd="sng" algn="ctr">
+                      <a:solidFill>
+                        <a:srgbClr val="CBD5E1"/>
+                      </a:solidFill>
+                      <a:prstDash val="solid"/>
+                      <a:round/>
+                      <a:headEnd type="none" w="med" len="med"/>
+                      <a:tailEnd type="none" w="med" len="med"/>
+                    </a:lnB>
+                  </a:tcPr>
+                </a:tc>
+              </a:tr>
+              <a:tr h="338328">
+                <a:tc>
+                  <a:txBody>
+                    <a:bodyPr/>
+                    <a:lstStyle/>
                     <a:p>
                       <a:pPr algn="l" indent="0" marL="0">
                         <a:buNone/>
                       </a:pPr>
                       <a:r>
-                        <a:rPr lang="en-US" sz="850" dirty="0">
+                        <a:rPr lang="en-US" sz="780" b="1" dirty="0">
+                          <a:solidFill>
+                            <a:srgbClr val="182F48"/>
+                          </a:solidFill>
+                          <a:latin typeface="Noto Sans KR" pitchFamily="34" charset="0"/>
+                          <a:ea typeface="Noto Sans KR" pitchFamily="34" charset="-122"/>
+                          <a:cs typeface="Noto Sans KR" pitchFamily="34" charset="-120"/>
+                        </a:rPr>
+                        <a:t>Q3 참여 조건</a:t>
+                      </a:r>
+                      <a:endParaRPr lang="en-US" sz="780" dirty="0">
+                        <a:latin typeface="Noto Sans KR" charset="0"/>
+                        <a:ea typeface="Noto Sans KR" charset="0"/>
+                        <a:cs typeface="Noto Sans KR" charset="0"/>
+                      </a:endParaRPr>
+                    </a:p>
+                  </a:txBody>
+                  <a:tcPr marL="63500" marR="63500" marT="25400" marB="25400" anchor="ctr">
+                    <a:lnL w="6350" cap="flat" cmpd="sng" algn="ctr">
+                      <a:solidFill>
+                        <a:srgbClr val="CBD5E1"/>
+                      </a:solidFill>
+                      <a:prstDash val="solid"/>
+                      <a:round/>
+                      <a:headEnd type="none" w="med" len="med"/>
+                      <a:tailEnd type="none" w="med" len="med"/>
+                    </a:lnL>
+                    <a:lnR w="6350" cap="flat" cmpd="sng" algn="ctr">
+                      <a:solidFill>
+                        <a:srgbClr val="CBD5E1"/>
+                      </a:solidFill>
+                      <a:prstDash val="solid"/>
+                      <a:round/>
+                      <a:headEnd type="none" w="med" len="med"/>
+                      <a:tailEnd type="none" w="med" len="med"/>
+                    </a:lnR>
+                    <a:lnT w="6350" cap="flat" cmpd="sng" algn="ctr">
+                      <a:solidFill>
+                        <a:srgbClr val="CBD5E1"/>
+                      </a:solidFill>
+                      <a:prstDash val="solid"/>
+                      <a:round/>
+                      <a:headEnd type="none" w="med" len="med"/>
+                      <a:tailEnd type="none" w="med" len="med"/>
+                    </a:lnT>
+                    <a:lnB w="6350" cap="flat" cmpd="sng" algn="ctr">
+                      <a:solidFill>
+                        <a:srgbClr val="CBD5E1"/>
+                      </a:solidFill>
+                      <a:prstDash val="solid"/>
+                      <a:round/>
+                      <a:headEnd type="none" w="med" len="med"/>
+                      <a:tailEnd type="none" w="med" len="med"/>
+                    </a:lnB>
+                  </a:tcPr>
+                </a:tc>
+                <a:tc>
+                  <a:txBody>
+                    <a:bodyPr/>
+                    <a:lstStyle/>
+                    <a:p>
+                      <a:pPr algn="l" indent="0" marL="0">
+                        <a:buNone/>
+                      </a:pPr>
+                      <a:r>
+                        <a:rPr lang="en-US" sz="780" dirty="0">
                           <a:solidFill>
                             <a:srgbClr val="334155"/>
                           </a:solidFill>
@@ -33169,20 +34213,131 @@
                           <a:ea typeface="Noto Sans KR" pitchFamily="34" charset="-122"/>
                           <a:cs typeface="Noto Sans KR" pitchFamily="34" charset="-120"/>
                         </a:rPr>
-                        <a:t>바이어, 제휴처 만남, 브랜드 홍보, 현장 판매, 체험 고객 확보, 사용자 반응 데이터 수집, 요 정도일 것 같습니다.</a:t>
+                        <a:t>트레킹 · 백패킹 상품을 아는 고객의 수와 관심도</a:t>
                       </a:r>
-                      <a:endParaRPr lang="en-US" sz="850" dirty="0">
+                      <a:endParaRPr lang="en-US" sz="780" dirty="0">
                         <a:latin typeface="Noto Sans KR" charset="0"/>
                         <a:ea typeface="Noto Sans KR" charset="0"/>
                         <a:cs typeface="Noto Sans KR" charset="0"/>
                       </a:endParaRPr>
                     </a:p>
+                  </a:txBody>
+                  <a:tcPr marL="63500" marR="63500" marT="25400" marB="25400" anchor="ctr">
+                    <a:lnL w="6350" cap="flat" cmpd="sng" algn="ctr">
+                      <a:solidFill>
+                        <a:srgbClr val="CBD5E1"/>
+                      </a:solidFill>
+                      <a:prstDash val="solid"/>
+                      <a:round/>
+                      <a:headEnd type="none" w="med" len="med"/>
+                      <a:tailEnd type="none" w="med" len="med"/>
+                    </a:lnL>
+                    <a:lnR w="6350" cap="flat" cmpd="sng" algn="ctr">
+                      <a:solidFill>
+                        <a:srgbClr val="CBD5E1"/>
+                      </a:solidFill>
+                      <a:prstDash val="solid"/>
+                      <a:round/>
+                      <a:headEnd type="none" w="med" len="med"/>
+                      <a:tailEnd type="none" w="med" len="med"/>
+                    </a:lnR>
+                    <a:lnT w="6350" cap="flat" cmpd="sng" algn="ctr">
+                      <a:solidFill>
+                        <a:srgbClr val="CBD5E1"/>
+                      </a:solidFill>
+                      <a:prstDash val="solid"/>
+                      <a:round/>
+                      <a:headEnd type="none" w="med" len="med"/>
+                      <a:tailEnd type="none" w="med" len="med"/>
+                    </a:lnT>
+                    <a:lnB w="6350" cap="flat" cmpd="sng" algn="ctr">
+                      <a:solidFill>
+                        <a:srgbClr val="CBD5E1"/>
+                      </a:solidFill>
+                      <a:prstDash val="solid"/>
+                      <a:round/>
+                      <a:headEnd type="none" w="med" len="med"/>
+                      <a:tailEnd type="none" w="med" len="med"/>
+                    </a:lnB>
+                  </a:tcPr>
+                </a:tc>
+              </a:tr>
+              <a:tr h="338328">
+                <a:tc>
+                  <a:txBody>
+                    <a:bodyPr/>
+                    <a:lstStyle/>
                     <a:p>
                       <a:pPr algn="l" indent="0" marL="0">
                         <a:buNone/>
                       </a:pPr>
                       <a:r>
-                        <a:rPr lang="en-US" sz="850" dirty="0">
+                        <a:rPr lang="en-US" sz="780" b="1" dirty="0">
+                          <a:solidFill>
+                            <a:srgbClr val="182F48"/>
+                          </a:solidFill>
+                          <a:latin typeface="Noto Sans KR" pitchFamily="34" charset="0"/>
+                          <a:ea typeface="Noto Sans KR" pitchFamily="34" charset="-122"/>
+                          <a:cs typeface="Noto Sans KR" pitchFamily="34" charset="-120"/>
+                        </a:rPr>
+                        <a:t>Q4 부스비</a:t>
+                      </a:r>
+                      <a:endParaRPr lang="en-US" sz="780" dirty="0">
+                        <a:latin typeface="Noto Sans KR" charset="0"/>
+                        <a:ea typeface="Noto Sans KR" charset="0"/>
+                        <a:cs typeface="Noto Sans KR" charset="0"/>
+                      </a:endParaRPr>
+                    </a:p>
+                  </a:txBody>
+                  <a:tcPr marL="63500" marR="63500" marT="25400" marB="25400" anchor="ctr">
+                    <a:lnL w="6350" cap="flat" cmpd="sng" algn="ctr">
+                      <a:solidFill>
+                        <a:srgbClr val="CBD5E1"/>
+                      </a:solidFill>
+                      <a:prstDash val="solid"/>
+                      <a:round/>
+                      <a:headEnd type="none" w="med" len="med"/>
+                      <a:tailEnd type="none" w="med" len="med"/>
+                    </a:lnL>
+                    <a:lnR w="6350" cap="flat" cmpd="sng" algn="ctr">
+                      <a:solidFill>
+                        <a:srgbClr val="CBD5E1"/>
+                      </a:solidFill>
+                      <a:prstDash val="solid"/>
+                      <a:round/>
+                      <a:headEnd type="none" w="med" len="med"/>
+                      <a:tailEnd type="none" w="med" len="med"/>
+                    </a:lnR>
+                    <a:lnT w="6350" cap="flat" cmpd="sng" algn="ctr">
+                      <a:solidFill>
+                        <a:srgbClr val="CBD5E1"/>
+                      </a:solidFill>
+                      <a:prstDash val="solid"/>
+                      <a:round/>
+                      <a:headEnd type="none" w="med" len="med"/>
+                      <a:tailEnd type="none" w="med" len="med"/>
+                    </a:lnT>
+                    <a:lnB w="6350" cap="flat" cmpd="sng" algn="ctr">
+                      <a:solidFill>
+                        <a:srgbClr val="CBD5E1"/>
+                      </a:solidFill>
+                      <a:prstDash val="solid"/>
+                      <a:round/>
+                      <a:headEnd type="none" w="med" len="med"/>
+                      <a:tailEnd type="none" w="med" len="med"/>
+                    </a:lnB>
+                  </a:tcPr>
+                </a:tc>
+                <a:tc>
+                  <a:txBody>
+                    <a:bodyPr/>
+                    <a:lstStyle/>
+                    <a:p>
+                      <a:pPr algn="l" indent="0" marL="0">
+                        <a:buNone/>
+                      </a:pPr>
+                      <a:r>
+                        <a:rPr lang="en-US" sz="780" dirty="0">
                           <a:solidFill>
                             <a:srgbClr val="334155"/>
                           </a:solidFill>
@@ -33190,20 +34345,131 @@
                           <a:ea typeface="Noto Sans KR" pitchFamily="34" charset="-122"/>
                           <a:cs typeface="Noto Sans KR" pitchFamily="34" charset="-120"/>
                         </a:rPr>
-                        <a:t>사실 투자를 받는다는 것은 되게 위험한 것이기 때문에 투자 유치는 저희에겐 필요 없고.</a:t>
+                        <a:t>국내 10년 이상 · 해외 2년에 1회 · 2만~5만 달러</a:t>
                       </a:r>
-                      <a:endParaRPr lang="en-US" sz="850" dirty="0">
+                      <a:endParaRPr lang="en-US" sz="780" dirty="0">
                         <a:latin typeface="Noto Sans KR" charset="0"/>
                         <a:ea typeface="Noto Sans KR" charset="0"/>
                         <a:cs typeface="Noto Sans KR" charset="0"/>
                       </a:endParaRPr>
                     </a:p>
+                  </a:txBody>
+                  <a:tcPr marL="63500" marR="63500" marT="25400" marB="25400" anchor="ctr">
+                    <a:lnL w="6350" cap="flat" cmpd="sng" algn="ctr">
+                      <a:solidFill>
+                        <a:srgbClr val="CBD5E1"/>
+                      </a:solidFill>
+                      <a:prstDash val="solid"/>
+                      <a:round/>
+                      <a:headEnd type="none" w="med" len="med"/>
+                      <a:tailEnd type="none" w="med" len="med"/>
+                    </a:lnL>
+                    <a:lnR w="6350" cap="flat" cmpd="sng" algn="ctr">
+                      <a:solidFill>
+                        <a:srgbClr val="CBD5E1"/>
+                      </a:solidFill>
+                      <a:prstDash val="solid"/>
+                      <a:round/>
+                      <a:headEnd type="none" w="med" len="med"/>
+                      <a:tailEnd type="none" w="med" len="med"/>
+                    </a:lnR>
+                    <a:lnT w="6350" cap="flat" cmpd="sng" algn="ctr">
+                      <a:solidFill>
+                        <a:srgbClr val="CBD5E1"/>
+                      </a:solidFill>
+                      <a:prstDash val="solid"/>
+                      <a:round/>
+                      <a:headEnd type="none" w="med" len="med"/>
+                      <a:tailEnd type="none" w="med" len="med"/>
+                    </a:lnT>
+                    <a:lnB w="6350" cap="flat" cmpd="sng" algn="ctr">
+                      <a:solidFill>
+                        <a:srgbClr val="CBD5E1"/>
+                      </a:solidFill>
+                      <a:prstDash val="solid"/>
+                      <a:round/>
+                      <a:headEnd type="none" w="med" len="med"/>
+                      <a:tailEnd type="none" w="med" len="med"/>
+                    </a:lnB>
+                  </a:tcPr>
+                </a:tc>
+              </a:tr>
+              <a:tr h="338328">
+                <a:tc>
+                  <a:txBody>
+                    <a:bodyPr/>
+                    <a:lstStyle/>
                     <a:p>
                       <a:pPr algn="l" indent="0" marL="0">
                         <a:buNone/>
                       </a:pPr>
                       <a:r>
-                        <a:rPr lang="en-US" sz="850" dirty="0">
+                        <a:rPr lang="en-US" sz="780" b="1" dirty="0">
+                          <a:solidFill>
+                            <a:srgbClr val="182F48"/>
+                          </a:solidFill>
+                          <a:latin typeface="Noto Sans KR" pitchFamily="34" charset="0"/>
+                          <a:ea typeface="Noto Sans KR" pitchFamily="34" charset="-122"/>
+                          <a:cs typeface="Noto Sans KR" pitchFamily="34" charset="-120"/>
+                        </a:rPr>
+                        <a:t>Q5 현장 시연</a:t>
+                      </a:r>
+                      <a:endParaRPr lang="en-US" sz="780" dirty="0">
+                        <a:latin typeface="Noto Sans KR" charset="0"/>
+                        <a:ea typeface="Noto Sans KR" charset="0"/>
+                        <a:cs typeface="Noto Sans KR" charset="0"/>
+                      </a:endParaRPr>
+                    </a:p>
+                  </a:txBody>
+                  <a:tcPr marL="63500" marR="63500" marT="25400" marB="25400" anchor="ctr">
+                    <a:lnL w="6350" cap="flat" cmpd="sng" algn="ctr">
+                      <a:solidFill>
+                        <a:srgbClr val="CBD5E1"/>
+                      </a:solidFill>
+                      <a:prstDash val="solid"/>
+                      <a:round/>
+                      <a:headEnd type="none" w="med" len="med"/>
+                      <a:tailEnd type="none" w="med" len="med"/>
+                    </a:lnL>
+                    <a:lnR w="6350" cap="flat" cmpd="sng" algn="ctr">
+                      <a:solidFill>
+                        <a:srgbClr val="CBD5E1"/>
+                      </a:solidFill>
+                      <a:prstDash val="solid"/>
+                      <a:round/>
+                      <a:headEnd type="none" w="med" len="med"/>
+                      <a:tailEnd type="none" w="med" len="med"/>
+                    </a:lnR>
+                    <a:lnT w="6350" cap="flat" cmpd="sng" algn="ctr">
+                      <a:solidFill>
+                        <a:srgbClr val="CBD5E1"/>
+                      </a:solidFill>
+                      <a:prstDash val="solid"/>
+                      <a:round/>
+                      <a:headEnd type="none" w="med" len="med"/>
+                      <a:tailEnd type="none" w="med" len="med"/>
+                    </a:lnT>
+                    <a:lnB w="6350" cap="flat" cmpd="sng" algn="ctr">
+                      <a:solidFill>
+                        <a:srgbClr val="CBD5E1"/>
+                      </a:solidFill>
+                      <a:prstDash val="solid"/>
+                      <a:round/>
+                      <a:headEnd type="none" w="med" len="med"/>
+                      <a:tailEnd type="none" w="med" len="med"/>
+                    </a:lnB>
+                  </a:tcPr>
+                </a:tc>
+                <a:tc>
+                  <a:txBody>
+                    <a:bodyPr/>
+                    <a:lstStyle/>
+                    <a:p>
+                      <a:pPr algn="l" indent="0" marL="0">
+                        <a:buNone/>
+                      </a:pPr>
+                      <a:r>
+                        <a:rPr lang="en-US" sz="780" dirty="0">
                           <a:solidFill>
                             <a:srgbClr val="334155"/>
                           </a:solidFill>
@@ -33211,20 +34477,131 @@
                           <a:ea typeface="Noto Sans KR" pitchFamily="34" charset="-122"/>
                           <a:cs typeface="Noto Sans KR" pitchFamily="34" charset="-120"/>
                         </a:rPr>
-                        <a:t>(…) 마무트라는 브랜드 자체가 우리나라의 많은 분들이 알고 계시는 아크테릭스보다 훨씬 고가의 의류 브랜드이기 때문에,</a:t>
+                        <a:t>고어텍스 방수용 샤워부스 · 냉기 차단용 얼음 바닥</a:t>
                       </a:r>
-                      <a:endParaRPr lang="en-US" sz="850" dirty="0">
+                      <a:endParaRPr lang="en-US" sz="780" dirty="0">
                         <a:latin typeface="Noto Sans KR" charset="0"/>
                         <a:ea typeface="Noto Sans KR" charset="0"/>
                         <a:cs typeface="Noto Sans KR" charset="0"/>
                       </a:endParaRPr>
                     </a:p>
+                  </a:txBody>
+                  <a:tcPr marL="63500" marR="63500" marT="25400" marB="25400" anchor="ctr">
+                    <a:lnL w="6350" cap="flat" cmpd="sng" algn="ctr">
+                      <a:solidFill>
+                        <a:srgbClr val="CBD5E1"/>
+                      </a:solidFill>
+                      <a:prstDash val="solid"/>
+                      <a:round/>
+                      <a:headEnd type="none" w="med" len="med"/>
+                      <a:tailEnd type="none" w="med" len="med"/>
+                    </a:lnL>
+                    <a:lnR w="6350" cap="flat" cmpd="sng" algn="ctr">
+                      <a:solidFill>
+                        <a:srgbClr val="CBD5E1"/>
+                      </a:solidFill>
+                      <a:prstDash val="solid"/>
+                      <a:round/>
+                      <a:headEnd type="none" w="med" len="med"/>
+                      <a:tailEnd type="none" w="med" len="med"/>
+                    </a:lnR>
+                    <a:lnT w="6350" cap="flat" cmpd="sng" algn="ctr">
+                      <a:solidFill>
+                        <a:srgbClr val="CBD5E1"/>
+                      </a:solidFill>
+                      <a:prstDash val="solid"/>
+                      <a:round/>
+                      <a:headEnd type="none" w="med" len="med"/>
+                      <a:tailEnd type="none" w="med" len="med"/>
+                    </a:lnT>
+                    <a:lnB w="6350" cap="flat" cmpd="sng" algn="ctr">
+                      <a:solidFill>
+                        <a:srgbClr val="CBD5E1"/>
+                      </a:solidFill>
+                      <a:prstDash val="solid"/>
+                      <a:round/>
+                      <a:headEnd type="none" w="med" len="med"/>
+                      <a:tailEnd type="none" w="med" len="med"/>
+                    </a:lnB>
+                  </a:tcPr>
+                </a:tc>
+              </a:tr>
+              <a:tr h="338328">
+                <a:tc>
+                  <a:txBody>
+                    <a:bodyPr/>
+                    <a:lstStyle/>
                     <a:p>
                       <a:pPr algn="l" indent="0" marL="0">
                         <a:buNone/>
                       </a:pPr>
                       <a:r>
-                        <a:rPr lang="en-US" sz="850" dirty="0">
+                        <a:rPr lang="en-US" sz="780" b="1" dirty="0">
+                          <a:solidFill>
+                            <a:srgbClr val="182F48"/>
+                          </a:solidFill>
+                          <a:latin typeface="Noto Sans KR" pitchFamily="34" charset="0"/>
+                          <a:ea typeface="Noto Sans KR" pitchFamily="34" charset="-122"/>
+                          <a:cs typeface="Noto Sans KR" pitchFamily="34" charset="-120"/>
+                        </a:rPr>
+                        <a:t>Q6 참여 장애</a:t>
+                      </a:r>
+                      <a:endParaRPr lang="en-US" sz="780" dirty="0">
+                        <a:latin typeface="Noto Sans KR" charset="0"/>
+                        <a:ea typeface="Noto Sans KR" charset="0"/>
+                        <a:cs typeface="Noto Sans KR" charset="0"/>
+                      </a:endParaRPr>
+                    </a:p>
+                  </a:txBody>
+                  <a:tcPr marL="63500" marR="63500" marT="25400" marB="25400" anchor="ctr">
+                    <a:lnL w="6350" cap="flat" cmpd="sng" algn="ctr">
+                      <a:solidFill>
+                        <a:srgbClr val="CBD5E1"/>
+                      </a:solidFill>
+                      <a:prstDash val="solid"/>
+                      <a:round/>
+                      <a:headEnd type="none" w="med" len="med"/>
+                      <a:tailEnd type="none" w="med" len="med"/>
+                    </a:lnL>
+                    <a:lnR w="6350" cap="flat" cmpd="sng" algn="ctr">
+                      <a:solidFill>
+                        <a:srgbClr val="CBD5E1"/>
+                      </a:solidFill>
+                      <a:prstDash val="solid"/>
+                      <a:round/>
+                      <a:headEnd type="none" w="med" len="med"/>
+                      <a:tailEnd type="none" w="med" len="med"/>
+                    </a:lnR>
+                    <a:lnT w="6350" cap="flat" cmpd="sng" algn="ctr">
+                      <a:solidFill>
+                        <a:srgbClr val="CBD5E1"/>
+                      </a:solidFill>
+                      <a:prstDash val="solid"/>
+                      <a:round/>
+                      <a:headEnd type="none" w="med" len="med"/>
+                      <a:tailEnd type="none" w="med" len="med"/>
+                    </a:lnT>
+                    <a:lnB w="6350" cap="flat" cmpd="sng" algn="ctr">
+                      <a:solidFill>
+                        <a:srgbClr val="CBD5E1"/>
+                      </a:solidFill>
+                      <a:prstDash val="solid"/>
+                      <a:round/>
+                      <a:headEnd type="none" w="med" len="med"/>
+                      <a:tailEnd type="none" w="med" len="med"/>
+                    </a:lnB>
+                  </a:tcPr>
+                </a:tc>
+                <a:tc>
+                  <a:txBody>
+                    <a:bodyPr/>
+                    <a:lstStyle/>
+                    <a:p>
+                      <a:pPr algn="l" indent="0" marL="0">
+                        <a:buNone/>
+                      </a:pPr>
+                      <a:r>
+                        <a:rPr lang="en-US" sz="780" dirty="0">
                           <a:solidFill>
                             <a:srgbClr val="334155"/>
                           </a:solidFill>
@@ -33232,20 +34609,131 @@
                           <a:ea typeface="Noto Sans KR" pitchFamily="34" charset="-122"/>
                           <a:cs typeface="Noto Sans KR" pitchFamily="34" charset="-120"/>
                         </a:rPr>
-                        <a:t>바이어나 제휴처를 만난다는 것보다는 브랜드 홍보를 하고 이 장비에 대한 좋은 점을 설명하는 것,</a:t>
+                        <a:t>인플루언서 · 모델 일정, 공간 크기, 비용 대비 효과</a:t>
                       </a:r>
-                      <a:endParaRPr lang="en-US" sz="850" dirty="0">
+                      <a:endParaRPr lang="en-US" sz="780" dirty="0">
                         <a:latin typeface="Noto Sans KR" charset="0"/>
                         <a:ea typeface="Noto Sans KR" charset="0"/>
                         <a:cs typeface="Noto Sans KR" charset="0"/>
                       </a:endParaRPr>
                     </a:p>
+                  </a:txBody>
+                  <a:tcPr marL="63500" marR="63500" marT="25400" marB="25400" anchor="ctr">
+                    <a:lnL w="6350" cap="flat" cmpd="sng" algn="ctr">
+                      <a:solidFill>
+                        <a:srgbClr val="CBD5E1"/>
+                      </a:solidFill>
+                      <a:prstDash val="solid"/>
+                      <a:round/>
+                      <a:headEnd type="none" w="med" len="med"/>
+                      <a:tailEnd type="none" w="med" len="med"/>
+                    </a:lnL>
+                    <a:lnR w="6350" cap="flat" cmpd="sng" algn="ctr">
+                      <a:solidFill>
+                        <a:srgbClr val="CBD5E1"/>
+                      </a:solidFill>
+                      <a:prstDash val="solid"/>
+                      <a:round/>
+                      <a:headEnd type="none" w="med" len="med"/>
+                      <a:tailEnd type="none" w="med" len="med"/>
+                    </a:lnR>
+                    <a:lnT w="6350" cap="flat" cmpd="sng" algn="ctr">
+                      <a:solidFill>
+                        <a:srgbClr val="CBD5E1"/>
+                      </a:solidFill>
+                      <a:prstDash val="solid"/>
+                      <a:round/>
+                      <a:headEnd type="none" w="med" len="med"/>
+                      <a:tailEnd type="none" w="med" len="med"/>
+                    </a:lnT>
+                    <a:lnB w="6350" cap="flat" cmpd="sng" algn="ctr">
+                      <a:solidFill>
+                        <a:srgbClr val="CBD5E1"/>
+                      </a:solidFill>
+                      <a:prstDash val="solid"/>
+                      <a:round/>
+                      <a:headEnd type="none" w="med" len="med"/>
+                      <a:tailEnd type="none" w="med" len="med"/>
+                    </a:lnB>
+                  </a:tcPr>
+                </a:tc>
+              </a:tr>
+              <a:tr h="338328">
+                <a:tc>
+                  <a:txBody>
+                    <a:bodyPr/>
+                    <a:lstStyle/>
                     <a:p>
                       <a:pPr algn="l" indent="0" marL="0">
                         <a:buNone/>
                       </a:pPr>
                       <a:r>
-                        <a:rPr lang="en-US" sz="850" dirty="0">
+                        <a:rPr lang="en-US" sz="780" b="1" dirty="0">
+                          <a:solidFill>
+                            <a:srgbClr val="182F48"/>
+                          </a:solidFill>
+                          <a:latin typeface="Noto Sans KR" pitchFamily="34" charset="0"/>
+                          <a:ea typeface="Noto Sans KR" pitchFamily="34" charset="-122"/>
+                          <a:cs typeface="Noto Sans KR" pitchFamily="34" charset="-120"/>
+                        </a:rPr>
+                        <a:t>Q7 성공 기준</a:t>
+                      </a:r>
+                      <a:endParaRPr lang="en-US" sz="780" dirty="0">
+                        <a:latin typeface="Noto Sans KR" charset="0"/>
+                        <a:ea typeface="Noto Sans KR" charset="0"/>
+                        <a:cs typeface="Noto Sans KR" charset="0"/>
+                      </a:endParaRPr>
+                    </a:p>
+                  </a:txBody>
+                  <a:tcPr marL="63500" marR="63500" marT="25400" marB="25400" anchor="ctr">
+                    <a:lnL w="6350" cap="flat" cmpd="sng" algn="ctr">
+                      <a:solidFill>
+                        <a:srgbClr val="CBD5E1"/>
+                      </a:solidFill>
+                      <a:prstDash val="solid"/>
+                      <a:round/>
+                      <a:headEnd type="none" w="med" len="med"/>
+                      <a:tailEnd type="none" w="med" len="med"/>
+                    </a:lnL>
+                    <a:lnR w="6350" cap="flat" cmpd="sng" algn="ctr">
+                      <a:solidFill>
+                        <a:srgbClr val="CBD5E1"/>
+                      </a:solidFill>
+                      <a:prstDash val="solid"/>
+                      <a:round/>
+                      <a:headEnd type="none" w="med" len="med"/>
+                      <a:tailEnd type="none" w="med" len="med"/>
+                    </a:lnR>
+                    <a:lnT w="6350" cap="flat" cmpd="sng" algn="ctr">
+                      <a:solidFill>
+                        <a:srgbClr val="CBD5E1"/>
+                      </a:solidFill>
+                      <a:prstDash val="solid"/>
+                      <a:round/>
+                      <a:headEnd type="none" w="med" len="med"/>
+                      <a:tailEnd type="none" w="med" len="med"/>
+                    </a:lnT>
+                    <a:lnB w="6350" cap="flat" cmpd="sng" algn="ctr">
+                      <a:solidFill>
+                        <a:srgbClr val="CBD5E1"/>
+                      </a:solidFill>
+                      <a:prstDash val="solid"/>
+                      <a:round/>
+                      <a:headEnd type="none" w="med" len="med"/>
+                      <a:tailEnd type="none" w="med" len="med"/>
+                    </a:lnB>
+                  </a:tcPr>
+                </a:tc>
+                <a:tc>
+                  <a:txBody>
+                    <a:bodyPr/>
+                    <a:lstStyle/>
+                    <a:p>
+                      <a:pPr algn="l" indent="0" marL="0">
+                        <a:buNone/>
+                      </a:pPr>
+                      <a:r>
+                        <a:rPr lang="en-US" sz="780" dirty="0">
                           <a:solidFill>
                             <a:srgbClr val="334155"/>
                           </a:solidFill>
@@ -33253,20 +34741,131 @@
                           <a:ea typeface="Noto Sans KR" pitchFamily="34" charset="-122"/>
                           <a:cs typeface="Noto Sans KR" pitchFamily="34" charset="-120"/>
                         </a:rPr>
-                        <a:t>그걸 관심 깊게 들어주는 고객들이 필요하지, 현장에서 판매를 하거나 이런 거는 의미가 없고요.</a:t>
+                        <a:t>"고객의 반응이겠죠."</a:t>
                       </a:r>
-                      <a:endParaRPr lang="en-US" sz="850" dirty="0">
+                      <a:endParaRPr lang="en-US" sz="780" dirty="0">
                         <a:latin typeface="Noto Sans KR" charset="0"/>
                         <a:ea typeface="Noto Sans KR" charset="0"/>
                         <a:cs typeface="Noto Sans KR" charset="0"/>
                       </a:endParaRPr>
                     </a:p>
+                  </a:txBody>
+                  <a:tcPr marL="63500" marR="63500" marT="25400" marB="25400" anchor="ctr">
+                    <a:lnL w="6350" cap="flat" cmpd="sng" algn="ctr">
+                      <a:solidFill>
+                        <a:srgbClr val="CBD5E1"/>
+                      </a:solidFill>
+                      <a:prstDash val="solid"/>
+                      <a:round/>
+                      <a:headEnd type="none" w="med" len="med"/>
+                      <a:tailEnd type="none" w="med" len="med"/>
+                    </a:lnL>
+                    <a:lnR w="6350" cap="flat" cmpd="sng" algn="ctr">
+                      <a:solidFill>
+                        <a:srgbClr val="CBD5E1"/>
+                      </a:solidFill>
+                      <a:prstDash val="solid"/>
+                      <a:round/>
+                      <a:headEnd type="none" w="med" len="med"/>
+                      <a:tailEnd type="none" w="med" len="med"/>
+                    </a:lnR>
+                    <a:lnT w="6350" cap="flat" cmpd="sng" algn="ctr">
+                      <a:solidFill>
+                        <a:srgbClr val="CBD5E1"/>
+                      </a:solidFill>
+                      <a:prstDash val="solid"/>
+                      <a:round/>
+                      <a:headEnd type="none" w="med" len="med"/>
+                      <a:tailEnd type="none" w="med" len="med"/>
+                    </a:lnT>
+                    <a:lnB w="6350" cap="flat" cmpd="sng" algn="ctr">
+                      <a:solidFill>
+                        <a:srgbClr val="CBD5E1"/>
+                      </a:solidFill>
+                      <a:prstDash val="solid"/>
+                      <a:round/>
+                      <a:headEnd type="none" w="med" len="med"/>
+                      <a:tailEnd type="none" w="med" len="med"/>
+                    </a:lnB>
+                  </a:tcPr>
+                </a:tc>
+              </a:tr>
+              <a:tr h="338328">
+                <a:tc>
+                  <a:txBody>
+                    <a:bodyPr/>
+                    <a:lstStyle/>
                     <a:p>
                       <a:pPr algn="l" indent="0" marL="0">
                         <a:buNone/>
                       </a:pPr>
                       <a:r>
-                        <a:rPr lang="en-US" sz="850" dirty="0">
+                        <a:rPr lang="en-US" sz="780" b="1" dirty="0">
+                          <a:solidFill>
+                            <a:srgbClr val="182F48"/>
+                          </a:solidFill>
+                          <a:latin typeface="Noto Sans KR" pitchFamily="34" charset="0"/>
+                          <a:ea typeface="Noto Sans KR" pitchFamily="34" charset="-122"/>
+                          <a:cs typeface="Noto Sans KR" pitchFamily="34" charset="-120"/>
+                        </a:rPr>
+                        <a:t>Q8 기대 효과</a:t>
+                      </a:r>
+                      <a:endParaRPr lang="en-US" sz="780" dirty="0">
+                        <a:latin typeface="Noto Sans KR" charset="0"/>
+                        <a:ea typeface="Noto Sans KR" charset="0"/>
+                        <a:cs typeface="Noto Sans KR" charset="0"/>
+                      </a:endParaRPr>
+                    </a:p>
+                  </a:txBody>
+                  <a:tcPr marL="63500" marR="63500" marT="25400" marB="25400" anchor="ctr">
+                    <a:lnL w="6350" cap="flat" cmpd="sng" algn="ctr">
+                      <a:solidFill>
+                        <a:srgbClr val="CBD5E1"/>
+                      </a:solidFill>
+                      <a:prstDash val="solid"/>
+                      <a:round/>
+                      <a:headEnd type="none" w="med" len="med"/>
+                      <a:tailEnd type="none" w="med" len="med"/>
+                    </a:lnL>
+                    <a:lnR w="6350" cap="flat" cmpd="sng" algn="ctr">
+                      <a:solidFill>
+                        <a:srgbClr val="CBD5E1"/>
+                      </a:solidFill>
+                      <a:prstDash val="solid"/>
+                      <a:round/>
+                      <a:headEnd type="none" w="med" len="med"/>
+                      <a:tailEnd type="none" w="med" len="med"/>
+                    </a:lnR>
+                    <a:lnT w="6350" cap="flat" cmpd="sng" algn="ctr">
+                      <a:solidFill>
+                        <a:srgbClr val="CBD5E1"/>
+                      </a:solidFill>
+                      <a:prstDash val="solid"/>
+                      <a:round/>
+                      <a:headEnd type="none" w="med" len="med"/>
+                      <a:tailEnd type="none" w="med" len="med"/>
+                    </a:lnT>
+                    <a:lnB w="6350" cap="flat" cmpd="sng" algn="ctr">
+                      <a:solidFill>
+                        <a:srgbClr val="CBD5E1"/>
+                      </a:solidFill>
+                      <a:prstDash val="solid"/>
+                      <a:round/>
+                      <a:headEnd type="none" w="med" len="med"/>
+                      <a:tailEnd type="none" w="med" len="med"/>
+                    </a:lnB>
+                  </a:tcPr>
+                </a:tc>
+                <a:tc>
+                  <a:txBody>
+                    <a:bodyPr/>
+                    <a:lstStyle/>
+                    <a:p>
+                      <a:pPr algn="l" indent="0" marL="0">
+                        <a:buNone/>
+                      </a:pPr>
+                      <a:r>
+                        <a:rPr lang="en-US" sz="780" dirty="0">
                           <a:solidFill>
                             <a:srgbClr val="334155"/>
                           </a:solidFill>
@@ -33274,58 +34873,16 @@
                           <a:ea typeface="Noto Sans KR" pitchFamily="34" charset="-122"/>
                           <a:cs typeface="Noto Sans KR" pitchFamily="34" charset="-120"/>
                         </a:rPr>
-                        <a:t>고객 확보, 이것도 사실 의미가 없습니다.</a:t>
+                        <a:t>투자 · 바이어 · 현장판매보다 브랜드 홍보가 목적</a:t>
                       </a:r>
-                      <a:endParaRPr lang="en-US" sz="850" dirty="0">
-                        <a:latin typeface="Noto Sans KR" charset="0"/>
-                        <a:ea typeface="Noto Sans KR" charset="0"/>
-                        <a:cs typeface="Noto Sans KR" charset="0"/>
-                      </a:endParaRPr>
-                    </a:p>
-                    <a:p>
-                      <a:pPr algn="l" indent="0" marL="0">
-                        <a:buNone/>
-                      </a:pPr>
-                      <a:r>
-                        <a:rPr lang="en-US" sz="850" dirty="0">
-                          <a:solidFill>
-                            <a:srgbClr val="334155"/>
-                          </a:solidFill>
-                          <a:latin typeface="Noto Sans KR" pitchFamily="34" charset="0"/>
-                          <a:ea typeface="Noto Sans KR" pitchFamily="34" charset="-122"/>
-                          <a:cs typeface="Noto Sans KR" pitchFamily="34" charset="-120"/>
-                        </a:rPr>
-                        <a:t>하지만 아웃도어를 할 때 왜 이런 에어매트를 써야 되고, 이런 침낭을 써야 되고, 이런 의류를 입어야 되는지,</a:t>
-                      </a:r>
-                      <a:endParaRPr lang="en-US" sz="850" dirty="0">
-                        <a:latin typeface="Noto Sans KR" charset="0"/>
-                        <a:ea typeface="Noto Sans KR" charset="0"/>
-                        <a:cs typeface="Noto Sans KR" charset="0"/>
-                      </a:endParaRPr>
-                    </a:p>
-                    <a:p>
-                      <a:pPr algn="l" indent="0" marL="0">
-                        <a:buNone/>
-                      </a:pPr>
-                      <a:r>
-                        <a:rPr lang="en-US" sz="850" dirty="0">
-                          <a:solidFill>
-                            <a:srgbClr val="334155"/>
-                          </a:solidFill>
-                          <a:latin typeface="Noto Sans KR" pitchFamily="34" charset="0"/>
-                          <a:ea typeface="Noto Sans KR" pitchFamily="34" charset="-122"/>
-                          <a:cs typeface="Noto Sans KR" pitchFamily="34" charset="-120"/>
-                        </a:rPr>
-                        <a:t>거기에 많은 분들이 관심을 가져 준다면 그러면 브랜드 부스에 들어가는 게 저는 맞다고 생각합니다.</a:t>
-                      </a:r>
-                      <a:endParaRPr lang="en-US" sz="850" dirty="0">
+                      <a:endParaRPr lang="en-US" sz="780" dirty="0">
                         <a:latin typeface="Noto Sans KR" charset="0"/>
                         <a:ea typeface="Noto Sans KR" charset="0"/>
                         <a:cs typeface="Noto Sans KR" charset="0"/>
                       </a:endParaRPr>
                     </a:p>
                   </a:txBody>
-                  <a:tcPr marL="76200" marR="76200" marT="38100" marB="38100" anchor="ctr">
+                  <a:tcPr marL="63500" marR="63500" marT="25400" marB="25400" anchor="ctr">
                     <a:lnL w="6350" cap="flat" cmpd="sng" algn="ctr">
                       <a:solidFill>
                         <a:srgbClr val="CBD5E1"/>
@@ -33371,14 +34928,14 @@
       </p:graphicFrame>
       <p:sp>
         <p:nvSpPr>
-          <p:cNvPr id="8" name="제목 사전 가정 → 검증 결과"/>
+          <p:cNvPr id="16" name="제목 추가 확인 사항"/>
           <p:cNvSpPr txBox="1"/>
           <p:nvPr/>
         </p:nvSpPr>
         <p:spPr>
           <a:xfrm>
-            <a:off x="612648" y="3338144"/>
-            <a:ext cx="3520440" cy="237744"/>
+            <a:off x="4178808" y="4626864"/>
+            <a:ext cx="3886200" cy="237744"/>
           </a:xfrm>
           <a:prstGeom prst="rect">
             <a:avLst/>
@@ -33405,7 +34962,7 @@
                 <a:ea typeface="Noto Sans KR" pitchFamily="34" charset="-122"/>
                 <a:cs typeface="Noto Sans KR" pitchFamily="34" charset="-120"/>
               </a:rPr>
-              <a:t>사전 가정 → 검증 결과</a:t>
+              <a:t>추가 확인 사항</a:t>
             </a:r>
             <a:endParaRPr lang="en-US" sz="1050" dirty="0"/>
           </a:p>
@@ -33413,1262 +34970,18 @@
       </p:sp>
       <p:sp>
         <p:nvSpPr>
-          <p:cNvPr id="9" name="제목 기획 수정 (반영 위치)"/>
-          <p:cNvSpPr txBox="1"/>
+          <p:cNvPr id="17" name="추가 확인 배경"/>
+          <p:cNvSpPr/>
           <p:nvPr/>
         </p:nvSpPr>
         <p:spPr>
           <a:xfrm>
-            <a:off x="4315968" y="3338144"/>
-            <a:ext cx="3977640" cy="237744"/>
-          </a:xfrm>
-          <a:prstGeom prst="rect">
-            <a:avLst/>
-          </a:prstGeom>
-          <a:noFill/>
-          <a:ln/>
-        </p:spPr>
-        <p:txBody>
-          <a:bodyPr wrap="square" lIns="0" tIns="0" rIns="0" bIns="0" rtlCol="0" anchor="ctr"/>
-          <a:lstStyle/>
-          <a:p>
-            <a:pPr algn="l" indent="0" marL="0">
-              <a:lnSpc>
-                <a:spcPct val="100000"/>
-              </a:lnSpc>
-              <a:buNone/>
-            </a:pPr>
-            <a:r>
-              <a:rPr lang="en-US" sz="1050" b="1" dirty="0">
-                <a:solidFill>
-                  <a:srgbClr val="182F48"/>
-                </a:solidFill>
-                <a:latin typeface="Noto Sans KR" pitchFamily="34" charset="0"/>
-                <a:ea typeface="Noto Sans KR" pitchFamily="34" charset="-122"/>
-                <a:cs typeface="Noto Sans KR" pitchFamily="34" charset="-120"/>
-              </a:rPr>
-              <a:t>기획 수정 (반영 위치)</a:t>
-            </a:r>
-            <a:endParaRPr lang="en-US" sz="1050" dirty="0"/>
-          </a:p>
-        </p:txBody>
-      </p:sp>
-      <p:sp>
-        <p:nvSpPr>
-          <p:cNvPr id="10" name="제목 추가 확인 사항"/>
-          <p:cNvSpPr txBox="1"/>
-          <p:nvPr/>
-        </p:nvSpPr>
-        <p:spPr>
-          <a:xfrm>
-            <a:off x="8476488" y="3338144"/>
-            <a:ext cx="3099816" cy="237744"/>
-          </a:xfrm>
-          <a:prstGeom prst="rect">
-            <a:avLst/>
-          </a:prstGeom>
-          <a:noFill/>
-          <a:ln/>
-        </p:spPr>
-        <p:txBody>
-          <a:bodyPr wrap="square" lIns="0" tIns="0" rIns="0" bIns="0" rtlCol="0" anchor="ctr"/>
-          <a:lstStyle/>
-          <a:p>
-            <a:pPr algn="l" indent="0" marL="0">
-              <a:lnSpc>
-                <a:spcPct val="100000"/>
-              </a:lnSpc>
-              <a:buNone/>
-            </a:pPr>
-            <a:r>
-              <a:rPr lang="en-US" sz="1050" b="1" dirty="0">
-                <a:solidFill>
-                  <a:srgbClr val="182F48"/>
-                </a:solidFill>
-                <a:latin typeface="Noto Sans KR" pitchFamily="34" charset="0"/>
-                <a:ea typeface="Noto Sans KR" pitchFamily="34" charset="-122"/>
-                <a:cs typeface="Noto Sans KR" pitchFamily="34" charset="-120"/>
-              </a:rPr>
-              <a:t>추가 확인 사항</a:t>
-            </a:r>
-            <a:endParaRPr lang="en-US" sz="1050" dirty="0"/>
-          </a:p>
-        </p:txBody>
-      </p:sp>
-      <p:sp>
-        <p:nvSpPr>
-          <p:cNvPr id="11" name="가정 H1"/>
-          <p:cNvSpPr txBox="1"/>
-          <p:nvPr/>
-        </p:nvSpPr>
-        <p:spPr>
-          <a:xfrm>
-            <a:off x="612648" y="3630752"/>
-            <a:ext cx="3520440" cy="605644"/>
+            <a:off x="4178808" y="4901184"/>
+            <a:ext cx="3886200" cy="1371600"/>
           </a:xfrm>
           <a:prstGeom prst="roundRect">
             <a:avLst>
-              <a:gd name="adj" fmla="val 7549"/>
-            </a:avLst>
-          </a:prstGeom>
-          <a:solidFill>
-            <a:srgbClr val="F1F5F9"/>
-          </a:solidFill>
-          <a:ln/>
-        </p:spPr>
-        <p:txBody>
-          <a:bodyPr wrap="square" lIns="91440" tIns="0" rIns="91440" bIns="0" rtlCol="0" anchor="ctr"/>
-          <a:lstStyle/>
-          <a:p>
-            <a:pPr algn="l" indent="0" marL="0">
-              <a:lnSpc>
-                <a:spcPct val="95000"/>
-              </a:lnSpc>
-              <a:spcAft>
-                <a:spcPts val="100"/>
-              </a:spcAft>
-              <a:buNone/>
-            </a:pPr>
-            <a:r>
-              <a:rPr lang="en-US" sz="780" b="1" dirty="0">
-                <a:solidFill>
-                  <a:srgbClr val="267D86"/>
-                </a:solidFill>
-                <a:latin typeface="Noto Sans KR" pitchFamily="34" charset="0"/>
-                <a:ea typeface="Noto Sans KR" pitchFamily="34" charset="-122"/>
-                <a:cs typeface="Noto Sans KR" pitchFamily="34" charset="-120"/>
-              </a:rPr>
-              <a:t>H1  </a:t>
-            </a:r>
-            <a:pPr algn="l" indent="0" marL="0">
-              <a:lnSpc>
-                <a:spcPct val="95000"/>
-              </a:lnSpc>
-              <a:spcAft>
-                <a:spcPts val="100"/>
-              </a:spcAft>
-              <a:buNone/>
-            </a:pPr>
-            <a:r>
-              <a:rPr lang="en-US" sz="780" b="1" dirty="0">
-                <a:solidFill>
-                  <a:srgbClr val="182F48"/>
-                </a:solidFill>
-                <a:latin typeface="Noto Sans KR" pitchFamily="34" charset="0"/>
-                <a:ea typeface="Noto Sans KR" pitchFamily="34" charset="-122"/>
-                <a:cs typeface="Noto Sans KR" pitchFamily="34" charset="-120"/>
-              </a:rPr>
-              <a:t>브랜드는 바이어 미팅 · 현장판매를 가장 중시할 것</a:t>
-            </a:r>
-            <a:endParaRPr lang="en-US" sz="780" dirty="0"/>
-          </a:p>
-          <a:p>
-            <a:pPr algn="l" indent="0" marL="0">
-              <a:lnSpc>
-                <a:spcPct val="95000"/>
-              </a:lnSpc>
-              <a:spcAft>
-                <a:spcPts val="100"/>
-              </a:spcAft>
-              <a:buNone/>
-            </a:pPr>
-            <a:r>
-              <a:rPr lang="en-US" sz="780" b="1" dirty="0">
-                <a:solidFill>
-                  <a:srgbClr val="C2410C"/>
-                </a:solidFill>
-                <a:latin typeface="Noto Sans KR" pitchFamily="34" charset="0"/>
-                <a:ea typeface="Noto Sans KR" pitchFamily="34" charset="-122"/>
-                <a:cs typeface="Noto Sans KR" pitchFamily="34" charset="-120"/>
-              </a:rPr>
-              <a:t>기각  </a:t>
-            </a:r>
-            <a:pPr algn="l" indent="0" marL="0">
-              <a:lnSpc>
-                <a:spcPct val="95000"/>
-              </a:lnSpc>
-              <a:spcAft>
-                <a:spcPts val="100"/>
-              </a:spcAft>
-              <a:buNone/>
-            </a:pPr>
-            <a:r>
-              <a:rPr lang="en-US" sz="780" dirty="0">
-                <a:solidFill>
-                  <a:srgbClr val="334155"/>
-                </a:solidFill>
-                <a:latin typeface="Noto Sans KR" pitchFamily="34" charset="0"/>
-                <a:ea typeface="Noto Sans KR" pitchFamily="34" charset="-122"/>
-                <a:cs typeface="Noto Sans KR" pitchFamily="34" charset="-120"/>
-              </a:rPr>
-              <a:t>투자·바이어·현장판매·고객 확보는 의미가 적다고 했다.</a:t>
-            </a:r>
-            <a:endParaRPr lang="en-US" sz="780" dirty="0"/>
-          </a:p>
-          <a:p>
-            <a:pPr algn="l" indent="0" marL="0">
-              <a:lnSpc>
-                <a:spcPct val="95000"/>
-              </a:lnSpc>
-              <a:spcAft>
-                <a:spcPts val="100"/>
-              </a:spcAft>
-              <a:buNone/>
-            </a:pPr>
-            <a:r>
-              <a:rPr lang="en-US" sz="780" dirty="0">
-                <a:solidFill>
-                  <a:srgbClr val="334155"/>
-                </a:solidFill>
-                <a:latin typeface="Noto Sans KR" pitchFamily="34" charset="0"/>
-                <a:ea typeface="Noto Sans KR" pitchFamily="34" charset="-122"/>
-                <a:cs typeface="Noto Sans KR" pitchFamily="34" charset="-120"/>
-              </a:rPr>
-              <a:t>        </a:t>
-            </a:r>
-            <a:pPr algn="l" indent="0" marL="0">
-              <a:lnSpc>
-                <a:spcPct val="95000"/>
-              </a:lnSpc>
-              <a:spcAft>
-                <a:spcPts val="100"/>
-              </a:spcAft>
-              <a:buNone/>
-            </a:pPr>
-            <a:r>
-              <a:rPr lang="en-US" sz="780" dirty="0">
-                <a:solidFill>
-                  <a:srgbClr val="334155"/>
-                </a:solidFill>
-                <a:latin typeface="Noto Sans KR" pitchFamily="34" charset="0"/>
-                <a:ea typeface="Noto Sans KR" pitchFamily="34" charset="-122"/>
-                <a:cs typeface="Noto Sans KR" pitchFamily="34" charset="-120"/>
-              </a:rPr>
-              <a:t>목적은 브랜드 홍보와 장비를 깊게 들어줄 관심 고객이다.</a:t>
-            </a:r>
-            <a:endParaRPr lang="en-US" sz="780" dirty="0"/>
-          </a:p>
-        </p:txBody>
-      </p:sp>
-      <p:sp>
-        <p:nvSpPr>
-          <p:cNvPr id="12" name="가정 H2"/>
-          <p:cNvSpPr txBox="1"/>
-          <p:nvPr/>
-        </p:nvSpPr>
-        <p:spPr>
-          <a:xfrm>
-            <a:off x="612648" y="4309548"/>
-            <a:ext cx="3520440" cy="605644"/>
-          </a:xfrm>
-          <a:prstGeom prst="roundRect">
-            <a:avLst>
-              <a:gd name="adj" fmla="val 7549"/>
-            </a:avLst>
-          </a:prstGeom>
-          <a:solidFill>
-            <a:srgbClr val="F1F5F9"/>
-          </a:solidFill>
-          <a:ln/>
-        </p:spPr>
-        <p:txBody>
-          <a:bodyPr wrap="square" lIns="91440" tIns="0" rIns="91440" bIns="0" rtlCol="0" anchor="ctr"/>
-          <a:lstStyle/>
-          <a:p>
-            <a:pPr algn="l" indent="0" marL="0">
-              <a:lnSpc>
-                <a:spcPct val="95000"/>
-              </a:lnSpc>
-              <a:spcAft>
-                <a:spcPts val="100"/>
-              </a:spcAft>
-              <a:buNone/>
-            </a:pPr>
-            <a:r>
-              <a:rPr lang="en-US" sz="780" b="1" dirty="0">
-                <a:solidFill>
-                  <a:srgbClr val="267D86"/>
-                </a:solidFill>
-                <a:latin typeface="Noto Sans KR" pitchFamily="34" charset="0"/>
-                <a:ea typeface="Noto Sans KR" pitchFamily="34" charset="-122"/>
-                <a:cs typeface="Noto Sans KR" pitchFamily="34" charset="-120"/>
-              </a:rPr>
-              <a:t>H2  </a:t>
-            </a:r>
-            <a:pPr algn="l" indent="0" marL="0">
-              <a:lnSpc>
-                <a:spcPct val="95000"/>
-              </a:lnSpc>
-              <a:spcAft>
-                <a:spcPts val="100"/>
-              </a:spcAft>
-              <a:buNone/>
-            </a:pPr>
-            <a:r>
-              <a:rPr lang="en-US" sz="780" b="1" dirty="0">
-                <a:solidFill>
-                  <a:srgbClr val="182F48"/>
-                </a:solidFill>
-                <a:latin typeface="Noto Sans KR" pitchFamily="34" charset="0"/>
-                <a:ea typeface="Noto Sans KR" pitchFamily="34" charset="-122"/>
-                <a:cs typeface="Noto Sans KR" pitchFamily="34" charset="-120"/>
-              </a:rPr>
-              <a:t>부스비가 가장 큰 참가 장벽일 것</a:t>
-            </a:r>
-            <a:endParaRPr lang="en-US" sz="780" dirty="0"/>
-          </a:p>
-          <a:p>
-            <a:pPr algn="l" indent="0" marL="0">
-              <a:lnSpc>
-                <a:spcPct val="95000"/>
-              </a:lnSpc>
-              <a:spcAft>
-                <a:spcPts val="100"/>
-              </a:spcAft>
-              <a:buNone/>
-            </a:pPr>
-            <a:r>
-              <a:rPr lang="en-US" sz="780" b="1" dirty="0">
-                <a:solidFill>
-                  <a:srgbClr val="267D86"/>
-                </a:solidFill>
-                <a:latin typeface="Noto Sans KR" pitchFamily="34" charset="0"/>
-                <a:ea typeface="Noto Sans KR" pitchFamily="34" charset="-122"/>
-                <a:cs typeface="Noto Sans KR" pitchFamily="34" charset="-120"/>
-              </a:rPr>
-              <a:t>부분  </a:t>
-            </a:r>
-            <a:pPr algn="l" indent="0" marL="0">
-              <a:lnSpc>
-                <a:spcPct val="95000"/>
-              </a:lnSpc>
-              <a:spcAft>
-                <a:spcPts val="100"/>
-              </a:spcAft>
-              <a:buNone/>
-            </a:pPr>
-            <a:r>
-              <a:rPr lang="en-US" sz="780" dirty="0">
-                <a:solidFill>
-                  <a:srgbClr val="334155"/>
-                </a:solidFill>
-                <a:latin typeface="Noto Sans KR" pitchFamily="34" charset="0"/>
-                <a:ea typeface="Noto Sans KR" pitchFamily="34" charset="-122"/>
-                <a:cs typeface="Noto Sans KR" pitchFamily="34" charset="-120"/>
-              </a:rPr>
-              <a:t>부스비는 늘 2만~5만 달러로 책정해 왔다.</a:t>
-            </a:r>
-            <a:endParaRPr lang="en-US" sz="780" dirty="0"/>
-          </a:p>
-          <a:p>
-            <a:pPr algn="l" indent="0" marL="0">
-              <a:lnSpc>
-                <a:spcPct val="95000"/>
-              </a:lnSpc>
-              <a:spcAft>
-                <a:spcPts val="100"/>
-              </a:spcAft>
-              <a:buNone/>
-            </a:pPr>
-            <a:r>
-              <a:rPr lang="en-US" sz="780" dirty="0">
-                <a:solidFill>
-                  <a:srgbClr val="334155"/>
-                </a:solidFill>
-                <a:latin typeface="Noto Sans KR" pitchFamily="34" charset="0"/>
-                <a:ea typeface="Noto Sans KR" pitchFamily="34" charset="-122"/>
-                <a:cs typeface="Noto Sans KR" pitchFamily="34" charset="-120"/>
-              </a:rPr>
-              <a:t>        </a:t>
-            </a:r>
-            <a:pPr algn="l" indent="0" marL="0">
-              <a:lnSpc>
-                <a:spcPct val="95000"/>
-              </a:lnSpc>
-              <a:spcAft>
-                <a:spcPts val="100"/>
-              </a:spcAft>
-              <a:buNone/>
-            </a:pPr>
-            <a:r>
-              <a:rPr lang="en-US" sz="780" dirty="0">
-                <a:solidFill>
-                  <a:srgbClr val="334155"/>
-                </a:solidFill>
-                <a:latin typeface="Noto Sans KR" pitchFamily="34" charset="0"/>
-                <a:ea typeface="Noto Sans KR" pitchFamily="34" charset="-122"/>
-                <a:cs typeface="Noto Sans KR" pitchFamily="34" charset="-120"/>
-              </a:rPr>
-              <a:t>실제 장벽은 비용 대비 효과·공간·인플루언서 일정이다.</a:t>
-            </a:r>
-            <a:endParaRPr lang="en-US" sz="780" dirty="0"/>
-          </a:p>
-        </p:txBody>
-      </p:sp>
-      <p:sp>
-        <p:nvSpPr>
-          <p:cNvPr id="13" name="가정 H3"/>
-          <p:cNvSpPr txBox="1"/>
-          <p:nvPr/>
-        </p:nvSpPr>
-        <p:spPr>
-          <a:xfrm>
-            <a:off x="612648" y="4988344"/>
-            <a:ext cx="3520440" cy="605644"/>
-          </a:xfrm>
-          <a:prstGeom prst="roundRect">
-            <a:avLst>
-              <a:gd name="adj" fmla="val 7549"/>
-            </a:avLst>
-          </a:prstGeom>
-          <a:solidFill>
-            <a:srgbClr val="F1F5F9"/>
-          </a:solidFill>
-          <a:ln/>
-        </p:spPr>
-        <p:txBody>
-          <a:bodyPr wrap="square" lIns="91440" tIns="0" rIns="91440" bIns="0" rtlCol="0" anchor="ctr"/>
-          <a:lstStyle/>
-          <a:p>
-            <a:pPr algn="l" indent="0" marL="0">
-              <a:lnSpc>
-                <a:spcPct val="95000"/>
-              </a:lnSpc>
-              <a:spcAft>
-                <a:spcPts val="100"/>
-              </a:spcAft>
-              <a:buNone/>
-            </a:pPr>
-            <a:r>
-              <a:rPr lang="en-US" sz="780" b="1" dirty="0">
-                <a:solidFill>
-                  <a:srgbClr val="267D86"/>
-                </a:solidFill>
-                <a:latin typeface="Noto Sans KR" pitchFamily="34" charset="0"/>
-                <a:ea typeface="Noto Sans KR" pitchFamily="34" charset="-122"/>
-                <a:cs typeface="Noto Sans KR" pitchFamily="34" charset="-120"/>
-              </a:rPr>
-              <a:t>H3  </a:t>
-            </a:r>
-            <a:pPr algn="l" indent="0" marL="0">
-              <a:lnSpc>
-                <a:spcPct val="95000"/>
-              </a:lnSpc>
-              <a:spcAft>
-                <a:spcPts val="100"/>
-              </a:spcAft>
-              <a:buNone/>
-            </a:pPr>
-            <a:r>
-              <a:rPr lang="en-US" sz="780" b="1" dirty="0">
-                <a:solidFill>
-                  <a:srgbClr val="182F48"/>
-                </a:solidFill>
-                <a:latin typeface="Noto Sans KR" pitchFamily="34" charset="0"/>
-                <a:ea typeface="Noto Sans KR" pitchFamily="34" charset="-122"/>
-                <a:cs typeface="Noto Sans KR" pitchFamily="34" charset="-120"/>
-              </a:rPr>
-              <a:t>기존 코엑스 · 킨텍스 아웃도어 행사로 충분할 것</a:t>
-            </a:r>
-            <a:endParaRPr lang="en-US" sz="780" dirty="0"/>
-          </a:p>
-          <a:p>
-            <a:pPr algn="l" indent="0" marL="0">
-              <a:lnSpc>
-                <a:spcPct val="95000"/>
-              </a:lnSpc>
-              <a:spcAft>
-                <a:spcPts val="100"/>
-              </a:spcAft>
-              <a:buNone/>
-            </a:pPr>
-            <a:r>
-              <a:rPr lang="en-US" sz="780" b="1" dirty="0">
-                <a:solidFill>
-                  <a:srgbClr val="C2410C"/>
-                </a:solidFill>
-                <a:latin typeface="Noto Sans KR" pitchFamily="34" charset="0"/>
-                <a:ea typeface="Noto Sans KR" pitchFamily="34" charset="-122"/>
-                <a:cs typeface="Noto Sans KR" pitchFamily="34" charset="-120"/>
-              </a:rPr>
-              <a:t>기각  </a:t>
-            </a:r>
-            <a:pPr algn="l" indent="0" marL="0">
-              <a:lnSpc>
-                <a:spcPct val="95000"/>
-              </a:lnSpc>
-              <a:spcAft>
-                <a:spcPts val="100"/>
-              </a:spcAft>
-              <a:buNone/>
-            </a:pPr>
-            <a:r>
-              <a:rPr lang="en-US" sz="780" dirty="0">
-                <a:solidFill>
-                  <a:srgbClr val="334155"/>
-                </a:solidFill>
-                <a:latin typeface="Noto Sans KR" pitchFamily="34" charset="0"/>
-                <a:ea typeface="Noto Sans KR" pitchFamily="34" charset="-122"/>
-                <a:cs typeface="Noto Sans KR" pitchFamily="34" charset="-120"/>
-              </a:rPr>
-              <a:t>"고객의 니즈가 다르기 때문에 저희는 참여를 안 하고 있습니다"</a:t>
-            </a:r>
-            <a:endParaRPr lang="en-US" sz="780" dirty="0"/>
-          </a:p>
-        </p:txBody>
-      </p:sp>
-      <p:sp>
-        <p:nvSpPr>
-          <p:cNvPr id="14" name="가정 H4"/>
-          <p:cNvSpPr txBox="1"/>
-          <p:nvPr/>
-        </p:nvSpPr>
-        <p:spPr>
-          <a:xfrm>
-            <a:off x="612648" y="5667140"/>
-            <a:ext cx="3520440" cy="605644"/>
-          </a:xfrm>
-          <a:prstGeom prst="roundRect">
-            <a:avLst>
-              <a:gd name="adj" fmla="val 7549"/>
-            </a:avLst>
-          </a:prstGeom>
-          <a:solidFill>
-            <a:srgbClr val="F1F5F9"/>
-          </a:solidFill>
-          <a:ln/>
-        </p:spPr>
-        <p:txBody>
-          <a:bodyPr wrap="square" lIns="91440" tIns="0" rIns="91440" bIns="0" rtlCol="0" anchor="ctr"/>
-          <a:lstStyle/>
-          <a:p>
-            <a:pPr algn="l" indent="0" marL="0">
-              <a:lnSpc>
-                <a:spcPct val="95000"/>
-              </a:lnSpc>
-              <a:spcAft>
-                <a:spcPts val="100"/>
-              </a:spcAft>
-              <a:buNone/>
-            </a:pPr>
-            <a:r>
-              <a:rPr lang="en-US" sz="780" b="1" dirty="0">
-                <a:solidFill>
-                  <a:srgbClr val="267D86"/>
-                </a:solidFill>
-                <a:latin typeface="Noto Sans KR" pitchFamily="34" charset="0"/>
-                <a:ea typeface="Noto Sans KR" pitchFamily="34" charset="-122"/>
-                <a:cs typeface="Noto Sans KR" pitchFamily="34" charset="-120"/>
-              </a:rPr>
-              <a:t>H4  </a:t>
-            </a:r>
-            <a:pPr algn="l" indent="0" marL="0">
-              <a:lnSpc>
-                <a:spcPct val="95000"/>
-              </a:lnSpc>
-              <a:spcAft>
-                <a:spcPts val="100"/>
-              </a:spcAft>
-              <a:buNone/>
-            </a:pPr>
-            <a:r>
-              <a:rPr lang="en-US" sz="780" b="1" dirty="0">
-                <a:solidFill>
-                  <a:srgbClr val="182F48"/>
-                </a:solidFill>
-                <a:latin typeface="Noto Sans KR" pitchFamily="34" charset="0"/>
-                <a:ea typeface="Noto Sans KR" pitchFamily="34" charset="-122"/>
-                <a:cs typeface="Noto Sans KR" pitchFamily="34" charset="-120"/>
-              </a:rPr>
-              <a:t>일반 소비자(B2C)는 주요 고객이 아닐 것</a:t>
-            </a:r>
-            <a:endParaRPr lang="en-US" sz="780" dirty="0"/>
-          </a:p>
-          <a:p>
-            <a:pPr algn="l" indent="0" marL="0">
-              <a:lnSpc>
-                <a:spcPct val="95000"/>
-              </a:lnSpc>
-              <a:spcAft>
-                <a:spcPts val="100"/>
-              </a:spcAft>
-              <a:buNone/>
-            </a:pPr>
-            <a:r>
-              <a:rPr lang="en-US" sz="780" b="1" dirty="0">
-                <a:solidFill>
-                  <a:srgbClr val="C2410C"/>
-                </a:solidFill>
-                <a:latin typeface="Noto Sans KR" pitchFamily="34" charset="0"/>
-                <a:ea typeface="Noto Sans KR" pitchFamily="34" charset="-122"/>
-                <a:cs typeface="Noto Sans KR" pitchFamily="34" charset="-120"/>
-              </a:rPr>
-              <a:t>기각  </a:t>
-            </a:r>
-            <a:pPr algn="l" indent="0" marL="0">
-              <a:lnSpc>
-                <a:spcPct val="95000"/>
-              </a:lnSpc>
-              <a:spcAft>
-                <a:spcPts val="100"/>
-              </a:spcAft>
-              <a:buNone/>
-            </a:pPr>
-            <a:r>
-              <a:rPr lang="en-US" sz="780" dirty="0">
-                <a:solidFill>
-                  <a:srgbClr val="334155"/>
-                </a:solidFill>
-                <a:latin typeface="Noto Sans KR" pitchFamily="34" charset="0"/>
-                <a:ea typeface="Noto Sans KR" pitchFamily="34" charset="-122"/>
-                <a:cs typeface="Noto Sans KR" pitchFamily="34" charset="-120"/>
-              </a:rPr>
-              <a:t>B2C 매출 비중이 약 30%라 일반 고객을 매우 중요하게 생각한다.</a:t>
-            </a:r>
-            <a:endParaRPr lang="en-US" sz="780" dirty="0"/>
-          </a:p>
-        </p:txBody>
-      </p:sp>
-      <p:sp>
-        <p:nvSpPr>
-          <p:cNvPr id="15" name="기획 수정 배경"/>
-          <p:cNvSpPr/>
-          <p:nvPr/>
-        </p:nvSpPr>
-        <p:spPr>
-          <a:xfrm>
-            <a:off x="4315968" y="3630752"/>
-            <a:ext cx="3977640" cy="2642032"/>
-          </a:xfrm>
-          <a:prstGeom prst="roundRect">
-            <a:avLst>
-              <a:gd name="adj" fmla="val 1730"/>
-            </a:avLst>
-          </a:prstGeom>
-          <a:solidFill>
-            <a:srgbClr val="E6F2F3"/>
-          </a:solidFill>
-          <a:ln/>
-        </p:spPr>
-      </p:sp>
-      <p:sp>
-        <p:nvSpPr>
-          <p:cNvPr id="16" name="기획 수정 1"/>
-          <p:cNvSpPr txBox="1"/>
-          <p:nvPr/>
-        </p:nvSpPr>
-        <p:spPr>
-          <a:xfrm>
-            <a:off x="4407408" y="3630752"/>
-            <a:ext cx="3794760" cy="660508"/>
-          </a:xfrm>
-          <a:prstGeom prst="rect">
-            <a:avLst/>
-          </a:prstGeom>
-          <a:noFill/>
-          <a:ln/>
-        </p:spPr>
-        <p:txBody>
-          <a:bodyPr wrap="square" lIns="0" tIns="0" rIns="0" bIns="0" rtlCol="0" anchor="ctr"/>
-          <a:lstStyle/>
-          <a:p>
-            <a:pPr algn="l" indent="0" marL="0">
-              <a:lnSpc>
-                <a:spcPct val="95000"/>
-              </a:lnSpc>
-              <a:spcAft>
-                <a:spcPts val="150"/>
-              </a:spcAft>
-              <a:buNone/>
-            </a:pPr>
-            <a:r>
-              <a:rPr lang="en-US" sz="780" b="1" dirty="0">
-                <a:solidFill>
-                  <a:srgbClr val="267D86"/>
-                </a:solidFill>
-                <a:latin typeface="Noto Sans KR" pitchFamily="34" charset="0"/>
-                <a:ea typeface="Noto Sans KR" pitchFamily="34" charset="-122"/>
-                <a:cs typeface="Noto Sans KR" pitchFamily="34" charset="-120"/>
-              </a:rPr>
-              <a:t>1  </a:t>
-            </a:r>
-            <a:pPr algn="l" indent="0" marL="0">
-              <a:lnSpc>
-                <a:spcPct val="95000"/>
-              </a:lnSpc>
-              <a:spcAft>
-                <a:spcPts val="150"/>
-              </a:spcAft>
-              <a:buNone/>
-            </a:pPr>
-            <a:r>
-              <a:rPr lang="en-US" sz="780" b="1" dirty="0">
-                <a:solidFill>
-                  <a:srgbClr val="182F48"/>
-                </a:solidFill>
-                <a:latin typeface="Noto Sans KR" pitchFamily="34" charset="0"/>
-                <a:ea typeface="Noto Sans KR" pitchFamily="34" charset="-122"/>
-                <a:cs typeface="Noto Sans KR" pitchFamily="34" charset="-120"/>
-              </a:rPr>
-              <a:t>공동 Test Lab(샤워부스 · 얼음 바닥)을 주최 측이 설치</a:t>
-            </a:r>
-            <a:endParaRPr lang="en-US" sz="780" dirty="0"/>
-          </a:p>
-          <a:p>
-            <a:pPr algn="l" indent="0" marL="0">
-              <a:lnSpc>
-                <a:spcPct val="95000"/>
-              </a:lnSpc>
-              <a:spcAft>
-                <a:spcPts val="150"/>
-              </a:spcAft>
-              <a:buNone/>
-            </a:pPr>
-            <a:r>
-              <a:rPr lang="en-US" sz="780" dirty="0">
-                <a:solidFill>
-                  <a:srgbClr val="334155"/>
-                </a:solidFill>
-                <a:latin typeface="Noto Sans KR" pitchFamily="34" charset="0"/>
-                <a:ea typeface="Noto Sans KR" pitchFamily="34" charset="-122"/>
-                <a:cs typeface="Noto Sans KR" pitchFamily="34" charset="-120"/>
-              </a:rPr>
-              <a:t>     </a:t>
-            </a:r>
-            <a:pPr algn="l" indent="0" marL="0">
-              <a:lnSpc>
-                <a:spcPct val="95000"/>
-              </a:lnSpc>
-              <a:spcAft>
-                <a:spcPts val="150"/>
-              </a:spcAft>
-              <a:buNone/>
-            </a:pPr>
-            <a:r>
-              <a:rPr lang="en-US" sz="780" dirty="0">
-                <a:solidFill>
-                  <a:srgbClr val="64748B"/>
-                </a:solidFill>
-                <a:latin typeface="Noto Sans KR" pitchFamily="34" charset="0"/>
-                <a:ea typeface="Noto Sans KR" pitchFamily="34" charset="-122"/>
-                <a:cs typeface="Noto Sans KR" pitchFamily="34" charset="-120"/>
-              </a:rPr>
-              <a:t>근거 Q5 · Q6: 시연 공간과 비용 대비 효과가 장벽</a:t>
-            </a:r>
-            <a:endParaRPr lang="en-US" sz="780" dirty="0"/>
-          </a:p>
-          <a:p>
-            <a:pPr algn="l" indent="0" marL="0">
-              <a:lnSpc>
-                <a:spcPct val="95000"/>
-              </a:lnSpc>
-              <a:spcAft>
-                <a:spcPts val="150"/>
-              </a:spcAft>
-              <a:buNone/>
-            </a:pPr>
-            <a:r>
-              <a:rPr lang="en-US" sz="780" dirty="0">
-                <a:solidFill>
-                  <a:srgbClr val="334155"/>
-                </a:solidFill>
-                <a:latin typeface="Noto Sans KR" pitchFamily="34" charset="0"/>
-                <a:ea typeface="Noto Sans KR" pitchFamily="34" charset="-122"/>
-                <a:cs typeface="Noto Sans KR" pitchFamily="34" charset="-120"/>
-              </a:rPr>
-              <a:t>     </a:t>
-            </a:r>
-            <a:pPr algn="l" indent="0" marL="0">
-              <a:lnSpc>
-                <a:spcPct val="95000"/>
-              </a:lnSpc>
-              <a:spcAft>
-                <a:spcPts val="150"/>
-              </a:spcAft>
-              <a:buNone/>
-            </a:pPr>
-            <a:r>
-              <a:rPr lang="en-US" sz="780" dirty="0">
-                <a:solidFill>
-                  <a:srgbClr val="334155"/>
-                </a:solidFill>
-                <a:latin typeface="Noto Sans KR" pitchFamily="34" charset="0"/>
-                <a:ea typeface="Noto Sans KR" pitchFamily="34" charset="-122"/>
-                <a:cs typeface="Noto Sans KR" pitchFamily="34" charset="-120"/>
-              </a:rPr>
-              <a:t>→ 브랜드마다 시연 공간을 만들 부담을 덜어 준다 (2장)</a:t>
-            </a:r>
-            <a:endParaRPr lang="en-US" sz="780" dirty="0"/>
-          </a:p>
-        </p:txBody>
-      </p:sp>
-      <p:sp>
-        <p:nvSpPr>
-          <p:cNvPr id="17" name="기획 수정 2"/>
-          <p:cNvSpPr txBox="1"/>
-          <p:nvPr/>
-        </p:nvSpPr>
-        <p:spPr>
-          <a:xfrm>
-            <a:off x="4407408" y="4291260"/>
-            <a:ext cx="3794760" cy="660508"/>
-          </a:xfrm>
-          <a:prstGeom prst="rect">
-            <a:avLst/>
-          </a:prstGeom>
-          <a:noFill/>
-          <a:ln/>
-        </p:spPr>
-        <p:txBody>
-          <a:bodyPr wrap="square" lIns="0" tIns="0" rIns="0" bIns="0" rtlCol="0" anchor="ctr"/>
-          <a:lstStyle/>
-          <a:p>
-            <a:pPr algn="l" indent="0" marL="0">
-              <a:lnSpc>
-                <a:spcPct val="95000"/>
-              </a:lnSpc>
-              <a:spcAft>
-                <a:spcPts val="150"/>
-              </a:spcAft>
-              <a:buNone/>
-            </a:pPr>
-            <a:r>
-              <a:rPr lang="en-US" sz="780" b="1" dirty="0">
-                <a:solidFill>
-                  <a:srgbClr val="267D86"/>
-                </a:solidFill>
-                <a:latin typeface="Noto Sans KR" pitchFamily="34" charset="0"/>
-                <a:ea typeface="Noto Sans KR" pitchFamily="34" charset="-122"/>
-                <a:cs typeface="Noto Sans KR" pitchFamily="34" charset="-120"/>
-              </a:rPr>
-              <a:t>2  </a:t>
-            </a:r>
-            <a:pPr algn="l" indent="0" marL="0">
-              <a:lnSpc>
-                <a:spcPct val="95000"/>
-              </a:lnSpc>
-              <a:spcAft>
-                <a:spcPts val="150"/>
-              </a:spcAft>
-              <a:buNone/>
-            </a:pPr>
-            <a:r>
-              <a:rPr lang="en-US" sz="780" b="1" dirty="0">
-                <a:solidFill>
-                  <a:srgbClr val="182F48"/>
-                </a:solidFill>
-                <a:latin typeface="Noto Sans KR" pitchFamily="34" charset="0"/>
-                <a:ea typeface="Noto Sans KR" pitchFamily="34" charset="-122"/>
-                <a:cs typeface="Noto Sans KR" pitchFamily="34" charset="-120"/>
-              </a:rPr>
-              <a:t>관람객의 '수'보다 '관심도'를 지표로</a:t>
-            </a:r>
-            <a:endParaRPr lang="en-US" sz="780" dirty="0"/>
-          </a:p>
-          <a:p>
-            <a:pPr algn="l" indent="0" marL="0">
-              <a:lnSpc>
-                <a:spcPct val="95000"/>
-              </a:lnSpc>
-              <a:spcAft>
-                <a:spcPts val="150"/>
-              </a:spcAft>
-              <a:buNone/>
-            </a:pPr>
-            <a:r>
-              <a:rPr lang="en-US" sz="780" dirty="0">
-                <a:solidFill>
-                  <a:srgbClr val="334155"/>
-                </a:solidFill>
-                <a:latin typeface="Noto Sans KR" pitchFamily="34" charset="0"/>
-                <a:ea typeface="Noto Sans KR" pitchFamily="34" charset="-122"/>
-                <a:cs typeface="Noto Sans KR" pitchFamily="34" charset="-120"/>
-              </a:rPr>
-              <a:t>     </a:t>
-            </a:r>
-            <a:pPr algn="l" indent="0" marL="0">
-              <a:lnSpc>
-                <a:spcPct val="95000"/>
-              </a:lnSpc>
-              <a:spcAft>
-                <a:spcPts val="150"/>
-              </a:spcAft>
-              <a:buNone/>
-            </a:pPr>
-            <a:r>
-              <a:rPr lang="en-US" sz="780" dirty="0">
-                <a:solidFill>
-                  <a:srgbClr val="64748B"/>
-                </a:solidFill>
-                <a:latin typeface="Noto Sans KR" pitchFamily="34" charset="0"/>
-                <a:ea typeface="Noto Sans KR" pitchFamily="34" charset="-122"/>
-                <a:cs typeface="Noto Sans KR" pitchFamily="34" charset="-120"/>
-              </a:rPr>
-              <a:t>근거 Q3 · Q7: 참여 조건은 관심 고객, 성공 기준은 반응</a:t>
-            </a:r>
-            <a:endParaRPr lang="en-US" sz="780" dirty="0"/>
-          </a:p>
-          <a:p>
-            <a:pPr algn="l" indent="0" marL="0">
-              <a:lnSpc>
-                <a:spcPct val="95000"/>
-              </a:lnSpc>
-              <a:spcAft>
-                <a:spcPts val="150"/>
-              </a:spcAft>
-              <a:buNone/>
-            </a:pPr>
-            <a:r>
-              <a:rPr lang="en-US" sz="780" dirty="0">
-                <a:solidFill>
-                  <a:srgbClr val="334155"/>
-                </a:solidFill>
-                <a:latin typeface="Noto Sans KR" pitchFamily="34" charset="0"/>
-                <a:ea typeface="Noto Sans KR" pitchFamily="34" charset="-122"/>
-                <a:cs typeface="Noto Sans KR" pitchFamily="34" charset="-120"/>
-              </a:rPr>
-              <a:t>     </a:t>
-            </a:r>
-            <a:pPr algn="l" indent="0" marL="0">
-              <a:lnSpc>
-                <a:spcPct val="95000"/>
-              </a:lnSpc>
-              <a:spcAft>
-                <a:spcPts val="150"/>
-              </a:spcAft>
-              <a:buNone/>
-            </a:pPr>
-            <a:r>
-              <a:rPr lang="en-US" sz="780" dirty="0">
-                <a:solidFill>
-                  <a:srgbClr val="334155"/>
-                </a:solidFill>
-                <a:latin typeface="Noto Sans KR" pitchFamily="34" charset="0"/>
-                <a:ea typeface="Noto Sans KR" pitchFamily="34" charset="-122"/>
-                <a:cs typeface="Noto Sans KR" pitchFamily="34" charset="-120"/>
-              </a:rPr>
-              <a:t>→ 관심사 사전등록 · Test Lab 체험률을 함께 잰다 (3장)</a:t>
-            </a:r>
-            <a:endParaRPr lang="en-US" sz="780" dirty="0"/>
-          </a:p>
-        </p:txBody>
-      </p:sp>
-      <p:sp>
-        <p:nvSpPr>
-          <p:cNvPr id="18" name="기획 수정 3"/>
-          <p:cNvSpPr txBox="1"/>
-          <p:nvPr/>
-        </p:nvSpPr>
-        <p:spPr>
-          <a:xfrm>
-            <a:off x="4407408" y="4951768"/>
-            <a:ext cx="3794760" cy="660508"/>
-          </a:xfrm>
-          <a:prstGeom prst="rect">
-            <a:avLst/>
-          </a:prstGeom>
-          <a:noFill/>
-          <a:ln/>
-        </p:spPr>
-        <p:txBody>
-          <a:bodyPr wrap="square" lIns="0" tIns="0" rIns="0" bIns="0" rtlCol="0" anchor="ctr"/>
-          <a:lstStyle/>
-          <a:p>
-            <a:pPr algn="l" indent="0" marL="0">
-              <a:lnSpc>
-                <a:spcPct val="95000"/>
-              </a:lnSpc>
-              <a:spcAft>
-                <a:spcPts val="150"/>
-              </a:spcAft>
-              <a:buNone/>
-            </a:pPr>
-            <a:r>
-              <a:rPr lang="en-US" sz="780" b="1" dirty="0">
-                <a:solidFill>
-                  <a:srgbClr val="267D86"/>
-                </a:solidFill>
-                <a:latin typeface="Noto Sans KR" pitchFamily="34" charset="0"/>
-                <a:ea typeface="Noto Sans KR" pitchFamily="34" charset="-122"/>
-                <a:cs typeface="Noto Sans KR" pitchFamily="34" charset="-120"/>
-              </a:rPr>
-              <a:t>3  </a:t>
-            </a:r>
-            <a:pPr algn="l" indent="0" marL="0">
-              <a:lnSpc>
-                <a:spcPct val="95000"/>
-              </a:lnSpc>
-              <a:spcAft>
-                <a:spcPts val="150"/>
-              </a:spcAft>
-              <a:buNone/>
-            </a:pPr>
-            <a:r>
-              <a:rPr lang="en-US" sz="780" b="1" dirty="0">
-                <a:solidFill>
-                  <a:srgbClr val="182F48"/>
-                </a:solidFill>
-                <a:latin typeface="Noto Sans KR" pitchFamily="34" charset="0"/>
-                <a:ea typeface="Noto Sans KR" pitchFamily="34" charset="-122"/>
-                <a:cs typeface="Noto Sans KR" pitchFamily="34" charset="-120"/>
-              </a:rPr>
-              <a:t>참가업체를 목적별로 나눠 연결</a:t>
-            </a:r>
-            <a:endParaRPr lang="en-US" sz="780" dirty="0"/>
-          </a:p>
-          <a:p>
-            <a:pPr algn="l" indent="0" marL="0">
-              <a:lnSpc>
-                <a:spcPct val="95000"/>
-              </a:lnSpc>
-              <a:spcAft>
-                <a:spcPts val="150"/>
-              </a:spcAft>
-              <a:buNone/>
-            </a:pPr>
-            <a:r>
-              <a:rPr lang="en-US" sz="780" dirty="0">
-                <a:solidFill>
-                  <a:srgbClr val="334155"/>
-                </a:solidFill>
-                <a:latin typeface="Noto Sans KR" pitchFamily="34" charset="0"/>
-                <a:ea typeface="Noto Sans KR" pitchFamily="34" charset="-122"/>
-                <a:cs typeface="Noto Sans KR" pitchFamily="34" charset="-120"/>
-              </a:rPr>
-              <a:t>     </a:t>
-            </a:r>
-            <a:pPr algn="l" indent="0" marL="0">
-              <a:lnSpc>
-                <a:spcPct val="95000"/>
-              </a:lnSpc>
-              <a:spcAft>
-                <a:spcPts val="150"/>
-              </a:spcAft>
-              <a:buNone/>
-            </a:pPr>
-            <a:r>
-              <a:rPr lang="en-US" sz="780" dirty="0">
-                <a:solidFill>
-                  <a:srgbClr val="64748B"/>
-                </a:solidFill>
-                <a:latin typeface="Noto Sans KR" pitchFamily="34" charset="0"/>
-                <a:ea typeface="Noto Sans KR" pitchFamily="34" charset="-122"/>
-                <a:cs typeface="Noto Sans KR" pitchFamily="34" charset="-120"/>
-              </a:rPr>
-              <a:t>근거 Q8: 고가 브랜드는 판매보다 브랜드 홍보가 목적</a:t>
-            </a:r>
-            <a:endParaRPr lang="en-US" sz="780" dirty="0"/>
-          </a:p>
-          <a:p>
-            <a:pPr algn="l" indent="0" marL="0">
-              <a:lnSpc>
-                <a:spcPct val="95000"/>
-              </a:lnSpc>
-              <a:spcAft>
-                <a:spcPts val="150"/>
-              </a:spcAft>
-              <a:buNone/>
-            </a:pPr>
-            <a:r>
-              <a:rPr lang="en-US" sz="780" dirty="0">
-                <a:solidFill>
-                  <a:srgbClr val="334155"/>
-                </a:solidFill>
-                <a:latin typeface="Noto Sans KR" pitchFamily="34" charset="0"/>
-                <a:ea typeface="Noto Sans KR" pitchFamily="34" charset="-122"/>
-                <a:cs typeface="Noto Sans KR" pitchFamily="34" charset="-120"/>
-              </a:rPr>
-              <a:t>     </a:t>
-            </a:r>
-            <a:pPr algn="l" indent="0" marL="0">
-              <a:lnSpc>
-                <a:spcPct val="95000"/>
-              </a:lnSpc>
-              <a:spcAft>
-                <a:spcPts val="150"/>
-              </a:spcAft>
-              <a:buNone/>
-            </a:pPr>
-            <a:r>
-              <a:rPr lang="en-US" sz="780" dirty="0">
-                <a:solidFill>
-                  <a:srgbClr val="334155"/>
-                </a:solidFill>
-                <a:latin typeface="Noto Sans KR" pitchFamily="34" charset="0"/>
-                <a:ea typeface="Noto Sans KR" pitchFamily="34" charset="-122"/>
-                <a:cs typeface="Noto Sans KR" pitchFamily="34" charset="-120"/>
-              </a:rPr>
-              <a:t>→ 해외 앵커는 관심 고객과, K-브랜드는 바이어와 (5장)</a:t>
-            </a:r>
-            <a:endParaRPr lang="en-US" sz="780" dirty="0"/>
-          </a:p>
-        </p:txBody>
-      </p:sp>
-      <p:sp>
-        <p:nvSpPr>
-          <p:cNvPr id="19" name="기획 수정 4"/>
-          <p:cNvSpPr txBox="1"/>
-          <p:nvPr/>
-        </p:nvSpPr>
-        <p:spPr>
-          <a:xfrm>
-            <a:off x="4407408" y="5612276"/>
-            <a:ext cx="3794760" cy="660508"/>
-          </a:xfrm>
-          <a:prstGeom prst="rect">
-            <a:avLst/>
-          </a:prstGeom>
-          <a:noFill/>
-          <a:ln/>
-        </p:spPr>
-        <p:txBody>
-          <a:bodyPr wrap="square" lIns="0" tIns="0" rIns="0" bIns="0" rtlCol="0" anchor="ctr"/>
-          <a:lstStyle/>
-          <a:p>
-            <a:pPr algn="l" indent="0" marL="0">
-              <a:lnSpc>
-                <a:spcPct val="95000"/>
-              </a:lnSpc>
-              <a:spcAft>
-                <a:spcPts val="150"/>
-              </a:spcAft>
-              <a:buNone/>
-            </a:pPr>
-            <a:r>
-              <a:rPr lang="en-US" sz="780" b="1" dirty="0">
-                <a:solidFill>
-                  <a:srgbClr val="267D86"/>
-                </a:solidFill>
-                <a:latin typeface="Noto Sans KR" pitchFamily="34" charset="0"/>
-                <a:ea typeface="Noto Sans KR" pitchFamily="34" charset="-122"/>
-                <a:cs typeface="Noto Sans KR" pitchFamily="34" charset="-120"/>
-              </a:rPr>
-              <a:t>4  </a:t>
-            </a:r>
-            <a:pPr algn="l" indent="0" marL="0">
-              <a:lnSpc>
-                <a:spcPct val="95000"/>
-              </a:lnSpc>
-              <a:spcAft>
-                <a:spcPts val="150"/>
-              </a:spcAft>
-              <a:buNone/>
-            </a:pPr>
-            <a:r>
-              <a:rPr lang="en-US" sz="780" b="1" dirty="0">
-                <a:solidFill>
-                  <a:srgbClr val="182F48"/>
-                </a:solidFill>
-                <a:latin typeface="Noto Sans KR" pitchFamily="34" charset="0"/>
-                <a:ea typeface="Noto Sans KR" pitchFamily="34" charset="-122"/>
-                <a:cs typeface="Noto Sans KR" pitchFamily="34" charset="-120"/>
-              </a:rPr>
-              <a:t>인플루언서 · 모델 섭외를 미디어 파트너가 지원</a:t>
-            </a:r>
-            <a:endParaRPr lang="en-US" sz="780" dirty="0"/>
-          </a:p>
-          <a:p>
-            <a:pPr algn="l" indent="0" marL="0">
-              <a:lnSpc>
-                <a:spcPct val="95000"/>
-              </a:lnSpc>
-              <a:spcAft>
-                <a:spcPts val="150"/>
-              </a:spcAft>
-              <a:buNone/>
-            </a:pPr>
-            <a:r>
-              <a:rPr lang="en-US" sz="780" dirty="0">
-                <a:solidFill>
-                  <a:srgbClr val="334155"/>
-                </a:solidFill>
-                <a:latin typeface="Noto Sans KR" pitchFamily="34" charset="0"/>
-                <a:ea typeface="Noto Sans KR" pitchFamily="34" charset="-122"/>
-                <a:cs typeface="Noto Sans KR" pitchFamily="34" charset="-120"/>
-              </a:rPr>
-              <a:t>     </a:t>
-            </a:r>
-            <a:pPr algn="l" indent="0" marL="0">
-              <a:lnSpc>
-                <a:spcPct val="95000"/>
-              </a:lnSpc>
-              <a:spcAft>
-                <a:spcPts val="150"/>
-              </a:spcAft>
-              <a:buNone/>
-            </a:pPr>
-            <a:r>
-              <a:rPr lang="en-US" sz="780" dirty="0">
-                <a:solidFill>
-                  <a:srgbClr val="64748B"/>
-                </a:solidFill>
-                <a:latin typeface="Noto Sans KR" pitchFamily="34" charset="0"/>
-                <a:ea typeface="Noto Sans KR" pitchFamily="34" charset="-122"/>
-                <a:cs typeface="Noto Sans KR" pitchFamily="34" charset="-120"/>
-              </a:rPr>
-              <a:t>근거 Q6: 인플루언서 · 모델 일정 조율이 참여 장애</a:t>
-            </a:r>
-            <a:endParaRPr lang="en-US" sz="780" dirty="0"/>
-          </a:p>
-          <a:p>
-            <a:pPr algn="l" indent="0" marL="0">
-              <a:lnSpc>
-                <a:spcPct val="95000"/>
-              </a:lnSpc>
-              <a:spcAft>
-                <a:spcPts val="150"/>
-              </a:spcAft>
-              <a:buNone/>
-            </a:pPr>
-            <a:r>
-              <a:rPr lang="en-US" sz="780" dirty="0">
-                <a:solidFill>
-                  <a:srgbClr val="334155"/>
-                </a:solidFill>
-                <a:latin typeface="Noto Sans KR" pitchFamily="34" charset="0"/>
-                <a:ea typeface="Noto Sans KR" pitchFamily="34" charset="-122"/>
-                <a:cs typeface="Noto Sans KR" pitchFamily="34" charset="-120"/>
-              </a:rPr>
-              <a:t>     </a:t>
-            </a:r>
-            <a:pPr algn="l" indent="0" marL="0">
-              <a:lnSpc>
-                <a:spcPct val="95000"/>
-              </a:lnSpc>
-              <a:spcAft>
-                <a:spcPts val="150"/>
-              </a:spcAft>
-              <a:buNone/>
-            </a:pPr>
-            <a:r>
-              <a:rPr lang="en-US" sz="780" dirty="0">
-                <a:solidFill>
-                  <a:srgbClr val="334155"/>
-                </a:solidFill>
-                <a:latin typeface="Noto Sans KR" pitchFamily="34" charset="0"/>
-                <a:ea typeface="Noto Sans KR" pitchFamily="34" charset="-122"/>
-                <a:cs typeface="Noto Sans KR" pitchFamily="34" charset="-120"/>
-              </a:rPr>
-              <a:t>→ GO OUT KOREA · 패션비즈와 협력 (6장)</a:t>
-            </a:r>
-            <a:endParaRPr lang="en-US" sz="780" dirty="0"/>
-          </a:p>
-        </p:txBody>
-      </p:sp>
-      <p:sp>
-        <p:nvSpPr>
-          <p:cNvPr id="20" name="추가 확인 배경"/>
-          <p:cNvSpPr/>
-          <p:nvPr/>
-        </p:nvSpPr>
-        <p:spPr>
-          <a:xfrm>
-            <a:off x="8476488" y="3630752"/>
-            <a:ext cx="3099816" cy="2642032"/>
-          </a:xfrm>
-          <a:prstGeom prst="roundRect">
-            <a:avLst>
-              <a:gd name="adj" fmla="val 1730"/>
+              <a:gd name="adj" fmla="val 3333"/>
             </a:avLst>
           </a:prstGeom>
           <a:solidFill>
@@ -34684,14 +34997,14 @@
       </p:sp>
       <p:sp>
         <p:nvSpPr>
-          <p:cNvPr id="21" name="추가 확인 안내"/>
+          <p:cNvPr id="18" name="추가 확인 사항"/>
           <p:cNvSpPr txBox="1"/>
           <p:nvPr/>
         </p:nvSpPr>
         <p:spPr>
           <a:xfrm>
-            <a:off x="8586216" y="3685616"/>
-            <a:ext cx="2880360" cy="219456"/>
+            <a:off x="4270248" y="4901184"/>
+            <a:ext cx="3703320" cy="1371600"/>
           </a:xfrm>
           <a:prstGeom prst="rect">
             <a:avLst/>
@@ -34705,12 +35018,15 @@
           <a:p>
             <a:pPr algn="l" indent="0" marL="0">
               <a:lnSpc>
-                <a:spcPct val="100000"/>
-              </a:lnSpc>
-              <a:buNone/>
-            </a:pPr>
-            <a:r>
-              <a:rPr lang="en-US" sz="740" dirty="0">
+                <a:spcPct val="110000"/>
+              </a:lnSpc>
+              <a:spcAft>
+                <a:spcPts val="300"/>
+              </a:spcAft>
+              <a:buNone/>
+            </a:pPr>
+            <a:r>
+              <a:rPr lang="en-US" sz="820" dirty="0">
                 <a:solidFill>
                   <a:srgbClr val="64748B"/>
                 </a:solidFill>
@@ -34720,20 +35036,214 @@
               </a:rPr>
               <a:t>인터뷰를 다시 검토하며 더 물었어야 했다고 본 것</a:t>
             </a:r>
-            <a:endParaRPr lang="en-US" sz="740" dirty="0"/>
+            <a:endParaRPr lang="en-US" sz="820" dirty="0"/>
+          </a:p>
+          <a:p>
+            <a:pPr algn="l" indent="0" marL="0">
+              <a:lnSpc>
+                <a:spcPct val="110000"/>
+              </a:lnSpc>
+              <a:spcAft>
+                <a:spcPts val="300"/>
+              </a:spcAft>
+              <a:buNone/>
+            </a:pPr>
+            <a:r>
+              <a:rPr lang="en-US" sz="820" b="1" dirty="0">
+                <a:solidFill>
+                  <a:srgbClr val="C2410C"/>
+                </a:solidFill>
+                <a:latin typeface="Noto Sans KR" pitchFamily="34" charset="0"/>
+                <a:ea typeface="Noto Sans KR" pitchFamily="34" charset="-122"/>
+                <a:cs typeface="Noto Sans KR" pitchFamily="34" charset="-120"/>
+              </a:rPr>
+              <a:t>① </a:t>
+            </a:r>
+            <a:pPr algn="l" indent="0" marL="0">
+              <a:lnSpc>
+                <a:spcPct val="110000"/>
+              </a:lnSpc>
+              <a:spcAft>
+                <a:spcPts val="300"/>
+              </a:spcAft>
+              <a:buNone/>
+            </a:pPr>
+            <a:r>
+              <a:rPr lang="en-US" sz="820" dirty="0">
+                <a:solidFill>
+                  <a:srgbClr val="334155"/>
+                </a:solidFill>
+                <a:latin typeface="Noto Sans KR" pitchFamily="34" charset="0"/>
+                <a:ea typeface="Noto Sans KR" pitchFamily="34" charset="-122"/>
+                <a:cs typeface="Noto Sans KR" pitchFamily="34" charset="-120"/>
+              </a:rPr>
+              <a:t>제로그램 같은 K-브랜드의 국내 소량 생산처 확보 어려움</a:t>
+            </a:r>
+            <a:endParaRPr lang="en-US" sz="820" dirty="0"/>
+          </a:p>
+          <a:p>
+            <a:pPr algn="l" indent="0" marL="0">
+              <a:lnSpc>
+                <a:spcPct val="110000"/>
+              </a:lnSpc>
+              <a:spcAft>
+                <a:spcPts val="300"/>
+              </a:spcAft>
+              <a:buNone/>
+            </a:pPr>
+            <a:r>
+              <a:rPr lang="en-US" sz="820" b="1" dirty="0">
+                <a:solidFill>
+                  <a:srgbClr val="C2410C"/>
+                </a:solidFill>
+                <a:latin typeface="Noto Sans KR" pitchFamily="34" charset="0"/>
+                <a:ea typeface="Noto Sans KR" pitchFamily="34" charset="-122"/>
+                <a:cs typeface="Noto Sans KR" pitchFamily="34" charset="-120"/>
+              </a:rPr>
+              <a:t>② </a:t>
+            </a:r>
+            <a:pPr algn="l" indent="0" marL="0">
+              <a:lnSpc>
+                <a:spcPct val="110000"/>
+              </a:lnSpc>
+              <a:spcAft>
+                <a:spcPts val="300"/>
+              </a:spcAft>
+              <a:buNone/>
+            </a:pPr>
+            <a:r>
+              <a:rPr lang="en-US" sz="820" dirty="0">
+                <a:solidFill>
+                  <a:srgbClr val="334155"/>
+                </a:solidFill>
+                <a:latin typeface="Noto Sans KR" pitchFamily="34" charset="0"/>
+                <a:ea typeface="Noto Sans KR" pitchFamily="34" charset="-122"/>
+                <a:cs typeface="Noto Sans KR" pitchFamily="34" charset="-120"/>
+              </a:rPr>
+              <a:t>수입 브랜드 대비 K-브랜드를 유통할 때의 수수료 · 마진 차이</a:t>
+            </a:r>
+            <a:endParaRPr lang="en-US" sz="820" dirty="0"/>
+          </a:p>
+          <a:p>
+            <a:pPr algn="l" indent="0" marL="0">
+              <a:lnSpc>
+                <a:spcPct val="110000"/>
+              </a:lnSpc>
+              <a:spcAft>
+                <a:spcPts val="300"/>
+              </a:spcAft>
+              <a:buNone/>
+            </a:pPr>
+            <a:r>
+              <a:rPr lang="en-US" sz="820" b="1" dirty="0">
+                <a:solidFill>
+                  <a:srgbClr val="182F48"/>
+                </a:solidFill>
+                <a:latin typeface="Noto Sans KR" pitchFamily="34" charset="0"/>
+                <a:ea typeface="Noto Sans KR" pitchFamily="34" charset="-122"/>
+                <a:cs typeface="Noto Sans KR" pitchFamily="34" charset="-120"/>
+              </a:rPr>
+              <a:t>· </a:t>
+            </a:r>
+            <a:pPr algn="l" indent="0" marL="0">
+              <a:lnSpc>
+                <a:spcPct val="110000"/>
+              </a:lnSpc>
+              <a:spcAft>
+                <a:spcPts val="300"/>
+              </a:spcAft>
+              <a:buNone/>
+            </a:pPr>
+            <a:r>
+              <a:rPr lang="en-US" sz="820" dirty="0">
+                <a:solidFill>
+                  <a:srgbClr val="334155"/>
+                </a:solidFill>
+                <a:latin typeface="Noto Sans KR" pitchFamily="34" charset="0"/>
+                <a:ea typeface="Noto Sans KR" pitchFamily="34" charset="-122"/>
+                <a:cs typeface="Noto Sans KR" pitchFamily="34" charset="-120"/>
+              </a:rPr>
+              <a:t>트레이드 데이와 퍼블릭 랩 데이 중 희망 참가일</a:t>
+            </a:r>
+            <a:endParaRPr lang="en-US" sz="820" dirty="0"/>
+          </a:p>
+          <a:p>
+            <a:pPr algn="l" indent="0" marL="0">
+              <a:lnSpc>
+                <a:spcPct val="110000"/>
+              </a:lnSpc>
+              <a:spcAft>
+                <a:spcPts val="300"/>
+              </a:spcAft>
+              <a:buNone/>
+            </a:pPr>
+            <a:r>
+              <a:rPr lang="en-US" sz="820" b="1" dirty="0">
+                <a:solidFill>
+                  <a:srgbClr val="182F48"/>
+                </a:solidFill>
+                <a:latin typeface="Noto Sans KR" pitchFamily="34" charset="0"/>
+                <a:ea typeface="Noto Sans KR" pitchFamily="34" charset="-122"/>
+                <a:cs typeface="Noto Sans KR" pitchFamily="34" charset="-120"/>
+              </a:rPr>
+              <a:t>· </a:t>
+            </a:r>
+            <a:pPr algn="l" indent="0" marL="0">
+              <a:lnSpc>
+                <a:spcPct val="110000"/>
+              </a:lnSpc>
+              <a:spcAft>
+                <a:spcPts val="300"/>
+              </a:spcAft>
+              <a:buNone/>
+            </a:pPr>
+            <a:r>
+              <a:rPr lang="en-US" sz="820" dirty="0">
+                <a:solidFill>
+                  <a:srgbClr val="334155"/>
+                </a:solidFill>
+                <a:latin typeface="Noto Sans KR" pitchFamily="34" charset="0"/>
+                <a:ea typeface="Noto Sans KR" pitchFamily="34" charset="-122"/>
+                <a:cs typeface="Noto Sans KR" pitchFamily="34" charset="-120"/>
+              </a:rPr>
+              <a:t>부스비 수용 범위(원화)와 9월 말 일정의 시즌 적합성</a:t>
+            </a:r>
+            <a:endParaRPr lang="en-US" sz="820" dirty="0"/>
           </a:p>
         </p:txBody>
       </p:sp>
       <p:sp>
         <p:nvSpPr>
-          <p:cNvPr id="22" name="추가 확인 1"/>
+          <p:cNvPr id="19" name="기획 수정 배경"/>
+          <p:cNvSpPr/>
+          <p:nvPr/>
+        </p:nvSpPr>
+        <p:spPr>
+          <a:xfrm>
+            <a:off x="8202168" y="1755648"/>
+            <a:ext cx="3374136" cy="4517136"/>
+          </a:xfrm>
+          <a:prstGeom prst="roundRect">
+            <a:avLst>
+              <a:gd name="adj" fmla="val 1355"/>
+            </a:avLst>
+          </a:prstGeom>
+          <a:solidFill>
+            <a:srgbClr val="E6F2F3"/>
+          </a:solidFill>
+          <a:ln/>
+        </p:spPr>
+      </p:sp>
+      <p:sp>
+        <p:nvSpPr>
+          <p:cNvPr id="20" name="기획 수정 1"/>
           <p:cNvSpPr txBox="1"/>
           <p:nvPr/>
         </p:nvSpPr>
         <p:spPr>
           <a:xfrm>
-            <a:off x="8586216" y="3941648"/>
-            <a:ext cx="2880360" cy="569068"/>
+            <a:off x="8293608" y="1755648"/>
+            <a:ext cx="3191256" cy="1129284"/>
           </a:xfrm>
           <a:prstGeom prst="rect">
             <a:avLst/>
@@ -34750,20 +35260,40 @@
                 <a:spcPct val="95000"/>
               </a:lnSpc>
               <a:spcAft>
-                <a:spcPts val="150"/>
+                <a:spcPts val="200"/>
               </a:spcAft>
               <a:buNone/>
             </a:pPr>
             <a:r>
               <a:rPr lang="en-US" sz="780" b="1" dirty="0">
                 <a:solidFill>
+                  <a:srgbClr val="267D86"/>
+                </a:solidFill>
+                <a:latin typeface="Noto Sans KR" pitchFamily="34" charset="0"/>
+                <a:ea typeface="Noto Sans KR" pitchFamily="34" charset="-122"/>
+                <a:cs typeface="Noto Sans KR" pitchFamily="34" charset="-120"/>
+              </a:rPr>
+              <a:t>1  </a:t>
+            </a:r>
+            <a:pPr algn="l" indent="0" marL="0">
+              <a:lnSpc>
+                <a:spcPct val="95000"/>
+              </a:lnSpc>
+              <a:spcAft>
+                <a:spcPts val="200"/>
+              </a:spcAft>
+              <a:buNone/>
+            </a:pPr>
+            <a:r>
+              <a:rPr lang="en-US" sz="780" b="1" dirty="0">
+                <a:solidFill>
                   <a:srgbClr val="182F48"/>
                 </a:solidFill>
                 <a:latin typeface="Noto Sans KR" pitchFamily="34" charset="0"/>
                 <a:ea typeface="Noto Sans KR" pitchFamily="34" charset="-122"/>
                 <a:cs typeface="Noto Sans KR" pitchFamily="34" charset="-120"/>
               </a:rPr>
-              <a:t>① 국내 소량 생산처</a:t>
+              <a:t>공동 Test Lab(샤워부스 · 얼음 바닥)을 주최 측이 설치</a:t>
             </a:r>
             <a:endParaRPr lang="en-US" sz="780" dirty="0"/>
           </a:p>
@@ -34773,7 +35303,7 @@
                 <a:spcPct val="95000"/>
               </a:lnSpc>
               <a:spcAft>
-                <a:spcPts val="150"/>
+                <a:spcPts val="200"/>
               </a:spcAft>
               <a:buNone/>
             </a:pPr>
@@ -34786,22 +35316,85 @@
                 <a:ea typeface="Noto Sans KR" pitchFamily="34" charset="-122"/>
                 <a:cs typeface="Noto Sans KR" pitchFamily="34" charset="-120"/>
               </a:rPr>
-              <a:t>제로그램 같은 K-브랜드의 생산처 확보 어려움</a:t>
+              <a:t>     </a:t>
+            </a:r>
+            <a:pPr algn="l" indent="0" marL="0">
+              <a:lnSpc>
+                <a:spcPct val="95000"/>
+              </a:lnSpc>
+              <a:spcAft>
+                <a:spcPts val="200"/>
+              </a:spcAft>
+              <a:buNone/>
+            </a:pPr>
+            <a:r>
+              <a:rPr lang="en-US" sz="780" dirty="0">
+                <a:solidFill>
+                  <a:srgbClr val="64748B"/>
+                </a:solidFill>
+                <a:latin typeface="Noto Sans KR" pitchFamily="34" charset="0"/>
+                <a:ea typeface="Noto Sans KR" pitchFamily="34" charset="-122"/>
+                <a:cs typeface="Noto Sans KR" pitchFamily="34" charset="-120"/>
+              </a:rPr>
+              <a:t>근거 Q5 · Q6: 시연 공간과 비용 대비 효과가 장벽</a:t>
             </a:r>
             <a:endParaRPr lang="en-US" sz="780" dirty="0"/>
           </a:p>
+          <a:p>
+            <a:pPr algn="l" indent="0" marL="0">
+              <a:lnSpc>
+                <a:spcPct val="95000"/>
+              </a:lnSpc>
+              <a:spcAft>
+                <a:spcPts val="200"/>
+              </a:spcAft>
+              <a:buNone/>
+            </a:pPr>
+            <a:r>
+              <a:rPr lang="en-US" sz="780" dirty="0">
+                <a:solidFill>
+                  <a:srgbClr val="334155"/>
+                </a:solidFill>
+                <a:latin typeface="Noto Sans KR" pitchFamily="34" charset="0"/>
+                <a:ea typeface="Noto Sans KR" pitchFamily="34" charset="-122"/>
+                <a:cs typeface="Noto Sans KR" pitchFamily="34" charset="-120"/>
+              </a:rPr>
+              <a:t>     </a:t>
+            </a:r>
+            <a:pPr algn="l" indent="0" marL="0">
+              <a:lnSpc>
+                <a:spcPct val="95000"/>
+              </a:lnSpc>
+              <a:spcAft>
+                <a:spcPts val="200"/>
+              </a:spcAft>
+              <a:buNone/>
+            </a:pPr>
+            <a:r>
+              <a:rPr lang="en-US" sz="780" dirty="0">
+                <a:solidFill>
+                  <a:srgbClr val="334155"/>
+                </a:solidFill>
+                <a:latin typeface="Noto Sans KR" pitchFamily="34" charset="0"/>
+                <a:ea typeface="Noto Sans KR" pitchFamily="34" charset="-122"/>
+                <a:cs typeface="Noto Sans KR" pitchFamily="34" charset="-120"/>
+              </a:rPr>
+              <a:t>→ 브랜드마다 시연 공간을 만들 부담을 덜어 준다 (2장)</a:t>
+            </a:r>
+            <a:endParaRPr lang="en-US" sz="780" dirty="0"/>
+          </a:p>
         </p:txBody>
       </p:sp>
       <p:sp>
         <p:nvSpPr>
-          <p:cNvPr id="23" name="추가 확인 2"/>
+          <p:cNvPr id="21" name="기획 수정 2"/>
           <p:cNvSpPr txBox="1"/>
           <p:nvPr/>
         </p:nvSpPr>
         <p:spPr>
           <a:xfrm>
-            <a:off x="8586216" y="4510716"/>
-            <a:ext cx="2880360" cy="569068"/>
+            <a:off x="8293608" y="2884932"/>
+            <a:ext cx="3191256" cy="1129284"/>
           </a:xfrm>
           <a:prstGeom prst="rect">
             <a:avLst/>
@@ -34818,20 +35411,40 @@
                 <a:spcPct val="95000"/>
               </a:lnSpc>
               <a:spcAft>
-                <a:spcPts val="150"/>
+                <a:spcPts val="200"/>
               </a:spcAft>
               <a:buNone/>
             </a:pPr>
             <a:r>
               <a:rPr lang="en-US" sz="780" b="1" dirty="0">
                 <a:solidFill>
+                  <a:srgbClr val="267D86"/>
+                </a:solidFill>
+                <a:latin typeface="Noto Sans KR" pitchFamily="34" charset="0"/>
+                <a:ea typeface="Noto Sans KR" pitchFamily="34" charset="-122"/>
+                <a:cs typeface="Noto Sans KR" pitchFamily="34" charset="-120"/>
+              </a:rPr>
+              <a:t>2  </a:t>
+            </a:r>
+            <a:pPr algn="l" indent="0" marL="0">
+              <a:lnSpc>
+                <a:spcPct val="95000"/>
+              </a:lnSpc>
+              <a:spcAft>
+                <a:spcPts val="200"/>
+              </a:spcAft>
+              <a:buNone/>
+            </a:pPr>
+            <a:r>
+              <a:rPr lang="en-US" sz="780" b="1" dirty="0">
+                <a:solidFill>
                   <a:srgbClr val="182F48"/>
                 </a:solidFill>
                 <a:latin typeface="Noto Sans KR" pitchFamily="34" charset="0"/>
                 <a:ea typeface="Noto Sans KR" pitchFamily="34" charset="-122"/>
                 <a:cs typeface="Noto Sans KR" pitchFamily="34" charset="-120"/>
               </a:rPr>
-              <a:t>② 유통 수수료 · 마진</a:t>
+              <a:t>관람객의 '수'보다 '관심도'를 지표로</a:t>
             </a:r>
             <a:endParaRPr lang="en-US" sz="780" dirty="0"/>
           </a:p>
@@ -34841,7 +35454,7 @@
                 <a:spcPct val="95000"/>
               </a:lnSpc>
               <a:spcAft>
-                <a:spcPts val="150"/>
+                <a:spcPts val="200"/>
               </a:spcAft>
               <a:buNone/>
             </a:pPr>
@@ -34854,22 +35467,85 @@
                 <a:ea typeface="Noto Sans KR" pitchFamily="34" charset="-122"/>
                 <a:cs typeface="Noto Sans KR" pitchFamily="34" charset="-120"/>
               </a:rPr>
-              <a:t>수입 브랜드 대비 K-브랜드 유통의 마진 차이</a:t>
+              <a:t>     </a:t>
+            </a:r>
+            <a:pPr algn="l" indent="0" marL="0">
+              <a:lnSpc>
+                <a:spcPct val="95000"/>
+              </a:lnSpc>
+              <a:spcAft>
+                <a:spcPts val="200"/>
+              </a:spcAft>
+              <a:buNone/>
+            </a:pPr>
+            <a:r>
+              <a:rPr lang="en-US" sz="780" dirty="0">
+                <a:solidFill>
+                  <a:srgbClr val="64748B"/>
+                </a:solidFill>
+                <a:latin typeface="Noto Sans KR" pitchFamily="34" charset="0"/>
+                <a:ea typeface="Noto Sans KR" pitchFamily="34" charset="-122"/>
+                <a:cs typeface="Noto Sans KR" pitchFamily="34" charset="-120"/>
+              </a:rPr>
+              <a:t>근거 Q3 · Q7: 참여 조건은 관심 고객, 성공 기준은 반응</a:t>
             </a:r>
             <a:endParaRPr lang="en-US" sz="780" dirty="0"/>
           </a:p>
+          <a:p>
+            <a:pPr algn="l" indent="0" marL="0">
+              <a:lnSpc>
+                <a:spcPct val="95000"/>
+              </a:lnSpc>
+              <a:spcAft>
+                <a:spcPts val="200"/>
+              </a:spcAft>
+              <a:buNone/>
+            </a:pPr>
+            <a:r>
+              <a:rPr lang="en-US" sz="780" dirty="0">
+                <a:solidFill>
+                  <a:srgbClr val="334155"/>
+                </a:solidFill>
+                <a:latin typeface="Noto Sans KR" pitchFamily="34" charset="0"/>
+                <a:ea typeface="Noto Sans KR" pitchFamily="34" charset="-122"/>
+                <a:cs typeface="Noto Sans KR" pitchFamily="34" charset="-120"/>
+              </a:rPr>
+              <a:t>     </a:t>
+            </a:r>
+            <a:pPr algn="l" indent="0" marL="0">
+              <a:lnSpc>
+                <a:spcPct val="95000"/>
+              </a:lnSpc>
+              <a:spcAft>
+                <a:spcPts val="200"/>
+              </a:spcAft>
+              <a:buNone/>
+            </a:pPr>
+            <a:r>
+              <a:rPr lang="en-US" sz="780" dirty="0">
+                <a:solidFill>
+                  <a:srgbClr val="334155"/>
+                </a:solidFill>
+                <a:latin typeface="Noto Sans KR" pitchFamily="34" charset="0"/>
+                <a:ea typeface="Noto Sans KR" pitchFamily="34" charset="-122"/>
+                <a:cs typeface="Noto Sans KR" pitchFamily="34" charset="-120"/>
+              </a:rPr>
+              <a:t>→ 관심사 사전등록 · Test Lab 체험률을 함께 잰다 (3장)</a:t>
+            </a:r>
+            <a:endParaRPr lang="en-US" sz="780" dirty="0"/>
+          </a:p>
         </p:txBody>
       </p:sp>
       <p:sp>
         <p:nvSpPr>
-          <p:cNvPr id="24" name="추가 확인 3"/>
+          <p:cNvPr id="22" name="기획 수정 3"/>
           <p:cNvSpPr txBox="1"/>
           <p:nvPr/>
         </p:nvSpPr>
         <p:spPr>
           <a:xfrm>
-            <a:off x="8586216" y="5079784"/>
-            <a:ext cx="2880360" cy="569068"/>
+            <a:off x="8293608" y="4014216"/>
+            <a:ext cx="3191256" cy="1129284"/>
           </a:xfrm>
           <a:prstGeom prst="rect">
             <a:avLst/>
@@ -34886,20 +35562,40 @@
                 <a:spcPct val="95000"/>
               </a:lnSpc>
               <a:spcAft>
-                <a:spcPts val="150"/>
+                <a:spcPts val="200"/>
               </a:spcAft>
               <a:buNone/>
             </a:pPr>
             <a:r>
               <a:rPr lang="en-US" sz="780" b="1" dirty="0">
                 <a:solidFill>
+                  <a:srgbClr val="267D86"/>
+                </a:solidFill>
+                <a:latin typeface="Noto Sans KR" pitchFamily="34" charset="0"/>
+                <a:ea typeface="Noto Sans KR" pitchFamily="34" charset="-122"/>
+                <a:cs typeface="Noto Sans KR" pitchFamily="34" charset="-120"/>
+              </a:rPr>
+              <a:t>3  </a:t>
+            </a:r>
+            <a:pPr algn="l" indent="0" marL="0">
+              <a:lnSpc>
+                <a:spcPct val="95000"/>
+              </a:lnSpc>
+              <a:spcAft>
+                <a:spcPts val="200"/>
+              </a:spcAft>
+              <a:buNone/>
+            </a:pPr>
+            <a:r>
+              <a:rPr lang="en-US" sz="780" b="1" dirty="0">
+                <a:solidFill>
                   <a:srgbClr val="182F48"/>
                 </a:solidFill>
                 <a:latin typeface="Noto Sans KR" pitchFamily="34" charset="0"/>
                 <a:ea typeface="Noto Sans KR" pitchFamily="34" charset="-122"/>
                 <a:cs typeface="Noto Sans KR" pitchFamily="34" charset="-120"/>
               </a:rPr>
-              <a:t>③ 희망 참가일</a:t>
+              <a:t>참가업체를 목적별로 나눠 연결</a:t>
             </a:r>
             <a:endParaRPr lang="en-US" sz="780" dirty="0"/>
           </a:p>
@@ -34909,7 +35605,7 @@
                 <a:spcPct val="95000"/>
               </a:lnSpc>
               <a:spcAft>
-                <a:spcPts val="150"/>
+                <a:spcPts val="200"/>
               </a:spcAft>
               <a:buNone/>
             </a:pPr>
@@ -34922,22 +35618,85 @@
                 <a:ea typeface="Noto Sans KR" pitchFamily="34" charset="-122"/>
                 <a:cs typeface="Noto Sans KR" pitchFamily="34" charset="-120"/>
               </a:rPr>
-              <a:t>트레이드 데이와 퍼블릭 랩 데이 중 어느 쪽인지</a:t>
+              <a:t>     </a:t>
+            </a:r>
+            <a:pPr algn="l" indent="0" marL="0">
+              <a:lnSpc>
+                <a:spcPct val="95000"/>
+              </a:lnSpc>
+              <a:spcAft>
+                <a:spcPts val="200"/>
+              </a:spcAft>
+              <a:buNone/>
+            </a:pPr>
+            <a:r>
+              <a:rPr lang="en-US" sz="780" dirty="0">
+                <a:solidFill>
+                  <a:srgbClr val="64748B"/>
+                </a:solidFill>
+                <a:latin typeface="Noto Sans KR" pitchFamily="34" charset="0"/>
+                <a:ea typeface="Noto Sans KR" pitchFamily="34" charset="-122"/>
+                <a:cs typeface="Noto Sans KR" pitchFamily="34" charset="-120"/>
+              </a:rPr>
+              <a:t>근거 Q8: 고가 브랜드는 판매보다 브랜드 홍보가 목적</a:t>
             </a:r>
             <a:endParaRPr lang="en-US" sz="780" dirty="0"/>
           </a:p>
+          <a:p>
+            <a:pPr algn="l" indent="0" marL="0">
+              <a:lnSpc>
+                <a:spcPct val="95000"/>
+              </a:lnSpc>
+              <a:spcAft>
+                <a:spcPts val="200"/>
+              </a:spcAft>
+              <a:buNone/>
+            </a:pPr>
+            <a:r>
+              <a:rPr lang="en-US" sz="780" dirty="0">
+                <a:solidFill>
+                  <a:srgbClr val="334155"/>
+                </a:solidFill>
+                <a:latin typeface="Noto Sans KR" pitchFamily="34" charset="0"/>
+                <a:ea typeface="Noto Sans KR" pitchFamily="34" charset="-122"/>
+                <a:cs typeface="Noto Sans KR" pitchFamily="34" charset="-120"/>
+              </a:rPr>
+              <a:t>     </a:t>
+            </a:r>
+            <a:pPr algn="l" indent="0" marL="0">
+              <a:lnSpc>
+                <a:spcPct val="95000"/>
+              </a:lnSpc>
+              <a:spcAft>
+                <a:spcPts val="200"/>
+              </a:spcAft>
+              <a:buNone/>
+            </a:pPr>
+            <a:r>
+              <a:rPr lang="en-US" sz="780" dirty="0">
+                <a:solidFill>
+                  <a:srgbClr val="334155"/>
+                </a:solidFill>
+                <a:latin typeface="Noto Sans KR" pitchFamily="34" charset="0"/>
+                <a:ea typeface="Noto Sans KR" pitchFamily="34" charset="-122"/>
+                <a:cs typeface="Noto Sans KR" pitchFamily="34" charset="-120"/>
+              </a:rPr>
+              <a:t>→ 해외 앵커는 관심 고객과, K-브랜드는 바이어와 (5장)</a:t>
+            </a:r>
+            <a:endParaRPr lang="en-US" sz="780" dirty="0"/>
+          </a:p>
         </p:txBody>
       </p:sp>
       <p:sp>
         <p:nvSpPr>
-          <p:cNvPr id="25" name="추가 확인 4"/>
+          <p:cNvPr id="23" name="기획 수정 4"/>
           <p:cNvSpPr txBox="1"/>
           <p:nvPr/>
         </p:nvSpPr>
         <p:spPr>
           <a:xfrm>
-            <a:off x="8586216" y="5648852"/>
-            <a:ext cx="2880360" cy="569068"/>
+            <a:off x="8293608" y="5143500"/>
+            <a:ext cx="3191256" cy="1129284"/>
           </a:xfrm>
           <a:prstGeom prst="rect">
             <a:avLst/>
@@ -34954,20 +35713,40 @@
                 <a:spcPct val="95000"/>
               </a:lnSpc>
               <a:spcAft>
-                <a:spcPts val="150"/>
+                <a:spcPts val="200"/>
               </a:spcAft>
               <a:buNone/>
             </a:pPr>
             <a:r>
               <a:rPr lang="en-US" sz="780" b="1" dirty="0">
                 <a:solidFill>
+                  <a:srgbClr val="267D86"/>
+                </a:solidFill>
+                <a:latin typeface="Noto Sans KR" pitchFamily="34" charset="0"/>
+                <a:ea typeface="Noto Sans KR" pitchFamily="34" charset="-122"/>
+                <a:cs typeface="Noto Sans KR" pitchFamily="34" charset="-120"/>
+              </a:rPr>
+              <a:t>4  </a:t>
+            </a:r>
+            <a:pPr algn="l" indent="0" marL="0">
+              <a:lnSpc>
+                <a:spcPct val="95000"/>
+              </a:lnSpc>
+              <a:spcAft>
+                <a:spcPts val="200"/>
+              </a:spcAft>
+              <a:buNone/>
+            </a:pPr>
+            <a:r>
+              <a:rPr lang="en-US" sz="780" b="1" dirty="0">
+                <a:solidFill>
                   <a:srgbClr val="182F48"/>
                 </a:solidFill>
                 <a:latin typeface="Noto Sans KR" pitchFamily="34" charset="0"/>
                 <a:ea typeface="Noto Sans KR" pitchFamily="34" charset="-122"/>
                 <a:cs typeface="Noto Sans KR" pitchFamily="34" charset="-120"/>
               </a:rPr>
-              <a:t>④ 부스비 · 일정</a:t>
+              <a:t>인플루언서 · 모델 섭외를 미디어 파트너가 지원</a:t>
             </a:r>
             <a:endParaRPr lang="en-US" sz="780" dirty="0"/>
           </a:p>
@@ -34977,7 +35756,7 @@
                 <a:spcPct val="95000"/>
               </a:lnSpc>
               <a:spcAft>
-                <a:spcPts val="150"/>
+                <a:spcPts val="200"/>
               </a:spcAft>
               <a:buNone/>
             </a:pPr>
@@ -34990,7 +35769,70 @@
                 <a:ea typeface="Noto Sans KR" pitchFamily="34" charset="-122"/>
                 <a:cs typeface="Noto Sans KR" pitchFamily="34" charset="-120"/>
               </a:rPr>
-              <a:t>원화 기준 수용 범위와 9월 말 일정의 시즌 적합성</a:t>
+              <a:t>     </a:t>
+            </a:r>
+            <a:pPr algn="l" indent="0" marL="0">
+              <a:lnSpc>
+                <a:spcPct val="95000"/>
+              </a:lnSpc>
+              <a:spcAft>
+                <a:spcPts val="200"/>
+              </a:spcAft>
+              <a:buNone/>
+            </a:pPr>
+            <a:r>
+              <a:rPr lang="en-US" sz="780" dirty="0">
+                <a:solidFill>
+                  <a:srgbClr val="64748B"/>
+                </a:solidFill>
+                <a:latin typeface="Noto Sans KR" pitchFamily="34" charset="0"/>
+                <a:ea typeface="Noto Sans KR" pitchFamily="34" charset="-122"/>
+                <a:cs typeface="Noto Sans KR" pitchFamily="34" charset="-120"/>
+              </a:rPr>
+              <a:t>근거 Q6: 인플루언서 · 모델 일정 조율이 참여 장애</a:t>
+            </a:r>
+            <a:endParaRPr lang="en-US" sz="780" dirty="0"/>
+          </a:p>
+          <a:p>
+            <a:pPr algn="l" indent="0" marL="0">
+              <a:lnSpc>
+                <a:spcPct val="95000"/>
+              </a:lnSpc>
+              <a:spcAft>
+                <a:spcPts val="200"/>
+              </a:spcAft>
+              <a:buNone/>
+            </a:pPr>
+            <a:r>
+              <a:rPr lang="en-US" sz="780" dirty="0">
+                <a:solidFill>
+                  <a:srgbClr val="334155"/>
+                </a:solidFill>
+                <a:latin typeface="Noto Sans KR" pitchFamily="34" charset="0"/>
+                <a:ea typeface="Noto Sans KR" pitchFamily="34" charset="-122"/>
+                <a:cs typeface="Noto Sans KR" pitchFamily="34" charset="-120"/>
+              </a:rPr>
+              <a:t>     </a:t>
+            </a:r>
+            <a:pPr algn="l" indent="0" marL="0">
+              <a:lnSpc>
+                <a:spcPct val="95000"/>
+              </a:lnSpc>
+              <a:spcAft>
+                <a:spcPts val="200"/>
+              </a:spcAft>
+              <a:buNone/>
+            </a:pPr>
+            <a:r>
+              <a:rPr lang="en-US" sz="780" dirty="0">
+                <a:solidFill>
+                  <a:srgbClr val="334155"/>
+                </a:solidFill>
+                <a:latin typeface="Noto Sans KR" pitchFamily="34" charset="0"/>
+                <a:ea typeface="Noto Sans KR" pitchFamily="34" charset="-122"/>
+                <a:cs typeface="Noto Sans KR" pitchFamily="34" charset="-120"/>
+              </a:rPr>
+              <a:t>→ GO OUT KOREA · 패션비즈와 협력 (6장)</a:t>
             </a:r>
             <a:endParaRPr lang="en-US" sz="780" dirty="0"/>
           </a:p>
@@ -36540,7 +37382,7 @@
                           <a:ea typeface="Noto Sans KR" pitchFamily="34" charset="-122"/>
                           <a:cs typeface="Noto Sans KR" pitchFamily="34" charset="-120"/>
                         </a:rPr>
-                        <a:t>압구정점은 판매 시간(12시) 전이라 전화가 연결되지 않았다.</a:t>
+                        <a:t>매장 전화가 연결되지 않았다.</a:t>
                       </a:r>
                       <a:endParaRPr lang="en-US" sz="800" dirty="0">
                         <a:latin typeface="Noto Sans KR" charset="0"/>
@@ -36637,14 +37479,14 @@
       </p:graphicFrame>
       <p:sp>
         <p:nvSpPr>
-          <p:cNvPr id="8" name="제목 연결되지 않은 이유"/>
+          <p:cNvPr id="8" name="제목 사전 가정 H5~H8 (바이어 측)"/>
           <p:cNvSpPr txBox="1"/>
           <p:nvPr/>
         </p:nvSpPr>
         <p:spPr>
           <a:xfrm>
-            <a:off x="612648" y="3182031"/>
-            <a:ext cx="3532632" cy="237744"/>
+            <a:off x="612648" y="3145455"/>
+            <a:ext cx="3611880" cy="237744"/>
           </a:xfrm>
           <a:prstGeom prst="rect">
             <a:avLst/>
@@ -36671,7 +37513,7 @@
                 <a:ea typeface="Noto Sans KR" pitchFamily="34" charset="-122"/>
                 <a:cs typeface="Noto Sans KR" pitchFamily="34" charset="-120"/>
               </a:rPr>
-              <a:t>연결되지 않은 이유</a:t>
+              <a:t>사전 가정 H5~H8 (바이어 측)</a:t>
             </a:r>
             <a:endParaRPr lang="en-US" sz="1050" dirty="0"/>
           </a:p>
@@ -36679,14 +37521,292 @@
       </p:sp>
       <p:sp>
         <p:nvSpPr>
-          <p:cNvPr id="9" name="제목 사전 가정"/>
+          <p:cNvPr id="9" name="바이어 사전 가정"/>
           <p:cNvSpPr txBox="1"/>
           <p:nvPr/>
         </p:nvSpPr>
         <p:spPr>
           <a:xfrm>
-            <a:off x="4328160" y="3182031"/>
-            <a:ext cx="3532632" cy="237744"/>
+            <a:off x="612648" y="3419775"/>
+            <a:ext cx="3611880" cy="914400"/>
+          </a:xfrm>
+          <a:prstGeom prst="roundRect">
+            <a:avLst>
+              <a:gd name="adj" fmla="val 5000"/>
+            </a:avLst>
+          </a:prstGeom>
+          <a:solidFill>
+            <a:srgbClr val="E6F2F3"/>
+          </a:solidFill>
+          <a:ln/>
+        </p:spPr>
+        <p:txBody>
+          <a:bodyPr wrap="square" lIns="91440" tIns="0" rIns="91440" bIns="0" rtlCol="0" anchor="ctr"/>
+          <a:lstStyle/>
+          <a:p>
+            <a:pPr algn="l" indent="0" marL="0">
+              <a:lnSpc>
+                <a:spcPct val="95000"/>
+              </a:lnSpc>
+              <a:spcAft>
+                <a:spcPts val="250"/>
+              </a:spcAft>
+              <a:buNone/>
+            </a:pPr>
+            <a:r>
+              <a:rPr lang="en-US" sz="760" b="1" dirty="0">
+                <a:solidFill>
+                  <a:srgbClr val="267D86"/>
+                </a:solidFill>
+                <a:latin typeface="Noto Sans KR" pitchFamily="34" charset="0"/>
+                <a:ea typeface="Noto Sans KR" pitchFamily="34" charset="-122"/>
+                <a:cs typeface="Noto Sans KR" pitchFamily="34" charset="-120"/>
+              </a:rPr>
+              <a:t>H5  </a:t>
+            </a:r>
+            <a:pPr algn="l" indent="0" marL="0">
+              <a:lnSpc>
+                <a:spcPct val="95000"/>
+              </a:lnSpc>
+              <a:spcAft>
+                <a:spcPts val="250"/>
+              </a:spcAft>
+              <a:buNone/>
+            </a:pPr>
+            <a:r>
+              <a:rPr lang="en-US" sz="760" b="1" dirty="0">
+                <a:solidFill>
+                  <a:srgbClr val="182F48"/>
+                </a:solidFill>
+                <a:latin typeface="Noto Sans KR" pitchFamily="34" charset="0"/>
+                <a:ea typeface="Noto Sans KR" pitchFamily="34" charset="-122"/>
+                <a:cs typeface="Noto Sans KR" pitchFamily="34" charset="-120"/>
+              </a:rPr>
+              <a:t>편집숍 바이어는 신진 K-고프코어를 한 번에 볼 창구가 없다</a:t>
+            </a:r>
+            <a:pPr algn="l" indent="0" marL="0">
+              <a:lnSpc>
+                <a:spcPct val="95000"/>
+              </a:lnSpc>
+              <a:spcAft>
+                <a:spcPts val="250"/>
+              </a:spcAft>
+              <a:buNone/>
+            </a:pPr>
+            <a:r>
+              <a:rPr lang="en-US" sz="760" b="1" dirty="0">
+                <a:solidFill>
+                  <a:srgbClr val="C2410C"/>
+                </a:solidFill>
+                <a:latin typeface="Noto Sans KR" pitchFamily="34" charset="0"/>
+                <a:ea typeface="Noto Sans KR" pitchFamily="34" charset="-122"/>
+                <a:cs typeface="Noto Sans KR" pitchFamily="34" charset="-120"/>
+              </a:rPr>
+              <a:t>  ②</a:t>
+            </a:r>
+            <a:endParaRPr lang="en-US" sz="760" dirty="0"/>
+          </a:p>
+          <a:p>
+            <a:pPr algn="l" indent="0" marL="0">
+              <a:lnSpc>
+                <a:spcPct val="95000"/>
+              </a:lnSpc>
+              <a:spcAft>
+                <a:spcPts val="250"/>
+              </a:spcAft>
+              <a:buNone/>
+            </a:pPr>
+            <a:r>
+              <a:rPr lang="en-US" sz="760" b="1" dirty="0">
+                <a:solidFill>
+                  <a:srgbClr val="267D86"/>
+                </a:solidFill>
+                <a:latin typeface="Noto Sans KR" pitchFamily="34" charset="0"/>
+                <a:ea typeface="Noto Sans KR" pitchFamily="34" charset="-122"/>
+                <a:cs typeface="Noto Sans KR" pitchFamily="34" charset="-120"/>
+              </a:rPr>
+              <a:t>H6  </a:t>
+            </a:r>
+            <a:pPr algn="l" indent="0" marL="0">
+              <a:lnSpc>
+                <a:spcPct val="95000"/>
+              </a:lnSpc>
+              <a:spcAft>
+                <a:spcPts val="250"/>
+              </a:spcAft>
+              <a:buNone/>
+            </a:pPr>
+            <a:r>
+              <a:rPr lang="en-US" sz="760" b="1" dirty="0">
+                <a:solidFill>
+                  <a:srgbClr val="182F48"/>
+                </a:solidFill>
+                <a:latin typeface="Noto Sans KR" pitchFamily="34" charset="0"/>
+                <a:ea typeface="Noto Sans KR" pitchFamily="34" charset="-122"/>
+                <a:cs typeface="Noto Sans KR" pitchFamily="34" charset="-120"/>
+              </a:rPr>
+              <a:t>신진 브랜드는 물량·납기·품질이 불안해 들여오기를 망설인다</a:t>
+            </a:r>
+            <a:pPr algn="l" indent="0" marL="0">
+              <a:lnSpc>
+                <a:spcPct val="95000"/>
+              </a:lnSpc>
+              <a:spcAft>
+                <a:spcPts val="250"/>
+              </a:spcAft>
+              <a:buNone/>
+            </a:pPr>
+            <a:r>
+              <a:rPr lang="en-US" sz="760" b="1" dirty="0">
+                <a:solidFill>
+                  <a:srgbClr val="C2410C"/>
+                </a:solidFill>
+                <a:latin typeface="Noto Sans KR" pitchFamily="34" charset="0"/>
+                <a:ea typeface="Noto Sans KR" pitchFamily="34" charset="-122"/>
+                <a:cs typeface="Noto Sans KR" pitchFamily="34" charset="-120"/>
+              </a:rPr>
+              <a:t>  ①</a:t>
+            </a:r>
+            <a:endParaRPr lang="en-US" sz="760" dirty="0"/>
+          </a:p>
+          <a:p>
+            <a:pPr algn="l" indent="0" marL="0">
+              <a:lnSpc>
+                <a:spcPct val="95000"/>
+              </a:lnSpc>
+              <a:spcAft>
+                <a:spcPts val="250"/>
+              </a:spcAft>
+              <a:buNone/>
+            </a:pPr>
+            <a:r>
+              <a:rPr lang="en-US" sz="760" b="1" dirty="0">
+                <a:solidFill>
+                  <a:srgbClr val="267D86"/>
+                </a:solidFill>
+                <a:latin typeface="Noto Sans KR" pitchFamily="34" charset="0"/>
+                <a:ea typeface="Noto Sans KR" pitchFamily="34" charset="-122"/>
+                <a:cs typeface="Noto Sans KR" pitchFamily="34" charset="-120"/>
+              </a:rPr>
+              <a:t>H7  </a:t>
+            </a:r>
+            <a:pPr algn="l" indent="0" marL="0">
+              <a:lnSpc>
+                <a:spcPct val="95000"/>
+              </a:lnSpc>
+              <a:spcAft>
+                <a:spcPts val="250"/>
+              </a:spcAft>
+              <a:buNone/>
+            </a:pPr>
+            <a:r>
+              <a:rPr lang="en-US" sz="760" b="1" dirty="0">
+                <a:solidFill>
+                  <a:srgbClr val="182F48"/>
+                </a:solidFill>
+                <a:latin typeface="Noto Sans KR" pitchFamily="34" charset="0"/>
+                <a:ea typeface="Noto Sans KR" pitchFamily="34" charset="-122"/>
+                <a:cs typeface="Noto Sans KR" pitchFamily="34" charset="-120"/>
+              </a:rPr>
+              <a:t>바이어는 방수·보온 시험 결과를 구매 판단에 쓴다</a:t>
+            </a:r>
+            <a:pPr algn="l" indent="0" marL="0">
+              <a:lnSpc>
+                <a:spcPct val="95000"/>
+              </a:lnSpc>
+              <a:spcAft>
+                <a:spcPts val="250"/>
+              </a:spcAft>
+              <a:buNone/>
+            </a:pPr>
+            <a:r>
+              <a:rPr lang="en-US" sz="760" b="1" dirty="0">
+                <a:solidFill>
+                  <a:srgbClr val="C2410C"/>
+                </a:solidFill>
+                <a:latin typeface="Noto Sans KR" pitchFamily="34" charset="0"/>
+                <a:ea typeface="Noto Sans KR" pitchFamily="34" charset="-122"/>
+                <a:cs typeface="Noto Sans KR" pitchFamily="34" charset="-120"/>
+              </a:rPr>
+              <a:t>  기능</a:t>
+            </a:r>
+            <a:endParaRPr lang="en-US" sz="760" dirty="0"/>
+          </a:p>
+          <a:p>
+            <a:pPr algn="l" indent="0" marL="0">
+              <a:lnSpc>
+                <a:spcPct val="95000"/>
+              </a:lnSpc>
+              <a:spcAft>
+                <a:spcPts val="250"/>
+              </a:spcAft>
+              <a:buNone/>
+            </a:pPr>
+            <a:r>
+              <a:rPr lang="en-US" sz="760" b="1" dirty="0">
+                <a:solidFill>
+                  <a:srgbClr val="267D86"/>
+                </a:solidFill>
+                <a:latin typeface="Noto Sans KR" pitchFamily="34" charset="0"/>
+                <a:ea typeface="Noto Sans KR" pitchFamily="34" charset="-122"/>
+                <a:cs typeface="Noto Sans KR" pitchFamily="34" charset="-120"/>
+              </a:rPr>
+              <a:t>H8  </a:t>
+            </a:r>
+            <a:pPr algn="l" indent="0" marL="0">
+              <a:lnSpc>
+                <a:spcPct val="95000"/>
+              </a:lnSpc>
+              <a:spcAft>
+                <a:spcPts val="250"/>
+              </a:spcAft>
+              <a:buNone/>
+            </a:pPr>
+            <a:r>
+              <a:rPr lang="en-US" sz="760" b="1" dirty="0">
+                <a:solidFill>
+                  <a:srgbClr val="182F48"/>
+                </a:solidFill>
+                <a:latin typeface="Noto Sans KR" pitchFamily="34" charset="0"/>
+                <a:ea typeface="Noto Sans KR" pitchFamily="34" charset="-122"/>
+                <a:cs typeface="Noto Sans KR" pitchFamily="34" charset="-120"/>
+              </a:rPr>
+              <a:t>한자리 비교와 1:1 사전 상담이 있으면 바이어로 참관한다</a:t>
+            </a:r>
+            <a:pPr algn="l" indent="0" marL="0">
+              <a:lnSpc>
+                <a:spcPct val="95000"/>
+              </a:lnSpc>
+              <a:spcAft>
+                <a:spcPts val="250"/>
+              </a:spcAft>
+              <a:buNone/>
+            </a:pPr>
+            <a:r>
+              <a:rPr lang="en-US" sz="760" b="1" dirty="0">
+                <a:solidFill>
+                  <a:srgbClr val="C2410C"/>
+                </a:solidFill>
+                <a:latin typeface="Noto Sans KR" pitchFamily="34" charset="0"/>
+                <a:ea typeface="Noto Sans KR" pitchFamily="34" charset="-122"/>
+                <a:cs typeface="Noto Sans KR" pitchFamily="34" charset="-120"/>
+              </a:rPr>
+              <a:t>  실현성</a:t>
+            </a:r>
+            <a:endParaRPr lang="en-US" sz="760" dirty="0"/>
+          </a:p>
+        </p:txBody>
+      </p:sp>
+      <p:sp>
+        <p:nvSpPr>
+          <p:cNvPr id="10" name="제목 가정이 틀리면 이렇게 바꾼다"/>
+          <p:cNvSpPr txBox="1"/>
+          <p:nvPr/>
+        </p:nvSpPr>
+        <p:spPr>
+          <a:xfrm>
+            <a:off x="612648" y="4443903"/>
+            <a:ext cx="3611880" cy="237744"/>
           </a:xfrm>
           <a:prstGeom prst="rect">
             <a:avLst/>
@@ -36713,22 +37833,580 @@
                 <a:ea typeface="Noto Sans KR" pitchFamily="34" charset="-122"/>
                 <a:cs typeface="Noto Sans KR" pitchFamily="34" charset="-120"/>
               </a:rPr>
-              <a:t>사전 가정</a:t>
+              <a:t>가정이 틀리면 이렇게 바꾼다</a:t>
             </a:r>
             <a:endParaRPr lang="en-US" sz="1050" dirty="0"/>
           </a:p>
         </p:txBody>
       </p:sp>
-      <p:sp>
-        <p:nvSpPr>
-          <p:cNvPr id="10" name="제목 준비한 질문 · 대본 (별도 PDF 5쪽)"/>
+      <p:graphicFrame>
+        <p:nvGraphicFramePr>
+          <p:cNvPr id="19" name="가정 실패 시 대응"/>
+          <p:cNvGraphicFramePr>
+            <a:graphicFrameLocks noGrp="1"/>
+          </p:cNvGraphicFramePr>
+          <p:nvPr>
+            <p:extLst>
+              <p:ext uri="{D42A27DB-BD31-4B8C-83A1-F6EECF244321}">
+                <p14:modId xmlns:p14="http://schemas.microsoft.com/office/powerpoint/2010/main" val="1579011935"/>
+              </p:ext>
+            </p:extLst>
+          </p:nvPr>
+        </p:nvGraphicFramePr>
+        <p:xfrm>
+          <a:off x="612648" y="4718223"/>
+          <a:ext cx="3611880" cy="914400"/>
+        </p:xfrm>
+        <a:graphic>
+          <a:graphicData uri="http://schemas.openxmlformats.org/drawingml/2006/table">
+            <a:tbl>
+              <a:tblPr/>
+              <a:tblGrid>
+                <a:gridCol w="530352"/>
+                <a:gridCol w="3081528"/>
+              </a:tblGrid>
+              <a:tr h="310896">
+                <a:tc>
+                  <a:txBody>
+                    <a:bodyPr/>
+                    <a:lstStyle/>
+                    <a:p>
+                      <a:pPr algn="l" indent="0" marL="0">
+                        <a:buNone/>
+                      </a:pPr>
+                      <a:r>
+                        <a:rPr lang="en-US" sz="780" b="1" dirty="0">
+                          <a:solidFill>
+                            <a:srgbClr val="182F48"/>
+                          </a:solidFill>
+                          <a:latin typeface="Noto Sans KR" pitchFamily="34" charset="0"/>
+                          <a:ea typeface="Noto Sans KR" pitchFamily="34" charset="-122"/>
+                          <a:cs typeface="Noto Sans KR" pitchFamily="34" charset="-120"/>
+                        </a:rPr>
+                        <a:t>H5 ✕</a:t>
+                      </a:r>
+                      <a:endParaRPr lang="en-US" sz="780" dirty="0">
+                        <a:latin typeface="Noto Sans KR" charset="0"/>
+                        <a:ea typeface="Noto Sans KR" charset="0"/>
+                        <a:cs typeface="Noto Sans KR" charset="0"/>
+                      </a:endParaRPr>
+                    </a:p>
+                  </a:txBody>
+                  <a:tcPr marL="63500" marR="63500" marT="25400" marB="25400" anchor="ctr">
+                    <a:lnL w="6350" cap="flat" cmpd="sng" algn="ctr">
+                      <a:solidFill>
+                        <a:srgbClr val="CBD5E1"/>
+                      </a:solidFill>
+                      <a:prstDash val="solid"/>
+                      <a:round/>
+                      <a:headEnd type="none" w="med" len="med"/>
+                      <a:tailEnd type="none" w="med" len="med"/>
+                    </a:lnL>
+                    <a:lnR w="6350" cap="flat" cmpd="sng" algn="ctr">
+                      <a:solidFill>
+                        <a:srgbClr val="CBD5E1"/>
+                      </a:solidFill>
+                      <a:prstDash val="solid"/>
+                      <a:round/>
+                      <a:headEnd type="none" w="med" len="med"/>
+                      <a:tailEnd type="none" w="med" len="med"/>
+                    </a:lnR>
+                    <a:lnT w="6350" cap="flat" cmpd="sng" algn="ctr">
+                      <a:solidFill>
+                        <a:srgbClr val="CBD5E1"/>
+                      </a:solidFill>
+                      <a:prstDash val="solid"/>
+                      <a:round/>
+                      <a:headEnd type="none" w="med" len="med"/>
+                      <a:tailEnd type="none" w="med" len="med"/>
+                    </a:lnT>
+                    <a:lnB w="6350" cap="flat" cmpd="sng" algn="ctr">
+                      <a:solidFill>
+                        <a:srgbClr val="CBD5E1"/>
+                      </a:solidFill>
+                      <a:prstDash val="solid"/>
+                      <a:round/>
+                      <a:headEnd type="none" w="med" len="med"/>
+                      <a:tailEnd type="none" w="med" len="med"/>
+                    </a:lnB>
+                  </a:tcPr>
+                </a:tc>
+                <a:tc>
+                  <a:txBody>
+                    <a:bodyPr/>
+                    <a:lstStyle/>
+                    <a:p>
+                      <a:pPr algn="l" indent="0" marL="0">
+                        <a:buNone/>
+                      </a:pPr>
+                      <a:r>
+                        <a:rPr lang="en-US" sz="780" dirty="0">
+                          <a:solidFill>
+                            <a:srgbClr val="334155"/>
+                          </a:solidFill>
+                          <a:latin typeface="Noto Sans KR" pitchFamily="34" charset="0"/>
+                          <a:ea typeface="Noto Sans KR" pitchFamily="34" charset="-122"/>
+                          <a:cs typeface="Noto Sans KR" pitchFamily="34" charset="-120"/>
+                        </a:rPr>
+                        <a:t>바이어 매칭 비중을 줄이고 브랜드 쇼케이스 중심으로</a:t>
+                      </a:r>
+                      <a:endParaRPr lang="en-US" sz="780" dirty="0">
+                        <a:latin typeface="Noto Sans KR" charset="0"/>
+                        <a:ea typeface="Noto Sans KR" charset="0"/>
+                        <a:cs typeface="Noto Sans KR" charset="0"/>
+                      </a:endParaRPr>
+                    </a:p>
+                  </a:txBody>
+                  <a:tcPr marL="63500" marR="63500" marT="25400" marB="25400" anchor="ctr">
+                    <a:lnL w="6350" cap="flat" cmpd="sng" algn="ctr">
+                      <a:solidFill>
+                        <a:srgbClr val="CBD5E1"/>
+                      </a:solidFill>
+                      <a:prstDash val="solid"/>
+                      <a:round/>
+                      <a:headEnd type="none" w="med" len="med"/>
+                      <a:tailEnd type="none" w="med" len="med"/>
+                    </a:lnL>
+                    <a:lnR w="6350" cap="flat" cmpd="sng" algn="ctr">
+                      <a:solidFill>
+                        <a:srgbClr val="CBD5E1"/>
+                      </a:solidFill>
+                      <a:prstDash val="solid"/>
+                      <a:round/>
+                      <a:headEnd type="none" w="med" len="med"/>
+                      <a:tailEnd type="none" w="med" len="med"/>
+                    </a:lnR>
+                    <a:lnT w="6350" cap="flat" cmpd="sng" algn="ctr">
+                      <a:solidFill>
+                        <a:srgbClr val="CBD5E1"/>
+                      </a:solidFill>
+                      <a:prstDash val="solid"/>
+                      <a:round/>
+                      <a:headEnd type="none" w="med" len="med"/>
+                      <a:tailEnd type="none" w="med" len="med"/>
+                    </a:lnT>
+                    <a:lnB w="6350" cap="flat" cmpd="sng" algn="ctr">
+                      <a:solidFill>
+                        <a:srgbClr val="CBD5E1"/>
+                      </a:solidFill>
+                      <a:prstDash val="solid"/>
+                      <a:round/>
+                      <a:headEnd type="none" w="med" len="med"/>
+                      <a:tailEnd type="none" w="med" len="med"/>
+                    </a:lnB>
+                  </a:tcPr>
+                </a:tc>
+              </a:tr>
+              <a:tr h="310896">
+                <a:tc>
+                  <a:txBody>
+                    <a:bodyPr/>
+                    <a:lstStyle/>
+                    <a:p>
+                      <a:pPr algn="l" indent="0" marL="0">
+                        <a:buNone/>
+                      </a:pPr>
+                      <a:r>
+                        <a:rPr lang="en-US" sz="780" b="1" dirty="0">
+                          <a:solidFill>
+                            <a:srgbClr val="182F48"/>
+                          </a:solidFill>
+                          <a:latin typeface="Noto Sans KR" pitchFamily="34" charset="0"/>
+                          <a:ea typeface="Noto Sans KR" pitchFamily="34" charset="-122"/>
+                          <a:cs typeface="Noto Sans KR" pitchFamily="34" charset="-120"/>
+                        </a:rPr>
+                        <a:t>H6 ✕</a:t>
+                      </a:r>
+                      <a:endParaRPr lang="en-US" sz="780" dirty="0">
+                        <a:latin typeface="Noto Sans KR" charset="0"/>
+                        <a:ea typeface="Noto Sans KR" charset="0"/>
+                        <a:cs typeface="Noto Sans KR" charset="0"/>
+                      </a:endParaRPr>
+                    </a:p>
+                  </a:txBody>
+                  <a:tcPr marL="63500" marR="63500" marT="25400" marB="25400" anchor="ctr">
+                    <a:lnL w="6350" cap="flat" cmpd="sng" algn="ctr">
+                      <a:solidFill>
+                        <a:srgbClr val="CBD5E1"/>
+                      </a:solidFill>
+                      <a:prstDash val="solid"/>
+                      <a:round/>
+                      <a:headEnd type="none" w="med" len="med"/>
+                      <a:tailEnd type="none" w="med" len="med"/>
+                    </a:lnL>
+                    <a:lnR w="6350" cap="flat" cmpd="sng" algn="ctr">
+                      <a:solidFill>
+                        <a:srgbClr val="CBD5E1"/>
+                      </a:solidFill>
+                      <a:prstDash val="solid"/>
+                      <a:round/>
+                      <a:headEnd type="none" w="med" len="med"/>
+                      <a:tailEnd type="none" w="med" len="med"/>
+                    </a:lnR>
+                    <a:lnT w="6350" cap="flat" cmpd="sng" algn="ctr">
+                      <a:solidFill>
+                        <a:srgbClr val="CBD5E1"/>
+                      </a:solidFill>
+                      <a:prstDash val="solid"/>
+                      <a:round/>
+                      <a:headEnd type="none" w="med" len="med"/>
+                      <a:tailEnd type="none" w="med" len="med"/>
+                    </a:lnT>
+                    <a:lnB w="6350" cap="flat" cmpd="sng" algn="ctr">
+                      <a:solidFill>
+                        <a:srgbClr val="CBD5E1"/>
+                      </a:solidFill>
+                      <a:prstDash val="solid"/>
+                      <a:round/>
+                      <a:headEnd type="none" w="med" len="med"/>
+                      <a:tailEnd type="none" w="med" len="med"/>
+                    </a:lnB>
+                  </a:tcPr>
+                </a:tc>
+                <a:tc>
+                  <a:txBody>
+                    <a:bodyPr/>
+                    <a:lstStyle/>
+                    <a:p>
+                      <a:pPr algn="l" indent="0" marL="0">
+                        <a:buNone/>
+                      </a:pPr>
+                      <a:r>
+                        <a:rPr lang="en-US" sz="780" dirty="0">
+                          <a:solidFill>
+                            <a:srgbClr val="334155"/>
+                          </a:solidFill>
+                          <a:latin typeface="Noto Sans KR" pitchFamily="34" charset="0"/>
+                          <a:ea typeface="Noto Sans KR" pitchFamily="34" charset="-122"/>
+                          <a:cs typeface="Noto Sans KR" pitchFamily="34" charset="-120"/>
+                        </a:rPr>
+                        <a:t>제조관을 샘플 공방 · 상담 데스크 규모로 축소</a:t>
+                      </a:r>
+                      <a:endParaRPr lang="en-US" sz="780" dirty="0">
+                        <a:latin typeface="Noto Sans KR" charset="0"/>
+                        <a:ea typeface="Noto Sans KR" charset="0"/>
+                        <a:cs typeface="Noto Sans KR" charset="0"/>
+                      </a:endParaRPr>
+                    </a:p>
+                  </a:txBody>
+                  <a:tcPr marL="63500" marR="63500" marT="25400" marB="25400" anchor="ctr">
+                    <a:lnL w="6350" cap="flat" cmpd="sng" algn="ctr">
+                      <a:solidFill>
+                        <a:srgbClr val="CBD5E1"/>
+                      </a:solidFill>
+                      <a:prstDash val="solid"/>
+                      <a:round/>
+                      <a:headEnd type="none" w="med" len="med"/>
+                      <a:tailEnd type="none" w="med" len="med"/>
+                    </a:lnL>
+                    <a:lnR w="6350" cap="flat" cmpd="sng" algn="ctr">
+                      <a:solidFill>
+                        <a:srgbClr val="CBD5E1"/>
+                      </a:solidFill>
+                      <a:prstDash val="solid"/>
+                      <a:round/>
+                      <a:headEnd type="none" w="med" len="med"/>
+                      <a:tailEnd type="none" w="med" len="med"/>
+                    </a:lnR>
+                    <a:lnT w="6350" cap="flat" cmpd="sng" algn="ctr">
+                      <a:solidFill>
+                        <a:srgbClr val="CBD5E1"/>
+                      </a:solidFill>
+                      <a:prstDash val="solid"/>
+                      <a:round/>
+                      <a:headEnd type="none" w="med" len="med"/>
+                      <a:tailEnd type="none" w="med" len="med"/>
+                    </a:lnT>
+                    <a:lnB w="6350" cap="flat" cmpd="sng" algn="ctr">
+                      <a:solidFill>
+                        <a:srgbClr val="CBD5E1"/>
+                      </a:solidFill>
+                      <a:prstDash val="solid"/>
+                      <a:round/>
+                      <a:headEnd type="none" w="med" len="med"/>
+                      <a:tailEnd type="none" w="med" len="med"/>
+                    </a:lnB>
+                  </a:tcPr>
+                </a:tc>
+              </a:tr>
+              <a:tr h="310896">
+                <a:tc>
+                  <a:txBody>
+                    <a:bodyPr/>
+                    <a:lstStyle/>
+                    <a:p>
+                      <a:pPr algn="l" indent="0" marL="0">
+                        <a:buNone/>
+                      </a:pPr>
+                      <a:r>
+                        <a:rPr lang="en-US" sz="780" b="1" dirty="0">
+                          <a:solidFill>
+                            <a:srgbClr val="182F48"/>
+                          </a:solidFill>
+                          <a:latin typeface="Noto Sans KR" pitchFamily="34" charset="0"/>
+                          <a:ea typeface="Noto Sans KR" pitchFamily="34" charset="-122"/>
+                          <a:cs typeface="Noto Sans KR" pitchFamily="34" charset="-120"/>
+                        </a:rPr>
+                        <a:t>H7 ✕</a:t>
+                      </a:r>
+                      <a:endParaRPr lang="en-US" sz="780" dirty="0">
+                        <a:latin typeface="Noto Sans KR" charset="0"/>
+                        <a:ea typeface="Noto Sans KR" charset="0"/>
+                        <a:cs typeface="Noto Sans KR" charset="0"/>
+                      </a:endParaRPr>
+                    </a:p>
+                  </a:txBody>
+                  <a:tcPr marL="63500" marR="63500" marT="25400" marB="25400" anchor="ctr">
+                    <a:lnL w="6350" cap="flat" cmpd="sng" algn="ctr">
+                      <a:solidFill>
+                        <a:srgbClr val="CBD5E1"/>
+                      </a:solidFill>
+                      <a:prstDash val="solid"/>
+                      <a:round/>
+                      <a:headEnd type="none" w="med" len="med"/>
+                      <a:tailEnd type="none" w="med" len="med"/>
+                    </a:lnL>
+                    <a:lnR w="6350" cap="flat" cmpd="sng" algn="ctr">
+                      <a:solidFill>
+                        <a:srgbClr val="CBD5E1"/>
+                      </a:solidFill>
+                      <a:prstDash val="solid"/>
+                      <a:round/>
+                      <a:headEnd type="none" w="med" len="med"/>
+                      <a:tailEnd type="none" w="med" len="med"/>
+                    </a:lnR>
+                    <a:lnT w="6350" cap="flat" cmpd="sng" algn="ctr">
+                      <a:solidFill>
+                        <a:srgbClr val="CBD5E1"/>
+                      </a:solidFill>
+                      <a:prstDash val="solid"/>
+                      <a:round/>
+                      <a:headEnd type="none" w="med" len="med"/>
+                      <a:tailEnd type="none" w="med" len="med"/>
+                    </a:lnT>
+                    <a:lnB w="6350" cap="flat" cmpd="sng" algn="ctr">
+                      <a:solidFill>
+                        <a:srgbClr val="CBD5E1"/>
+                      </a:solidFill>
+                      <a:prstDash val="solid"/>
+                      <a:round/>
+                      <a:headEnd type="none" w="med" len="med"/>
+                      <a:tailEnd type="none" w="med" len="med"/>
+                    </a:lnB>
+                  </a:tcPr>
+                </a:tc>
+                <a:tc>
+                  <a:txBody>
+                    <a:bodyPr/>
+                    <a:lstStyle/>
+                    <a:p>
+                      <a:pPr algn="l" indent="0" marL="0">
+                        <a:buNone/>
+                      </a:pPr>
+                      <a:r>
+                        <a:rPr lang="en-US" sz="780" dirty="0">
+                          <a:solidFill>
+                            <a:srgbClr val="334155"/>
+                          </a:solidFill>
+                          <a:latin typeface="Noto Sans KR" pitchFamily="34" charset="0"/>
+                          <a:ea typeface="Noto Sans KR" pitchFamily="34" charset="-122"/>
+                          <a:cs typeface="Noto Sans KR" pitchFamily="34" charset="-120"/>
+                        </a:rPr>
+                        <a:t>Test Lab을 B2C 체험 콘텐츠로만 운영</a:t>
+                      </a:r>
+                      <a:endParaRPr lang="en-US" sz="780" dirty="0">
+                        <a:latin typeface="Noto Sans KR" charset="0"/>
+                        <a:ea typeface="Noto Sans KR" charset="0"/>
+                        <a:cs typeface="Noto Sans KR" charset="0"/>
+                      </a:endParaRPr>
+                    </a:p>
+                  </a:txBody>
+                  <a:tcPr marL="63500" marR="63500" marT="25400" marB="25400" anchor="ctr">
+                    <a:lnL w="6350" cap="flat" cmpd="sng" algn="ctr">
+                      <a:solidFill>
+                        <a:srgbClr val="CBD5E1"/>
+                      </a:solidFill>
+                      <a:prstDash val="solid"/>
+                      <a:round/>
+                      <a:headEnd type="none" w="med" len="med"/>
+                      <a:tailEnd type="none" w="med" len="med"/>
+                    </a:lnL>
+                    <a:lnR w="6350" cap="flat" cmpd="sng" algn="ctr">
+                      <a:solidFill>
+                        <a:srgbClr val="CBD5E1"/>
+                      </a:solidFill>
+                      <a:prstDash val="solid"/>
+                      <a:round/>
+                      <a:headEnd type="none" w="med" len="med"/>
+                      <a:tailEnd type="none" w="med" len="med"/>
+                    </a:lnR>
+                    <a:lnT w="6350" cap="flat" cmpd="sng" algn="ctr">
+                      <a:solidFill>
+                        <a:srgbClr val="CBD5E1"/>
+                      </a:solidFill>
+                      <a:prstDash val="solid"/>
+                      <a:round/>
+                      <a:headEnd type="none" w="med" len="med"/>
+                      <a:tailEnd type="none" w="med" len="med"/>
+                    </a:lnT>
+                    <a:lnB w="6350" cap="flat" cmpd="sng" algn="ctr">
+                      <a:solidFill>
+                        <a:srgbClr val="CBD5E1"/>
+                      </a:solidFill>
+                      <a:prstDash val="solid"/>
+                      <a:round/>
+                      <a:headEnd type="none" w="med" len="med"/>
+                      <a:tailEnd type="none" w="med" len="med"/>
+                    </a:lnB>
+                  </a:tcPr>
+                </a:tc>
+              </a:tr>
+              <a:tr h="310896">
+                <a:tc>
+                  <a:txBody>
+                    <a:bodyPr/>
+                    <a:lstStyle/>
+                    <a:p>
+                      <a:pPr algn="l" indent="0" marL="0">
+                        <a:buNone/>
+                      </a:pPr>
+                      <a:r>
+                        <a:rPr lang="en-US" sz="780" b="1" dirty="0">
+                          <a:solidFill>
+                            <a:srgbClr val="182F48"/>
+                          </a:solidFill>
+                          <a:latin typeface="Noto Sans KR" pitchFamily="34" charset="0"/>
+                          <a:ea typeface="Noto Sans KR" pitchFamily="34" charset="-122"/>
+                          <a:cs typeface="Noto Sans KR" pitchFamily="34" charset="-120"/>
+                        </a:rPr>
+                        <a:t>H8 ✕</a:t>
+                      </a:r>
+                      <a:endParaRPr lang="en-US" sz="780" dirty="0">
+                        <a:latin typeface="Noto Sans KR" charset="0"/>
+                        <a:ea typeface="Noto Sans KR" charset="0"/>
+                        <a:cs typeface="Noto Sans KR" charset="0"/>
+                      </a:endParaRPr>
+                    </a:p>
+                  </a:txBody>
+                  <a:tcPr marL="63500" marR="63500" marT="25400" marB="25400" anchor="ctr">
+                    <a:lnL w="6350" cap="flat" cmpd="sng" algn="ctr">
+                      <a:solidFill>
+                        <a:srgbClr val="CBD5E1"/>
+                      </a:solidFill>
+                      <a:prstDash val="solid"/>
+                      <a:round/>
+                      <a:headEnd type="none" w="med" len="med"/>
+                      <a:tailEnd type="none" w="med" len="med"/>
+                    </a:lnL>
+                    <a:lnR w="6350" cap="flat" cmpd="sng" algn="ctr">
+                      <a:solidFill>
+                        <a:srgbClr val="CBD5E1"/>
+                      </a:solidFill>
+                      <a:prstDash val="solid"/>
+                      <a:round/>
+                      <a:headEnd type="none" w="med" len="med"/>
+                      <a:tailEnd type="none" w="med" len="med"/>
+                    </a:lnR>
+                    <a:lnT w="6350" cap="flat" cmpd="sng" algn="ctr">
+                      <a:solidFill>
+                        <a:srgbClr val="CBD5E1"/>
+                      </a:solidFill>
+                      <a:prstDash val="solid"/>
+                      <a:round/>
+                      <a:headEnd type="none" w="med" len="med"/>
+                      <a:tailEnd type="none" w="med" len="med"/>
+                    </a:lnT>
+                    <a:lnB w="6350" cap="flat" cmpd="sng" algn="ctr">
+                      <a:solidFill>
+                        <a:srgbClr val="CBD5E1"/>
+                      </a:solidFill>
+                      <a:prstDash val="solid"/>
+                      <a:round/>
+                      <a:headEnd type="none" w="med" len="med"/>
+                      <a:tailEnd type="none" w="med" len="med"/>
+                    </a:lnB>
+                  </a:tcPr>
+                </a:tc>
+                <a:tc>
+                  <a:txBody>
+                    <a:bodyPr/>
+                    <a:lstStyle/>
+                    <a:p>
+                      <a:pPr algn="l" indent="0" marL="0">
+                        <a:buNone/>
+                      </a:pPr>
+                      <a:r>
+                        <a:rPr lang="en-US" sz="780" dirty="0">
+                          <a:solidFill>
+                            <a:srgbClr val="334155"/>
+                          </a:solidFill>
+                          <a:latin typeface="Noto Sans KR" pitchFamily="34" charset="0"/>
+                          <a:ea typeface="Noto Sans KR" pitchFamily="34" charset="-122"/>
+                          <a:cs typeface="Noto Sans KR" pitchFamily="34" charset="-120"/>
+                        </a:rPr>
+                        <a:t>트레이드 데이를 하루로 줄이고 온라인 사전 상담을 늘린다</a:t>
+                      </a:r>
+                      <a:endParaRPr lang="en-US" sz="780" dirty="0">
+                        <a:latin typeface="Noto Sans KR" charset="0"/>
+                        <a:ea typeface="Noto Sans KR" charset="0"/>
+                        <a:cs typeface="Noto Sans KR" charset="0"/>
+                      </a:endParaRPr>
+                    </a:p>
+                  </a:txBody>
+                  <a:tcPr marL="63500" marR="63500" marT="25400" marB="25400" anchor="ctr">
+                    <a:lnL w="6350" cap="flat" cmpd="sng" algn="ctr">
+                      <a:solidFill>
+                        <a:srgbClr val="CBD5E1"/>
+                      </a:solidFill>
+                      <a:prstDash val="solid"/>
+                      <a:round/>
+                      <a:headEnd type="none" w="med" len="med"/>
+                      <a:tailEnd type="none" w="med" len="med"/>
+                    </a:lnL>
+                    <a:lnR w="6350" cap="flat" cmpd="sng" algn="ctr">
+                      <a:solidFill>
+                        <a:srgbClr val="CBD5E1"/>
+                      </a:solidFill>
+                      <a:prstDash val="solid"/>
+                      <a:round/>
+                      <a:headEnd type="none" w="med" len="med"/>
+                      <a:tailEnd type="none" w="med" len="med"/>
+                    </a:lnR>
+                    <a:lnT w="6350" cap="flat" cmpd="sng" algn="ctr">
+                      <a:solidFill>
+                        <a:srgbClr val="CBD5E1"/>
+                      </a:solidFill>
+                      <a:prstDash val="solid"/>
+                      <a:round/>
+                      <a:headEnd type="none" w="med" len="med"/>
+                      <a:tailEnd type="none" w="med" len="med"/>
+                    </a:lnT>
+                    <a:lnB w="6350" cap="flat" cmpd="sng" algn="ctr">
+                      <a:solidFill>
+                        <a:srgbClr val="CBD5E1"/>
+                      </a:solidFill>
+                      <a:prstDash val="solid"/>
+                      <a:round/>
+                      <a:headEnd type="none" w="med" len="med"/>
+                      <a:tailEnd type="none" w="med" len="med"/>
+                    </a:lnB>
+                  </a:tcPr>
+                </a:tc>
+              </a:tr>
+            </a:tbl>
+          </a:graphicData>
+        </a:graphic>
+      </p:graphicFrame>
+      <p:sp>
+        <p:nvSpPr>
+          <p:cNvPr id="12" name="제목 통화 질문지"/>
           <p:cNvSpPr txBox="1"/>
           <p:nvPr/>
         </p:nvSpPr>
         <p:spPr>
           <a:xfrm>
-            <a:off x="8043672" y="3182031"/>
-            <a:ext cx="3532632" cy="237744"/>
+            <a:off x="4407408" y="3145455"/>
+            <a:ext cx="4023360" cy="237744"/>
           </a:xfrm>
           <a:prstGeom prst="rect">
             <a:avLst/>
@@ -36755,7 +38433,7 @@
                 <a:ea typeface="Noto Sans KR" pitchFamily="34" charset="-122"/>
                 <a:cs typeface="Noto Sans KR" pitchFamily="34" charset="-120"/>
               </a:rPr>
-              <a:t>준비한 질문 · 대본 (별도 PDF 5쪽)</a:t>
+              <a:t>통화 질문지</a:t>
             </a:r>
             <a:endParaRPr lang="en-US" sz="1050" dirty="0"/>
           </a:p>
@@ -36763,14 +38441,830 @@
       </p:sp>
       <p:sp>
         <p:nvSpPr>
-          <p:cNvPr id="11" name="연결 불가 이유"/>
+          <p:cNvPr id="13" name="통화 질문지"/>
           <p:cNvSpPr txBox="1"/>
           <p:nvPr/>
         </p:nvSpPr>
         <p:spPr>
           <a:xfrm>
-            <a:off x="612648" y="3474639"/>
-            <a:ext cx="3532632" cy="2066625"/>
+            <a:off x="4407408" y="3419775"/>
+            <a:ext cx="4023360" cy="1719072"/>
+          </a:xfrm>
+          <a:prstGeom prst="rect">
+            <a:avLst/>
+          </a:prstGeom>
+          <a:noFill/>
+          <a:ln/>
+        </p:spPr>
+        <p:txBody>
+          <a:bodyPr wrap="square" lIns="0" tIns="0" rIns="0" bIns="0" rtlCol="0" anchor="t"/>
+          <a:lstStyle/>
+          <a:p>
+            <a:pPr algn="l" indent="0" marL="0">
+              <a:lnSpc>
+                <a:spcPct val="95000"/>
+              </a:lnSpc>
+              <a:spcAft>
+                <a:spcPts val="250"/>
+              </a:spcAft>
+              <a:buNone/>
+            </a:pPr>
+            <a:r>
+              <a:rPr lang="en-US" sz="800" b="1" dirty="0">
+                <a:solidFill>
+                  <a:srgbClr val="267D86"/>
+                </a:solidFill>
+                <a:latin typeface="Noto Sans KR" pitchFamily="34" charset="0"/>
+                <a:ea typeface="Noto Sans KR" pitchFamily="34" charset="-122"/>
+                <a:cs typeface="Noto Sans KR" pitchFamily="34" charset="-120"/>
+              </a:rPr>
+              <a:t>1  </a:t>
+            </a:r>
+            <a:pPr algn="l" indent="0" marL="0">
+              <a:lnSpc>
+                <a:spcPct val="95000"/>
+              </a:lnSpc>
+              <a:spcAft>
+                <a:spcPts val="250"/>
+              </a:spcAft>
+              <a:buNone/>
+            </a:pPr>
+            <a:r>
+              <a:rPr lang="en-US" sz="800" dirty="0">
+                <a:solidFill>
+                  <a:srgbClr val="334155"/>
+                </a:solidFill>
+                <a:latin typeface="Noto Sans KR" pitchFamily="34" charset="0"/>
+                <a:ea typeface="Noto Sans KR" pitchFamily="34" charset="-122"/>
+                <a:cs typeface="Noto Sans KR" pitchFamily="34" charset="-120"/>
+              </a:rPr>
+              <a:t>국내 고프코어 브랜드는 주로 어떤 경로로 찾으시나요?</a:t>
+            </a:r>
+            <a:pPr algn="l" indent="0" marL="0">
+              <a:lnSpc>
+                <a:spcPct val="95000"/>
+              </a:lnSpc>
+              <a:spcAft>
+                <a:spcPts val="250"/>
+              </a:spcAft>
+              <a:buNone/>
+            </a:pPr>
+            <a:r>
+              <a:rPr lang="en-US" sz="800" dirty="0">
+                <a:solidFill>
+                  <a:srgbClr val="64748B"/>
+                </a:solidFill>
+                <a:latin typeface="Noto Sans KR" pitchFamily="34" charset="0"/>
+                <a:ea typeface="Noto Sans KR" pitchFamily="34" charset="-122"/>
+                <a:cs typeface="Noto Sans KR" pitchFamily="34" charset="-120"/>
+              </a:rPr>
+              <a:t>  H5</a:t>
+            </a:r>
+            <a:endParaRPr lang="en-US" sz="800" dirty="0"/>
+          </a:p>
+          <a:p>
+            <a:pPr algn="l" indent="0" marL="0">
+              <a:lnSpc>
+                <a:spcPct val="95000"/>
+              </a:lnSpc>
+              <a:spcAft>
+                <a:spcPts val="250"/>
+              </a:spcAft>
+              <a:buNone/>
+            </a:pPr>
+            <a:r>
+              <a:rPr lang="en-US" sz="800" b="1" dirty="0">
+                <a:solidFill>
+                  <a:srgbClr val="267D86"/>
+                </a:solidFill>
+                <a:latin typeface="Noto Sans KR" pitchFamily="34" charset="0"/>
+                <a:ea typeface="Noto Sans KR" pitchFamily="34" charset="-122"/>
+                <a:cs typeface="Noto Sans KR" pitchFamily="34" charset="-120"/>
+              </a:rPr>
+              <a:t>2  </a:t>
+            </a:r>
+            <a:pPr algn="l" indent="0" marL="0">
+              <a:lnSpc>
+                <a:spcPct val="95000"/>
+              </a:lnSpc>
+              <a:spcAft>
+                <a:spcPts val="250"/>
+              </a:spcAft>
+              <a:buNone/>
+            </a:pPr>
+            <a:r>
+              <a:rPr lang="en-US" sz="800" dirty="0">
+                <a:solidFill>
+                  <a:srgbClr val="334155"/>
+                </a:solidFill>
+                <a:latin typeface="Noto Sans KR" pitchFamily="34" charset="0"/>
+                <a:ea typeface="Noto Sans KR" pitchFamily="34" charset="-122"/>
+                <a:cs typeface="Noto Sans KR" pitchFamily="34" charset="-120"/>
+              </a:rPr>
+              <a:t>국내 신진 브랜드를 들여올 때 가장 어려운 점은 무엇인가요?</a:t>
+            </a:r>
+            <a:pPr algn="l" indent="0" marL="0">
+              <a:lnSpc>
+                <a:spcPct val="95000"/>
+              </a:lnSpc>
+              <a:spcAft>
+                <a:spcPts val="250"/>
+              </a:spcAft>
+              <a:buNone/>
+            </a:pPr>
+            <a:r>
+              <a:rPr lang="en-US" sz="800" dirty="0">
+                <a:solidFill>
+                  <a:srgbClr val="64748B"/>
+                </a:solidFill>
+                <a:latin typeface="Noto Sans KR" pitchFamily="34" charset="0"/>
+                <a:ea typeface="Noto Sans KR" pitchFamily="34" charset="-122"/>
+                <a:cs typeface="Noto Sans KR" pitchFamily="34" charset="-120"/>
+              </a:rPr>
+              <a:t>  H6</a:t>
+            </a:r>
+            <a:endParaRPr lang="en-US" sz="800" dirty="0"/>
+          </a:p>
+          <a:p>
+            <a:pPr algn="l" indent="0" marL="0">
+              <a:lnSpc>
+                <a:spcPct val="95000"/>
+              </a:lnSpc>
+              <a:spcAft>
+                <a:spcPts val="250"/>
+              </a:spcAft>
+              <a:buNone/>
+            </a:pPr>
+            <a:r>
+              <a:rPr lang="en-US" sz="800" b="1" dirty="0">
+                <a:solidFill>
+                  <a:srgbClr val="267D86"/>
+                </a:solidFill>
+                <a:latin typeface="Noto Sans KR" pitchFamily="34" charset="0"/>
+                <a:ea typeface="Noto Sans KR" pitchFamily="34" charset="-122"/>
+                <a:cs typeface="Noto Sans KR" pitchFamily="34" charset="-120"/>
+              </a:rPr>
+              <a:t>3  </a:t>
+            </a:r>
+            <a:pPr algn="l" indent="0" marL="0">
+              <a:lnSpc>
+                <a:spcPct val="95000"/>
+              </a:lnSpc>
+              <a:spcAft>
+                <a:spcPts val="250"/>
+              </a:spcAft>
+              <a:buNone/>
+            </a:pPr>
+            <a:r>
+              <a:rPr lang="en-US" sz="800" dirty="0">
+                <a:solidFill>
+                  <a:srgbClr val="334155"/>
+                </a:solidFill>
+                <a:latin typeface="Noto Sans KR" pitchFamily="34" charset="0"/>
+                <a:ea typeface="Noto Sans KR" pitchFamily="34" charset="-122"/>
+                <a:cs typeface="Noto Sans KR" pitchFamily="34" charset="-120"/>
+              </a:rPr>
+              <a:t>해외 브랜드 직진출 이후 바잉에 달라진 점이 있나요?</a:t>
+            </a:r>
+            <a:pPr algn="l" indent="0" marL="0">
+              <a:lnSpc>
+                <a:spcPct val="95000"/>
+              </a:lnSpc>
+              <a:spcAft>
+                <a:spcPts val="250"/>
+              </a:spcAft>
+              <a:buNone/>
+            </a:pPr>
+            <a:r>
+              <a:rPr lang="en-US" sz="800" dirty="0">
+                <a:solidFill>
+                  <a:srgbClr val="64748B"/>
+                </a:solidFill>
+                <a:latin typeface="Noto Sans KR" pitchFamily="34" charset="0"/>
+                <a:ea typeface="Noto Sans KR" pitchFamily="34" charset="-122"/>
+                <a:cs typeface="Noto Sans KR" pitchFamily="34" charset="-120"/>
+              </a:rPr>
+              <a:t>  H5</a:t>
+            </a:r>
+            <a:endParaRPr lang="en-US" sz="800" dirty="0"/>
+          </a:p>
+          <a:p>
+            <a:pPr algn="l" indent="0" marL="0">
+              <a:lnSpc>
+                <a:spcPct val="95000"/>
+              </a:lnSpc>
+              <a:spcAft>
+                <a:spcPts val="250"/>
+              </a:spcAft>
+              <a:buNone/>
+            </a:pPr>
+            <a:r>
+              <a:rPr lang="en-US" sz="800" b="1" dirty="0">
+                <a:solidFill>
+                  <a:srgbClr val="267D86"/>
+                </a:solidFill>
+                <a:latin typeface="Noto Sans KR" pitchFamily="34" charset="0"/>
+                <a:ea typeface="Noto Sans KR" pitchFamily="34" charset="-122"/>
+                <a:cs typeface="Noto Sans KR" pitchFamily="34" charset="-120"/>
+              </a:rPr>
+              <a:t>4  </a:t>
+            </a:r>
+            <a:pPr algn="l" indent="0" marL="0">
+              <a:lnSpc>
+                <a:spcPct val="95000"/>
+              </a:lnSpc>
+              <a:spcAft>
+                <a:spcPts val="250"/>
+              </a:spcAft>
+              <a:buNone/>
+            </a:pPr>
+            <a:r>
+              <a:rPr lang="en-US" sz="800" dirty="0">
+                <a:solidFill>
+                  <a:srgbClr val="334155"/>
+                </a:solidFill>
+                <a:latin typeface="Noto Sans KR" pitchFamily="34" charset="0"/>
+                <a:ea typeface="Noto Sans KR" pitchFamily="34" charset="-122"/>
+                <a:cs typeface="Noto Sans KR" pitchFamily="34" charset="-120"/>
+              </a:rPr>
+              <a:t>설명드린 행사에서 가장 도움이 될 것 같은 것은?</a:t>
+            </a:r>
+            <a:pPr algn="l" indent="0" marL="0">
+              <a:lnSpc>
+                <a:spcPct val="95000"/>
+              </a:lnSpc>
+              <a:spcAft>
+                <a:spcPts val="250"/>
+              </a:spcAft>
+              <a:buNone/>
+            </a:pPr>
+            <a:r>
+              <a:rPr lang="en-US" sz="800" dirty="0">
+                <a:solidFill>
+                  <a:srgbClr val="64748B"/>
+                </a:solidFill>
+                <a:latin typeface="Noto Sans KR" pitchFamily="34" charset="0"/>
+                <a:ea typeface="Noto Sans KR" pitchFamily="34" charset="-122"/>
+                <a:cs typeface="Noto Sans KR" pitchFamily="34" charset="-120"/>
+              </a:rPr>
+              <a:t>  H7 · H8</a:t>
+            </a:r>
+            <a:endParaRPr lang="en-US" sz="800" dirty="0"/>
+          </a:p>
+          <a:p>
+            <a:pPr algn="l" indent="0" marL="0">
+              <a:lnSpc>
+                <a:spcPct val="95000"/>
+              </a:lnSpc>
+              <a:spcAft>
+                <a:spcPts val="250"/>
+              </a:spcAft>
+              <a:buNone/>
+            </a:pPr>
+            <a:r>
+              <a:rPr lang="en-US" sz="800" b="1" dirty="0">
+                <a:solidFill>
+                  <a:srgbClr val="267D86"/>
+                </a:solidFill>
+                <a:latin typeface="Noto Sans KR" pitchFamily="34" charset="0"/>
+                <a:ea typeface="Noto Sans KR" pitchFamily="34" charset="-122"/>
+                <a:cs typeface="Noto Sans KR" pitchFamily="34" charset="-120"/>
+              </a:rPr>
+              <a:t>5  </a:t>
+            </a:r>
+            <a:pPr algn="l" indent="0" marL="0">
+              <a:lnSpc>
+                <a:spcPct val="95000"/>
+              </a:lnSpc>
+              <a:spcAft>
+                <a:spcPts val="250"/>
+              </a:spcAft>
+              <a:buNone/>
+            </a:pPr>
+            <a:r>
+              <a:rPr lang="en-US" sz="800" dirty="0">
+                <a:solidFill>
+                  <a:srgbClr val="334155"/>
+                </a:solidFill>
+                <a:latin typeface="Noto Sans KR" pitchFamily="34" charset="0"/>
+                <a:ea typeface="Noto Sans KR" pitchFamily="34" charset="-122"/>
+                <a:cs typeface="Noto Sans KR" pitchFamily="34" charset="-120"/>
+              </a:rPr>
+              <a:t>어떤 브랜드가 몇 곳쯤 와야 시간을 내서 오실 만한가요?</a:t>
+            </a:r>
+            <a:pPr algn="l" indent="0" marL="0">
+              <a:lnSpc>
+                <a:spcPct val="95000"/>
+              </a:lnSpc>
+              <a:spcAft>
+                <a:spcPts val="250"/>
+              </a:spcAft>
+              <a:buNone/>
+            </a:pPr>
+            <a:r>
+              <a:rPr lang="en-US" sz="800" dirty="0">
+                <a:solidFill>
+                  <a:srgbClr val="64748B"/>
+                </a:solidFill>
+                <a:latin typeface="Noto Sans KR" pitchFamily="34" charset="0"/>
+                <a:ea typeface="Noto Sans KR" pitchFamily="34" charset="-122"/>
+                <a:cs typeface="Noto Sans KR" pitchFamily="34" charset="-120"/>
+              </a:rPr>
+              <a:t>  H8</a:t>
+            </a:r>
+            <a:endParaRPr lang="en-US" sz="800" dirty="0"/>
+          </a:p>
+          <a:p>
+            <a:pPr algn="l" indent="0" marL="0">
+              <a:lnSpc>
+                <a:spcPct val="95000"/>
+              </a:lnSpc>
+              <a:spcAft>
+                <a:spcPts val="250"/>
+              </a:spcAft>
+              <a:buNone/>
+            </a:pPr>
+            <a:r>
+              <a:rPr lang="en-US" sz="800" b="1" dirty="0">
+                <a:solidFill>
+                  <a:srgbClr val="267D86"/>
+                </a:solidFill>
+                <a:latin typeface="Noto Sans KR" pitchFamily="34" charset="0"/>
+                <a:ea typeface="Noto Sans KR" pitchFamily="34" charset="-122"/>
+                <a:cs typeface="Noto Sans KR" pitchFamily="34" charset="-120"/>
+              </a:rPr>
+              <a:t>6  </a:t>
+            </a:r>
+            <a:pPr algn="l" indent="0" marL="0">
+              <a:lnSpc>
+                <a:spcPct val="95000"/>
+              </a:lnSpc>
+              <a:spcAft>
+                <a:spcPts val="250"/>
+              </a:spcAft>
+              <a:buNone/>
+            </a:pPr>
+            <a:r>
+              <a:rPr lang="en-US" sz="800" dirty="0">
+                <a:solidFill>
+                  <a:srgbClr val="334155"/>
+                </a:solidFill>
+                <a:latin typeface="Noto Sans KR" pitchFamily="34" charset="0"/>
+                <a:ea typeface="Noto Sans KR" pitchFamily="34" charset="-122"/>
+                <a:cs typeface="Noto Sans KR" pitchFamily="34" charset="-120"/>
+              </a:rPr>
+              <a:t>상담에서 꼭 확인하고 싶은 조건은? (수량·공급가·반품)</a:t>
+            </a:r>
+            <a:pPr algn="l" indent="0" marL="0">
+              <a:lnSpc>
+                <a:spcPct val="95000"/>
+              </a:lnSpc>
+              <a:spcAft>
+                <a:spcPts val="250"/>
+              </a:spcAft>
+              <a:buNone/>
+            </a:pPr>
+            <a:r>
+              <a:rPr lang="en-US" sz="800" dirty="0">
+                <a:solidFill>
+                  <a:srgbClr val="64748B"/>
+                </a:solidFill>
+                <a:latin typeface="Noto Sans KR" pitchFamily="34" charset="0"/>
+                <a:ea typeface="Noto Sans KR" pitchFamily="34" charset="-122"/>
+                <a:cs typeface="Noto Sans KR" pitchFamily="34" charset="-120"/>
+              </a:rPr>
+              <a:t>  H6</a:t>
+            </a:r>
+            <a:endParaRPr lang="en-US" sz="800" dirty="0"/>
+          </a:p>
+          <a:p>
+            <a:pPr algn="l" indent="0" marL="0">
+              <a:lnSpc>
+                <a:spcPct val="95000"/>
+              </a:lnSpc>
+              <a:spcAft>
+                <a:spcPts val="250"/>
+              </a:spcAft>
+              <a:buNone/>
+            </a:pPr>
+            <a:r>
+              <a:rPr lang="en-US" sz="800" b="1" dirty="0">
+                <a:solidFill>
+                  <a:srgbClr val="267D86"/>
+                </a:solidFill>
+                <a:latin typeface="Noto Sans KR" pitchFamily="34" charset="0"/>
+                <a:ea typeface="Noto Sans KR" pitchFamily="34" charset="-122"/>
+                <a:cs typeface="Noto Sans KR" pitchFamily="34" charset="-120"/>
+              </a:rPr>
+              <a:t>7  </a:t>
+            </a:r>
+            <a:pPr algn="l" indent="0" marL="0">
+              <a:lnSpc>
+                <a:spcPct val="95000"/>
+              </a:lnSpc>
+              <a:spcAft>
+                <a:spcPts val="250"/>
+              </a:spcAft>
+              <a:buNone/>
+            </a:pPr>
+            <a:r>
+              <a:rPr lang="en-US" sz="800" dirty="0">
+                <a:solidFill>
+                  <a:srgbClr val="334155"/>
+                </a:solidFill>
+                <a:latin typeface="Noto Sans KR" pitchFamily="34" charset="0"/>
+                <a:ea typeface="Noto Sans KR" pitchFamily="34" charset="-122"/>
+                <a:cs typeface="Noto Sans KR" pitchFamily="34" charset="-120"/>
+              </a:rPr>
+              <a:t>이런 행사가 열리면 바이어로 참관하실 의향이 있나요?</a:t>
+            </a:r>
+            <a:pPr algn="l" indent="0" marL="0">
+              <a:lnSpc>
+                <a:spcPct val="95000"/>
+              </a:lnSpc>
+              <a:spcAft>
+                <a:spcPts val="250"/>
+              </a:spcAft>
+              <a:buNone/>
+            </a:pPr>
+            <a:r>
+              <a:rPr lang="en-US" sz="800" dirty="0">
+                <a:solidFill>
+                  <a:srgbClr val="64748B"/>
+                </a:solidFill>
+                <a:latin typeface="Noto Sans KR" pitchFamily="34" charset="0"/>
+                <a:ea typeface="Noto Sans KR" pitchFamily="34" charset="-122"/>
+                <a:cs typeface="Noto Sans KR" pitchFamily="34" charset="-120"/>
+              </a:rPr>
+              <a:t>  H8</a:t>
+            </a:r>
+            <a:endParaRPr lang="en-US" sz="800" dirty="0"/>
+          </a:p>
+          <a:p>
+            <a:pPr algn="l" indent="0" marL="0">
+              <a:lnSpc>
+                <a:spcPct val="95000"/>
+              </a:lnSpc>
+              <a:spcAft>
+                <a:spcPts val="250"/>
+              </a:spcAft>
+              <a:buNone/>
+            </a:pPr>
+            <a:r>
+              <a:rPr lang="en-US" sz="800" b="1" dirty="0">
+                <a:solidFill>
+                  <a:srgbClr val="267D86"/>
+                </a:solidFill>
+                <a:latin typeface="Noto Sans KR" pitchFamily="34" charset="0"/>
+                <a:ea typeface="Noto Sans KR" pitchFamily="34" charset="-122"/>
+                <a:cs typeface="Noto Sans KR" pitchFamily="34" charset="-120"/>
+              </a:rPr>
+              <a:t>8  </a:t>
+            </a:r>
+            <a:pPr algn="l" indent="0" marL="0">
+              <a:lnSpc>
+                <a:spcPct val="95000"/>
+              </a:lnSpc>
+              <a:spcAft>
+                <a:spcPts val="250"/>
+              </a:spcAft>
+              <a:buNone/>
+            </a:pPr>
+            <a:r>
+              <a:rPr lang="en-US" sz="800" dirty="0">
+                <a:solidFill>
+                  <a:srgbClr val="334155"/>
+                </a:solidFill>
+                <a:latin typeface="Noto Sans KR" pitchFamily="34" charset="0"/>
+                <a:ea typeface="Noto Sans KR" pitchFamily="34" charset="-122"/>
+                <a:cs typeface="Noto Sans KR" pitchFamily="34" charset="-120"/>
+              </a:rPr>
+              <a:t>9월 말~10월 초 일정은 바잉 시기와 맞나요?</a:t>
+            </a:r>
+            <a:pPr algn="l" indent="0" marL="0">
+              <a:lnSpc>
+                <a:spcPct val="95000"/>
+              </a:lnSpc>
+              <a:spcAft>
+                <a:spcPts val="250"/>
+              </a:spcAft>
+              <a:buNone/>
+            </a:pPr>
+            <a:r>
+              <a:rPr lang="en-US" sz="800" dirty="0">
+                <a:solidFill>
+                  <a:srgbClr val="64748B"/>
+                </a:solidFill>
+                <a:latin typeface="Noto Sans KR" pitchFamily="34" charset="0"/>
+                <a:ea typeface="Noto Sans KR" pitchFamily="34" charset="-122"/>
+                <a:cs typeface="Noto Sans KR" pitchFamily="34" charset="-120"/>
+              </a:rPr>
+              <a:t>  일정</a:t>
+            </a:r>
+            <a:endParaRPr lang="en-US" sz="800" dirty="0"/>
+          </a:p>
+          <a:p>
+            <a:pPr algn="l" indent="0" marL="0">
+              <a:lnSpc>
+                <a:spcPct val="95000"/>
+              </a:lnSpc>
+              <a:spcAft>
+                <a:spcPts val="250"/>
+              </a:spcAft>
+              <a:buNone/>
+            </a:pPr>
+            <a:r>
+              <a:rPr lang="en-US" sz="800" b="1" dirty="0">
+                <a:solidFill>
+                  <a:srgbClr val="267D86"/>
+                </a:solidFill>
+                <a:latin typeface="Noto Sans KR" pitchFamily="34" charset="0"/>
+                <a:ea typeface="Noto Sans KR" pitchFamily="34" charset="-122"/>
+                <a:cs typeface="Noto Sans KR" pitchFamily="34" charset="-120"/>
+              </a:rPr>
+              <a:t>9  </a:t>
+            </a:r>
+            <a:pPr algn="l" indent="0" marL="0">
+              <a:lnSpc>
+                <a:spcPct val="95000"/>
+              </a:lnSpc>
+              <a:spcAft>
+                <a:spcPts val="250"/>
+              </a:spcAft>
+              <a:buNone/>
+            </a:pPr>
+            <a:r>
+              <a:rPr lang="en-US" sz="800" dirty="0">
+                <a:solidFill>
+                  <a:srgbClr val="334155"/>
+                </a:solidFill>
+                <a:latin typeface="Noto Sans KR" pitchFamily="34" charset="0"/>
+                <a:ea typeface="Noto Sans KR" pitchFamily="34" charset="-122"/>
+                <a:cs typeface="Noto Sans KR" pitchFamily="34" charset="-120"/>
+              </a:rPr>
+              <a:t>참관을 망설이게 하는 점이 있다면 무엇인가요?</a:t>
+            </a:r>
+            <a:pPr algn="l" indent="0" marL="0">
+              <a:lnSpc>
+                <a:spcPct val="95000"/>
+              </a:lnSpc>
+              <a:spcAft>
+                <a:spcPts val="250"/>
+              </a:spcAft>
+              <a:buNone/>
+            </a:pPr>
+            <a:r>
+              <a:rPr lang="en-US" sz="800" dirty="0">
+                <a:solidFill>
+                  <a:srgbClr val="64748B"/>
+                </a:solidFill>
+                <a:latin typeface="Noto Sans KR" pitchFamily="34" charset="0"/>
+                <a:ea typeface="Noto Sans KR" pitchFamily="34" charset="-122"/>
+                <a:cs typeface="Noto Sans KR" pitchFamily="34" charset="-120"/>
+              </a:rPr>
+              <a:t>  걸림돌</a:t>
+            </a:r>
+            <a:endParaRPr lang="en-US" sz="800" dirty="0"/>
+          </a:p>
+          <a:p>
+            <a:pPr algn="l" indent="0" marL="0">
+              <a:lnSpc>
+                <a:spcPct val="95000"/>
+              </a:lnSpc>
+              <a:spcAft>
+                <a:spcPts val="250"/>
+              </a:spcAft>
+              <a:buNone/>
+            </a:pPr>
+            <a:r>
+              <a:rPr lang="en-US" sz="800" b="1" dirty="0">
+                <a:solidFill>
+                  <a:srgbClr val="267D86"/>
+                </a:solidFill>
+                <a:latin typeface="Noto Sans KR" pitchFamily="34" charset="0"/>
+                <a:ea typeface="Noto Sans KR" pitchFamily="34" charset="-122"/>
+                <a:cs typeface="Noto Sans KR" pitchFamily="34" charset="-120"/>
+              </a:rPr>
+              <a:t>10  </a:t>
+            </a:r>
+            <a:pPr algn="l" indent="0" marL="0">
+              <a:lnSpc>
+                <a:spcPct val="95000"/>
+              </a:lnSpc>
+              <a:spcAft>
+                <a:spcPts val="250"/>
+              </a:spcAft>
+              <a:buNone/>
+            </a:pPr>
+            <a:r>
+              <a:rPr lang="en-US" sz="800" dirty="0">
+                <a:solidFill>
+                  <a:srgbClr val="334155"/>
+                </a:solidFill>
+                <a:latin typeface="Noto Sans KR" pitchFamily="34" charset="0"/>
+                <a:ea typeface="Noto Sans KR" pitchFamily="34" charset="-122"/>
+                <a:cs typeface="Noto Sans KR" pitchFamily="34" charset="-120"/>
+              </a:rPr>
+              <a:t>바이어에게 꼭 필요한 것 한 가지를 꼽는다면?</a:t>
+            </a:r>
+            <a:pPr algn="l" indent="0" marL="0">
+              <a:lnSpc>
+                <a:spcPct val="95000"/>
+              </a:lnSpc>
+              <a:spcAft>
+                <a:spcPts val="250"/>
+              </a:spcAft>
+              <a:buNone/>
+            </a:pPr>
+            <a:r>
+              <a:rPr lang="en-US" sz="800" dirty="0">
+                <a:solidFill>
+                  <a:srgbClr val="64748B"/>
+                </a:solidFill>
+                <a:latin typeface="Noto Sans KR" pitchFamily="34" charset="0"/>
+                <a:ea typeface="Noto Sans KR" pitchFamily="34" charset="-122"/>
+                <a:cs typeface="Noto Sans KR" pitchFamily="34" charset="-120"/>
+              </a:rPr>
+              <a:t>  보완</a:t>
+            </a:r>
+            <a:endParaRPr lang="en-US" sz="800" dirty="0"/>
+          </a:p>
+        </p:txBody>
+      </p:sp>
+      <p:sp>
+        <p:nvSpPr>
+          <p:cNvPr id="14" name="오프닝 스크립트"/>
+          <p:cNvSpPr txBox="1"/>
+          <p:nvPr/>
+        </p:nvSpPr>
+        <p:spPr>
+          <a:xfrm>
+            <a:off x="4407408" y="5211999"/>
+            <a:ext cx="4023360" cy="1060785"/>
+          </a:xfrm>
+          <a:prstGeom prst="roundRect">
+            <a:avLst>
+              <a:gd name="adj" fmla="val 4310"/>
+            </a:avLst>
+          </a:prstGeom>
+          <a:solidFill>
+            <a:srgbClr val="F1F5F9"/>
+          </a:solidFill>
+          <a:ln/>
+        </p:spPr>
+        <p:txBody>
+          <a:bodyPr wrap="square" lIns="91440" tIns="0" rIns="91440" bIns="0" rtlCol="0" anchor="ctr"/>
+          <a:lstStyle/>
+          <a:p>
+            <a:pPr algn="l" indent="0" marL="0">
+              <a:lnSpc>
+                <a:spcPct val="95000"/>
+              </a:lnSpc>
+              <a:spcAft>
+                <a:spcPts val="100"/>
+              </a:spcAft>
+              <a:buNone/>
+            </a:pPr>
+            <a:r>
+              <a:rPr lang="en-US" sz="780" b="1" dirty="0">
+                <a:solidFill>
+                  <a:srgbClr val="267D86"/>
+                </a:solidFill>
+                <a:latin typeface="Noto Sans KR" pitchFamily="34" charset="0"/>
+                <a:ea typeface="Noto Sans KR" pitchFamily="34" charset="-122"/>
+                <a:cs typeface="Noto Sans KR" pitchFamily="34" charset="-120"/>
+              </a:rPr>
+              <a:t>오프닝 스크립트</a:t>
+            </a:r>
+            <a:endParaRPr lang="en-US" sz="780" dirty="0"/>
+          </a:p>
+          <a:p>
+            <a:pPr algn="l" indent="0" marL="0">
+              <a:lnSpc>
+                <a:spcPct val="95000"/>
+              </a:lnSpc>
+              <a:spcAft>
+                <a:spcPts val="100"/>
+              </a:spcAft>
+              <a:buNone/>
+            </a:pPr>
+            <a:r>
+              <a:rPr lang="en-US" sz="780" dirty="0">
+                <a:solidFill>
+                  <a:srgbClr val="334155"/>
+                </a:solidFill>
+                <a:latin typeface="Noto Sans KR" pitchFamily="34" charset="0"/>
+                <a:ea typeface="Noto Sans KR" pitchFamily="34" charset="-122"/>
+                <a:cs typeface="Noto Sans KR" pitchFamily="34" charset="-120"/>
+              </a:rPr>
+              <a:t>"안녕하세요, 한림대학교 MICE 전공 학생 정신영입니다.</a:t>
+            </a:r>
+            <a:endParaRPr lang="en-US" sz="780" dirty="0"/>
+          </a:p>
+          <a:p>
+            <a:pPr algn="l" indent="0" marL="0">
+              <a:lnSpc>
+                <a:spcPct val="95000"/>
+              </a:lnSpc>
+              <a:spcAft>
+                <a:spcPts val="100"/>
+              </a:spcAft>
+              <a:buNone/>
+            </a:pPr>
+            <a:r>
+              <a:rPr lang="en-US" sz="780" dirty="0">
+                <a:solidFill>
+                  <a:srgbClr val="334155"/>
+                </a:solidFill>
+                <a:latin typeface="Noto Sans KR" pitchFamily="34" charset="0"/>
+                <a:ea typeface="Noto Sans KR" pitchFamily="34" charset="-122"/>
+                <a:cs typeface="Noto Sans KR" pitchFamily="34" charset="-120"/>
+              </a:rPr>
+              <a:t>수업 과제로 '고프코어 패션 페어 서울'을 기획하고 있습니다.</a:t>
+            </a:r>
+            <a:endParaRPr lang="en-US" sz="780" dirty="0"/>
+          </a:p>
+          <a:p>
+            <a:pPr algn="l" indent="0" marL="0">
+              <a:lnSpc>
+                <a:spcPct val="95000"/>
+              </a:lnSpc>
+              <a:spcAft>
+                <a:spcPts val="100"/>
+              </a:spcAft>
+              <a:buNone/>
+            </a:pPr>
+            <a:r>
+              <a:rPr lang="en-US" sz="780" dirty="0">
+                <a:solidFill>
+                  <a:srgbClr val="334155"/>
+                </a:solidFill>
+                <a:latin typeface="Noto Sans KR" pitchFamily="34" charset="0"/>
+                <a:ea typeface="Noto Sans KR" pitchFamily="34" charset="-122"/>
+                <a:cs typeface="Noto Sans KR" pitchFamily="34" charset="-120"/>
+              </a:rPr>
+              <a:t>매장 브랜드를 고르시는 바잉 담당자분과 5분 정도 통화할 수 있을까요?</a:t>
+            </a:r>
+            <a:endParaRPr lang="en-US" sz="780" dirty="0"/>
+          </a:p>
+          <a:p>
+            <a:pPr algn="l" indent="0" marL="0">
+              <a:lnSpc>
+                <a:spcPct val="95000"/>
+              </a:lnSpc>
+              <a:spcAft>
+                <a:spcPts val="100"/>
+              </a:spcAft>
+              <a:buNone/>
+            </a:pPr>
+            <a:r>
+              <a:rPr lang="en-US" sz="780" dirty="0">
+                <a:solidFill>
+                  <a:srgbClr val="334155"/>
+                </a:solidFill>
+                <a:latin typeface="Noto Sans KR" pitchFamily="34" charset="0"/>
+                <a:ea typeface="Noto Sans KR" pitchFamily="34" charset="-122"/>
+                <a:cs typeface="Noto Sans KR" pitchFamily="34" charset="-120"/>
+              </a:rPr>
+              <a:t>답변은 수업 발표용으로만 쓰고 폐기합니다. 녹음해도 괜찮을까요?"</a:t>
+            </a:r>
+            <a:endParaRPr lang="en-US" sz="780" dirty="0"/>
+          </a:p>
+          <a:p>
+            <a:pPr algn="l" indent="0" marL="0">
+              <a:lnSpc>
+                <a:spcPct val="95000"/>
+              </a:lnSpc>
+              <a:spcAft>
+                <a:spcPts val="100"/>
+              </a:spcAft>
+              <a:buNone/>
+            </a:pPr>
+            <a:r>
+              <a:rPr lang="en-US" sz="780" dirty="0">
+                <a:solidFill>
+                  <a:srgbClr val="64748B"/>
+                </a:solidFill>
+                <a:latin typeface="Noto Sans KR" pitchFamily="34" charset="0"/>
+                <a:ea typeface="Noto Sans KR" pitchFamily="34" charset="-122"/>
+                <a:cs typeface="Noto Sans KR" pitchFamily="34" charset="-120"/>
+              </a:rPr>
+              <a:t>→ 이어서 1분 행사 설명과 바이어 혜택을 안내한 뒤 질문</a:t>
+            </a:r>
+            <a:endParaRPr lang="en-US" sz="780" dirty="0"/>
+          </a:p>
+        </p:txBody>
+      </p:sp>
+      <p:sp>
+        <p:nvSpPr>
+          <p:cNvPr id="15" name="제목 연결되지 않은 이유"/>
+          <p:cNvSpPr txBox="1"/>
+          <p:nvPr/>
+        </p:nvSpPr>
+        <p:spPr>
+          <a:xfrm>
+            <a:off x="8613648" y="3145455"/>
+            <a:ext cx="2962656" cy="237744"/>
           </a:xfrm>
           <a:prstGeom prst="rect">
             <a:avLst/>
@@ -36784,15 +39278,12 @@
           <a:p>
             <a:pPr algn="l" indent="0" marL="0">
               <a:lnSpc>
-                <a:spcPct val="95000"/>
-              </a:lnSpc>
-              <a:spcAft>
-                <a:spcPts val="200"/>
-              </a:spcAft>
-              <a:buNone/>
-            </a:pPr>
-            <a:r>
-              <a:rPr lang="en-US" sz="850" b="1" dirty="0">
+                <a:spcPct val="100000"/>
+              </a:lnSpc>
+              <a:buNone/>
+            </a:pPr>
+            <a:r>
+              <a:rPr lang="en-US" sz="1050" b="1" dirty="0">
                 <a:solidFill>
                   <a:srgbClr val="182F48"/>
                 </a:solidFill>
@@ -36800,239 +39291,37 @@
                 <a:ea typeface="Noto Sans KR" pitchFamily="34" charset="-122"/>
                 <a:cs typeface="Noto Sans KR" pitchFamily="34" charset="-120"/>
               </a:rPr>
-              <a:t>① 직통 번호가 없다</a:t>
-            </a:r>
-            <a:endParaRPr lang="en-US" sz="850" dirty="0"/>
-          </a:p>
-          <a:p>
-            <a:pPr algn="l" indent="0" marL="0">
-              <a:lnSpc>
-                <a:spcPct val="95000"/>
-              </a:lnSpc>
-              <a:spcAft>
-                <a:spcPts val="200"/>
-              </a:spcAft>
-              <a:buNone/>
-            </a:pPr>
-            <a:r>
-              <a:rPr lang="en-US" sz="850" dirty="0">
-                <a:solidFill>
-                  <a:srgbClr val="334155"/>
-                </a:solidFill>
-                <a:latin typeface="Noto Sans KR" pitchFamily="34" charset="0"/>
-                <a:ea typeface="Noto Sans KR" pitchFamily="34" charset="-122"/>
-                <a:cs typeface="Noto Sans KR" pitchFamily="34" charset="-120"/>
-              </a:rPr>
-              <a:t>바이어 연락처는 비공개, 공개 번호는 매장·고객센터로 간다.</a:t>
-            </a:r>
-            <a:endParaRPr lang="en-US" sz="850" dirty="0"/>
-          </a:p>
-          <a:p>
-            <a:pPr algn="l" indent="0" marL="0">
-              <a:lnSpc>
-                <a:spcPct val="95000"/>
-              </a:lnSpc>
-              <a:spcAft>
-                <a:spcPts val="200"/>
-              </a:spcAft>
-              <a:buNone/>
-            </a:pPr>
-            <a:r>
-              <a:rPr lang="en-US" sz="850" b="1" dirty="0">
-                <a:solidFill>
-                  <a:srgbClr val="182F48"/>
-                </a:solidFill>
-                <a:latin typeface="Noto Sans KR" pitchFamily="34" charset="0"/>
-                <a:ea typeface="Noto Sans KR" pitchFamily="34" charset="-122"/>
-                <a:cs typeface="Noto Sans KR" pitchFamily="34" charset="-120"/>
-              </a:rPr>
-              <a:t>② 고객센터는 주문·배송 전용이다</a:t>
-            </a:r>
-            <a:endParaRPr lang="en-US" sz="850" dirty="0"/>
-          </a:p>
-          <a:p>
-            <a:pPr algn="l" indent="0" marL="0">
-              <a:lnSpc>
-                <a:spcPct val="95000"/>
-              </a:lnSpc>
-              <a:spcAft>
-                <a:spcPts val="200"/>
-              </a:spcAft>
-              <a:buNone/>
-            </a:pPr>
-            <a:r>
-              <a:rPr lang="en-US" sz="850" dirty="0">
-                <a:solidFill>
-                  <a:srgbClr val="334155"/>
-                </a:solidFill>
-                <a:latin typeface="Noto Sans KR" pitchFamily="34" charset="0"/>
-                <a:ea typeface="Noto Sans KR" pitchFamily="34" charset="-122"/>
-                <a:cs typeface="Noto Sans KR" pitchFamily="34" charset="-120"/>
-              </a:rPr>
-              <a:t>두 곳 모두 쇼핑몰 주문·배송 문의 창구로 안내한다.</a:t>
-            </a:r>
-            <a:endParaRPr lang="en-US" sz="850" dirty="0"/>
-          </a:p>
-          <a:p>
-            <a:pPr algn="l" indent="0" marL="0">
-              <a:lnSpc>
-                <a:spcPct val="95000"/>
-              </a:lnSpc>
-              <a:spcAft>
-                <a:spcPts val="200"/>
-              </a:spcAft>
-              <a:buNone/>
-            </a:pPr>
-            <a:r>
-              <a:rPr lang="en-US" sz="850" b="1" dirty="0">
-                <a:solidFill>
-                  <a:srgbClr val="182F48"/>
-                </a:solidFill>
-                <a:latin typeface="Noto Sans KR" pitchFamily="34" charset="0"/>
-                <a:ea typeface="Noto Sans KR" pitchFamily="34" charset="-122"/>
-                <a:cs typeface="Noto Sans KR" pitchFamily="34" charset="-120"/>
-              </a:rPr>
-              <a:t>③ 매장과 바잉은 하는 사람이 다르다</a:t>
-            </a:r>
-            <a:endParaRPr lang="en-US" sz="850" dirty="0"/>
-          </a:p>
-          <a:p>
-            <a:pPr algn="l" indent="0" marL="0">
-              <a:lnSpc>
-                <a:spcPct val="95000"/>
-              </a:lnSpc>
-              <a:spcAft>
-                <a:spcPts val="200"/>
-              </a:spcAft>
-              <a:buNone/>
-            </a:pPr>
-            <a:r>
-              <a:rPr lang="en-US" sz="850" dirty="0">
-                <a:solidFill>
-                  <a:srgbClr val="334155"/>
-                </a:solidFill>
-                <a:latin typeface="Noto Sans KR" pitchFamily="34" charset="0"/>
-                <a:ea typeface="Noto Sans KR" pitchFamily="34" charset="-122"/>
-                <a:cs typeface="Noto Sans KR" pitchFamily="34" charset="-120"/>
-              </a:rPr>
-              <a:t>매장 직원은 판매를, 브랜드 선정은 본사가 맡는다.</a:t>
-            </a:r>
-            <a:endParaRPr lang="en-US" sz="850" dirty="0"/>
-          </a:p>
-          <a:p>
-            <a:pPr algn="l" indent="0" marL="0">
-              <a:lnSpc>
-                <a:spcPct val="95000"/>
-              </a:lnSpc>
-              <a:spcAft>
-                <a:spcPts val="200"/>
-              </a:spcAft>
-              <a:buNone/>
-            </a:pPr>
-            <a:r>
-              <a:rPr lang="en-US" sz="850" b="1" dirty="0">
-                <a:solidFill>
-                  <a:srgbClr val="182F48"/>
-                </a:solidFill>
-                <a:latin typeface="Noto Sans KR" pitchFamily="34" charset="0"/>
-                <a:ea typeface="Noto Sans KR" pitchFamily="34" charset="-122"/>
-                <a:cs typeface="Noto Sans KR" pitchFamily="34" charset="-120"/>
-              </a:rPr>
-              <a:t>④ 매장은 낮 12시에 연다</a:t>
-            </a:r>
-            <a:endParaRPr lang="en-US" sz="850" dirty="0"/>
-          </a:p>
-          <a:p>
-            <a:pPr algn="l" indent="0" marL="0">
-              <a:lnSpc>
-                <a:spcPct val="95000"/>
-              </a:lnSpc>
-              <a:spcAft>
-                <a:spcPts val="200"/>
-              </a:spcAft>
-              <a:buNone/>
-            </a:pPr>
-            <a:r>
-              <a:rPr lang="en-US" sz="850" dirty="0">
-                <a:solidFill>
-                  <a:srgbClr val="334155"/>
-                </a:solidFill>
-                <a:latin typeface="Noto Sans KR" pitchFamily="34" charset="0"/>
-                <a:ea typeface="Noto Sans KR" pitchFamily="34" charset="-122"/>
-                <a:cs typeface="Noto Sans KR" pitchFamily="34" charset="-120"/>
-              </a:rPr>
-              <a:t>오전 통화는 매장에 닿지 않는다. (웍스아웃 11:10)</a:t>
-            </a:r>
-            <a:endParaRPr lang="en-US" sz="850" dirty="0"/>
-          </a:p>
-          <a:p>
-            <a:pPr algn="l" indent="0" marL="0">
-              <a:lnSpc>
-                <a:spcPct val="95000"/>
-              </a:lnSpc>
-              <a:spcAft>
-                <a:spcPts val="200"/>
-              </a:spcAft>
-              <a:buNone/>
-            </a:pPr>
-            <a:r>
-              <a:rPr lang="en-US" sz="850" b="1" dirty="0">
-                <a:solidFill>
-                  <a:srgbClr val="182F48"/>
-                </a:solidFill>
-                <a:latin typeface="Noto Sans KR" pitchFamily="34" charset="0"/>
-                <a:ea typeface="Noto Sans KR" pitchFamily="34" charset="-122"/>
-                <a:cs typeface="Noto Sans KR" pitchFamily="34" charset="-120"/>
-              </a:rPr>
-              <a:t>⑤ 공식 창구는 입점 신청뿐이다</a:t>
-            </a:r>
-            <a:endParaRPr lang="en-US" sz="850" dirty="0"/>
-          </a:p>
-          <a:p>
-            <a:pPr algn="l" indent="0" marL="0">
-              <a:lnSpc>
-                <a:spcPct val="95000"/>
-              </a:lnSpc>
-              <a:spcAft>
-                <a:spcPts val="200"/>
-              </a:spcAft>
-              <a:buNone/>
-            </a:pPr>
-            <a:r>
-              <a:rPr lang="en-US" sz="850" dirty="0">
-                <a:solidFill>
-                  <a:srgbClr val="334155"/>
-                </a:solidFill>
-                <a:latin typeface="Noto Sans KR" pitchFamily="34" charset="0"/>
-                <a:ea typeface="Noto Sans KR" pitchFamily="34" charset="-122"/>
-                <a:cs typeface="Noto Sans KR" pitchFamily="34" charset="-120"/>
-              </a:rPr>
-              <a:t>거래 목적이 아닌 질문은 받아 줄 창구가 없다.</a:t>
-            </a:r>
-            <a:endParaRPr lang="en-US" sz="850" dirty="0"/>
+              <a:t>연결되지 않은 이유</a:t>
+            </a:r>
+            <a:endParaRPr lang="en-US" sz="1050" dirty="0"/>
           </a:p>
         </p:txBody>
       </p:sp>
       <p:sp>
         <p:nvSpPr>
-          <p:cNvPr id="12" name="바이어 사전 가정"/>
+          <p:cNvPr id="16" name="연결 불가 이유"/>
           <p:cNvSpPr txBox="1"/>
           <p:nvPr/>
         </p:nvSpPr>
         <p:spPr>
           <a:xfrm>
-            <a:off x="4328160" y="3474639"/>
-            <a:ext cx="3532632" cy="2066625"/>
+            <a:off x="8613648" y="3419775"/>
+            <a:ext cx="2962656" cy="2853009"/>
           </a:xfrm>
           <a:prstGeom prst="roundRect">
             <a:avLst>
-              <a:gd name="adj" fmla="val 2212"/>
+              <a:gd name="adj" fmla="val 1603"/>
             </a:avLst>
           </a:prstGeom>
           <a:solidFill>
-            <a:srgbClr val="F1F5F9"/>
+            <a:srgbClr val="FFFFFF"/>
           </a:solidFill>
-          <a:ln/>
+          <a:ln w="9525">
+            <a:solidFill>
+              <a:srgbClr val="CBD5E1"/>
+            </a:solidFill>
+            <a:prstDash val="solid"/>
+          </a:ln>
         </p:spPr>
         <p:txBody>
           <a:bodyPr wrap="square" lIns="109728" tIns="0" rIns="109728" bIns="0" rtlCol="0" anchor="ctr"/>
@@ -37040,33 +39329,33 @@
           <a:p>
             <a:pPr algn="l" indent="0" marL="0">
               <a:lnSpc>
-                <a:spcPct val="95000"/>
+                <a:spcPct val="105000"/>
               </a:lnSpc>
               <a:spcAft>
-                <a:spcPts val="200"/>
+                <a:spcPts val="300"/>
               </a:spcAft>
               <a:buNone/>
             </a:pPr>
             <a:r>
               <a:rPr lang="en-US" sz="850" b="1" dirty="0">
                 <a:solidFill>
-                  <a:srgbClr val="267D86"/>
-                </a:solidFill>
-                <a:latin typeface="Noto Sans KR" pitchFamily="34" charset="0"/>
-                <a:ea typeface="Noto Sans KR" pitchFamily="34" charset="-122"/>
-                <a:cs typeface="Noto Sans KR" pitchFamily="34" charset="-120"/>
-              </a:rPr>
-              <a:t>가정 1</a:t>
+                  <a:srgbClr val="182F48"/>
+                </a:solidFill>
+                <a:latin typeface="Noto Sans KR" pitchFamily="34" charset="0"/>
+                <a:ea typeface="Noto Sans KR" pitchFamily="34" charset="-122"/>
+                <a:cs typeface="Noto Sans KR" pitchFamily="34" charset="-120"/>
+              </a:rPr>
+              <a:t>① 직통 번호가 없다</a:t>
             </a:r>
             <a:endParaRPr lang="en-US" sz="850" dirty="0"/>
           </a:p>
           <a:p>
             <a:pPr algn="l" indent="0" marL="0">
               <a:lnSpc>
-                <a:spcPct val="95000"/>
+                <a:spcPct val="105000"/>
               </a:lnSpc>
               <a:spcAft>
-                <a:spcPts val="200"/>
+                <a:spcPts val="300"/>
               </a:spcAft>
               <a:buNone/>
             </a:pPr>
@@ -37079,63 +39368,63 @@
                 <a:ea typeface="Noto Sans KR" pitchFamily="34" charset="-122"/>
                 <a:cs typeface="Noto Sans KR" pitchFamily="34" charset="-120"/>
               </a:rPr>
-              <a:t>국내 신진 브랜드는 SNS나 지인 소개로 찾아 시간이 많이 든다.</a:t>
+              <a:t>바이어 연락처는 비공개이고,</a:t>
             </a:r>
             <a:endParaRPr lang="en-US" sz="850" dirty="0"/>
           </a:p>
           <a:p>
             <a:pPr algn="l" indent="0" marL="0">
               <a:lnSpc>
-                <a:spcPct val="95000"/>
+                <a:spcPct val="105000"/>
               </a:lnSpc>
               <a:spcAft>
-                <a:spcPts val="200"/>
+                <a:spcPts val="300"/>
               </a:spcAft>
               <a:buNone/>
             </a:pPr>
             <a:r>
               <a:rPr lang="en-US" sz="850" dirty="0">
                 <a:solidFill>
-                  <a:srgbClr val="64748B"/>
-                </a:solidFill>
-                <a:latin typeface="Noto Sans KR" pitchFamily="34" charset="0"/>
-                <a:ea typeface="Noto Sans KR" pitchFamily="34" charset="-122"/>
-                <a:cs typeface="Noto Sans KR" pitchFamily="34" charset="-120"/>
-              </a:rPr>
-              <a:t>→ 질문 1 · 3으로 확인하려 했다</a:t>
+                  <a:srgbClr val="334155"/>
+                </a:solidFill>
+                <a:latin typeface="Noto Sans KR" pitchFamily="34" charset="0"/>
+                <a:ea typeface="Noto Sans KR" pitchFamily="34" charset="-122"/>
+                <a:cs typeface="Noto Sans KR" pitchFamily="34" charset="-120"/>
+              </a:rPr>
+              <a:t>공개 번호는 매장·고객센터로 간다.</a:t>
             </a:r>
             <a:endParaRPr lang="en-US" sz="850" dirty="0"/>
           </a:p>
           <a:p>
             <a:pPr algn="l" indent="0" marL="0">
               <a:lnSpc>
-                <a:spcPct val="95000"/>
+                <a:spcPct val="105000"/>
               </a:lnSpc>
               <a:spcAft>
-                <a:spcPts val="200"/>
+                <a:spcPts val="300"/>
               </a:spcAft>
               <a:buNone/>
             </a:pPr>
             <a:r>
               <a:rPr lang="en-US" sz="850" b="1" dirty="0">
                 <a:solidFill>
-                  <a:srgbClr val="267D86"/>
-                </a:solidFill>
-                <a:latin typeface="Noto Sans KR" pitchFamily="34" charset="0"/>
-                <a:ea typeface="Noto Sans KR" pitchFamily="34" charset="-122"/>
-                <a:cs typeface="Noto Sans KR" pitchFamily="34" charset="-120"/>
-              </a:rPr>
-              <a:t>가정 2</a:t>
+                  <a:srgbClr val="182F48"/>
+                </a:solidFill>
+                <a:latin typeface="Noto Sans KR" pitchFamily="34" charset="0"/>
+                <a:ea typeface="Noto Sans KR" pitchFamily="34" charset="-122"/>
+                <a:cs typeface="Noto Sans KR" pitchFamily="34" charset="-120"/>
+              </a:rPr>
+              <a:t>② 고객센터는 주문·배송 전용이다</a:t>
             </a:r>
             <a:endParaRPr lang="en-US" sz="850" dirty="0"/>
           </a:p>
           <a:p>
             <a:pPr algn="l" indent="0" marL="0">
               <a:lnSpc>
-                <a:spcPct val="95000"/>
+                <a:spcPct val="105000"/>
               </a:lnSpc>
               <a:spcAft>
-                <a:spcPts val="200"/>
+                <a:spcPts val="300"/>
               </a:spcAft>
               <a:buNone/>
             </a:pPr>
@@ -37148,63 +39437,86 @@
                 <a:ea typeface="Noto Sans KR" pitchFamily="34" charset="-122"/>
                 <a:cs typeface="Noto Sans KR" pitchFamily="34" charset="-120"/>
               </a:rPr>
-              <a:t>신진 브랜드는 물량·납기·품질이 불안해 들여오기를 망설인다.</a:t>
+              <a:t>두 곳 모두 쇼핑몰 주문·배송 창구로 안내한다.</a:t>
             </a:r>
             <a:endParaRPr lang="en-US" sz="850" dirty="0"/>
           </a:p>
           <a:p>
             <a:pPr algn="l" indent="0" marL="0">
               <a:lnSpc>
-                <a:spcPct val="95000"/>
+                <a:spcPct val="105000"/>
               </a:lnSpc>
               <a:spcAft>
-                <a:spcPts val="200"/>
+                <a:spcPts val="300"/>
               </a:spcAft>
               <a:buNone/>
             </a:pPr>
             <a:r>
+              <a:rPr lang="en-US" sz="850" b="1" dirty="0">
+                <a:solidFill>
+                  <a:srgbClr val="182F48"/>
+                </a:solidFill>
+                <a:latin typeface="Noto Sans KR" pitchFamily="34" charset="0"/>
+                <a:ea typeface="Noto Sans KR" pitchFamily="34" charset="-122"/>
+                <a:cs typeface="Noto Sans KR" pitchFamily="34" charset="-120"/>
+              </a:rPr>
+              <a:t>③ 매장과 바잉은 하는 사람이 다르다</a:t>
+            </a:r>
+            <a:endParaRPr lang="en-US" sz="850" dirty="0"/>
+          </a:p>
+          <a:p>
+            <a:pPr algn="l" indent="0" marL="0">
+              <a:lnSpc>
+                <a:spcPct val="105000"/>
+              </a:lnSpc>
+              <a:spcAft>
+                <a:spcPts val="300"/>
+              </a:spcAft>
+              <a:buNone/>
+            </a:pPr>
+            <a:r>
               <a:rPr lang="en-US" sz="850" dirty="0">
                 <a:solidFill>
-                  <a:srgbClr val="64748B"/>
-                </a:solidFill>
-                <a:latin typeface="Noto Sans KR" pitchFamily="34" charset="0"/>
-                <a:ea typeface="Noto Sans KR" pitchFamily="34" charset="-122"/>
-                <a:cs typeface="Noto Sans KR" pitchFamily="34" charset="-120"/>
-              </a:rPr>
-              <a:t>→ 질문 2 · 6으로 확인하려 했다</a:t>
+                  <a:srgbClr val="334155"/>
+                </a:solidFill>
+                <a:latin typeface="Noto Sans KR" pitchFamily="34" charset="0"/>
+                <a:ea typeface="Noto Sans KR" pitchFamily="34" charset="-122"/>
+                <a:cs typeface="Noto Sans KR" pitchFamily="34" charset="-120"/>
+              </a:rPr>
+              <a:t>매장 직원은 판매를, 선정은 본사가 맡는다.</a:t>
             </a:r>
             <a:endParaRPr lang="en-US" sz="850" dirty="0"/>
           </a:p>
           <a:p>
             <a:pPr algn="l" indent="0" marL="0">
               <a:lnSpc>
-                <a:spcPct val="95000"/>
+                <a:spcPct val="105000"/>
               </a:lnSpc>
               <a:spcAft>
-                <a:spcPts val="200"/>
+                <a:spcPts val="300"/>
               </a:spcAft>
               <a:buNone/>
             </a:pPr>
             <a:r>
               <a:rPr lang="en-US" sz="850" b="1" dirty="0">
                 <a:solidFill>
-                  <a:srgbClr val="267D86"/>
-                </a:solidFill>
-                <a:latin typeface="Noto Sans KR" pitchFamily="34" charset="0"/>
-                <a:ea typeface="Noto Sans KR" pitchFamily="34" charset="-122"/>
-                <a:cs typeface="Noto Sans KR" pitchFamily="34" charset="-120"/>
-              </a:rPr>
-              <a:t>가정 3</a:t>
+                  <a:srgbClr val="182F48"/>
+                </a:solidFill>
+                <a:latin typeface="Noto Sans KR" pitchFamily="34" charset="0"/>
+                <a:ea typeface="Noto Sans KR" pitchFamily="34" charset="-122"/>
+                <a:cs typeface="Noto Sans KR" pitchFamily="34" charset="-120"/>
+              </a:rPr>
+              <a:t>④ 공식 창구는 입점 신청뿐이다</a:t>
             </a:r>
             <a:endParaRPr lang="en-US" sz="850" dirty="0"/>
           </a:p>
           <a:p>
             <a:pPr algn="l" indent="0" marL="0">
               <a:lnSpc>
-                <a:spcPct val="95000"/>
+                <a:spcPct val="105000"/>
               </a:lnSpc>
               <a:spcAft>
-                <a:spcPts val="200"/>
+                <a:spcPts val="300"/>
               </a:spcAft>
               <a:buNone/>
             </a:pPr>
@@ -37217,354 +39529,9 @@
                 <a:ea typeface="Noto Sans KR" pitchFamily="34" charset="-122"/>
                 <a:cs typeface="Noto Sans KR" pitchFamily="34" charset="-120"/>
               </a:rPr>
-              <a:t>한자리 비교와 1:1 상담이 있다면 바이어로 참관한다.</a:t>
+              <a:t>거래가 아닌 질문은 받아 줄 창구가 없다.</a:t>
             </a:r>
             <a:endParaRPr lang="en-US" sz="850" dirty="0"/>
-          </a:p>
-          <a:p>
-            <a:pPr algn="l" indent="0" marL="0">
-              <a:lnSpc>
-                <a:spcPct val="95000"/>
-              </a:lnSpc>
-              <a:spcAft>
-                <a:spcPts val="200"/>
-              </a:spcAft>
-              <a:buNone/>
-            </a:pPr>
-            <a:r>
-              <a:rPr lang="en-US" sz="850" dirty="0">
-                <a:solidFill>
-                  <a:srgbClr val="64748B"/>
-                </a:solidFill>
-                <a:latin typeface="Noto Sans KR" pitchFamily="34" charset="0"/>
-                <a:ea typeface="Noto Sans KR" pitchFamily="34" charset="-122"/>
-                <a:cs typeface="Noto Sans KR" pitchFamily="34" charset="-120"/>
-              </a:rPr>
-              <a:t>→ 질문 4 · 5 · 7로 확인하려 했다</a:t>
-            </a:r>
-            <a:endParaRPr lang="en-US" sz="850" dirty="0"/>
-          </a:p>
-        </p:txBody>
-      </p:sp>
-      <p:sp>
-        <p:nvSpPr>
-          <p:cNvPr id="13" name="준비한 질문"/>
-          <p:cNvSpPr txBox="1"/>
-          <p:nvPr/>
-        </p:nvSpPr>
-        <p:spPr>
-          <a:xfrm>
-            <a:off x="8043672" y="3474639"/>
-            <a:ext cx="3532632" cy="2066625"/>
-          </a:xfrm>
-          <a:prstGeom prst="roundRect">
-            <a:avLst>
-              <a:gd name="adj" fmla="val 2212"/>
-            </a:avLst>
-          </a:prstGeom>
-          <a:solidFill>
-            <a:srgbClr val="E6F2F3"/>
-          </a:solidFill>
-          <a:ln/>
-        </p:spPr>
-        <p:txBody>
-          <a:bodyPr wrap="square" lIns="109728" tIns="0" rIns="109728" bIns="0" rtlCol="0" anchor="ctr"/>
-          <a:lstStyle/>
-          <a:p>
-            <a:pPr algn="l" indent="0" marL="0">
-              <a:lnSpc>
-                <a:spcPct val="95000"/>
-              </a:lnSpc>
-              <a:spcAft>
-                <a:spcPts val="200"/>
-              </a:spcAft>
-              <a:buNone/>
-            </a:pPr>
-            <a:r>
-              <a:rPr lang="en-US" sz="850" b="1" dirty="0">
-                <a:solidFill>
-                  <a:srgbClr val="182F48"/>
-                </a:solidFill>
-                <a:latin typeface="Noto Sans KR" pitchFamily="34" charset="0"/>
-                <a:ea typeface="Noto Sans KR" pitchFamily="34" charset="-122"/>
-                <a:cs typeface="Noto Sans KR" pitchFamily="34" charset="-120"/>
-              </a:rPr>
-              <a:t>① 행사 설명 대본 (약 1분)</a:t>
-            </a:r>
-            <a:endParaRPr lang="en-US" sz="850" dirty="0"/>
-          </a:p>
-          <a:p>
-            <a:pPr algn="l" indent="0" marL="0">
-              <a:lnSpc>
-                <a:spcPct val="95000"/>
-              </a:lnSpc>
-              <a:spcAft>
-                <a:spcPts val="200"/>
-              </a:spcAft>
-              <a:buNone/>
-            </a:pPr>
-            <a:r>
-              <a:rPr lang="en-US" sz="850" dirty="0">
-                <a:solidFill>
-                  <a:srgbClr val="334155"/>
-                </a:solidFill>
-                <a:latin typeface="Noto Sans KR" pitchFamily="34" charset="0"/>
-                <a:ea typeface="Noto Sans KR" pitchFamily="34" charset="-122"/>
-                <a:cs typeface="Noto Sans KR" pitchFamily="34" charset="-120"/>
-              </a:rPr>
-              <a:t>문제 제기 → 행사 개요 (나흘 · 브랜드 90 · 생산 60곳)</a:t>
-            </a:r>
-            <a:endParaRPr lang="en-US" sz="850" dirty="0"/>
-          </a:p>
-          <a:p>
-            <a:pPr algn="l" indent="0" marL="0">
-              <a:lnSpc>
-                <a:spcPct val="95000"/>
-              </a:lnSpc>
-              <a:spcAft>
-                <a:spcPts val="200"/>
-              </a:spcAft>
-              <a:buNone/>
-            </a:pPr>
-            <a:r>
-              <a:rPr lang="en-US" sz="850" b="1" dirty="0">
-                <a:solidFill>
-                  <a:srgbClr val="182F48"/>
-                </a:solidFill>
-                <a:latin typeface="Noto Sans KR" pitchFamily="34" charset="0"/>
-                <a:ea typeface="Noto Sans KR" pitchFamily="34" charset="-122"/>
-                <a:cs typeface="Noto Sans KR" pitchFamily="34" charset="-120"/>
-              </a:rPr>
-              <a:t>② 바이어의 역할과 혜택</a:t>
-            </a:r>
-            <a:endParaRPr lang="en-US" sz="850" dirty="0"/>
-          </a:p>
-          <a:p>
-            <a:pPr algn="l" indent="0" marL="0">
-              <a:lnSpc>
-                <a:spcPct val="95000"/>
-              </a:lnSpc>
-              <a:spcAft>
-                <a:spcPts val="200"/>
-              </a:spcAft>
-              <a:buNone/>
-            </a:pPr>
-            <a:r>
-              <a:rPr lang="en-US" sz="850" dirty="0">
-                <a:solidFill>
-                  <a:srgbClr val="334155"/>
-                </a:solidFill>
-                <a:latin typeface="Noto Sans KR" pitchFamily="34" charset="0"/>
-                <a:ea typeface="Noto Sans KR" pitchFamily="34" charset="-122"/>
-                <a:cs typeface="Noto Sans KR" pitchFamily="34" charset="-120"/>
-              </a:rPr>
-              <a:t>1:1 사전 상담 · 생산 업체 동석 · 시험 결과 · 무료 참관</a:t>
-            </a:r>
-            <a:endParaRPr lang="en-US" sz="850" dirty="0"/>
-          </a:p>
-          <a:p>
-            <a:pPr algn="l" indent="0" marL="0">
-              <a:lnSpc>
-                <a:spcPct val="95000"/>
-              </a:lnSpc>
-              <a:spcAft>
-                <a:spcPts val="200"/>
-              </a:spcAft>
-              <a:buNone/>
-            </a:pPr>
-            <a:r>
-              <a:rPr lang="en-US" sz="850" b="1" dirty="0">
-                <a:solidFill>
-                  <a:srgbClr val="182F48"/>
-                </a:solidFill>
-                <a:latin typeface="Noto Sans KR" pitchFamily="34" charset="0"/>
-                <a:ea typeface="Noto Sans KR" pitchFamily="34" charset="-122"/>
-                <a:cs typeface="Noto Sans KR" pitchFamily="34" charset="-120"/>
-              </a:rPr>
-              <a:t>③ 질문 10개</a:t>
-            </a:r>
-            <a:endParaRPr lang="en-US" sz="850" dirty="0"/>
-          </a:p>
-          <a:p>
-            <a:pPr algn="l" indent="0" marL="0">
-              <a:lnSpc>
-                <a:spcPct val="95000"/>
-              </a:lnSpc>
-              <a:spcAft>
-                <a:spcPts val="200"/>
-              </a:spcAft>
-              <a:buNone/>
-            </a:pPr>
-            <a:r>
-              <a:rPr lang="en-US" sz="850" dirty="0">
-                <a:solidFill>
-                  <a:srgbClr val="334155"/>
-                </a:solidFill>
-                <a:latin typeface="Noto Sans KR" pitchFamily="34" charset="0"/>
-                <a:ea typeface="Noto Sans KR" pitchFamily="34" charset="-122"/>
-                <a:cs typeface="Noto Sans KR" pitchFamily="34" charset="-120"/>
-              </a:rPr>
-              <a:t>지금 겪는 어려움 3 · 원하는 것 3 · 참관 의향과 걸림돌 4</a:t>
-            </a:r>
-            <a:endParaRPr lang="en-US" sz="850" dirty="0"/>
-          </a:p>
-          <a:p>
-            <a:pPr algn="l" indent="0" marL="0">
-              <a:lnSpc>
-                <a:spcPct val="95000"/>
-              </a:lnSpc>
-              <a:spcAft>
-                <a:spcPts val="200"/>
-              </a:spcAft>
-              <a:buNone/>
-            </a:pPr>
-            <a:r>
-              <a:rPr lang="en-US" sz="850" b="1" dirty="0">
-                <a:solidFill>
-                  <a:srgbClr val="182F48"/>
-                </a:solidFill>
-                <a:latin typeface="Noto Sans KR" pitchFamily="34" charset="0"/>
-                <a:ea typeface="Noto Sans KR" pitchFamily="34" charset="-122"/>
-                <a:cs typeface="Noto Sans KR" pitchFamily="34" charset="-120"/>
-              </a:rPr>
-              <a:t>④ 예상 질문과 답 · 통화 기록표</a:t>
-            </a:r>
-            <a:endParaRPr lang="en-US" sz="850" dirty="0"/>
-          </a:p>
-          <a:p>
-            <a:pPr algn="l" indent="0" marL="0">
-              <a:lnSpc>
-                <a:spcPct val="95000"/>
-              </a:lnSpc>
-              <a:spcAft>
-                <a:spcPts val="200"/>
-              </a:spcAft>
-              <a:buNone/>
-            </a:pPr>
-            <a:r>
-              <a:rPr lang="en-US" sz="850" dirty="0">
-                <a:solidFill>
-                  <a:srgbClr val="334155"/>
-                </a:solidFill>
-                <a:latin typeface="Noto Sans KR" pitchFamily="34" charset="0"/>
-                <a:ea typeface="Noto Sans KR" pitchFamily="34" charset="-122"/>
-                <a:cs typeface="Noto Sans KR" pitchFamily="34" charset="-120"/>
-              </a:rPr>
-              <a:t>실제 행사인지 · 비용 · 참가 브랜드 등 4문항과 기록표</a:t>
-            </a:r>
-            <a:endParaRPr lang="en-US" sz="850" dirty="0"/>
-          </a:p>
-        </p:txBody>
-      </p:sp>
-      <p:sp>
-        <p:nvSpPr>
-          <p:cNvPr id="14" name="준비와 결과"/>
-          <p:cNvSpPr txBox="1"/>
-          <p:nvPr/>
-        </p:nvSpPr>
-        <p:spPr>
-          <a:xfrm>
-            <a:off x="612648" y="5650992"/>
-            <a:ext cx="10963656" cy="676656"/>
-          </a:xfrm>
-          <a:prstGeom prst="roundRect">
-            <a:avLst>
-              <a:gd name="adj" fmla="val 6757"/>
-            </a:avLst>
-          </a:prstGeom>
-          <a:solidFill>
-            <a:srgbClr val="182F48"/>
-          </a:solidFill>
-          <a:ln/>
-        </p:spPr>
-        <p:txBody>
-          <a:bodyPr wrap="square" lIns="146304" tIns="0" rIns="146304" bIns="0" rtlCol="0" anchor="ctr"/>
-          <a:lstStyle/>
-          <a:p>
-            <a:pPr algn="l" indent="0" marL="0">
-              <a:lnSpc>
-                <a:spcPct val="100000"/>
-              </a:lnSpc>
-              <a:spcAft>
-                <a:spcPts val="400"/>
-              </a:spcAft>
-              <a:buNone/>
-            </a:pPr>
-            <a:r>
-              <a:rPr lang="en-US" sz="900" b="1" dirty="0">
-                <a:solidFill>
-                  <a:srgbClr val="9FE0E6"/>
-                </a:solidFill>
-                <a:latin typeface="Noto Sans KR" pitchFamily="34" charset="0"/>
-                <a:ea typeface="Noto Sans KR" pitchFamily="34" charset="-122"/>
-                <a:cs typeface="Noto Sans KR" pitchFamily="34" charset="-120"/>
-              </a:rPr>
-              <a:t>준비한 것  </a:t>
-            </a:r>
-            <a:pPr algn="l" indent="0" marL="0">
-              <a:lnSpc>
-                <a:spcPct val="100000"/>
-              </a:lnSpc>
-              <a:spcAft>
-                <a:spcPts val="400"/>
-              </a:spcAft>
-              <a:buNone/>
-            </a:pPr>
-            <a:r>
-              <a:rPr lang="en-US" sz="900" b="1" dirty="0">
-                <a:solidFill>
-                  <a:srgbClr val="FFFFFF"/>
-                </a:solidFill>
-                <a:latin typeface="Noto Sans KR" pitchFamily="34" charset="0"/>
-                <a:ea typeface="Noto Sans KR" pitchFamily="34" charset="-122"/>
-                <a:cs typeface="Noto Sans KR" pitchFamily="34" charset="-120"/>
-              </a:rPr>
-              <a:t>통화 대상 선정 → 사전 가정 3개 → 행사 설명 대본 → 질문 10개 → 예상 질문과 답 → 통화 기록표</a:t>
-            </a:r>
-            <a:endParaRPr lang="en-US" sz="900" dirty="0"/>
-          </a:p>
-          <a:p>
-            <a:pPr algn="l" indent="0" marL="0">
-              <a:lnSpc>
-                <a:spcPct val="100000"/>
-              </a:lnSpc>
-              <a:spcAft>
-                <a:spcPts val="400"/>
-              </a:spcAft>
-              <a:buNone/>
-            </a:pPr>
-            <a:r>
-              <a:rPr lang="en-US" sz="900" b="1" dirty="0">
-                <a:solidFill>
-                  <a:srgbClr val="9FE0E6"/>
-                </a:solidFill>
-                <a:latin typeface="Noto Sans KR" pitchFamily="34" charset="0"/>
-                <a:ea typeface="Noto Sans KR" pitchFamily="34" charset="-122"/>
-                <a:cs typeface="Noto Sans KR" pitchFamily="34" charset="-120"/>
-              </a:rPr>
-              <a:t>결과  </a:t>
-            </a:r>
-            <a:pPr algn="l" indent="0" marL="0">
-              <a:lnSpc>
-                <a:spcPct val="100000"/>
-              </a:lnSpc>
-              <a:spcAft>
-                <a:spcPts val="400"/>
-              </a:spcAft>
-              <a:buNone/>
-            </a:pPr>
-            <a:r>
-              <a:rPr lang="en-US" sz="900" b="1" dirty="0">
-                <a:solidFill>
-                  <a:srgbClr val="FFFFFF"/>
-                </a:solidFill>
-                <a:latin typeface="Noto Sans KR" pitchFamily="34" charset="0"/>
-                <a:ea typeface="Noto Sans KR" pitchFamily="34" charset="-122"/>
-                <a:cs typeface="Noto Sans KR" pitchFamily="34" charset="-120"/>
-              </a:rPr>
-              <a:t>두 곳 모두 매장 직원 · 고객센터 단계에서 막혀, 준비한 질문을 실무 바이어에게 묻지 못했다.</a:t>
-            </a:r>
-            <a:endParaRPr lang="en-US" sz="900" dirty="0"/>
           </a:p>
         </p:txBody>
       </p:sp>

--- a/GFF_SEOUL_2027_전시산업론_중간과제.pptx
+++ b/GFF_SEOUL_2027_전시산업론_중간과제.pptx
@@ -36562,7 +36562,7 @@
                           <a:ea typeface="Noto Sans KR" pitchFamily="34" charset="-122"/>
                           <a:cs typeface="Noto Sans KR" pitchFamily="34" charset="-120"/>
                         </a:rPr>
-                        <a:t>아웃도어 편집숍 · 서울 마포구</a:t>
+                        <a:t>아웃도어 편집숍 · 제주 협재점</a:t>
                       </a:r>
                       <a:endParaRPr lang="en-US" sz="800" dirty="0">
                         <a:latin typeface="Noto Sans KR" charset="0"/>
@@ -36627,7 +36627,7 @@
                           <a:ea typeface="Noto Sans KR" pitchFamily="34" charset="-122"/>
                           <a:cs typeface="Noto Sans KR" pitchFamily="34" charset="-120"/>
                         </a:rPr>
-                        <a:t>홍대점 매장  02-337-3907</a:t>
+                        <a:t>협재점 (제주시 한림읍)</a:t>
                       </a:r>
                       <a:endParaRPr lang="en-US" sz="800" dirty="0">
                         <a:latin typeface="Noto Sans KR" charset="0"/>
@@ -36713,7 +36713,7 @@
                           <a:ea typeface="Noto Sans KR" pitchFamily="34" charset="-122"/>
                           <a:cs typeface="Noto Sans KR" pitchFamily="34" charset="-120"/>
                         </a:rPr>
-                        <a:t>10월 28일(수)</a:t>
+                        <a:t>10월 27일(화)</a:t>
                       </a:r>
                       <a:endParaRPr lang="en-US" sz="800" dirty="0">
                         <a:latin typeface="Noto Sans KR" charset="0"/>
@@ -36734,7 +36734,7 @@
                           <a:ea typeface="Noto Sans KR" pitchFamily="34" charset="-122"/>
                           <a:cs typeface="Noto Sans KR" pitchFamily="34" charset="-120"/>
                         </a:rPr>
-                        <a:t>16:49</a:t>
+                        <a:t>16:00</a:t>
                       </a:r>
                       <a:endParaRPr lang="en-US" sz="800" dirty="0">
                         <a:latin typeface="Noto Sans KR" charset="0"/>

--- a/GFF_SEOUL_2027_전시산업론_중간과제.pptx
+++ b/GFF_SEOUL_2027_전시산업론_중간과제.pptx
@@ -36627,7 +36627,7 @@
                           <a:ea typeface="Noto Sans KR" pitchFamily="34" charset="-122"/>
                           <a:cs typeface="Noto Sans KR" pitchFamily="34" charset="-120"/>
                         </a:rPr>
-                        <a:t>협재점 (제주시 한림읍)</a:t>
+                        <a:t>협재점 매장  070-4257-9563</a:t>
                       </a:r>
                       <a:endParaRPr lang="en-US" sz="800" dirty="0">
                         <a:latin typeface="Noto Sans KR" charset="0"/>
